--- a/uganda-p7-mvp/p7_t1_christian_religious_education_0101/p7_t1_christian_religious_education_0101.pptx
+++ b/uganda-p7-mvp/p7_t1_christian_religious_education_0101/p7_t1_christian_religious_education_0101.pptx
@@ -11,6 +11,8 @@
     <p:sldId id="259" r:id="rId10"/>
     <p:sldId id="260" r:id="rId11"/>
     <p:sldId id="261" r:id="rId12"/>
+    <p:sldId id="262" r:id="rId13"/>
+    <p:sldId id="263" r:id="rId14"/>
   </p:sldIdLst>
   <p:sldSz cx="12191695" cy="6858000" type="screen4x3"/>
   <p:notesSz cx="6858000" cy="9144000"/>
@@ -3209,7 +3211,7 @@
           <a:p>
             <a:r>
               <a:rPr sz="3000" b="1"/>
-              <a:t>What is a Spirit?</a:t>
+              <a:t>Learning goal</a:t>
             </a:r>
           </a:p>
         </p:txBody>
@@ -3243,7 +3245,7 @@
               <a:defRPr sz="2200"/>
             </a:pPr>
             <a:r>
-              <a:t>A spirit is invisible.</a:t>
+              <a:t>By the end of the lesson, learners will be able to define the Holy Spirit and</a:t>
             </a:r>
           </a:p>
           <a:p>
@@ -3254,7 +3256,7 @@
               <a:defRPr sz="2200"/>
             </a:pPr>
             <a:r>
-              <a:t>We see the effects of a spirit, like we see wind moving trees.</a:t>
+              <a:t>recognize Him as the third person of the Trinity.</a:t>
             </a:r>
           </a:p>
           <a:p>
@@ -3265,7 +3267,18 @@
               <a:defRPr sz="2200"/>
             </a:pPr>
             <a:r>
-              <a:t>The Spirit is the "breath" of God.</a:t>
+              <a:t>Key words: Vocabulary: Trinity, Spirit, Person, Godhead.</a:t>
+            </a:r>
+          </a:p>
+          <a:p>
+            <a:pPr>
+              <a:spcAft>
+                <a:spcPts val="800"/>
+              </a:spcAft>
+              <a:defRPr sz="2200"/>
+            </a:pPr>
+            <a:r>
+              <a:t>Lesson focus: Christians and the Holy Spirit (Topic 1: Enriched in the Spirit)</a:t>
             </a:r>
           </a:p>
         </p:txBody>
@@ -3312,7 +3325,7 @@
           <a:p>
             <a:r>
               <a:rPr sz="3000" b="1"/>
-              <a:t>Defining the Holy Spirit</a:t>
+              <a:t>What is a Spirit?</a:t>
             </a:r>
           </a:p>
         </p:txBody>
@@ -3346,7 +3359,7 @@
               <a:defRPr sz="2200"/>
             </a:pPr>
             <a:r>
-              <a:t>The Holy Spirit is God in us.</a:t>
+              <a:t>A spirit is invisible.</a:t>
             </a:r>
           </a:p>
           <a:p>
@@ -3357,7 +3370,7 @@
               <a:defRPr sz="2200"/>
             </a:pPr>
             <a:r>
-              <a:t>He is our greatest gift.</a:t>
+              <a:t>We see the effects of a spirit, like we see wind moving trees.</a:t>
             </a:r>
           </a:p>
           <a:p>
@@ -3368,7 +3381,7 @@
               <a:defRPr sz="2200"/>
             </a:pPr>
             <a:r>
-              <a:t>He is the Spirit of truth and love.</a:t>
+              <a:t>The Spirit is the "breath" of God.</a:t>
             </a:r>
           </a:p>
         </p:txBody>
@@ -3415,7 +3428,7 @@
           <a:p>
             <a:r>
               <a:rPr sz="3000" b="1"/>
-              <a:t>The Holy Trinity</a:t>
+              <a:t>Defining the Holy Spirit</a:t>
             </a:r>
           </a:p>
         </p:txBody>
@@ -3449,7 +3462,7 @@
               <a:defRPr sz="2200"/>
             </a:pPr>
             <a:r>
-              <a:t>Trinity means "Three in One."</a:t>
+              <a:t>The Holy Spirit is God in us.</a:t>
             </a:r>
           </a:p>
           <a:p>
@@ -3460,7 +3473,7 @@
               <a:defRPr sz="2200"/>
             </a:pPr>
             <a:r>
-              <a:t>1st Person: God the Father (Creator).</a:t>
+              <a:t>He is our greatest gift.</a:t>
             </a:r>
           </a:p>
           <a:p>
@@ -3471,18 +3484,7 @@
               <a:defRPr sz="2200"/>
             </a:pPr>
             <a:r>
-              <a:t>2nd Person: God the Son (Redeemer).</a:t>
-            </a:r>
-          </a:p>
-          <a:p>
-            <a:pPr>
-              <a:spcAft>
-                <a:spcPts val="800"/>
-              </a:spcAft>
-              <a:defRPr sz="2200"/>
-            </a:pPr>
-            <a:r>
-              <a:t>3rd Person: God the Holy Spirit (Helper).</a:t>
+              <a:t>He is the Spirit of truth and love.</a:t>
             </a:r>
           </a:p>
         </p:txBody>
@@ -3529,7 +3531,7 @@
           <a:p>
             <a:r>
               <a:rPr sz="3000" b="1"/>
-              <a:t>One God, Three Persons</a:t>
+              <a:t>The Holy Trinity</a:t>
             </a:r>
           </a:p>
         </p:txBody>
@@ -3563,7 +3565,7 @@
               <a:defRPr sz="2200"/>
             </a:pPr>
             <a:r>
-              <a:t>All three persons are equal.</a:t>
+              <a:t>Trinity means "Three in One."</a:t>
             </a:r>
           </a:p>
           <a:p>
@@ -3574,7 +3576,7 @@
               <a:defRPr sz="2200"/>
             </a:pPr>
             <a:r>
-              <a:t>They work together in unity.</a:t>
+              <a:t>1st Person: God the Father (Creator).</a:t>
             </a:r>
           </a:p>
           <a:p>
@@ -3585,7 +3587,18 @@
               <a:defRPr sz="2200"/>
             </a:pPr>
             <a:r>
-              <a:t>The Holy Spirit is fully God.</a:t>
+              <a:t>2nd Person: God the Son (Redeemer).</a:t>
+            </a:r>
+          </a:p>
+          <a:p>
+            <a:pPr>
+              <a:spcAft>
+                <a:spcPts val="800"/>
+              </a:spcAft>
+              <a:defRPr sz="2200"/>
+            </a:pPr>
+            <a:r>
+              <a:t>3rd Person: God the Holy Spirit (Helper).</a:t>
             </a:r>
           </a:p>
         </p:txBody>
@@ -3632,7 +3645,7 @@
           <a:p>
             <a:r>
               <a:rPr sz="3000" b="1"/>
-              <a:t>Lesson Summary</a:t>
+              <a:t>One God, Three Persons</a:t>
             </a:r>
           </a:p>
         </p:txBody>
@@ -3666,7 +3679,7 @@
               <a:defRPr sz="2200"/>
             </a:pPr>
             <a:r>
-              <a:t>Definition of Holy Spirit.</a:t>
+              <a:t>All three persons are equal.</a:t>
             </a:r>
           </a:p>
           <a:p>
@@ -3677,7 +3690,7 @@
               <a:defRPr sz="2200"/>
             </a:pPr>
             <a:r>
-              <a:t>The Trinity Structure.</a:t>
+              <a:t>They work together in unity.</a:t>
             </a:r>
           </a:p>
           <a:p>
@@ -3688,7 +3701,235 @@
               <a:defRPr sz="2200"/>
             </a:pPr>
             <a:r>
+              <a:t>The Holy Spirit is fully God.</a:t>
+            </a:r>
+          </a:p>
+        </p:txBody>
+      </p:sp>
+    </p:spTree>
+  </p:cSld>
+  <p:clrMapOvr>
+    <a:masterClrMapping/>
+  </p:clrMapOvr>
+</p:sld>
+</file>
+
+<file path=ppt/slides/slide7.xml><?xml version="1.0" encoding="utf-8"?>
+<p:sld xmlns:a="http://schemas.openxmlformats.org/drawingml/2006/main" xmlns:p="http://schemas.openxmlformats.org/presentationml/2006/main" xmlns:r="http://schemas.openxmlformats.org/officeDocument/2006/relationships">
+  <p:cSld>
+    <p:spTree>
+      <p:nvGrpSpPr>
+        <p:cNvPr id="1" name=""/>
+        <p:cNvGrpSpPr/>
+        <p:nvPr/>
+      </p:nvGrpSpPr>
+      <p:grpSpPr/>
+      <p:sp>
+        <p:nvSpPr>
+          <p:cNvPr id="2" name="TextBox 1"/>
+          <p:cNvSpPr txBox="1"/>
+          <p:nvPr/>
+        </p:nvSpPr>
+        <p:spPr>
+          <a:xfrm>
+            <a:off x="548640" y="320040"/>
+            <a:ext cx="11064240" cy="777240"/>
+          </a:xfrm>
+          <a:prstGeom prst="rect">
+            <a:avLst/>
+          </a:prstGeom>
+          <a:noFill/>
+        </p:spPr>
+        <p:txBody>
+          <a:bodyPr wrap="none">
+            <a:spAutoFit/>
+          </a:bodyPr>
+          <a:lstStyle/>
+          <a:p>
+            <a:r>
+              <a:rPr sz="3000" b="1"/>
+              <a:t>Lesson Summary</a:t>
+            </a:r>
+          </a:p>
+        </p:txBody>
+      </p:sp>
+      <p:sp>
+        <p:nvSpPr>
+          <p:cNvPr id="3" name="TextBox 2"/>
+          <p:cNvSpPr txBox="1"/>
+          <p:nvPr/>
+        </p:nvSpPr>
+        <p:spPr>
+          <a:xfrm>
+            <a:off x="868680" y="1417320"/>
+            <a:ext cx="10424160" cy="4892040"/>
+          </a:xfrm>
+          <a:prstGeom prst="rect">
+            <a:avLst/>
+          </a:prstGeom>
+          <a:noFill/>
+        </p:spPr>
+        <p:txBody>
+          <a:bodyPr wrap="square">
+            <a:spAutoFit/>
+          </a:bodyPr>
+          <a:lstStyle/>
+          <a:p>
+            <a:pPr>
+              <a:spcAft>
+                <a:spcPts val="800"/>
+              </a:spcAft>
+              <a:defRPr sz="2200"/>
+            </a:pPr>
+            <a:r>
+              <a:t>Definition of Holy Spirit.</a:t>
+            </a:r>
+          </a:p>
+          <a:p>
+            <a:pPr>
+              <a:spcAft>
+                <a:spcPts val="800"/>
+              </a:spcAft>
+              <a:defRPr sz="2200"/>
+            </a:pPr>
+            <a:r>
+              <a:t>The Trinity Structure.</a:t>
+            </a:r>
+          </a:p>
+          <a:p>
+            <a:pPr>
+              <a:spcAft>
+                <a:spcPts val="800"/>
+              </a:spcAft>
+              <a:defRPr sz="2200"/>
+            </a:pPr>
+            <a:r>
               <a:t>Our relationship with the Spirit.</a:t>
+            </a:r>
+          </a:p>
+        </p:txBody>
+      </p:sp>
+    </p:spTree>
+  </p:cSld>
+  <p:clrMapOvr>
+    <a:masterClrMapping/>
+  </p:clrMapOvr>
+</p:sld>
+</file>
+
+<file path=ppt/slides/slide8.xml><?xml version="1.0" encoding="utf-8"?>
+<p:sld xmlns:a="http://schemas.openxmlformats.org/drawingml/2006/main" xmlns:p="http://schemas.openxmlformats.org/presentationml/2006/main" xmlns:r="http://schemas.openxmlformats.org/officeDocument/2006/relationships">
+  <p:cSld>
+    <p:spTree>
+      <p:nvGrpSpPr>
+        <p:cNvPr id="1" name=""/>
+        <p:cNvGrpSpPr/>
+        <p:nvPr/>
+      </p:nvGrpSpPr>
+      <p:grpSpPr/>
+      <p:sp>
+        <p:nvSpPr>
+          <p:cNvPr id="2" name="TextBox 1"/>
+          <p:cNvSpPr txBox="1"/>
+          <p:nvPr/>
+        </p:nvSpPr>
+        <p:spPr>
+          <a:xfrm>
+            <a:off x="548640" y="320040"/>
+            <a:ext cx="11064240" cy="777240"/>
+          </a:xfrm>
+          <a:prstGeom prst="rect">
+            <a:avLst/>
+          </a:prstGeom>
+          <a:noFill/>
+        </p:spPr>
+        <p:txBody>
+          <a:bodyPr wrap="none">
+            <a:spAutoFit/>
+          </a:bodyPr>
+          <a:lstStyle/>
+          <a:p>
+            <a:r>
+              <a:rPr sz="3000" b="1"/>
+              <a:t>Check your understanding</a:t>
+            </a:r>
+          </a:p>
+        </p:txBody>
+      </p:sp>
+      <p:sp>
+        <p:nvSpPr>
+          <p:cNvPr id="3" name="TextBox 2"/>
+          <p:cNvSpPr txBox="1"/>
+          <p:nvPr/>
+        </p:nvSpPr>
+        <p:spPr>
+          <a:xfrm>
+            <a:off x="868680" y="1417320"/>
+            <a:ext cx="10424160" cy="4892040"/>
+          </a:xfrm>
+          <a:prstGeom prst="rect">
+            <a:avLst/>
+          </a:prstGeom>
+          <a:noFill/>
+        </p:spPr>
+        <p:txBody>
+          <a:bodyPr wrap="square">
+            <a:spAutoFit/>
+          </a:bodyPr>
+          <a:lstStyle/>
+          <a:p>
+            <a:pPr>
+              <a:spcAft>
+                <a:spcPts val="800"/>
+              </a:spcAft>
+              <a:defRPr sz="2200"/>
+            </a:pPr>
+            <a:r>
+              <a:t>How do you know the wind is there?</a:t>
+            </a:r>
+          </a:p>
+          <a:p>
+            <a:pPr>
+              <a:spcAft>
+                <a:spcPts val="800"/>
+              </a:spcAft>
+              <a:defRPr sz="2200"/>
+            </a:pPr>
+            <a:r>
+              <a:t>Is God visible to our physical eyes?</a:t>
+            </a:r>
+          </a:p>
+          <a:p>
+            <a:pPr>
+              <a:spcAft>
+                <a:spcPts val="800"/>
+              </a:spcAft>
+              <a:defRPr sz="2200"/>
+            </a:pPr>
+            <a:r>
+              <a:t>Who is the Holy Spirit?</a:t>
+            </a:r>
+          </a:p>
+          <a:p>
+            <a:pPr>
+              <a:spcAft>
+                <a:spcPts val="800"/>
+              </a:spcAft>
+              <a:defRPr sz="2200"/>
+            </a:pPr>
+            <a:r>
+              <a:t>Why is He called the greatest gift?</a:t>
+            </a:r>
+          </a:p>
+          <a:p>
+            <a:pPr>
+              <a:spcAft>
+                <a:spcPts val="800"/>
+              </a:spcAft>
+              <a:defRPr sz="2200"/>
+            </a:pPr>
+            <a:r>
+              <a:t>Write one answer clearly in your notebook.</a:t>
             </a:r>
           </a:p>
         </p:txBody>

--- a/uganda-p7-mvp/p7_t1_christian_religious_education_0101/p7_t1_christian_religious_education_0101.pptx
+++ b/uganda-p7-mvp/p7_t1_christian_religious_education_0101/p7_t1_christian_religious_education_0101.pptx
@@ -3097,14 +3097,100 @@
       <p:grpSpPr/>
       <p:sp>
         <p:nvSpPr>
-          <p:cNvPr id="2" name="TextBox 1"/>
+          <p:cNvPr id="2" name="Rectangle 1"/>
+          <p:cNvSpPr/>
+          <p:nvPr/>
+        </p:nvSpPr>
+        <p:spPr>
+          <a:xfrm>
+            <a:off x="0" y="0"/>
+            <a:ext cx="12191695" cy="914400"/>
+          </a:xfrm>
+          <a:prstGeom prst="rect">
+            <a:avLst/>
+          </a:prstGeom>
+          <a:solidFill>
+            <a:srgbClr val="2563EB"/>
+          </a:solidFill>
+          <a:ln>
+            <a:noFill/>
+          </a:ln>
+        </p:spPr>
+        <p:style>
+          <a:lnRef idx="1">
+            <a:schemeClr val="accent1"/>
+          </a:lnRef>
+          <a:fillRef idx="3">
+            <a:schemeClr val="accent1"/>
+          </a:fillRef>
+          <a:effectRef idx="2">
+            <a:schemeClr val="accent1"/>
+          </a:effectRef>
+          <a:fontRef idx="minor">
+            <a:schemeClr val="lt1"/>
+          </a:fontRef>
+        </p:style>
+        <p:txBody>
+          <a:bodyPr rtlCol="0" anchor="ctr"/>
+          <a:lstStyle/>
+          <a:p>
+            <a:pPr algn="ctr"/>
+          </a:p>
+        </p:txBody>
+      </p:sp>
+      <p:sp>
+        <p:nvSpPr>
+          <p:cNvPr id="3" name="Rectangle 2"/>
+          <p:cNvSpPr/>
+          <p:nvPr/>
+        </p:nvSpPr>
+        <p:spPr>
+          <a:xfrm>
+            <a:off x="0" y="914400"/>
+            <a:ext cx="164592" cy="5943600"/>
+          </a:xfrm>
+          <a:prstGeom prst="rect">
+            <a:avLst/>
+          </a:prstGeom>
+          <a:solidFill>
+            <a:srgbClr val="2563EB"/>
+          </a:solidFill>
+          <a:ln>
+            <a:noFill/>
+          </a:ln>
+        </p:spPr>
+        <p:style>
+          <a:lnRef idx="1">
+            <a:schemeClr val="accent1"/>
+          </a:lnRef>
+          <a:fillRef idx="3">
+            <a:schemeClr val="accent1"/>
+          </a:fillRef>
+          <a:effectRef idx="2">
+            <a:schemeClr val="accent1"/>
+          </a:effectRef>
+          <a:fontRef idx="minor">
+            <a:schemeClr val="lt1"/>
+          </a:fontRef>
+        </p:style>
+        <p:txBody>
+          <a:bodyPr rtlCol="0" anchor="ctr"/>
+          <a:lstStyle/>
+          <a:p>
+            <a:pPr algn="ctr"/>
+          </a:p>
+        </p:txBody>
+      </p:sp>
+      <p:sp>
+        <p:nvSpPr>
+          <p:cNvPr id="4" name="TextBox 3"/>
           <p:cNvSpPr txBox="1"/>
           <p:nvPr/>
         </p:nvSpPr>
         <p:spPr>
           <a:xfrm>
-            <a:off x="731520" y="1097280"/>
-            <a:ext cx="10698480" cy="1280160"/>
+            <a:off x="594360" y="246888"/>
+            <a:ext cx="2743200" cy="320040"/>
           </a:xfrm>
           <a:prstGeom prst="rect">
             <a:avLst/>
@@ -3112,29 +3198,32 @@
           <a:noFill/>
         </p:spPr>
         <p:txBody>
-          <a:bodyPr wrap="none">
+          <a:bodyPr wrap="square">
             <a:spAutoFit/>
           </a:bodyPr>
           <a:lstStyle/>
           <a:p>
-            <a:pPr algn="ctr"/>
-            <a:r>
-              <a:rPr sz="3400" b="1"/>
-              <a:t>Christians and the Holy Spirit (Topic 1: Enriched in the Spirit)</a:t>
-            </a:r>
-          </a:p>
-        </p:txBody>
-      </p:sp>
-      <p:sp>
-        <p:nvSpPr>
-          <p:cNvPr id="3" name="TextBox 2"/>
+            <a:r>
+              <a:rPr sz="1300" b="1">
+                <a:solidFill>
+                  <a:srgbClr val="FFFFFF"/>
+                </a:solidFill>
+              </a:rPr>
+              <a:t>LESSON START</a:t>
+            </a:r>
+          </a:p>
+        </p:txBody>
+      </p:sp>
+      <p:sp>
+        <p:nvSpPr>
+          <p:cNvPr id="5" name="TextBox 4"/>
           <p:cNvSpPr txBox="1"/>
           <p:nvPr/>
         </p:nvSpPr>
         <p:spPr>
           <a:xfrm>
-            <a:off x="1463040" y="2743200"/>
-            <a:ext cx="9326880" cy="1828800"/>
+            <a:off x="8412480" y="246888"/>
+            <a:ext cx="3200400" cy="320040"/>
           </a:xfrm>
           <a:prstGeom prst="rect">
             <a:avLst/>
@@ -3142,29 +3231,200 @@
           <a:noFill/>
         </p:spPr>
         <p:txBody>
-          <a:bodyPr wrap="none">
+          <a:bodyPr wrap="square">
             <a:spAutoFit/>
           </a:bodyPr>
           <a:lstStyle/>
           <a:p>
-            <a:pPr algn="ctr"/>
-            <a:r>
-              <a:rPr sz="2200"/>
+            <a:pPr algn="r"/>
+            <a:r>
+              <a:rPr sz="1100" b="0">
+                <a:solidFill>
+                  <a:srgbClr val="FFFFFF"/>
+                </a:solidFill>
+              </a:rPr>
+              <a:t>p7_t1_christian_religious_education_0101</a:t>
+            </a:r>
+          </a:p>
+        </p:txBody>
+      </p:sp>
+      <p:sp>
+        <p:nvSpPr>
+          <p:cNvPr id="6" name="TextBox 5"/>
+          <p:cNvSpPr txBox="1"/>
+          <p:nvPr/>
+        </p:nvSpPr>
+        <p:spPr>
+          <a:xfrm>
+            <a:off x="822960" y="1325880"/>
+            <a:ext cx="10698480" cy="1005840"/>
+          </a:xfrm>
+          <a:prstGeom prst="rect">
+            <a:avLst/>
+          </a:prstGeom>
+          <a:noFill/>
+        </p:spPr>
+        <p:txBody>
+          <a:bodyPr wrap="square">
+            <a:spAutoFit/>
+          </a:bodyPr>
+          <a:lstStyle/>
+          <a:p>
+            <a:pPr algn="ctr"/>
+            <a:r>
+              <a:rPr sz="3400" b="1">
+                <a:solidFill>
+                  <a:srgbClr val="1A202C"/>
+                </a:solidFill>
+              </a:rPr>
+              <a:t>Christians and the Holy Spirit (Topic 1: Enriched in the Spirit)</a:t>
+            </a:r>
+          </a:p>
+        </p:txBody>
+      </p:sp>
+      <p:sp>
+        <p:nvSpPr>
+          <p:cNvPr id="7" name="Rounded Rectangle 6"/>
+          <p:cNvSpPr/>
+          <p:nvPr/>
+        </p:nvSpPr>
+        <p:spPr>
+          <a:xfrm>
+            <a:off x="1143000" y="2743200"/>
+            <a:ext cx="9921240" cy="2194560"/>
+          </a:xfrm>
+          <a:prstGeom prst="roundRect">
+            <a:avLst/>
+          </a:prstGeom>
+          <a:solidFill>
+            <a:srgbClr val="EFF6FF"/>
+          </a:solidFill>
+          <a:ln w="15240">
+            <a:solidFill>
+              <a:srgbClr val="2563EB"/>
+            </a:solidFill>
+          </a:ln>
+        </p:spPr>
+        <p:style>
+          <a:lnRef idx="1">
+            <a:schemeClr val="accent1"/>
+          </a:lnRef>
+          <a:fillRef idx="3">
+            <a:schemeClr val="accent1"/>
+          </a:fillRef>
+          <a:effectRef idx="2">
+            <a:schemeClr val="accent1"/>
+          </a:effectRef>
+          <a:fontRef idx="minor">
+            <a:schemeClr val="lt1"/>
+          </a:fontRef>
+        </p:style>
+        <p:txBody>
+          <a:bodyPr rtlCol="0" anchor="ctr"/>
+          <a:lstStyle/>
+          <a:p>
+            <a:pPr algn="ctr"/>
+          </a:p>
+        </p:txBody>
+      </p:sp>
+      <p:sp>
+        <p:nvSpPr>
+          <p:cNvPr id="8" name="TextBox 7"/>
+          <p:cNvSpPr txBox="1"/>
+          <p:nvPr/>
+        </p:nvSpPr>
+        <p:spPr>
+          <a:xfrm>
+            <a:off x="1508760" y="2999232"/>
+            <a:ext cx="9189720" cy="411480"/>
+          </a:xfrm>
+          <a:prstGeom prst="rect">
+            <a:avLst/>
+          </a:prstGeom>
+          <a:noFill/>
+        </p:spPr>
+        <p:txBody>
+          <a:bodyPr wrap="square">
+            <a:spAutoFit/>
+          </a:bodyPr>
+          <a:lstStyle/>
+          <a:p>
+            <a:pPr algn="ctr"/>
+            <a:r>
+              <a:rPr sz="1800" b="1">
+                <a:solidFill>
+                  <a:srgbClr val="2563EB"/>
+                </a:solidFill>
+              </a:rPr>
               <a:t>Christian Religious Education</a:t>
             </a:r>
           </a:p>
-          <a:p>
-            <a:pPr algn="ctr"/>
-            <a:r>
-              <a:rPr sz="2200"/>
-              <a:t>By the end of the lesson, learners will be able to define the Holy Spirit and</a:t>
-            </a:r>
-          </a:p>
-          <a:p>
-            <a:pPr algn="ctr"/>
-            <a:r>
-              <a:rPr sz="2200"/>
-              <a:t>recognize Him as the third person of the Trinity.</a:t>
+        </p:txBody>
+      </p:sp>
+      <p:sp>
+        <p:nvSpPr>
+          <p:cNvPr id="9" name="TextBox 8"/>
+          <p:cNvSpPr txBox="1"/>
+          <p:nvPr/>
+        </p:nvSpPr>
+        <p:spPr>
+          <a:xfrm>
+            <a:off x="1508760" y="3611880"/>
+            <a:ext cx="9189720" cy="914400"/>
+          </a:xfrm>
+          <a:prstGeom prst="rect">
+            <a:avLst/>
+          </a:prstGeom>
+          <a:noFill/>
+        </p:spPr>
+        <p:txBody>
+          <a:bodyPr wrap="square">
+            <a:spAutoFit/>
+          </a:bodyPr>
+          <a:lstStyle/>
+          <a:p>
+            <a:pPr algn="ctr"/>
+            <a:r>
+              <a:rPr sz="2500" b="1">
+                <a:solidFill>
+                  <a:srgbClr val="1A202C"/>
+                </a:solidFill>
+              </a:rPr>
+              <a:t>Big question: Can you see the wind?</a:t>
+            </a:r>
+          </a:p>
+        </p:txBody>
+      </p:sp>
+      <p:sp>
+        <p:nvSpPr>
+          <p:cNvPr id="10" name="TextBox 9"/>
+          <p:cNvSpPr txBox="1"/>
+          <p:nvPr/>
+        </p:nvSpPr>
+        <p:spPr>
+          <a:xfrm>
+            <a:off x="1508760" y="4617720"/>
+            <a:ext cx="9189720" cy="320040"/>
+          </a:xfrm>
+          <a:prstGeom prst="rect">
+            <a:avLst/>
+          </a:prstGeom>
+          <a:noFill/>
+        </p:spPr>
+        <p:txBody>
+          <a:bodyPr wrap="square">
+            <a:spAutoFit/>
+          </a:bodyPr>
+          <a:lstStyle/>
+          <a:p>
+            <a:pPr algn="ctr"/>
+            <a:r>
+              <a:rPr sz="1500" b="0">
+                <a:solidFill>
+                  <a:srgbClr val="5B677D"/>
+                </a:solidFill>
+              </a:rPr>
+              <a:t>Think silently first. Then be ready to explain one idea.</a:t>
             </a:r>
           </a:p>
         </p:txBody>
@@ -3189,43 +3449,100 @@
       <p:grpSpPr/>
       <p:sp>
         <p:nvSpPr>
-          <p:cNvPr id="2" name="TextBox 1"/>
+          <p:cNvPr id="2" name="Rectangle 1"/>
+          <p:cNvSpPr/>
+          <p:nvPr/>
+        </p:nvSpPr>
+        <p:spPr>
+          <a:xfrm>
+            <a:off x="0" y="0"/>
+            <a:ext cx="12191695" cy="914400"/>
+          </a:xfrm>
+          <a:prstGeom prst="rect">
+            <a:avLst/>
+          </a:prstGeom>
+          <a:solidFill>
+            <a:srgbClr val="059669"/>
+          </a:solidFill>
+          <a:ln>
+            <a:noFill/>
+          </a:ln>
+        </p:spPr>
+        <p:style>
+          <a:lnRef idx="1">
+            <a:schemeClr val="accent1"/>
+          </a:lnRef>
+          <a:fillRef idx="3">
+            <a:schemeClr val="accent1"/>
+          </a:fillRef>
+          <a:effectRef idx="2">
+            <a:schemeClr val="accent1"/>
+          </a:effectRef>
+          <a:fontRef idx="minor">
+            <a:schemeClr val="lt1"/>
+          </a:fontRef>
+        </p:style>
+        <p:txBody>
+          <a:bodyPr rtlCol="0" anchor="ctr"/>
+          <a:lstStyle/>
+          <a:p>
+            <a:pPr algn="ctr"/>
+          </a:p>
+        </p:txBody>
+      </p:sp>
+      <p:sp>
+        <p:nvSpPr>
+          <p:cNvPr id="3" name="Rectangle 2"/>
+          <p:cNvSpPr/>
+          <p:nvPr/>
+        </p:nvSpPr>
+        <p:spPr>
+          <a:xfrm>
+            <a:off x="0" y="914400"/>
+            <a:ext cx="164592" cy="5943600"/>
+          </a:xfrm>
+          <a:prstGeom prst="rect">
+            <a:avLst/>
+          </a:prstGeom>
+          <a:solidFill>
+            <a:srgbClr val="059669"/>
+          </a:solidFill>
+          <a:ln>
+            <a:noFill/>
+          </a:ln>
+        </p:spPr>
+        <p:style>
+          <a:lnRef idx="1">
+            <a:schemeClr val="accent1"/>
+          </a:lnRef>
+          <a:fillRef idx="3">
+            <a:schemeClr val="accent1"/>
+          </a:fillRef>
+          <a:effectRef idx="2">
+            <a:schemeClr val="accent1"/>
+          </a:effectRef>
+          <a:fontRef idx="minor">
+            <a:schemeClr val="lt1"/>
+          </a:fontRef>
+        </p:style>
+        <p:txBody>
+          <a:bodyPr rtlCol="0" anchor="ctr"/>
+          <a:lstStyle/>
+          <a:p>
+            <a:pPr algn="ctr"/>
+          </a:p>
+        </p:txBody>
+      </p:sp>
+      <p:sp>
+        <p:nvSpPr>
+          <p:cNvPr id="4" name="TextBox 3"/>
           <p:cNvSpPr txBox="1"/>
           <p:nvPr/>
         </p:nvSpPr>
         <p:spPr>
           <a:xfrm>
-            <a:off x="548640" y="320040"/>
-            <a:ext cx="11064240" cy="777240"/>
-          </a:xfrm>
-          <a:prstGeom prst="rect">
-            <a:avLst/>
-          </a:prstGeom>
-          <a:noFill/>
-        </p:spPr>
-        <p:txBody>
-          <a:bodyPr wrap="none">
-            <a:spAutoFit/>
-          </a:bodyPr>
-          <a:lstStyle/>
-          <a:p>
-            <a:r>
-              <a:rPr sz="3000" b="1"/>
-              <a:t>Learning goal</a:t>
-            </a:r>
-          </a:p>
-        </p:txBody>
-      </p:sp>
-      <p:sp>
-        <p:nvSpPr>
-          <p:cNvPr id="3" name="TextBox 2"/>
-          <p:cNvSpPr txBox="1"/>
-          <p:nvPr/>
-        </p:nvSpPr>
-        <p:spPr>
-          <a:xfrm>
-            <a:off x="868680" y="1417320"/>
-            <a:ext cx="10424160" cy="4892040"/>
+            <a:off x="594360" y="246888"/>
+            <a:ext cx="2926080" cy="320040"/>
           </a:xfrm>
           <a:prstGeom prst="rect">
             <a:avLst/>
@@ -3238,47 +3555,657 @@
           </a:bodyPr>
           <a:lstStyle/>
           <a:p>
-            <a:pPr>
-              <a:spcAft>
-                <a:spcPts val="800"/>
-              </a:spcAft>
-              <a:defRPr sz="2200"/>
-            </a:pPr>
-            <a:r>
-              <a:t>By the end of the lesson, learners will be able to define the Holy Spirit and</a:t>
-            </a:r>
-          </a:p>
-          <a:p>
-            <a:pPr>
-              <a:spcAft>
-                <a:spcPts val="800"/>
-              </a:spcAft>
-              <a:defRPr sz="2200"/>
-            </a:pPr>
-            <a:r>
-              <a:t>recognize Him as the third person of the Trinity.</a:t>
-            </a:r>
-          </a:p>
-          <a:p>
-            <a:pPr>
-              <a:spcAft>
-                <a:spcPts val="800"/>
-              </a:spcAft>
-              <a:defRPr sz="2200"/>
-            </a:pPr>
-            <a:r>
-              <a:t>Key words: Vocabulary: Trinity, Spirit, Person, Godhead.</a:t>
-            </a:r>
-          </a:p>
-          <a:p>
-            <a:pPr>
-              <a:spcAft>
-                <a:spcPts val="800"/>
-              </a:spcAft>
-              <a:defRPr sz="2200"/>
-            </a:pPr>
-            <a:r>
-              <a:t>Lesson focus: Christians and the Holy Spirit (Topic 1: Enriched in the Spirit)</a:t>
+            <a:r>
+              <a:rPr sz="1300" b="1">
+                <a:solidFill>
+                  <a:srgbClr val="FFFFFF"/>
+                </a:solidFill>
+              </a:rPr>
+              <a:t>2. MISSION</a:t>
+            </a:r>
+          </a:p>
+        </p:txBody>
+      </p:sp>
+      <p:sp>
+        <p:nvSpPr>
+          <p:cNvPr id="5" name="TextBox 4"/>
+          <p:cNvSpPr txBox="1"/>
+          <p:nvPr/>
+        </p:nvSpPr>
+        <p:spPr>
+          <a:xfrm>
+            <a:off x="7772400" y="246888"/>
+            <a:ext cx="3840480" cy="320040"/>
+          </a:xfrm>
+          <a:prstGeom prst="rect">
+            <a:avLst/>
+          </a:prstGeom>
+          <a:noFill/>
+        </p:spPr>
+        <p:txBody>
+          <a:bodyPr wrap="square">
+            <a:spAutoFit/>
+          </a:bodyPr>
+          <a:lstStyle/>
+          <a:p>
+            <a:pPr algn="r"/>
+            <a:r>
+              <a:rPr sz="1100" b="0">
+                <a:solidFill>
+                  <a:srgbClr val="FFFFFF"/>
+                </a:solidFill>
+              </a:rPr>
+              <a:t>p7_t1_christian_religious_education_0101</a:t>
+            </a:r>
+          </a:p>
+        </p:txBody>
+      </p:sp>
+      <p:sp>
+        <p:nvSpPr>
+          <p:cNvPr id="6" name="TextBox 5"/>
+          <p:cNvSpPr txBox="1"/>
+          <p:nvPr/>
+        </p:nvSpPr>
+        <p:spPr>
+          <a:xfrm>
+            <a:off x="640080" y="1143000"/>
+            <a:ext cx="10972800" cy="685800"/>
+          </a:xfrm>
+          <a:prstGeom prst="rect">
+            <a:avLst/>
+          </a:prstGeom>
+          <a:noFill/>
+        </p:spPr>
+        <p:txBody>
+          <a:bodyPr wrap="square">
+            <a:spAutoFit/>
+          </a:bodyPr>
+          <a:lstStyle/>
+          <a:p>
+            <a:r>
+              <a:rPr sz="2800" b="1">
+                <a:solidFill>
+                  <a:srgbClr val="1A202C"/>
+                </a:solidFill>
+              </a:rPr>
+              <a:t>Today's mission</a:t>
+            </a:r>
+          </a:p>
+        </p:txBody>
+      </p:sp>
+      <p:sp>
+        <p:nvSpPr>
+          <p:cNvPr id="7" name="Rounded Rectangle 6"/>
+          <p:cNvSpPr/>
+          <p:nvPr/>
+        </p:nvSpPr>
+        <p:spPr>
+          <a:xfrm>
+            <a:off x="777240" y="1993392"/>
+            <a:ext cx="10835640" cy="1005840"/>
+          </a:xfrm>
+          <a:prstGeom prst="roundRect">
+            <a:avLst/>
+          </a:prstGeom>
+          <a:solidFill>
+            <a:srgbClr val="FFFBEB"/>
+          </a:solidFill>
+          <a:ln w="15240">
+            <a:solidFill>
+              <a:srgbClr val="059669"/>
+            </a:solidFill>
+          </a:ln>
+        </p:spPr>
+        <p:style>
+          <a:lnRef idx="1">
+            <a:schemeClr val="accent1"/>
+          </a:lnRef>
+          <a:fillRef idx="3">
+            <a:schemeClr val="accent1"/>
+          </a:fillRef>
+          <a:effectRef idx="2">
+            <a:schemeClr val="accent1"/>
+          </a:effectRef>
+          <a:fontRef idx="minor">
+            <a:schemeClr val="lt1"/>
+          </a:fontRef>
+        </p:style>
+        <p:txBody>
+          <a:bodyPr rtlCol="0" anchor="ctr"/>
+          <a:lstStyle/>
+          <a:p>
+            <a:pPr algn="ctr"/>
+          </a:p>
+        </p:txBody>
+      </p:sp>
+      <p:sp>
+        <p:nvSpPr>
+          <p:cNvPr id="8" name="TextBox 7"/>
+          <p:cNvSpPr txBox="1"/>
+          <p:nvPr/>
+        </p:nvSpPr>
+        <p:spPr>
+          <a:xfrm>
+            <a:off x="1051560" y="2212848"/>
+            <a:ext cx="10287000" cy="502920"/>
+          </a:xfrm>
+          <a:prstGeom prst="rect">
+            <a:avLst/>
+          </a:prstGeom>
+          <a:noFill/>
+        </p:spPr>
+        <p:txBody>
+          <a:bodyPr wrap="square">
+            <a:spAutoFit/>
+          </a:bodyPr>
+          <a:lstStyle/>
+          <a:p>
+            <a:r>
+              <a:rPr sz="2100" b="1">
+                <a:solidFill>
+                  <a:srgbClr val="1A202C"/>
+                </a:solidFill>
+              </a:rPr>
+              <a:t>Goal: I can define the Holy Spirit and recognize Him as the third person of the</a:t>
+            </a:r>
+          </a:p>
+        </p:txBody>
+      </p:sp>
+      <p:sp>
+        <p:nvSpPr>
+          <p:cNvPr id="9" name="Rounded Rectangle 8"/>
+          <p:cNvSpPr/>
+          <p:nvPr/>
+        </p:nvSpPr>
+        <p:spPr>
+          <a:xfrm>
+            <a:off x="1005840" y="3246120"/>
+            <a:ext cx="10149840" cy="731520"/>
+          </a:xfrm>
+          <a:prstGeom prst="roundRect">
+            <a:avLst/>
+          </a:prstGeom>
+          <a:solidFill>
+            <a:srgbClr val="F8FAFC"/>
+          </a:solidFill>
+          <a:ln w="15240">
+            <a:solidFill>
+              <a:srgbClr val="CBD5E1"/>
+            </a:solidFill>
+          </a:ln>
+        </p:spPr>
+        <p:style>
+          <a:lnRef idx="1">
+            <a:schemeClr val="accent1"/>
+          </a:lnRef>
+          <a:fillRef idx="3">
+            <a:schemeClr val="accent1"/>
+          </a:fillRef>
+          <a:effectRef idx="2">
+            <a:schemeClr val="accent1"/>
+          </a:effectRef>
+          <a:fontRef idx="minor">
+            <a:schemeClr val="lt1"/>
+          </a:fontRef>
+        </p:style>
+        <p:txBody>
+          <a:bodyPr rtlCol="0" anchor="ctr"/>
+          <a:lstStyle/>
+          <a:p>
+            <a:pPr algn="ctr"/>
+          </a:p>
+        </p:txBody>
+      </p:sp>
+      <p:sp>
+        <p:nvSpPr>
+          <p:cNvPr id="10" name="Oval 9"/>
+          <p:cNvSpPr/>
+          <p:nvPr/>
+        </p:nvSpPr>
+        <p:spPr>
+          <a:xfrm>
+            <a:off x="1234440" y="3364991"/>
+            <a:ext cx="347472" cy="347472"/>
+          </a:xfrm>
+          <a:prstGeom prst="ellipse">
+            <a:avLst/>
+          </a:prstGeom>
+          <a:solidFill>
+            <a:srgbClr val="059669"/>
+          </a:solidFill>
+          <a:ln>
+            <a:noFill/>
+          </a:ln>
+        </p:spPr>
+        <p:style>
+          <a:lnRef idx="1">
+            <a:schemeClr val="accent1"/>
+          </a:lnRef>
+          <a:fillRef idx="3">
+            <a:schemeClr val="accent1"/>
+          </a:fillRef>
+          <a:effectRef idx="2">
+            <a:schemeClr val="accent1"/>
+          </a:effectRef>
+          <a:fontRef idx="minor">
+            <a:schemeClr val="lt1"/>
+          </a:fontRef>
+        </p:style>
+        <p:txBody>
+          <a:bodyPr rtlCol="0" anchor="ctr"/>
+          <a:lstStyle/>
+          <a:p>
+            <a:pPr algn="ctr"/>
+          </a:p>
+        </p:txBody>
+      </p:sp>
+      <p:sp>
+        <p:nvSpPr>
+          <p:cNvPr id="11" name="TextBox 10"/>
+          <p:cNvSpPr txBox="1"/>
+          <p:nvPr/>
+        </p:nvSpPr>
+        <p:spPr>
+          <a:xfrm>
+            <a:off x="1234440" y="3410712"/>
+            <a:ext cx="347472" cy="182880"/>
+          </a:xfrm>
+          <a:prstGeom prst="rect">
+            <a:avLst/>
+          </a:prstGeom>
+          <a:noFill/>
+        </p:spPr>
+        <p:txBody>
+          <a:bodyPr wrap="square">
+            <a:spAutoFit/>
+          </a:bodyPr>
+          <a:lstStyle/>
+          <a:p>
+            <a:pPr algn="ctr"/>
+            <a:r>
+              <a:rPr sz="1000" b="1">
+                <a:solidFill>
+                  <a:srgbClr val="FFFFFF"/>
+                </a:solidFill>
+              </a:rPr>
+              <a:t>1</a:t>
+            </a:r>
+          </a:p>
+        </p:txBody>
+      </p:sp>
+      <p:sp>
+        <p:nvSpPr>
+          <p:cNvPr id="12" name="TextBox 11"/>
+          <p:cNvSpPr txBox="1"/>
+          <p:nvPr/>
+        </p:nvSpPr>
+        <p:spPr>
+          <a:xfrm>
+            <a:off x="1783080" y="3364991"/>
+            <a:ext cx="9006840" cy="347472"/>
+          </a:xfrm>
+          <a:prstGeom prst="rect">
+            <a:avLst/>
+          </a:prstGeom>
+          <a:noFill/>
+        </p:spPr>
+        <p:txBody>
+          <a:bodyPr wrap="square">
+            <a:spAutoFit/>
+          </a:bodyPr>
+          <a:lstStyle/>
+          <a:p>
+            <a:r>
+              <a:rPr sz="1700" b="0">
+                <a:solidFill>
+                  <a:srgbClr val="1A202C"/>
+                </a:solidFill>
+              </a:rPr>
+              <a:t>Trinity.</a:t>
+            </a:r>
+          </a:p>
+        </p:txBody>
+      </p:sp>
+      <p:sp>
+        <p:nvSpPr>
+          <p:cNvPr id="13" name="Rounded Rectangle 12"/>
+          <p:cNvSpPr/>
+          <p:nvPr/>
+        </p:nvSpPr>
+        <p:spPr>
+          <a:xfrm>
+            <a:off x="1005840" y="4178808"/>
+            <a:ext cx="10149840" cy="731520"/>
+          </a:xfrm>
+          <a:prstGeom prst="roundRect">
+            <a:avLst/>
+          </a:prstGeom>
+          <a:solidFill>
+            <a:srgbClr val="F8FAFC"/>
+          </a:solidFill>
+          <a:ln w="15240">
+            <a:solidFill>
+              <a:srgbClr val="CBD5E1"/>
+            </a:solidFill>
+          </a:ln>
+        </p:spPr>
+        <p:style>
+          <a:lnRef idx="1">
+            <a:schemeClr val="accent1"/>
+          </a:lnRef>
+          <a:fillRef idx="3">
+            <a:schemeClr val="accent1"/>
+          </a:fillRef>
+          <a:effectRef idx="2">
+            <a:schemeClr val="accent1"/>
+          </a:effectRef>
+          <a:fontRef idx="minor">
+            <a:schemeClr val="lt1"/>
+          </a:fontRef>
+        </p:style>
+        <p:txBody>
+          <a:bodyPr rtlCol="0" anchor="ctr"/>
+          <a:lstStyle/>
+          <a:p>
+            <a:pPr algn="ctr"/>
+          </a:p>
+        </p:txBody>
+      </p:sp>
+      <p:sp>
+        <p:nvSpPr>
+          <p:cNvPr id="14" name="Oval 13"/>
+          <p:cNvSpPr/>
+          <p:nvPr/>
+        </p:nvSpPr>
+        <p:spPr>
+          <a:xfrm>
+            <a:off x="1234440" y="4297680"/>
+            <a:ext cx="347472" cy="347472"/>
+          </a:xfrm>
+          <a:prstGeom prst="ellipse">
+            <a:avLst/>
+          </a:prstGeom>
+          <a:solidFill>
+            <a:srgbClr val="059669"/>
+          </a:solidFill>
+          <a:ln>
+            <a:noFill/>
+          </a:ln>
+        </p:spPr>
+        <p:style>
+          <a:lnRef idx="1">
+            <a:schemeClr val="accent1"/>
+          </a:lnRef>
+          <a:fillRef idx="3">
+            <a:schemeClr val="accent1"/>
+          </a:fillRef>
+          <a:effectRef idx="2">
+            <a:schemeClr val="accent1"/>
+          </a:effectRef>
+          <a:fontRef idx="minor">
+            <a:schemeClr val="lt1"/>
+          </a:fontRef>
+        </p:style>
+        <p:txBody>
+          <a:bodyPr rtlCol="0" anchor="ctr"/>
+          <a:lstStyle/>
+          <a:p>
+            <a:pPr algn="ctr"/>
+          </a:p>
+        </p:txBody>
+      </p:sp>
+      <p:sp>
+        <p:nvSpPr>
+          <p:cNvPr id="15" name="TextBox 14"/>
+          <p:cNvSpPr txBox="1"/>
+          <p:nvPr/>
+        </p:nvSpPr>
+        <p:spPr>
+          <a:xfrm>
+            <a:off x="1234440" y="4343400"/>
+            <a:ext cx="347472" cy="182880"/>
+          </a:xfrm>
+          <a:prstGeom prst="rect">
+            <a:avLst/>
+          </a:prstGeom>
+          <a:noFill/>
+        </p:spPr>
+        <p:txBody>
+          <a:bodyPr wrap="square">
+            <a:spAutoFit/>
+          </a:bodyPr>
+          <a:lstStyle/>
+          <a:p>
+            <a:pPr algn="ctr"/>
+            <a:r>
+              <a:rPr sz="1000" b="1">
+                <a:solidFill>
+                  <a:srgbClr val="FFFFFF"/>
+                </a:solidFill>
+              </a:rPr>
+              <a:t>2</a:t>
+            </a:r>
+          </a:p>
+        </p:txBody>
+      </p:sp>
+      <p:sp>
+        <p:nvSpPr>
+          <p:cNvPr id="16" name="TextBox 15"/>
+          <p:cNvSpPr txBox="1"/>
+          <p:nvPr/>
+        </p:nvSpPr>
+        <p:spPr>
+          <a:xfrm>
+            <a:off x="1783080" y="4297680"/>
+            <a:ext cx="9006840" cy="347472"/>
+          </a:xfrm>
+          <a:prstGeom prst="rect">
+            <a:avLst/>
+          </a:prstGeom>
+          <a:noFill/>
+        </p:spPr>
+        <p:txBody>
+          <a:bodyPr wrap="square">
+            <a:spAutoFit/>
+          </a:bodyPr>
+          <a:lstStyle/>
+          <a:p>
+            <a:r>
+              <a:rPr sz="1700" b="0">
+                <a:solidFill>
+                  <a:srgbClr val="1A202C"/>
+                </a:solidFill>
+              </a:rPr>
+              <a:t>You will use: What is a Spirit?, Defining the Holy Spirit</a:t>
+            </a:r>
+          </a:p>
+        </p:txBody>
+      </p:sp>
+      <p:sp>
+        <p:nvSpPr>
+          <p:cNvPr id="17" name="Rounded Rectangle 16"/>
+          <p:cNvSpPr/>
+          <p:nvPr/>
+        </p:nvSpPr>
+        <p:spPr>
+          <a:xfrm>
+            <a:off x="1005840" y="5111496"/>
+            <a:ext cx="10149840" cy="731520"/>
+          </a:xfrm>
+          <a:prstGeom prst="roundRect">
+            <a:avLst/>
+          </a:prstGeom>
+          <a:solidFill>
+            <a:srgbClr val="F8FAFC"/>
+          </a:solidFill>
+          <a:ln w="15240">
+            <a:solidFill>
+              <a:srgbClr val="CBD5E1"/>
+            </a:solidFill>
+          </a:ln>
+        </p:spPr>
+        <p:style>
+          <a:lnRef idx="1">
+            <a:schemeClr val="accent1"/>
+          </a:lnRef>
+          <a:fillRef idx="3">
+            <a:schemeClr val="accent1"/>
+          </a:fillRef>
+          <a:effectRef idx="2">
+            <a:schemeClr val="accent1"/>
+          </a:effectRef>
+          <a:fontRef idx="minor">
+            <a:schemeClr val="lt1"/>
+          </a:fontRef>
+        </p:style>
+        <p:txBody>
+          <a:bodyPr rtlCol="0" anchor="ctr"/>
+          <a:lstStyle/>
+          <a:p>
+            <a:pPr algn="ctr"/>
+          </a:p>
+        </p:txBody>
+      </p:sp>
+      <p:sp>
+        <p:nvSpPr>
+          <p:cNvPr id="18" name="Oval 17"/>
+          <p:cNvSpPr/>
+          <p:nvPr/>
+        </p:nvSpPr>
+        <p:spPr>
+          <a:xfrm>
+            <a:off x="1234440" y="5230368"/>
+            <a:ext cx="347472" cy="347472"/>
+          </a:xfrm>
+          <a:prstGeom prst="ellipse">
+            <a:avLst/>
+          </a:prstGeom>
+          <a:solidFill>
+            <a:srgbClr val="059669"/>
+          </a:solidFill>
+          <a:ln>
+            <a:noFill/>
+          </a:ln>
+        </p:spPr>
+        <p:style>
+          <a:lnRef idx="1">
+            <a:schemeClr val="accent1"/>
+          </a:lnRef>
+          <a:fillRef idx="3">
+            <a:schemeClr val="accent1"/>
+          </a:fillRef>
+          <a:effectRef idx="2">
+            <a:schemeClr val="accent1"/>
+          </a:effectRef>
+          <a:fontRef idx="minor">
+            <a:schemeClr val="lt1"/>
+          </a:fontRef>
+        </p:style>
+        <p:txBody>
+          <a:bodyPr rtlCol="0" anchor="ctr"/>
+          <a:lstStyle/>
+          <a:p>
+            <a:pPr algn="ctr"/>
+          </a:p>
+        </p:txBody>
+      </p:sp>
+      <p:sp>
+        <p:nvSpPr>
+          <p:cNvPr id="19" name="TextBox 18"/>
+          <p:cNvSpPr txBox="1"/>
+          <p:nvPr/>
+        </p:nvSpPr>
+        <p:spPr>
+          <a:xfrm>
+            <a:off x="1234440" y="5276088"/>
+            <a:ext cx="347472" cy="182880"/>
+          </a:xfrm>
+          <a:prstGeom prst="rect">
+            <a:avLst/>
+          </a:prstGeom>
+          <a:noFill/>
+        </p:spPr>
+        <p:txBody>
+          <a:bodyPr wrap="square">
+            <a:spAutoFit/>
+          </a:bodyPr>
+          <a:lstStyle/>
+          <a:p>
+            <a:pPr algn="ctr"/>
+            <a:r>
+              <a:rPr sz="1000" b="1">
+                <a:solidFill>
+                  <a:srgbClr val="FFFFFF"/>
+                </a:solidFill>
+              </a:rPr>
+              <a:t>3</a:t>
+            </a:r>
+          </a:p>
+        </p:txBody>
+      </p:sp>
+      <p:sp>
+        <p:nvSpPr>
+          <p:cNvPr id="20" name="TextBox 19"/>
+          <p:cNvSpPr txBox="1"/>
+          <p:nvPr/>
+        </p:nvSpPr>
+        <p:spPr>
+          <a:xfrm>
+            <a:off x="1783080" y="5230368"/>
+            <a:ext cx="9006840" cy="347472"/>
+          </a:xfrm>
+          <a:prstGeom prst="rect">
+            <a:avLst/>
+          </a:prstGeom>
+          <a:noFill/>
+        </p:spPr>
+        <p:txBody>
+          <a:bodyPr wrap="square">
+            <a:spAutoFit/>
+          </a:bodyPr>
+          <a:lstStyle/>
+          <a:p>
+            <a:r>
+              <a:rPr sz="1700" b="0">
+                <a:solidFill>
+                  <a:srgbClr val="1A202C"/>
+                </a:solidFill>
+              </a:rPr>
+              <a:t>Success: explain, try, and answer in your own words.</a:t>
+            </a:r>
+          </a:p>
+        </p:txBody>
+      </p:sp>
+      <p:sp>
+        <p:nvSpPr>
+          <p:cNvPr id="21" name="TextBox 20"/>
+          <p:cNvSpPr txBox="1"/>
+          <p:nvPr/>
+        </p:nvSpPr>
+        <p:spPr>
+          <a:xfrm>
+            <a:off x="777240" y="6419088"/>
+            <a:ext cx="10835640" cy="228600"/>
+          </a:xfrm>
+          <a:prstGeom prst="rect">
+            <a:avLst/>
+          </a:prstGeom>
+          <a:noFill/>
+        </p:spPr>
+        <p:txBody>
+          <a:bodyPr wrap="square">
+            <a:spAutoFit/>
+          </a:bodyPr>
+          <a:lstStyle/>
+          <a:p>
+            <a:pPr algn="r"/>
+            <a:r>
+              <a:rPr sz="1000" b="0">
+                <a:solidFill>
+                  <a:srgbClr val="5B677D"/>
+                </a:solidFill>
+              </a:rPr>
+              <a:t>Listen • Talk • Try • Explain</a:t>
             </a:r>
           </a:p>
         </p:txBody>
@@ -3303,43 +4230,100 @@
       <p:grpSpPr/>
       <p:sp>
         <p:nvSpPr>
-          <p:cNvPr id="2" name="TextBox 1"/>
+          <p:cNvPr id="2" name="Rectangle 1"/>
+          <p:cNvSpPr/>
+          <p:nvPr/>
+        </p:nvSpPr>
+        <p:spPr>
+          <a:xfrm>
+            <a:off x="0" y="0"/>
+            <a:ext cx="12191695" cy="914400"/>
+          </a:xfrm>
+          <a:prstGeom prst="rect">
+            <a:avLst/>
+          </a:prstGeom>
+          <a:solidFill>
+            <a:srgbClr val="7C3AED"/>
+          </a:solidFill>
+          <a:ln>
+            <a:noFill/>
+          </a:ln>
+        </p:spPr>
+        <p:style>
+          <a:lnRef idx="1">
+            <a:schemeClr val="accent1"/>
+          </a:lnRef>
+          <a:fillRef idx="3">
+            <a:schemeClr val="accent1"/>
+          </a:fillRef>
+          <a:effectRef idx="2">
+            <a:schemeClr val="accent1"/>
+          </a:effectRef>
+          <a:fontRef idx="minor">
+            <a:schemeClr val="lt1"/>
+          </a:fontRef>
+        </p:style>
+        <p:txBody>
+          <a:bodyPr rtlCol="0" anchor="ctr"/>
+          <a:lstStyle/>
+          <a:p>
+            <a:pPr algn="ctr"/>
+          </a:p>
+        </p:txBody>
+      </p:sp>
+      <p:sp>
+        <p:nvSpPr>
+          <p:cNvPr id="3" name="Rectangle 2"/>
+          <p:cNvSpPr/>
+          <p:nvPr/>
+        </p:nvSpPr>
+        <p:spPr>
+          <a:xfrm>
+            <a:off x="0" y="914400"/>
+            <a:ext cx="164592" cy="5943600"/>
+          </a:xfrm>
+          <a:prstGeom prst="rect">
+            <a:avLst/>
+          </a:prstGeom>
+          <a:solidFill>
+            <a:srgbClr val="7C3AED"/>
+          </a:solidFill>
+          <a:ln>
+            <a:noFill/>
+          </a:ln>
+        </p:spPr>
+        <p:style>
+          <a:lnRef idx="1">
+            <a:schemeClr val="accent1"/>
+          </a:lnRef>
+          <a:fillRef idx="3">
+            <a:schemeClr val="accent1"/>
+          </a:fillRef>
+          <a:effectRef idx="2">
+            <a:schemeClr val="accent1"/>
+          </a:effectRef>
+          <a:fontRef idx="minor">
+            <a:schemeClr val="lt1"/>
+          </a:fontRef>
+        </p:style>
+        <p:txBody>
+          <a:bodyPr rtlCol="0" anchor="ctr"/>
+          <a:lstStyle/>
+          <a:p>
+            <a:pPr algn="ctr"/>
+          </a:p>
+        </p:txBody>
+      </p:sp>
+      <p:sp>
+        <p:nvSpPr>
+          <p:cNvPr id="4" name="TextBox 3"/>
           <p:cNvSpPr txBox="1"/>
           <p:nvPr/>
         </p:nvSpPr>
         <p:spPr>
           <a:xfrm>
-            <a:off x="548640" y="320040"/>
-            <a:ext cx="11064240" cy="777240"/>
-          </a:xfrm>
-          <a:prstGeom prst="rect">
-            <a:avLst/>
-          </a:prstGeom>
-          <a:noFill/>
-        </p:spPr>
-        <p:txBody>
-          <a:bodyPr wrap="none">
-            <a:spAutoFit/>
-          </a:bodyPr>
-          <a:lstStyle/>
-          <a:p>
-            <a:r>
-              <a:rPr sz="3000" b="1"/>
-              <a:t>What is a Spirit?</a:t>
-            </a:r>
-          </a:p>
-        </p:txBody>
-      </p:sp>
-      <p:sp>
-        <p:nvSpPr>
-          <p:cNvPr id="3" name="TextBox 2"/>
-          <p:cNvSpPr txBox="1"/>
-          <p:nvPr/>
-        </p:nvSpPr>
-        <p:spPr>
-          <a:xfrm>
-            <a:off x="868680" y="1417320"/>
-            <a:ext cx="10424160" cy="4892040"/>
+            <a:off x="594360" y="246888"/>
+            <a:ext cx="2926080" cy="320040"/>
           </a:xfrm>
           <a:prstGeom prst="rect">
             <a:avLst/>
@@ -3352,36 +4336,502 @@
           </a:bodyPr>
           <a:lstStyle/>
           <a:p>
-            <a:pPr>
-              <a:spcAft>
-                <a:spcPts val="800"/>
-              </a:spcAft>
-              <a:defRPr sz="2200"/>
-            </a:pPr>
-            <a:r>
-              <a:t>A spirit is invisible.</a:t>
-            </a:r>
-          </a:p>
-          <a:p>
-            <a:pPr>
-              <a:spcAft>
-                <a:spcPts val="800"/>
-              </a:spcAft>
-              <a:defRPr sz="2200"/>
-            </a:pPr>
-            <a:r>
-              <a:t>We see the effects of a spirit, like we see wind moving trees.</a:t>
-            </a:r>
-          </a:p>
-          <a:p>
-            <a:pPr>
-              <a:spcAft>
-                <a:spcPts val="800"/>
-              </a:spcAft>
-              <a:defRPr sz="2200"/>
-            </a:pPr>
-            <a:r>
-              <a:t>The Spirit is the "breath" of God.</a:t>
+            <a:r>
+              <a:rPr sz="1300" b="1">
+                <a:solidFill>
+                  <a:srgbClr val="FFFFFF"/>
+                </a:solidFill>
+              </a:rPr>
+              <a:t>3. STARTER</a:t>
+            </a:r>
+          </a:p>
+        </p:txBody>
+      </p:sp>
+      <p:sp>
+        <p:nvSpPr>
+          <p:cNvPr id="5" name="TextBox 4"/>
+          <p:cNvSpPr txBox="1"/>
+          <p:nvPr/>
+        </p:nvSpPr>
+        <p:spPr>
+          <a:xfrm>
+            <a:off x="7772400" y="246888"/>
+            <a:ext cx="3840480" cy="320040"/>
+          </a:xfrm>
+          <a:prstGeom prst="rect">
+            <a:avLst/>
+          </a:prstGeom>
+          <a:noFill/>
+        </p:spPr>
+        <p:txBody>
+          <a:bodyPr wrap="square">
+            <a:spAutoFit/>
+          </a:bodyPr>
+          <a:lstStyle/>
+          <a:p>
+            <a:pPr algn="r"/>
+            <a:r>
+              <a:rPr sz="1100" b="0">
+                <a:solidFill>
+                  <a:srgbClr val="FFFFFF"/>
+                </a:solidFill>
+              </a:rPr>
+              <a:t>p7_t1_christian_religious_education_0101</a:t>
+            </a:r>
+          </a:p>
+        </p:txBody>
+      </p:sp>
+      <p:sp>
+        <p:nvSpPr>
+          <p:cNvPr id="6" name="TextBox 5"/>
+          <p:cNvSpPr txBox="1"/>
+          <p:nvPr/>
+        </p:nvSpPr>
+        <p:spPr>
+          <a:xfrm>
+            <a:off x="640080" y="1143000"/>
+            <a:ext cx="10972800" cy="685800"/>
+          </a:xfrm>
+          <a:prstGeom prst="rect">
+            <a:avLst/>
+          </a:prstGeom>
+          <a:noFill/>
+        </p:spPr>
+        <p:txBody>
+          <a:bodyPr wrap="square">
+            <a:spAutoFit/>
+          </a:bodyPr>
+          <a:lstStyle/>
+          <a:p>
+            <a:r>
+              <a:rPr sz="2800" b="1">
+                <a:solidFill>
+                  <a:srgbClr val="1A202C"/>
+                </a:solidFill>
+              </a:rPr>
+              <a:t>Starter: think first</a:t>
+            </a:r>
+          </a:p>
+        </p:txBody>
+      </p:sp>
+      <p:sp>
+        <p:nvSpPr>
+          <p:cNvPr id="7" name="Rounded Rectangle 6"/>
+          <p:cNvSpPr/>
+          <p:nvPr/>
+        </p:nvSpPr>
+        <p:spPr>
+          <a:xfrm>
+            <a:off x="777240" y="1993392"/>
+            <a:ext cx="10835640" cy="1005840"/>
+          </a:xfrm>
+          <a:prstGeom prst="roundRect">
+            <a:avLst/>
+          </a:prstGeom>
+          <a:solidFill>
+            <a:srgbClr val="FFFBEB"/>
+          </a:solidFill>
+          <a:ln w="15240">
+            <a:solidFill>
+              <a:srgbClr val="7C3AED"/>
+            </a:solidFill>
+          </a:ln>
+        </p:spPr>
+        <p:style>
+          <a:lnRef idx="1">
+            <a:schemeClr val="accent1"/>
+          </a:lnRef>
+          <a:fillRef idx="3">
+            <a:schemeClr val="accent1"/>
+          </a:fillRef>
+          <a:effectRef idx="2">
+            <a:schemeClr val="accent1"/>
+          </a:effectRef>
+          <a:fontRef idx="minor">
+            <a:schemeClr val="lt1"/>
+          </a:fontRef>
+        </p:style>
+        <p:txBody>
+          <a:bodyPr rtlCol="0" anchor="ctr"/>
+          <a:lstStyle/>
+          <a:p>
+            <a:pPr algn="ctr"/>
+          </a:p>
+        </p:txBody>
+      </p:sp>
+      <p:sp>
+        <p:nvSpPr>
+          <p:cNvPr id="8" name="TextBox 7"/>
+          <p:cNvSpPr txBox="1"/>
+          <p:nvPr/>
+        </p:nvSpPr>
+        <p:spPr>
+          <a:xfrm>
+            <a:off x="1051560" y="2212848"/>
+            <a:ext cx="10287000" cy="502920"/>
+          </a:xfrm>
+          <a:prstGeom prst="rect">
+            <a:avLst/>
+          </a:prstGeom>
+          <a:noFill/>
+        </p:spPr>
+        <p:txBody>
+          <a:bodyPr wrap="square">
+            <a:spAutoFit/>
+          </a:bodyPr>
+          <a:lstStyle/>
+          <a:p>
+            <a:r>
+              <a:rPr sz="2100" b="1">
+                <a:solidFill>
+                  <a:srgbClr val="1A202C"/>
+                </a:solidFill>
+              </a:rPr>
+              <a:t>Think: Can you see the wind?</a:t>
+            </a:r>
+          </a:p>
+        </p:txBody>
+      </p:sp>
+      <p:sp>
+        <p:nvSpPr>
+          <p:cNvPr id="9" name="Rounded Rectangle 8"/>
+          <p:cNvSpPr/>
+          <p:nvPr/>
+        </p:nvSpPr>
+        <p:spPr>
+          <a:xfrm>
+            <a:off x="1005840" y="3246120"/>
+            <a:ext cx="10149840" cy="731520"/>
+          </a:xfrm>
+          <a:prstGeom prst="roundRect">
+            <a:avLst/>
+          </a:prstGeom>
+          <a:solidFill>
+            <a:srgbClr val="F8FAFC"/>
+          </a:solidFill>
+          <a:ln w="15240">
+            <a:solidFill>
+              <a:srgbClr val="CBD5E1"/>
+            </a:solidFill>
+          </a:ln>
+        </p:spPr>
+        <p:style>
+          <a:lnRef idx="1">
+            <a:schemeClr val="accent1"/>
+          </a:lnRef>
+          <a:fillRef idx="3">
+            <a:schemeClr val="accent1"/>
+          </a:fillRef>
+          <a:effectRef idx="2">
+            <a:schemeClr val="accent1"/>
+          </a:effectRef>
+          <a:fontRef idx="minor">
+            <a:schemeClr val="lt1"/>
+          </a:fontRef>
+        </p:style>
+        <p:txBody>
+          <a:bodyPr rtlCol="0" anchor="ctr"/>
+          <a:lstStyle/>
+          <a:p>
+            <a:pPr algn="ctr"/>
+          </a:p>
+        </p:txBody>
+      </p:sp>
+      <p:sp>
+        <p:nvSpPr>
+          <p:cNvPr id="10" name="Oval 9"/>
+          <p:cNvSpPr/>
+          <p:nvPr/>
+        </p:nvSpPr>
+        <p:spPr>
+          <a:xfrm>
+            <a:off x="1234440" y="3364991"/>
+            <a:ext cx="347472" cy="347472"/>
+          </a:xfrm>
+          <a:prstGeom prst="ellipse">
+            <a:avLst/>
+          </a:prstGeom>
+          <a:solidFill>
+            <a:srgbClr val="7C3AED"/>
+          </a:solidFill>
+          <a:ln>
+            <a:noFill/>
+          </a:ln>
+        </p:spPr>
+        <p:style>
+          <a:lnRef idx="1">
+            <a:schemeClr val="accent1"/>
+          </a:lnRef>
+          <a:fillRef idx="3">
+            <a:schemeClr val="accent1"/>
+          </a:fillRef>
+          <a:effectRef idx="2">
+            <a:schemeClr val="accent1"/>
+          </a:effectRef>
+          <a:fontRef idx="minor">
+            <a:schemeClr val="lt1"/>
+          </a:fontRef>
+        </p:style>
+        <p:txBody>
+          <a:bodyPr rtlCol="0" anchor="ctr"/>
+          <a:lstStyle/>
+          <a:p>
+            <a:pPr algn="ctr"/>
+          </a:p>
+        </p:txBody>
+      </p:sp>
+      <p:sp>
+        <p:nvSpPr>
+          <p:cNvPr id="11" name="TextBox 10"/>
+          <p:cNvSpPr txBox="1"/>
+          <p:nvPr/>
+        </p:nvSpPr>
+        <p:spPr>
+          <a:xfrm>
+            <a:off x="1234440" y="3410712"/>
+            <a:ext cx="347472" cy="182880"/>
+          </a:xfrm>
+          <a:prstGeom prst="rect">
+            <a:avLst/>
+          </a:prstGeom>
+          <a:noFill/>
+        </p:spPr>
+        <p:txBody>
+          <a:bodyPr wrap="square">
+            <a:spAutoFit/>
+          </a:bodyPr>
+          <a:lstStyle/>
+          <a:p>
+            <a:pPr algn="ctr"/>
+            <a:r>
+              <a:rPr sz="1000" b="1">
+                <a:solidFill>
+                  <a:srgbClr val="FFFFFF"/>
+                </a:solidFill>
+              </a:rPr>
+              <a:t>1</a:t>
+            </a:r>
+          </a:p>
+        </p:txBody>
+      </p:sp>
+      <p:sp>
+        <p:nvSpPr>
+          <p:cNvPr id="12" name="TextBox 11"/>
+          <p:cNvSpPr txBox="1"/>
+          <p:nvPr/>
+        </p:nvSpPr>
+        <p:spPr>
+          <a:xfrm>
+            <a:off x="1783080" y="3364991"/>
+            <a:ext cx="9006840" cy="347472"/>
+          </a:xfrm>
+          <a:prstGeom prst="rect">
+            <a:avLst/>
+          </a:prstGeom>
+          <a:noFill/>
+        </p:spPr>
+        <p:txBody>
+          <a:bodyPr wrap="square">
+            <a:spAutoFit/>
+          </a:bodyPr>
+          <a:lstStyle/>
+          <a:p>
+            <a:r>
+              <a:rPr sz="1700" b="0">
+                <a:solidFill>
+                  <a:srgbClr val="1A202C"/>
+                </a:solidFill>
+              </a:rPr>
+              <a:t>Pair: compare your first answer with a partner.</a:t>
+            </a:r>
+          </a:p>
+        </p:txBody>
+      </p:sp>
+      <p:sp>
+        <p:nvSpPr>
+          <p:cNvPr id="13" name="Rounded Rectangle 12"/>
+          <p:cNvSpPr/>
+          <p:nvPr/>
+        </p:nvSpPr>
+        <p:spPr>
+          <a:xfrm>
+            <a:off x="1005840" y="4178808"/>
+            <a:ext cx="10149840" cy="731520"/>
+          </a:xfrm>
+          <a:prstGeom prst="roundRect">
+            <a:avLst/>
+          </a:prstGeom>
+          <a:solidFill>
+            <a:srgbClr val="F8FAFC"/>
+          </a:solidFill>
+          <a:ln w="15240">
+            <a:solidFill>
+              <a:srgbClr val="CBD5E1"/>
+            </a:solidFill>
+          </a:ln>
+        </p:spPr>
+        <p:style>
+          <a:lnRef idx="1">
+            <a:schemeClr val="accent1"/>
+          </a:lnRef>
+          <a:fillRef idx="3">
+            <a:schemeClr val="accent1"/>
+          </a:fillRef>
+          <a:effectRef idx="2">
+            <a:schemeClr val="accent1"/>
+          </a:effectRef>
+          <a:fontRef idx="minor">
+            <a:schemeClr val="lt1"/>
+          </a:fontRef>
+        </p:style>
+        <p:txBody>
+          <a:bodyPr rtlCol="0" anchor="ctr"/>
+          <a:lstStyle/>
+          <a:p>
+            <a:pPr algn="ctr"/>
+          </a:p>
+        </p:txBody>
+      </p:sp>
+      <p:sp>
+        <p:nvSpPr>
+          <p:cNvPr id="14" name="Oval 13"/>
+          <p:cNvSpPr/>
+          <p:nvPr/>
+        </p:nvSpPr>
+        <p:spPr>
+          <a:xfrm>
+            <a:off x="1234440" y="4297680"/>
+            <a:ext cx="347472" cy="347472"/>
+          </a:xfrm>
+          <a:prstGeom prst="ellipse">
+            <a:avLst/>
+          </a:prstGeom>
+          <a:solidFill>
+            <a:srgbClr val="7C3AED"/>
+          </a:solidFill>
+          <a:ln>
+            <a:noFill/>
+          </a:ln>
+        </p:spPr>
+        <p:style>
+          <a:lnRef idx="1">
+            <a:schemeClr val="accent1"/>
+          </a:lnRef>
+          <a:fillRef idx="3">
+            <a:schemeClr val="accent1"/>
+          </a:fillRef>
+          <a:effectRef idx="2">
+            <a:schemeClr val="accent1"/>
+          </a:effectRef>
+          <a:fontRef idx="minor">
+            <a:schemeClr val="lt1"/>
+          </a:fontRef>
+        </p:style>
+        <p:txBody>
+          <a:bodyPr rtlCol="0" anchor="ctr"/>
+          <a:lstStyle/>
+          <a:p>
+            <a:pPr algn="ctr"/>
+          </a:p>
+        </p:txBody>
+      </p:sp>
+      <p:sp>
+        <p:nvSpPr>
+          <p:cNvPr id="15" name="TextBox 14"/>
+          <p:cNvSpPr txBox="1"/>
+          <p:nvPr/>
+        </p:nvSpPr>
+        <p:spPr>
+          <a:xfrm>
+            <a:off x="1234440" y="4343400"/>
+            <a:ext cx="347472" cy="182880"/>
+          </a:xfrm>
+          <a:prstGeom prst="rect">
+            <a:avLst/>
+          </a:prstGeom>
+          <a:noFill/>
+        </p:spPr>
+        <p:txBody>
+          <a:bodyPr wrap="square">
+            <a:spAutoFit/>
+          </a:bodyPr>
+          <a:lstStyle/>
+          <a:p>
+            <a:pPr algn="ctr"/>
+            <a:r>
+              <a:rPr sz="1000" b="1">
+                <a:solidFill>
+                  <a:srgbClr val="FFFFFF"/>
+                </a:solidFill>
+              </a:rPr>
+              <a:t>2</a:t>
+            </a:r>
+          </a:p>
+        </p:txBody>
+      </p:sp>
+      <p:sp>
+        <p:nvSpPr>
+          <p:cNvPr id="16" name="TextBox 15"/>
+          <p:cNvSpPr txBox="1"/>
+          <p:nvPr/>
+        </p:nvSpPr>
+        <p:spPr>
+          <a:xfrm>
+            <a:off x="1783080" y="4297680"/>
+            <a:ext cx="9006840" cy="347472"/>
+          </a:xfrm>
+          <a:prstGeom prst="rect">
+            <a:avLst/>
+          </a:prstGeom>
+          <a:noFill/>
+        </p:spPr>
+        <p:txBody>
+          <a:bodyPr wrap="square">
+            <a:spAutoFit/>
+          </a:bodyPr>
+          <a:lstStyle/>
+          <a:p>
+            <a:r>
+              <a:rPr sz="1700" b="0">
+                <a:solidFill>
+                  <a:srgbClr val="1A202C"/>
+                </a:solidFill>
+              </a:rPr>
+              <a:t>Share: connect your answer to What is a Spirit?.</a:t>
+            </a:r>
+          </a:p>
+        </p:txBody>
+      </p:sp>
+      <p:sp>
+        <p:nvSpPr>
+          <p:cNvPr id="17" name="TextBox 16"/>
+          <p:cNvSpPr txBox="1"/>
+          <p:nvPr/>
+        </p:nvSpPr>
+        <p:spPr>
+          <a:xfrm>
+            <a:off x="777240" y="6419088"/>
+            <a:ext cx="10835640" cy="228600"/>
+          </a:xfrm>
+          <a:prstGeom prst="rect">
+            <a:avLst/>
+          </a:prstGeom>
+          <a:noFill/>
+        </p:spPr>
+        <p:txBody>
+          <a:bodyPr wrap="square">
+            <a:spAutoFit/>
+          </a:bodyPr>
+          <a:lstStyle/>
+          <a:p>
+            <a:pPr algn="r"/>
+            <a:r>
+              <a:rPr sz="1000" b="0">
+                <a:solidFill>
+                  <a:srgbClr val="5B677D"/>
+                </a:solidFill>
+              </a:rPr>
+              <a:t>Listen • Talk • Try • Explain</a:t>
             </a:r>
           </a:p>
         </p:txBody>
@@ -3406,43 +4856,100 @@
       <p:grpSpPr/>
       <p:sp>
         <p:nvSpPr>
-          <p:cNvPr id="2" name="TextBox 1"/>
+          <p:cNvPr id="2" name="Rectangle 1"/>
+          <p:cNvSpPr/>
+          <p:nvPr/>
+        </p:nvSpPr>
+        <p:spPr>
+          <a:xfrm>
+            <a:off x="0" y="0"/>
+            <a:ext cx="12191695" cy="914400"/>
+          </a:xfrm>
+          <a:prstGeom prst="rect">
+            <a:avLst/>
+          </a:prstGeom>
+          <a:solidFill>
+            <a:srgbClr val="0E7490"/>
+          </a:solidFill>
+          <a:ln>
+            <a:noFill/>
+          </a:ln>
+        </p:spPr>
+        <p:style>
+          <a:lnRef idx="1">
+            <a:schemeClr val="accent1"/>
+          </a:lnRef>
+          <a:fillRef idx="3">
+            <a:schemeClr val="accent1"/>
+          </a:fillRef>
+          <a:effectRef idx="2">
+            <a:schemeClr val="accent1"/>
+          </a:effectRef>
+          <a:fontRef idx="minor">
+            <a:schemeClr val="lt1"/>
+          </a:fontRef>
+        </p:style>
+        <p:txBody>
+          <a:bodyPr rtlCol="0" anchor="ctr"/>
+          <a:lstStyle/>
+          <a:p>
+            <a:pPr algn="ctr"/>
+          </a:p>
+        </p:txBody>
+      </p:sp>
+      <p:sp>
+        <p:nvSpPr>
+          <p:cNvPr id="3" name="Rectangle 2"/>
+          <p:cNvSpPr/>
+          <p:nvPr/>
+        </p:nvSpPr>
+        <p:spPr>
+          <a:xfrm>
+            <a:off x="0" y="914400"/>
+            <a:ext cx="164592" cy="5943600"/>
+          </a:xfrm>
+          <a:prstGeom prst="rect">
+            <a:avLst/>
+          </a:prstGeom>
+          <a:solidFill>
+            <a:srgbClr val="0E7490"/>
+          </a:solidFill>
+          <a:ln>
+            <a:noFill/>
+          </a:ln>
+        </p:spPr>
+        <p:style>
+          <a:lnRef idx="1">
+            <a:schemeClr val="accent1"/>
+          </a:lnRef>
+          <a:fillRef idx="3">
+            <a:schemeClr val="accent1"/>
+          </a:fillRef>
+          <a:effectRef idx="2">
+            <a:schemeClr val="accent1"/>
+          </a:effectRef>
+          <a:fontRef idx="minor">
+            <a:schemeClr val="lt1"/>
+          </a:fontRef>
+        </p:style>
+        <p:txBody>
+          <a:bodyPr rtlCol="0" anchor="ctr"/>
+          <a:lstStyle/>
+          <a:p>
+            <a:pPr algn="ctr"/>
+          </a:p>
+        </p:txBody>
+      </p:sp>
+      <p:sp>
+        <p:nvSpPr>
+          <p:cNvPr id="4" name="TextBox 3"/>
           <p:cNvSpPr txBox="1"/>
           <p:nvPr/>
         </p:nvSpPr>
         <p:spPr>
           <a:xfrm>
-            <a:off x="548640" y="320040"/>
-            <a:ext cx="11064240" cy="777240"/>
-          </a:xfrm>
-          <a:prstGeom prst="rect">
-            <a:avLst/>
-          </a:prstGeom>
-          <a:noFill/>
-        </p:spPr>
-        <p:txBody>
-          <a:bodyPr wrap="none">
-            <a:spAutoFit/>
-          </a:bodyPr>
-          <a:lstStyle/>
-          <a:p>
-            <a:r>
-              <a:rPr sz="3000" b="1"/>
-              <a:t>Defining the Holy Spirit</a:t>
-            </a:r>
-          </a:p>
-        </p:txBody>
-      </p:sp>
-      <p:sp>
-        <p:nvSpPr>
-          <p:cNvPr id="3" name="TextBox 2"/>
-          <p:cNvSpPr txBox="1"/>
-          <p:nvPr/>
-        </p:nvSpPr>
-        <p:spPr>
-          <a:xfrm>
-            <a:off x="868680" y="1417320"/>
-            <a:ext cx="10424160" cy="4892040"/>
+            <a:off x="594360" y="246888"/>
+            <a:ext cx="2926080" cy="320040"/>
           </a:xfrm>
           <a:prstGeom prst="rect">
             <a:avLst/>
@@ -3455,36 +4962,812 @@
           </a:bodyPr>
           <a:lstStyle/>
           <a:p>
-            <a:pPr>
-              <a:spcAft>
-                <a:spcPts val="800"/>
-              </a:spcAft>
-              <a:defRPr sz="2200"/>
-            </a:pPr>
-            <a:r>
-              <a:t>The Holy Spirit is God in us.</a:t>
-            </a:r>
-          </a:p>
-          <a:p>
-            <a:pPr>
-              <a:spcAft>
-                <a:spcPts val="800"/>
-              </a:spcAft>
-              <a:defRPr sz="2200"/>
-            </a:pPr>
-            <a:r>
-              <a:t>He is our greatest gift.</a:t>
-            </a:r>
-          </a:p>
-          <a:p>
-            <a:pPr>
-              <a:spcAft>
-                <a:spcPts val="800"/>
-              </a:spcAft>
-              <a:defRPr sz="2200"/>
-            </a:pPr>
-            <a:r>
-              <a:t>He is the Spirit of truth and love.</a:t>
+            <a:r>
+              <a:rPr sz="1300" b="1">
+                <a:solidFill>
+                  <a:srgbClr val="FFFFFF"/>
+                </a:solidFill>
+              </a:rPr>
+              <a:t>4. CONCEPT</a:t>
+            </a:r>
+          </a:p>
+        </p:txBody>
+      </p:sp>
+      <p:sp>
+        <p:nvSpPr>
+          <p:cNvPr id="5" name="TextBox 4"/>
+          <p:cNvSpPr txBox="1"/>
+          <p:nvPr/>
+        </p:nvSpPr>
+        <p:spPr>
+          <a:xfrm>
+            <a:off x="7772400" y="246888"/>
+            <a:ext cx="3840480" cy="320040"/>
+          </a:xfrm>
+          <a:prstGeom prst="rect">
+            <a:avLst/>
+          </a:prstGeom>
+          <a:noFill/>
+        </p:spPr>
+        <p:txBody>
+          <a:bodyPr wrap="square">
+            <a:spAutoFit/>
+          </a:bodyPr>
+          <a:lstStyle/>
+          <a:p>
+            <a:pPr algn="r"/>
+            <a:r>
+              <a:rPr sz="1100" b="0">
+                <a:solidFill>
+                  <a:srgbClr val="FFFFFF"/>
+                </a:solidFill>
+              </a:rPr>
+              <a:t>p7_t1_christian_religious_education_0101</a:t>
+            </a:r>
+          </a:p>
+        </p:txBody>
+      </p:sp>
+      <p:sp>
+        <p:nvSpPr>
+          <p:cNvPr id="6" name="TextBox 5"/>
+          <p:cNvSpPr txBox="1"/>
+          <p:nvPr/>
+        </p:nvSpPr>
+        <p:spPr>
+          <a:xfrm>
+            <a:off x="640080" y="1143000"/>
+            <a:ext cx="10972800" cy="685800"/>
+          </a:xfrm>
+          <a:prstGeom prst="rect">
+            <a:avLst/>
+          </a:prstGeom>
+          <a:noFill/>
+        </p:spPr>
+        <p:txBody>
+          <a:bodyPr wrap="square">
+            <a:spAutoFit/>
+          </a:bodyPr>
+          <a:lstStyle/>
+          <a:p>
+            <a:r>
+              <a:rPr sz="2800" b="1">
+                <a:solidFill>
+                  <a:srgbClr val="1A202C"/>
+                </a:solidFill>
+              </a:rPr>
+              <a:t>What is a Spirit?</a:t>
+            </a:r>
+          </a:p>
+        </p:txBody>
+      </p:sp>
+      <p:sp>
+        <p:nvSpPr>
+          <p:cNvPr id="7" name="Rounded Rectangle 6"/>
+          <p:cNvSpPr/>
+          <p:nvPr/>
+        </p:nvSpPr>
+        <p:spPr>
+          <a:xfrm>
+            <a:off x="777240" y="1993392"/>
+            <a:ext cx="10835640" cy="1005840"/>
+          </a:xfrm>
+          <a:prstGeom prst="roundRect">
+            <a:avLst/>
+          </a:prstGeom>
+          <a:solidFill>
+            <a:srgbClr val="FFFBEB"/>
+          </a:solidFill>
+          <a:ln w="15240">
+            <a:solidFill>
+              <a:srgbClr val="0E7490"/>
+            </a:solidFill>
+          </a:ln>
+        </p:spPr>
+        <p:style>
+          <a:lnRef idx="1">
+            <a:schemeClr val="accent1"/>
+          </a:lnRef>
+          <a:fillRef idx="3">
+            <a:schemeClr val="accent1"/>
+          </a:fillRef>
+          <a:effectRef idx="2">
+            <a:schemeClr val="accent1"/>
+          </a:effectRef>
+          <a:fontRef idx="minor">
+            <a:schemeClr val="lt1"/>
+          </a:fontRef>
+        </p:style>
+        <p:txBody>
+          <a:bodyPr rtlCol="0" anchor="ctr"/>
+          <a:lstStyle/>
+          <a:p>
+            <a:pPr algn="ctr"/>
+          </a:p>
+        </p:txBody>
+      </p:sp>
+      <p:sp>
+        <p:nvSpPr>
+          <p:cNvPr id="8" name="TextBox 7"/>
+          <p:cNvSpPr txBox="1"/>
+          <p:nvPr/>
+        </p:nvSpPr>
+        <p:spPr>
+          <a:xfrm>
+            <a:off x="1051560" y="2212848"/>
+            <a:ext cx="10287000" cy="502920"/>
+          </a:xfrm>
+          <a:prstGeom prst="rect">
+            <a:avLst/>
+          </a:prstGeom>
+          <a:noFill/>
+        </p:spPr>
+        <p:txBody>
+          <a:bodyPr wrap="square">
+            <a:spAutoFit/>
+          </a:bodyPr>
+          <a:lstStyle/>
+          <a:p>
+            <a:r>
+              <a:rPr sz="2100" b="1">
+                <a:solidFill>
+                  <a:srgbClr val="1A202C"/>
+                </a:solidFill>
+              </a:rPr>
+              <a:t>Key idea: Introduction to the "Spirit" concept. Just as wind is invisible but</a:t>
+            </a:r>
+          </a:p>
+        </p:txBody>
+      </p:sp>
+      <p:sp>
+        <p:nvSpPr>
+          <p:cNvPr id="9" name="Rounded Rectangle 8"/>
+          <p:cNvSpPr/>
+          <p:nvPr/>
+        </p:nvSpPr>
+        <p:spPr>
+          <a:xfrm>
+            <a:off x="1005840" y="3246120"/>
+            <a:ext cx="10149840" cy="621792"/>
+          </a:xfrm>
+          <a:prstGeom prst="roundRect">
+            <a:avLst/>
+          </a:prstGeom>
+          <a:solidFill>
+            <a:srgbClr val="F8FAFC"/>
+          </a:solidFill>
+          <a:ln w="15240">
+            <a:solidFill>
+              <a:srgbClr val="CBD5E1"/>
+            </a:solidFill>
+          </a:ln>
+        </p:spPr>
+        <p:style>
+          <a:lnRef idx="1">
+            <a:schemeClr val="accent1"/>
+          </a:lnRef>
+          <a:fillRef idx="3">
+            <a:schemeClr val="accent1"/>
+          </a:fillRef>
+          <a:effectRef idx="2">
+            <a:schemeClr val="accent1"/>
+          </a:effectRef>
+          <a:fontRef idx="minor">
+            <a:schemeClr val="lt1"/>
+          </a:fontRef>
+        </p:style>
+        <p:txBody>
+          <a:bodyPr rtlCol="0" anchor="ctr"/>
+          <a:lstStyle/>
+          <a:p>
+            <a:pPr algn="ctr"/>
+          </a:p>
+        </p:txBody>
+      </p:sp>
+      <p:sp>
+        <p:nvSpPr>
+          <p:cNvPr id="10" name="Oval 9"/>
+          <p:cNvSpPr/>
+          <p:nvPr/>
+        </p:nvSpPr>
+        <p:spPr>
+          <a:xfrm>
+            <a:off x="1234440" y="3364991"/>
+            <a:ext cx="347472" cy="347472"/>
+          </a:xfrm>
+          <a:prstGeom prst="ellipse">
+            <a:avLst/>
+          </a:prstGeom>
+          <a:solidFill>
+            <a:srgbClr val="0E7490"/>
+          </a:solidFill>
+          <a:ln>
+            <a:noFill/>
+          </a:ln>
+        </p:spPr>
+        <p:style>
+          <a:lnRef idx="1">
+            <a:schemeClr val="accent1"/>
+          </a:lnRef>
+          <a:fillRef idx="3">
+            <a:schemeClr val="accent1"/>
+          </a:fillRef>
+          <a:effectRef idx="2">
+            <a:schemeClr val="accent1"/>
+          </a:effectRef>
+          <a:fontRef idx="minor">
+            <a:schemeClr val="lt1"/>
+          </a:fontRef>
+        </p:style>
+        <p:txBody>
+          <a:bodyPr rtlCol="0" anchor="ctr"/>
+          <a:lstStyle/>
+          <a:p>
+            <a:pPr algn="ctr"/>
+          </a:p>
+        </p:txBody>
+      </p:sp>
+      <p:sp>
+        <p:nvSpPr>
+          <p:cNvPr id="11" name="TextBox 10"/>
+          <p:cNvSpPr txBox="1"/>
+          <p:nvPr/>
+        </p:nvSpPr>
+        <p:spPr>
+          <a:xfrm>
+            <a:off x="1234440" y="3410712"/>
+            <a:ext cx="347472" cy="182880"/>
+          </a:xfrm>
+          <a:prstGeom prst="rect">
+            <a:avLst/>
+          </a:prstGeom>
+          <a:noFill/>
+        </p:spPr>
+        <p:txBody>
+          <a:bodyPr wrap="square">
+            <a:spAutoFit/>
+          </a:bodyPr>
+          <a:lstStyle/>
+          <a:p>
+            <a:pPr algn="ctr"/>
+            <a:r>
+              <a:rPr sz="1000" b="1">
+                <a:solidFill>
+                  <a:srgbClr val="FFFFFF"/>
+                </a:solidFill>
+              </a:rPr>
+              <a:t>1</a:t>
+            </a:r>
+          </a:p>
+        </p:txBody>
+      </p:sp>
+      <p:sp>
+        <p:nvSpPr>
+          <p:cNvPr id="12" name="TextBox 11"/>
+          <p:cNvSpPr txBox="1"/>
+          <p:nvPr/>
+        </p:nvSpPr>
+        <p:spPr>
+          <a:xfrm>
+            <a:off x="1783080" y="3364991"/>
+            <a:ext cx="9006840" cy="347472"/>
+          </a:xfrm>
+          <a:prstGeom prst="rect">
+            <a:avLst/>
+          </a:prstGeom>
+          <a:noFill/>
+        </p:spPr>
+        <p:txBody>
+          <a:bodyPr wrap="square">
+            <a:spAutoFit/>
+          </a:bodyPr>
+          <a:lstStyle/>
+          <a:p>
+            <a:r>
+              <a:rPr sz="1700" b="0">
+                <a:solidFill>
+                  <a:srgbClr val="1A202C"/>
+                </a:solidFill>
+              </a:rPr>
+              <a:t>powerful, a spirit is a non-physical being.</a:t>
+            </a:r>
+          </a:p>
+        </p:txBody>
+      </p:sp>
+      <p:sp>
+        <p:nvSpPr>
+          <p:cNvPr id="13" name="Rounded Rectangle 12"/>
+          <p:cNvSpPr/>
+          <p:nvPr/>
+        </p:nvSpPr>
+        <p:spPr>
+          <a:xfrm>
+            <a:off x="1005840" y="4069080"/>
+            <a:ext cx="10149840" cy="621792"/>
+          </a:xfrm>
+          <a:prstGeom prst="roundRect">
+            <a:avLst/>
+          </a:prstGeom>
+          <a:solidFill>
+            <a:srgbClr val="F8FAFC"/>
+          </a:solidFill>
+          <a:ln w="15240">
+            <a:solidFill>
+              <a:srgbClr val="CBD5E1"/>
+            </a:solidFill>
+          </a:ln>
+        </p:spPr>
+        <p:style>
+          <a:lnRef idx="1">
+            <a:schemeClr val="accent1"/>
+          </a:lnRef>
+          <a:fillRef idx="3">
+            <a:schemeClr val="accent1"/>
+          </a:fillRef>
+          <a:effectRef idx="2">
+            <a:schemeClr val="accent1"/>
+          </a:effectRef>
+          <a:fontRef idx="minor">
+            <a:schemeClr val="lt1"/>
+          </a:fontRef>
+        </p:style>
+        <p:txBody>
+          <a:bodyPr rtlCol="0" anchor="ctr"/>
+          <a:lstStyle/>
+          <a:p>
+            <a:pPr algn="ctr"/>
+          </a:p>
+        </p:txBody>
+      </p:sp>
+      <p:sp>
+        <p:nvSpPr>
+          <p:cNvPr id="14" name="Oval 13"/>
+          <p:cNvSpPr/>
+          <p:nvPr/>
+        </p:nvSpPr>
+        <p:spPr>
+          <a:xfrm>
+            <a:off x="1234440" y="4187952"/>
+            <a:ext cx="347472" cy="347472"/>
+          </a:xfrm>
+          <a:prstGeom prst="ellipse">
+            <a:avLst/>
+          </a:prstGeom>
+          <a:solidFill>
+            <a:srgbClr val="0E7490"/>
+          </a:solidFill>
+          <a:ln>
+            <a:noFill/>
+          </a:ln>
+        </p:spPr>
+        <p:style>
+          <a:lnRef idx="1">
+            <a:schemeClr val="accent1"/>
+          </a:lnRef>
+          <a:fillRef idx="3">
+            <a:schemeClr val="accent1"/>
+          </a:fillRef>
+          <a:effectRef idx="2">
+            <a:schemeClr val="accent1"/>
+          </a:effectRef>
+          <a:fontRef idx="minor">
+            <a:schemeClr val="lt1"/>
+          </a:fontRef>
+        </p:style>
+        <p:txBody>
+          <a:bodyPr rtlCol="0" anchor="ctr"/>
+          <a:lstStyle/>
+          <a:p>
+            <a:pPr algn="ctr"/>
+          </a:p>
+        </p:txBody>
+      </p:sp>
+      <p:sp>
+        <p:nvSpPr>
+          <p:cNvPr id="15" name="TextBox 14"/>
+          <p:cNvSpPr txBox="1"/>
+          <p:nvPr/>
+        </p:nvSpPr>
+        <p:spPr>
+          <a:xfrm>
+            <a:off x="1234440" y="4233672"/>
+            <a:ext cx="347472" cy="182880"/>
+          </a:xfrm>
+          <a:prstGeom prst="rect">
+            <a:avLst/>
+          </a:prstGeom>
+          <a:noFill/>
+        </p:spPr>
+        <p:txBody>
+          <a:bodyPr wrap="square">
+            <a:spAutoFit/>
+          </a:bodyPr>
+          <a:lstStyle/>
+          <a:p>
+            <a:pPr algn="ctr"/>
+            <a:r>
+              <a:rPr sz="1000" b="1">
+                <a:solidFill>
+                  <a:srgbClr val="FFFFFF"/>
+                </a:solidFill>
+              </a:rPr>
+              <a:t>2</a:t>
+            </a:r>
+          </a:p>
+        </p:txBody>
+      </p:sp>
+      <p:sp>
+        <p:nvSpPr>
+          <p:cNvPr id="16" name="TextBox 15"/>
+          <p:cNvSpPr txBox="1"/>
+          <p:nvPr/>
+        </p:nvSpPr>
+        <p:spPr>
+          <a:xfrm>
+            <a:off x="1783080" y="4187952"/>
+            <a:ext cx="9006840" cy="347472"/>
+          </a:xfrm>
+          <a:prstGeom prst="rect">
+            <a:avLst/>
+          </a:prstGeom>
+          <a:noFill/>
+        </p:spPr>
+        <p:txBody>
+          <a:bodyPr wrap="square">
+            <a:spAutoFit/>
+          </a:bodyPr>
+          <a:lstStyle/>
+          <a:p>
+            <a:r>
+              <a:rPr sz="1700" b="0">
+                <a:solidFill>
+                  <a:srgbClr val="1A202C"/>
+                </a:solidFill>
+              </a:rPr>
+              <a:t>A spirit is invisible.</a:t>
+            </a:r>
+          </a:p>
+        </p:txBody>
+      </p:sp>
+      <p:sp>
+        <p:nvSpPr>
+          <p:cNvPr id="17" name="Rounded Rectangle 16"/>
+          <p:cNvSpPr/>
+          <p:nvPr/>
+        </p:nvSpPr>
+        <p:spPr>
+          <a:xfrm>
+            <a:off x="1005840" y="4892040"/>
+            <a:ext cx="10149840" cy="621792"/>
+          </a:xfrm>
+          <a:prstGeom prst="roundRect">
+            <a:avLst/>
+          </a:prstGeom>
+          <a:solidFill>
+            <a:srgbClr val="F8FAFC"/>
+          </a:solidFill>
+          <a:ln w="15240">
+            <a:solidFill>
+              <a:srgbClr val="CBD5E1"/>
+            </a:solidFill>
+          </a:ln>
+        </p:spPr>
+        <p:style>
+          <a:lnRef idx="1">
+            <a:schemeClr val="accent1"/>
+          </a:lnRef>
+          <a:fillRef idx="3">
+            <a:schemeClr val="accent1"/>
+          </a:fillRef>
+          <a:effectRef idx="2">
+            <a:schemeClr val="accent1"/>
+          </a:effectRef>
+          <a:fontRef idx="minor">
+            <a:schemeClr val="lt1"/>
+          </a:fontRef>
+        </p:style>
+        <p:txBody>
+          <a:bodyPr rtlCol="0" anchor="ctr"/>
+          <a:lstStyle/>
+          <a:p>
+            <a:pPr algn="ctr"/>
+          </a:p>
+        </p:txBody>
+      </p:sp>
+      <p:sp>
+        <p:nvSpPr>
+          <p:cNvPr id="18" name="Oval 17"/>
+          <p:cNvSpPr/>
+          <p:nvPr/>
+        </p:nvSpPr>
+        <p:spPr>
+          <a:xfrm>
+            <a:off x="1234440" y="5010912"/>
+            <a:ext cx="347472" cy="347472"/>
+          </a:xfrm>
+          <a:prstGeom prst="ellipse">
+            <a:avLst/>
+          </a:prstGeom>
+          <a:solidFill>
+            <a:srgbClr val="0E7490"/>
+          </a:solidFill>
+          <a:ln>
+            <a:noFill/>
+          </a:ln>
+        </p:spPr>
+        <p:style>
+          <a:lnRef idx="1">
+            <a:schemeClr val="accent1"/>
+          </a:lnRef>
+          <a:fillRef idx="3">
+            <a:schemeClr val="accent1"/>
+          </a:fillRef>
+          <a:effectRef idx="2">
+            <a:schemeClr val="accent1"/>
+          </a:effectRef>
+          <a:fontRef idx="minor">
+            <a:schemeClr val="lt1"/>
+          </a:fontRef>
+        </p:style>
+        <p:txBody>
+          <a:bodyPr rtlCol="0" anchor="ctr"/>
+          <a:lstStyle/>
+          <a:p>
+            <a:pPr algn="ctr"/>
+          </a:p>
+        </p:txBody>
+      </p:sp>
+      <p:sp>
+        <p:nvSpPr>
+          <p:cNvPr id="19" name="TextBox 18"/>
+          <p:cNvSpPr txBox="1"/>
+          <p:nvPr/>
+        </p:nvSpPr>
+        <p:spPr>
+          <a:xfrm>
+            <a:off x="1234440" y="5056632"/>
+            <a:ext cx="347472" cy="182880"/>
+          </a:xfrm>
+          <a:prstGeom prst="rect">
+            <a:avLst/>
+          </a:prstGeom>
+          <a:noFill/>
+        </p:spPr>
+        <p:txBody>
+          <a:bodyPr wrap="square">
+            <a:spAutoFit/>
+          </a:bodyPr>
+          <a:lstStyle/>
+          <a:p>
+            <a:pPr algn="ctr"/>
+            <a:r>
+              <a:rPr sz="1000" b="1">
+                <a:solidFill>
+                  <a:srgbClr val="FFFFFF"/>
+                </a:solidFill>
+              </a:rPr>
+              <a:t>3</a:t>
+            </a:r>
+          </a:p>
+        </p:txBody>
+      </p:sp>
+      <p:sp>
+        <p:nvSpPr>
+          <p:cNvPr id="20" name="TextBox 19"/>
+          <p:cNvSpPr txBox="1"/>
+          <p:nvPr/>
+        </p:nvSpPr>
+        <p:spPr>
+          <a:xfrm>
+            <a:off x="1783080" y="5010912"/>
+            <a:ext cx="9006840" cy="347472"/>
+          </a:xfrm>
+          <a:prstGeom prst="rect">
+            <a:avLst/>
+          </a:prstGeom>
+          <a:noFill/>
+        </p:spPr>
+        <p:txBody>
+          <a:bodyPr wrap="square">
+            <a:spAutoFit/>
+          </a:bodyPr>
+          <a:lstStyle/>
+          <a:p>
+            <a:r>
+              <a:rPr sz="1700" b="0">
+                <a:solidFill>
+                  <a:srgbClr val="1A202C"/>
+                </a:solidFill>
+              </a:rPr>
+              <a:t>We see the effects of a spirit, like we see wind moving trees.</a:t>
+            </a:r>
+          </a:p>
+        </p:txBody>
+      </p:sp>
+      <p:sp>
+        <p:nvSpPr>
+          <p:cNvPr id="21" name="Rounded Rectangle 20"/>
+          <p:cNvSpPr/>
+          <p:nvPr/>
+        </p:nvSpPr>
+        <p:spPr>
+          <a:xfrm>
+            <a:off x="1005840" y="5715000"/>
+            <a:ext cx="10149840" cy="621792"/>
+          </a:xfrm>
+          <a:prstGeom prst="roundRect">
+            <a:avLst/>
+          </a:prstGeom>
+          <a:solidFill>
+            <a:srgbClr val="F8FAFC"/>
+          </a:solidFill>
+          <a:ln w="15240">
+            <a:solidFill>
+              <a:srgbClr val="CBD5E1"/>
+            </a:solidFill>
+          </a:ln>
+        </p:spPr>
+        <p:style>
+          <a:lnRef idx="1">
+            <a:schemeClr val="accent1"/>
+          </a:lnRef>
+          <a:fillRef idx="3">
+            <a:schemeClr val="accent1"/>
+          </a:fillRef>
+          <a:effectRef idx="2">
+            <a:schemeClr val="accent1"/>
+          </a:effectRef>
+          <a:fontRef idx="minor">
+            <a:schemeClr val="lt1"/>
+          </a:fontRef>
+        </p:style>
+        <p:txBody>
+          <a:bodyPr rtlCol="0" anchor="ctr"/>
+          <a:lstStyle/>
+          <a:p>
+            <a:pPr algn="ctr"/>
+          </a:p>
+        </p:txBody>
+      </p:sp>
+      <p:sp>
+        <p:nvSpPr>
+          <p:cNvPr id="22" name="Oval 21"/>
+          <p:cNvSpPr/>
+          <p:nvPr/>
+        </p:nvSpPr>
+        <p:spPr>
+          <a:xfrm>
+            <a:off x="1234440" y="5833872"/>
+            <a:ext cx="347472" cy="347472"/>
+          </a:xfrm>
+          <a:prstGeom prst="ellipse">
+            <a:avLst/>
+          </a:prstGeom>
+          <a:solidFill>
+            <a:srgbClr val="0E7490"/>
+          </a:solidFill>
+          <a:ln>
+            <a:noFill/>
+          </a:ln>
+        </p:spPr>
+        <p:style>
+          <a:lnRef idx="1">
+            <a:schemeClr val="accent1"/>
+          </a:lnRef>
+          <a:fillRef idx="3">
+            <a:schemeClr val="accent1"/>
+          </a:fillRef>
+          <a:effectRef idx="2">
+            <a:schemeClr val="accent1"/>
+          </a:effectRef>
+          <a:fontRef idx="minor">
+            <a:schemeClr val="lt1"/>
+          </a:fontRef>
+        </p:style>
+        <p:txBody>
+          <a:bodyPr rtlCol="0" anchor="ctr"/>
+          <a:lstStyle/>
+          <a:p>
+            <a:pPr algn="ctr"/>
+          </a:p>
+        </p:txBody>
+      </p:sp>
+      <p:sp>
+        <p:nvSpPr>
+          <p:cNvPr id="23" name="TextBox 22"/>
+          <p:cNvSpPr txBox="1"/>
+          <p:nvPr/>
+        </p:nvSpPr>
+        <p:spPr>
+          <a:xfrm>
+            <a:off x="1234440" y="5879592"/>
+            <a:ext cx="347472" cy="182880"/>
+          </a:xfrm>
+          <a:prstGeom prst="rect">
+            <a:avLst/>
+          </a:prstGeom>
+          <a:noFill/>
+        </p:spPr>
+        <p:txBody>
+          <a:bodyPr wrap="square">
+            <a:spAutoFit/>
+          </a:bodyPr>
+          <a:lstStyle/>
+          <a:p>
+            <a:pPr algn="ctr"/>
+            <a:r>
+              <a:rPr sz="1000" b="1">
+                <a:solidFill>
+                  <a:srgbClr val="FFFFFF"/>
+                </a:solidFill>
+              </a:rPr>
+              <a:t>4</a:t>
+            </a:r>
+          </a:p>
+        </p:txBody>
+      </p:sp>
+      <p:sp>
+        <p:nvSpPr>
+          <p:cNvPr id="24" name="TextBox 23"/>
+          <p:cNvSpPr txBox="1"/>
+          <p:nvPr/>
+        </p:nvSpPr>
+        <p:spPr>
+          <a:xfrm>
+            <a:off x="1783080" y="5833872"/>
+            <a:ext cx="9006840" cy="347472"/>
+          </a:xfrm>
+          <a:prstGeom prst="rect">
+            <a:avLst/>
+          </a:prstGeom>
+          <a:noFill/>
+        </p:spPr>
+        <p:txBody>
+          <a:bodyPr wrap="square">
+            <a:spAutoFit/>
+          </a:bodyPr>
+          <a:lstStyle/>
+          <a:p>
+            <a:r>
+              <a:rPr sz="1700" b="0">
+                <a:solidFill>
+                  <a:srgbClr val="1A202C"/>
+                </a:solidFill>
+              </a:rPr>
+              <a:t>The Spirit is the "breath" of God.</a:t>
+            </a:r>
+          </a:p>
+        </p:txBody>
+      </p:sp>
+      <p:sp>
+        <p:nvSpPr>
+          <p:cNvPr id="25" name="TextBox 24"/>
+          <p:cNvSpPr txBox="1"/>
+          <p:nvPr/>
+        </p:nvSpPr>
+        <p:spPr>
+          <a:xfrm>
+            <a:off x="777240" y="6419088"/>
+            <a:ext cx="10835640" cy="228600"/>
+          </a:xfrm>
+          <a:prstGeom prst="rect">
+            <a:avLst/>
+          </a:prstGeom>
+          <a:noFill/>
+        </p:spPr>
+        <p:txBody>
+          <a:bodyPr wrap="square">
+            <a:spAutoFit/>
+          </a:bodyPr>
+          <a:lstStyle/>
+          <a:p>
+            <a:pPr algn="r"/>
+            <a:r>
+              <a:rPr sz="1000" b="0">
+                <a:solidFill>
+                  <a:srgbClr val="5B677D"/>
+                </a:solidFill>
+              </a:rPr>
+              <a:t>Listen • Talk • Try • Explain</a:t>
             </a:r>
           </a:p>
         </p:txBody>
@@ -3509,43 +5792,100 @@
       <p:grpSpPr/>
       <p:sp>
         <p:nvSpPr>
-          <p:cNvPr id="2" name="TextBox 1"/>
+          <p:cNvPr id="2" name="Rectangle 1"/>
+          <p:cNvSpPr/>
+          <p:nvPr/>
+        </p:nvSpPr>
+        <p:spPr>
+          <a:xfrm>
+            <a:off x="0" y="0"/>
+            <a:ext cx="12191695" cy="914400"/>
+          </a:xfrm>
+          <a:prstGeom prst="rect">
+            <a:avLst/>
+          </a:prstGeom>
+          <a:solidFill>
+            <a:srgbClr val="D97706"/>
+          </a:solidFill>
+          <a:ln>
+            <a:noFill/>
+          </a:ln>
+        </p:spPr>
+        <p:style>
+          <a:lnRef idx="1">
+            <a:schemeClr val="accent1"/>
+          </a:lnRef>
+          <a:fillRef idx="3">
+            <a:schemeClr val="accent1"/>
+          </a:fillRef>
+          <a:effectRef idx="2">
+            <a:schemeClr val="accent1"/>
+          </a:effectRef>
+          <a:fontRef idx="minor">
+            <a:schemeClr val="lt1"/>
+          </a:fontRef>
+        </p:style>
+        <p:txBody>
+          <a:bodyPr rtlCol="0" anchor="ctr"/>
+          <a:lstStyle/>
+          <a:p>
+            <a:pPr algn="ctr"/>
+          </a:p>
+        </p:txBody>
+      </p:sp>
+      <p:sp>
+        <p:nvSpPr>
+          <p:cNvPr id="3" name="Rectangle 2"/>
+          <p:cNvSpPr/>
+          <p:nvPr/>
+        </p:nvSpPr>
+        <p:spPr>
+          <a:xfrm>
+            <a:off x="0" y="914400"/>
+            <a:ext cx="164592" cy="5943600"/>
+          </a:xfrm>
+          <a:prstGeom prst="rect">
+            <a:avLst/>
+          </a:prstGeom>
+          <a:solidFill>
+            <a:srgbClr val="D97706"/>
+          </a:solidFill>
+          <a:ln>
+            <a:noFill/>
+          </a:ln>
+        </p:spPr>
+        <p:style>
+          <a:lnRef idx="1">
+            <a:schemeClr val="accent1"/>
+          </a:lnRef>
+          <a:fillRef idx="3">
+            <a:schemeClr val="accent1"/>
+          </a:fillRef>
+          <a:effectRef idx="2">
+            <a:schemeClr val="accent1"/>
+          </a:effectRef>
+          <a:fontRef idx="minor">
+            <a:schemeClr val="lt1"/>
+          </a:fontRef>
+        </p:style>
+        <p:txBody>
+          <a:bodyPr rtlCol="0" anchor="ctr"/>
+          <a:lstStyle/>
+          <a:p>
+            <a:pPr algn="ctr"/>
+          </a:p>
+        </p:txBody>
+      </p:sp>
+      <p:sp>
+        <p:nvSpPr>
+          <p:cNvPr id="4" name="TextBox 3"/>
           <p:cNvSpPr txBox="1"/>
           <p:nvPr/>
         </p:nvSpPr>
         <p:spPr>
           <a:xfrm>
-            <a:off x="548640" y="320040"/>
-            <a:ext cx="11064240" cy="777240"/>
-          </a:xfrm>
-          <a:prstGeom prst="rect">
-            <a:avLst/>
-          </a:prstGeom>
-          <a:noFill/>
-        </p:spPr>
-        <p:txBody>
-          <a:bodyPr wrap="none">
-            <a:spAutoFit/>
-          </a:bodyPr>
-          <a:lstStyle/>
-          <a:p>
-            <a:r>
-              <a:rPr sz="3000" b="1"/>
-              <a:t>The Holy Trinity</a:t>
-            </a:r>
-          </a:p>
-        </p:txBody>
-      </p:sp>
-      <p:sp>
-        <p:nvSpPr>
-          <p:cNvPr id="3" name="TextBox 2"/>
-          <p:cNvSpPr txBox="1"/>
-          <p:nvPr/>
-        </p:nvSpPr>
-        <p:spPr>
-          <a:xfrm>
-            <a:off x="868680" y="1417320"/>
-            <a:ext cx="10424160" cy="4892040"/>
+            <a:off x="594360" y="246888"/>
+            <a:ext cx="2926080" cy="320040"/>
           </a:xfrm>
           <a:prstGeom prst="rect">
             <a:avLst/>
@@ -3558,47 +5898,657 @@
           </a:bodyPr>
           <a:lstStyle/>
           <a:p>
-            <a:pPr>
-              <a:spcAft>
-                <a:spcPts val="800"/>
-              </a:spcAft>
-              <a:defRPr sz="2200"/>
-            </a:pPr>
-            <a:r>
-              <a:t>Trinity means "Three in One."</a:t>
-            </a:r>
-          </a:p>
-          <a:p>
-            <a:pPr>
-              <a:spcAft>
-                <a:spcPts val="800"/>
-              </a:spcAft>
-              <a:defRPr sz="2200"/>
-            </a:pPr>
-            <a:r>
-              <a:t>1st Person: God the Father (Creator).</a:t>
-            </a:r>
-          </a:p>
-          <a:p>
-            <a:pPr>
-              <a:spcAft>
-                <a:spcPts val="800"/>
-              </a:spcAft>
-              <a:defRPr sz="2200"/>
-            </a:pPr>
-            <a:r>
-              <a:t>2nd Person: God the Son (Redeemer).</a:t>
-            </a:r>
-          </a:p>
-          <a:p>
-            <a:pPr>
-              <a:spcAft>
-                <a:spcPts val="800"/>
-              </a:spcAft>
-              <a:defRPr sz="2200"/>
-            </a:pPr>
-            <a:r>
-              <a:t>3rd Person: God the Holy Spirit (Helper).</a:t>
+            <a:r>
+              <a:rPr sz="1300" b="1">
+                <a:solidFill>
+                  <a:srgbClr val="FFFFFF"/>
+                </a:solidFill>
+              </a:rPr>
+              <a:t>5. MODEL</a:t>
+            </a:r>
+          </a:p>
+        </p:txBody>
+      </p:sp>
+      <p:sp>
+        <p:nvSpPr>
+          <p:cNvPr id="5" name="TextBox 4"/>
+          <p:cNvSpPr txBox="1"/>
+          <p:nvPr/>
+        </p:nvSpPr>
+        <p:spPr>
+          <a:xfrm>
+            <a:off x="7772400" y="246888"/>
+            <a:ext cx="3840480" cy="320040"/>
+          </a:xfrm>
+          <a:prstGeom prst="rect">
+            <a:avLst/>
+          </a:prstGeom>
+          <a:noFill/>
+        </p:spPr>
+        <p:txBody>
+          <a:bodyPr wrap="square">
+            <a:spAutoFit/>
+          </a:bodyPr>
+          <a:lstStyle/>
+          <a:p>
+            <a:pPr algn="r"/>
+            <a:r>
+              <a:rPr sz="1100" b="0">
+                <a:solidFill>
+                  <a:srgbClr val="FFFFFF"/>
+                </a:solidFill>
+              </a:rPr>
+              <a:t>p7_t1_christian_religious_education_0101</a:t>
+            </a:r>
+          </a:p>
+        </p:txBody>
+      </p:sp>
+      <p:sp>
+        <p:nvSpPr>
+          <p:cNvPr id="6" name="TextBox 5"/>
+          <p:cNvSpPr txBox="1"/>
+          <p:nvPr/>
+        </p:nvSpPr>
+        <p:spPr>
+          <a:xfrm>
+            <a:off x="640080" y="1143000"/>
+            <a:ext cx="10972800" cy="685800"/>
+          </a:xfrm>
+          <a:prstGeom prst="rect">
+            <a:avLst/>
+          </a:prstGeom>
+          <a:noFill/>
+        </p:spPr>
+        <p:txBody>
+          <a:bodyPr wrap="square">
+            <a:spAutoFit/>
+          </a:bodyPr>
+          <a:lstStyle/>
+          <a:p>
+            <a:r>
+              <a:rPr sz="2800" b="1">
+                <a:solidFill>
+                  <a:srgbClr val="1A202C"/>
+                </a:solidFill>
+              </a:rPr>
+              <a:t>Defining the Holy Spirit</a:t>
+            </a:r>
+          </a:p>
+        </p:txBody>
+      </p:sp>
+      <p:sp>
+        <p:nvSpPr>
+          <p:cNvPr id="7" name="Rounded Rectangle 6"/>
+          <p:cNvSpPr/>
+          <p:nvPr/>
+        </p:nvSpPr>
+        <p:spPr>
+          <a:xfrm>
+            <a:off x="777240" y="1993392"/>
+            <a:ext cx="10835640" cy="1005840"/>
+          </a:xfrm>
+          <a:prstGeom prst="roundRect">
+            <a:avLst/>
+          </a:prstGeom>
+          <a:solidFill>
+            <a:srgbClr val="FFFBEB"/>
+          </a:solidFill>
+          <a:ln w="15240">
+            <a:solidFill>
+              <a:srgbClr val="D97706"/>
+            </a:solidFill>
+          </a:ln>
+        </p:spPr>
+        <p:style>
+          <a:lnRef idx="1">
+            <a:schemeClr val="accent1"/>
+          </a:lnRef>
+          <a:fillRef idx="3">
+            <a:schemeClr val="accent1"/>
+          </a:fillRef>
+          <a:effectRef idx="2">
+            <a:schemeClr val="accent1"/>
+          </a:effectRef>
+          <a:fontRef idx="minor">
+            <a:schemeClr val="lt1"/>
+          </a:fontRef>
+        </p:style>
+        <p:txBody>
+          <a:bodyPr rtlCol="0" anchor="ctr"/>
+          <a:lstStyle/>
+          <a:p>
+            <a:pPr algn="ctr"/>
+          </a:p>
+        </p:txBody>
+      </p:sp>
+      <p:sp>
+        <p:nvSpPr>
+          <p:cNvPr id="8" name="TextBox 7"/>
+          <p:cNvSpPr txBox="1"/>
+          <p:nvPr/>
+        </p:nvSpPr>
+        <p:spPr>
+          <a:xfrm>
+            <a:off x="1051560" y="2212848"/>
+            <a:ext cx="10287000" cy="502920"/>
+          </a:xfrm>
+          <a:prstGeom prst="rect">
+            <a:avLst/>
+          </a:prstGeom>
+          <a:noFill/>
+        </p:spPr>
+        <p:txBody>
+          <a:bodyPr wrap="square">
+            <a:spAutoFit/>
+          </a:bodyPr>
+          <a:lstStyle/>
+          <a:p>
+            <a:r>
+              <a:rPr sz="2100" b="1">
+                <a:solidFill>
+                  <a:srgbClr val="1A202C"/>
+                </a:solidFill>
+              </a:rPr>
+              <a:t>Model the example step by step.</a:t>
+            </a:r>
+          </a:p>
+        </p:txBody>
+      </p:sp>
+      <p:sp>
+        <p:nvSpPr>
+          <p:cNvPr id="9" name="Rounded Rectangle 8"/>
+          <p:cNvSpPr/>
+          <p:nvPr/>
+        </p:nvSpPr>
+        <p:spPr>
+          <a:xfrm>
+            <a:off x="1005840" y="3246120"/>
+            <a:ext cx="10149840" cy="731520"/>
+          </a:xfrm>
+          <a:prstGeom prst="roundRect">
+            <a:avLst/>
+          </a:prstGeom>
+          <a:solidFill>
+            <a:srgbClr val="F8FAFC"/>
+          </a:solidFill>
+          <a:ln w="15240">
+            <a:solidFill>
+              <a:srgbClr val="CBD5E1"/>
+            </a:solidFill>
+          </a:ln>
+        </p:spPr>
+        <p:style>
+          <a:lnRef idx="1">
+            <a:schemeClr val="accent1"/>
+          </a:lnRef>
+          <a:fillRef idx="3">
+            <a:schemeClr val="accent1"/>
+          </a:fillRef>
+          <a:effectRef idx="2">
+            <a:schemeClr val="accent1"/>
+          </a:effectRef>
+          <a:fontRef idx="minor">
+            <a:schemeClr val="lt1"/>
+          </a:fontRef>
+        </p:style>
+        <p:txBody>
+          <a:bodyPr rtlCol="0" anchor="ctr"/>
+          <a:lstStyle/>
+          <a:p>
+            <a:pPr algn="ctr"/>
+          </a:p>
+        </p:txBody>
+      </p:sp>
+      <p:sp>
+        <p:nvSpPr>
+          <p:cNvPr id="10" name="Oval 9"/>
+          <p:cNvSpPr/>
+          <p:nvPr/>
+        </p:nvSpPr>
+        <p:spPr>
+          <a:xfrm>
+            <a:off x="1234440" y="3364991"/>
+            <a:ext cx="347472" cy="347472"/>
+          </a:xfrm>
+          <a:prstGeom prst="ellipse">
+            <a:avLst/>
+          </a:prstGeom>
+          <a:solidFill>
+            <a:srgbClr val="D97706"/>
+          </a:solidFill>
+          <a:ln>
+            <a:noFill/>
+          </a:ln>
+        </p:spPr>
+        <p:style>
+          <a:lnRef idx="1">
+            <a:schemeClr val="accent1"/>
+          </a:lnRef>
+          <a:fillRef idx="3">
+            <a:schemeClr val="accent1"/>
+          </a:fillRef>
+          <a:effectRef idx="2">
+            <a:schemeClr val="accent1"/>
+          </a:effectRef>
+          <a:fontRef idx="minor">
+            <a:schemeClr val="lt1"/>
+          </a:fontRef>
+        </p:style>
+        <p:txBody>
+          <a:bodyPr rtlCol="0" anchor="ctr"/>
+          <a:lstStyle/>
+          <a:p>
+            <a:pPr algn="ctr"/>
+          </a:p>
+        </p:txBody>
+      </p:sp>
+      <p:sp>
+        <p:nvSpPr>
+          <p:cNvPr id="11" name="TextBox 10"/>
+          <p:cNvSpPr txBox="1"/>
+          <p:nvPr/>
+        </p:nvSpPr>
+        <p:spPr>
+          <a:xfrm>
+            <a:off x="1234440" y="3410712"/>
+            <a:ext cx="347472" cy="182880"/>
+          </a:xfrm>
+          <a:prstGeom prst="rect">
+            <a:avLst/>
+          </a:prstGeom>
+          <a:noFill/>
+        </p:spPr>
+        <p:txBody>
+          <a:bodyPr wrap="square">
+            <a:spAutoFit/>
+          </a:bodyPr>
+          <a:lstStyle/>
+          <a:p>
+            <a:pPr algn="ctr"/>
+            <a:r>
+              <a:rPr sz="1000" b="1">
+                <a:solidFill>
+                  <a:srgbClr val="FFFFFF"/>
+                </a:solidFill>
+              </a:rPr>
+              <a:t>1</a:t>
+            </a:r>
+          </a:p>
+        </p:txBody>
+      </p:sp>
+      <p:sp>
+        <p:nvSpPr>
+          <p:cNvPr id="12" name="TextBox 11"/>
+          <p:cNvSpPr txBox="1"/>
+          <p:nvPr/>
+        </p:nvSpPr>
+        <p:spPr>
+          <a:xfrm>
+            <a:off x="1783080" y="3364991"/>
+            <a:ext cx="9006840" cy="347472"/>
+          </a:xfrm>
+          <a:prstGeom prst="rect">
+            <a:avLst/>
+          </a:prstGeom>
+          <a:noFill/>
+        </p:spPr>
+        <p:txBody>
+          <a:bodyPr wrap="square">
+            <a:spAutoFit/>
+          </a:bodyPr>
+          <a:lstStyle/>
+          <a:p>
+            <a:r>
+              <a:rPr sz="1700" b="0">
+                <a:solidFill>
+                  <a:srgbClr val="1A202C"/>
+                </a:solidFill>
+              </a:rPr>
+              <a:t>2. The Holy Spirit</a:t>
+            </a:r>
+          </a:p>
+        </p:txBody>
+      </p:sp>
+      <p:sp>
+        <p:nvSpPr>
+          <p:cNvPr id="13" name="Rounded Rectangle 12"/>
+          <p:cNvSpPr/>
+          <p:nvPr/>
+        </p:nvSpPr>
+        <p:spPr>
+          <a:xfrm>
+            <a:off x="1005840" y="4178808"/>
+            <a:ext cx="10149840" cy="731520"/>
+          </a:xfrm>
+          <a:prstGeom prst="roundRect">
+            <a:avLst/>
+          </a:prstGeom>
+          <a:solidFill>
+            <a:srgbClr val="F8FAFC"/>
+          </a:solidFill>
+          <a:ln w="15240">
+            <a:solidFill>
+              <a:srgbClr val="CBD5E1"/>
+            </a:solidFill>
+          </a:ln>
+        </p:spPr>
+        <p:style>
+          <a:lnRef idx="1">
+            <a:schemeClr val="accent1"/>
+          </a:lnRef>
+          <a:fillRef idx="3">
+            <a:schemeClr val="accent1"/>
+          </a:fillRef>
+          <a:effectRef idx="2">
+            <a:schemeClr val="accent1"/>
+          </a:effectRef>
+          <a:fontRef idx="minor">
+            <a:schemeClr val="lt1"/>
+          </a:fontRef>
+        </p:style>
+        <p:txBody>
+          <a:bodyPr rtlCol="0" anchor="ctr"/>
+          <a:lstStyle/>
+          <a:p>
+            <a:pPr algn="ctr"/>
+          </a:p>
+        </p:txBody>
+      </p:sp>
+      <p:sp>
+        <p:nvSpPr>
+          <p:cNvPr id="14" name="Oval 13"/>
+          <p:cNvSpPr/>
+          <p:nvPr/>
+        </p:nvSpPr>
+        <p:spPr>
+          <a:xfrm>
+            <a:off x="1234440" y="4297680"/>
+            <a:ext cx="347472" cy="347472"/>
+          </a:xfrm>
+          <a:prstGeom prst="ellipse">
+            <a:avLst/>
+          </a:prstGeom>
+          <a:solidFill>
+            <a:srgbClr val="D97706"/>
+          </a:solidFill>
+          <a:ln>
+            <a:noFill/>
+          </a:ln>
+        </p:spPr>
+        <p:style>
+          <a:lnRef idx="1">
+            <a:schemeClr val="accent1"/>
+          </a:lnRef>
+          <a:fillRef idx="3">
+            <a:schemeClr val="accent1"/>
+          </a:fillRef>
+          <a:effectRef idx="2">
+            <a:schemeClr val="accent1"/>
+          </a:effectRef>
+          <a:fontRef idx="minor">
+            <a:schemeClr val="lt1"/>
+          </a:fontRef>
+        </p:style>
+        <p:txBody>
+          <a:bodyPr rtlCol="0" anchor="ctr"/>
+          <a:lstStyle/>
+          <a:p>
+            <a:pPr algn="ctr"/>
+          </a:p>
+        </p:txBody>
+      </p:sp>
+      <p:sp>
+        <p:nvSpPr>
+          <p:cNvPr id="15" name="TextBox 14"/>
+          <p:cNvSpPr txBox="1"/>
+          <p:nvPr/>
+        </p:nvSpPr>
+        <p:spPr>
+          <a:xfrm>
+            <a:off x="1234440" y="4343400"/>
+            <a:ext cx="347472" cy="182880"/>
+          </a:xfrm>
+          <a:prstGeom prst="rect">
+            <a:avLst/>
+          </a:prstGeom>
+          <a:noFill/>
+        </p:spPr>
+        <p:txBody>
+          <a:bodyPr wrap="square">
+            <a:spAutoFit/>
+          </a:bodyPr>
+          <a:lstStyle/>
+          <a:p>
+            <a:pPr algn="ctr"/>
+            <a:r>
+              <a:rPr sz="1000" b="1">
+                <a:solidFill>
+                  <a:srgbClr val="FFFFFF"/>
+                </a:solidFill>
+              </a:rPr>
+              <a:t>2</a:t>
+            </a:r>
+          </a:p>
+        </p:txBody>
+      </p:sp>
+      <p:sp>
+        <p:nvSpPr>
+          <p:cNvPr id="16" name="TextBox 15"/>
+          <p:cNvSpPr txBox="1"/>
+          <p:nvPr/>
+        </p:nvSpPr>
+        <p:spPr>
+          <a:xfrm>
+            <a:off x="1783080" y="4297680"/>
+            <a:ext cx="9006840" cy="347472"/>
+          </a:xfrm>
+          <a:prstGeom prst="rect">
+            <a:avLst/>
+          </a:prstGeom>
+          <a:noFill/>
+        </p:spPr>
+        <p:txBody>
+          <a:bodyPr wrap="square">
+            <a:spAutoFit/>
+          </a:bodyPr>
+          <a:lstStyle/>
+          <a:p>
+            <a:r>
+              <a:rPr sz="1700" b="0">
+                <a:solidFill>
+                  <a:srgbClr val="1A202C"/>
+                </a:solidFill>
+              </a:rPr>
+              <a:t>He is God's presence in us.</a:t>
+            </a:r>
+          </a:p>
+        </p:txBody>
+      </p:sp>
+      <p:sp>
+        <p:nvSpPr>
+          <p:cNvPr id="17" name="Rounded Rectangle 16"/>
+          <p:cNvSpPr/>
+          <p:nvPr/>
+        </p:nvSpPr>
+        <p:spPr>
+          <a:xfrm>
+            <a:off x="1005840" y="5111496"/>
+            <a:ext cx="10149840" cy="731520"/>
+          </a:xfrm>
+          <a:prstGeom prst="roundRect">
+            <a:avLst/>
+          </a:prstGeom>
+          <a:solidFill>
+            <a:srgbClr val="F8FAFC"/>
+          </a:solidFill>
+          <a:ln w="15240">
+            <a:solidFill>
+              <a:srgbClr val="CBD5E1"/>
+            </a:solidFill>
+          </a:ln>
+        </p:spPr>
+        <p:style>
+          <a:lnRef idx="1">
+            <a:schemeClr val="accent1"/>
+          </a:lnRef>
+          <a:fillRef idx="3">
+            <a:schemeClr val="accent1"/>
+          </a:fillRef>
+          <a:effectRef idx="2">
+            <a:schemeClr val="accent1"/>
+          </a:effectRef>
+          <a:fontRef idx="minor">
+            <a:schemeClr val="lt1"/>
+          </a:fontRef>
+        </p:style>
+        <p:txBody>
+          <a:bodyPr rtlCol="0" anchor="ctr"/>
+          <a:lstStyle/>
+          <a:p>
+            <a:pPr algn="ctr"/>
+          </a:p>
+        </p:txBody>
+      </p:sp>
+      <p:sp>
+        <p:nvSpPr>
+          <p:cNvPr id="18" name="Oval 17"/>
+          <p:cNvSpPr/>
+          <p:nvPr/>
+        </p:nvSpPr>
+        <p:spPr>
+          <a:xfrm>
+            <a:off x="1234440" y="5230368"/>
+            <a:ext cx="347472" cy="347472"/>
+          </a:xfrm>
+          <a:prstGeom prst="ellipse">
+            <a:avLst/>
+          </a:prstGeom>
+          <a:solidFill>
+            <a:srgbClr val="D97706"/>
+          </a:solidFill>
+          <a:ln>
+            <a:noFill/>
+          </a:ln>
+        </p:spPr>
+        <p:style>
+          <a:lnRef idx="1">
+            <a:schemeClr val="accent1"/>
+          </a:lnRef>
+          <a:fillRef idx="3">
+            <a:schemeClr val="accent1"/>
+          </a:fillRef>
+          <a:effectRef idx="2">
+            <a:schemeClr val="accent1"/>
+          </a:effectRef>
+          <a:fontRef idx="minor">
+            <a:schemeClr val="lt1"/>
+          </a:fontRef>
+        </p:style>
+        <p:txBody>
+          <a:bodyPr rtlCol="0" anchor="ctr"/>
+          <a:lstStyle/>
+          <a:p>
+            <a:pPr algn="ctr"/>
+          </a:p>
+        </p:txBody>
+      </p:sp>
+      <p:sp>
+        <p:nvSpPr>
+          <p:cNvPr id="19" name="TextBox 18"/>
+          <p:cNvSpPr txBox="1"/>
+          <p:nvPr/>
+        </p:nvSpPr>
+        <p:spPr>
+          <a:xfrm>
+            <a:off x="1234440" y="5276088"/>
+            <a:ext cx="347472" cy="182880"/>
+          </a:xfrm>
+          <a:prstGeom prst="rect">
+            <a:avLst/>
+          </a:prstGeom>
+          <a:noFill/>
+        </p:spPr>
+        <p:txBody>
+          <a:bodyPr wrap="square">
+            <a:spAutoFit/>
+          </a:bodyPr>
+          <a:lstStyle/>
+          <a:p>
+            <a:pPr algn="ctr"/>
+            <a:r>
+              <a:rPr sz="1000" b="1">
+                <a:solidFill>
+                  <a:srgbClr val="FFFFFF"/>
+                </a:solidFill>
+              </a:rPr>
+              <a:t>3</a:t>
+            </a:r>
+          </a:p>
+        </p:txBody>
+      </p:sp>
+      <p:sp>
+        <p:nvSpPr>
+          <p:cNvPr id="20" name="TextBox 19"/>
+          <p:cNvSpPr txBox="1"/>
+          <p:nvPr/>
+        </p:nvSpPr>
+        <p:spPr>
+          <a:xfrm>
+            <a:off x="1783080" y="5230368"/>
+            <a:ext cx="9006840" cy="347472"/>
+          </a:xfrm>
+          <a:prstGeom prst="rect">
+            <a:avLst/>
+          </a:prstGeom>
+          <a:noFill/>
+        </p:spPr>
+        <p:txBody>
+          <a:bodyPr wrap="square">
+            <a:spAutoFit/>
+          </a:bodyPr>
+          <a:lstStyle/>
+          <a:p>
+            <a:r>
+              <a:rPr sz="1700" b="0">
+                <a:solidFill>
+                  <a:srgbClr val="1A202C"/>
+                </a:solidFill>
+              </a:rPr>
+              <a:t>He is the "Gift and the Giver."</a:t>
+            </a:r>
+          </a:p>
+        </p:txBody>
+      </p:sp>
+      <p:sp>
+        <p:nvSpPr>
+          <p:cNvPr id="21" name="TextBox 20"/>
+          <p:cNvSpPr txBox="1"/>
+          <p:nvPr/>
+        </p:nvSpPr>
+        <p:spPr>
+          <a:xfrm>
+            <a:off x="777240" y="6419088"/>
+            <a:ext cx="10835640" cy="228600"/>
+          </a:xfrm>
+          <a:prstGeom prst="rect">
+            <a:avLst/>
+          </a:prstGeom>
+          <a:noFill/>
+        </p:spPr>
+        <p:txBody>
+          <a:bodyPr wrap="square">
+            <a:spAutoFit/>
+          </a:bodyPr>
+          <a:lstStyle/>
+          <a:p>
+            <a:pPr algn="r"/>
+            <a:r>
+              <a:rPr sz="1000" b="0">
+                <a:solidFill>
+                  <a:srgbClr val="5B677D"/>
+                </a:solidFill>
+              </a:rPr>
+              <a:t>Listen • Talk • Try • Explain</a:t>
             </a:r>
           </a:p>
         </p:txBody>
@@ -3623,43 +6573,100 @@
       <p:grpSpPr/>
       <p:sp>
         <p:nvSpPr>
-          <p:cNvPr id="2" name="TextBox 1"/>
+          <p:cNvPr id="2" name="Rectangle 1"/>
+          <p:cNvSpPr/>
+          <p:nvPr/>
+        </p:nvSpPr>
+        <p:spPr>
+          <a:xfrm>
+            <a:off x="0" y="0"/>
+            <a:ext cx="12191695" cy="914400"/>
+          </a:xfrm>
+          <a:prstGeom prst="rect">
+            <a:avLst/>
+          </a:prstGeom>
+          <a:solidFill>
+            <a:srgbClr val="BE123C"/>
+          </a:solidFill>
+          <a:ln>
+            <a:noFill/>
+          </a:ln>
+        </p:spPr>
+        <p:style>
+          <a:lnRef idx="1">
+            <a:schemeClr val="accent1"/>
+          </a:lnRef>
+          <a:fillRef idx="3">
+            <a:schemeClr val="accent1"/>
+          </a:fillRef>
+          <a:effectRef idx="2">
+            <a:schemeClr val="accent1"/>
+          </a:effectRef>
+          <a:fontRef idx="minor">
+            <a:schemeClr val="lt1"/>
+          </a:fontRef>
+        </p:style>
+        <p:txBody>
+          <a:bodyPr rtlCol="0" anchor="ctr"/>
+          <a:lstStyle/>
+          <a:p>
+            <a:pPr algn="ctr"/>
+          </a:p>
+        </p:txBody>
+      </p:sp>
+      <p:sp>
+        <p:nvSpPr>
+          <p:cNvPr id="3" name="Rectangle 2"/>
+          <p:cNvSpPr/>
+          <p:nvPr/>
+        </p:nvSpPr>
+        <p:spPr>
+          <a:xfrm>
+            <a:off x="0" y="914400"/>
+            <a:ext cx="164592" cy="5943600"/>
+          </a:xfrm>
+          <a:prstGeom prst="rect">
+            <a:avLst/>
+          </a:prstGeom>
+          <a:solidFill>
+            <a:srgbClr val="BE123C"/>
+          </a:solidFill>
+          <a:ln>
+            <a:noFill/>
+          </a:ln>
+        </p:spPr>
+        <p:style>
+          <a:lnRef idx="1">
+            <a:schemeClr val="accent1"/>
+          </a:lnRef>
+          <a:fillRef idx="3">
+            <a:schemeClr val="accent1"/>
+          </a:fillRef>
+          <a:effectRef idx="2">
+            <a:schemeClr val="accent1"/>
+          </a:effectRef>
+          <a:fontRef idx="minor">
+            <a:schemeClr val="lt1"/>
+          </a:fontRef>
+        </p:style>
+        <p:txBody>
+          <a:bodyPr rtlCol="0" anchor="ctr"/>
+          <a:lstStyle/>
+          <a:p>
+            <a:pPr algn="ctr"/>
+          </a:p>
+        </p:txBody>
+      </p:sp>
+      <p:sp>
+        <p:nvSpPr>
+          <p:cNvPr id="4" name="TextBox 3"/>
           <p:cNvSpPr txBox="1"/>
           <p:nvPr/>
         </p:nvSpPr>
         <p:spPr>
           <a:xfrm>
-            <a:off x="548640" y="320040"/>
-            <a:ext cx="11064240" cy="777240"/>
-          </a:xfrm>
-          <a:prstGeom prst="rect">
-            <a:avLst/>
-          </a:prstGeom>
-          <a:noFill/>
-        </p:spPr>
-        <p:txBody>
-          <a:bodyPr wrap="none">
-            <a:spAutoFit/>
-          </a:bodyPr>
-          <a:lstStyle/>
-          <a:p>
-            <a:r>
-              <a:rPr sz="3000" b="1"/>
-              <a:t>One God, Three Persons</a:t>
-            </a:r>
-          </a:p>
-        </p:txBody>
-      </p:sp>
-      <p:sp>
-        <p:nvSpPr>
-          <p:cNvPr id="3" name="TextBox 2"/>
-          <p:cNvSpPr txBox="1"/>
-          <p:nvPr/>
-        </p:nvSpPr>
-        <p:spPr>
-          <a:xfrm>
-            <a:off x="868680" y="1417320"/>
-            <a:ext cx="10424160" cy="4892040"/>
+            <a:off x="594360" y="246888"/>
+            <a:ext cx="2926080" cy="320040"/>
           </a:xfrm>
           <a:prstGeom prst="rect">
             <a:avLst/>
@@ -3672,36 +6679,657 @@
           </a:bodyPr>
           <a:lstStyle/>
           <a:p>
-            <a:pPr>
-              <a:spcAft>
-                <a:spcPts val="800"/>
-              </a:spcAft>
-              <a:defRPr sz="2200"/>
-            </a:pPr>
-            <a:r>
-              <a:t>All three persons are equal.</a:t>
-            </a:r>
-          </a:p>
-          <a:p>
-            <a:pPr>
-              <a:spcAft>
-                <a:spcPts val="800"/>
-              </a:spcAft>
-              <a:defRPr sz="2200"/>
-            </a:pPr>
-            <a:r>
-              <a:t>They work together in unity.</a:t>
-            </a:r>
-          </a:p>
-          <a:p>
-            <a:pPr>
-              <a:spcAft>
-                <a:spcPts val="800"/>
-              </a:spcAft>
-              <a:defRPr sz="2200"/>
-            </a:pPr>
-            <a:r>
-              <a:t>The Holy Spirit is fully God.</a:t>
+            <a:r>
+              <a:rPr sz="1300" b="1">
+                <a:solidFill>
+                  <a:srgbClr val="FFFFFF"/>
+                </a:solidFill>
+              </a:rPr>
+              <a:t>6. PRACTICE</a:t>
+            </a:r>
+          </a:p>
+        </p:txBody>
+      </p:sp>
+      <p:sp>
+        <p:nvSpPr>
+          <p:cNvPr id="5" name="TextBox 4"/>
+          <p:cNvSpPr txBox="1"/>
+          <p:nvPr/>
+        </p:nvSpPr>
+        <p:spPr>
+          <a:xfrm>
+            <a:off x="7772400" y="246888"/>
+            <a:ext cx="3840480" cy="320040"/>
+          </a:xfrm>
+          <a:prstGeom prst="rect">
+            <a:avLst/>
+          </a:prstGeom>
+          <a:noFill/>
+        </p:spPr>
+        <p:txBody>
+          <a:bodyPr wrap="square">
+            <a:spAutoFit/>
+          </a:bodyPr>
+          <a:lstStyle/>
+          <a:p>
+            <a:pPr algn="r"/>
+            <a:r>
+              <a:rPr sz="1100" b="0">
+                <a:solidFill>
+                  <a:srgbClr val="FFFFFF"/>
+                </a:solidFill>
+              </a:rPr>
+              <a:t>p7_t1_christian_religious_education_0101</a:t>
+            </a:r>
+          </a:p>
+        </p:txBody>
+      </p:sp>
+      <p:sp>
+        <p:nvSpPr>
+          <p:cNvPr id="6" name="TextBox 5"/>
+          <p:cNvSpPr txBox="1"/>
+          <p:nvPr/>
+        </p:nvSpPr>
+        <p:spPr>
+          <a:xfrm>
+            <a:off x="640080" y="1143000"/>
+            <a:ext cx="10972800" cy="685800"/>
+          </a:xfrm>
+          <a:prstGeom prst="rect">
+            <a:avLst/>
+          </a:prstGeom>
+          <a:noFill/>
+        </p:spPr>
+        <p:txBody>
+          <a:bodyPr wrap="square">
+            <a:spAutoFit/>
+          </a:bodyPr>
+          <a:lstStyle/>
+          <a:p>
+            <a:r>
+              <a:rPr sz="2800" b="1">
+                <a:solidFill>
+                  <a:srgbClr val="1A202C"/>
+                </a:solidFill>
+              </a:rPr>
+              <a:t>Try it together</a:t>
+            </a:r>
+          </a:p>
+        </p:txBody>
+      </p:sp>
+      <p:sp>
+        <p:nvSpPr>
+          <p:cNvPr id="7" name="Rounded Rectangle 6"/>
+          <p:cNvSpPr/>
+          <p:nvPr/>
+        </p:nvSpPr>
+        <p:spPr>
+          <a:xfrm>
+            <a:off x="777240" y="1993392"/>
+            <a:ext cx="10835640" cy="1005840"/>
+          </a:xfrm>
+          <a:prstGeom prst="roundRect">
+            <a:avLst/>
+          </a:prstGeom>
+          <a:solidFill>
+            <a:srgbClr val="FFFBEB"/>
+          </a:solidFill>
+          <a:ln w="15240">
+            <a:solidFill>
+              <a:srgbClr val="BE123C"/>
+            </a:solidFill>
+          </a:ln>
+        </p:spPr>
+        <p:style>
+          <a:lnRef idx="1">
+            <a:schemeClr val="accent1"/>
+          </a:lnRef>
+          <a:fillRef idx="3">
+            <a:schemeClr val="accent1"/>
+          </a:fillRef>
+          <a:effectRef idx="2">
+            <a:schemeClr val="accent1"/>
+          </a:effectRef>
+          <a:fontRef idx="minor">
+            <a:schemeClr val="lt1"/>
+          </a:fontRef>
+        </p:style>
+        <p:txBody>
+          <a:bodyPr rtlCol="0" anchor="ctr"/>
+          <a:lstStyle/>
+          <a:p>
+            <a:pPr algn="ctr"/>
+          </a:p>
+        </p:txBody>
+      </p:sp>
+      <p:sp>
+        <p:nvSpPr>
+          <p:cNvPr id="8" name="TextBox 7"/>
+          <p:cNvSpPr txBox="1"/>
+          <p:nvPr/>
+        </p:nvSpPr>
+        <p:spPr>
+          <a:xfrm>
+            <a:off x="1051560" y="2212848"/>
+            <a:ext cx="10287000" cy="502920"/>
+          </a:xfrm>
+          <a:prstGeom prst="rect">
+            <a:avLst/>
+          </a:prstGeom>
+          <a:noFill/>
+        </p:spPr>
+        <p:txBody>
+          <a:bodyPr wrap="square">
+            <a:spAutoFit/>
+          </a:bodyPr>
+          <a:lstStyle/>
+          <a:p>
+            <a:r>
+              <a:rPr sz="2100" b="1">
+                <a:solidFill>
+                  <a:srgbClr val="1A202C"/>
+                </a:solidFill>
+              </a:rPr>
+              <a:t>How do you know the wind is there?</a:t>
+            </a:r>
+          </a:p>
+        </p:txBody>
+      </p:sp>
+      <p:sp>
+        <p:nvSpPr>
+          <p:cNvPr id="9" name="Rounded Rectangle 8"/>
+          <p:cNvSpPr/>
+          <p:nvPr/>
+        </p:nvSpPr>
+        <p:spPr>
+          <a:xfrm>
+            <a:off x="1005840" y="3246120"/>
+            <a:ext cx="10149840" cy="731520"/>
+          </a:xfrm>
+          <a:prstGeom prst="roundRect">
+            <a:avLst/>
+          </a:prstGeom>
+          <a:solidFill>
+            <a:srgbClr val="F8FAFC"/>
+          </a:solidFill>
+          <a:ln w="15240">
+            <a:solidFill>
+              <a:srgbClr val="CBD5E1"/>
+            </a:solidFill>
+          </a:ln>
+        </p:spPr>
+        <p:style>
+          <a:lnRef idx="1">
+            <a:schemeClr val="accent1"/>
+          </a:lnRef>
+          <a:fillRef idx="3">
+            <a:schemeClr val="accent1"/>
+          </a:fillRef>
+          <a:effectRef idx="2">
+            <a:schemeClr val="accent1"/>
+          </a:effectRef>
+          <a:fontRef idx="minor">
+            <a:schemeClr val="lt1"/>
+          </a:fontRef>
+        </p:style>
+        <p:txBody>
+          <a:bodyPr rtlCol="0" anchor="ctr"/>
+          <a:lstStyle/>
+          <a:p>
+            <a:pPr algn="ctr"/>
+          </a:p>
+        </p:txBody>
+      </p:sp>
+      <p:sp>
+        <p:nvSpPr>
+          <p:cNvPr id="10" name="Oval 9"/>
+          <p:cNvSpPr/>
+          <p:nvPr/>
+        </p:nvSpPr>
+        <p:spPr>
+          <a:xfrm>
+            <a:off x="1234440" y="3364991"/>
+            <a:ext cx="347472" cy="347472"/>
+          </a:xfrm>
+          <a:prstGeom prst="ellipse">
+            <a:avLst/>
+          </a:prstGeom>
+          <a:solidFill>
+            <a:srgbClr val="BE123C"/>
+          </a:solidFill>
+          <a:ln>
+            <a:noFill/>
+          </a:ln>
+        </p:spPr>
+        <p:style>
+          <a:lnRef idx="1">
+            <a:schemeClr val="accent1"/>
+          </a:lnRef>
+          <a:fillRef idx="3">
+            <a:schemeClr val="accent1"/>
+          </a:fillRef>
+          <a:effectRef idx="2">
+            <a:schemeClr val="accent1"/>
+          </a:effectRef>
+          <a:fontRef idx="minor">
+            <a:schemeClr val="lt1"/>
+          </a:fontRef>
+        </p:style>
+        <p:txBody>
+          <a:bodyPr rtlCol="0" anchor="ctr"/>
+          <a:lstStyle/>
+          <a:p>
+            <a:pPr algn="ctr"/>
+          </a:p>
+        </p:txBody>
+      </p:sp>
+      <p:sp>
+        <p:nvSpPr>
+          <p:cNvPr id="11" name="TextBox 10"/>
+          <p:cNvSpPr txBox="1"/>
+          <p:nvPr/>
+        </p:nvSpPr>
+        <p:spPr>
+          <a:xfrm>
+            <a:off x="1234440" y="3410712"/>
+            <a:ext cx="347472" cy="182880"/>
+          </a:xfrm>
+          <a:prstGeom prst="rect">
+            <a:avLst/>
+          </a:prstGeom>
+          <a:noFill/>
+        </p:spPr>
+        <p:txBody>
+          <a:bodyPr wrap="square">
+            <a:spAutoFit/>
+          </a:bodyPr>
+          <a:lstStyle/>
+          <a:p>
+            <a:pPr algn="ctr"/>
+            <a:r>
+              <a:rPr sz="1000" b="1">
+                <a:solidFill>
+                  <a:srgbClr val="FFFFFF"/>
+                </a:solidFill>
+              </a:rPr>
+              <a:t>1</a:t>
+            </a:r>
+          </a:p>
+        </p:txBody>
+      </p:sp>
+      <p:sp>
+        <p:nvSpPr>
+          <p:cNvPr id="12" name="TextBox 11"/>
+          <p:cNvSpPr txBox="1"/>
+          <p:nvPr/>
+        </p:nvSpPr>
+        <p:spPr>
+          <a:xfrm>
+            <a:off x="1783080" y="3364991"/>
+            <a:ext cx="9006840" cy="347472"/>
+          </a:xfrm>
+          <a:prstGeom prst="rect">
+            <a:avLst/>
+          </a:prstGeom>
+          <a:noFill/>
+        </p:spPr>
+        <p:txBody>
+          <a:bodyPr wrap="square">
+            <a:spAutoFit/>
+          </a:bodyPr>
+          <a:lstStyle/>
+          <a:p>
+            <a:r>
+              <a:rPr sz="1700" b="0">
+                <a:solidFill>
+                  <a:srgbClr val="1A202C"/>
+                </a:solidFill>
+              </a:rPr>
+              <a:t>Is God visible to our physical eyes?</a:t>
+            </a:r>
+          </a:p>
+        </p:txBody>
+      </p:sp>
+      <p:sp>
+        <p:nvSpPr>
+          <p:cNvPr id="13" name="Rounded Rectangle 12"/>
+          <p:cNvSpPr/>
+          <p:nvPr/>
+        </p:nvSpPr>
+        <p:spPr>
+          <a:xfrm>
+            <a:off x="1005840" y="4178808"/>
+            <a:ext cx="10149840" cy="731520"/>
+          </a:xfrm>
+          <a:prstGeom prst="roundRect">
+            <a:avLst/>
+          </a:prstGeom>
+          <a:solidFill>
+            <a:srgbClr val="F8FAFC"/>
+          </a:solidFill>
+          <a:ln w="15240">
+            <a:solidFill>
+              <a:srgbClr val="CBD5E1"/>
+            </a:solidFill>
+          </a:ln>
+        </p:spPr>
+        <p:style>
+          <a:lnRef idx="1">
+            <a:schemeClr val="accent1"/>
+          </a:lnRef>
+          <a:fillRef idx="3">
+            <a:schemeClr val="accent1"/>
+          </a:fillRef>
+          <a:effectRef idx="2">
+            <a:schemeClr val="accent1"/>
+          </a:effectRef>
+          <a:fontRef idx="minor">
+            <a:schemeClr val="lt1"/>
+          </a:fontRef>
+        </p:style>
+        <p:txBody>
+          <a:bodyPr rtlCol="0" anchor="ctr"/>
+          <a:lstStyle/>
+          <a:p>
+            <a:pPr algn="ctr"/>
+          </a:p>
+        </p:txBody>
+      </p:sp>
+      <p:sp>
+        <p:nvSpPr>
+          <p:cNvPr id="14" name="Oval 13"/>
+          <p:cNvSpPr/>
+          <p:nvPr/>
+        </p:nvSpPr>
+        <p:spPr>
+          <a:xfrm>
+            <a:off x="1234440" y="4297680"/>
+            <a:ext cx="347472" cy="347472"/>
+          </a:xfrm>
+          <a:prstGeom prst="ellipse">
+            <a:avLst/>
+          </a:prstGeom>
+          <a:solidFill>
+            <a:srgbClr val="BE123C"/>
+          </a:solidFill>
+          <a:ln>
+            <a:noFill/>
+          </a:ln>
+        </p:spPr>
+        <p:style>
+          <a:lnRef idx="1">
+            <a:schemeClr val="accent1"/>
+          </a:lnRef>
+          <a:fillRef idx="3">
+            <a:schemeClr val="accent1"/>
+          </a:fillRef>
+          <a:effectRef idx="2">
+            <a:schemeClr val="accent1"/>
+          </a:effectRef>
+          <a:fontRef idx="minor">
+            <a:schemeClr val="lt1"/>
+          </a:fontRef>
+        </p:style>
+        <p:txBody>
+          <a:bodyPr rtlCol="0" anchor="ctr"/>
+          <a:lstStyle/>
+          <a:p>
+            <a:pPr algn="ctr"/>
+          </a:p>
+        </p:txBody>
+      </p:sp>
+      <p:sp>
+        <p:nvSpPr>
+          <p:cNvPr id="15" name="TextBox 14"/>
+          <p:cNvSpPr txBox="1"/>
+          <p:nvPr/>
+        </p:nvSpPr>
+        <p:spPr>
+          <a:xfrm>
+            <a:off x="1234440" y="4343400"/>
+            <a:ext cx="347472" cy="182880"/>
+          </a:xfrm>
+          <a:prstGeom prst="rect">
+            <a:avLst/>
+          </a:prstGeom>
+          <a:noFill/>
+        </p:spPr>
+        <p:txBody>
+          <a:bodyPr wrap="square">
+            <a:spAutoFit/>
+          </a:bodyPr>
+          <a:lstStyle/>
+          <a:p>
+            <a:pPr algn="ctr"/>
+            <a:r>
+              <a:rPr sz="1000" b="1">
+                <a:solidFill>
+                  <a:srgbClr val="FFFFFF"/>
+                </a:solidFill>
+              </a:rPr>
+              <a:t>2</a:t>
+            </a:r>
+          </a:p>
+        </p:txBody>
+      </p:sp>
+      <p:sp>
+        <p:nvSpPr>
+          <p:cNvPr id="16" name="TextBox 15"/>
+          <p:cNvSpPr txBox="1"/>
+          <p:nvPr/>
+        </p:nvSpPr>
+        <p:spPr>
+          <a:xfrm>
+            <a:off x="1783080" y="4297680"/>
+            <a:ext cx="9006840" cy="347472"/>
+          </a:xfrm>
+          <a:prstGeom prst="rect">
+            <a:avLst/>
+          </a:prstGeom>
+          <a:noFill/>
+        </p:spPr>
+        <p:txBody>
+          <a:bodyPr wrap="square">
+            <a:spAutoFit/>
+          </a:bodyPr>
+          <a:lstStyle/>
+          <a:p>
+            <a:r>
+              <a:rPr sz="1700" b="0">
+                <a:solidFill>
+                  <a:srgbClr val="1A202C"/>
+                </a:solidFill>
+              </a:rPr>
+              <a:t>Who is the Holy Spirit?</a:t>
+            </a:r>
+          </a:p>
+        </p:txBody>
+      </p:sp>
+      <p:sp>
+        <p:nvSpPr>
+          <p:cNvPr id="17" name="Rounded Rectangle 16"/>
+          <p:cNvSpPr/>
+          <p:nvPr/>
+        </p:nvSpPr>
+        <p:spPr>
+          <a:xfrm>
+            <a:off x="1005840" y="5111496"/>
+            <a:ext cx="10149840" cy="731520"/>
+          </a:xfrm>
+          <a:prstGeom prst="roundRect">
+            <a:avLst/>
+          </a:prstGeom>
+          <a:solidFill>
+            <a:srgbClr val="F8FAFC"/>
+          </a:solidFill>
+          <a:ln w="15240">
+            <a:solidFill>
+              <a:srgbClr val="CBD5E1"/>
+            </a:solidFill>
+          </a:ln>
+        </p:spPr>
+        <p:style>
+          <a:lnRef idx="1">
+            <a:schemeClr val="accent1"/>
+          </a:lnRef>
+          <a:fillRef idx="3">
+            <a:schemeClr val="accent1"/>
+          </a:fillRef>
+          <a:effectRef idx="2">
+            <a:schemeClr val="accent1"/>
+          </a:effectRef>
+          <a:fontRef idx="minor">
+            <a:schemeClr val="lt1"/>
+          </a:fontRef>
+        </p:style>
+        <p:txBody>
+          <a:bodyPr rtlCol="0" anchor="ctr"/>
+          <a:lstStyle/>
+          <a:p>
+            <a:pPr algn="ctr"/>
+          </a:p>
+        </p:txBody>
+      </p:sp>
+      <p:sp>
+        <p:nvSpPr>
+          <p:cNvPr id="18" name="Oval 17"/>
+          <p:cNvSpPr/>
+          <p:nvPr/>
+        </p:nvSpPr>
+        <p:spPr>
+          <a:xfrm>
+            <a:off x="1234440" y="5230368"/>
+            <a:ext cx="347472" cy="347472"/>
+          </a:xfrm>
+          <a:prstGeom prst="ellipse">
+            <a:avLst/>
+          </a:prstGeom>
+          <a:solidFill>
+            <a:srgbClr val="BE123C"/>
+          </a:solidFill>
+          <a:ln>
+            <a:noFill/>
+          </a:ln>
+        </p:spPr>
+        <p:style>
+          <a:lnRef idx="1">
+            <a:schemeClr val="accent1"/>
+          </a:lnRef>
+          <a:fillRef idx="3">
+            <a:schemeClr val="accent1"/>
+          </a:fillRef>
+          <a:effectRef idx="2">
+            <a:schemeClr val="accent1"/>
+          </a:effectRef>
+          <a:fontRef idx="minor">
+            <a:schemeClr val="lt1"/>
+          </a:fontRef>
+        </p:style>
+        <p:txBody>
+          <a:bodyPr rtlCol="0" anchor="ctr"/>
+          <a:lstStyle/>
+          <a:p>
+            <a:pPr algn="ctr"/>
+          </a:p>
+        </p:txBody>
+      </p:sp>
+      <p:sp>
+        <p:nvSpPr>
+          <p:cNvPr id="19" name="TextBox 18"/>
+          <p:cNvSpPr txBox="1"/>
+          <p:nvPr/>
+        </p:nvSpPr>
+        <p:spPr>
+          <a:xfrm>
+            <a:off x="1234440" y="5276088"/>
+            <a:ext cx="347472" cy="182880"/>
+          </a:xfrm>
+          <a:prstGeom prst="rect">
+            <a:avLst/>
+          </a:prstGeom>
+          <a:noFill/>
+        </p:spPr>
+        <p:txBody>
+          <a:bodyPr wrap="square">
+            <a:spAutoFit/>
+          </a:bodyPr>
+          <a:lstStyle/>
+          <a:p>
+            <a:pPr algn="ctr"/>
+            <a:r>
+              <a:rPr sz="1000" b="1">
+                <a:solidFill>
+                  <a:srgbClr val="FFFFFF"/>
+                </a:solidFill>
+              </a:rPr>
+              <a:t>3</a:t>
+            </a:r>
+          </a:p>
+        </p:txBody>
+      </p:sp>
+      <p:sp>
+        <p:nvSpPr>
+          <p:cNvPr id="20" name="TextBox 19"/>
+          <p:cNvSpPr txBox="1"/>
+          <p:nvPr/>
+        </p:nvSpPr>
+        <p:spPr>
+          <a:xfrm>
+            <a:off x="1783080" y="5230368"/>
+            <a:ext cx="9006840" cy="347472"/>
+          </a:xfrm>
+          <a:prstGeom prst="rect">
+            <a:avLst/>
+          </a:prstGeom>
+          <a:noFill/>
+        </p:spPr>
+        <p:txBody>
+          <a:bodyPr wrap="square">
+            <a:spAutoFit/>
+          </a:bodyPr>
+          <a:lstStyle/>
+          <a:p>
+            <a:r>
+              <a:rPr sz="1700" b="0">
+                <a:solidFill>
+                  <a:srgbClr val="1A202C"/>
+                </a:solidFill>
+              </a:rPr>
+              <a:t>Agree on one answer before writing.</a:t>
+            </a:r>
+          </a:p>
+        </p:txBody>
+      </p:sp>
+      <p:sp>
+        <p:nvSpPr>
+          <p:cNvPr id="21" name="TextBox 20"/>
+          <p:cNvSpPr txBox="1"/>
+          <p:nvPr/>
+        </p:nvSpPr>
+        <p:spPr>
+          <a:xfrm>
+            <a:off x="777240" y="6419088"/>
+            <a:ext cx="10835640" cy="228600"/>
+          </a:xfrm>
+          <a:prstGeom prst="rect">
+            <a:avLst/>
+          </a:prstGeom>
+          <a:noFill/>
+        </p:spPr>
+        <p:txBody>
+          <a:bodyPr wrap="square">
+            <a:spAutoFit/>
+          </a:bodyPr>
+          <a:lstStyle/>
+          <a:p>
+            <a:pPr algn="r"/>
+            <a:r>
+              <a:rPr sz="1000" b="0">
+                <a:solidFill>
+                  <a:srgbClr val="5B677D"/>
+                </a:solidFill>
+              </a:rPr>
+              <a:t>Listen • Talk • Try • Explain</a:t>
             </a:r>
           </a:p>
         </p:txBody>
@@ -3726,43 +7354,100 @@
       <p:grpSpPr/>
       <p:sp>
         <p:nvSpPr>
-          <p:cNvPr id="2" name="TextBox 1"/>
+          <p:cNvPr id="2" name="Rectangle 1"/>
+          <p:cNvSpPr/>
+          <p:nvPr/>
+        </p:nvSpPr>
+        <p:spPr>
+          <a:xfrm>
+            <a:off x="0" y="0"/>
+            <a:ext cx="12191695" cy="914400"/>
+          </a:xfrm>
+          <a:prstGeom prst="rect">
+            <a:avLst/>
+          </a:prstGeom>
+          <a:solidFill>
+            <a:srgbClr val="166534"/>
+          </a:solidFill>
+          <a:ln>
+            <a:noFill/>
+          </a:ln>
+        </p:spPr>
+        <p:style>
+          <a:lnRef idx="1">
+            <a:schemeClr val="accent1"/>
+          </a:lnRef>
+          <a:fillRef idx="3">
+            <a:schemeClr val="accent1"/>
+          </a:fillRef>
+          <a:effectRef idx="2">
+            <a:schemeClr val="accent1"/>
+          </a:effectRef>
+          <a:fontRef idx="minor">
+            <a:schemeClr val="lt1"/>
+          </a:fontRef>
+        </p:style>
+        <p:txBody>
+          <a:bodyPr rtlCol="0" anchor="ctr"/>
+          <a:lstStyle/>
+          <a:p>
+            <a:pPr algn="ctr"/>
+          </a:p>
+        </p:txBody>
+      </p:sp>
+      <p:sp>
+        <p:nvSpPr>
+          <p:cNvPr id="3" name="Rectangle 2"/>
+          <p:cNvSpPr/>
+          <p:nvPr/>
+        </p:nvSpPr>
+        <p:spPr>
+          <a:xfrm>
+            <a:off x="0" y="914400"/>
+            <a:ext cx="164592" cy="5943600"/>
+          </a:xfrm>
+          <a:prstGeom prst="rect">
+            <a:avLst/>
+          </a:prstGeom>
+          <a:solidFill>
+            <a:srgbClr val="166534"/>
+          </a:solidFill>
+          <a:ln>
+            <a:noFill/>
+          </a:ln>
+        </p:spPr>
+        <p:style>
+          <a:lnRef idx="1">
+            <a:schemeClr val="accent1"/>
+          </a:lnRef>
+          <a:fillRef idx="3">
+            <a:schemeClr val="accent1"/>
+          </a:fillRef>
+          <a:effectRef idx="2">
+            <a:schemeClr val="accent1"/>
+          </a:effectRef>
+          <a:fontRef idx="minor">
+            <a:schemeClr val="lt1"/>
+          </a:fontRef>
+        </p:style>
+        <p:txBody>
+          <a:bodyPr rtlCol="0" anchor="ctr"/>
+          <a:lstStyle/>
+          <a:p>
+            <a:pPr algn="ctr"/>
+          </a:p>
+        </p:txBody>
+      </p:sp>
+      <p:sp>
+        <p:nvSpPr>
+          <p:cNvPr id="4" name="TextBox 3"/>
           <p:cNvSpPr txBox="1"/>
           <p:nvPr/>
         </p:nvSpPr>
         <p:spPr>
           <a:xfrm>
-            <a:off x="548640" y="320040"/>
-            <a:ext cx="11064240" cy="777240"/>
-          </a:xfrm>
-          <a:prstGeom prst="rect">
-            <a:avLst/>
-          </a:prstGeom>
-          <a:noFill/>
-        </p:spPr>
-        <p:txBody>
-          <a:bodyPr wrap="none">
-            <a:spAutoFit/>
-          </a:bodyPr>
-          <a:lstStyle/>
-          <a:p>
-            <a:r>
-              <a:rPr sz="3000" b="1"/>
-              <a:t>Lesson Summary</a:t>
-            </a:r>
-          </a:p>
-        </p:txBody>
-      </p:sp>
-      <p:sp>
-        <p:nvSpPr>
-          <p:cNvPr id="3" name="TextBox 2"/>
-          <p:cNvSpPr txBox="1"/>
-          <p:nvPr/>
-        </p:nvSpPr>
-        <p:spPr>
-          <a:xfrm>
-            <a:off x="868680" y="1417320"/>
-            <a:ext cx="10424160" cy="4892040"/>
+            <a:off x="594360" y="246888"/>
+            <a:ext cx="2926080" cy="320040"/>
           </a:xfrm>
           <a:prstGeom prst="rect">
             <a:avLst/>
@@ -3775,36 +7460,967 @@
           </a:bodyPr>
           <a:lstStyle/>
           <a:p>
-            <a:pPr>
-              <a:spcAft>
-                <a:spcPts val="800"/>
-              </a:spcAft>
-              <a:defRPr sz="2200"/>
-            </a:pPr>
-            <a:r>
-              <a:t>Definition of Holy Spirit.</a:t>
-            </a:r>
-          </a:p>
-          <a:p>
-            <a:pPr>
-              <a:spcAft>
-                <a:spcPts val="800"/>
-              </a:spcAft>
-              <a:defRPr sz="2200"/>
-            </a:pPr>
-            <a:r>
-              <a:t>The Trinity Structure.</a:t>
-            </a:r>
-          </a:p>
-          <a:p>
-            <a:pPr>
-              <a:spcAft>
-                <a:spcPts val="800"/>
-              </a:spcAft>
-              <a:defRPr sz="2200"/>
-            </a:pPr>
-            <a:r>
-              <a:t>Our relationship with the Spirit.</a:t>
+            <a:r>
+              <a:rPr sz="1300" b="1">
+                <a:solidFill>
+                  <a:srgbClr val="FFFFFF"/>
+                </a:solidFill>
+              </a:rPr>
+              <a:t>7. ACTIVITY</a:t>
+            </a:r>
+          </a:p>
+        </p:txBody>
+      </p:sp>
+      <p:sp>
+        <p:nvSpPr>
+          <p:cNvPr id="5" name="TextBox 4"/>
+          <p:cNvSpPr txBox="1"/>
+          <p:nvPr/>
+        </p:nvSpPr>
+        <p:spPr>
+          <a:xfrm>
+            <a:off x="7772400" y="246888"/>
+            <a:ext cx="3840480" cy="320040"/>
+          </a:xfrm>
+          <a:prstGeom prst="rect">
+            <a:avLst/>
+          </a:prstGeom>
+          <a:noFill/>
+        </p:spPr>
+        <p:txBody>
+          <a:bodyPr wrap="square">
+            <a:spAutoFit/>
+          </a:bodyPr>
+          <a:lstStyle/>
+          <a:p>
+            <a:pPr algn="r"/>
+            <a:r>
+              <a:rPr sz="1100" b="0">
+                <a:solidFill>
+                  <a:srgbClr val="FFFFFF"/>
+                </a:solidFill>
+              </a:rPr>
+              <a:t>p7_t1_christian_religious_education_0101</a:t>
+            </a:r>
+          </a:p>
+        </p:txBody>
+      </p:sp>
+      <p:sp>
+        <p:nvSpPr>
+          <p:cNvPr id="6" name="TextBox 5"/>
+          <p:cNvSpPr txBox="1"/>
+          <p:nvPr/>
+        </p:nvSpPr>
+        <p:spPr>
+          <a:xfrm>
+            <a:off x="640080" y="1143000"/>
+            <a:ext cx="10972800" cy="685800"/>
+          </a:xfrm>
+          <a:prstGeom prst="rect">
+            <a:avLst/>
+          </a:prstGeom>
+          <a:noFill/>
+        </p:spPr>
+        <p:txBody>
+          <a:bodyPr wrap="square">
+            <a:spAutoFit/>
+          </a:bodyPr>
+          <a:lstStyle/>
+          <a:p>
+            <a:r>
+              <a:rPr sz="2800" b="1">
+                <a:solidFill>
+                  <a:srgbClr val="1A202C"/>
+                </a:solidFill>
+              </a:rPr>
+              <a:t>Activity challenge</a:t>
+            </a:r>
+          </a:p>
+        </p:txBody>
+      </p:sp>
+      <p:sp>
+        <p:nvSpPr>
+          <p:cNvPr id="7" name="Rounded Rectangle 6"/>
+          <p:cNvSpPr/>
+          <p:nvPr/>
+        </p:nvSpPr>
+        <p:spPr>
+          <a:xfrm>
+            <a:off x="777240" y="1993392"/>
+            <a:ext cx="10835640" cy="1005840"/>
+          </a:xfrm>
+          <a:prstGeom prst="roundRect">
+            <a:avLst/>
+          </a:prstGeom>
+          <a:solidFill>
+            <a:srgbClr val="FFFBEB"/>
+          </a:solidFill>
+          <a:ln w="15240">
+            <a:solidFill>
+              <a:srgbClr val="166534"/>
+            </a:solidFill>
+          </a:ln>
+        </p:spPr>
+        <p:style>
+          <a:lnRef idx="1">
+            <a:schemeClr val="accent1"/>
+          </a:lnRef>
+          <a:fillRef idx="3">
+            <a:schemeClr val="accent1"/>
+          </a:fillRef>
+          <a:effectRef idx="2">
+            <a:schemeClr val="accent1"/>
+          </a:effectRef>
+          <a:fontRef idx="minor">
+            <a:schemeClr val="lt1"/>
+          </a:fontRef>
+        </p:style>
+        <p:txBody>
+          <a:bodyPr rtlCol="0" anchor="ctr"/>
+          <a:lstStyle/>
+          <a:p>
+            <a:pPr algn="ctr"/>
+          </a:p>
+        </p:txBody>
+      </p:sp>
+      <p:sp>
+        <p:nvSpPr>
+          <p:cNvPr id="8" name="TextBox 7"/>
+          <p:cNvSpPr txBox="1"/>
+          <p:nvPr/>
+        </p:nvSpPr>
+        <p:spPr>
+          <a:xfrm>
+            <a:off x="1051560" y="2212848"/>
+            <a:ext cx="10287000" cy="502920"/>
+          </a:xfrm>
+          <a:prstGeom prst="rect">
+            <a:avLst/>
+          </a:prstGeom>
+          <a:noFill/>
+        </p:spPr>
+        <p:txBody>
+          <a:bodyPr wrap="square">
+            <a:spAutoFit/>
+          </a:bodyPr>
+          <a:lstStyle/>
+          <a:p>
+            <a:r>
+              <a:rPr sz="2100" b="1">
+                <a:solidFill>
+                  <a:srgbClr val="1A202C"/>
+                </a:solidFill>
+              </a:rPr>
+              <a:t>Group task:</a:t>
+            </a:r>
+          </a:p>
+        </p:txBody>
+      </p:sp>
+      <p:sp>
+        <p:nvSpPr>
+          <p:cNvPr id="9" name="Rounded Rectangle 8"/>
+          <p:cNvSpPr/>
+          <p:nvPr/>
+        </p:nvSpPr>
+        <p:spPr>
+          <a:xfrm>
+            <a:off x="1005840" y="3246120"/>
+            <a:ext cx="10149840" cy="621792"/>
+          </a:xfrm>
+          <a:prstGeom prst="roundRect">
+            <a:avLst/>
+          </a:prstGeom>
+          <a:solidFill>
+            <a:srgbClr val="F8FAFC"/>
+          </a:solidFill>
+          <a:ln w="15240">
+            <a:solidFill>
+              <a:srgbClr val="CBD5E1"/>
+            </a:solidFill>
+          </a:ln>
+        </p:spPr>
+        <p:style>
+          <a:lnRef idx="1">
+            <a:schemeClr val="accent1"/>
+          </a:lnRef>
+          <a:fillRef idx="3">
+            <a:schemeClr val="accent1"/>
+          </a:fillRef>
+          <a:effectRef idx="2">
+            <a:schemeClr val="accent1"/>
+          </a:effectRef>
+          <a:fontRef idx="minor">
+            <a:schemeClr val="lt1"/>
+          </a:fontRef>
+        </p:style>
+        <p:txBody>
+          <a:bodyPr rtlCol="0" anchor="ctr"/>
+          <a:lstStyle/>
+          <a:p>
+            <a:pPr algn="ctr"/>
+          </a:p>
+        </p:txBody>
+      </p:sp>
+      <p:sp>
+        <p:nvSpPr>
+          <p:cNvPr id="10" name="Oval 9"/>
+          <p:cNvSpPr/>
+          <p:nvPr/>
+        </p:nvSpPr>
+        <p:spPr>
+          <a:xfrm>
+            <a:off x="1234440" y="3364991"/>
+            <a:ext cx="347472" cy="347472"/>
+          </a:xfrm>
+          <a:prstGeom prst="ellipse">
+            <a:avLst/>
+          </a:prstGeom>
+          <a:solidFill>
+            <a:srgbClr val="166534"/>
+          </a:solidFill>
+          <a:ln>
+            <a:noFill/>
+          </a:ln>
+        </p:spPr>
+        <p:style>
+          <a:lnRef idx="1">
+            <a:schemeClr val="accent1"/>
+          </a:lnRef>
+          <a:fillRef idx="3">
+            <a:schemeClr val="accent1"/>
+          </a:fillRef>
+          <a:effectRef idx="2">
+            <a:schemeClr val="accent1"/>
+          </a:effectRef>
+          <a:fontRef idx="minor">
+            <a:schemeClr val="lt1"/>
+          </a:fontRef>
+        </p:style>
+        <p:txBody>
+          <a:bodyPr rtlCol="0" anchor="ctr"/>
+          <a:lstStyle/>
+          <a:p>
+            <a:pPr algn="ctr"/>
+          </a:p>
+        </p:txBody>
+      </p:sp>
+      <p:sp>
+        <p:nvSpPr>
+          <p:cNvPr id="11" name="TextBox 10"/>
+          <p:cNvSpPr txBox="1"/>
+          <p:nvPr/>
+        </p:nvSpPr>
+        <p:spPr>
+          <a:xfrm>
+            <a:off x="1234440" y="3410712"/>
+            <a:ext cx="347472" cy="182880"/>
+          </a:xfrm>
+          <a:prstGeom prst="rect">
+            <a:avLst/>
+          </a:prstGeom>
+          <a:noFill/>
+        </p:spPr>
+        <p:txBody>
+          <a:bodyPr wrap="square">
+            <a:spAutoFit/>
+          </a:bodyPr>
+          <a:lstStyle/>
+          <a:p>
+            <a:pPr algn="ctr"/>
+            <a:r>
+              <a:rPr sz="1000" b="1">
+                <a:solidFill>
+                  <a:srgbClr val="FFFFFF"/>
+                </a:solidFill>
+              </a:rPr>
+              <a:t>1</a:t>
+            </a:r>
+          </a:p>
+        </p:txBody>
+      </p:sp>
+      <p:sp>
+        <p:nvSpPr>
+          <p:cNvPr id="12" name="TextBox 11"/>
+          <p:cNvSpPr txBox="1"/>
+          <p:nvPr/>
+        </p:nvSpPr>
+        <p:spPr>
+          <a:xfrm>
+            <a:off x="1783080" y="3364991"/>
+            <a:ext cx="9006840" cy="347472"/>
+          </a:xfrm>
+          <a:prstGeom prst="rect">
+            <a:avLst/>
+          </a:prstGeom>
+          <a:noFill/>
+        </p:spPr>
+        <p:txBody>
+          <a:bodyPr wrap="square">
+            <a:spAutoFit/>
+          </a:bodyPr>
+          <a:lstStyle/>
+          <a:p>
+            <a:r>
+              <a:rPr sz="1700" b="0">
+                <a:solidFill>
+                  <a:srgbClr val="1A202C"/>
+                </a:solidFill>
+              </a:rPr>
+              <a:t>Students blow on their hands and observe trees moving outside to understand the</a:t>
+            </a:r>
+          </a:p>
+        </p:txBody>
+      </p:sp>
+      <p:sp>
+        <p:nvSpPr>
+          <p:cNvPr id="13" name="Rounded Rectangle 12"/>
+          <p:cNvSpPr/>
+          <p:nvPr/>
+        </p:nvSpPr>
+        <p:spPr>
+          <a:xfrm>
+            <a:off x="1005840" y="4069080"/>
+            <a:ext cx="10149840" cy="621792"/>
+          </a:xfrm>
+          <a:prstGeom prst="roundRect">
+            <a:avLst/>
+          </a:prstGeom>
+          <a:solidFill>
+            <a:srgbClr val="F8FAFC"/>
+          </a:solidFill>
+          <a:ln w="15240">
+            <a:solidFill>
+              <a:srgbClr val="CBD5E1"/>
+            </a:solidFill>
+          </a:ln>
+        </p:spPr>
+        <p:style>
+          <a:lnRef idx="1">
+            <a:schemeClr val="accent1"/>
+          </a:lnRef>
+          <a:fillRef idx="3">
+            <a:schemeClr val="accent1"/>
+          </a:fillRef>
+          <a:effectRef idx="2">
+            <a:schemeClr val="accent1"/>
+          </a:effectRef>
+          <a:fontRef idx="minor">
+            <a:schemeClr val="lt1"/>
+          </a:fontRef>
+        </p:style>
+        <p:txBody>
+          <a:bodyPr rtlCol="0" anchor="ctr"/>
+          <a:lstStyle/>
+          <a:p>
+            <a:pPr algn="ctr"/>
+          </a:p>
+        </p:txBody>
+      </p:sp>
+      <p:sp>
+        <p:nvSpPr>
+          <p:cNvPr id="14" name="Oval 13"/>
+          <p:cNvSpPr/>
+          <p:nvPr/>
+        </p:nvSpPr>
+        <p:spPr>
+          <a:xfrm>
+            <a:off x="1234440" y="4187952"/>
+            <a:ext cx="347472" cy="347472"/>
+          </a:xfrm>
+          <a:prstGeom prst="ellipse">
+            <a:avLst/>
+          </a:prstGeom>
+          <a:solidFill>
+            <a:srgbClr val="166534"/>
+          </a:solidFill>
+          <a:ln>
+            <a:noFill/>
+          </a:ln>
+        </p:spPr>
+        <p:style>
+          <a:lnRef idx="1">
+            <a:schemeClr val="accent1"/>
+          </a:lnRef>
+          <a:fillRef idx="3">
+            <a:schemeClr val="accent1"/>
+          </a:fillRef>
+          <a:effectRef idx="2">
+            <a:schemeClr val="accent1"/>
+          </a:effectRef>
+          <a:fontRef idx="minor">
+            <a:schemeClr val="lt1"/>
+          </a:fontRef>
+        </p:style>
+        <p:txBody>
+          <a:bodyPr rtlCol="0" anchor="ctr"/>
+          <a:lstStyle/>
+          <a:p>
+            <a:pPr algn="ctr"/>
+          </a:p>
+        </p:txBody>
+      </p:sp>
+      <p:sp>
+        <p:nvSpPr>
+          <p:cNvPr id="15" name="TextBox 14"/>
+          <p:cNvSpPr txBox="1"/>
+          <p:nvPr/>
+        </p:nvSpPr>
+        <p:spPr>
+          <a:xfrm>
+            <a:off x="1234440" y="4233672"/>
+            <a:ext cx="347472" cy="182880"/>
+          </a:xfrm>
+          <a:prstGeom prst="rect">
+            <a:avLst/>
+          </a:prstGeom>
+          <a:noFill/>
+        </p:spPr>
+        <p:txBody>
+          <a:bodyPr wrap="square">
+            <a:spAutoFit/>
+          </a:bodyPr>
+          <a:lstStyle/>
+          <a:p>
+            <a:pPr algn="ctr"/>
+            <a:r>
+              <a:rPr sz="1000" b="1">
+                <a:solidFill>
+                  <a:srgbClr val="FFFFFF"/>
+                </a:solidFill>
+              </a:rPr>
+              <a:t>2</a:t>
+            </a:r>
+          </a:p>
+        </p:txBody>
+      </p:sp>
+      <p:sp>
+        <p:nvSpPr>
+          <p:cNvPr id="16" name="TextBox 15"/>
+          <p:cNvSpPr txBox="1"/>
+          <p:nvPr/>
+        </p:nvSpPr>
+        <p:spPr>
+          <a:xfrm>
+            <a:off x="1783080" y="4187952"/>
+            <a:ext cx="9006840" cy="347472"/>
+          </a:xfrm>
+          <a:prstGeom prst="rect">
+            <a:avLst/>
+          </a:prstGeom>
+          <a:noFill/>
+        </p:spPr>
+        <p:txBody>
+          <a:bodyPr wrap="square">
+            <a:spAutoFit/>
+          </a:bodyPr>
+          <a:lstStyle/>
+          <a:p>
+            <a:r>
+              <a:rPr sz="1700" b="0">
+                <a:solidFill>
+                  <a:srgbClr val="1A202C"/>
+                </a:solidFill>
+              </a:rPr>
+              <a:t>concept of an invisible but real force.</a:t>
+            </a:r>
+          </a:p>
+        </p:txBody>
+      </p:sp>
+      <p:sp>
+        <p:nvSpPr>
+          <p:cNvPr id="17" name="Rounded Rectangle 16"/>
+          <p:cNvSpPr/>
+          <p:nvPr/>
+        </p:nvSpPr>
+        <p:spPr>
+          <a:xfrm>
+            <a:off x="1005840" y="4892040"/>
+            <a:ext cx="10149840" cy="621792"/>
+          </a:xfrm>
+          <a:prstGeom prst="roundRect">
+            <a:avLst/>
+          </a:prstGeom>
+          <a:solidFill>
+            <a:srgbClr val="F8FAFC"/>
+          </a:solidFill>
+          <a:ln w="15240">
+            <a:solidFill>
+              <a:srgbClr val="CBD5E1"/>
+            </a:solidFill>
+          </a:ln>
+        </p:spPr>
+        <p:style>
+          <a:lnRef idx="1">
+            <a:schemeClr val="accent1"/>
+          </a:lnRef>
+          <a:fillRef idx="3">
+            <a:schemeClr val="accent1"/>
+          </a:fillRef>
+          <a:effectRef idx="2">
+            <a:schemeClr val="accent1"/>
+          </a:effectRef>
+          <a:fontRef idx="minor">
+            <a:schemeClr val="lt1"/>
+          </a:fontRef>
+        </p:style>
+        <p:txBody>
+          <a:bodyPr rtlCol="0" anchor="ctr"/>
+          <a:lstStyle/>
+          <a:p>
+            <a:pPr algn="ctr"/>
+          </a:p>
+        </p:txBody>
+      </p:sp>
+      <p:sp>
+        <p:nvSpPr>
+          <p:cNvPr id="18" name="Oval 17"/>
+          <p:cNvSpPr/>
+          <p:nvPr/>
+        </p:nvSpPr>
+        <p:spPr>
+          <a:xfrm>
+            <a:off x="1234440" y="5010912"/>
+            <a:ext cx="347472" cy="347472"/>
+          </a:xfrm>
+          <a:prstGeom prst="ellipse">
+            <a:avLst/>
+          </a:prstGeom>
+          <a:solidFill>
+            <a:srgbClr val="166534"/>
+          </a:solidFill>
+          <a:ln>
+            <a:noFill/>
+          </a:ln>
+        </p:spPr>
+        <p:style>
+          <a:lnRef idx="1">
+            <a:schemeClr val="accent1"/>
+          </a:lnRef>
+          <a:fillRef idx="3">
+            <a:schemeClr val="accent1"/>
+          </a:fillRef>
+          <a:effectRef idx="2">
+            <a:schemeClr val="accent1"/>
+          </a:effectRef>
+          <a:fontRef idx="minor">
+            <a:schemeClr val="lt1"/>
+          </a:fontRef>
+        </p:style>
+        <p:txBody>
+          <a:bodyPr rtlCol="0" anchor="ctr"/>
+          <a:lstStyle/>
+          <a:p>
+            <a:pPr algn="ctr"/>
+          </a:p>
+        </p:txBody>
+      </p:sp>
+      <p:sp>
+        <p:nvSpPr>
+          <p:cNvPr id="19" name="TextBox 18"/>
+          <p:cNvSpPr txBox="1"/>
+          <p:nvPr/>
+        </p:nvSpPr>
+        <p:spPr>
+          <a:xfrm>
+            <a:off x="1234440" y="5056632"/>
+            <a:ext cx="347472" cy="182880"/>
+          </a:xfrm>
+          <a:prstGeom prst="rect">
+            <a:avLst/>
+          </a:prstGeom>
+          <a:noFill/>
+        </p:spPr>
+        <p:txBody>
+          <a:bodyPr wrap="square">
+            <a:spAutoFit/>
+          </a:bodyPr>
+          <a:lstStyle/>
+          <a:p>
+            <a:pPr algn="ctr"/>
+            <a:r>
+              <a:rPr sz="1000" b="1">
+                <a:solidFill>
+                  <a:srgbClr val="FFFFFF"/>
+                </a:solidFill>
+              </a:rPr>
+              <a:t>3</a:t>
+            </a:r>
+          </a:p>
+        </p:txBody>
+      </p:sp>
+      <p:sp>
+        <p:nvSpPr>
+          <p:cNvPr id="20" name="TextBox 19"/>
+          <p:cNvSpPr txBox="1"/>
+          <p:nvPr/>
+        </p:nvSpPr>
+        <p:spPr>
+          <a:xfrm>
+            <a:off x="1783080" y="5010912"/>
+            <a:ext cx="9006840" cy="347472"/>
+          </a:xfrm>
+          <a:prstGeom prst="rect">
+            <a:avLst/>
+          </a:prstGeom>
+          <a:noFill/>
+        </p:spPr>
+        <p:txBody>
+          <a:bodyPr wrap="square">
+            <a:spAutoFit/>
+          </a:bodyPr>
+          <a:lstStyle/>
+          <a:p>
+            <a:r>
+              <a:rPr sz="1700" b="0">
+                <a:solidFill>
+                  <a:srgbClr val="1A202C"/>
+                </a:solidFill>
+              </a:rPr>
+              <a:t>Students discuss in pairs what it means to receive a gift that is also the person who</a:t>
+            </a:r>
+          </a:p>
+        </p:txBody>
+      </p:sp>
+      <p:sp>
+        <p:nvSpPr>
+          <p:cNvPr id="21" name="Rounded Rectangle 20"/>
+          <p:cNvSpPr/>
+          <p:nvPr/>
+        </p:nvSpPr>
+        <p:spPr>
+          <a:xfrm>
+            <a:off x="1005840" y="5715000"/>
+            <a:ext cx="10149840" cy="621792"/>
+          </a:xfrm>
+          <a:prstGeom prst="roundRect">
+            <a:avLst/>
+          </a:prstGeom>
+          <a:solidFill>
+            <a:srgbClr val="F8FAFC"/>
+          </a:solidFill>
+          <a:ln w="15240">
+            <a:solidFill>
+              <a:srgbClr val="CBD5E1"/>
+            </a:solidFill>
+          </a:ln>
+        </p:spPr>
+        <p:style>
+          <a:lnRef idx="1">
+            <a:schemeClr val="accent1"/>
+          </a:lnRef>
+          <a:fillRef idx="3">
+            <a:schemeClr val="accent1"/>
+          </a:fillRef>
+          <a:effectRef idx="2">
+            <a:schemeClr val="accent1"/>
+          </a:effectRef>
+          <a:fontRef idx="minor">
+            <a:schemeClr val="lt1"/>
+          </a:fontRef>
+        </p:style>
+        <p:txBody>
+          <a:bodyPr rtlCol="0" anchor="ctr"/>
+          <a:lstStyle/>
+          <a:p>
+            <a:pPr algn="ctr"/>
+          </a:p>
+        </p:txBody>
+      </p:sp>
+      <p:sp>
+        <p:nvSpPr>
+          <p:cNvPr id="22" name="Oval 21"/>
+          <p:cNvSpPr/>
+          <p:nvPr/>
+        </p:nvSpPr>
+        <p:spPr>
+          <a:xfrm>
+            <a:off x="1234440" y="5833872"/>
+            <a:ext cx="347472" cy="347472"/>
+          </a:xfrm>
+          <a:prstGeom prst="ellipse">
+            <a:avLst/>
+          </a:prstGeom>
+          <a:solidFill>
+            <a:srgbClr val="166534"/>
+          </a:solidFill>
+          <a:ln>
+            <a:noFill/>
+          </a:ln>
+        </p:spPr>
+        <p:style>
+          <a:lnRef idx="1">
+            <a:schemeClr val="accent1"/>
+          </a:lnRef>
+          <a:fillRef idx="3">
+            <a:schemeClr val="accent1"/>
+          </a:fillRef>
+          <a:effectRef idx="2">
+            <a:schemeClr val="accent1"/>
+          </a:effectRef>
+          <a:fontRef idx="minor">
+            <a:schemeClr val="lt1"/>
+          </a:fontRef>
+        </p:style>
+        <p:txBody>
+          <a:bodyPr rtlCol="0" anchor="ctr"/>
+          <a:lstStyle/>
+          <a:p>
+            <a:pPr algn="ctr"/>
+          </a:p>
+        </p:txBody>
+      </p:sp>
+      <p:sp>
+        <p:nvSpPr>
+          <p:cNvPr id="23" name="TextBox 22"/>
+          <p:cNvSpPr txBox="1"/>
+          <p:nvPr/>
+        </p:nvSpPr>
+        <p:spPr>
+          <a:xfrm>
+            <a:off x="1234440" y="5879592"/>
+            <a:ext cx="347472" cy="182880"/>
+          </a:xfrm>
+          <a:prstGeom prst="rect">
+            <a:avLst/>
+          </a:prstGeom>
+          <a:noFill/>
+        </p:spPr>
+        <p:txBody>
+          <a:bodyPr wrap="square">
+            <a:spAutoFit/>
+          </a:bodyPr>
+          <a:lstStyle/>
+          <a:p>
+            <a:pPr algn="ctr"/>
+            <a:r>
+              <a:rPr sz="1000" b="1">
+                <a:solidFill>
+                  <a:srgbClr val="FFFFFF"/>
+                </a:solidFill>
+              </a:rPr>
+              <a:t>4</a:t>
+            </a:r>
+          </a:p>
+        </p:txBody>
+      </p:sp>
+      <p:sp>
+        <p:nvSpPr>
+          <p:cNvPr id="24" name="TextBox 23"/>
+          <p:cNvSpPr txBox="1"/>
+          <p:nvPr/>
+        </p:nvSpPr>
+        <p:spPr>
+          <a:xfrm>
+            <a:off x="1783080" y="5833872"/>
+            <a:ext cx="9006840" cy="347472"/>
+          </a:xfrm>
+          <a:prstGeom prst="rect">
+            <a:avLst/>
+          </a:prstGeom>
+          <a:noFill/>
+        </p:spPr>
+        <p:txBody>
+          <a:bodyPr wrap="square">
+            <a:spAutoFit/>
+          </a:bodyPr>
+          <a:lstStyle/>
+          <a:p>
+            <a:r>
+              <a:rPr sz="1700" b="0">
+                <a:solidFill>
+                  <a:srgbClr val="1A202C"/>
+                </a:solidFill>
+              </a:rPr>
+              <a:t>gave it.</a:t>
+            </a:r>
+          </a:p>
+        </p:txBody>
+      </p:sp>
+      <p:sp>
+        <p:nvSpPr>
+          <p:cNvPr id="25" name="Rounded Rectangle 24"/>
+          <p:cNvSpPr/>
+          <p:nvPr/>
+        </p:nvSpPr>
+        <p:spPr>
+          <a:xfrm>
+            <a:off x="1005840" y="6537960"/>
+            <a:ext cx="10149840" cy="621792"/>
+          </a:xfrm>
+          <a:prstGeom prst="roundRect">
+            <a:avLst/>
+          </a:prstGeom>
+          <a:solidFill>
+            <a:srgbClr val="F8FAFC"/>
+          </a:solidFill>
+          <a:ln w="15240">
+            <a:solidFill>
+              <a:srgbClr val="CBD5E1"/>
+            </a:solidFill>
+          </a:ln>
+        </p:spPr>
+        <p:style>
+          <a:lnRef idx="1">
+            <a:schemeClr val="accent1"/>
+          </a:lnRef>
+          <a:fillRef idx="3">
+            <a:schemeClr val="accent1"/>
+          </a:fillRef>
+          <a:effectRef idx="2">
+            <a:schemeClr val="accent1"/>
+          </a:effectRef>
+          <a:fontRef idx="minor">
+            <a:schemeClr val="lt1"/>
+          </a:fontRef>
+        </p:style>
+        <p:txBody>
+          <a:bodyPr rtlCol="0" anchor="ctr"/>
+          <a:lstStyle/>
+          <a:p>
+            <a:pPr algn="ctr"/>
+          </a:p>
+        </p:txBody>
+      </p:sp>
+      <p:sp>
+        <p:nvSpPr>
+          <p:cNvPr id="26" name="Oval 25"/>
+          <p:cNvSpPr/>
+          <p:nvPr/>
+        </p:nvSpPr>
+        <p:spPr>
+          <a:xfrm>
+            <a:off x="1234440" y="6656832"/>
+            <a:ext cx="347472" cy="347472"/>
+          </a:xfrm>
+          <a:prstGeom prst="ellipse">
+            <a:avLst/>
+          </a:prstGeom>
+          <a:solidFill>
+            <a:srgbClr val="166534"/>
+          </a:solidFill>
+          <a:ln>
+            <a:noFill/>
+          </a:ln>
+        </p:spPr>
+        <p:style>
+          <a:lnRef idx="1">
+            <a:schemeClr val="accent1"/>
+          </a:lnRef>
+          <a:fillRef idx="3">
+            <a:schemeClr val="accent1"/>
+          </a:fillRef>
+          <a:effectRef idx="2">
+            <a:schemeClr val="accent1"/>
+          </a:effectRef>
+          <a:fontRef idx="minor">
+            <a:schemeClr val="lt1"/>
+          </a:fontRef>
+        </p:style>
+        <p:txBody>
+          <a:bodyPr rtlCol="0" anchor="ctr"/>
+          <a:lstStyle/>
+          <a:p>
+            <a:pPr algn="ctr"/>
+          </a:p>
+        </p:txBody>
+      </p:sp>
+      <p:sp>
+        <p:nvSpPr>
+          <p:cNvPr id="27" name="TextBox 26"/>
+          <p:cNvSpPr txBox="1"/>
+          <p:nvPr/>
+        </p:nvSpPr>
+        <p:spPr>
+          <a:xfrm>
+            <a:off x="1234440" y="6702552"/>
+            <a:ext cx="347472" cy="182880"/>
+          </a:xfrm>
+          <a:prstGeom prst="rect">
+            <a:avLst/>
+          </a:prstGeom>
+          <a:noFill/>
+        </p:spPr>
+        <p:txBody>
+          <a:bodyPr wrap="square">
+            <a:spAutoFit/>
+          </a:bodyPr>
+          <a:lstStyle/>
+          <a:p>
+            <a:pPr algn="ctr"/>
+            <a:r>
+              <a:rPr sz="1000" b="1">
+                <a:solidFill>
+                  <a:srgbClr val="FFFFFF"/>
+                </a:solidFill>
+              </a:rPr>
+              <a:t>5</a:t>
+            </a:r>
+          </a:p>
+        </p:txBody>
+      </p:sp>
+      <p:sp>
+        <p:nvSpPr>
+          <p:cNvPr id="28" name="TextBox 27"/>
+          <p:cNvSpPr txBox="1"/>
+          <p:nvPr/>
+        </p:nvSpPr>
+        <p:spPr>
+          <a:xfrm>
+            <a:off x="1783080" y="6656832"/>
+            <a:ext cx="9006840" cy="347472"/>
+          </a:xfrm>
+          <a:prstGeom prst="rect">
+            <a:avLst/>
+          </a:prstGeom>
+          <a:noFill/>
+        </p:spPr>
+        <p:txBody>
+          <a:bodyPr wrap="square">
+            <a:spAutoFit/>
+          </a:bodyPr>
+          <a:lstStyle/>
+          <a:p>
+            <a:r>
+              <a:rPr sz="1700" b="0">
+                <a:solidFill>
+                  <a:srgbClr val="1A202C"/>
+                </a:solidFill>
+              </a:rPr>
+              <a:t>Teacher demonstrates the Trinity using the three-stone stove analogy while learners</a:t>
+            </a:r>
+          </a:p>
+        </p:txBody>
+      </p:sp>
+      <p:sp>
+        <p:nvSpPr>
+          <p:cNvPr id="29" name="TextBox 28"/>
+          <p:cNvSpPr txBox="1"/>
+          <p:nvPr/>
+        </p:nvSpPr>
+        <p:spPr>
+          <a:xfrm>
+            <a:off x="777240" y="6419088"/>
+            <a:ext cx="10835640" cy="228600"/>
+          </a:xfrm>
+          <a:prstGeom prst="rect">
+            <a:avLst/>
+          </a:prstGeom>
+          <a:noFill/>
+        </p:spPr>
+        <p:txBody>
+          <a:bodyPr wrap="square">
+            <a:spAutoFit/>
+          </a:bodyPr>
+          <a:lstStyle/>
+          <a:p>
+            <a:pPr algn="r"/>
+            <a:r>
+              <a:rPr sz="1000" b="0">
+                <a:solidFill>
+                  <a:srgbClr val="5B677D"/>
+                </a:solidFill>
+              </a:rPr>
+              <a:t>Listen • Talk • Try • Explain</a:t>
             </a:r>
           </a:p>
         </p:txBody>
@@ -3829,43 +8445,100 @@
       <p:grpSpPr/>
       <p:sp>
         <p:nvSpPr>
-          <p:cNvPr id="2" name="TextBox 1"/>
+          <p:cNvPr id="2" name="Rectangle 1"/>
+          <p:cNvSpPr/>
+          <p:nvPr/>
+        </p:nvSpPr>
+        <p:spPr>
+          <a:xfrm>
+            <a:off x="0" y="0"/>
+            <a:ext cx="12191695" cy="914400"/>
+          </a:xfrm>
+          <a:prstGeom prst="rect">
+            <a:avLst/>
+          </a:prstGeom>
+          <a:solidFill>
+            <a:srgbClr val="4338CA"/>
+          </a:solidFill>
+          <a:ln>
+            <a:noFill/>
+          </a:ln>
+        </p:spPr>
+        <p:style>
+          <a:lnRef idx="1">
+            <a:schemeClr val="accent1"/>
+          </a:lnRef>
+          <a:fillRef idx="3">
+            <a:schemeClr val="accent1"/>
+          </a:fillRef>
+          <a:effectRef idx="2">
+            <a:schemeClr val="accent1"/>
+          </a:effectRef>
+          <a:fontRef idx="minor">
+            <a:schemeClr val="lt1"/>
+          </a:fontRef>
+        </p:style>
+        <p:txBody>
+          <a:bodyPr rtlCol="0" anchor="ctr"/>
+          <a:lstStyle/>
+          <a:p>
+            <a:pPr algn="ctr"/>
+          </a:p>
+        </p:txBody>
+      </p:sp>
+      <p:sp>
+        <p:nvSpPr>
+          <p:cNvPr id="3" name="Rectangle 2"/>
+          <p:cNvSpPr/>
+          <p:nvPr/>
+        </p:nvSpPr>
+        <p:spPr>
+          <a:xfrm>
+            <a:off x="0" y="914400"/>
+            <a:ext cx="164592" cy="5943600"/>
+          </a:xfrm>
+          <a:prstGeom prst="rect">
+            <a:avLst/>
+          </a:prstGeom>
+          <a:solidFill>
+            <a:srgbClr val="4338CA"/>
+          </a:solidFill>
+          <a:ln>
+            <a:noFill/>
+          </a:ln>
+        </p:spPr>
+        <p:style>
+          <a:lnRef idx="1">
+            <a:schemeClr val="accent1"/>
+          </a:lnRef>
+          <a:fillRef idx="3">
+            <a:schemeClr val="accent1"/>
+          </a:fillRef>
+          <a:effectRef idx="2">
+            <a:schemeClr val="accent1"/>
+          </a:effectRef>
+          <a:fontRef idx="minor">
+            <a:schemeClr val="lt1"/>
+          </a:fontRef>
+        </p:style>
+        <p:txBody>
+          <a:bodyPr rtlCol="0" anchor="ctr"/>
+          <a:lstStyle/>
+          <a:p>
+            <a:pPr algn="ctr"/>
+          </a:p>
+        </p:txBody>
+      </p:sp>
+      <p:sp>
+        <p:nvSpPr>
+          <p:cNvPr id="4" name="TextBox 3"/>
           <p:cNvSpPr txBox="1"/>
           <p:nvPr/>
         </p:nvSpPr>
         <p:spPr>
           <a:xfrm>
-            <a:off x="548640" y="320040"/>
-            <a:ext cx="11064240" cy="777240"/>
-          </a:xfrm>
-          <a:prstGeom prst="rect">
-            <a:avLst/>
-          </a:prstGeom>
-          <a:noFill/>
-        </p:spPr>
-        <p:txBody>
-          <a:bodyPr wrap="none">
-            <a:spAutoFit/>
-          </a:bodyPr>
-          <a:lstStyle/>
-          <a:p>
-            <a:r>
-              <a:rPr sz="3000" b="1"/>
-              <a:t>Check your understanding</a:t>
-            </a:r>
-          </a:p>
-        </p:txBody>
-      </p:sp>
-      <p:sp>
-        <p:nvSpPr>
-          <p:cNvPr id="3" name="TextBox 2"/>
-          <p:cNvSpPr txBox="1"/>
-          <p:nvPr/>
-        </p:nvSpPr>
-        <p:spPr>
-          <a:xfrm>
-            <a:off x="868680" y="1417320"/>
-            <a:ext cx="10424160" cy="4892040"/>
+            <a:off x="594360" y="246888"/>
+            <a:ext cx="2926080" cy="320040"/>
           </a:xfrm>
           <a:prstGeom prst="rect">
             <a:avLst/>
@@ -3878,58 +8551,657 @@
           </a:bodyPr>
           <a:lstStyle/>
           <a:p>
-            <a:pPr>
-              <a:spcAft>
-                <a:spcPts val="800"/>
-              </a:spcAft>
-              <a:defRPr sz="2200"/>
-            </a:pPr>
-            <a:r>
-              <a:t>How do you know the wind is there?</a:t>
-            </a:r>
-          </a:p>
-          <a:p>
-            <a:pPr>
-              <a:spcAft>
-                <a:spcPts val="800"/>
-              </a:spcAft>
-              <a:defRPr sz="2200"/>
-            </a:pPr>
-            <a:r>
-              <a:t>Is God visible to our physical eyes?</a:t>
-            </a:r>
-          </a:p>
-          <a:p>
-            <a:pPr>
-              <a:spcAft>
-                <a:spcPts val="800"/>
-              </a:spcAft>
-              <a:defRPr sz="2200"/>
-            </a:pPr>
-            <a:r>
-              <a:t>Who is the Holy Spirit?</a:t>
-            </a:r>
-          </a:p>
-          <a:p>
-            <a:pPr>
-              <a:spcAft>
-                <a:spcPts val="800"/>
-              </a:spcAft>
-              <a:defRPr sz="2200"/>
-            </a:pPr>
-            <a:r>
-              <a:t>Why is He called the greatest gift?</a:t>
-            </a:r>
-          </a:p>
-          <a:p>
-            <a:pPr>
-              <a:spcAft>
-                <a:spcPts val="800"/>
-              </a:spcAft>
-              <a:defRPr sz="2200"/>
-            </a:pPr>
-            <a:r>
-              <a:t>Write one answer clearly in your notebook.</a:t>
+            <a:r>
+              <a:rPr sz="1300" b="1">
+                <a:solidFill>
+                  <a:srgbClr val="FFFFFF"/>
+                </a:solidFill>
+              </a:rPr>
+              <a:t>8. EXIT</a:t>
+            </a:r>
+          </a:p>
+        </p:txBody>
+      </p:sp>
+      <p:sp>
+        <p:nvSpPr>
+          <p:cNvPr id="5" name="TextBox 4"/>
+          <p:cNvSpPr txBox="1"/>
+          <p:nvPr/>
+        </p:nvSpPr>
+        <p:spPr>
+          <a:xfrm>
+            <a:off x="7772400" y="246888"/>
+            <a:ext cx="3840480" cy="320040"/>
+          </a:xfrm>
+          <a:prstGeom prst="rect">
+            <a:avLst/>
+          </a:prstGeom>
+          <a:noFill/>
+        </p:spPr>
+        <p:txBody>
+          <a:bodyPr wrap="square">
+            <a:spAutoFit/>
+          </a:bodyPr>
+          <a:lstStyle/>
+          <a:p>
+            <a:pPr algn="r"/>
+            <a:r>
+              <a:rPr sz="1100" b="0">
+                <a:solidFill>
+                  <a:srgbClr val="FFFFFF"/>
+                </a:solidFill>
+              </a:rPr>
+              <a:t>p7_t1_christian_religious_education_0101</a:t>
+            </a:r>
+          </a:p>
+        </p:txBody>
+      </p:sp>
+      <p:sp>
+        <p:nvSpPr>
+          <p:cNvPr id="6" name="TextBox 5"/>
+          <p:cNvSpPr txBox="1"/>
+          <p:nvPr/>
+        </p:nvSpPr>
+        <p:spPr>
+          <a:xfrm>
+            <a:off x="640080" y="1143000"/>
+            <a:ext cx="10972800" cy="685800"/>
+          </a:xfrm>
+          <a:prstGeom prst="rect">
+            <a:avLst/>
+          </a:prstGeom>
+          <a:noFill/>
+        </p:spPr>
+        <p:txBody>
+          <a:bodyPr wrap="square">
+            <a:spAutoFit/>
+          </a:bodyPr>
+          <a:lstStyle/>
+          <a:p>
+            <a:r>
+              <a:rPr sz="2800" b="1">
+                <a:solidFill>
+                  <a:srgbClr val="1A202C"/>
+                </a:solidFill>
+              </a:rPr>
+              <a:t>Exit ticket</a:t>
+            </a:r>
+          </a:p>
+        </p:txBody>
+      </p:sp>
+      <p:sp>
+        <p:nvSpPr>
+          <p:cNvPr id="7" name="Rounded Rectangle 6"/>
+          <p:cNvSpPr/>
+          <p:nvPr/>
+        </p:nvSpPr>
+        <p:spPr>
+          <a:xfrm>
+            <a:off x="777240" y="1993392"/>
+            <a:ext cx="10835640" cy="1005840"/>
+          </a:xfrm>
+          <a:prstGeom prst="roundRect">
+            <a:avLst/>
+          </a:prstGeom>
+          <a:solidFill>
+            <a:srgbClr val="FFFBEB"/>
+          </a:solidFill>
+          <a:ln w="15240">
+            <a:solidFill>
+              <a:srgbClr val="4338CA"/>
+            </a:solidFill>
+          </a:ln>
+        </p:spPr>
+        <p:style>
+          <a:lnRef idx="1">
+            <a:schemeClr val="accent1"/>
+          </a:lnRef>
+          <a:fillRef idx="3">
+            <a:schemeClr val="accent1"/>
+          </a:fillRef>
+          <a:effectRef idx="2">
+            <a:schemeClr val="accent1"/>
+          </a:effectRef>
+          <a:fontRef idx="minor">
+            <a:schemeClr val="lt1"/>
+          </a:fontRef>
+        </p:style>
+        <p:txBody>
+          <a:bodyPr rtlCol="0" anchor="ctr"/>
+          <a:lstStyle/>
+          <a:p>
+            <a:pPr algn="ctr"/>
+          </a:p>
+        </p:txBody>
+      </p:sp>
+      <p:sp>
+        <p:nvSpPr>
+          <p:cNvPr id="8" name="TextBox 7"/>
+          <p:cNvSpPr txBox="1"/>
+          <p:nvPr/>
+        </p:nvSpPr>
+        <p:spPr>
+          <a:xfrm>
+            <a:off x="1051560" y="2212848"/>
+            <a:ext cx="10287000" cy="502920"/>
+          </a:xfrm>
+          <a:prstGeom prst="rect">
+            <a:avLst/>
+          </a:prstGeom>
+          <a:noFill/>
+        </p:spPr>
+        <p:txBody>
+          <a:bodyPr wrap="square">
+            <a:spAutoFit/>
+          </a:bodyPr>
+          <a:lstStyle/>
+          <a:p>
+            <a:r>
+              <a:rPr sz="2100" b="1">
+                <a:solidFill>
+                  <a:srgbClr val="1A202C"/>
+                </a:solidFill>
+              </a:rPr>
+              <a:t>Answer: Can you name the three persons?</a:t>
+            </a:r>
+          </a:p>
+        </p:txBody>
+      </p:sp>
+      <p:sp>
+        <p:nvSpPr>
+          <p:cNvPr id="9" name="Rounded Rectangle 8"/>
+          <p:cNvSpPr/>
+          <p:nvPr/>
+        </p:nvSpPr>
+        <p:spPr>
+          <a:xfrm>
+            <a:off x="1005840" y="3246120"/>
+            <a:ext cx="10149840" cy="731520"/>
+          </a:xfrm>
+          <a:prstGeom prst="roundRect">
+            <a:avLst/>
+          </a:prstGeom>
+          <a:solidFill>
+            <a:srgbClr val="F8FAFC"/>
+          </a:solidFill>
+          <a:ln w="15240">
+            <a:solidFill>
+              <a:srgbClr val="CBD5E1"/>
+            </a:solidFill>
+          </a:ln>
+        </p:spPr>
+        <p:style>
+          <a:lnRef idx="1">
+            <a:schemeClr val="accent1"/>
+          </a:lnRef>
+          <a:fillRef idx="3">
+            <a:schemeClr val="accent1"/>
+          </a:fillRef>
+          <a:effectRef idx="2">
+            <a:schemeClr val="accent1"/>
+          </a:effectRef>
+          <a:fontRef idx="minor">
+            <a:schemeClr val="lt1"/>
+          </a:fontRef>
+        </p:style>
+        <p:txBody>
+          <a:bodyPr rtlCol="0" anchor="ctr"/>
+          <a:lstStyle/>
+          <a:p>
+            <a:pPr algn="ctr"/>
+          </a:p>
+        </p:txBody>
+      </p:sp>
+      <p:sp>
+        <p:nvSpPr>
+          <p:cNvPr id="10" name="Oval 9"/>
+          <p:cNvSpPr/>
+          <p:nvPr/>
+        </p:nvSpPr>
+        <p:spPr>
+          <a:xfrm>
+            <a:off x="1234440" y="3364991"/>
+            <a:ext cx="347472" cy="347472"/>
+          </a:xfrm>
+          <a:prstGeom prst="ellipse">
+            <a:avLst/>
+          </a:prstGeom>
+          <a:solidFill>
+            <a:srgbClr val="4338CA"/>
+          </a:solidFill>
+          <a:ln>
+            <a:noFill/>
+          </a:ln>
+        </p:spPr>
+        <p:style>
+          <a:lnRef idx="1">
+            <a:schemeClr val="accent1"/>
+          </a:lnRef>
+          <a:fillRef idx="3">
+            <a:schemeClr val="accent1"/>
+          </a:fillRef>
+          <a:effectRef idx="2">
+            <a:schemeClr val="accent1"/>
+          </a:effectRef>
+          <a:fontRef idx="minor">
+            <a:schemeClr val="lt1"/>
+          </a:fontRef>
+        </p:style>
+        <p:txBody>
+          <a:bodyPr rtlCol="0" anchor="ctr"/>
+          <a:lstStyle/>
+          <a:p>
+            <a:pPr algn="ctr"/>
+          </a:p>
+        </p:txBody>
+      </p:sp>
+      <p:sp>
+        <p:nvSpPr>
+          <p:cNvPr id="11" name="TextBox 10"/>
+          <p:cNvSpPr txBox="1"/>
+          <p:nvPr/>
+        </p:nvSpPr>
+        <p:spPr>
+          <a:xfrm>
+            <a:off x="1234440" y="3410712"/>
+            <a:ext cx="347472" cy="182880"/>
+          </a:xfrm>
+          <a:prstGeom prst="rect">
+            <a:avLst/>
+          </a:prstGeom>
+          <a:noFill/>
+        </p:spPr>
+        <p:txBody>
+          <a:bodyPr wrap="square">
+            <a:spAutoFit/>
+          </a:bodyPr>
+          <a:lstStyle/>
+          <a:p>
+            <a:pPr algn="ctr"/>
+            <a:r>
+              <a:rPr sz="1000" b="1">
+                <a:solidFill>
+                  <a:srgbClr val="FFFFFF"/>
+                </a:solidFill>
+              </a:rPr>
+              <a:t>1</a:t>
+            </a:r>
+          </a:p>
+        </p:txBody>
+      </p:sp>
+      <p:sp>
+        <p:nvSpPr>
+          <p:cNvPr id="12" name="TextBox 11"/>
+          <p:cNvSpPr txBox="1"/>
+          <p:nvPr/>
+        </p:nvSpPr>
+        <p:spPr>
+          <a:xfrm>
+            <a:off x="1783080" y="3364991"/>
+            <a:ext cx="9006840" cy="347472"/>
+          </a:xfrm>
+          <a:prstGeom prst="rect">
+            <a:avLst/>
+          </a:prstGeom>
+          <a:noFill/>
+        </p:spPr>
+        <p:txBody>
+          <a:bodyPr wrap="square">
+            <a:spAutoFit/>
+          </a:bodyPr>
+          <a:lstStyle/>
+          <a:p>
+            <a:r>
+              <a:rPr sz="1700" b="0">
+                <a:solidFill>
+                  <a:srgbClr val="1A202C"/>
+                </a:solidFill>
+              </a:rPr>
+              <a:t>Use one complete sentence.</a:t>
+            </a:r>
+          </a:p>
+        </p:txBody>
+      </p:sp>
+      <p:sp>
+        <p:nvSpPr>
+          <p:cNvPr id="13" name="Rounded Rectangle 12"/>
+          <p:cNvSpPr/>
+          <p:nvPr/>
+        </p:nvSpPr>
+        <p:spPr>
+          <a:xfrm>
+            <a:off x="1005840" y="4178808"/>
+            <a:ext cx="10149840" cy="731520"/>
+          </a:xfrm>
+          <a:prstGeom prst="roundRect">
+            <a:avLst/>
+          </a:prstGeom>
+          <a:solidFill>
+            <a:srgbClr val="F8FAFC"/>
+          </a:solidFill>
+          <a:ln w="15240">
+            <a:solidFill>
+              <a:srgbClr val="CBD5E1"/>
+            </a:solidFill>
+          </a:ln>
+        </p:spPr>
+        <p:style>
+          <a:lnRef idx="1">
+            <a:schemeClr val="accent1"/>
+          </a:lnRef>
+          <a:fillRef idx="3">
+            <a:schemeClr val="accent1"/>
+          </a:fillRef>
+          <a:effectRef idx="2">
+            <a:schemeClr val="accent1"/>
+          </a:effectRef>
+          <a:fontRef idx="minor">
+            <a:schemeClr val="lt1"/>
+          </a:fontRef>
+        </p:style>
+        <p:txBody>
+          <a:bodyPr rtlCol="0" anchor="ctr"/>
+          <a:lstStyle/>
+          <a:p>
+            <a:pPr algn="ctr"/>
+          </a:p>
+        </p:txBody>
+      </p:sp>
+      <p:sp>
+        <p:nvSpPr>
+          <p:cNvPr id="14" name="Oval 13"/>
+          <p:cNvSpPr/>
+          <p:nvPr/>
+        </p:nvSpPr>
+        <p:spPr>
+          <a:xfrm>
+            <a:off x="1234440" y="4297680"/>
+            <a:ext cx="347472" cy="347472"/>
+          </a:xfrm>
+          <a:prstGeom prst="ellipse">
+            <a:avLst/>
+          </a:prstGeom>
+          <a:solidFill>
+            <a:srgbClr val="4338CA"/>
+          </a:solidFill>
+          <a:ln>
+            <a:noFill/>
+          </a:ln>
+        </p:spPr>
+        <p:style>
+          <a:lnRef idx="1">
+            <a:schemeClr val="accent1"/>
+          </a:lnRef>
+          <a:fillRef idx="3">
+            <a:schemeClr val="accent1"/>
+          </a:fillRef>
+          <a:effectRef idx="2">
+            <a:schemeClr val="accent1"/>
+          </a:effectRef>
+          <a:fontRef idx="minor">
+            <a:schemeClr val="lt1"/>
+          </a:fontRef>
+        </p:style>
+        <p:txBody>
+          <a:bodyPr rtlCol="0" anchor="ctr"/>
+          <a:lstStyle/>
+          <a:p>
+            <a:pPr algn="ctr"/>
+          </a:p>
+        </p:txBody>
+      </p:sp>
+      <p:sp>
+        <p:nvSpPr>
+          <p:cNvPr id="15" name="TextBox 14"/>
+          <p:cNvSpPr txBox="1"/>
+          <p:nvPr/>
+        </p:nvSpPr>
+        <p:spPr>
+          <a:xfrm>
+            <a:off x="1234440" y="4343400"/>
+            <a:ext cx="347472" cy="182880"/>
+          </a:xfrm>
+          <a:prstGeom prst="rect">
+            <a:avLst/>
+          </a:prstGeom>
+          <a:noFill/>
+        </p:spPr>
+        <p:txBody>
+          <a:bodyPr wrap="square">
+            <a:spAutoFit/>
+          </a:bodyPr>
+          <a:lstStyle/>
+          <a:p>
+            <a:pPr algn="ctr"/>
+            <a:r>
+              <a:rPr sz="1000" b="1">
+                <a:solidFill>
+                  <a:srgbClr val="FFFFFF"/>
+                </a:solidFill>
+              </a:rPr>
+              <a:t>2</a:t>
+            </a:r>
+          </a:p>
+        </p:txBody>
+      </p:sp>
+      <p:sp>
+        <p:nvSpPr>
+          <p:cNvPr id="16" name="TextBox 15"/>
+          <p:cNvSpPr txBox="1"/>
+          <p:nvPr/>
+        </p:nvSpPr>
+        <p:spPr>
+          <a:xfrm>
+            <a:off x="1783080" y="4297680"/>
+            <a:ext cx="9006840" cy="347472"/>
+          </a:xfrm>
+          <a:prstGeom prst="rect">
+            <a:avLst/>
+          </a:prstGeom>
+          <a:noFill/>
+        </p:spPr>
+        <p:txBody>
+          <a:bodyPr wrap="square">
+            <a:spAutoFit/>
+          </a:bodyPr>
+          <a:lstStyle/>
+          <a:p>
+            <a:r>
+              <a:rPr sz="1700" b="0">
+                <a:solidFill>
+                  <a:srgbClr val="1A202C"/>
+                </a:solidFill>
+              </a:rPr>
+              <a:t>Include one key word: Spirit, Invisible, Wind</a:t>
+            </a:r>
+          </a:p>
+        </p:txBody>
+      </p:sp>
+      <p:sp>
+        <p:nvSpPr>
+          <p:cNvPr id="17" name="Rounded Rectangle 16"/>
+          <p:cNvSpPr/>
+          <p:nvPr/>
+        </p:nvSpPr>
+        <p:spPr>
+          <a:xfrm>
+            <a:off x="1005840" y="5111496"/>
+            <a:ext cx="10149840" cy="731520"/>
+          </a:xfrm>
+          <a:prstGeom prst="roundRect">
+            <a:avLst/>
+          </a:prstGeom>
+          <a:solidFill>
+            <a:srgbClr val="F8FAFC"/>
+          </a:solidFill>
+          <a:ln w="15240">
+            <a:solidFill>
+              <a:srgbClr val="CBD5E1"/>
+            </a:solidFill>
+          </a:ln>
+        </p:spPr>
+        <p:style>
+          <a:lnRef idx="1">
+            <a:schemeClr val="accent1"/>
+          </a:lnRef>
+          <a:fillRef idx="3">
+            <a:schemeClr val="accent1"/>
+          </a:fillRef>
+          <a:effectRef idx="2">
+            <a:schemeClr val="accent1"/>
+          </a:effectRef>
+          <a:fontRef idx="minor">
+            <a:schemeClr val="lt1"/>
+          </a:fontRef>
+        </p:style>
+        <p:txBody>
+          <a:bodyPr rtlCol="0" anchor="ctr"/>
+          <a:lstStyle/>
+          <a:p>
+            <a:pPr algn="ctr"/>
+          </a:p>
+        </p:txBody>
+      </p:sp>
+      <p:sp>
+        <p:nvSpPr>
+          <p:cNvPr id="18" name="Oval 17"/>
+          <p:cNvSpPr/>
+          <p:nvPr/>
+        </p:nvSpPr>
+        <p:spPr>
+          <a:xfrm>
+            <a:off x="1234440" y="5230368"/>
+            <a:ext cx="347472" cy="347472"/>
+          </a:xfrm>
+          <a:prstGeom prst="ellipse">
+            <a:avLst/>
+          </a:prstGeom>
+          <a:solidFill>
+            <a:srgbClr val="4338CA"/>
+          </a:solidFill>
+          <a:ln>
+            <a:noFill/>
+          </a:ln>
+        </p:spPr>
+        <p:style>
+          <a:lnRef idx="1">
+            <a:schemeClr val="accent1"/>
+          </a:lnRef>
+          <a:fillRef idx="3">
+            <a:schemeClr val="accent1"/>
+          </a:fillRef>
+          <a:effectRef idx="2">
+            <a:schemeClr val="accent1"/>
+          </a:effectRef>
+          <a:fontRef idx="minor">
+            <a:schemeClr val="lt1"/>
+          </a:fontRef>
+        </p:style>
+        <p:txBody>
+          <a:bodyPr rtlCol="0" anchor="ctr"/>
+          <a:lstStyle/>
+          <a:p>
+            <a:pPr algn="ctr"/>
+          </a:p>
+        </p:txBody>
+      </p:sp>
+      <p:sp>
+        <p:nvSpPr>
+          <p:cNvPr id="19" name="TextBox 18"/>
+          <p:cNvSpPr txBox="1"/>
+          <p:nvPr/>
+        </p:nvSpPr>
+        <p:spPr>
+          <a:xfrm>
+            <a:off x="1234440" y="5276088"/>
+            <a:ext cx="347472" cy="182880"/>
+          </a:xfrm>
+          <a:prstGeom prst="rect">
+            <a:avLst/>
+          </a:prstGeom>
+          <a:noFill/>
+        </p:spPr>
+        <p:txBody>
+          <a:bodyPr wrap="square">
+            <a:spAutoFit/>
+          </a:bodyPr>
+          <a:lstStyle/>
+          <a:p>
+            <a:pPr algn="ctr"/>
+            <a:r>
+              <a:rPr sz="1000" b="1">
+                <a:solidFill>
+                  <a:srgbClr val="FFFFFF"/>
+                </a:solidFill>
+              </a:rPr>
+              <a:t>3</a:t>
+            </a:r>
+          </a:p>
+        </p:txBody>
+      </p:sp>
+      <p:sp>
+        <p:nvSpPr>
+          <p:cNvPr id="20" name="TextBox 19"/>
+          <p:cNvSpPr txBox="1"/>
+          <p:nvPr/>
+        </p:nvSpPr>
+        <p:spPr>
+          <a:xfrm>
+            <a:off x="1783080" y="5230368"/>
+            <a:ext cx="9006840" cy="347472"/>
+          </a:xfrm>
+          <a:prstGeom prst="rect">
+            <a:avLst/>
+          </a:prstGeom>
+          <a:noFill/>
+        </p:spPr>
+        <p:txBody>
+          <a:bodyPr wrap="square">
+            <a:spAutoFit/>
+          </a:bodyPr>
+          <a:lstStyle/>
+          <a:p>
+            <a:r>
+              <a:rPr sz="1700" b="0">
+                <a:solidFill>
+                  <a:srgbClr val="1A202C"/>
+                </a:solidFill>
+              </a:rPr>
+              <a:t>Hand in or read your answer aloud.</a:t>
+            </a:r>
+          </a:p>
+        </p:txBody>
+      </p:sp>
+      <p:sp>
+        <p:nvSpPr>
+          <p:cNvPr id="21" name="TextBox 20"/>
+          <p:cNvSpPr txBox="1"/>
+          <p:nvPr/>
+        </p:nvSpPr>
+        <p:spPr>
+          <a:xfrm>
+            <a:off x="777240" y="6419088"/>
+            <a:ext cx="10835640" cy="228600"/>
+          </a:xfrm>
+          <a:prstGeom prst="rect">
+            <a:avLst/>
+          </a:prstGeom>
+          <a:noFill/>
+        </p:spPr>
+        <p:txBody>
+          <a:bodyPr wrap="square">
+            <a:spAutoFit/>
+          </a:bodyPr>
+          <a:lstStyle/>
+          <a:p>
+            <a:pPr algn="r"/>
+            <a:r>
+              <a:rPr sz="1000" b="0">
+                <a:solidFill>
+                  <a:srgbClr val="5B677D"/>
+                </a:solidFill>
+              </a:rPr>
+              <a:t>Listen • Talk • Try • Explain</a:t>
             </a:r>
           </a:p>
         </p:txBody>

--- a/uganda-p7-mvp/p7_t1_christian_religious_education_0101/p7_t1_christian_religious_education_0101.pptx
+++ b/uganda-p7-mvp/p7_t1_christian_religious_education_0101/p7_t1_christian_religious_education_0101.pptx
@@ -3088,6 +3088,14 @@
 <file path=ppt/slides/slide1.xml><?xml version="1.0" encoding="utf-8"?>
 <p:sld xmlns:a="http://schemas.openxmlformats.org/drawingml/2006/main" xmlns:p="http://schemas.openxmlformats.org/presentationml/2006/main" xmlns:r="http://schemas.openxmlformats.org/officeDocument/2006/relationships">
   <p:cSld>
+    <p:bg>
+      <p:bgPr>
+        <a:solidFill>
+          <a:srgbClr val="F8FAFC"/>
+        </a:solidFill>
+        <a:effectLst/>
+      </p:bgPr>
+    </p:bg>
     <p:spTree>
       <p:nvGrpSpPr>
         <p:cNvPr id="1" name=""/>
@@ -3104,13 +3112,13 @@
         <p:spPr>
           <a:xfrm>
             <a:off x="0" y="0"/>
-            <a:ext cx="12191695" cy="914400"/>
-          </a:xfrm>
-          <a:prstGeom prst="rect">
-            <a:avLst/>
-          </a:prstGeom>
-          <a:solidFill>
-            <a:srgbClr val="2563EB"/>
+            <a:ext cx="12191695" cy="713232"/>
+          </a:xfrm>
+          <a:prstGeom prst="rect">
+            <a:avLst/>
+          </a:prstGeom>
+          <a:solidFill>
+            <a:srgbClr val="111827"/>
           </a:solidFill>
           <a:ln>
             <a:noFill/>
@@ -3146,14 +3154,14 @@
         </p:nvSpPr>
         <p:spPr>
           <a:xfrm>
-            <a:off x="0" y="914400"/>
-            <a:ext cx="164592" cy="5943600"/>
-          </a:xfrm>
-          <a:prstGeom prst="rect">
-            <a:avLst/>
-          </a:prstGeom>
-          <a:solidFill>
-            <a:srgbClr val="2563EB"/>
+            <a:off x="0" y="713232"/>
+            <a:ext cx="12191695" cy="82296"/>
+          </a:xfrm>
+          <a:prstGeom prst="rect">
+            <a:avLst/>
+          </a:prstGeom>
+          <a:solidFill>
+            <a:srgbClr val="FCD116"/>
           </a:solidFill>
           <a:ln>
             <a:noFill/>
@@ -3183,126 +3191,23 @@
       </p:sp>
       <p:sp>
         <p:nvSpPr>
-          <p:cNvPr id="4" name="TextBox 3"/>
-          <p:cNvSpPr txBox="1"/>
-          <p:nvPr/>
-        </p:nvSpPr>
-        <p:spPr>
-          <a:xfrm>
-            <a:off x="594360" y="246888"/>
-            <a:ext cx="2743200" cy="320040"/>
-          </a:xfrm>
-          <a:prstGeom prst="rect">
-            <a:avLst/>
-          </a:prstGeom>
-          <a:noFill/>
-        </p:spPr>
-        <p:txBody>
-          <a:bodyPr wrap="square">
-            <a:spAutoFit/>
-          </a:bodyPr>
-          <a:lstStyle/>
-          <a:p>
-            <a:r>
-              <a:rPr sz="1300" b="1">
-                <a:solidFill>
-                  <a:srgbClr val="FFFFFF"/>
-                </a:solidFill>
-              </a:rPr>
-              <a:t>LESSON START</a:t>
-            </a:r>
-          </a:p>
-        </p:txBody>
-      </p:sp>
-      <p:sp>
-        <p:nvSpPr>
-          <p:cNvPr id="5" name="TextBox 4"/>
-          <p:cNvSpPr txBox="1"/>
-          <p:nvPr/>
-        </p:nvSpPr>
-        <p:spPr>
-          <a:xfrm>
-            <a:off x="8412480" y="246888"/>
-            <a:ext cx="3200400" cy="320040"/>
-          </a:xfrm>
-          <a:prstGeom prst="rect">
-            <a:avLst/>
-          </a:prstGeom>
-          <a:noFill/>
-        </p:spPr>
-        <p:txBody>
-          <a:bodyPr wrap="square">
-            <a:spAutoFit/>
-          </a:bodyPr>
-          <a:lstStyle/>
-          <a:p>
-            <a:pPr algn="r"/>
-            <a:r>
-              <a:rPr sz="1100" b="0">
-                <a:solidFill>
-                  <a:srgbClr val="FFFFFF"/>
-                </a:solidFill>
-              </a:rPr>
-              <a:t>p7_t1_christian_religious_education_0101</a:t>
-            </a:r>
-          </a:p>
-        </p:txBody>
-      </p:sp>
-      <p:sp>
-        <p:nvSpPr>
-          <p:cNvPr id="6" name="TextBox 5"/>
-          <p:cNvSpPr txBox="1"/>
-          <p:nvPr/>
-        </p:nvSpPr>
-        <p:spPr>
-          <a:xfrm>
-            <a:off x="822960" y="1325880"/>
-            <a:ext cx="10698480" cy="1005840"/>
-          </a:xfrm>
-          <a:prstGeom prst="rect">
-            <a:avLst/>
-          </a:prstGeom>
-          <a:noFill/>
-        </p:spPr>
-        <p:txBody>
-          <a:bodyPr wrap="square">
-            <a:spAutoFit/>
-          </a:bodyPr>
-          <a:lstStyle/>
-          <a:p>
-            <a:pPr algn="ctr"/>
-            <a:r>
-              <a:rPr sz="3400" b="1">
-                <a:solidFill>
-                  <a:srgbClr val="1A202C"/>
-                </a:solidFill>
-              </a:rPr>
-              <a:t>Christians and the Holy Spirit (Topic 1: Enriched in the Spirit)</a:t>
-            </a:r>
-          </a:p>
-        </p:txBody>
-      </p:sp>
-      <p:sp>
-        <p:nvSpPr>
-          <p:cNvPr id="7" name="Rounded Rectangle 6"/>
+          <p:cNvPr id="4" name="Rectangle 3"/>
           <p:cNvSpPr/>
           <p:nvPr/>
         </p:nvSpPr>
         <p:spPr>
           <a:xfrm>
-            <a:off x="1143000" y="2743200"/>
-            <a:ext cx="9921240" cy="2194560"/>
-          </a:xfrm>
-          <a:prstGeom prst="roundRect">
-            <a:avLst/>
-          </a:prstGeom>
-          <a:solidFill>
-            <a:srgbClr val="EFF6FF"/>
-          </a:solidFill>
-          <a:ln w="15240">
-            <a:solidFill>
-              <a:srgbClr val="2563EB"/>
-            </a:solidFill>
+            <a:off x="0" y="795528"/>
+            <a:ext cx="12191695" cy="64008"/>
+          </a:xfrm>
+          <a:prstGeom prst="rect">
+            <a:avLst/>
+          </a:prstGeom>
+          <a:solidFill>
+            <a:srgbClr val="D90000"/>
+          </a:solidFill>
+          <a:ln>
+            <a:noFill/>
           </a:ln>
         </p:spPr>
         <p:style>
@@ -3329,14 +3234,126 @@
       </p:sp>
       <p:sp>
         <p:nvSpPr>
+          <p:cNvPr id="5" name="Rectangle 4"/>
+          <p:cNvSpPr/>
+          <p:nvPr/>
+        </p:nvSpPr>
+        <p:spPr>
+          <a:xfrm>
+            <a:off x="0" y="859536"/>
+            <a:ext cx="164592" cy="5998464"/>
+          </a:xfrm>
+          <a:prstGeom prst="rect">
+            <a:avLst/>
+          </a:prstGeom>
+          <a:solidFill>
+            <a:srgbClr val="1D4ED8"/>
+          </a:solidFill>
+          <a:ln>
+            <a:noFill/>
+          </a:ln>
+        </p:spPr>
+        <p:style>
+          <a:lnRef idx="1">
+            <a:schemeClr val="accent1"/>
+          </a:lnRef>
+          <a:fillRef idx="3">
+            <a:schemeClr val="accent1"/>
+          </a:fillRef>
+          <a:effectRef idx="2">
+            <a:schemeClr val="accent1"/>
+          </a:effectRef>
+          <a:fontRef idx="minor">
+            <a:schemeClr val="lt1"/>
+          </a:fontRef>
+        </p:style>
+        <p:txBody>
+          <a:bodyPr rtlCol="0" anchor="ctr"/>
+          <a:lstStyle/>
+          <a:p>
+            <a:pPr algn="ctr"/>
+          </a:p>
+        </p:txBody>
+      </p:sp>
+      <p:sp>
+        <p:nvSpPr>
+          <p:cNvPr id="6" name="TextBox 5"/>
+          <p:cNvSpPr txBox="1"/>
+          <p:nvPr/>
+        </p:nvSpPr>
+        <p:spPr>
+          <a:xfrm>
+            <a:off x="502920" y="210312"/>
+            <a:ext cx="2926080" cy="256032"/>
+          </a:xfrm>
+          <a:prstGeom prst="rect">
+            <a:avLst/>
+          </a:prstGeom>
+          <a:noFill/>
+        </p:spPr>
+        <p:txBody>
+          <a:bodyPr wrap="square" lIns="0" rIns="0" tIns="0" bIns="0">
+            <a:spAutoFit/>
+          </a:bodyPr>
+          <a:lstStyle/>
+          <a:p>
+            <a:r>
+              <a:rPr sz="1200" b="1">
+                <a:solidFill>
+                  <a:srgbClr val="FFFFFF"/>
+                </a:solidFill>
+                <a:latin typeface="Arial"/>
+              </a:rPr>
+              <a:t>UGANDA P7 LESSON</a:t>
+            </a:r>
+          </a:p>
+        </p:txBody>
+      </p:sp>
+      <p:sp>
+        <p:nvSpPr>
+          <p:cNvPr id="7" name="TextBox 6"/>
+          <p:cNvSpPr txBox="1"/>
+          <p:nvPr/>
+        </p:nvSpPr>
+        <p:spPr>
+          <a:xfrm>
+            <a:off x="7589520" y="210312"/>
+            <a:ext cx="4069080" cy="256032"/>
+          </a:xfrm>
+          <a:prstGeom prst="rect">
+            <a:avLst/>
+          </a:prstGeom>
+          <a:noFill/>
+        </p:spPr>
+        <p:txBody>
+          <a:bodyPr wrap="square" lIns="0" rIns="0" tIns="0" bIns="0">
+            <a:spAutoFit/>
+          </a:bodyPr>
+          <a:lstStyle/>
+          <a:p>
+            <a:pPr algn="r"/>
+            <a:r>
+              <a:rPr sz="1000" b="0">
+                <a:solidFill>
+                  <a:srgbClr val="FFFFFF"/>
+                </a:solidFill>
+                <a:latin typeface="Arial"/>
+              </a:rPr>
+              <a:t>p7_t1_christian_religious_education_0101</a:t>
+            </a:r>
+          </a:p>
+        </p:txBody>
+      </p:sp>
+      <p:sp>
+        <p:nvSpPr>
           <p:cNvPr id="8" name="TextBox 7"/>
           <p:cNvSpPr txBox="1"/>
           <p:nvPr/>
         </p:nvSpPr>
         <p:spPr>
           <a:xfrm>
-            <a:off x="1508760" y="2999232"/>
-            <a:ext cx="9189720" cy="411480"/>
+            <a:off x="731520" y="1207008"/>
+            <a:ext cx="10789920" cy="731520"/>
           </a:xfrm>
           <a:prstGeom prst="rect">
             <a:avLst/>
@@ -3344,17 +3361,98 @@
           <a:noFill/>
         </p:spPr>
         <p:txBody>
-          <a:bodyPr wrap="square">
+          <a:bodyPr wrap="square" lIns="0" rIns="0" tIns="0" bIns="0">
             <a:spAutoFit/>
           </a:bodyPr>
           <a:lstStyle/>
           <a:p>
             <a:pPr algn="ctr"/>
             <a:r>
-              <a:rPr sz="1800" b="1">
-                <a:solidFill>
-                  <a:srgbClr val="2563EB"/>
-                </a:solidFill>
+              <a:rPr sz="3000" b="1">
+                <a:solidFill>
+                  <a:srgbClr val="111827"/>
+                </a:solidFill>
+                <a:latin typeface="Arial"/>
+              </a:rPr>
+              <a:t>Christians and the Holy Spirit (Topic 1: Enriched in the Spirit)</a:t>
+            </a:r>
+          </a:p>
+        </p:txBody>
+      </p:sp>
+      <p:sp>
+        <p:nvSpPr>
+          <p:cNvPr id="9" name="Rectangle 8"/>
+          <p:cNvSpPr/>
+          <p:nvPr/>
+        </p:nvSpPr>
+        <p:spPr>
+          <a:xfrm>
+            <a:off x="1143000" y="2423160"/>
+            <a:ext cx="9921240" cy="2423160"/>
+          </a:xfrm>
+          <a:prstGeom prst="rect">
+            <a:avLst/>
+          </a:prstGeom>
+          <a:solidFill>
+            <a:srgbClr val="FFFFFF"/>
+          </a:solidFill>
+          <a:ln w="19050">
+            <a:solidFill>
+              <a:srgbClr val="1D4ED8"/>
+            </a:solidFill>
+          </a:ln>
+        </p:spPr>
+        <p:style>
+          <a:lnRef idx="1">
+            <a:schemeClr val="accent1"/>
+          </a:lnRef>
+          <a:fillRef idx="3">
+            <a:schemeClr val="accent1"/>
+          </a:fillRef>
+          <a:effectRef idx="2">
+            <a:schemeClr val="accent1"/>
+          </a:effectRef>
+          <a:fontRef idx="minor">
+            <a:schemeClr val="lt1"/>
+          </a:fontRef>
+        </p:style>
+        <p:txBody>
+          <a:bodyPr rtlCol="0" anchor="ctr"/>
+          <a:lstStyle/>
+          <a:p>
+            <a:pPr algn="ctr"/>
+          </a:p>
+        </p:txBody>
+      </p:sp>
+      <p:sp>
+        <p:nvSpPr>
+          <p:cNvPr id="10" name="TextBox 9"/>
+          <p:cNvSpPr txBox="1"/>
+          <p:nvPr/>
+        </p:nvSpPr>
+        <p:spPr>
+          <a:xfrm>
+            <a:off x="1463040" y="2743200"/>
+            <a:ext cx="9281160" cy="347472"/>
+          </a:xfrm>
+          <a:prstGeom prst="rect">
+            <a:avLst/>
+          </a:prstGeom>
+          <a:noFill/>
+        </p:spPr>
+        <p:txBody>
+          <a:bodyPr wrap="square" lIns="0" rIns="0" tIns="0" bIns="0">
+            <a:spAutoFit/>
+          </a:bodyPr>
+          <a:lstStyle/>
+          <a:p>
+            <a:pPr algn="ctr"/>
+            <a:r>
+              <a:rPr sz="1700" b="1">
+                <a:solidFill>
+                  <a:srgbClr val="1D4ED8"/>
+                </a:solidFill>
+                <a:latin typeface="Arial"/>
               </a:rPr>
               <a:t>Christian Religious Education</a:t>
             </a:r>
@@ -3363,14 +3461,14 @@
       </p:sp>
       <p:sp>
         <p:nvSpPr>
-          <p:cNvPr id="9" name="TextBox 8"/>
+          <p:cNvPr id="11" name="TextBox 10"/>
           <p:cNvSpPr txBox="1"/>
           <p:nvPr/>
         </p:nvSpPr>
         <p:spPr>
           <a:xfrm>
-            <a:off x="1508760" y="3611880"/>
-            <a:ext cx="9189720" cy="914400"/>
+            <a:off x="1645920" y="3355848"/>
+            <a:ext cx="8915400" cy="868680"/>
           </a:xfrm>
           <a:prstGeom prst="rect">
             <a:avLst/>
@@ -3378,17 +3476,18 @@
           <a:noFill/>
         </p:spPr>
         <p:txBody>
-          <a:bodyPr wrap="square">
+          <a:bodyPr wrap="square" lIns="0" rIns="0" tIns="0" bIns="0">
             <a:spAutoFit/>
           </a:bodyPr>
           <a:lstStyle/>
           <a:p>
             <a:pPr algn="ctr"/>
             <a:r>
-              <a:rPr sz="2500" b="1">
-                <a:solidFill>
-                  <a:srgbClr val="1A202C"/>
-                </a:solidFill>
+              <a:rPr sz="2400" b="1">
+                <a:solidFill>
+                  <a:srgbClr val="111827"/>
+                </a:solidFill>
+                <a:latin typeface="Arial"/>
               </a:rPr>
               <a:t>Big question: Can you see the wind?</a:t>
             </a:r>
@@ -3397,14 +3496,14 @@
       </p:sp>
       <p:sp>
         <p:nvSpPr>
-          <p:cNvPr id="10" name="TextBox 9"/>
+          <p:cNvPr id="12" name="TextBox 11"/>
           <p:cNvSpPr txBox="1"/>
           <p:nvPr/>
         </p:nvSpPr>
         <p:spPr>
           <a:xfrm>
-            <a:off x="1508760" y="4617720"/>
-            <a:ext cx="9189720" cy="320040"/>
+            <a:off x="1143000" y="5074920"/>
+            <a:ext cx="9921240" cy="320040"/>
           </a:xfrm>
           <a:prstGeom prst="rect">
             <a:avLst/>
@@ -3412,19 +3511,20 @@
           <a:noFill/>
         </p:spPr>
         <p:txBody>
-          <a:bodyPr wrap="square">
+          <a:bodyPr wrap="square" lIns="0" rIns="0" tIns="0" bIns="0">
             <a:spAutoFit/>
           </a:bodyPr>
           <a:lstStyle/>
           <a:p>
             <a:pPr algn="ctr"/>
             <a:r>
-              <a:rPr sz="1500" b="0">
-                <a:solidFill>
-                  <a:srgbClr val="5B677D"/>
-                </a:solidFill>
+              <a:rPr sz="1400" b="0">
+                <a:solidFill>
+                  <a:srgbClr val="475569"/>
+                </a:solidFill>
+                <a:latin typeface="Arial"/>
               </a:rPr>
-              <a:t>Think silently first. Then be ready to explain one idea.</a:t>
+              <a:t>Think silently → pair talk → share one idea</a:t>
             </a:r>
           </a:p>
         </p:txBody>
@@ -3440,6 +3540,14 @@
 <file path=ppt/slides/slide2.xml><?xml version="1.0" encoding="utf-8"?>
 <p:sld xmlns:a="http://schemas.openxmlformats.org/drawingml/2006/main" xmlns:p="http://schemas.openxmlformats.org/presentationml/2006/main" xmlns:r="http://schemas.openxmlformats.org/officeDocument/2006/relationships">
   <p:cSld>
+    <p:bg>
+      <p:bgPr>
+        <a:solidFill>
+          <a:srgbClr val="F8FAFC"/>
+        </a:solidFill>
+        <a:effectLst/>
+      </p:bgPr>
+    </p:bg>
     <p:spTree>
       <p:nvGrpSpPr>
         <p:cNvPr id="1" name=""/>
@@ -3456,13 +3564,13 @@
         <p:spPr>
           <a:xfrm>
             <a:off x="0" y="0"/>
-            <a:ext cx="12191695" cy="914400"/>
-          </a:xfrm>
-          <a:prstGeom prst="rect">
-            <a:avLst/>
-          </a:prstGeom>
-          <a:solidFill>
-            <a:srgbClr val="059669"/>
+            <a:ext cx="12191695" cy="713232"/>
+          </a:xfrm>
+          <a:prstGeom prst="rect">
+            <a:avLst/>
+          </a:prstGeom>
+          <a:solidFill>
+            <a:srgbClr val="111827"/>
           </a:solidFill>
           <a:ln>
             <a:noFill/>
@@ -3498,14 +3606,14 @@
         </p:nvSpPr>
         <p:spPr>
           <a:xfrm>
-            <a:off x="0" y="914400"/>
-            <a:ext cx="164592" cy="5943600"/>
-          </a:xfrm>
-          <a:prstGeom prst="rect">
-            <a:avLst/>
-          </a:prstGeom>
-          <a:solidFill>
-            <a:srgbClr val="059669"/>
+            <a:off x="0" y="713232"/>
+            <a:ext cx="12191695" cy="82296"/>
+          </a:xfrm>
+          <a:prstGeom prst="rect">
+            <a:avLst/>
+          </a:prstGeom>
+          <a:solidFill>
+            <a:srgbClr val="FCD116"/>
           </a:solidFill>
           <a:ln>
             <a:noFill/>
@@ -3535,125 +3643,23 @@
       </p:sp>
       <p:sp>
         <p:nvSpPr>
-          <p:cNvPr id="4" name="TextBox 3"/>
-          <p:cNvSpPr txBox="1"/>
-          <p:nvPr/>
-        </p:nvSpPr>
-        <p:spPr>
-          <a:xfrm>
-            <a:off x="594360" y="246888"/>
-            <a:ext cx="2926080" cy="320040"/>
-          </a:xfrm>
-          <a:prstGeom prst="rect">
-            <a:avLst/>
-          </a:prstGeom>
-          <a:noFill/>
-        </p:spPr>
-        <p:txBody>
-          <a:bodyPr wrap="square">
-            <a:spAutoFit/>
-          </a:bodyPr>
-          <a:lstStyle/>
-          <a:p>
-            <a:r>
-              <a:rPr sz="1300" b="1">
-                <a:solidFill>
-                  <a:srgbClr val="FFFFFF"/>
-                </a:solidFill>
-              </a:rPr>
-              <a:t>2. MISSION</a:t>
-            </a:r>
-          </a:p>
-        </p:txBody>
-      </p:sp>
-      <p:sp>
-        <p:nvSpPr>
-          <p:cNvPr id="5" name="TextBox 4"/>
-          <p:cNvSpPr txBox="1"/>
-          <p:nvPr/>
-        </p:nvSpPr>
-        <p:spPr>
-          <a:xfrm>
-            <a:off x="7772400" y="246888"/>
-            <a:ext cx="3840480" cy="320040"/>
-          </a:xfrm>
-          <a:prstGeom prst="rect">
-            <a:avLst/>
-          </a:prstGeom>
-          <a:noFill/>
-        </p:spPr>
-        <p:txBody>
-          <a:bodyPr wrap="square">
-            <a:spAutoFit/>
-          </a:bodyPr>
-          <a:lstStyle/>
-          <a:p>
-            <a:pPr algn="r"/>
-            <a:r>
-              <a:rPr sz="1100" b="0">
-                <a:solidFill>
-                  <a:srgbClr val="FFFFFF"/>
-                </a:solidFill>
-              </a:rPr>
-              <a:t>p7_t1_christian_religious_education_0101</a:t>
-            </a:r>
-          </a:p>
-        </p:txBody>
-      </p:sp>
-      <p:sp>
-        <p:nvSpPr>
-          <p:cNvPr id="6" name="TextBox 5"/>
-          <p:cNvSpPr txBox="1"/>
-          <p:nvPr/>
-        </p:nvSpPr>
-        <p:spPr>
-          <a:xfrm>
-            <a:off x="640080" y="1143000"/>
-            <a:ext cx="10972800" cy="685800"/>
-          </a:xfrm>
-          <a:prstGeom prst="rect">
-            <a:avLst/>
-          </a:prstGeom>
-          <a:noFill/>
-        </p:spPr>
-        <p:txBody>
-          <a:bodyPr wrap="square">
-            <a:spAutoFit/>
-          </a:bodyPr>
-          <a:lstStyle/>
-          <a:p>
-            <a:r>
-              <a:rPr sz="2800" b="1">
-                <a:solidFill>
-                  <a:srgbClr val="1A202C"/>
-                </a:solidFill>
-              </a:rPr>
-              <a:t>Today's mission</a:t>
-            </a:r>
-          </a:p>
-        </p:txBody>
-      </p:sp>
-      <p:sp>
-        <p:nvSpPr>
-          <p:cNvPr id="7" name="Rounded Rectangle 6"/>
+          <p:cNvPr id="4" name="Rectangle 3"/>
           <p:cNvSpPr/>
           <p:nvPr/>
         </p:nvSpPr>
         <p:spPr>
           <a:xfrm>
-            <a:off x="777240" y="1993392"/>
-            <a:ext cx="10835640" cy="1005840"/>
-          </a:xfrm>
-          <a:prstGeom prst="roundRect">
-            <a:avLst/>
-          </a:prstGeom>
-          <a:solidFill>
-            <a:srgbClr val="FFFBEB"/>
-          </a:solidFill>
-          <a:ln w="15240">
-            <a:solidFill>
-              <a:srgbClr val="059669"/>
-            </a:solidFill>
+            <a:off x="0" y="795528"/>
+            <a:ext cx="12191695" cy="64008"/>
+          </a:xfrm>
+          <a:prstGeom prst="rect">
+            <a:avLst/>
+          </a:prstGeom>
+          <a:solidFill>
+            <a:srgbClr val="D90000"/>
+          </a:solidFill>
+          <a:ln>
+            <a:noFill/>
           </a:ln>
         </p:spPr>
         <p:style>
@@ -3680,58 +3686,23 @@
       </p:sp>
       <p:sp>
         <p:nvSpPr>
-          <p:cNvPr id="8" name="TextBox 7"/>
-          <p:cNvSpPr txBox="1"/>
-          <p:nvPr/>
-        </p:nvSpPr>
-        <p:spPr>
-          <a:xfrm>
-            <a:off x="1051560" y="2212848"/>
-            <a:ext cx="10287000" cy="502920"/>
-          </a:xfrm>
-          <a:prstGeom prst="rect">
-            <a:avLst/>
-          </a:prstGeom>
-          <a:noFill/>
-        </p:spPr>
-        <p:txBody>
-          <a:bodyPr wrap="square">
-            <a:spAutoFit/>
-          </a:bodyPr>
-          <a:lstStyle/>
-          <a:p>
-            <a:r>
-              <a:rPr sz="2100" b="1">
-                <a:solidFill>
-                  <a:srgbClr val="1A202C"/>
-                </a:solidFill>
-              </a:rPr>
-              <a:t>Goal: I can define the Holy Spirit and recognize Him as the third person of the</a:t>
-            </a:r>
-          </a:p>
-        </p:txBody>
-      </p:sp>
-      <p:sp>
-        <p:nvSpPr>
-          <p:cNvPr id="9" name="Rounded Rectangle 8"/>
+          <p:cNvPr id="5" name="Rectangle 4"/>
           <p:cNvSpPr/>
           <p:nvPr/>
         </p:nvSpPr>
         <p:spPr>
           <a:xfrm>
-            <a:off x="1005840" y="3246120"/>
-            <a:ext cx="10149840" cy="731520"/>
-          </a:xfrm>
-          <a:prstGeom prst="roundRect">
-            <a:avLst/>
-          </a:prstGeom>
-          <a:solidFill>
-            <a:srgbClr val="F8FAFC"/>
-          </a:solidFill>
-          <a:ln w="15240">
-            <a:solidFill>
-              <a:srgbClr val="CBD5E1"/>
-            </a:solidFill>
+            <a:off x="0" y="859536"/>
+            <a:ext cx="164592" cy="5998464"/>
+          </a:xfrm>
+          <a:prstGeom prst="rect">
+            <a:avLst/>
+          </a:prstGeom>
+          <a:solidFill>
+            <a:srgbClr val="1B7F3A"/>
+          </a:solidFill>
+          <a:ln>
+            <a:noFill/>
           </a:ln>
         </p:spPr>
         <p:style>
@@ -3758,23 +3729,128 @@
       </p:sp>
       <p:sp>
         <p:nvSpPr>
-          <p:cNvPr id="10" name="Oval 9"/>
+          <p:cNvPr id="6" name="TextBox 5"/>
+          <p:cNvSpPr txBox="1"/>
+          <p:nvPr/>
+        </p:nvSpPr>
+        <p:spPr>
+          <a:xfrm>
+            <a:off x="502920" y="210312"/>
+            <a:ext cx="3200400" cy="256032"/>
+          </a:xfrm>
+          <a:prstGeom prst="rect">
+            <a:avLst/>
+          </a:prstGeom>
+          <a:noFill/>
+        </p:spPr>
+        <p:txBody>
+          <a:bodyPr wrap="square" lIns="0" rIns="0" tIns="0" bIns="0">
+            <a:spAutoFit/>
+          </a:bodyPr>
+          <a:lstStyle/>
+          <a:p>
+            <a:r>
+              <a:rPr sz="1200" b="1">
+                <a:solidFill>
+                  <a:srgbClr val="FFFFFF"/>
+                </a:solidFill>
+                <a:latin typeface="Arial"/>
+              </a:rPr>
+              <a:t>2. MISSION</a:t>
+            </a:r>
+          </a:p>
+        </p:txBody>
+      </p:sp>
+      <p:sp>
+        <p:nvSpPr>
+          <p:cNvPr id="7" name="TextBox 6"/>
+          <p:cNvSpPr txBox="1"/>
+          <p:nvPr/>
+        </p:nvSpPr>
+        <p:spPr>
+          <a:xfrm>
+            <a:off x="7589520" y="210312"/>
+            <a:ext cx="4069080" cy="256032"/>
+          </a:xfrm>
+          <a:prstGeom prst="rect">
+            <a:avLst/>
+          </a:prstGeom>
+          <a:noFill/>
+        </p:spPr>
+        <p:txBody>
+          <a:bodyPr wrap="square" lIns="0" rIns="0" tIns="0" bIns="0">
+            <a:spAutoFit/>
+          </a:bodyPr>
+          <a:lstStyle/>
+          <a:p>
+            <a:pPr algn="r"/>
+            <a:r>
+              <a:rPr sz="1000" b="0">
+                <a:solidFill>
+                  <a:srgbClr val="FFFFFF"/>
+                </a:solidFill>
+                <a:latin typeface="Arial"/>
+              </a:rPr>
+              <a:t>p7_t1_christian_religious_education_0101</a:t>
+            </a:r>
+          </a:p>
+        </p:txBody>
+      </p:sp>
+      <p:sp>
+        <p:nvSpPr>
+          <p:cNvPr id="8" name="TextBox 7"/>
+          <p:cNvSpPr txBox="1"/>
+          <p:nvPr/>
+        </p:nvSpPr>
+        <p:spPr>
+          <a:xfrm>
+            <a:off x="594360" y="1042415"/>
+            <a:ext cx="11109960" cy="566928"/>
+          </a:xfrm>
+          <a:prstGeom prst="rect">
+            <a:avLst/>
+          </a:prstGeom>
+          <a:noFill/>
+        </p:spPr>
+        <p:txBody>
+          <a:bodyPr wrap="square" lIns="0" rIns="0" tIns="0" bIns="0">
+            <a:spAutoFit/>
+          </a:bodyPr>
+          <a:lstStyle/>
+          <a:p>
+            <a:r>
+              <a:rPr sz="2600" b="1">
+                <a:solidFill>
+                  <a:srgbClr val="111827"/>
+                </a:solidFill>
+                <a:latin typeface="Arial"/>
+              </a:rPr>
+              <a:t>Today's mission</a:t>
+            </a:r>
+          </a:p>
+        </p:txBody>
+      </p:sp>
+      <p:sp>
+        <p:nvSpPr>
+          <p:cNvPr id="9" name="Rectangle 8"/>
           <p:cNvSpPr/>
           <p:nvPr/>
         </p:nvSpPr>
         <p:spPr>
           <a:xfrm>
-            <a:off x="1234440" y="3364991"/>
-            <a:ext cx="347472" cy="347472"/>
-          </a:xfrm>
-          <a:prstGeom prst="ellipse">
-            <a:avLst/>
-          </a:prstGeom>
-          <a:solidFill>
-            <a:srgbClr val="059669"/>
-          </a:solidFill>
-          <a:ln>
-            <a:noFill/>
+            <a:off x="685800" y="1874519"/>
+            <a:ext cx="10835640" cy="804672"/>
+          </a:xfrm>
+          <a:prstGeom prst="rect">
+            <a:avLst/>
+          </a:prstGeom>
+          <a:solidFill>
+            <a:srgbClr val="FFF7E0"/>
+          </a:solidFill>
+          <a:ln w="17780">
+            <a:solidFill>
+              <a:srgbClr val="1B7F3A"/>
+            </a:solidFill>
           </a:ln>
         </p:spPr>
         <p:style>
@@ -3792,98 +3868,40 @@
           </a:fontRef>
         </p:style>
         <p:txBody>
-          <a:bodyPr rtlCol="0" anchor="ctr"/>
+          <a:bodyPr rtlCol="0" anchor="ctr" wrap="square" lIns="101600" rIns="101600" tIns="38100" bIns="38100"/>
           <a:lstStyle/>
           <a:p>
             <a:pPr algn="ctr"/>
-          </a:p>
-        </p:txBody>
-      </p:sp>
-      <p:sp>
-        <p:nvSpPr>
-          <p:cNvPr id="11" name="TextBox 10"/>
-          <p:cNvSpPr txBox="1"/>
-          <p:nvPr/>
-        </p:nvSpPr>
-        <p:spPr>
-          <a:xfrm>
-            <a:off x="1234440" y="3410712"/>
-            <a:ext cx="347472" cy="182880"/>
-          </a:xfrm>
-          <a:prstGeom prst="rect">
-            <a:avLst/>
-          </a:prstGeom>
-          <a:noFill/>
-        </p:spPr>
-        <p:txBody>
-          <a:bodyPr wrap="square">
-            <a:spAutoFit/>
-          </a:bodyPr>
-          <a:lstStyle/>
-          <a:p>
-            <a:pPr algn="ctr"/>
-            <a:r>
-              <a:rPr sz="1000" b="1">
-                <a:solidFill>
-                  <a:srgbClr val="FFFFFF"/>
-                </a:solidFill>
+            <a:r>
+              <a:rPr sz="1900" b="1">
+                <a:solidFill>
+                  <a:srgbClr val="111827"/>
+                </a:solidFill>
+                <a:latin typeface="Arial"/>
               </a:rPr>
-              <a:t>1</a:t>
-            </a:r>
-          </a:p>
-        </p:txBody>
-      </p:sp>
-      <p:sp>
-        <p:nvSpPr>
-          <p:cNvPr id="12" name="TextBox 11"/>
-          <p:cNvSpPr txBox="1"/>
-          <p:nvPr/>
-        </p:nvSpPr>
-        <p:spPr>
-          <a:xfrm>
-            <a:off x="1783080" y="3364991"/>
-            <a:ext cx="9006840" cy="347472"/>
-          </a:xfrm>
-          <a:prstGeom prst="rect">
-            <a:avLst/>
-          </a:prstGeom>
-          <a:noFill/>
-        </p:spPr>
-        <p:txBody>
-          <a:bodyPr wrap="square">
-            <a:spAutoFit/>
-          </a:bodyPr>
-          <a:lstStyle/>
-          <a:p>
-            <a:r>
-              <a:rPr sz="1700" b="0">
-                <a:solidFill>
-                  <a:srgbClr val="1A202C"/>
-                </a:solidFill>
-              </a:rPr>
-              <a:t>Trinity.</a:t>
-            </a:r>
-          </a:p>
-        </p:txBody>
-      </p:sp>
-      <p:sp>
-        <p:nvSpPr>
-          <p:cNvPr id="13" name="Rounded Rectangle 12"/>
+              <a:t>Goal: I can define the Holy Spirit and recognize Him as the t...</a:t>
+            </a:r>
+          </a:p>
+        </p:txBody>
+      </p:sp>
+      <p:sp>
+        <p:nvSpPr>
+          <p:cNvPr id="10" name="Rectangle 9"/>
           <p:cNvSpPr/>
           <p:nvPr/>
         </p:nvSpPr>
         <p:spPr>
           <a:xfrm>
-            <a:off x="1005840" y="4178808"/>
-            <a:ext cx="10149840" cy="731520"/>
-          </a:xfrm>
-          <a:prstGeom prst="roundRect">
-            <a:avLst/>
-          </a:prstGeom>
-          <a:solidFill>
-            <a:srgbClr val="F8FAFC"/>
-          </a:solidFill>
-          <a:ln w="15240">
+            <a:off x="868680" y="2971800"/>
+            <a:ext cx="10378440" cy="713232"/>
+          </a:xfrm>
+          <a:prstGeom prst="rect">
+            <a:avLst/>
+          </a:prstGeom>
+          <a:solidFill>
+            <a:srgbClr val="FFFFFF"/>
+          </a:solidFill>
+          <a:ln w="11430">
             <a:solidFill>
               <a:srgbClr val="CBD5E1"/>
             </a:solidFill>
@@ -3913,20 +3931,20 @@
       </p:sp>
       <p:sp>
         <p:nvSpPr>
-          <p:cNvPr id="14" name="Oval 13"/>
+          <p:cNvPr id="11" name="Rectangle 10"/>
           <p:cNvSpPr/>
           <p:nvPr/>
         </p:nvSpPr>
         <p:spPr>
           <a:xfrm>
-            <a:off x="1234440" y="4297680"/>
-            <a:ext cx="347472" cy="347472"/>
-          </a:xfrm>
-          <a:prstGeom prst="ellipse">
-            <a:avLst/>
-          </a:prstGeom>
-          <a:solidFill>
-            <a:srgbClr val="059669"/>
+            <a:off x="868680" y="2971800"/>
+            <a:ext cx="530352" cy="713232"/>
+          </a:xfrm>
+          <a:prstGeom prst="rect">
+            <a:avLst/>
+          </a:prstGeom>
+          <a:solidFill>
+            <a:srgbClr val="1B7F3A"/>
           </a:solidFill>
           <a:ln>
             <a:noFill/>
@@ -3947,23 +3965,32 @@
           </a:fontRef>
         </p:style>
         <p:txBody>
-          <a:bodyPr rtlCol="0" anchor="ctr"/>
+          <a:bodyPr rtlCol="0" anchor="ctr" wrap="square" lIns="101600" rIns="101600" tIns="38100" bIns="38100"/>
           <a:lstStyle/>
           <a:p>
             <a:pPr algn="ctr"/>
-          </a:p>
-        </p:txBody>
-      </p:sp>
-      <p:sp>
-        <p:nvSpPr>
-          <p:cNvPr id="15" name="TextBox 14"/>
+            <a:r>
+              <a:rPr sz="1500" b="1">
+                <a:solidFill>
+                  <a:srgbClr val="FFFFFF"/>
+                </a:solidFill>
+                <a:latin typeface="Arial"/>
+              </a:rPr>
+              <a:t>1</a:t>
+            </a:r>
+          </a:p>
+        </p:txBody>
+      </p:sp>
+      <p:sp>
+        <p:nvSpPr>
+          <p:cNvPr id="12" name="TextBox 11"/>
           <p:cNvSpPr txBox="1"/>
           <p:nvPr/>
         </p:nvSpPr>
         <p:spPr>
           <a:xfrm>
-            <a:off x="1234440" y="4343400"/>
-            <a:ext cx="347472" cy="182880"/>
+            <a:off x="1572768" y="3118104"/>
+            <a:ext cx="9372600" cy="384048"/>
           </a:xfrm>
           <a:prstGeom prst="rect">
             <a:avLst/>
@@ -3971,50 +3998,17 @@
           <a:noFill/>
         </p:spPr>
         <p:txBody>
-          <a:bodyPr wrap="square">
+          <a:bodyPr wrap="square" lIns="0" rIns="0" tIns="0" bIns="0">
             <a:spAutoFit/>
           </a:bodyPr>
           <a:lstStyle/>
           <a:p>
-            <a:pPr algn="ctr"/>
-            <a:r>
-              <a:rPr sz="1000" b="1">
-                <a:solidFill>
-                  <a:srgbClr val="FFFFFF"/>
-                </a:solidFill>
-              </a:rPr>
-              <a:t>2</a:t>
-            </a:r>
-          </a:p>
-        </p:txBody>
-      </p:sp>
-      <p:sp>
-        <p:nvSpPr>
-          <p:cNvPr id="16" name="TextBox 15"/>
-          <p:cNvSpPr txBox="1"/>
-          <p:nvPr/>
-        </p:nvSpPr>
-        <p:spPr>
-          <a:xfrm>
-            <a:off x="1783080" y="4297680"/>
-            <a:ext cx="9006840" cy="347472"/>
-          </a:xfrm>
-          <a:prstGeom prst="rect">
-            <a:avLst/>
-          </a:prstGeom>
-          <a:noFill/>
-        </p:spPr>
-        <p:txBody>
-          <a:bodyPr wrap="square">
-            <a:spAutoFit/>
-          </a:bodyPr>
-          <a:lstStyle/>
-          <a:p>
-            <a:r>
-              <a:rPr sz="1700" b="0">
-                <a:solidFill>
-                  <a:srgbClr val="1A202C"/>
-                </a:solidFill>
+            <a:r>
+              <a:rPr sz="1500" b="0">
+                <a:solidFill>
+                  <a:srgbClr val="111827"/>
+                </a:solidFill>
+                <a:latin typeface="Arial"/>
               </a:rPr>
               <a:t>You will use: What is a Spirit?, Defining the Holy Spirit</a:t>
             </a:r>
@@ -4023,22 +4017,22 @@
       </p:sp>
       <p:sp>
         <p:nvSpPr>
-          <p:cNvPr id="17" name="Rounded Rectangle 16"/>
+          <p:cNvPr id="13" name="Rectangle 12"/>
           <p:cNvSpPr/>
           <p:nvPr/>
         </p:nvSpPr>
         <p:spPr>
           <a:xfrm>
-            <a:off x="1005840" y="5111496"/>
-            <a:ext cx="10149840" cy="731520"/>
-          </a:xfrm>
-          <a:prstGeom prst="roundRect">
-            <a:avLst/>
-          </a:prstGeom>
-          <a:solidFill>
-            <a:srgbClr val="F8FAFC"/>
-          </a:solidFill>
-          <a:ln w="15240">
+            <a:off x="868680" y="3822191"/>
+            <a:ext cx="10378440" cy="713232"/>
+          </a:xfrm>
+          <a:prstGeom prst="rect">
+            <a:avLst/>
+          </a:prstGeom>
+          <a:solidFill>
+            <a:srgbClr val="FFFFFF"/>
+          </a:solidFill>
+          <a:ln w="11430">
             <a:solidFill>
               <a:srgbClr val="CBD5E1"/>
             </a:solidFill>
@@ -4068,20 +4062,20 @@
       </p:sp>
       <p:sp>
         <p:nvSpPr>
-          <p:cNvPr id="18" name="Oval 17"/>
+          <p:cNvPr id="14" name="Rectangle 13"/>
           <p:cNvSpPr/>
           <p:nvPr/>
         </p:nvSpPr>
         <p:spPr>
           <a:xfrm>
-            <a:off x="1234440" y="5230368"/>
-            <a:ext cx="347472" cy="347472"/>
-          </a:xfrm>
-          <a:prstGeom prst="ellipse">
-            <a:avLst/>
-          </a:prstGeom>
-          <a:solidFill>
-            <a:srgbClr val="059669"/>
+            <a:off x="868680" y="3822191"/>
+            <a:ext cx="530352" cy="713232"/>
+          </a:xfrm>
+          <a:prstGeom prst="rect">
+            <a:avLst/>
+          </a:prstGeom>
+          <a:solidFill>
+            <a:srgbClr val="1B7F3A"/>
           </a:solidFill>
           <a:ln>
             <a:noFill/>
@@ -4102,23 +4096,32 @@
           </a:fontRef>
         </p:style>
         <p:txBody>
-          <a:bodyPr rtlCol="0" anchor="ctr"/>
+          <a:bodyPr rtlCol="0" anchor="ctr" wrap="square" lIns="101600" rIns="101600" tIns="38100" bIns="38100"/>
           <a:lstStyle/>
           <a:p>
             <a:pPr algn="ctr"/>
-          </a:p>
-        </p:txBody>
-      </p:sp>
-      <p:sp>
-        <p:nvSpPr>
-          <p:cNvPr id="19" name="TextBox 18"/>
+            <a:r>
+              <a:rPr sz="1500" b="1">
+                <a:solidFill>
+                  <a:srgbClr val="FFFFFF"/>
+                </a:solidFill>
+                <a:latin typeface="Arial"/>
+              </a:rPr>
+              <a:t>2</a:t>
+            </a:r>
+          </a:p>
+        </p:txBody>
+      </p:sp>
+      <p:sp>
+        <p:nvSpPr>
+          <p:cNvPr id="15" name="TextBox 14"/>
           <p:cNvSpPr txBox="1"/>
           <p:nvPr/>
         </p:nvSpPr>
         <p:spPr>
           <a:xfrm>
-            <a:off x="1234440" y="5276088"/>
-            <a:ext cx="347472" cy="182880"/>
+            <a:off x="1572768" y="3968496"/>
+            <a:ext cx="9372600" cy="384048"/>
           </a:xfrm>
           <a:prstGeom prst="rect">
             <a:avLst/>
@@ -4126,17 +4129,114 @@
           <a:noFill/>
         </p:spPr>
         <p:txBody>
-          <a:bodyPr wrap="square">
+          <a:bodyPr wrap="square" lIns="0" rIns="0" tIns="0" bIns="0">
             <a:spAutoFit/>
           </a:bodyPr>
           <a:lstStyle/>
           <a:p>
+            <a:r>
+              <a:rPr sz="1500" b="0">
+                <a:solidFill>
+                  <a:srgbClr val="111827"/>
+                </a:solidFill>
+                <a:latin typeface="Arial"/>
+              </a:rPr>
+              <a:t>Success: explain, try, and answer in your own words.</a:t>
+            </a:r>
+          </a:p>
+        </p:txBody>
+      </p:sp>
+      <p:sp>
+        <p:nvSpPr>
+          <p:cNvPr id="16" name="Rectangle 15"/>
+          <p:cNvSpPr/>
+          <p:nvPr/>
+        </p:nvSpPr>
+        <p:spPr>
+          <a:xfrm>
+            <a:off x="868680" y="4672584"/>
+            <a:ext cx="10378440" cy="713232"/>
+          </a:xfrm>
+          <a:prstGeom prst="rect">
+            <a:avLst/>
+          </a:prstGeom>
+          <a:solidFill>
+            <a:srgbClr val="FFFFFF"/>
+          </a:solidFill>
+          <a:ln w="11430">
+            <a:solidFill>
+              <a:srgbClr val="CBD5E1"/>
+            </a:solidFill>
+          </a:ln>
+        </p:spPr>
+        <p:style>
+          <a:lnRef idx="1">
+            <a:schemeClr val="accent1"/>
+          </a:lnRef>
+          <a:fillRef idx="3">
+            <a:schemeClr val="accent1"/>
+          </a:fillRef>
+          <a:effectRef idx="2">
+            <a:schemeClr val="accent1"/>
+          </a:effectRef>
+          <a:fontRef idx="minor">
+            <a:schemeClr val="lt1"/>
+          </a:fontRef>
+        </p:style>
+        <p:txBody>
+          <a:bodyPr rtlCol="0" anchor="ctr"/>
+          <a:lstStyle/>
+          <a:p>
             <a:pPr algn="ctr"/>
-            <a:r>
-              <a:rPr sz="1000" b="1">
+          </a:p>
+        </p:txBody>
+      </p:sp>
+      <p:sp>
+        <p:nvSpPr>
+          <p:cNvPr id="17" name="Rectangle 16"/>
+          <p:cNvSpPr/>
+          <p:nvPr/>
+        </p:nvSpPr>
+        <p:spPr>
+          <a:xfrm>
+            <a:off x="868680" y="4672584"/>
+            <a:ext cx="530352" cy="713232"/>
+          </a:xfrm>
+          <a:prstGeom prst="rect">
+            <a:avLst/>
+          </a:prstGeom>
+          <a:solidFill>
+            <a:srgbClr val="1B7F3A"/>
+          </a:solidFill>
+          <a:ln>
+            <a:noFill/>
+          </a:ln>
+        </p:spPr>
+        <p:style>
+          <a:lnRef idx="1">
+            <a:schemeClr val="accent1"/>
+          </a:lnRef>
+          <a:fillRef idx="3">
+            <a:schemeClr val="accent1"/>
+          </a:fillRef>
+          <a:effectRef idx="2">
+            <a:schemeClr val="accent1"/>
+          </a:effectRef>
+          <a:fontRef idx="minor">
+            <a:schemeClr val="lt1"/>
+          </a:fontRef>
+        </p:style>
+        <p:txBody>
+          <a:bodyPr rtlCol="0" anchor="ctr" wrap="square" lIns="101600" rIns="101600" tIns="38100" bIns="38100"/>
+          <a:lstStyle/>
+          <a:p>
+            <a:pPr algn="ctr"/>
+            <a:r>
+              <a:rPr sz="1500" b="1">
                 <a:solidFill>
                   <a:srgbClr val="FFFFFF"/>
                 </a:solidFill>
+                <a:latin typeface="Arial"/>
               </a:rPr>
               <a:t>3</a:t>
             </a:r>
@@ -4145,14 +4245,14 @@
       </p:sp>
       <p:sp>
         <p:nvSpPr>
-          <p:cNvPr id="20" name="TextBox 19"/>
+          <p:cNvPr id="18" name="TextBox 17"/>
           <p:cNvSpPr txBox="1"/>
           <p:nvPr/>
         </p:nvSpPr>
         <p:spPr>
           <a:xfrm>
-            <a:off x="1783080" y="5230368"/>
-            <a:ext cx="9006840" cy="347472"/>
+            <a:off x="1572768" y="4818888"/>
+            <a:ext cx="9372600" cy="384048"/>
           </a:xfrm>
           <a:prstGeom prst="rect">
             <a:avLst/>
@@ -4160,18 +4260,116 @@
           <a:noFill/>
         </p:spPr>
         <p:txBody>
-          <a:bodyPr wrap="square">
+          <a:bodyPr wrap="square" lIns="0" rIns="0" tIns="0" bIns="0">
             <a:spAutoFit/>
           </a:bodyPr>
           <a:lstStyle/>
           <a:p>
             <a:r>
-              <a:rPr sz="1700" b="0">
-                <a:solidFill>
-                  <a:srgbClr val="1A202C"/>
-                </a:solidFill>
+              <a:rPr sz="1500" b="0">
+                <a:solidFill>
+                  <a:srgbClr val="111827"/>
+                </a:solidFill>
+                <a:latin typeface="Arial"/>
               </a:rPr>
-              <a:t>Success: explain, try, and answer in your own words.</a:t>
+              <a:t>Write one clear response.</a:t>
+            </a:r>
+          </a:p>
+        </p:txBody>
+      </p:sp>
+      <p:sp>
+        <p:nvSpPr>
+          <p:cNvPr id="19" name="Rectangle 18"/>
+          <p:cNvSpPr/>
+          <p:nvPr/>
+        </p:nvSpPr>
+        <p:spPr>
+          <a:xfrm>
+            <a:off x="868680" y="5522976"/>
+            <a:ext cx="10378440" cy="713232"/>
+          </a:xfrm>
+          <a:prstGeom prst="rect">
+            <a:avLst/>
+          </a:prstGeom>
+          <a:solidFill>
+            <a:srgbClr val="FFFFFF"/>
+          </a:solidFill>
+          <a:ln w="11430">
+            <a:solidFill>
+              <a:srgbClr val="CBD5E1"/>
+            </a:solidFill>
+          </a:ln>
+        </p:spPr>
+        <p:style>
+          <a:lnRef idx="1">
+            <a:schemeClr val="accent1"/>
+          </a:lnRef>
+          <a:fillRef idx="3">
+            <a:schemeClr val="accent1"/>
+          </a:fillRef>
+          <a:effectRef idx="2">
+            <a:schemeClr val="accent1"/>
+          </a:effectRef>
+          <a:fontRef idx="minor">
+            <a:schemeClr val="lt1"/>
+          </a:fontRef>
+        </p:style>
+        <p:txBody>
+          <a:bodyPr rtlCol="0" anchor="ctr"/>
+          <a:lstStyle/>
+          <a:p>
+            <a:pPr algn="ctr"/>
+          </a:p>
+        </p:txBody>
+      </p:sp>
+      <p:sp>
+        <p:nvSpPr>
+          <p:cNvPr id="20" name="Rectangle 19"/>
+          <p:cNvSpPr/>
+          <p:nvPr/>
+        </p:nvSpPr>
+        <p:spPr>
+          <a:xfrm>
+            <a:off x="868680" y="5522976"/>
+            <a:ext cx="530352" cy="713232"/>
+          </a:xfrm>
+          <a:prstGeom prst="rect">
+            <a:avLst/>
+          </a:prstGeom>
+          <a:solidFill>
+            <a:srgbClr val="1B7F3A"/>
+          </a:solidFill>
+          <a:ln>
+            <a:noFill/>
+          </a:ln>
+        </p:spPr>
+        <p:style>
+          <a:lnRef idx="1">
+            <a:schemeClr val="accent1"/>
+          </a:lnRef>
+          <a:fillRef idx="3">
+            <a:schemeClr val="accent1"/>
+          </a:fillRef>
+          <a:effectRef idx="2">
+            <a:schemeClr val="accent1"/>
+          </a:effectRef>
+          <a:fontRef idx="minor">
+            <a:schemeClr val="lt1"/>
+          </a:fontRef>
+        </p:style>
+        <p:txBody>
+          <a:bodyPr rtlCol="0" anchor="ctr" wrap="square" lIns="101600" rIns="101600" tIns="38100" bIns="38100"/>
+          <a:lstStyle/>
+          <a:p>
+            <a:pPr algn="ctr"/>
+            <a:r>
+              <a:rPr sz="1500" b="1">
+                <a:solidFill>
+                  <a:srgbClr val="FFFFFF"/>
+                </a:solidFill>
+                <a:latin typeface="Arial"/>
+              </a:rPr>
+              <a:t>4</a:t>
             </a:r>
           </a:p>
         </p:txBody>
@@ -4184,8 +4382,8 @@
         </p:nvSpPr>
         <p:spPr>
           <a:xfrm>
-            <a:off x="777240" y="6419088"/>
-            <a:ext cx="10835640" cy="228600"/>
+            <a:off x="1572768" y="5669280"/>
+            <a:ext cx="9372600" cy="384048"/>
           </a:xfrm>
           <a:prstGeom prst="rect">
             <a:avLst/>
@@ -4193,17 +4391,52 @@
           <a:noFill/>
         </p:spPr>
         <p:txBody>
-          <a:bodyPr wrap="square">
+          <a:bodyPr wrap="square" lIns="0" rIns="0" tIns="0" bIns="0">
             <a:spAutoFit/>
           </a:bodyPr>
           <a:lstStyle/>
           <a:p>
+            <a:r>
+              <a:rPr sz="1500" b="0">
+                <a:solidFill>
+                  <a:srgbClr val="111827"/>
+                </a:solidFill>
+                <a:latin typeface="Arial"/>
+              </a:rPr>
+              <a:t>Write one clear response.</a:t>
+            </a:r>
+          </a:p>
+        </p:txBody>
+      </p:sp>
+      <p:sp>
+        <p:nvSpPr>
+          <p:cNvPr id="22" name="TextBox 21"/>
+          <p:cNvSpPr txBox="1"/>
+          <p:nvPr/>
+        </p:nvSpPr>
+        <p:spPr>
+          <a:xfrm>
+            <a:off x="685800" y="6419088"/>
+            <a:ext cx="10835640" cy="228600"/>
+          </a:xfrm>
+          <a:prstGeom prst="rect">
+            <a:avLst/>
+          </a:prstGeom>
+          <a:noFill/>
+        </p:spPr>
+        <p:txBody>
+          <a:bodyPr wrap="square" lIns="0" rIns="0" tIns="0" bIns="0">
+            <a:spAutoFit/>
+          </a:bodyPr>
+          <a:lstStyle/>
+          <a:p>
             <a:pPr algn="r"/>
             <a:r>
               <a:rPr sz="1000" b="0">
                 <a:solidFill>
-                  <a:srgbClr val="5B677D"/>
-                </a:solidFill>
+                  <a:srgbClr val="475569"/>
+                </a:solidFill>
+                <a:latin typeface="Arial"/>
               </a:rPr>
               <a:t>Listen • Talk • Try • Explain</a:t>
             </a:r>
@@ -4221,6 +4454,14 @@
 <file path=ppt/slides/slide3.xml><?xml version="1.0" encoding="utf-8"?>
 <p:sld xmlns:a="http://schemas.openxmlformats.org/drawingml/2006/main" xmlns:p="http://schemas.openxmlformats.org/presentationml/2006/main" xmlns:r="http://schemas.openxmlformats.org/officeDocument/2006/relationships">
   <p:cSld>
+    <p:bg>
+      <p:bgPr>
+        <a:solidFill>
+          <a:srgbClr val="F8FAFC"/>
+        </a:solidFill>
+        <a:effectLst/>
+      </p:bgPr>
+    </p:bg>
     <p:spTree>
       <p:nvGrpSpPr>
         <p:cNvPr id="1" name=""/>
@@ -4237,13 +4478,13 @@
         <p:spPr>
           <a:xfrm>
             <a:off x="0" y="0"/>
-            <a:ext cx="12191695" cy="914400"/>
-          </a:xfrm>
-          <a:prstGeom prst="rect">
-            <a:avLst/>
-          </a:prstGeom>
-          <a:solidFill>
-            <a:srgbClr val="7C3AED"/>
+            <a:ext cx="12191695" cy="713232"/>
+          </a:xfrm>
+          <a:prstGeom prst="rect">
+            <a:avLst/>
+          </a:prstGeom>
+          <a:solidFill>
+            <a:srgbClr val="111827"/>
           </a:solidFill>
           <a:ln>
             <a:noFill/>
@@ -4279,14 +4520,14 @@
         </p:nvSpPr>
         <p:spPr>
           <a:xfrm>
-            <a:off x="0" y="914400"/>
-            <a:ext cx="164592" cy="5943600"/>
-          </a:xfrm>
-          <a:prstGeom prst="rect">
-            <a:avLst/>
-          </a:prstGeom>
-          <a:solidFill>
-            <a:srgbClr val="7C3AED"/>
+            <a:off x="0" y="713232"/>
+            <a:ext cx="12191695" cy="82296"/>
+          </a:xfrm>
+          <a:prstGeom prst="rect">
+            <a:avLst/>
+          </a:prstGeom>
+          <a:solidFill>
+            <a:srgbClr val="FCD116"/>
           </a:solidFill>
           <a:ln>
             <a:noFill/>
@@ -4316,125 +4557,23 @@
       </p:sp>
       <p:sp>
         <p:nvSpPr>
-          <p:cNvPr id="4" name="TextBox 3"/>
-          <p:cNvSpPr txBox="1"/>
-          <p:nvPr/>
-        </p:nvSpPr>
-        <p:spPr>
-          <a:xfrm>
-            <a:off x="594360" y="246888"/>
-            <a:ext cx="2926080" cy="320040"/>
-          </a:xfrm>
-          <a:prstGeom prst="rect">
-            <a:avLst/>
-          </a:prstGeom>
-          <a:noFill/>
-        </p:spPr>
-        <p:txBody>
-          <a:bodyPr wrap="square">
-            <a:spAutoFit/>
-          </a:bodyPr>
-          <a:lstStyle/>
-          <a:p>
-            <a:r>
-              <a:rPr sz="1300" b="1">
-                <a:solidFill>
-                  <a:srgbClr val="FFFFFF"/>
-                </a:solidFill>
-              </a:rPr>
-              <a:t>3. STARTER</a:t>
-            </a:r>
-          </a:p>
-        </p:txBody>
-      </p:sp>
-      <p:sp>
-        <p:nvSpPr>
-          <p:cNvPr id="5" name="TextBox 4"/>
-          <p:cNvSpPr txBox="1"/>
-          <p:nvPr/>
-        </p:nvSpPr>
-        <p:spPr>
-          <a:xfrm>
-            <a:off x="7772400" y="246888"/>
-            <a:ext cx="3840480" cy="320040"/>
-          </a:xfrm>
-          <a:prstGeom prst="rect">
-            <a:avLst/>
-          </a:prstGeom>
-          <a:noFill/>
-        </p:spPr>
-        <p:txBody>
-          <a:bodyPr wrap="square">
-            <a:spAutoFit/>
-          </a:bodyPr>
-          <a:lstStyle/>
-          <a:p>
-            <a:pPr algn="r"/>
-            <a:r>
-              <a:rPr sz="1100" b="0">
-                <a:solidFill>
-                  <a:srgbClr val="FFFFFF"/>
-                </a:solidFill>
-              </a:rPr>
-              <a:t>p7_t1_christian_religious_education_0101</a:t>
-            </a:r>
-          </a:p>
-        </p:txBody>
-      </p:sp>
-      <p:sp>
-        <p:nvSpPr>
-          <p:cNvPr id="6" name="TextBox 5"/>
-          <p:cNvSpPr txBox="1"/>
-          <p:nvPr/>
-        </p:nvSpPr>
-        <p:spPr>
-          <a:xfrm>
-            <a:off x="640080" y="1143000"/>
-            <a:ext cx="10972800" cy="685800"/>
-          </a:xfrm>
-          <a:prstGeom prst="rect">
-            <a:avLst/>
-          </a:prstGeom>
-          <a:noFill/>
-        </p:spPr>
-        <p:txBody>
-          <a:bodyPr wrap="square">
-            <a:spAutoFit/>
-          </a:bodyPr>
-          <a:lstStyle/>
-          <a:p>
-            <a:r>
-              <a:rPr sz="2800" b="1">
-                <a:solidFill>
-                  <a:srgbClr val="1A202C"/>
-                </a:solidFill>
-              </a:rPr>
-              <a:t>Starter: think first</a:t>
-            </a:r>
-          </a:p>
-        </p:txBody>
-      </p:sp>
-      <p:sp>
-        <p:nvSpPr>
-          <p:cNvPr id="7" name="Rounded Rectangle 6"/>
+          <p:cNvPr id="4" name="Rectangle 3"/>
           <p:cNvSpPr/>
           <p:nvPr/>
         </p:nvSpPr>
         <p:spPr>
           <a:xfrm>
-            <a:off x="777240" y="1993392"/>
-            <a:ext cx="10835640" cy="1005840"/>
-          </a:xfrm>
-          <a:prstGeom prst="roundRect">
-            <a:avLst/>
-          </a:prstGeom>
-          <a:solidFill>
-            <a:srgbClr val="FFFBEB"/>
-          </a:solidFill>
-          <a:ln w="15240">
-            <a:solidFill>
-              <a:srgbClr val="7C3AED"/>
-            </a:solidFill>
+            <a:off x="0" y="795528"/>
+            <a:ext cx="12191695" cy="64008"/>
+          </a:xfrm>
+          <a:prstGeom prst="rect">
+            <a:avLst/>
+          </a:prstGeom>
+          <a:solidFill>
+            <a:srgbClr val="D90000"/>
+          </a:solidFill>
+          <a:ln>
+            <a:noFill/>
           </a:ln>
         </p:spPr>
         <p:style>
@@ -4461,58 +4600,23 @@
       </p:sp>
       <p:sp>
         <p:nvSpPr>
-          <p:cNvPr id="8" name="TextBox 7"/>
-          <p:cNvSpPr txBox="1"/>
-          <p:nvPr/>
-        </p:nvSpPr>
-        <p:spPr>
-          <a:xfrm>
-            <a:off x="1051560" y="2212848"/>
-            <a:ext cx="10287000" cy="502920"/>
-          </a:xfrm>
-          <a:prstGeom prst="rect">
-            <a:avLst/>
-          </a:prstGeom>
-          <a:noFill/>
-        </p:spPr>
-        <p:txBody>
-          <a:bodyPr wrap="square">
-            <a:spAutoFit/>
-          </a:bodyPr>
-          <a:lstStyle/>
-          <a:p>
-            <a:r>
-              <a:rPr sz="2100" b="1">
-                <a:solidFill>
-                  <a:srgbClr val="1A202C"/>
-                </a:solidFill>
-              </a:rPr>
-              <a:t>Think: Can you see the wind?</a:t>
-            </a:r>
-          </a:p>
-        </p:txBody>
-      </p:sp>
-      <p:sp>
-        <p:nvSpPr>
-          <p:cNvPr id="9" name="Rounded Rectangle 8"/>
+          <p:cNvPr id="5" name="Rectangle 4"/>
           <p:cNvSpPr/>
           <p:nvPr/>
         </p:nvSpPr>
         <p:spPr>
           <a:xfrm>
-            <a:off x="1005840" y="3246120"/>
-            <a:ext cx="10149840" cy="731520"/>
-          </a:xfrm>
-          <a:prstGeom prst="roundRect">
-            <a:avLst/>
-          </a:prstGeom>
-          <a:solidFill>
-            <a:srgbClr val="F8FAFC"/>
-          </a:solidFill>
-          <a:ln w="15240">
-            <a:solidFill>
-              <a:srgbClr val="CBD5E1"/>
-            </a:solidFill>
+            <a:off x="0" y="859536"/>
+            <a:ext cx="164592" cy="5998464"/>
+          </a:xfrm>
+          <a:prstGeom prst="rect">
+            <a:avLst/>
+          </a:prstGeom>
+          <a:solidFill>
+            <a:srgbClr val="7C3AED"/>
+          </a:solidFill>
+          <a:ln>
+            <a:noFill/>
           </a:ln>
         </p:spPr>
         <p:style>
@@ -4539,23 +4643,128 @@
       </p:sp>
       <p:sp>
         <p:nvSpPr>
-          <p:cNvPr id="10" name="Oval 9"/>
+          <p:cNvPr id="6" name="TextBox 5"/>
+          <p:cNvSpPr txBox="1"/>
+          <p:nvPr/>
+        </p:nvSpPr>
+        <p:spPr>
+          <a:xfrm>
+            <a:off x="502920" y="210312"/>
+            <a:ext cx="3200400" cy="256032"/>
+          </a:xfrm>
+          <a:prstGeom prst="rect">
+            <a:avLst/>
+          </a:prstGeom>
+          <a:noFill/>
+        </p:spPr>
+        <p:txBody>
+          <a:bodyPr wrap="square" lIns="0" rIns="0" tIns="0" bIns="0">
+            <a:spAutoFit/>
+          </a:bodyPr>
+          <a:lstStyle/>
+          <a:p>
+            <a:r>
+              <a:rPr sz="1200" b="1">
+                <a:solidFill>
+                  <a:srgbClr val="FFFFFF"/>
+                </a:solidFill>
+                <a:latin typeface="Arial"/>
+              </a:rPr>
+              <a:t>3. STARTER</a:t>
+            </a:r>
+          </a:p>
+        </p:txBody>
+      </p:sp>
+      <p:sp>
+        <p:nvSpPr>
+          <p:cNvPr id="7" name="TextBox 6"/>
+          <p:cNvSpPr txBox="1"/>
+          <p:nvPr/>
+        </p:nvSpPr>
+        <p:spPr>
+          <a:xfrm>
+            <a:off x="7589520" y="210312"/>
+            <a:ext cx="4069080" cy="256032"/>
+          </a:xfrm>
+          <a:prstGeom prst="rect">
+            <a:avLst/>
+          </a:prstGeom>
+          <a:noFill/>
+        </p:spPr>
+        <p:txBody>
+          <a:bodyPr wrap="square" lIns="0" rIns="0" tIns="0" bIns="0">
+            <a:spAutoFit/>
+          </a:bodyPr>
+          <a:lstStyle/>
+          <a:p>
+            <a:pPr algn="r"/>
+            <a:r>
+              <a:rPr sz="1000" b="0">
+                <a:solidFill>
+                  <a:srgbClr val="FFFFFF"/>
+                </a:solidFill>
+                <a:latin typeface="Arial"/>
+              </a:rPr>
+              <a:t>p7_t1_christian_religious_education_0101</a:t>
+            </a:r>
+          </a:p>
+        </p:txBody>
+      </p:sp>
+      <p:sp>
+        <p:nvSpPr>
+          <p:cNvPr id="8" name="TextBox 7"/>
+          <p:cNvSpPr txBox="1"/>
+          <p:nvPr/>
+        </p:nvSpPr>
+        <p:spPr>
+          <a:xfrm>
+            <a:off x="594360" y="1042415"/>
+            <a:ext cx="11109960" cy="566928"/>
+          </a:xfrm>
+          <a:prstGeom prst="rect">
+            <a:avLst/>
+          </a:prstGeom>
+          <a:noFill/>
+        </p:spPr>
+        <p:txBody>
+          <a:bodyPr wrap="square" lIns="0" rIns="0" tIns="0" bIns="0">
+            <a:spAutoFit/>
+          </a:bodyPr>
+          <a:lstStyle/>
+          <a:p>
+            <a:r>
+              <a:rPr sz="2600" b="1">
+                <a:solidFill>
+                  <a:srgbClr val="111827"/>
+                </a:solidFill>
+                <a:latin typeface="Arial"/>
+              </a:rPr>
+              <a:t>Starter: think first</a:t>
+            </a:r>
+          </a:p>
+        </p:txBody>
+      </p:sp>
+      <p:sp>
+        <p:nvSpPr>
+          <p:cNvPr id="9" name="Rectangle 8"/>
           <p:cNvSpPr/>
           <p:nvPr/>
         </p:nvSpPr>
         <p:spPr>
           <a:xfrm>
-            <a:off x="1234440" y="3364991"/>
-            <a:ext cx="347472" cy="347472"/>
-          </a:xfrm>
-          <a:prstGeom prst="ellipse">
-            <a:avLst/>
-          </a:prstGeom>
-          <a:solidFill>
-            <a:srgbClr val="7C3AED"/>
-          </a:solidFill>
-          <a:ln>
-            <a:noFill/>
+            <a:off x="685800" y="1874519"/>
+            <a:ext cx="10835640" cy="804672"/>
+          </a:xfrm>
+          <a:prstGeom prst="rect">
+            <a:avLst/>
+          </a:prstGeom>
+          <a:solidFill>
+            <a:srgbClr val="FFF7E0"/>
+          </a:solidFill>
+          <a:ln w="17780">
+            <a:solidFill>
+              <a:srgbClr val="7C3AED"/>
+            </a:solidFill>
           </a:ln>
         </p:spPr>
         <p:style>
@@ -4573,98 +4782,40 @@
           </a:fontRef>
         </p:style>
         <p:txBody>
-          <a:bodyPr rtlCol="0" anchor="ctr"/>
+          <a:bodyPr rtlCol="0" anchor="ctr" wrap="square" lIns="101600" rIns="101600" tIns="38100" bIns="38100"/>
           <a:lstStyle/>
           <a:p>
             <a:pPr algn="ctr"/>
-          </a:p>
-        </p:txBody>
-      </p:sp>
-      <p:sp>
-        <p:nvSpPr>
-          <p:cNvPr id="11" name="TextBox 10"/>
-          <p:cNvSpPr txBox="1"/>
-          <p:nvPr/>
-        </p:nvSpPr>
-        <p:spPr>
-          <a:xfrm>
-            <a:off x="1234440" y="3410712"/>
-            <a:ext cx="347472" cy="182880"/>
-          </a:xfrm>
-          <a:prstGeom prst="rect">
-            <a:avLst/>
-          </a:prstGeom>
-          <a:noFill/>
-        </p:spPr>
-        <p:txBody>
-          <a:bodyPr wrap="square">
-            <a:spAutoFit/>
-          </a:bodyPr>
-          <a:lstStyle/>
-          <a:p>
-            <a:pPr algn="ctr"/>
-            <a:r>
-              <a:rPr sz="1000" b="1">
-                <a:solidFill>
-                  <a:srgbClr val="FFFFFF"/>
-                </a:solidFill>
+            <a:r>
+              <a:rPr sz="1900" b="1">
+                <a:solidFill>
+                  <a:srgbClr val="111827"/>
+                </a:solidFill>
+                <a:latin typeface="Arial"/>
               </a:rPr>
-              <a:t>1</a:t>
-            </a:r>
-          </a:p>
-        </p:txBody>
-      </p:sp>
-      <p:sp>
-        <p:nvSpPr>
-          <p:cNvPr id="12" name="TextBox 11"/>
-          <p:cNvSpPr txBox="1"/>
-          <p:nvPr/>
-        </p:nvSpPr>
-        <p:spPr>
-          <a:xfrm>
-            <a:off x="1783080" y="3364991"/>
-            <a:ext cx="9006840" cy="347472"/>
-          </a:xfrm>
-          <a:prstGeom prst="rect">
-            <a:avLst/>
-          </a:prstGeom>
-          <a:noFill/>
-        </p:spPr>
-        <p:txBody>
-          <a:bodyPr wrap="square">
-            <a:spAutoFit/>
-          </a:bodyPr>
-          <a:lstStyle/>
-          <a:p>
-            <a:r>
-              <a:rPr sz="1700" b="0">
-                <a:solidFill>
-                  <a:srgbClr val="1A202C"/>
-                </a:solidFill>
-              </a:rPr>
-              <a:t>Pair: compare your first answer with a partner.</a:t>
-            </a:r>
-          </a:p>
-        </p:txBody>
-      </p:sp>
-      <p:sp>
-        <p:nvSpPr>
-          <p:cNvPr id="13" name="Rounded Rectangle 12"/>
+              <a:t>Think: Can you see the wind?</a:t>
+            </a:r>
+          </a:p>
+        </p:txBody>
+      </p:sp>
+      <p:sp>
+        <p:nvSpPr>
+          <p:cNvPr id="10" name="Rectangle 9"/>
           <p:cNvSpPr/>
           <p:nvPr/>
         </p:nvSpPr>
         <p:spPr>
           <a:xfrm>
-            <a:off x="1005840" y="4178808"/>
-            <a:ext cx="10149840" cy="731520"/>
-          </a:xfrm>
-          <a:prstGeom prst="roundRect">
-            <a:avLst/>
-          </a:prstGeom>
-          <a:solidFill>
-            <a:srgbClr val="F8FAFC"/>
-          </a:solidFill>
-          <a:ln w="15240">
+            <a:off x="868680" y="2971800"/>
+            <a:ext cx="10378440" cy="713232"/>
+          </a:xfrm>
+          <a:prstGeom prst="rect">
+            <a:avLst/>
+          </a:prstGeom>
+          <a:solidFill>
+            <a:srgbClr val="FFFFFF"/>
+          </a:solidFill>
+          <a:ln w="11430">
             <a:solidFill>
               <a:srgbClr val="CBD5E1"/>
             </a:solidFill>
@@ -4694,16 +4845,16 @@
       </p:sp>
       <p:sp>
         <p:nvSpPr>
-          <p:cNvPr id="14" name="Oval 13"/>
+          <p:cNvPr id="11" name="Rectangle 10"/>
           <p:cNvSpPr/>
           <p:nvPr/>
         </p:nvSpPr>
         <p:spPr>
           <a:xfrm>
-            <a:off x="1234440" y="4297680"/>
-            <a:ext cx="347472" cy="347472"/>
-          </a:xfrm>
-          <a:prstGeom prst="ellipse">
+            <a:off x="868680" y="2971800"/>
+            <a:ext cx="530352" cy="713232"/>
+          </a:xfrm>
+          <a:prstGeom prst="rect">
             <a:avLst/>
           </a:prstGeom>
           <a:solidFill>
@@ -4728,10 +4879,150 @@
           </a:fontRef>
         </p:style>
         <p:txBody>
+          <a:bodyPr rtlCol="0" anchor="ctr" wrap="square" lIns="101600" rIns="101600" tIns="38100" bIns="38100"/>
+          <a:lstStyle/>
+          <a:p>
+            <a:pPr algn="ctr"/>
+            <a:r>
+              <a:rPr sz="1500" b="1">
+                <a:solidFill>
+                  <a:srgbClr val="FFFFFF"/>
+                </a:solidFill>
+                <a:latin typeface="Arial"/>
+              </a:rPr>
+              <a:t>1</a:t>
+            </a:r>
+          </a:p>
+        </p:txBody>
+      </p:sp>
+      <p:sp>
+        <p:nvSpPr>
+          <p:cNvPr id="12" name="TextBox 11"/>
+          <p:cNvSpPr txBox="1"/>
+          <p:nvPr/>
+        </p:nvSpPr>
+        <p:spPr>
+          <a:xfrm>
+            <a:off x="1572768" y="3118104"/>
+            <a:ext cx="9372600" cy="384048"/>
+          </a:xfrm>
+          <a:prstGeom prst="rect">
+            <a:avLst/>
+          </a:prstGeom>
+          <a:noFill/>
+        </p:spPr>
+        <p:txBody>
+          <a:bodyPr wrap="square" lIns="0" rIns="0" tIns="0" bIns="0">
+            <a:spAutoFit/>
+          </a:bodyPr>
+          <a:lstStyle/>
+          <a:p>
+            <a:r>
+              <a:rPr sz="1500" b="0">
+                <a:solidFill>
+                  <a:srgbClr val="111827"/>
+                </a:solidFill>
+                <a:latin typeface="Arial"/>
+              </a:rPr>
+              <a:t>Pair: compare your first answer with a partner.</a:t>
+            </a:r>
+          </a:p>
+        </p:txBody>
+      </p:sp>
+      <p:sp>
+        <p:nvSpPr>
+          <p:cNvPr id="13" name="Rectangle 12"/>
+          <p:cNvSpPr/>
+          <p:nvPr/>
+        </p:nvSpPr>
+        <p:spPr>
+          <a:xfrm>
+            <a:off x="868680" y="3822191"/>
+            <a:ext cx="10378440" cy="713232"/>
+          </a:xfrm>
+          <a:prstGeom prst="rect">
+            <a:avLst/>
+          </a:prstGeom>
+          <a:solidFill>
+            <a:srgbClr val="FFFFFF"/>
+          </a:solidFill>
+          <a:ln w="11430">
+            <a:solidFill>
+              <a:srgbClr val="CBD5E1"/>
+            </a:solidFill>
+          </a:ln>
+        </p:spPr>
+        <p:style>
+          <a:lnRef idx="1">
+            <a:schemeClr val="accent1"/>
+          </a:lnRef>
+          <a:fillRef idx="3">
+            <a:schemeClr val="accent1"/>
+          </a:fillRef>
+          <a:effectRef idx="2">
+            <a:schemeClr val="accent1"/>
+          </a:effectRef>
+          <a:fontRef idx="minor">
+            <a:schemeClr val="lt1"/>
+          </a:fontRef>
+        </p:style>
+        <p:txBody>
           <a:bodyPr rtlCol="0" anchor="ctr"/>
           <a:lstStyle/>
           <a:p>
             <a:pPr algn="ctr"/>
+          </a:p>
+        </p:txBody>
+      </p:sp>
+      <p:sp>
+        <p:nvSpPr>
+          <p:cNvPr id="14" name="Rectangle 13"/>
+          <p:cNvSpPr/>
+          <p:nvPr/>
+        </p:nvSpPr>
+        <p:spPr>
+          <a:xfrm>
+            <a:off x="868680" y="3822191"/>
+            <a:ext cx="530352" cy="713232"/>
+          </a:xfrm>
+          <a:prstGeom prst="rect">
+            <a:avLst/>
+          </a:prstGeom>
+          <a:solidFill>
+            <a:srgbClr val="7C3AED"/>
+          </a:solidFill>
+          <a:ln>
+            <a:noFill/>
+          </a:ln>
+        </p:spPr>
+        <p:style>
+          <a:lnRef idx="1">
+            <a:schemeClr val="accent1"/>
+          </a:lnRef>
+          <a:fillRef idx="3">
+            <a:schemeClr val="accent1"/>
+          </a:fillRef>
+          <a:effectRef idx="2">
+            <a:schemeClr val="accent1"/>
+          </a:effectRef>
+          <a:fontRef idx="minor">
+            <a:schemeClr val="lt1"/>
+          </a:fontRef>
+        </p:style>
+        <p:txBody>
+          <a:bodyPr rtlCol="0" anchor="ctr" wrap="square" lIns="101600" rIns="101600" tIns="38100" bIns="38100"/>
+          <a:lstStyle/>
+          <a:p>
+            <a:pPr algn="ctr"/>
+            <a:r>
+              <a:rPr sz="1500" b="1">
+                <a:solidFill>
+                  <a:srgbClr val="FFFFFF"/>
+                </a:solidFill>
+                <a:latin typeface="Arial"/>
+              </a:rPr>
+              <a:t>2</a:t>
+            </a:r>
           </a:p>
         </p:txBody>
       </p:sp>
@@ -4743,8 +5034,8 @@
         </p:nvSpPr>
         <p:spPr>
           <a:xfrm>
-            <a:off x="1234440" y="4343400"/>
-            <a:ext cx="347472" cy="182880"/>
+            <a:off x="1572768" y="3968496"/>
+            <a:ext cx="9372600" cy="384048"/>
           </a:xfrm>
           <a:prstGeom prst="rect">
             <a:avLst/>
@@ -4752,33 +5043,130 @@
           <a:noFill/>
         </p:spPr>
         <p:txBody>
-          <a:bodyPr wrap="square">
+          <a:bodyPr wrap="square" lIns="0" rIns="0" tIns="0" bIns="0">
             <a:spAutoFit/>
           </a:bodyPr>
           <a:lstStyle/>
           <a:p>
+            <a:r>
+              <a:rPr sz="1500" b="0">
+                <a:solidFill>
+                  <a:srgbClr val="111827"/>
+                </a:solidFill>
+                <a:latin typeface="Arial"/>
+              </a:rPr>
+              <a:t>Share: connect your answer to What is a Spirit?.</a:t>
+            </a:r>
+          </a:p>
+        </p:txBody>
+      </p:sp>
+      <p:sp>
+        <p:nvSpPr>
+          <p:cNvPr id="16" name="Rectangle 15"/>
+          <p:cNvSpPr/>
+          <p:nvPr/>
+        </p:nvSpPr>
+        <p:spPr>
+          <a:xfrm>
+            <a:off x="868680" y="4672584"/>
+            <a:ext cx="10378440" cy="713232"/>
+          </a:xfrm>
+          <a:prstGeom prst="rect">
+            <a:avLst/>
+          </a:prstGeom>
+          <a:solidFill>
+            <a:srgbClr val="FFFFFF"/>
+          </a:solidFill>
+          <a:ln w="11430">
+            <a:solidFill>
+              <a:srgbClr val="CBD5E1"/>
+            </a:solidFill>
+          </a:ln>
+        </p:spPr>
+        <p:style>
+          <a:lnRef idx="1">
+            <a:schemeClr val="accent1"/>
+          </a:lnRef>
+          <a:fillRef idx="3">
+            <a:schemeClr val="accent1"/>
+          </a:fillRef>
+          <a:effectRef idx="2">
+            <a:schemeClr val="accent1"/>
+          </a:effectRef>
+          <a:fontRef idx="minor">
+            <a:schemeClr val="lt1"/>
+          </a:fontRef>
+        </p:style>
+        <p:txBody>
+          <a:bodyPr rtlCol="0" anchor="ctr"/>
+          <a:lstStyle/>
+          <a:p>
             <a:pPr algn="ctr"/>
-            <a:r>
-              <a:rPr sz="1000" b="1">
+          </a:p>
+        </p:txBody>
+      </p:sp>
+      <p:sp>
+        <p:nvSpPr>
+          <p:cNvPr id="17" name="Rectangle 16"/>
+          <p:cNvSpPr/>
+          <p:nvPr/>
+        </p:nvSpPr>
+        <p:spPr>
+          <a:xfrm>
+            <a:off x="868680" y="4672584"/>
+            <a:ext cx="530352" cy="713232"/>
+          </a:xfrm>
+          <a:prstGeom prst="rect">
+            <a:avLst/>
+          </a:prstGeom>
+          <a:solidFill>
+            <a:srgbClr val="7C3AED"/>
+          </a:solidFill>
+          <a:ln>
+            <a:noFill/>
+          </a:ln>
+        </p:spPr>
+        <p:style>
+          <a:lnRef idx="1">
+            <a:schemeClr val="accent1"/>
+          </a:lnRef>
+          <a:fillRef idx="3">
+            <a:schemeClr val="accent1"/>
+          </a:fillRef>
+          <a:effectRef idx="2">
+            <a:schemeClr val="accent1"/>
+          </a:effectRef>
+          <a:fontRef idx="minor">
+            <a:schemeClr val="lt1"/>
+          </a:fontRef>
+        </p:style>
+        <p:txBody>
+          <a:bodyPr rtlCol="0" anchor="ctr" wrap="square" lIns="101600" rIns="101600" tIns="38100" bIns="38100"/>
+          <a:lstStyle/>
+          <a:p>
+            <a:pPr algn="ctr"/>
+            <a:r>
+              <a:rPr sz="1500" b="1">
                 <a:solidFill>
                   <a:srgbClr val="FFFFFF"/>
                 </a:solidFill>
+                <a:latin typeface="Arial"/>
               </a:rPr>
-              <a:t>2</a:t>
-            </a:r>
-          </a:p>
-        </p:txBody>
-      </p:sp>
-      <p:sp>
-        <p:nvSpPr>
-          <p:cNvPr id="16" name="TextBox 15"/>
+              <a:t>3</a:t>
+            </a:r>
+          </a:p>
+        </p:txBody>
+      </p:sp>
+      <p:sp>
+        <p:nvSpPr>
+          <p:cNvPr id="18" name="TextBox 17"/>
           <p:cNvSpPr txBox="1"/>
           <p:nvPr/>
         </p:nvSpPr>
         <p:spPr>
           <a:xfrm>
-            <a:off x="1783080" y="4297680"/>
-            <a:ext cx="9006840" cy="347472"/>
+            <a:off x="1572768" y="4818888"/>
+            <a:ext cx="9372600" cy="384048"/>
           </a:xfrm>
           <a:prstGeom prst="rect">
             <a:avLst/>
@@ -4786,32 +5174,130 @@
           <a:noFill/>
         </p:spPr>
         <p:txBody>
-          <a:bodyPr wrap="square">
+          <a:bodyPr wrap="square" lIns="0" rIns="0" tIns="0" bIns="0">
             <a:spAutoFit/>
           </a:bodyPr>
           <a:lstStyle/>
           <a:p>
             <a:r>
-              <a:rPr sz="1700" b="0">
-                <a:solidFill>
-                  <a:srgbClr val="1A202C"/>
-                </a:solidFill>
+              <a:rPr sz="1500" b="0">
+                <a:solidFill>
+                  <a:srgbClr val="111827"/>
+                </a:solidFill>
+                <a:latin typeface="Arial"/>
               </a:rPr>
-              <a:t>Share: connect your answer to What is a Spirit?.</a:t>
-            </a:r>
-          </a:p>
-        </p:txBody>
-      </p:sp>
-      <p:sp>
-        <p:nvSpPr>
-          <p:cNvPr id="17" name="TextBox 16"/>
+              <a:t>Write one clear response.</a:t>
+            </a:r>
+          </a:p>
+        </p:txBody>
+      </p:sp>
+      <p:sp>
+        <p:nvSpPr>
+          <p:cNvPr id="19" name="Rectangle 18"/>
+          <p:cNvSpPr/>
+          <p:nvPr/>
+        </p:nvSpPr>
+        <p:spPr>
+          <a:xfrm>
+            <a:off x="868680" y="5522976"/>
+            <a:ext cx="10378440" cy="713232"/>
+          </a:xfrm>
+          <a:prstGeom prst="rect">
+            <a:avLst/>
+          </a:prstGeom>
+          <a:solidFill>
+            <a:srgbClr val="FFFFFF"/>
+          </a:solidFill>
+          <a:ln w="11430">
+            <a:solidFill>
+              <a:srgbClr val="CBD5E1"/>
+            </a:solidFill>
+          </a:ln>
+        </p:spPr>
+        <p:style>
+          <a:lnRef idx="1">
+            <a:schemeClr val="accent1"/>
+          </a:lnRef>
+          <a:fillRef idx="3">
+            <a:schemeClr val="accent1"/>
+          </a:fillRef>
+          <a:effectRef idx="2">
+            <a:schemeClr val="accent1"/>
+          </a:effectRef>
+          <a:fontRef idx="minor">
+            <a:schemeClr val="lt1"/>
+          </a:fontRef>
+        </p:style>
+        <p:txBody>
+          <a:bodyPr rtlCol="0" anchor="ctr"/>
+          <a:lstStyle/>
+          <a:p>
+            <a:pPr algn="ctr"/>
+          </a:p>
+        </p:txBody>
+      </p:sp>
+      <p:sp>
+        <p:nvSpPr>
+          <p:cNvPr id="20" name="Rectangle 19"/>
+          <p:cNvSpPr/>
+          <p:nvPr/>
+        </p:nvSpPr>
+        <p:spPr>
+          <a:xfrm>
+            <a:off x="868680" y="5522976"/>
+            <a:ext cx="530352" cy="713232"/>
+          </a:xfrm>
+          <a:prstGeom prst="rect">
+            <a:avLst/>
+          </a:prstGeom>
+          <a:solidFill>
+            <a:srgbClr val="7C3AED"/>
+          </a:solidFill>
+          <a:ln>
+            <a:noFill/>
+          </a:ln>
+        </p:spPr>
+        <p:style>
+          <a:lnRef idx="1">
+            <a:schemeClr val="accent1"/>
+          </a:lnRef>
+          <a:fillRef idx="3">
+            <a:schemeClr val="accent1"/>
+          </a:fillRef>
+          <a:effectRef idx="2">
+            <a:schemeClr val="accent1"/>
+          </a:effectRef>
+          <a:fontRef idx="minor">
+            <a:schemeClr val="lt1"/>
+          </a:fontRef>
+        </p:style>
+        <p:txBody>
+          <a:bodyPr rtlCol="0" anchor="ctr" wrap="square" lIns="101600" rIns="101600" tIns="38100" bIns="38100"/>
+          <a:lstStyle/>
+          <a:p>
+            <a:pPr algn="ctr"/>
+            <a:r>
+              <a:rPr sz="1500" b="1">
+                <a:solidFill>
+                  <a:srgbClr val="FFFFFF"/>
+                </a:solidFill>
+                <a:latin typeface="Arial"/>
+              </a:rPr>
+              <a:t>4</a:t>
+            </a:r>
+          </a:p>
+        </p:txBody>
+      </p:sp>
+      <p:sp>
+        <p:nvSpPr>
+          <p:cNvPr id="21" name="TextBox 20"/>
           <p:cNvSpPr txBox="1"/>
           <p:nvPr/>
         </p:nvSpPr>
         <p:spPr>
           <a:xfrm>
-            <a:off x="777240" y="6419088"/>
-            <a:ext cx="10835640" cy="228600"/>
+            <a:off x="1572768" y="5669280"/>
+            <a:ext cx="9372600" cy="384048"/>
           </a:xfrm>
           <a:prstGeom prst="rect">
             <a:avLst/>
@@ -4819,17 +5305,52 @@
           <a:noFill/>
         </p:spPr>
         <p:txBody>
-          <a:bodyPr wrap="square">
+          <a:bodyPr wrap="square" lIns="0" rIns="0" tIns="0" bIns="0">
             <a:spAutoFit/>
           </a:bodyPr>
           <a:lstStyle/>
           <a:p>
+            <a:r>
+              <a:rPr sz="1500" b="0">
+                <a:solidFill>
+                  <a:srgbClr val="111827"/>
+                </a:solidFill>
+                <a:latin typeface="Arial"/>
+              </a:rPr>
+              <a:t>Write one clear response.</a:t>
+            </a:r>
+          </a:p>
+        </p:txBody>
+      </p:sp>
+      <p:sp>
+        <p:nvSpPr>
+          <p:cNvPr id="22" name="TextBox 21"/>
+          <p:cNvSpPr txBox="1"/>
+          <p:nvPr/>
+        </p:nvSpPr>
+        <p:spPr>
+          <a:xfrm>
+            <a:off x="685800" y="6419088"/>
+            <a:ext cx="10835640" cy="228600"/>
+          </a:xfrm>
+          <a:prstGeom prst="rect">
+            <a:avLst/>
+          </a:prstGeom>
+          <a:noFill/>
+        </p:spPr>
+        <p:txBody>
+          <a:bodyPr wrap="square" lIns="0" rIns="0" tIns="0" bIns="0">
+            <a:spAutoFit/>
+          </a:bodyPr>
+          <a:lstStyle/>
+          <a:p>
             <a:pPr algn="r"/>
             <a:r>
               <a:rPr sz="1000" b="0">
                 <a:solidFill>
-                  <a:srgbClr val="5B677D"/>
-                </a:solidFill>
+                  <a:srgbClr val="475569"/>
+                </a:solidFill>
+                <a:latin typeface="Arial"/>
               </a:rPr>
               <a:t>Listen • Talk • Try • Explain</a:t>
             </a:r>
@@ -4847,6 +5368,14 @@
 <file path=ppt/slides/slide4.xml><?xml version="1.0" encoding="utf-8"?>
 <p:sld xmlns:a="http://schemas.openxmlformats.org/drawingml/2006/main" xmlns:p="http://schemas.openxmlformats.org/presentationml/2006/main" xmlns:r="http://schemas.openxmlformats.org/officeDocument/2006/relationships">
   <p:cSld>
+    <p:bg>
+      <p:bgPr>
+        <a:solidFill>
+          <a:srgbClr val="F8FAFC"/>
+        </a:solidFill>
+        <a:effectLst/>
+      </p:bgPr>
+    </p:bg>
     <p:spTree>
       <p:nvGrpSpPr>
         <p:cNvPr id="1" name=""/>
@@ -4863,13 +5392,13 @@
         <p:spPr>
           <a:xfrm>
             <a:off x="0" y="0"/>
-            <a:ext cx="12191695" cy="914400"/>
-          </a:xfrm>
-          <a:prstGeom prst="rect">
-            <a:avLst/>
-          </a:prstGeom>
-          <a:solidFill>
-            <a:srgbClr val="0E7490"/>
+            <a:ext cx="12191695" cy="713232"/>
+          </a:xfrm>
+          <a:prstGeom prst="rect">
+            <a:avLst/>
+          </a:prstGeom>
+          <a:solidFill>
+            <a:srgbClr val="111827"/>
           </a:solidFill>
           <a:ln>
             <a:noFill/>
@@ -4905,14 +5434,14 @@
         </p:nvSpPr>
         <p:spPr>
           <a:xfrm>
-            <a:off x="0" y="914400"/>
-            <a:ext cx="164592" cy="5943600"/>
-          </a:xfrm>
-          <a:prstGeom prst="rect">
-            <a:avLst/>
-          </a:prstGeom>
-          <a:solidFill>
-            <a:srgbClr val="0E7490"/>
+            <a:off x="0" y="713232"/>
+            <a:ext cx="12191695" cy="82296"/>
+          </a:xfrm>
+          <a:prstGeom prst="rect">
+            <a:avLst/>
+          </a:prstGeom>
+          <a:solidFill>
+            <a:srgbClr val="FCD116"/>
           </a:solidFill>
           <a:ln>
             <a:noFill/>
@@ -4942,125 +5471,23 @@
       </p:sp>
       <p:sp>
         <p:nvSpPr>
-          <p:cNvPr id="4" name="TextBox 3"/>
-          <p:cNvSpPr txBox="1"/>
-          <p:nvPr/>
-        </p:nvSpPr>
-        <p:spPr>
-          <a:xfrm>
-            <a:off x="594360" y="246888"/>
-            <a:ext cx="2926080" cy="320040"/>
-          </a:xfrm>
-          <a:prstGeom prst="rect">
-            <a:avLst/>
-          </a:prstGeom>
-          <a:noFill/>
-        </p:spPr>
-        <p:txBody>
-          <a:bodyPr wrap="square">
-            <a:spAutoFit/>
-          </a:bodyPr>
-          <a:lstStyle/>
-          <a:p>
-            <a:r>
-              <a:rPr sz="1300" b="1">
-                <a:solidFill>
-                  <a:srgbClr val="FFFFFF"/>
-                </a:solidFill>
-              </a:rPr>
-              <a:t>4. CONCEPT</a:t>
-            </a:r>
-          </a:p>
-        </p:txBody>
-      </p:sp>
-      <p:sp>
-        <p:nvSpPr>
-          <p:cNvPr id="5" name="TextBox 4"/>
-          <p:cNvSpPr txBox="1"/>
-          <p:nvPr/>
-        </p:nvSpPr>
-        <p:spPr>
-          <a:xfrm>
-            <a:off x="7772400" y="246888"/>
-            <a:ext cx="3840480" cy="320040"/>
-          </a:xfrm>
-          <a:prstGeom prst="rect">
-            <a:avLst/>
-          </a:prstGeom>
-          <a:noFill/>
-        </p:spPr>
-        <p:txBody>
-          <a:bodyPr wrap="square">
-            <a:spAutoFit/>
-          </a:bodyPr>
-          <a:lstStyle/>
-          <a:p>
-            <a:pPr algn="r"/>
-            <a:r>
-              <a:rPr sz="1100" b="0">
-                <a:solidFill>
-                  <a:srgbClr val="FFFFFF"/>
-                </a:solidFill>
-              </a:rPr>
-              <a:t>p7_t1_christian_religious_education_0101</a:t>
-            </a:r>
-          </a:p>
-        </p:txBody>
-      </p:sp>
-      <p:sp>
-        <p:nvSpPr>
-          <p:cNvPr id="6" name="TextBox 5"/>
-          <p:cNvSpPr txBox="1"/>
-          <p:nvPr/>
-        </p:nvSpPr>
-        <p:spPr>
-          <a:xfrm>
-            <a:off x="640080" y="1143000"/>
-            <a:ext cx="10972800" cy="685800"/>
-          </a:xfrm>
-          <a:prstGeom prst="rect">
-            <a:avLst/>
-          </a:prstGeom>
-          <a:noFill/>
-        </p:spPr>
-        <p:txBody>
-          <a:bodyPr wrap="square">
-            <a:spAutoFit/>
-          </a:bodyPr>
-          <a:lstStyle/>
-          <a:p>
-            <a:r>
-              <a:rPr sz="2800" b="1">
-                <a:solidFill>
-                  <a:srgbClr val="1A202C"/>
-                </a:solidFill>
-              </a:rPr>
-              <a:t>What is a Spirit?</a:t>
-            </a:r>
-          </a:p>
-        </p:txBody>
-      </p:sp>
-      <p:sp>
-        <p:nvSpPr>
-          <p:cNvPr id="7" name="Rounded Rectangle 6"/>
+          <p:cNvPr id="4" name="Rectangle 3"/>
           <p:cNvSpPr/>
           <p:nvPr/>
         </p:nvSpPr>
         <p:spPr>
           <a:xfrm>
-            <a:off x="777240" y="1993392"/>
-            <a:ext cx="10835640" cy="1005840"/>
-          </a:xfrm>
-          <a:prstGeom prst="roundRect">
-            <a:avLst/>
-          </a:prstGeom>
-          <a:solidFill>
-            <a:srgbClr val="FFFBEB"/>
-          </a:solidFill>
-          <a:ln w="15240">
-            <a:solidFill>
-              <a:srgbClr val="0E7490"/>
-            </a:solidFill>
+            <a:off x="0" y="795528"/>
+            <a:ext cx="12191695" cy="64008"/>
+          </a:xfrm>
+          <a:prstGeom prst="rect">
+            <a:avLst/>
+          </a:prstGeom>
+          <a:solidFill>
+            <a:srgbClr val="D90000"/>
+          </a:solidFill>
+          <a:ln>
+            <a:noFill/>
           </a:ln>
         </p:spPr>
         <p:style>
@@ -5087,58 +5514,23 @@
       </p:sp>
       <p:sp>
         <p:nvSpPr>
-          <p:cNvPr id="8" name="TextBox 7"/>
-          <p:cNvSpPr txBox="1"/>
-          <p:nvPr/>
-        </p:nvSpPr>
-        <p:spPr>
-          <a:xfrm>
-            <a:off x="1051560" y="2212848"/>
-            <a:ext cx="10287000" cy="502920"/>
-          </a:xfrm>
-          <a:prstGeom prst="rect">
-            <a:avLst/>
-          </a:prstGeom>
-          <a:noFill/>
-        </p:spPr>
-        <p:txBody>
-          <a:bodyPr wrap="square">
-            <a:spAutoFit/>
-          </a:bodyPr>
-          <a:lstStyle/>
-          <a:p>
-            <a:r>
-              <a:rPr sz="2100" b="1">
-                <a:solidFill>
-                  <a:srgbClr val="1A202C"/>
-                </a:solidFill>
-              </a:rPr>
-              <a:t>Key idea: Introduction to the "Spirit" concept. Just as wind is invisible but</a:t>
-            </a:r>
-          </a:p>
-        </p:txBody>
-      </p:sp>
-      <p:sp>
-        <p:nvSpPr>
-          <p:cNvPr id="9" name="Rounded Rectangle 8"/>
+          <p:cNvPr id="5" name="Rectangle 4"/>
           <p:cNvSpPr/>
           <p:nvPr/>
         </p:nvSpPr>
         <p:spPr>
           <a:xfrm>
-            <a:off x="1005840" y="3246120"/>
-            <a:ext cx="10149840" cy="621792"/>
-          </a:xfrm>
-          <a:prstGeom prst="roundRect">
-            <a:avLst/>
-          </a:prstGeom>
-          <a:solidFill>
-            <a:srgbClr val="F8FAFC"/>
-          </a:solidFill>
-          <a:ln w="15240">
-            <a:solidFill>
-              <a:srgbClr val="CBD5E1"/>
-            </a:solidFill>
+            <a:off x="0" y="859536"/>
+            <a:ext cx="164592" cy="5998464"/>
+          </a:xfrm>
+          <a:prstGeom prst="rect">
+            <a:avLst/>
+          </a:prstGeom>
+          <a:solidFill>
+            <a:srgbClr val="087490"/>
+          </a:solidFill>
+          <a:ln>
+            <a:noFill/>
           </a:ln>
         </p:spPr>
         <p:style>
@@ -5165,23 +5557,128 @@
       </p:sp>
       <p:sp>
         <p:nvSpPr>
-          <p:cNvPr id="10" name="Oval 9"/>
+          <p:cNvPr id="6" name="TextBox 5"/>
+          <p:cNvSpPr txBox="1"/>
+          <p:nvPr/>
+        </p:nvSpPr>
+        <p:spPr>
+          <a:xfrm>
+            <a:off x="502920" y="210312"/>
+            <a:ext cx="3200400" cy="256032"/>
+          </a:xfrm>
+          <a:prstGeom prst="rect">
+            <a:avLst/>
+          </a:prstGeom>
+          <a:noFill/>
+        </p:spPr>
+        <p:txBody>
+          <a:bodyPr wrap="square" lIns="0" rIns="0" tIns="0" bIns="0">
+            <a:spAutoFit/>
+          </a:bodyPr>
+          <a:lstStyle/>
+          <a:p>
+            <a:r>
+              <a:rPr sz="1200" b="1">
+                <a:solidFill>
+                  <a:srgbClr val="FFFFFF"/>
+                </a:solidFill>
+                <a:latin typeface="Arial"/>
+              </a:rPr>
+              <a:t>4. CONCEPT</a:t>
+            </a:r>
+          </a:p>
+        </p:txBody>
+      </p:sp>
+      <p:sp>
+        <p:nvSpPr>
+          <p:cNvPr id="7" name="TextBox 6"/>
+          <p:cNvSpPr txBox="1"/>
+          <p:nvPr/>
+        </p:nvSpPr>
+        <p:spPr>
+          <a:xfrm>
+            <a:off x="7589520" y="210312"/>
+            <a:ext cx="4069080" cy="256032"/>
+          </a:xfrm>
+          <a:prstGeom prst="rect">
+            <a:avLst/>
+          </a:prstGeom>
+          <a:noFill/>
+        </p:spPr>
+        <p:txBody>
+          <a:bodyPr wrap="square" lIns="0" rIns="0" tIns="0" bIns="0">
+            <a:spAutoFit/>
+          </a:bodyPr>
+          <a:lstStyle/>
+          <a:p>
+            <a:pPr algn="r"/>
+            <a:r>
+              <a:rPr sz="1000" b="0">
+                <a:solidFill>
+                  <a:srgbClr val="FFFFFF"/>
+                </a:solidFill>
+                <a:latin typeface="Arial"/>
+              </a:rPr>
+              <a:t>p7_t1_christian_religious_education_0101</a:t>
+            </a:r>
+          </a:p>
+        </p:txBody>
+      </p:sp>
+      <p:sp>
+        <p:nvSpPr>
+          <p:cNvPr id="8" name="TextBox 7"/>
+          <p:cNvSpPr txBox="1"/>
+          <p:nvPr/>
+        </p:nvSpPr>
+        <p:spPr>
+          <a:xfrm>
+            <a:off x="594360" y="1042415"/>
+            <a:ext cx="11109960" cy="566928"/>
+          </a:xfrm>
+          <a:prstGeom prst="rect">
+            <a:avLst/>
+          </a:prstGeom>
+          <a:noFill/>
+        </p:spPr>
+        <p:txBody>
+          <a:bodyPr wrap="square" lIns="0" rIns="0" tIns="0" bIns="0">
+            <a:spAutoFit/>
+          </a:bodyPr>
+          <a:lstStyle/>
+          <a:p>
+            <a:r>
+              <a:rPr sz="2600" b="1">
+                <a:solidFill>
+                  <a:srgbClr val="111827"/>
+                </a:solidFill>
+                <a:latin typeface="Arial"/>
+              </a:rPr>
+              <a:t>What is a Spirit?</a:t>
+            </a:r>
+          </a:p>
+        </p:txBody>
+      </p:sp>
+      <p:sp>
+        <p:nvSpPr>
+          <p:cNvPr id="9" name="Rectangle 8"/>
           <p:cNvSpPr/>
           <p:nvPr/>
         </p:nvSpPr>
         <p:spPr>
           <a:xfrm>
-            <a:off x="1234440" y="3364991"/>
-            <a:ext cx="347472" cy="347472"/>
-          </a:xfrm>
-          <a:prstGeom prst="ellipse">
-            <a:avLst/>
-          </a:prstGeom>
-          <a:solidFill>
-            <a:srgbClr val="0E7490"/>
-          </a:solidFill>
-          <a:ln>
-            <a:noFill/>
+            <a:off x="685800" y="1874519"/>
+            <a:ext cx="10835640" cy="804672"/>
+          </a:xfrm>
+          <a:prstGeom prst="rect">
+            <a:avLst/>
+          </a:prstGeom>
+          <a:solidFill>
+            <a:srgbClr val="FFF7E0"/>
+          </a:solidFill>
+          <a:ln w="17780">
+            <a:solidFill>
+              <a:srgbClr val="087490"/>
+            </a:solidFill>
           </a:ln>
         </p:spPr>
         <p:style>
@@ -5199,98 +5696,40 @@
           </a:fontRef>
         </p:style>
         <p:txBody>
-          <a:bodyPr rtlCol="0" anchor="ctr"/>
+          <a:bodyPr rtlCol="0" anchor="ctr" wrap="square" lIns="101600" rIns="101600" tIns="38100" bIns="38100"/>
           <a:lstStyle/>
           <a:p>
             <a:pPr algn="ctr"/>
-          </a:p>
-        </p:txBody>
-      </p:sp>
-      <p:sp>
-        <p:nvSpPr>
-          <p:cNvPr id="11" name="TextBox 10"/>
-          <p:cNvSpPr txBox="1"/>
-          <p:nvPr/>
-        </p:nvSpPr>
-        <p:spPr>
-          <a:xfrm>
-            <a:off x="1234440" y="3410712"/>
-            <a:ext cx="347472" cy="182880"/>
-          </a:xfrm>
-          <a:prstGeom prst="rect">
-            <a:avLst/>
-          </a:prstGeom>
-          <a:noFill/>
-        </p:spPr>
-        <p:txBody>
-          <a:bodyPr wrap="square">
-            <a:spAutoFit/>
-          </a:bodyPr>
-          <a:lstStyle/>
-          <a:p>
-            <a:pPr algn="ctr"/>
-            <a:r>
-              <a:rPr sz="1000" b="1">
-                <a:solidFill>
-                  <a:srgbClr val="FFFFFF"/>
-                </a:solidFill>
+            <a:r>
+              <a:rPr sz="1900" b="1">
+                <a:solidFill>
+                  <a:srgbClr val="111827"/>
+                </a:solidFill>
+                <a:latin typeface="Arial"/>
               </a:rPr>
-              <a:t>1</a:t>
-            </a:r>
-          </a:p>
-        </p:txBody>
-      </p:sp>
-      <p:sp>
-        <p:nvSpPr>
-          <p:cNvPr id="12" name="TextBox 11"/>
-          <p:cNvSpPr txBox="1"/>
-          <p:nvPr/>
-        </p:nvSpPr>
-        <p:spPr>
-          <a:xfrm>
-            <a:off x="1783080" y="3364991"/>
-            <a:ext cx="9006840" cy="347472"/>
-          </a:xfrm>
-          <a:prstGeom prst="rect">
-            <a:avLst/>
-          </a:prstGeom>
-          <a:noFill/>
-        </p:spPr>
-        <p:txBody>
-          <a:bodyPr wrap="square">
-            <a:spAutoFit/>
-          </a:bodyPr>
-          <a:lstStyle/>
-          <a:p>
-            <a:r>
-              <a:rPr sz="1700" b="0">
-                <a:solidFill>
-                  <a:srgbClr val="1A202C"/>
-                </a:solidFill>
-              </a:rPr>
-              <a:t>powerful, a spirit is a non-physical being.</a:t>
-            </a:r>
-          </a:p>
-        </p:txBody>
-      </p:sp>
-      <p:sp>
-        <p:nvSpPr>
-          <p:cNvPr id="13" name="Rounded Rectangle 12"/>
+              <a:t>Key idea: Introduction to the "Spirit" concept. Just as wind is i...</a:t>
+            </a:r>
+          </a:p>
+        </p:txBody>
+      </p:sp>
+      <p:sp>
+        <p:nvSpPr>
+          <p:cNvPr id="10" name="Rectangle 9"/>
           <p:cNvSpPr/>
           <p:nvPr/>
         </p:nvSpPr>
         <p:spPr>
           <a:xfrm>
-            <a:off x="1005840" y="4069080"/>
-            <a:ext cx="10149840" cy="621792"/>
-          </a:xfrm>
-          <a:prstGeom prst="roundRect">
-            <a:avLst/>
-          </a:prstGeom>
-          <a:solidFill>
-            <a:srgbClr val="F8FAFC"/>
-          </a:solidFill>
-          <a:ln w="15240">
+            <a:off x="868680" y="2971800"/>
+            <a:ext cx="10378440" cy="713232"/>
+          </a:xfrm>
+          <a:prstGeom prst="rect">
+            <a:avLst/>
+          </a:prstGeom>
+          <a:solidFill>
+            <a:srgbClr val="FFFFFF"/>
+          </a:solidFill>
+          <a:ln w="11430">
             <a:solidFill>
               <a:srgbClr val="CBD5E1"/>
             </a:solidFill>
@@ -5320,20 +5759,20 @@
       </p:sp>
       <p:sp>
         <p:nvSpPr>
-          <p:cNvPr id="14" name="Oval 13"/>
+          <p:cNvPr id="11" name="Rectangle 10"/>
           <p:cNvSpPr/>
           <p:nvPr/>
         </p:nvSpPr>
         <p:spPr>
           <a:xfrm>
-            <a:off x="1234440" y="4187952"/>
-            <a:ext cx="347472" cy="347472"/>
-          </a:xfrm>
-          <a:prstGeom prst="ellipse">
-            <a:avLst/>
-          </a:prstGeom>
-          <a:solidFill>
-            <a:srgbClr val="0E7490"/>
+            <a:off x="868680" y="2971800"/>
+            <a:ext cx="530352" cy="713232"/>
+          </a:xfrm>
+          <a:prstGeom prst="rect">
+            <a:avLst/>
+          </a:prstGeom>
+          <a:solidFill>
+            <a:srgbClr val="087490"/>
           </a:solidFill>
           <a:ln>
             <a:noFill/>
@@ -5354,23 +5793,32 @@
           </a:fontRef>
         </p:style>
         <p:txBody>
-          <a:bodyPr rtlCol="0" anchor="ctr"/>
+          <a:bodyPr rtlCol="0" anchor="ctr" wrap="square" lIns="101600" rIns="101600" tIns="38100" bIns="38100"/>
           <a:lstStyle/>
           <a:p>
             <a:pPr algn="ctr"/>
-          </a:p>
-        </p:txBody>
-      </p:sp>
-      <p:sp>
-        <p:nvSpPr>
-          <p:cNvPr id="15" name="TextBox 14"/>
+            <a:r>
+              <a:rPr sz="1500" b="1">
+                <a:solidFill>
+                  <a:srgbClr val="FFFFFF"/>
+                </a:solidFill>
+                <a:latin typeface="Arial"/>
+              </a:rPr>
+              <a:t>1</a:t>
+            </a:r>
+          </a:p>
+        </p:txBody>
+      </p:sp>
+      <p:sp>
+        <p:nvSpPr>
+          <p:cNvPr id="12" name="TextBox 11"/>
           <p:cNvSpPr txBox="1"/>
           <p:nvPr/>
         </p:nvSpPr>
         <p:spPr>
           <a:xfrm>
-            <a:off x="1234440" y="4233672"/>
-            <a:ext cx="347472" cy="182880"/>
+            <a:off x="1572768" y="3118104"/>
+            <a:ext cx="9372600" cy="384048"/>
           </a:xfrm>
           <a:prstGeom prst="rect">
             <a:avLst/>
@@ -5378,50 +5826,17 @@
           <a:noFill/>
         </p:spPr>
         <p:txBody>
-          <a:bodyPr wrap="square">
+          <a:bodyPr wrap="square" lIns="0" rIns="0" tIns="0" bIns="0">
             <a:spAutoFit/>
           </a:bodyPr>
           <a:lstStyle/>
           <a:p>
-            <a:pPr algn="ctr"/>
-            <a:r>
-              <a:rPr sz="1000" b="1">
-                <a:solidFill>
-                  <a:srgbClr val="FFFFFF"/>
-                </a:solidFill>
-              </a:rPr>
-              <a:t>2</a:t>
-            </a:r>
-          </a:p>
-        </p:txBody>
-      </p:sp>
-      <p:sp>
-        <p:nvSpPr>
-          <p:cNvPr id="16" name="TextBox 15"/>
-          <p:cNvSpPr txBox="1"/>
-          <p:nvPr/>
-        </p:nvSpPr>
-        <p:spPr>
-          <a:xfrm>
-            <a:off x="1783080" y="4187952"/>
-            <a:ext cx="9006840" cy="347472"/>
-          </a:xfrm>
-          <a:prstGeom prst="rect">
-            <a:avLst/>
-          </a:prstGeom>
-          <a:noFill/>
-        </p:spPr>
-        <p:txBody>
-          <a:bodyPr wrap="square">
-            <a:spAutoFit/>
-          </a:bodyPr>
-          <a:lstStyle/>
-          <a:p>
-            <a:r>
-              <a:rPr sz="1700" b="0">
-                <a:solidFill>
-                  <a:srgbClr val="1A202C"/>
-                </a:solidFill>
+            <a:r>
+              <a:rPr sz="1500" b="0">
+                <a:solidFill>
+                  <a:srgbClr val="111827"/>
+                </a:solidFill>
+                <a:latin typeface="Arial"/>
               </a:rPr>
               <a:t>A spirit is invisible.</a:t>
             </a:r>
@@ -5430,22 +5845,22 @@
       </p:sp>
       <p:sp>
         <p:nvSpPr>
-          <p:cNvPr id="17" name="Rounded Rectangle 16"/>
+          <p:cNvPr id="13" name="Rectangle 12"/>
           <p:cNvSpPr/>
           <p:nvPr/>
         </p:nvSpPr>
         <p:spPr>
           <a:xfrm>
-            <a:off x="1005840" y="4892040"/>
-            <a:ext cx="10149840" cy="621792"/>
-          </a:xfrm>
-          <a:prstGeom prst="roundRect">
-            <a:avLst/>
-          </a:prstGeom>
-          <a:solidFill>
-            <a:srgbClr val="F8FAFC"/>
-          </a:solidFill>
-          <a:ln w="15240">
+            <a:off x="868680" y="3822191"/>
+            <a:ext cx="10378440" cy="713232"/>
+          </a:xfrm>
+          <a:prstGeom prst="rect">
+            <a:avLst/>
+          </a:prstGeom>
+          <a:solidFill>
+            <a:srgbClr val="FFFFFF"/>
+          </a:solidFill>
+          <a:ln w="11430">
             <a:solidFill>
               <a:srgbClr val="CBD5E1"/>
             </a:solidFill>
@@ -5475,20 +5890,20 @@
       </p:sp>
       <p:sp>
         <p:nvSpPr>
-          <p:cNvPr id="18" name="Oval 17"/>
+          <p:cNvPr id="14" name="Rectangle 13"/>
           <p:cNvSpPr/>
           <p:nvPr/>
         </p:nvSpPr>
         <p:spPr>
           <a:xfrm>
-            <a:off x="1234440" y="5010912"/>
-            <a:ext cx="347472" cy="347472"/>
-          </a:xfrm>
-          <a:prstGeom prst="ellipse">
-            <a:avLst/>
-          </a:prstGeom>
-          <a:solidFill>
-            <a:srgbClr val="0E7490"/>
+            <a:off x="868680" y="3822191"/>
+            <a:ext cx="530352" cy="713232"/>
+          </a:xfrm>
+          <a:prstGeom prst="rect">
+            <a:avLst/>
+          </a:prstGeom>
+          <a:solidFill>
+            <a:srgbClr val="087490"/>
           </a:solidFill>
           <a:ln>
             <a:noFill/>
@@ -5509,23 +5924,32 @@
           </a:fontRef>
         </p:style>
         <p:txBody>
-          <a:bodyPr rtlCol="0" anchor="ctr"/>
+          <a:bodyPr rtlCol="0" anchor="ctr" wrap="square" lIns="101600" rIns="101600" tIns="38100" bIns="38100"/>
           <a:lstStyle/>
           <a:p>
             <a:pPr algn="ctr"/>
-          </a:p>
-        </p:txBody>
-      </p:sp>
-      <p:sp>
-        <p:nvSpPr>
-          <p:cNvPr id="19" name="TextBox 18"/>
+            <a:r>
+              <a:rPr sz="1500" b="1">
+                <a:solidFill>
+                  <a:srgbClr val="FFFFFF"/>
+                </a:solidFill>
+                <a:latin typeface="Arial"/>
+              </a:rPr>
+              <a:t>2</a:t>
+            </a:r>
+          </a:p>
+        </p:txBody>
+      </p:sp>
+      <p:sp>
+        <p:nvSpPr>
+          <p:cNvPr id="15" name="TextBox 14"/>
           <p:cNvSpPr txBox="1"/>
           <p:nvPr/>
         </p:nvSpPr>
         <p:spPr>
           <a:xfrm>
-            <a:off x="1234440" y="5056632"/>
-            <a:ext cx="347472" cy="182880"/>
+            <a:off x="1572768" y="3968496"/>
+            <a:ext cx="9372600" cy="384048"/>
           </a:xfrm>
           <a:prstGeom prst="rect">
             <a:avLst/>
@@ -5533,50 +5957,17 @@
           <a:noFill/>
         </p:spPr>
         <p:txBody>
-          <a:bodyPr wrap="square">
+          <a:bodyPr wrap="square" lIns="0" rIns="0" tIns="0" bIns="0">
             <a:spAutoFit/>
           </a:bodyPr>
           <a:lstStyle/>
           <a:p>
-            <a:pPr algn="ctr"/>
-            <a:r>
-              <a:rPr sz="1000" b="1">
-                <a:solidFill>
-                  <a:srgbClr val="FFFFFF"/>
-                </a:solidFill>
-              </a:rPr>
-              <a:t>3</a:t>
-            </a:r>
-          </a:p>
-        </p:txBody>
-      </p:sp>
-      <p:sp>
-        <p:nvSpPr>
-          <p:cNvPr id="20" name="TextBox 19"/>
-          <p:cNvSpPr txBox="1"/>
-          <p:nvPr/>
-        </p:nvSpPr>
-        <p:spPr>
-          <a:xfrm>
-            <a:off x="1783080" y="5010912"/>
-            <a:ext cx="9006840" cy="347472"/>
-          </a:xfrm>
-          <a:prstGeom prst="rect">
-            <a:avLst/>
-          </a:prstGeom>
-          <a:noFill/>
-        </p:spPr>
-        <p:txBody>
-          <a:bodyPr wrap="square">
-            <a:spAutoFit/>
-          </a:bodyPr>
-          <a:lstStyle/>
-          <a:p>
-            <a:r>
-              <a:rPr sz="1700" b="0">
-                <a:solidFill>
-                  <a:srgbClr val="1A202C"/>
-                </a:solidFill>
+            <a:r>
+              <a:rPr sz="1500" b="0">
+                <a:solidFill>
+                  <a:srgbClr val="111827"/>
+                </a:solidFill>
+                <a:latin typeface="Arial"/>
               </a:rPr>
               <a:t>We see the effects of a spirit, like we see wind moving trees.</a:t>
             </a:r>
@@ -5585,22 +5976,22 @@
       </p:sp>
       <p:sp>
         <p:nvSpPr>
-          <p:cNvPr id="21" name="Rounded Rectangle 20"/>
+          <p:cNvPr id="16" name="Rectangle 15"/>
           <p:cNvSpPr/>
           <p:nvPr/>
         </p:nvSpPr>
         <p:spPr>
           <a:xfrm>
-            <a:off x="1005840" y="5715000"/>
-            <a:ext cx="10149840" cy="621792"/>
-          </a:xfrm>
-          <a:prstGeom prst="roundRect">
-            <a:avLst/>
-          </a:prstGeom>
-          <a:solidFill>
-            <a:srgbClr val="F8FAFC"/>
-          </a:solidFill>
-          <a:ln w="15240">
+            <a:off x="868680" y="4672584"/>
+            <a:ext cx="10378440" cy="713232"/>
+          </a:xfrm>
+          <a:prstGeom prst="rect">
+            <a:avLst/>
+          </a:prstGeom>
+          <a:solidFill>
+            <a:srgbClr val="FFFFFF"/>
+          </a:solidFill>
+          <a:ln w="11430">
             <a:solidFill>
               <a:srgbClr val="CBD5E1"/>
             </a:solidFill>
@@ -5630,20 +6021,20 @@
       </p:sp>
       <p:sp>
         <p:nvSpPr>
-          <p:cNvPr id="22" name="Oval 21"/>
+          <p:cNvPr id="17" name="Rectangle 16"/>
           <p:cNvSpPr/>
           <p:nvPr/>
         </p:nvSpPr>
         <p:spPr>
           <a:xfrm>
-            <a:off x="1234440" y="5833872"/>
-            <a:ext cx="347472" cy="347472"/>
-          </a:xfrm>
-          <a:prstGeom prst="ellipse">
-            <a:avLst/>
-          </a:prstGeom>
-          <a:solidFill>
-            <a:srgbClr val="0E7490"/>
+            <a:off x="868680" y="4672584"/>
+            <a:ext cx="530352" cy="713232"/>
+          </a:xfrm>
+          <a:prstGeom prst="rect">
+            <a:avLst/>
+          </a:prstGeom>
+          <a:solidFill>
+            <a:srgbClr val="087490"/>
           </a:solidFill>
           <a:ln>
             <a:noFill/>
@@ -5664,23 +6055,32 @@
           </a:fontRef>
         </p:style>
         <p:txBody>
-          <a:bodyPr rtlCol="0" anchor="ctr"/>
+          <a:bodyPr rtlCol="0" anchor="ctr" wrap="square" lIns="101600" rIns="101600" tIns="38100" bIns="38100"/>
           <a:lstStyle/>
           <a:p>
             <a:pPr algn="ctr"/>
-          </a:p>
-        </p:txBody>
-      </p:sp>
-      <p:sp>
-        <p:nvSpPr>
-          <p:cNvPr id="23" name="TextBox 22"/>
+            <a:r>
+              <a:rPr sz="1500" b="1">
+                <a:solidFill>
+                  <a:srgbClr val="FFFFFF"/>
+                </a:solidFill>
+                <a:latin typeface="Arial"/>
+              </a:rPr>
+              <a:t>3</a:t>
+            </a:r>
+          </a:p>
+        </p:txBody>
+      </p:sp>
+      <p:sp>
+        <p:nvSpPr>
+          <p:cNvPr id="18" name="TextBox 17"/>
           <p:cNvSpPr txBox="1"/>
           <p:nvPr/>
         </p:nvSpPr>
         <p:spPr>
           <a:xfrm>
-            <a:off x="1234440" y="5879592"/>
-            <a:ext cx="347472" cy="182880"/>
+            <a:off x="1572768" y="4818888"/>
+            <a:ext cx="9372600" cy="384048"/>
           </a:xfrm>
           <a:prstGeom prst="rect">
             <a:avLst/>
@@ -5688,17 +6088,114 @@
           <a:noFill/>
         </p:spPr>
         <p:txBody>
-          <a:bodyPr wrap="square">
+          <a:bodyPr wrap="square" lIns="0" rIns="0" tIns="0" bIns="0">
             <a:spAutoFit/>
           </a:bodyPr>
           <a:lstStyle/>
           <a:p>
+            <a:r>
+              <a:rPr sz="1500" b="0">
+                <a:solidFill>
+                  <a:srgbClr val="111827"/>
+                </a:solidFill>
+                <a:latin typeface="Arial"/>
+              </a:rPr>
+              <a:t>The Spirit is the "breath" of God.</a:t>
+            </a:r>
+          </a:p>
+        </p:txBody>
+      </p:sp>
+      <p:sp>
+        <p:nvSpPr>
+          <p:cNvPr id="19" name="Rectangle 18"/>
+          <p:cNvSpPr/>
+          <p:nvPr/>
+        </p:nvSpPr>
+        <p:spPr>
+          <a:xfrm>
+            <a:off x="868680" y="5522976"/>
+            <a:ext cx="10378440" cy="713232"/>
+          </a:xfrm>
+          <a:prstGeom prst="rect">
+            <a:avLst/>
+          </a:prstGeom>
+          <a:solidFill>
+            <a:srgbClr val="FFFFFF"/>
+          </a:solidFill>
+          <a:ln w="11430">
+            <a:solidFill>
+              <a:srgbClr val="CBD5E1"/>
+            </a:solidFill>
+          </a:ln>
+        </p:spPr>
+        <p:style>
+          <a:lnRef idx="1">
+            <a:schemeClr val="accent1"/>
+          </a:lnRef>
+          <a:fillRef idx="3">
+            <a:schemeClr val="accent1"/>
+          </a:fillRef>
+          <a:effectRef idx="2">
+            <a:schemeClr val="accent1"/>
+          </a:effectRef>
+          <a:fontRef idx="minor">
+            <a:schemeClr val="lt1"/>
+          </a:fontRef>
+        </p:style>
+        <p:txBody>
+          <a:bodyPr rtlCol="0" anchor="ctr"/>
+          <a:lstStyle/>
+          <a:p>
             <a:pPr algn="ctr"/>
-            <a:r>
-              <a:rPr sz="1000" b="1">
+          </a:p>
+        </p:txBody>
+      </p:sp>
+      <p:sp>
+        <p:nvSpPr>
+          <p:cNvPr id="20" name="Rectangle 19"/>
+          <p:cNvSpPr/>
+          <p:nvPr/>
+        </p:nvSpPr>
+        <p:spPr>
+          <a:xfrm>
+            <a:off x="868680" y="5522976"/>
+            <a:ext cx="530352" cy="713232"/>
+          </a:xfrm>
+          <a:prstGeom prst="rect">
+            <a:avLst/>
+          </a:prstGeom>
+          <a:solidFill>
+            <a:srgbClr val="087490"/>
+          </a:solidFill>
+          <a:ln>
+            <a:noFill/>
+          </a:ln>
+        </p:spPr>
+        <p:style>
+          <a:lnRef idx="1">
+            <a:schemeClr val="accent1"/>
+          </a:lnRef>
+          <a:fillRef idx="3">
+            <a:schemeClr val="accent1"/>
+          </a:fillRef>
+          <a:effectRef idx="2">
+            <a:schemeClr val="accent1"/>
+          </a:effectRef>
+          <a:fontRef idx="minor">
+            <a:schemeClr val="lt1"/>
+          </a:fontRef>
+        </p:style>
+        <p:txBody>
+          <a:bodyPr rtlCol="0" anchor="ctr" wrap="square" lIns="101600" rIns="101600" tIns="38100" bIns="38100"/>
+          <a:lstStyle/>
+          <a:p>
+            <a:pPr algn="ctr"/>
+            <a:r>
+              <a:rPr sz="1500" b="1">
                 <a:solidFill>
                   <a:srgbClr val="FFFFFF"/>
                 </a:solidFill>
+                <a:latin typeface="Arial"/>
               </a:rPr>
               <a:t>4</a:t>
             </a:r>
@@ -5707,14 +6204,14 @@
       </p:sp>
       <p:sp>
         <p:nvSpPr>
-          <p:cNvPr id="24" name="TextBox 23"/>
+          <p:cNvPr id="21" name="TextBox 20"/>
           <p:cNvSpPr txBox="1"/>
           <p:nvPr/>
         </p:nvSpPr>
         <p:spPr>
           <a:xfrm>
-            <a:off x="1783080" y="5833872"/>
-            <a:ext cx="9006840" cy="347472"/>
+            <a:off x="1572768" y="5669280"/>
+            <a:ext cx="9372600" cy="384048"/>
           </a:xfrm>
           <a:prstGeom prst="rect">
             <a:avLst/>
@@ -5722,31 +6219,32 @@
           <a:noFill/>
         </p:spPr>
         <p:txBody>
-          <a:bodyPr wrap="square">
+          <a:bodyPr wrap="square" lIns="0" rIns="0" tIns="0" bIns="0">
             <a:spAutoFit/>
           </a:bodyPr>
           <a:lstStyle/>
           <a:p>
             <a:r>
-              <a:rPr sz="1700" b="0">
-                <a:solidFill>
-                  <a:srgbClr val="1A202C"/>
-                </a:solidFill>
+              <a:rPr sz="1500" b="0">
+                <a:solidFill>
+                  <a:srgbClr val="111827"/>
+                </a:solidFill>
+                <a:latin typeface="Arial"/>
               </a:rPr>
-              <a:t>The Spirit is the "breath" of God.</a:t>
-            </a:r>
-          </a:p>
-        </p:txBody>
-      </p:sp>
-      <p:sp>
-        <p:nvSpPr>
-          <p:cNvPr id="25" name="TextBox 24"/>
+              <a:t>Write one clear response.</a:t>
+            </a:r>
+          </a:p>
+        </p:txBody>
+      </p:sp>
+      <p:sp>
+        <p:nvSpPr>
+          <p:cNvPr id="22" name="TextBox 21"/>
           <p:cNvSpPr txBox="1"/>
           <p:nvPr/>
         </p:nvSpPr>
         <p:spPr>
           <a:xfrm>
-            <a:off x="777240" y="6419088"/>
+            <a:off x="685800" y="6419088"/>
             <a:ext cx="10835640" cy="228600"/>
           </a:xfrm>
           <a:prstGeom prst="rect">
@@ -5755,7 +6253,7 @@
           <a:noFill/>
         </p:spPr>
         <p:txBody>
-          <a:bodyPr wrap="square">
+          <a:bodyPr wrap="square" lIns="0" rIns="0" tIns="0" bIns="0">
             <a:spAutoFit/>
           </a:bodyPr>
           <a:lstStyle/>
@@ -5764,8 +6262,9 @@
             <a:r>
               <a:rPr sz="1000" b="0">
                 <a:solidFill>
-                  <a:srgbClr val="5B677D"/>
-                </a:solidFill>
+                  <a:srgbClr val="475569"/>
+                </a:solidFill>
+                <a:latin typeface="Arial"/>
               </a:rPr>
               <a:t>Listen • Talk • Try • Explain</a:t>
             </a:r>
@@ -5783,6 +6282,14 @@
 <file path=ppt/slides/slide5.xml><?xml version="1.0" encoding="utf-8"?>
 <p:sld xmlns:a="http://schemas.openxmlformats.org/drawingml/2006/main" xmlns:p="http://schemas.openxmlformats.org/presentationml/2006/main" xmlns:r="http://schemas.openxmlformats.org/officeDocument/2006/relationships">
   <p:cSld>
+    <p:bg>
+      <p:bgPr>
+        <a:solidFill>
+          <a:srgbClr val="F8FAFC"/>
+        </a:solidFill>
+        <a:effectLst/>
+      </p:bgPr>
+    </p:bg>
     <p:spTree>
       <p:nvGrpSpPr>
         <p:cNvPr id="1" name=""/>
@@ -5799,13 +6306,13 @@
         <p:spPr>
           <a:xfrm>
             <a:off x="0" y="0"/>
-            <a:ext cx="12191695" cy="914400"/>
-          </a:xfrm>
-          <a:prstGeom prst="rect">
-            <a:avLst/>
-          </a:prstGeom>
-          <a:solidFill>
-            <a:srgbClr val="D97706"/>
+            <a:ext cx="12191695" cy="713232"/>
+          </a:xfrm>
+          <a:prstGeom prst="rect">
+            <a:avLst/>
+          </a:prstGeom>
+          <a:solidFill>
+            <a:srgbClr val="111827"/>
           </a:solidFill>
           <a:ln>
             <a:noFill/>
@@ -5841,14 +6348,14 @@
         </p:nvSpPr>
         <p:spPr>
           <a:xfrm>
-            <a:off x="0" y="914400"/>
-            <a:ext cx="164592" cy="5943600"/>
-          </a:xfrm>
-          <a:prstGeom prst="rect">
-            <a:avLst/>
-          </a:prstGeom>
-          <a:solidFill>
-            <a:srgbClr val="D97706"/>
+            <a:off x="0" y="713232"/>
+            <a:ext cx="12191695" cy="82296"/>
+          </a:xfrm>
+          <a:prstGeom prst="rect">
+            <a:avLst/>
+          </a:prstGeom>
+          <a:solidFill>
+            <a:srgbClr val="FCD116"/>
           </a:solidFill>
           <a:ln>
             <a:noFill/>
@@ -5878,125 +6385,23 @@
       </p:sp>
       <p:sp>
         <p:nvSpPr>
-          <p:cNvPr id="4" name="TextBox 3"/>
-          <p:cNvSpPr txBox="1"/>
-          <p:nvPr/>
-        </p:nvSpPr>
-        <p:spPr>
-          <a:xfrm>
-            <a:off x="594360" y="246888"/>
-            <a:ext cx="2926080" cy="320040"/>
-          </a:xfrm>
-          <a:prstGeom prst="rect">
-            <a:avLst/>
-          </a:prstGeom>
-          <a:noFill/>
-        </p:spPr>
-        <p:txBody>
-          <a:bodyPr wrap="square">
-            <a:spAutoFit/>
-          </a:bodyPr>
-          <a:lstStyle/>
-          <a:p>
-            <a:r>
-              <a:rPr sz="1300" b="1">
-                <a:solidFill>
-                  <a:srgbClr val="FFFFFF"/>
-                </a:solidFill>
-              </a:rPr>
-              <a:t>5. MODEL</a:t>
-            </a:r>
-          </a:p>
-        </p:txBody>
-      </p:sp>
-      <p:sp>
-        <p:nvSpPr>
-          <p:cNvPr id="5" name="TextBox 4"/>
-          <p:cNvSpPr txBox="1"/>
-          <p:nvPr/>
-        </p:nvSpPr>
-        <p:spPr>
-          <a:xfrm>
-            <a:off x="7772400" y="246888"/>
-            <a:ext cx="3840480" cy="320040"/>
-          </a:xfrm>
-          <a:prstGeom prst="rect">
-            <a:avLst/>
-          </a:prstGeom>
-          <a:noFill/>
-        </p:spPr>
-        <p:txBody>
-          <a:bodyPr wrap="square">
-            <a:spAutoFit/>
-          </a:bodyPr>
-          <a:lstStyle/>
-          <a:p>
-            <a:pPr algn="r"/>
-            <a:r>
-              <a:rPr sz="1100" b="0">
-                <a:solidFill>
-                  <a:srgbClr val="FFFFFF"/>
-                </a:solidFill>
-              </a:rPr>
-              <a:t>p7_t1_christian_religious_education_0101</a:t>
-            </a:r>
-          </a:p>
-        </p:txBody>
-      </p:sp>
-      <p:sp>
-        <p:nvSpPr>
-          <p:cNvPr id="6" name="TextBox 5"/>
-          <p:cNvSpPr txBox="1"/>
-          <p:nvPr/>
-        </p:nvSpPr>
-        <p:spPr>
-          <a:xfrm>
-            <a:off x="640080" y="1143000"/>
-            <a:ext cx="10972800" cy="685800"/>
-          </a:xfrm>
-          <a:prstGeom prst="rect">
-            <a:avLst/>
-          </a:prstGeom>
-          <a:noFill/>
-        </p:spPr>
-        <p:txBody>
-          <a:bodyPr wrap="square">
-            <a:spAutoFit/>
-          </a:bodyPr>
-          <a:lstStyle/>
-          <a:p>
-            <a:r>
-              <a:rPr sz="2800" b="1">
-                <a:solidFill>
-                  <a:srgbClr val="1A202C"/>
-                </a:solidFill>
-              </a:rPr>
-              <a:t>Defining the Holy Spirit</a:t>
-            </a:r>
-          </a:p>
-        </p:txBody>
-      </p:sp>
-      <p:sp>
-        <p:nvSpPr>
-          <p:cNvPr id="7" name="Rounded Rectangle 6"/>
+          <p:cNvPr id="4" name="Rectangle 3"/>
           <p:cNvSpPr/>
           <p:nvPr/>
         </p:nvSpPr>
         <p:spPr>
           <a:xfrm>
-            <a:off x="777240" y="1993392"/>
-            <a:ext cx="10835640" cy="1005840"/>
-          </a:xfrm>
-          <a:prstGeom prst="roundRect">
-            <a:avLst/>
-          </a:prstGeom>
-          <a:solidFill>
-            <a:srgbClr val="FFFBEB"/>
-          </a:solidFill>
-          <a:ln w="15240">
-            <a:solidFill>
-              <a:srgbClr val="D97706"/>
-            </a:solidFill>
+            <a:off x="0" y="795528"/>
+            <a:ext cx="12191695" cy="64008"/>
+          </a:xfrm>
+          <a:prstGeom prst="rect">
+            <a:avLst/>
+          </a:prstGeom>
+          <a:solidFill>
+            <a:srgbClr val="D90000"/>
+          </a:solidFill>
+          <a:ln>
+            <a:noFill/>
           </a:ln>
         </p:spPr>
         <p:style>
@@ -6023,58 +6428,23 @@
       </p:sp>
       <p:sp>
         <p:nvSpPr>
-          <p:cNvPr id="8" name="TextBox 7"/>
-          <p:cNvSpPr txBox="1"/>
-          <p:nvPr/>
-        </p:nvSpPr>
-        <p:spPr>
-          <a:xfrm>
-            <a:off x="1051560" y="2212848"/>
-            <a:ext cx="10287000" cy="502920"/>
-          </a:xfrm>
-          <a:prstGeom prst="rect">
-            <a:avLst/>
-          </a:prstGeom>
-          <a:noFill/>
-        </p:spPr>
-        <p:txBody>
-          <a:bodyPr wrap="square">
-            <a:spAutoFit/>
-          </a:bodyPr>
-          <a:lstStyle/>
-          <a:p>
-            <a:r>
-              <a:rPr sz="2100" b="1">
-                <a:solidFill>
-                  <a:srgbClr val="1A202C"/>
-                </a:solidFill>
-              </a:rPr>
-              <a:t>Model the example step by step.</a:t>
-            </a:r>
-          </a:p>
-        </p:txBody>
-      </p:sp>
-      <p:sp>
-        <p:nvSpPr>
-          <p:cNvPr id="9" name="Rounded Rectangle 8"/>
+          <p:cNvPr id="5" name="Rectangle 4"/>
           <p:cNvSpPr/>
           <p:nvPr/>
         </p:nvSpPr>
         <p:spPr>
           <a:xfrm>
-            <a:off x="1005840" y="3246120"/>
-            <a:ext cx="10149840" cy="731520"/>
-          </a:xfrm>
-          <a:prstGeom prst="roundRect">
-            <a:avLst/>
-          </a:prstGeom>
-          <a:solidFill>
-            <a:srgbClr val="F8FAFC"/>
-          </a:solidFill>
-          <a:ln w="15240">
-            <a:solidFill>
-              <a:srgbClr val="CBD5E1"/>
-            </a:solidFill>
+            <a:off x="0" y="859536"/>
+            <a:ext cx="164592" cy="5998464"/>
+          </a:xfrm>
+          <a:prstGeom prst="rect">
+            <a:avLst/>
+          </a:prstGeom>
+          <a:solidFill>
+            <a:srgbClr val="D97706"/>
+          </a:solidFill>
+          <a:ln>
+            <a:noFill/>
           </a:ln>
         </p:spPr>
         <p:style>
@@ -6101,23 +6471,128 @@
       </p:sp>
       <p:sp>
         <p:nvSpPr>
-          <p:cNvPr id="10" name="Oval 9"/>
+          <p:cNvPr id="6" name="TextBox 5"/>
+          <p:cNvSpPr txBox="1"/>
+          <p:nvPr/>
+        </p:nvSpPr>
+        <p:spPr>
+          <a:xfrm>
+            <a:off x="502920" y="210312"/>
+            <a:ext cx="3200400" cy="256032"/>
+          </a:xfrm>
+          <a:prstGeom prst="rect">
+            <a:avLst/>
+          </a:prstGeom>
+          <a:noFill/>
+        </p:spPr>
+        <p:txBody>
+          <a:bodyPr wrap="square" lIns="0" rIns="0" tIns="0" bIns="0">
+            <a:spAutoFit/>
+          </a:bodyPr>
+          <a:lstStyle/>
+          <a:p>
+            <a:r>
+              <a:rPr sz="1200" b="1">
+                <a:solidFill>
+                  <a:srgbClr val="FFFFFF"/>
+                </a:solidFill>
+                <a:latin typeface="Arial"/>
+              </a:rPr>
+              <a:t>5. MODEL</a:t>
+            </a:r>
+          </a:p>
+        </p:txBody>
+      </p:sp>
+      <p:sp>
+        <p:nvSpPr>
+          <p:cNvPr id="7" name="TextBox 6"/>
+          <p:cNvSpPr txBox="1"/>
+          <p:nvPr/>
+        </p:nvSpPr>
+        <p:spPr>
+          <a:xfrm>
+            <a:off x="7589520" y="210312"/>
+            <a:ext cx="4069080" cy="256032"/>
+          </a:xfrm>
+          <a:prstGeom prst="rect">
+            <a:avLst/>
+          </a:prstGeom>
+          <a:noFill/>
+        </p:spPr>
+        <p:txBody>
+          <a:bodyPr wrap="square" lIns="0" rIns="0" tIns="0" bIns="0">
+            <a:spAutoFit/>
+          </a:bodyPr>
+          <a:lstStyle/>
+          <a:p>
+            <a:pPr algn="r"/>
+            <a:r>
+              <a:rPr sz="1000" b="0">
+                <a:solidFill>
+                  <a:srgbClr val="FFFFFF"/>
+                </a:solidFill>
+                <a:latin typeface="Arial"/>
+              </a:rPr>
+              <a:t>p7_t1_christian_religious_education_0101</a:t>
+            </a:r>
+          </a:p>
+        </p:txBody>
+      </p:sp>
+      <p:sp>
+        <p:nvSpPr>
+          <p:cNvPr id="8" name="TextBox 7"/>
+          <p:cNvSpPr txBox="1"/>
+          <p:nvPr/>
+        </p:nvSpPr>
+        <p:spPr>
+          <a:xfrm>
+            <a:off x="594360" y="1042415"/>
+            <a:ext cx="11109960" cy="566928"/>
+          </a:xfrm>
+          <a:prstGeom prst="rect">
+            <a:avLst/>
+          </a:prstGeom>
+          <a:noFill/>
+        </p:spPr>
+        <p:txBody>
+          <a:bodyPr wrap="square" lIns="0" rIns="0" tIns="0" bIns="0">
+            <a:spAutoFit/>
+          </a:bodyPr>
+          <a:lstStyle/>
+          <a:p>
+            <a:r>
+              <a:rPr sz="2600" b="1">
+                <a:solidFill>
+                  <a:srgbClr val="111827"/>
+                </a:solidFill>
+                <a:latin typeface="Arial"/>
+              </a:rPr>
+              <a:t>Defining the Holy Spirit</a:t>
+            </a:r>
+          </a:p>
+        </p:txBody>
+      </p:sp>
+      <p:sp>
+        <p:nvSpPr>
+          <p:cNvPr id="9" name="Rectangle 8"/>
           <p:cNvSpPr/>
           <p:nvPr/>
         </p:nvSpPr>
         <p:spPr>
           <a:xfrm>
-            <a:off x="1234440" y="3364991"/>
-            <a:ext cx="347472" cy="347472"/>
-          </a:xfrm>
-          <a:prstGeom prst="ellipse">
-            <a:avLst/>
-          </a:prstGeom>
-          <a:solidFill>
-            <a:srgbClr val="D97706"/>
-          </a:solidFill>
-          <a:ln>
-            <a:noFill/>
+            <a:off x="685800" y="1874519"/>
+            <a:ext cx="10835640" cy="804672"/>
+          </a:xfrm>
+          <a:prstGeom prst="rect">
+            <a:avLst/>
+          </a:prstGeom>
+          <a:solidFill>
+            <a:srgbClr val="FFF7E0"/>
+          </a:solidFill>
+          <a:ln w="17780">
+            <a:solidFill>
+              <a:srgbClr val="D97706"/>
+            </a:solidFill>
           </a:ln>
         </p:spPr>
         <p:style>
@@ -6135,98 +6610,40 @@
           </a:fontRef>
         </p:style>
         <p:txBody>
-          <a:bodyPr rtlCol="0" anchor="ctr"/>
+          <a:bodyPr rtlCol="0" anchor="ctr" wrap="square" lIns="101600" rIns="101600" tIns="38100" bIns="38100"/>
           <a:lstStyle/>
           <a:p>
             <a:pPr algn="ctr"/>
-          </a:p>
-        </p:txBody>
-      </p:sp>
-      <p:sp>
-        <p:nvSpPr>
-          <p:cNvPr id="11" name="TextBox 10"/>
-          <p:cNvSpPr txBox="1"/>
-          <p:nvPr/>
-        </p:nvSpPr>
-        <p:spPr>
-          <a:xfrm>
-            <a:off x="1234440" y="3410712"/>
-            <a:ext cx="347472" cy="182880"/>
-          </a:xfrm>
-          <a:prstGeom prst="rect">
-            <a:avLst/>
-          </a:prstGeom>
-          <a:noFill/>
-        </p:spPr>
-        <p:txBody>
-          <a:bodyPr wrap="square">
-            <a:spAutoFit/>
-          </a:bodyPr>
-          <a:lstStyle/>
-          <a:p>
-            <a:pPr algn="ctr"/>
-            <a:r>
-              <a:rPr sz="1000" b="1">
-                <a:solidFill>
-                  <a:srgbClr val="FFFFFF"/>
-                </a:solidFill>
+            <a:r>
+              <a:rPr sz="1900" b="1">
+                <a:solidFill>
+                  <a:srgbClr val="111827"/>
+                </a:solidFill>
+                <a:latin typeface="Arial"/>
               </a:rPr>
-              <a:t>1</a:t>
-            </a:r>
-          </a:p>
-        </p:txBody>
-      </p:sp>
-      <p:sp>
-        <p:nvSpPr>
-          <p:cNvPr id="12" name="TextBox 11"/>
-          <p:cNvSpPr txBox="1"/>
-          <p:nvPr/>
-        </p:nvSpPr>
-        <p:spPr>
-          <a:xfrm>
-            <a:off x="1783080" y="3364991"/>
-            <a:ext cx="9006840" cy="347472"/>
-          </a:xfrm>
-          <a:prstGeom prst="rect">
-            <a:avLst/>
-          </a:prstGeom>
-          <a:noFill/>
-        </p:spPr>
-        <p:txBody>
-          <a:bodyPr wrap="square">
-            <a:spAutoFit/>
-          </a:bodyPr>
-          <a:lstStyle/>
-          <a:p>
-            <a:r>
-              <a:rPr sz="1700" b="0">
-                <a:solidFill>
-                  <a:srgbClr val="1A202C"/>
-                </a:solidFill>
-              </a:rPr>
-              <a:t>2. The Holy Spirit</a:t>
-            </a:r>
-          </a:p>
-        </p:txBody>
-      </p:sp>
-      <p:sp>
-        <p:nvSpPr>
-          <p:cNvPr id="13" name="Rounded Rectangle 12"/>
+              <a:t>Model the example step by step.</a:t>
+            </a:r>
+          </a:p>
+        </p:txBody>
+      </p:sp>
+      <p:sp>
+        <p:nvSpPr>
+          <p:cNvPr id="10" name="Rectangle 9"/>
           <p:cNvSpPr/>
           <p:nvPr/>
         </p:nvSpPr>
         <p:spPr>
           <a:xfrm>
-            <a:off x="1005840" y="4178808"/>
-            <a:ext cx="10149840" cy="731520"/>
-          </a:xfrm>
-          <a:prstGeom prst="roundRect">
-            <a:avLst/>
-          </a:prstGeom>
-          <a:solidFill>
-            <a:srgbClr val="F8FAFC"/>
-          </a:solidFill>
-          <a:ln w="15240">
+            <a:off x="868680" y="2971800"/>
+            <a:ext cx="10378440" cy="713232"/>
+          </a:xfrm>
+          <a:prstGeom prst="rect">
+            <a:avLst/>
+          </a:prstGeom>
+          <a:solidFill>
+            <a:srgbClr val="FFFFFF"/>
+          </a:solidFill>
+          <a:ln w="11430">
             <a:solidFill>
               <a:srgbClr val="CBD5E1"/>
             </a:solidFill>
@@ -6256,16 +6673,16 @@
       </p:sp>
       <p:sp>
         <p:nvSpPr>
-          <p:cNvPr id="14" name="Oval 13"/>
+          <p:cNvPr id="11" name="Rectangle 10"/>
           <p:cNvSpPr/>
           <p:nvPr/>
         </p:nvSpPr>
         <p:spPr>
           <a:xfrm>
-            <a:off x="1234440" y="4297680"/>
-            <a:ext cx="347472" cy="347472"/>
-          </a:xfrm>
-          <a:prstGeom prst="ellipse">
+            <a:off x="868680" y="2971800"/>
+            <a:ext cx="530352" cy="713232"/>
+          </a:xfrm>
+          <a:prstGeom prst="rect">
             <a:avLst/>
           </a:prstGeom>
           <a:solidFill>
@@ -6290,23 +6707,32 @@
           </a:fontRef>
         </p:style>
         <p:txBody>
-          <a:bodyPr rtlCol="0" anchor="ctr"/>
+          <a:bodyPr rtlCol="0" anchor="ctr" wrap="square" lIns="101600" rIns="101600" tIns="38100" bIns="38100"/>
           <a:lstStyle/>
           <a:p>
             <a:pPr algn="ctr"/>
-          </a:p>
-        </p:txBody>
-      </p:sp>
-      <p:sp>
-        <p:nvSpPr>
-          <p:cNvPr id="15" name="TextBox 14"/>
+            <a:r>
+              <a:rPr sz="1500" b="1">
+                <a:solidFill>
+                  <a:srgbClr val="FFFFFF"/>
+                </a:solidFill>
+                <a:latin typeface="Arial"/>
+              </a:rPr>
+              <a:t>1</a:t>
+            </a:r>
+          </a:p>
+        </p:txBody>
+      </p:sp>
+      <p:sp>
+        <p:nvSpPr>
+          <p:cNvPr id="12" name="TextBox 11"/>
           <p:cNvSpPr txBox="1"/>
           <p:nvPr/>
         </p:nvSpPr>
         <p:spPr>
           <a:xfrm>
-            <a:off x="1234440" y="4343400"/>
-            <a:ext cx="347472" cy="182880"/>
+            <a:off x="1572768" y="3118104"/>
+            <a:ext cx="9372600" cy="384048"/>
           </a:xfrm>
           <a:prstGeom prst="rect">
             <a:avLst/>
@@ -6314,74 +6740,41 @@
           <a:noFill/>
         </p:spPr>
         <p:txBody>
-          <a:bodyPr wrap="square">
+          <a:bodyPr wrap="square" lIns="0" rIns="0" tIns="0" bIns="0">
             <a:spAutoFit/>
           </a:bodyPr>
           <a:lstStyle/>
           <a:p>
-            <a:pPr algn="ctr"/>
-            <a:r>
-              <a:rPr sz="1000" b="1">
-                <a:solidFill>
-                  <a:srgbClr val="FFFFFF"/>
-                </a:solidFill>
+            <a:r>
+              <a:rPr sz="1500" b="0">
+                <a:solidFill>
+                  <a:srgbClr val="111827"/>
+                </a:solidFill>
+                <a:latin typeface="Arial"/>
               </a:rPr>
-              <a:t>2</a:t>
-            </a:r>
-          </a:p>
-        </p:txBody>
-      </p:sp>
-      <p:sp>
-        <p:nvSpPr>
-          <p:cNvPr id="16" name="TextBox 15"/>
-          <p:cNvSpPr txBox="1"/>
-          <p:nvPr/>
-        </p:nvSpPr>
-        <p:spPr>
-          <a:xfrm>
-            <a:off x="1783080" y="4297680"/>
-            <a:ext cx="9006840" cy="347472"/>
-          </a:xfrm>
-          <a:prstGeom prst="rect">
-            <a:avLst/>
-          </a:prstGeom>
-          <a:noFill/>
-        </p:spPr>
-        <p:txBody>
-          <a:bodyPr wrap="square">
-            <a:spAutoFit/>
-          </a:bodyPr>
-          <a:lstStyle/>
-          <a:p>
-            <a:r>
-              <a:rPr sz="1700" b="0">
-                <a:solidFill>
-                  <a:srgbClr val="1A202C"/>
-                </a:solidFill>
-              </a:rPr>
-              <a:t>He is God's presence in us.</a:t>
-            </a:r>
-          </a:p>
-        </p:txBody>
-      </p:sp>
-      <p:sp>
-        <p:nvSpPr>
-          <p:cNvPr id="17" name="Rounded Rectangle 16"/>
+              <a:t>2. The Holy Spirit</a:t>
+            </a:r>
+          </a:p>
+        </p:txBody>
+      </p:sp>
+      <p:sp>
+        <p:nvSpPr>
+          <p:cNvPr id="13" name="Rectangle 12"/>
           <p:cNvSpPr/>
           <p:nvPr/>
         </p:nvSpPr>
         <p:spPr>
           <a:xfrm>
-            <a:off x="1005840" y="5111496"/>
-            <a:ext cx="10149840" cy="731520"/>
-          </a:xfrm>
-          <a:prstGeom prst="roundRect">
-            <a:avLst/>
-          </a:prstGeom>
-          <a:solidFill>
-            <a:srgbClr val="F8FAFC"/>
-          </a:solidFill>
-          <a:ln w="15240">
+            <a:off x="868680" y="3822191"/>
+            <a:ext cx="10378440" cy="713232"/>
+          </a:xfrm>
+          <a:prstGeom prst="rect">
+            <a:avLst/>
+          </a:prstGeom>
+          <a:solidFill>
+            <a:srgbClr val="FFFFFF"/>
+          </a:solidFill>
+          <a:ln w="11430">
             <a:solidFill>
               <a:srgbClr val="CBD5E1"/>
             </a:solidFill>
@@ -6411,16 +6804,16 @@
       </p:sp>
       <p:sp>
         <p:nvSpPr>
-          <p:cNvPr id="18" name="Oval 17"/>
+          <p:cNvPr id="14" name="Rectangle 13"/>
           <p:cNvSpPr/>
           <p:nvPr/>
         </p:nvSpPr>
         <p:spPr>
           <a:xfrm>
-            <a:off x="1234440" y="5230368"/>
-            <a:ext cx="347472" cy="347472"/>
-          </a:xfrm>
-          <a:prstGeom prst="ellipse">
+            <a:off x="868680" y="3822191"/>
+            <a:ext cx="530352" cy="713232"/>
+          </a:xfrm>
+          <a:prstGeom prst="rect">
             <a:avLst/>
           </a:prstGeom>
           <a:solidFill>
@@ -6445,23 +6838,32 @@
           </a:fontRef>
         </p:style>
         <p:txBody>
-          <a:bodyPr rtlCol="0" anchor="ctr"/>
+          <a:bodyPr rtlCol="0" anchor="ctr" wrap="square" lIns="101600" rIns="101600" tIns="38100" bIns="38100"/>
           <a:lstStyle/>
           <a:p>
             <a:pPr algn="ctr"/>
-          </a:p>
-        </p:txBody>
-      </p:sp>
-      <p:sp>
-        <p:nvSpPr>
-          <p:cNvPr id="19" name="TextBox 18"/>
+            <a:r>
+              <a:rPr sz="1500" b="1">
+                <a:solidFill>
+                  <a:srgbClr val="FFFFFF"/>
+                </a:solidFill>
+                <a:latin typeface="Arial"/>
+              </a:rPr>
+              <a:t>2</a:t>
+            </a:r>
+          </a:p>
+        </p:txBody>
+      </p:sp>
+      <p:sp>
+        <p:nvSpPr>
+          <p:cNvPr id="15" name="TextBox 14"/>
           <p:cNvSpPr txBox="1"/>
           <p:nvPr/>
         </p:nvSpPr>
         <p:spPr>
           <a:xfrm>
-            <a:off x="1234440" y="5276088"/>
-            <a:ext cx="347472" cy="182880"/>
+            <a:off x="1572768" y="3968496"/>
+            <a:ext cx="9372600" cy="384048"/>
           </a:xfrm>
           <a:prstGeom prst="rect">
             <a:avLst/>
@@ -6469,17 +6871,114 @@
           <a:noFill/>
         </p:spPr>
         <p:txBody>
-          <a:bodyPr wrap="square">
+          <a:bodyPr wrap="square" lIns="0" rIns="0" tIns="0" bIns="0">
             <a:spAutoFit/>
           </a:bodyPr>
           <a:lstStyle/>
           <a:p>
+            <a:r>
+              <a:rPr sz="1500" b="0">
+                <a:solidFill>
+                  <a:srgbClr val="111827"/>
+                </a:solidFill>
+                <a:latin typeface="Arial"/>
+              </a:rPr>
+              <a:t>He is God's presence in us.</a:t>
+            </a:r>
+          </a:p>
+        </p:txBody>
+      </p:sp>
+      <p:sp>
+        <p:nvSpPr>
+          <p:cNvPr id="16" name="Rectangle 15"/>
+          <p:cNvSpPr/>
+          <p:nvPr/>
+        </p:nvSpPr>
+        <p:spPr>
+          <a:xfrm>
+            <a:off x="868680" y="4672584"/>
+            <a:ext cx="10378440" cy="713232"/>
+          </a:xfrm>
+          <a:prstGeom prst="rect">
+            <a:avLst/>
+          </a:prstGeom>
+          <a:solidFill>
+            <a:srgbClr val="FFFFFF"/>
+          </a:solidFill>
+          <a:ln w="11430">
+            <a:solidFill>
+              <a:srgbClr val="CBD5E1"/>
+            </a:solidFill>
+          </a:ln>
+        </p:spPr>
+        <p:style>
+          <a:lnRef idx="1">
+            <a:schemeClr val="accent1"/>
+          </a:lnRef>
+          <a:fillRef idx="3">
+            <a:schemeClr val="accent1"/>
+          </a:fillRef>
+          <a:effectRef idx="2">
+            <a:schemeClr val="accent1"/>
+          </a:effectRef>
+          <a:fontRef idx="minor">
+            <a:schemeClr val="lt1"/>
+          </a:fontRef>
+        </p:style>
+        <p:txBody>
+          <a:bodyPr rtlCol="0" anchor="ctr"/>
+          <a:lstStyle/>
+          <a:p>
             <a:pPr algn="ctr"/>
-            <a:r>
-              <a:rPr sz="1000" b="1">
+          </a:p>
+        </p:txBody>
+      </p:sp>
+      <p:sp>
+        <p:nvSpPr>
+          <p:cNvPr id="17" name="Rectangle 16"/>
+          <p:cNvSpPr/>
+          <p:nvPr/>
+        </p:nvSpPr>
+        <p:spPr>
+          <a:xfrm>
+            <a:off x="868680" y="4672584"/>
+            <a:ext cx="530352" cy="713232"/>
+          </a:xfrm>
+          <a:prstGeom prst="rect">
+            <a:avLst/>
+          </a:prstGeom>
+          <a:solidFill>
+            <a:srgbClr val="D97706"/>
+          </a:solidFill>
+          <a:ln>
+            <a:noFill/>
+          </a:ln>
+        </p:spPr>
+        <p:style>
+          <a:lnRef idx="1">
+            <a:schemeClr val="accent1"/>
+          </a:lnRef>
+          <a:fillRef idx="3">
+            <a:schemeClr val="accent1"/>
+          </a:fillRef>
+          <a:effectRef idx="2">
+            <a:schemeClr val="accent1"/>
+          </a:effectRef>
+          <a:fontRef idx="minor">
+            <a:schemeClr val="lt1"/>
+          </a:fontRef>
+        </p:style>
+        <p:txBody>
+          <a:bodyPr rtlCol="0" anchor="ctr" wrap="square" lIns="101600" rIns="101600" tIns="38100" bIns="38100"/>
+          <a:lstStyle/>
+          <a:p>
+            <a:pPr algn="ctr"/>
+            <a:r>
+              <a:rPr sz="1500" b="1">
                 <a:solidFill>
                   <a:srgbClr val="FFFFFF"/>
                 </a:solidFill>
+                <a:latin typeface="Arial"/>
               </a:rPr>
               <a:t>3</a:t>
             </a:r>
@@ -6488,14 +6987,14 @@
       </p:sp>
       <p:sp>
         <p:nvSpPr>
-          <p:cNvPr id="20" name="TextBox 19"/>
+          <p:cNvPr id="18" name="TextBox 17"/>
           <p:cNvSpPr txBox="1"/>
           <p:nvPr/>
         </p:nvSpPr>
         <p:spPr>
           <a:xfrm>
-            <a:off x="1783080" y="5230368"/>
-            <a:ext cx="9006840" cy="347472"/>
+            <a:off x="1572768" y="4818888"/>
+            <a:ext cx="9372600" cy="384048"/>
           </a:xfrm>
           <a:prstGeom prst="rect">
             <a:avLst/>
@@ -6503,16 +7002,17 @@
           <a:noFill/>
         </p:spPr>
         <p:txBody>
-          <a:bodyPr wrap="square">
+          <a:bodyPr wrap="square" lIns="0" rIns="0" tIns="0" bIns="0">
             <a:spAutoFit/>
           </a:bodyPr>
           <a:lstStyle/>
           <a:p>
             <a:r>
-              <a:rPr sz="1700" b="0">
-                <a:solidFill>
-                  <a:srgbClr val="1A202C"/>
-                </a:solidFill>
+              <a:rPr sz="1500" b="0">
+                <a:solidFill>
+                  <a:srgbClr val="111827"/>
+                </a:solidFill>
+                <a:latin typeface="Arial"/>
               </a:rPr>
               <a:t>He is the "Gift and the Giver."</a:t>
             </a:r>
@@ -6521,14 +7021,111 @@
       </p:sp>
       <p:sp>
         <p:nvSpPr>
+          <p:cNvPr id="19" name="Rectangle 18"/>
+          <p:cNvSpPr/>
+          <p:nvPr/>
+        </p:nvSpPr>
+        <p:spPr>
+          <a:xfrm>
+            <a:off x="868680" y="5522976"/>
+            <a:ext cx="10378440" cy="713232"/>
+          </a:xfrm>
+          <a:prstGeom prst="rect">
+            <a:avLst/>
+          </a:prstGeom>
+          <a:solidFill>
+            <a:srgbClr val="FFFFFF"/>
+          </a:solidFill>
+          <a:ln w="11430">
+            <a:solidFill>
+              <a:srgbClr val="CBD5E1"/>
+            </a:solidFill>
+          </a:ln>
+        </p:spPr>
+        <p:style>
+          <a:lnRef idx="1">
+            <a:schemeClr val="accent1"/>
+          </a:lnRef>
+          <a:fillRef idx="3">
+            <a:schemeClr val="accent1"/>
+          </a:fillRef>
+          <a:effectRef idx="2">
+            <a:schemeClr val="accent1"/>
+          </a:effectRef>
+          <a:fontRef idx="minor">
+            <a:schemeClr val="lt1"/>
+          </a:fontRef>
+        </p:style>
+        <p:txBody>
+          <a:bodyPr rtlCol="0" anchor="ctr"/>
+          <a:lstStyle/>
+          <a:p>
+            <a:pPr algn="ctr"/>
+          </a:p>
+        </p:txBody>
+      </p:sp>
+      <p:sp>
+        <p:nvSpPr>
+          <p:cNvPr id="20" name="Rectangle 19"/>
+          <p:cNvSpPr/>
+          <p:nvPr/>
+        </p:nvSpPr>
+        <p:spPr>
+          <a:xfrm>
+            <a:off x="868680" y="5522976"/>
+            <a:ext cx="530352" cy="713232"/>
+          </a:xfrm>
+          <a:prstGeom prst="rect">
+            <a:avLst/>
+          </a:prstGeom>
+          <a:solidFill>
+            <a:srgbClr val="D97706"/>
+          </a:solidFill>
+          <a:ln>
+            <a:noFill/>
+          </a:ln>
+        </p:spPr>
+        <p:style>
+          <a:lnRef idx="1">
+            <a:schemeClr val="accent1"/>
+          </a:lnRef>
+          <a:fillRef idx="3">
+            <a:schemeClr val="accent1"/>
+          </a:fillRef>
+          <a:effectRef idx="2">
+            <a:schemeClr val="accent1"/>
+          </a:effectRef>
+          <a:fontRef idx="minor">
+            <a:schemeClr val="lt1"/>
+          </a:fontRef>
+        </p:style>
+        <p:txBody>
+          <a:bodyPr rtlCol="0" anchor="ctr" wrap="square" lIns="101600" rIns="101600" tIns="38100" bIns="38100"/>
+          <a:lstStyle/>
+          <a:p>
+            <a:pPr algn="ctr"/>
+            <a:r>
+              <a:rPr sz="1500" b="1">
+                <a:solidFill>
+                  <a:srgbClr val="FFFFFF"/>
+                </a:solidFill>
+                <a:latin typeface="Arial"/>
+              </a:rPr>
+              <a:t>4</a:t>
+            </a:r>
+          </a:p>
+        </p:txBody>
+      </p:sp>
+      <p:sp>
+        <p:nvSpPr>
           <p:cNvPr id="21" name="TextBox 20"/>
           <p:cNvSpPr txBox="1"/>
           <p:nvPr/>
         </p:nvSpPr>
         <p:spPr>
           <a:xfrm>
-            <a:off x="777240" y="6419088"/>
-            <a:ext cx="10835640" cy="228600"/>
+            <a:off x="1572768" y="5669280"/>
+            <a:ext cx="9372600" cy="384048"/>
           </a:xfrm>
           <a:prstGeom prst="rect">
             <a:avLst/>
@@ -6536,17 +7133,52 @@
           <a:noFill/>
         </p:spPr>
         <p:txBody>
-          <a:bodyPr wrap="square">
+          <a:bodyPr wrap="square" lIns="0" rIns="0" tIns="0" bIns="0">
             <a:spAutoFit/>
           </a:bodyPr>
           <a:lstStyle/>
           <a:p>
+            <a:r>
+              <a:rPr sz="1500" b="0">
+                <a:solidFill>
+                  <a:srgbClr val="111827"/>
+                </a:solidFill>
+                <a:latin typeface="Arial"/>
+              </a:rPr>
+              <a:t>Write one clear response.</a:t>
+            </a:r>
+          </a:p>
+        </p:txBody>
+      </p:sp>
+      <p:sp>
+        <p:nvSpPr>
+          <p:cNvPr id="22" name="TextBox 21"/>
+          <p:cNvSpPr txBox="1"/>
+          <p:nvPr/>
+        </p:nvSpPr>
+        <p:spPr>
+          <a:xfrm>
+            <a:off x="685800" y="6419088"/>
+            <a:ext cx="10835640" cy="228600"/>
+          </a:xfrm>
+          <a:prstGeom prst="rect">
+            <a:avLst/>
+          </a:prstGeom>
+          <a:noFill/>
+        </p:spPr>
+        <p:txBody>
+          <a:bodyPr wrap="square" lIns="0" rIns="0" tIns="0" bIns="0">
+            <a:spAutoFit/>
+          </a:bodyPr>
+          <a:lstStyle/>
+          <a:p>
             <a:pPr algn="r"/>
             <a:r>
               <a:rPr sz="1000" b="0">
                 <a:solidFill>
-                  <a:srgbClr val="5B677D"/>
-                </a:solidFill>
+                  <a:srgbClr val="475569"/>
+                </a:solidFill>
+                <a:latin typeface="Arial"/>
               </a:rPr>
               <a:t>Listen • Talk • Try • Explain</a:t>
             </a:r>
@@ -6564,6 +7196,14 @@
 <file path=ppt/slides/slide6.xml><?xml version="1.0" encoding="utf-8"?>
 <p:sld xmlns:a="http://schemas.openxmlformats.org/drawingml/2006/main" xmlns:p="http://schemas.openxmlformats.org/presentationml/2006/main" xmlns:r="http://schemas.openxmlformats.org/officeDocument/2006/relationships">
   <p:cSld>
+    <p:bg>
+      <p:bgPr>
+        <a:solidFill>
+          <a:srgbClr val="F8FAFC"/>
+        </a:solidFill>
+        <a:effectLst/>
+      </p:bgPr>
+    </p:bg>
     <p:spTree>
       <p:nvGrpSpPr>
         <p:cNvPr id="1" name=""/>
@@ -6580,13 +7220,13 @@
         <p:spPr>
           <a:xfrm>
             <a:off x="0" y="0"/>
-            <a:ext cx="12191695" cy="914400"/>
-          </a:xfrm>
-          <a:prstGeom prst="rect">
-            <a:avLst/>
-          </a:prstGeom>
-          <a:solidFill>
-            <a:srgbClr val="BE123C"/>
+            <a:ext cx="12191695" cy="713232"/>
+          </a:xfrm>
+          <a:prstGeom prst="rect">
+            <a:avLst/>
+          </a:prstGeom>
+          <a:solidFill>
+            <a:srgbClr val="111827"/>
           </a:solidFill>
           <a:ln>
             <a:noFill/>
@@ -6622,14 +7262,14 @@
         </p:nvSpPr>
         <p:spPr>
           <a:xfrm>
-            <a:off x="0" y="914400"/>
-            <a:ext cx="164592" cy="5943600"/>
-          </a:xfrm>
-          <a:prstGeom prst="rect">
-            <a:avLst/>
-          </a:prstGeom>
-          <a:solidFill>
-            <a:srgbClr val="BE123C"/>
+            <a:off x="0" y="713232"/>
+            <a:ext cx="12191695" cy="82296"/>
+          </a:xfrm>
+          <a:prstGeom prst="rect">
+            <a:avLst/>
+          </a:prstGeom>
+          <a:solidFill>
+            <a:srgbClr val="FCD116"/>
           </a:solidFill>
           <a:ln>
             <a:noFill/>
@@ -6659,125 +7299,23 @@
       </p:sp>
       <p:sp>
         <p:nvSpPr>
-          <p:cNvPr id="4" name="TextBox 3"/>
-          <p:cNvSpPr txBox="1"/>
-          <p:nvPr/>
-        </p:nvSpPr>
-        <p:spPr>
-          <a:xfrm>
-            <a:off x="594360" y="246888"/>
-            <a:ext cx="2926080" cy="320040"/>
-          </a:xfrm>
-          <a:prstGeom prst="rect">
-            <a:avLst/>
-          </a:prstGeom>
-          <a:noFill/>
-        </p:spPr>
-        <p:txBody>
-          <a:bodyPr wrap="square">
-            <a:spAutoFit/>
-          </a:bodyPr>
-          <a:lstStyle/>
-          <a:p>
-            <a:r>
-              <a:rPr sz="1300" b="1">
-                <a:solidFill>
-                  <a:srgbClr val="FFFFFF"/>
-                </a:solidFill>
-              </a:rPr>
-              <a:t>6. PRACTICE</a:t>
-            </a:r>
-          </a:p>
-        </p:txBody>
-      </p:sp>
-      <p:sp>
-        <p:nvSpPr>
-          <p:cNvPr id="5" name="TextBox 4"/>
-          <p:cNvSpPr txBox="1"/>
-          <p:nvPr/>
-        </p:nvSpPr>
-        <p:spPr>
-          <a:xfrm>
-            <a:off x="7772400" y="246888"/>
-            <a:ext cx="3840480" cy="320040"/>
-          </a:xfrm>
-          <a:prstGeom prst="rect">
-            <a:avLst/>
-          </a:prstGeom>
-          <a:noFill/>
-        </p:spPr>
-        <p:txBody>
-          <a:bodyPr wrap="square">
-            <a:spAutoFit/>
-          </a:bodyPr>
-          <a:lstStyle/>
-          <a:p>
-            <a:pPr algn="r"/>
-            <a:r>
-              <a:rPr sz="1100" b="0">
-                <a:solidFill>
-                  <a:srgbClr val="FFFFFF"/>
-                </a:solidFill>
-              </a:rPr>
-              <a:t>p7_t1_christian_religious_education_0101</a:t>
-            </a:r>
-          </a:p>
-        </p:txBody>
-      </p:sp>
-      <p:sp>
-        <p:nvSpPr>
-          <p:cNvPr id="6" name="TextBox 5"/>
-          <p:cNvSpPr txBox="1"/>
-          <p:nvPr/>
-        </p:nvSpPr>
-        <p:spPr>
-          <a:xfrm>
-            <a:off x="640080" y="1143000"/>
-            <a:ext cx="10972800" cy="685800"/>
-          </a:xfrm>
-          <a:prstGeom prst="rect">
-            <a:avLst/>
-          </a:prstGeom>
-          <a:noFill/>
-        </p:spPr>
-        <p:txBody>
-          <a:bodyPr wrap="square">
-            <a:spAutoFit/>
-          </a:bodyPr>
-          <a:lstStyle/>
-          <a:p>
-            <a:r>
-              <a:rPr sz="2800" b="1">
-                <a:solidFill>
-                  <a:srgbClr val="1A202C"/>
-                </a:solidFill>
-              </a:rPr>
-              <a:t>Try it together</a:t>
-            </a:r>
-          </a:p>
-        </p:txBody>
-      </p:sp>
-      <p:sp>
-        <p:nvSpPr>
-          <p:cNvPr id="7" name="Rounded Rectangle 6"/>
+          <p:cNvPr id="4" name="Rectangle 3"/>
           <p:cNvSpPr/>
           <p:nvPr/>
         </p:nvSpPr>
         <p:spPr>
           <a:xfrm>
-            <a:off x="777240" y="1993392"/>
-            <a:ext cx="10835640" cy="1005840"/>
-          </a:xfrm>
-          <a:prstGeom prst="roundRect">
-            <a:avLst/>
-          </a:prstGeom>
-          <a:solidFill>
-            <a:srgbClr val="FFFBEB"/>
-          </a:solidFill>
-          <a:ln w="15240">
-            <a:solidFill>
-              <a:srgbClr val="BE123C"/>
-            </a:solidFill>
+            <a:off x="0" y="795528"/>
+            <a:ext cx="12191695" cy="64008"/>
+          </a:xfrm>
+          <a:prstGeom prst="rect">
+            <a:avLst/>
+          </a:prstGeom>
+          <a:solidFill>
+            <a:srgbClr val="D90000"/>
+          </a:solidFill>
+          <a:ln>
+            <a:noFill/>
           </a:ln>
         </p:spPr>
         <p:style>
@@ -6804,58 +7342,23 @@
       </p:sp>
       <p:sp>
         <p:nvSpPr>
-          <p:cNvPr id="8" name="TextBox 7"/>
-          <p:cNvSpPr txBox="1"/>
-          <p:nvPr/>
-        </p:nvSpPr>
-        <p:spPr>
-          <a:xfrm>
-            <a:off x="1051560" y="2212848"/>
-            <a:ext cx="10287000" cy="502920"/>
-          </a:xfrm>
-          <a:prstGeom prst="rect">
-            <a:avLst/>
-          </a:prstGeom>
-          <a:noFill/>
-        </p:spPr>
-        <p:txBody>
-          <a:bodyPr wrap="square">
-            <a:spAutoFit/>
-          </a:bodyPr>
-          <a:lstStyle/>
-          <a:p>
-            <a:r>
-              <a:rPr sz="2100" b="1">
-                <a:solidFill>
-                  <a:srgbClr val="1A202C"/>
-                </a:solidFill>
-              </a:rPr>
-              <a:t>How do you know the wind is there?</a:t>
-            </a:r>
-          </a:p>
-        </p:txBody>
-      </p:sp>
-      <p:sp>
-        <p:nvSpPr>
-          <p:cNvPr id="9" name="Rounded Rectangle 8"/>
+          <p:cNvPr id="5" name="Rectangle 4"/>
           <p:cNvSpPr/>
           <p:nvPr/>
         </p:nvSpPr>
         <p:spPr>
           <a:xfrm>
-            <a:off x="1005840" y="3246120"/>
-            <a:ext cx="10149840" cy="731520"/>
-          </a:xfrm>
-          <a:prstGeom prst="roundRect">
-            <a:avLst/>
-          </a:prstGeom>
-          <a:solidFill>
-            <a:srgbClr val="F8FAFC"/>
-          </a:solidFill>
-          <a:ln w="15240">
-            <a:solidFill>
-              <a:srgbClr val="CBD5E1"/>
-            </a:solidFill>
+            <a:off x="0" y="859536"/>
+            <a:ext cx="164592" cy="5998464"/>
+          </a:xfrm>
+          <a:prstGeom prst="rect">
+            <a:avLst/>
+          </a:prstGeom>
+          <a:solidFill>
+            <a:srgbClr val="BE123C"/>
+          </a:solidFill>
+          <a:ln>
+            <a:noFill/>
           </a:ln>
         </p:spPr>
         <p:style>
@@ -6882,23 +7385,128 @@
       </p:sp>
       <p:sp>
         <p:nvSpPr>
-          <p:cNvPr id="10" name="Oval 9"/>
+          <p:cNvPr id="6" name="TextBox 5"/>
+          <p:cNvSpPr txBox="1"/>
+          <p:nvPr/>
+        </p:nvSpPr>
+        <p:spPr>
+          <a:xfrm>
+            <a:off x="502920" y="210312"/>
+            <a:ext cx="3200400" cy="256032"/>
+          </a:xfrm>
+          <a:prstGeom prst="rect">
+            <a:avLst/>
+          </a:prstGeom>
+          <a:noFill/>
+        </p:spPr>
+        <p:txBody>
+          <a:bodyPr wrap="square" lIns="0" rIns="0" tIns="0" bIns="0">
+            <a:spAutoFit/>
+          </a:bodyPr>
+          <a:lstStyle/>
+          <a:p>
+            <a:r>
+              <a:rPr sz="1200" b="1">
+                <a:solidFill>
+                  <a:srgbClr val="FFFFFF"/>
+                </a:solidFill>
+                <a:latin typeface="Arial"/>
+              </a:rPr>
+              <a:t>6. PRACTICE</a:t>
+            </a:r>
+          </a:p>
+        </p:txBody>
+      </p:sp>
+      <p:sp>
+        <p:nvSpPr>
+          <p:cNvPr id="7" name="TextBox 6"/>
+          <p:cNvSpPr txBox="1"/>
+          <p:nvPr/>
+        </p:nvSpPr>
+        <p:spPr>
+          <a:xfrm>
+            <a:off x="7589520" y="210312"/>
+            <a:ext cx="4069080" cy="256032"/>
+          </a:xfrm>
+          <a:prstGeom prst="rect">
+            <a:avLst/>
+          </a:prstGeom>
+          <a:noFill/>
+        </p:spPr>
+        <p:txBody>
+          <a:bodyPr wrap="square" lIns="0" rIns="0" tIns="0" bIns="0">
+            <a:spAutoFit/>
+          </a:bodyPr>
+          <a:lstStyle/>
+          <a:p>
+            <a:pPr algn="r"/>
+            <a:r>
+              <a:rPr sz="1000" b="0">
+                <a:solidFill>
+                  <a:srgbClr val="FFFFFF"/>
+                </a:solidFill>
+                <a:latin typeface="Arial"/>
+              </a:rPr>
+              <a:t>p7_t1_christian_religious_education_0101</a:t>
+            </a:r>
+          </a:p>
+        </p:txBody>
+      </p:sp>
+      <p:sp>
+        <p:nvSpPr>
+          <p:cNvPr id="8" name="TextBox 7"/>
+          <p:cNvSpPr txBox="1"/>
+          <p:nvPr/>
+        </p:nvSpPr>
+        <p:spPr>
+          <a:xfrm>
+            <a:off x="594360" y="1042415"/>
+            <a:ext cx="11109960" cy="566928"/>
+          </a:xfrm>
+          <a:prstGeom prst="rect">
+            <a:avLst/>
+          </a:prstGeom>
+          <a:noFill/>
+        </p:spPr>
+        <p:txBody>
+          <a:bodyPr wrap="square" lIns="0" rIns="0" tIns="0" bIns="0">
+            <a:spAutoFit/>
+          </a:bodyPr>
+          <a:lstStyle/>
+          <a:p>
+            <a:r>
+              <a:rPr sz="2600" b="1">
+                <a:solidFill>
+                  <a:srgbClr val="111827"/>
+                </a:solidFill>
+                <a:latin typeface="Arial"/>
+              </a:rPr>
+              <a:t>Try it together</a:t>
+            </a:r>
+          </a:p>
+        </p:txBody>
+      </p:sp>
+      <p:sp>
+        <p:nvSpPr>
+          <p:cNvPr id="9" name="Rectangle 8"/>
           <p:cNvSpPr/>
           <p:nvPr/>
         </p:nvSpPr>
         <p:spPr>
           <a:xfrm>
-            <a:off x="1234440" y="3364991"/>
-            <a:ext cx="347472" cy="347472"/>
-          </a:xfrm>
-          <a:prstGeom prst="ellipse">
-            <a:avLst/>
-          </a:prstGeom>
-          <a:solidFill>
-            <a:srgbClr val="BE123C"/>
-          </a:solidFill>
-          <a:ln>
-            <a:noFill/>
+            <a:off x="685800" y="1874519"/>
+            <a:ext cx="10835640" cy="804672"/>
+          </a:xfrm>
+          <a:prstGeom prst="rect">
+            <a:avLst/>
+          </a:prstGeom>
+          <a:solidFill>
+            <a:srgbClr val="FFF7E0"/>
+          </a:solidFill>
+          <a:ln w="17780">
+            <a:solidFill>
+              <a:srgbClr val="BE123C"/>
+            </a:solidFill>
           </a:ln>
         </p:spPr>
         <p:style>
@@ -6916,98 +7524,40 @@
           </a:fontRef>
         </p:style>
         <p:txBody>
-          <a:bodyPr rtlCol="0" anchor="ctr"/>
+          <a:bodyPr rtlCol="0" anchor="ctr" wrap="square" lIns="101600" rIns="101600" tIns="38100" bIns="38100"/>
           <a:lstStyle/>
           <a:p>
             <a:pPr algn="ctr"/>
-          </a:p>
-        </p:txBody>
-      </p:sp>
-      <p:sp>
-        <p:nvSpPr>
-          <p:cNvPr id="11" name="TextBox 10"/>
-          <p:cNvSpPr txBox="1"/>
-          <p:nvPr/>
-        </p:nvSpPr>
-        <p:spPr>
-          <a:xfrm>
-            <a:off x="1234440" y="3410712"/>
-            <a:ext cx="347472" cy="182880"/>
-          </a:xfrm>
-          <a:prstGeom prst="rect">
-            <a:avLst/>
-          </a:prstGeom>
-          <a:noFill/>
-        </p:spPr>
-        <p:txBody>
-          <a:bodyPr wrap="square">
-            <a:spAutoFit/>
-          </a:bodyPr>
-          <a:lstStyle/>
-          <a:p>
-            <a:pPr algn="ctr"/>
-            <a:r>
-              <a:rPr sz="1000" b="1">
-                <a:solidFill>
-                  <a:srgbClr val="FFFFFF"/>
-                </a:solidFill>
+            <a:r>
+              <a:rPr sz="1900" b="1">
+                <a:solidFill>
+                  <a:srgbClr val="111827"/>
+                </a:solidFill>
+                <a:latin typeface="Arial"/>
               </a:rPr>
-              <a:t>1</a:t>
-            </a:r>
-          </a:p>
-        </p:txBody>
-      </p:sp>
-      <p:sp>
-        <p:nvSpPr>
-          <p:cNvPr id="12" name="TextBox 11"/>
-          <p:cNvSpPr txBox="1"/>
-          <p:nvPr/>
-        </p:nvSpPr>
-        <p:spPr>
-          <a:xfrm>
-            <a:off x="1783080" y="3364991"/>
-            <a:ext cx="9006840" cy="347472"/>
-          </a:xfrm>
-          <a:prstGeom prst="rect">
-            <a:avLst/>
-          </a:prstGeom>
-          <a:noFill/>
-        </p:spPr>
-        <p:txBody>
-          <a:bodyPr wrap="square">
-            <a:spAutoFit/>
-          </a:bodyPr>
-          <a:lstStyle/>
-          <a:p>
-            <a:r>
-              <a:rPr sz="1700" b="0">
-                <a:solidFill>
-                  <a:srgbClr val="1A202C"/>
-                </a:solidFill>
-              </a:rPr>
-              <a:t>Is God visible to our physical eyes?</a:t>
-            </a:r>
-          </a:p>
-        </p:txBody>
-      </p:sp>
-      <p:sp>
-        <p:nvSpPr>
-          <p:cNvPr id="13" name="Rounded Rectangle 12"/>
+              <a:t>How do you know the wind is there?</a:t>
+            </a:r>
+          </a:p>
+        </p:txBody>
+      </p:sp>
+      <p:sp>
+        <p:nvSpPr>
+          <p:cNvPr id="10" name="Rectangle 9"/>
           <p:cNvSpPr/>
           <p:nvPr/>
         </p:nvSpPr>
         <p:spPr>
           <a:xfrm>
-            <a:off x="1005840" y="4178808"/>
-            <a:ext cx="10149840" cy="731520"/>
-          </a:xfrm>
-          <a:prstGeom prst="roundRect">
-            <a:avLst/>
-          </a:prstGeom>
-          <a:solidFill>
-            <a:srgbClr val="F8FAFC"/>
-          </a:solidFill>
-          <a:ln w="15240">
+            <a:off x="868680" y="2971800"/>
+            <a:ext cx="10378440" cy="713232"/>
+          </a:xfrm>
+          <a:prstGeom prst="rect">
+            <a:avLst/>
+          </a:prstGeom>
+          <a:solidFill>
+            <a:srgbClr val="FFFFFF"/>
+          </a:solidFill>
+          <a:ln w="11430">
             <a:solidFill>
               <a:srgbClr val="CBD5E1"/>
             </a:solidFill>
@@ -7037,16 +7587,16 @@
       </p:sp>
       <p:sp>
         <p:nvSpPr>
-          <p:cNvPr id="14" name="Oval 13"/>
+          <p:cNvPr id="11" name="Rectangle 10"/>
           <p:cNvSpPr/>
           <p:nvPr/>
         </p:nvSpPr>
         <p:spPr>
           <a:xfrm>
-            <a:off x="1234440" y="4297680"/>
-            <a:ext cx="347472" cy="347472"/>
-          </a:xfrm>
-          <a:prstGeom prst="ellipse">
+            <a:off x="868680" y="2971800"/>
+            <a:ext cx="530352" cy="713232"/>
+          </a:xfrm>
+          <a:prstGeom prst="rect">
             <a:avLst/>
           </a:prstGeom>
           <a:solidFill>
@@ -7071,23 +7621,32 @@
           </a:fontRef>
         </p:style>
         <p:txBody>
-          <a:bodyPr rtlCol="0" anchor="ctr"/>
+          <a:bodyPr rtlCol="0" anchor="ctr" wrap="square" lIns="101600" rIns="101600" tIns="38100" bIns="38100"/>
           <a:lstStyle/>
           <a:p>
             <a:pPr algn="ctr"/>
-          </a:p>
-        </p:txBody>
-      </p:sp>
-      <p:sp>
-        <p:nvSpPr>
-          <p:cNvPr id="15" name="TextBox 14"/>
+            <a:r>
+              <a:rPr sz="1500" b="1">
+                <a:solidFill>
+                  <a:srgbClr val="FFFFFF"/>
+                </a:solidFill>
+                <a:latin typeface="Arial"/>
+              </a:rPr>
+              <a:t>1</a:t>
+            </a:r>
+          </a:p>
+        </p:txBody>
+      </p:sp>
+      <p:sp>
+        <p:nvSpPr>
+          <p:cNvPr id="12" name="TextBox 11"/>
           <p:cNvSpPr txBox="1"/>
           <p:nvPr/>
         </p:nvSpPr>
         <p:spPr>
           <a:xfrm>
-            <a:off x="1234440" y="4343400"/>
-            <a:ext cx="347472" cy="182880"/>
+            <a:off x="1572768" y="3118104"/>
+            <a:ext cx="9372600" cy="384048"/>
           </a:xfrm>
           <a:prstGeom prst="rect">
             <a:avLst/>
@@ -7095,74 +7654,41 @@
           <a:noFill/>
         </p:spPr>
         <p:txBody>
-          <a:bodyPr wrap="square">
+          <a:bodyPr wrap="square" lIns="0" rIns="0" tIns="0" bIns="0">
             <a:spAutoFit/>
           </a:bodyPr>
           <a:lstStyle/>
           <a:p>
-            <a:pPr algn="ctr"/>
-            <a:r>
-              <a:rPr sz="1000" b="1">
-                <a:solidFill>
-                  <a:srgbClr val="FFFFFF"/>
-                </a:solidFill>
+            <a:r>
+              <a:rPr sz="1500" b="0">
+                <a:solidFill>
+                  <a:srgbClr val="111827"/>
+                </a:solidFill>
+                <a:latin typeface="Arial"/>
               </a:rPr>
-              <a:t>2</a:t>
-            </a:r>
-          </a:p>
-        </p:txBody>
-      </p:sp>
-      <p:sp>
-        <p:nvSpPr>
-          <p:cNvPr id="16" name="TextBox 15"/>
-          <p:cNvSpPr txBox="1"/>
-          <p:nvPr/>
-        </p:nvSpPr>
-        <p:spPr>
-          <a:xfrm>
-            <a:off x="1783080" y="4297680"/>
-            <a:ext cx="9006840" cy="347472"/>
-          </a:xfrm>
-          <a:prstGeom prst="rect">
-            <a:avLst/>
-          </a:prstGeom>
-          <a:noFill/>
-        </p:spPr>
-        <p:txBody>
-          <a:bodyPr wrap="square">
-            <a:spAutoFit/>
-          </a:bodyPr>
-          <a:lstStyle/>
-          <a:p>
-            <a:r>
-              <a:rPr sz="1700" b="0">
-                <a:solidFill>
-                  <a:srgbClr val="1A202C"/>
-                </a:solidFill>
-              </a:rPr>
-              <a:t>Who is the Holy Spirit?</a:t>
-            </a:r>
-          </a:p>
-        </p:txBody>
-      </p:sp>
-      <p:sp>
-        <p:nvSpPr>
-          <p:cNvPr id="17" name="Rounded Rectangle 16"/>
+              <a:t>Is God visible to our physical eyes?</a:t>
+            </a:r>
+          </a:p>
+        </p:txBody>
+      </p:sp>
+      <p:sp>
+        <p:nvSpPr>
+          <p:cNvPr id="13" name="Rectangle 12"/>
           <p:cNvSpPr/>
           <p:nvPr/>
         </p:nvSpPr>
         <p:spPr>
           <a:xfrm>
-            <a:off x="1005840" y="5111496"/>
-            <a:ext cx="10149840" cy="731520"/>
-          </a:xfrm>
-          <a:prstGeom prst="roundRect">
-            <a:avLst/>
-          </a:prstGeom>
-          <a:solidFill>
-            <a:srgbClr val="F8FAFC"/>
-          </a:solidFill>
-          <a:ln w="15240">
+            <a:off x="868680" y="3822191"/>
+            <a:ext cx="10378440" cy="713232"/>
+          </a:xfrm>
+          <a:prstGeom prst="rect">
+            <a:avLst/>
+          </a:prstGeom>
+          <a:solidFill>
+            <a:srgbClr val="FFFFFF"/>
+          </a:solidFill>
+          <a:ln w="11430">
             <a:solidFill>
               <a:srgbClr val="CBD5E1"/>
             </a:solidFill>
@@ -7192,16 +7718,16 @@
       </p:sp>
       <p:sp>
         <p:nvSpPr>
-          <p:cNvPr id="18" name="Oval 17"/>
+          <p:cNvPr id="14" name="Rectangle 13"/>
           <p:cNvSpPr/>
           <p:nvPr/>
         </p:nvSpPr>
         <p:spPr>
           <a:xfrm>
-            <a:off x="1234440" y="5230368"/>
-            <a:ext cx="347472" cy="347472"/>
-          </a:xfrm>
-          <a:prstGeom prst="ellipse">
+            <a:off x="868680" y="3822191"/>
+            <a:ext cx="530352" cy="713232"/>
+          </a:xfrm>
+          <a:prstGeom prst="rect">
             <a:avLst/>
           </a:prstGeom>
           <a:solidFill>
@@ -7226,23 +7752,32 @@
           </a:fontRef>
         </p:style>
         <p:txBody>
-          <a:bodyPr rtlCol="0" anchor="ctr"/>
+          <a:bodyPr rtlCol="0" anchor="ctr" wrap="square" lIns="101600" rIns="101600" tIns="38100" bIns="38100"/>
           <a:lstStyle/>
           <a:p>
             <a:pPr algn="ctr"/>
-          </a:p>
-        </p:txBody>
-      </p:sp>
-      <p:sp>
-        <p:nvSpPr>
-          <p:cNvPr id="19" name="TextBox 18"/>
+            <a:r>
+              <a:rPr sz="1500" b="1">
+                <a:solidFill>
+                  <a:srgbClr val="FFFFFF"/>
+                </a:solidFill>
+                <a:latin typeface="Arial"/>
+              </a:rPr>
+              <a:t>2</a:t>
+            </a:r>
+          </a:p>
+        </p:txBody>
+      </p:sp>
+      <p:sp>
+        <p:nvSpPr>
+          <p:cNvPr id="15" name="TextBox 14"/>
           <p:cNvSpPr txBox="1"/>
           <p:nvPr/>
         </p:nvSpPr>
         <p:spPr>
           <a:xfrm>
-            <a:off x="1234440" y="5276088"/>
-            <a:ext cx="347472" cy="182880"/>
+            <a:off x="1572768" y="3968496"/>
+            <a:ext cx="9372600" cy="384048"/>
           </a:xfrm>
           <a:prstGeom prst="rect">
             <a:avLst/>
@@ -7250,17 +7785,114 @@
           <a:noFill/>
         </p:spPr>
         <p:txBody>
-          <a:bodyPr wrap="square">
+          <a:bodyPr wrap="square" lIns="0" rIns="0" tIns="0" bIns="0">
             <a:spAutoFit/>
           </a:bodyPr>
           <a:lstStyle/>
           <a:p>
+            <a:r>
+              <a:rPr sz="1500" b="0">
+                <a:solidFill>
+                  <a:srgbClr val="111827"/>
+                </a:solidFill>
+                <a:latin typeface="Arial"/>
+              </a:rPr>
+              <a:t>Who is the Holy Spirit?</a:t>
+            </a:r>
+          </a:p>
+        </p:txBody>
+      </p:sp>
+      <p:sp>
+        <p:nvSpPr>
+          <p:cNvPr id="16" name="Rectangle 15"/>
+          <p:cNvSpPr/>
+          <p:nvPr/>
+        </p:nvSpPr>
+        <p:spPr>
+          <a:xfrm>
+            <a:off x="868680" y="4672584"/>
+            <a:ext cx="10378440" cy="713232"/>
+          </a:xfrm>
+          <a:prstGeom prst="rect">
+            <a:avLst/>
+          </a:prstGeom>
+          <a:solidFill>
+            <a:srgbClr val="FFFFFF"/>
+          </a:solidFill>
+          <a:ln w="11430">
+            <a:solidFill>
+              <a:srgbClr val="CBD5E1"/>
+            </a:solidFill>
+          </a:ln>
+        </p:spPr>
+        <p:style>
+          <a:lnRef idx="1">
+            <a:schemeClr val="accent1"/>
+          </a:lnRef>
+          <a:fillRef idx="3">
+            <a:schemeClr val="accent1"/>
+          </a:fillRef>
+          <a:effectRef idx="2">
+            <a:schemeClr val="accent1"/>
+          </a:effectRef>
+          <a:fontRef idx="minor">
+            <a:schemeClr val="lt1"/>
+          </a:fontRef>
+        </p:style>
+        <p:txBody>
+          <a:bodyPr rtlCol="0" anchor="ctr"/>
+          <a:lstStyle/>
+          <a:p>
             <a:pPr algn="ctr"/>
-            <a:r>
-              <a:rPr sz="1000" b="1">
+          </a:p>
+        </p:txBody>
+      </p:sp>
+      <p:sp>
+        <p:nvSpPr>
+          <p:cNvPr id="17" name="Rectangle 16"/>
+          <p:cNvSpPr/>
+          <p:nvPr/>
+        </p:nvSpPr>
+        <p:spPr>
+          <a:xfrm>
+            <a:off x="868680" y="4672584"/>
+            <a:ext cx="530352" cy="713232"/>
+          </a:xfrm>
+          <a:prstGeom prst="rect">
+            <a:avLst/>
+          </a:prstGeom>
+          <a:solidFill>
+            <a:srgbClr val="BE123C"/>
+          </a:solidFill>
+          <a:ln>
+            <a:noFill/>
+          </a:ln>
+        </p:spPr>
+        <p:style>
+          <a:lnRef idx="1">
+            <a:schemeClr val="accent1"/>
+          </a:lnRef>
+          <a:fillRef idx="3">
+            <a:schemeClr val="accent1"/>
+          </a:fillRef>
+          <a:effectRef idx="2">
+            <a:schemeClr val="accent1"/>
+          </a:effectRef>
+          <a:fontRef idx="minor">
+            <a:schemeClr val="lt1"/>
+          </a:fontRef>
+        </p:style>
+        <p:txBody>
+          <a:bodyPr rtlCol="0" anchor="ctr" wrap="square" lIns="101600" rIns="101600" tIns="38100" bIns="38100"/>
+          <a:lstStyle/>
+          <a:p>
+            <a:pPr algn="ctr"/>
+            <a:r>
+              <a:rPr sz="1500" b="1">
                 <a:solidFill>
                   <a:srgbClr val="FFFFFF"/>
                 </a:solidFill>
+                <a:latin typeface="Arial"/>
               </a:rPr>
               <a:t>3</a:t>
             </a:r>
@@ -7269,14 +7901,14 @@
       </p:sp>
       <p:sp>
         <p:nvSpPr>
-          <p:cNvPr id="20" name="TextBox 19"/>
+          <p:cNvPr id="18" name="TextBox 17"/>
           <p:cNvSpPr txBox="1"/>
           <p:nvPr/>
         </p:nvSpPr>
         <p:spPr>
           <a:xfrm>
-            <a:off x="1783080" y="5230368"/>
-            <a:ext cx="9006840" cy="347472"/>
+            <a:off x="1572768" y="4818888"/>
+            <a:ext cx="9372600" cy="384048"/>
           </a:xfrm>
           <a:prstGeom prst="rect">
             <a:avLst/>
@@ -7284,16 +7916,17 @@
           <a:noFill/>
         </p:spPr>
         <p:txBody>
-          <a:bodyPr wrap="square">
+          <a:bodyPr wrap="square" lIns="0" rIns="0" tIns="0" bIns="0">
             <a:spAutoFit/>
           </a:bodyPr>
           <a:lstStyle/>
           <a:p>
             <a:r>
-              <a:rPr sz="1700" b="0">
-                <a:solidFill>
-                  <a:srgbClr val="1A202C"/>
-                </a:solidFill>
+              <a:rPr sz="1500" b="0">
+                <a:solidFill>
+                  <a:srgbClr val="111827"/>
+                </a:solidFill>
+                <a:latin typeface="Arial"/>
               </a:rPr>
               <a:t>Agree on one answer before writing.</a:t>
             </a:r>
@@ -7302,14 +7935,111 @@
       </p:sp>
       <p:sp>
         <p:nvSpPr>
+          <p:cNvPr id="19" name="Rectangle 18"/>
+          <p:cNvSpPr/>
+          <p:nvPr/>
+        </p:nvSpPr>
+        <p:spPr>
+          <a:xfrm>
+            <a:off x="868680" y="5522976"/>
+            <a:ext cx="10378440" cy="713232"/>
+          </a:xfrm>
+          <a:prstGeom prst="rect">
+            <a:avLst/>
+          </a:prstGeom>
+          <a:solidFill>
+            <a:srgbClr val="FFFFFF"/>
+          </a:solidFill>
+          <a:ln w="11430">
+            <a:solidFill>
+              <a:srgbClr val="CBD5E1"/>
+            </a:solidFill>
+          </a:ln>
+        </p:spPr>
+        <p:style>
+          <a:lnRef idx="1">
+            <a:schemeClr val="accent1"/>
+          </a:lnRef>
+          <a:fillRef idx="3">
+            <a:schemeClr val="accent1"/>
+          </a:fillRef>
+          <a:effectRef idx="2">
+            <a:schemeClr val="accent1"/>
+          </a:effectRef>
+          <a:fontRef idx="minor">
+            <a:schemeClr val="lt1"/>
+          </a:fontRef>
+        </p:style>
+        <p:txBody>
+          <a:bodyPr rtlCol="0" anchor="ctr"/>
+          <a:lstStyle/>
+          <a:p>
+            <a:pPr algn="ctr"/>
+          </a:p>
+        </p:txBody>
+      </p:sp>
+      <p:sp>
+        <p:nvSpPr>
+          <p:cNvPr id="20" name="Rectangle 19"/>
+          <p:cNvSpPr/>
+          <p:nvPr/>
+        </p:nvSpPr>
+        <p:spPr>
+          <a:xfrm>
+            <a:off x="868680" y="5522976"/>
+            <a:ext cx="530352" cy="713232"/>
+          </a:xfrm>
+          <a:prstGeom prst="rect">
+            <a:avLst/>
+          </a:prstGeom>
+          <a:solidFill>
+            <a:srgbClr val="BE123C"/>
+          </a:solidFill>
+          <a:ln>
+            <a:noFill/>
+          </a:ln>
+        </p:spPr>
+        <p:style>
+          <a:lnRef idx="1">
+            <a:schemeClr val="accent1"/>
+          </a:lnRef>
+          <a:fillRef idx="3">
+            <a:schemeClr val="accent1"/>
+          </a:fillRef>
+          <a:effectRef idx="2">
+            <a:schemeClr val="accent1"/>
+          </a:effectRef>
+          <a:fontRef idx="minor">
+            <a:schemeClr val="lt1"/>
+          </a:fontRef>
+        </p:style>
+        <p:txBody>
+          <a:bodyPr rtlCol="0" anchor="ctr" wrap="square" lIns="101600" rIns="101600" tIns="38100" bIns="38100"/>
+          <a:lstStyle/>
+          <a:p>
+            <a:pPr algn="ctr"/>
+            <a:r>
+              <a:rPr sz="1500" b="1">
+                <a:solidFill>
+                  <a:srgbClr val="FFFFFF"/>
+                </a:solidFill>
+                <a:latin typeface="Arial"/>
+              </a:rPr>
+              <a:t>4</a:t>
+            </a:r>
+          </a:p>
+        </p:txBody>
+      </p:sp>
+      <p:sp>
+        <p:nvSpPr>
           <p:cNvPr id="21" name="TextBox 20"/>
           <p:cNvSpPr txBox="1"/>
           <p:nvPr/>
         </p:nvSpPr>
         <p:spPr>
           <a:xfrm>
-            <a:off x="777240" y="6419088"/>
-            <a:ext cx="10835640" cy="228600"/>
+            <a:off x="1572768" y="5669280"/>
+            <a:ext cx="9372600" cy="384048"/>
           </a:xfrm>
           <a:prstGeom prst="rect">
             <a:avLst/>
@@ -7317,17 +8047,52 @@
           <a:noFill/>
         </p:spPr>
         <p:txBody>
-          <a:bodyPr wrap="square">
+          <a:bodyPr wrap="square" lIns="0" rIns="0" tIns="0" bIns="0">
             <a:spAutoFit/>
           </a:bodyPr>
           <a:lstStyle/>
           <a:p>
+            <a:r>
+              <a:rPr sz="1500" b="0">
+                <a:solidFill>
+                  <a:srgbClr val="111827"/>
+                </a:solidFill>
+                <a:latin typeface="Arial"/>
+              </a:rPr>
+              <a:t>Write one clear response.</a:t>
+            </a:r>
+          </a:p>
+        </p:txBody>
+      </p:sp>
+      <p:sp>
+        <p:nvSpPr>
+          <p:cNvPr id="22" name="TextBox 21"/>
+          <p:cNvSpPr txBox="1"/>
+          <p:nvPr/>
+        </p:nvSpPr>
+        <p:spPr>
+          <a:xfrm>
+            <a:off x="685800" y="6419088"/>
+            <a:ext cx="10835640" cy="228600"/>
+          </a:xfrm>
+          <a:prstGeom prst="rect">
+            <a:avLst/>
+          </a:prstGeom>
+          <a:noFill/>
+        </p:spPr>
+        <p:txBody>
+          <a:bodyPr wrap="square" lIns="0" rIns="0" tIns="0" bIns="0">
+            <a:spAutoFit/>
+          </a:bodyPr>
+          <a:lstStyle/>
+          <a:p>
             <a:pPr algn="r"/>
             <a:r>
               <a:rPr sz="1000" b="0">
                 <a:solidFill>
-                  <a:srgbClr val="5B677D"/>
-                </a:solidFill>
+                  <a:srgbClr val="475569"/>
+                </a:solidFill>
+                <a:latin typeface="Arial"/>
               </a:rPr>
               <a:t>Listen • Talk • Try • Explain</a:t>
             </a:r>
@@ -7345,6 +8110,14 @@
 <file path=ppt/slides/slide7.xml><?xml version="1.0" encoding="utf-8"?>
 <p:sld xmlns:a="http://schemas.openxmlformats.org/drawingml/2006/main" xmlns:p="http://schemas.openxmlformats.org/presentationml/2006/main" xmlns:r="http://schemas.openxmlformats.org/officeDocument/2006/relationships">
   <p:cSld>
+    <p:bg>
+      <p:bgPr>
+        <a:solidFill>
+          <a:srgbClr val="F8FAFC"/>
+        </a:solidFill>
+        <a:effectLst/>
+      </p:bgPr>
+    </p:bg>
     <p:spTree>
       <p:nvGrpSpPr>
         <p:cNvPr id="1" name=""/>
@@ -7361,13 +8134,13 @@
         <p:spPr>
           <a:xfrm>
             <a:off x="0" y="0"/>
-            <a:ext cx="12191695" cy="914400"/>
-          </a:xfrm>
-          <a:prstGeom prst="rect">
-            <a:avLst/>
-          </a:prstGeom>
-          <a:solidFill>
-            <a:srgbClr val="166534"/>
+            <a:ext cx="12191695" cy="713232"/>
+          </a:xfrm>
+          <a:prstGeom prst="rect">
+            <a:avLst/>
+          </a:prstGeom>
+          <a:solidFill>
+            <a:srgbClr val="111827"/>
           </a:solidFill>
           <a:ln>
             <a:noFill/>
@@ -7403,14 +8176,14 @@
         </p:nvSpPr>
         <p:spPr>
           <a:xfrm>
-            <a:off x="0" y="914400"/>
-            <a:ext cx="164592" cy="5943600"/>
-          </a:xfrm>
-          <a:prstGeom prst="rect">
-            <a:avLst/>
-          </a:prstGeom>
-          <a:solidFill>
-            <a:srgbClr val="166534"/>
+            <a:off x="0" y="713232"/>
+            <a:ext cx="12191695" cy="82296"/>
+          </a:xfrm>
+          <a:prstGeom prst="rect">
+            <a:avLst/>
+          </a:prstGeom>
+          <a:solidFill>
+            <a:srgbClr val="FCD116"/>
           </a:solidFill>
           <a:ln>
             <a:noFill/>
@@ -7440,125 +8213,23 @@
       </p:sp>
       <p:sp>
         <p:nvSpPr>
-          <p:cNvPr id="4" name="TextBox 3"/>
-          <p:cNvSpPr txBox="1"/>
-          <p:nvPr/>
-        </p:nvSpPr>
-        <p:spPr>
-          <a:xfrm>
-            <a:off x="594360" y="246888"/>
-            <a:ext cx="2926080" cy="320040"/>
-          </a:xfrm>
-          <a:prstGeom prst="rect">
-            <a:avLst/>
-          </a:prstGeom>
-          <a:noFill/>
-        </p:spPr>
-        <p:txBody>
-          <a:bodyPr wrap="square">
-            <a:spAutoFit/>
-          </a:bodyPr>
-          <a:lstStyle/>
-          <a:p>
-            <a:r>
-              <a:rPr sz="1300" b="1">
-                <a:solidFill>
-                  <a:srgbClr val="FFFFFF"/>
-                </a:solidFill>
-              </a:rPr>
-              <a:t>7. ACTIVITY</a:t>
-            </a:r>
-          </a:p>
-        </p:txBody>
-      </p:sp>
-      <p:sp>
-        <p:nvSpPr>
-          <p:cNvPr id="5" name="TextBox 4"/>
-          <p:cNvSpPr txBox="1"/>
-          <p:nvPr/>
-        </p:nvSpPr>
-        <p:spPr>
-          <a:xfrm>
-            <a:off x="7772400" y="246888"/>
-            <a:ext cx="3840480" cy="320040"/>
-          </a:xfrm>
-          <a:prstGeom prst="rect">
-            <a:avLst/>
-          </a:prstGeom>
-          <a:noFill/>
-        </p:spPr>
-        <p:txBody>
-          <a:bodyPr wrap="square">
-            <a:spAutoFit/>
-          </a:bodyPr>
-          <a:lstStyle/>
-          <a:p>
-            <a:pPr algn="r"/>
-            <a:r>
-              <a:rPr sz="1100" b="0">
-                <a:solidFill>
-                  <a:srgbClr val="FFFFFF"/>
-                </a:solidFill>
-              </a:rPr>
-              <a:t>p7_t1_christian_religious_education_0101</a:t>
-            </a:r>
-          </a:p>
-        </p:txBody>
-      </p:sp>
-      <p:sp>
-        <p:nvSpPr>
-          <p:cNvPr id="6" name="TextBox 5"/>
-          <p:cNvSpPr txBox="1"/>
-          <p:nvPr/>
-        </p:nvSpPr>
-        <p:spPr>
-          <a:xfrm>
-            <a:off x="640080" y="1143000"/>
-            <a:ext cx="10972800" cy="685800"/>
-          </a:xfrm>
-          <a:prstGeom prst="rect">
-            <a:avLst/>
-          </a:prstGeom>
-          <a:noFill/>
-        </p:spPr>
-        <p:txBody>
-          <a:bodyPr wrap="square">
-            <a:spAutoFit/>
-          </a:bodyPr>
-          <a:lstStyle/>
-          <a:p>
-            <a:r>
-              <a:rPr sz="2800" b="1">
-                <a:solidFill>
-                  <a:srgbClr val="1A202C"/>
-                </a:solidFill>
-              </a:rPr>
-              <a:t>Activity challenge</a:t>
-            </a:r>
-          </a:p>
-        </p:txBody>
-      </p:sp>
-      <p:sp>
-        <p:nvSpPr>
-          <p:cNvPr id="7" name="Rounded Rectangle 6"/>
+          <p:cNvPr id="4" name="Rectangle 3"/>
           <p:cNvSpPr/>
           <p:nvPr/>
         </p:nvSpPr>
         <p:spPr>
           <a:xfrm>
-            <a:off x="777240" y="1993392"/>
-            <a:ext cx="10835640" cy="1005840"/>
-          </a:xfrm>
-          <a:prstGeom prst="roundRect">
-            <a:avLst/>
-          </a:prstGeom>
-          <a:solidFill>
-            <a:srgbClr val="FFFBEB"/>
-          </a:solidFill>
-          <a:ln w="15240">
-            <a:solidFill>
-              <a:srgbClr val="166534"/>
-            </a:solidFill>
+            <a:off x="0" y="795528"/>
+            <a:ext cx="12191695" cy="64008"/>
+          </a:xfrm>
+          <a:prstGeom prst="rect">
+            <a:avLst/>
+          </a:prstGeom>
+          <a:solidFill>
+            <a:srgbClr val="D90000"/>
+          </a:solidFill>
+          <a:ln>
+            <a:noFill/>
           </a:ln>
         </p:spPr>
         <p:style>
@@ -7585,58 +8256,23 @@
       </p:sp>
       <p:sp>
         <p:nvSpPr>
-          <p:cNvPr id="8" name="TextBox 7"/>
-          <p:cNvSpPr txBox="1"/>
-          <p:nvPr/>
-        </p:nvSpPr>
-        <p:spPr>
-          <a:xfrm>
-            <a:off x="1051560" y="2212848"/>
-            <a:ext cx="10287000" cy="502920"/>
-          </a:xfrm>
-          <a:prstGeom prst="rect">
-            <a:avLst/>
-          </a:prstGeom>
-          <a:noFill/>
-        </p:spPr>
-        <p:txBody>
-          <a:bodyPr wrap="square">
-            <a:spAutoFit/>
-          </a:bodyPr>
-          <a:lstStyle/>
-          <a:p>
-            <a:r>
-              <a:rPr sz="2100" b="1">
-                <a:solidFill>
-                  <a:srgbClr val="1A202C"/>
-                </a:solidFill>
-              </a:rPr>
-              <a:t>Group task:</a:t>
-            </a:r>
-          </a:p>
-        </p:txBody>
-      </p:sp>
-      <p:sp>
-        <p:nvSpPr>
-          <p:cNvPr id="9" name="Rounded Rectangle 8"/>
+          <p:cNvPr id="5" name="Rectangle 4"/>
           <p:cNvSpPr/>
           <p:nvPr/>
         </p:nvSpPr>
         <p:spPr>
           <a:xfrm>
-            <a:off x="1005840" y="3246120"/>
-            <a:ext cx="10149840" cy="621792"/>
-          </a:xfrm>
-          <a:prstGeom prst="roundRect">
-            <a:avLst/>
-          </a:prstGeom>
-          <a:solidFill>
-            <a:srgbClr val="F8FAFC"/>
-          </a:solidFill>
-          <a:ln w="15240">
-            <a:solidFill>
-              <a:srgbClr val="CBD5E1"/>
-            </a:solidFill>
+            <a:off x="0" y="859536"/>
+            <a:ext cx="164592" cy="5998464"/>
+          </a:xfrm>
+          <a:prstGeom prst="rect">
+            <a:avLst/>
+          </a:prstGeom>
+          <a:solidFill>
+            <a:srgbClr val="1B7F3A"/>
+          </a:solidFill>
+          <a:ln>
+            <a:noFill/>
           </a:ln>
         </p:spPr>
         <p:style>
@@ -7663,23 +8299,128 @@
       </p:sp>
       <p:sp>
         <p:nvSpPr>
-          <p:cNvPr id="10" name="Oval 9"/>
+          <p:cNvPr id="6" name="TextBox 5"/>
+          <p:cNvSpPr txBox="1"/>
+          <p:nvPr/>
+        </p:nvSpPr>
+        <p:spPr>
+          <a:xfrm>
+            <a:off x="502920" y="210312"/>
+            <a:ext cx="3200400" cy="256032"/>
+          </a:xfrm>
+          <a:prstGeom prst="rect">
+            <a:avLst/>
+          </a:prstGeom>
+          <a:noFill/>
+        </p:spPr>
+        <p:txBody>
+          <a:bodyPr wrap="square" lIns="0" rIns="0" tIns="0" bIns="0">
+            <a:spAutoFit/>
+          </a:bodyPr>
+          <a:lstStyle/>
+          <a:p>
+            <a:r>
+              <a:rPr sz="1200" b="1">
+                <a:solidFill>
+                  <a:srgbClr val="FFFFFF"/>
+                </a:solidFill>
+                <a:latin typeface="Arial"/>
+              </a:rPr>
+              <a:t>7. ACTIVITY</a:t>
+            </a:r>
+          </a:p>
+        </p:txBody>
+      </p:sp>
+      <p:sp>
+        <p:nvSpPr>
+          <p:cNvPr id="7" name="TextBox 6"/>
+          <p:cNvSpPr txBox="1"/>
+          <p:nvPr/>
+        </p:nvSpPr>
+        <p:spPr>
+          <a:xfrm>
+            <a:off x="7589520" y="210312"/>
+            <a:ext cx="4069080" cy="256032"/>
+          </a:xfrm>
+          <a:prstGeom prst="rect">
+            <a:avLst/>
+          </a:prstGeom>
+          <a:noFill/>
+        </p:spPr>
+        <p:txBody>
+          <a:bodyPr wrap="square" lIns="0" rIns="0" tIns="0" bIns="0">
+            <a:spAutoFit/>
+          </a:bodyPr>
+          <a:lstStyle/>
+          <a:p>
+            <a:pPr algn="r"/>
+            <a:r>
+              <a:rPr sz="1000" b="0">
+                <a:solidFill>
+                  <a:srgbClr val="FFFFFF"/>
+                </a:solidFill>
+                <a:latin typeface="Arial"/>
+              </a:rPr>
+              <a:t>p7_t1_christian_religious_education_0101</a:t>
+            </a:r>
+          </a:p>
+        </p:txBody>
+      </p:sp>
+      <p:sp>
+        <p:nvSpPr>
+          <p:cNvPr id="8" name="TextBox 7"/>
+          <p:cNvSpPr txBox="1"/>
+          <p:nvPr/>
+        </p:nvSpPr>
+        <p:spPr>
+          <a:xfrm>
+            <a:off x="594360" y="1042415"/>
+            <a:ext cx="11109960" cy="566928"/>
+          </a:xfrm>
+          <a:prstGeom prst="rect">
+            <a:avLst/>
+          </a:prstGeom>
+          <a:noFill/>
+        </p:spPr>
+        <p:txBody>
+          <a:bodyPr wrap="square" lIns="0" rIns="0" tIns="0" bIns="0">
+            <a:spAutoFit/>
+          </a:bodyPr>
+          <a:lstStyle/>
+          <a:p>
+            <a:r>
+              <a:rPr sz="2600" b="1">
+                <a:solidFill>
+                  <a:srgbClr val="111827"/>
+                </a:solidFill>
+                <a:latin typeface="Arial"/>
+              </a:rPr>
+              <a:t>Activity challenge</a:t>
+            </a:r>
+          </a:p>
+        </p:txBody>
+      </p:sp>
+      <p:sp>
+        <p:nvSpPr>
+          <p:cNvPr id="9" name="Rectangle 8"/>
           <p:cNvSpPr/>
           <p:nvPr/>
         </p:nvSpPr>
         <p:spPr>
           <a:xfrm>
-            <a:off x="1234440" y="3364991"/>
-            <a:ext cx="347472" cy="347472"/>
-          </a:xfrm>
-          <a:prstGeom prst="ellipse">
-            <a:avLst/>
-          </a:prstGeom>
-          <a:solidFill>
-            <a:srgbClr val="166534"/>
-          </a:solidFill>
-          <a:ln>
-            <a:noFill/>
+            <a:off x="685800" y="1874519"/>
+            <a:ext cx="10835640" cy="804672"/>
+          </a:xfrm>
+          <a:prstGeom prst="rect">
+            <a:avLst/>
+          </a:prstGeom>
+          <a:solidFill>
+            <a:srgbClr val="FFF7E0"/>
+          </a:solidFill>
+          <a:ln w="17780">
+            <a:solidFill>
+              <a:srgbClr val="1B7F3A"/>
+            </a:solidFill>
           </a:ln>
         </p:spPr>
         <p:style>
@@ -7697,98 +8438,40 @@
           </a:fontRef>
         </p:style>
         <p:txBody>
-          <a:bodyPr rtlCol="0" anchor="ctr"/>
+          <a:bodyPr rtlCol="0" anchor="ctr" wrap="square" lIns="101600" rIns="101600" tIns="38100" bIns="38100"/>
           <a:lstStyle/>
           <a:p>
             <a:pPr algn="ctr"/>
-          </a:p>
-        </p:txBody>
-      </p:sp>
-      <p:sp>
-        <p:nvSpPr>
-          <p:cNvPr id="11" name="TextBox 10"/>
-          <p:cNvSpPr txBox="1"/>
-          <p:nvPr/>
-        </p:nvSpPr>
-        <p:spPr>
-          <a:xfrm>
-            <a:off x="1234440" y="3410712"/>
-            <a:ext cx="347472" cy="182880"/>
-          </a:xfrm>
-          <a:prstGeom prst="rect">
-            <a:avLst/>
-          </a:prstGeom>
-          <a:noFill/>
-        </p:spPr>
-        <p:txBody>
-          <a:bodyPr wrap="square">
-            <a:spAutoFit/>
-          </a:bodyPr>
-          <a:lstStyle/>
-          <a:p>
-            <a:pPr algn="ctr"/>
-            <a:r>
-              <a:rPr sz="1000" b="1">
-                <a:solidFill>
-                  <a:srgbClr val="FFFFFF"/>
-                </a:solidFill>
+            <a:r>
+              <a:rPr sz="1900" b="1">
+                <a:solidFill>
+                  <a:srgbClr val="111827"/>
+                </a:solidFill>
+                <a:latin typeface="Arial"/>
               </a:rPr>
-              <a:t>1</a:t>
-            </a:r>
-          </a:p>
-        </p:txBody>
-      </p:sp>
-      <p:sp>
-        <p:nvSpPr>
-          <p:cNvPr id="12" name="TextBox 11"/>
-          <p:cNvSpPr txBox="1"/>
-          <p:nvPr/>
-        </p:nvSpPr>
-        <p:spPr>
-          <a:xfrm>
-            <a:off x="1783080" y="3364991"/>
-            <a:ext cx="9006840" cy="347472"/>
-          </a:xfrm>
-          <a:prstGeom prst="rect">
-            <a:avLst/>
-          </a:prstGeom>
-          <a:noFill/>
-        </p:spPr>
-        <p:txBody>
-          <a:bodyPr wrap="square">
-            <a:spAutoFit/>
-          </a:bodyPr>
-          <a:lstStyle/>
-          <a:p>
-            <a:r>
-              <a:rPr sz="1700" b="0">
-                <a:solidFill>
-                  <a:srgbClr val="1A202C"/>
-                </a:solidFill>
-              </a:rPr>
-              <a:t>Students blow on their hands and observe trees moving outside to understand the</a:t>
-            </a:r>
-          </a:p>
-        </p:txBody>
-      </p:sp>
-      <p:sp>
-        <p:nvSpPr>
-          <p:cNvPr id="13" name="Rounded Rectangle 12"/>
+              <a:t>Group task:</a:t>
+            </a:r>
+          </a:p>
+        </p:txBody>
+      </p:sp>
+      <p:sp>
+        <p:nvSpPr>
+          <p:cNvPr id="10" name="Rectangle 9"/>
           <p:cNvSpPr/>
           <p:nvPr/>
         </p:nvSpPr>
         <p:spPr>
           <a:xfrm>
-            <a:off x="1005840" y="4069080"/>
-            <a:ext cx="10149840" cy="621792"/>
-          </a:xfrm>
-          <a:prstGeom prst="roundRect">
-            <a:avLst/>
-          </a:prstGeom>
-          <a:solidFill>
-            <a:srgbClr val="F8FAFC"/>
-          </a:solidFill>
-          <a:ln w="15240">
+            <a:off x="868680" y="2971800"/>
+            <a:ext cx="10378440" cy="713232"/>
+          </a:xfrm>
+          <a:prstGeom prst="rect">
+            <a:avLst/>
+          </a:prstGeom>
+          <a:solidFill>
+            <a:srgbClr val="FFFFFF"/>
+          </a:solidFill>
+          <a:ln w="11430">
             <a:solidFill>
               <a:srgbClr val="CBD5E1"/>
             </a:solidFill>
@@ -7818,20 +8501,20 @@
       </p:sp>
       <p:sp>
         <p:nvSpPr>
-          <p:cNvPr id="14" name="Oval 13"/>
+          <p:cNvPr id="11" name="Rectangle 10"/>
           <p:cNvSpPr/>
           <p:nvPr/>
         </p:nvSpPr>
         <p:spPr>
           <a:xfrm>
-            <a:off x="1234440" y="4187952"/>
-            <a:ext cx="347472" cy="347472"/>
-          </a:xfrm>
-          <a:prstGeom prst="ellipse">
-            <a:avLst/>
-          </a:prstGeom>
-          <a:solidFill>
-            <a:srgbClr val="166534"/>
+            <a:off x="868680" y="2971800"/>
+            <a:ext cx="530352" cy="713232"/>
+          </a:xfrm>
+          <a:prstGeom prst="rect">
+            <a:avLst/>
+          </a:prstGeom>
+          <a:solidFill>
+            <a:srgbClr val="1B7F3A"/>
           </a:solidFill>
           <a:ln>
             <a:noFill/>
@@ -7852,23 +8535,32 @@
           </a:fontRef>
         </p:style>
         <p:txBody>
-          <a:bodyPr rtlCol="0" anchor="ctr"/>
+          <a:bodyPr rtlCol="0" anchor="ctr" wrap="square" lIns="101600" rIns="101600" tIns="38100" bIns="38100"/>
           <a:lstStyle/>
           <a:p>
             <a:pPr algn="ctr"/>
-          </a:p>
-        </p:txBody>
-      </p:sp>
-      <p:sp>
-        <p:nvSpPr>
-          <p:cNvPr id="15" name="TextBox 14"/>
+            <a:r>
+              <a:rPr sz="1500" b="1">
+                <a:solidFill>
+                  <a:srgbClr val="FFFFFF"/>
+                </a:solidFill>
+                <a:latin typeface="Arial"/>
+              </a:rPr>
+              <a:t>1</a:t>
+            </a:r>
+          </a:p>
+        </p:txBody>
+      </p:sp>
+      <p:sp>
+        <p:nvSpPr>
+          <p:cNvPr id="12" name="TextBox 11"/>
           <p:cNvSpPr txBox="1"/>
           <p:nvPr/>
         </p:nvSpPr>
         <p:spPr>
           <a:xfrm>
-            <a:off x="1234440" y="4233672"/>
-            <a:ext cx="347472" cy="182880"/>
+            <a:off x="1572768" y="3118104"/>
+            <a:ext cx="9372600" cy="384048"/>
           </a:xfrm>
           <a:prstGeom prst="rect">
             <a:avLst/>
@@ -7876,74 +8568,41 @@
           <a:noFill/>
         </p:spPr>
         <p:txBody>
-          <a:bodyPr wrap="square">
+          <a:bodyPr wrap="square" lIns="0" rIns="0" tIns="0" bIns="0">
             <a:spAutoFit/>
           </a:bodyPr>
           <a:lstStyle/>
           <a:p>
-            <a:pPr algn="ctr"/>
-            <a:r>
-              <a:rPr sz="1000" b="1">
-                <a:solidFill>
-                  <a:srgbClr val="FFFFFF"/>
-                </a:solidFill>
+            <a:r>
+              <a:rPr sz="1500" b="0">
+                <a:solidFill>
+                  <a:srgbClr val="111827"/>
+                </a:solidFill>
+                <a:latin typeface="Arial"/>
               </a:rPr>
-              <a:t>2</a:t>
-            </a:r>
-          </a:p>
-        </p:txBody>
-      </p:sp>
-      <p:sp>
-        <p:nvSpPr>
-          <p:cNvPr id="16" name="TextBox 15"/>
-          <p:cNvSpPr txBox="1"/>
-          <p:nvPr/>
-        </p:nvSpPr>
-        <p:spPr>
-          <a:xfrm>
-            <a:off x="1783080" y="4187952"/>
-            <a:ext cx="9006840" cy="347472"/>
-          </a:xfrm>
-          <a:prstGeom prst="rect">
-            <a:avLst/>
-          </a:prstGeom>
-          <a:noFill/>
-        </p:spPr>
-        <p:txBody>
-          <a:bodyPr wrap="square">
-            <a:spAutoFit/>
-          </a:bodyPr>
-          <a:lstStyle/>
-          <a:p>
-            <a:r>
-              <a:rPr sz="1700" b="0">
-                <a:solidFill>
-                  <a:srgbClr val="1A202C"/>
-                </a:solidFill>
-              </a:rPr>
-              <a:t>concept of an invisible but real force.</a:t>
-            </a:r>
-          </a:p>
-        </p:txBody>
-      </p:sp>
-      <p:sp>
-        <p:nvSpPr>
-          <p:cNvPr id="17" name="Rounded Rectangle 16"/>
+              <a:t>Students blow on their hands and observe trees moving outside to...</a:t>
+            </a:r>
+          </a:p>
+        </p:txBody>
+      </p:sp>
+      <p:sp>
+        <p:nvSpPr>
+          <p:cNvPr id="13" name="Rectangle 12"/>
           <p:cNvSpPr/>
           <p:nvPr/>
         </p:nvSpPr>
         <p:spPr>
           <a:xfrm>
-            <a:off x="1005840" y="4892040"/>
-            <a:ext cx="10149840" cy="621792"/>
-          </a:xfrm>
-          <a:prstGeom prst="roundRect">
-            <a:avLst/>
-          </a:prstGeom>
-          <a:solidFill>
-            <a:srgbClr val="F8FAFC"/>
-          </a:solidFill>
-          <a:ln w="15240">
+            <a:off x="868680" y="3822191"/>
+            <a:ext cx="10378440" cy="713232"/>
+          </a:xfrm>
+          <a:prstGeom prst="rect">
+            <a:avLst/>
+          </a:prstGeom>
+          <a:solidFill>
+            <a:srgbClr val="FFFFFF"/>
+          </a:solidFill>
+          <a:ln w="11430">
             <a:solidFill>
               <a:srgbClr val="CBD5E1"/>
             </a:solidFill>
@@ -7973,20 +8632,20 @@
       </p:sp>
       <p:sp>
         <p:nvSpPr>
-          <p:cNvPr id="18" name="Oval 17"/>
+          <p:cNvPr id="14" name="Rectangle 13"/>
           <p:cNvSpPr/>
           <p:nvPr/>
         </p:nvSpPr>
         <p:spPr>
           <a:xfrm>
-            <a:off x="1234440" y="5010912"/>
-            <a:ext cx="347472" cy="347472"/>
-          </a:xfrm>
-          <a:prstGeom prst="ellipse">
-            <a:avLst/>
-          </a:prstGeom>
-          <a:solidFill>
-            <a:srgbClr val="166534"/>
+            <a:off x="868680" y="3822191"/>
+            <a:ext cx="530352" cy="713232"/>
+          </a:xfrm>
+          <a:prstGeom prst="rect">
+            <a:avLst/>
+          </a:prstGeom>
+          <a:solidFill>
+            <a:srgbClr val="1B7F3A"/>
           </a:solidFill>
           <a:ln>
             <a:noFill/>
@@ -8007,23 +8666,32 @@
           </a:fontRef>
         </p:style>
         <p:txBody>
-          <a:bodyPr rtlCol="0" anchor="ctr"/>
+          <a:bodyPr rtlCol="0" anchor="ctr" wrap="square" lIns="101600" rIns="101600" tIns="38100" bIns="38100"/>
           <a:lstStyle/>
           <a:p>
             <a:pPr algn="ctr"/>
-          </a:p>
-        </p:txBody>
-      </p:sp>
-      <p:sp>
-        <p:nvSpPr>
-          <p:cNvPr id="19" name="TextBox 18"/>
+            <a:r>
+              <a:rPr sz="1500" b="1">
+                <a:solidFill>
+                  <a:srgbClr val="FFFFFF"/>
+                </a:solidFill>
+                <a:latin typeface="Arial"/>
+              </a:rPr>
+              <a:t>2</a:t>
+            </a:r>
+          </a:p>
+        </p:txBody>
+      </p:sp>
+      <p:sp>
+        <p:nvSpPr>
+          <p:cNvPr id="15" name="TextBox 14"/>
           <p:cNvSpPr txBox="1"/>
           <p:nvPr/>
         </p:nvSpPr>
         <p:spPr>
           <a:xfrm>
-            <a:off x="1234440" y="5056632"/>
-            <a:ext cx="347472" cy="182880"/>
+            <a:off x="1572768" y="3968496"/>
+            <a:ext cx="9372600" cy="384048"/>
           </a:xfrm>
           <a:prstGeom prst="rect">
             <a:avLst/>
@@ -8031,74 +8699,41 @@
           <a:noFill/>
         </p:spPr>
         <p:txBody>
-          <a:bodyPr wrap="square">
+          <a:bodyPr wrap="square" lIns="0" rIns="0" tIns="0" bIns="0">
             <a:spAutoFit/>
           </a:bodyPr>
           <a:lstStyle/>
           <a:p>
-            <a:pPr algn="ctr"/>
-            <a:r>
-              <a:rPr sz="1000" b="1">
-                <a:solidFill>
-                  <a:srgbClr val="FFFFFF"/>
-                </a:solidFill>
+            <a:r>
+              <a:rPr sz="1500" b="0">
+                <a:solidFill>
+                  <a:srgbClr val="111827"/>
+                </a:solidFill>
+                <a:latin typeface="Arial"/>
               </a:rPr>
-              <a:t>3</a:t>
-            </a:r>
-          </a:p>
-        </p:txBody>
-      </p:sp>
-      <p:sp>
-        <p:nvSpPr>
-          <p:cNvPr id="20" name="TextBox 19"/>
-          <p:cNvSpPr txBox="1"/>
-          <p:nvPr/>
-        </p:nvSpPr>
-        <p:spPr>
-          <a:xfrm>
-            <a:off x="1783080" y="5010912"/>
-            <a:ext cx="9006840" cy="347472"/>
-          </a:xfrm>
-          <a:prstGeom prst="rect">
-            <a:avLst/>
-          </a:prstGeom>
-          <a:noFill/>
-        </p:spPr>
-        <p:txBody>
-          <a:bodyPr wrap="square">
-            <a:spAutoFit/>
-          </a:bodyPr>
-          <a:lstStyle/>
-          <a:p>
-            <a:r>
-              <a:rPr sz="1700" b="0">
-                <a:solidFill>
-                  <a:srgbClr val="1A202C"/>
-                </a:solidFill>
-              </a:rPr>
-              <a:t>Students discuss in pairs what it means to receive a gift that is also the person who</a:t>
-            </a:r>
-          </a:p>
-        </p:txBody>
-      </p:sp>
-      <p:sp>
-        <p:nvSpPr>
-          <p:cNvPr id="21" name="Rounded Rectangle 20"/>
+              <a:t>Students discuss in pairs what it means to receive a gift that is...</a:t>
+            </a:r>
+          </a:p>
+        </p:txBody>
+      </p:sp>
+      <p:sp>
+        <p:nvSpPr>
+          <p:cNvPr id="16" name="Rectangle 15"/>
           <p:cNvSpPr/>
           <p:nvPr/>
         </p:nvSpPr>
         <p:spPr>
           <a:xfrm>
-            <a:off x="1005840" y="5715000"/>
-            <a:ext cx="10149840" cy="621792"/>
-          </a:xfrm>
-          <a:prstGeom prst="roundRect">
-            <a:avLst/>
-          </a:prstGeom>
-          <a:solidFill>
-            <a:srgbClr val="F8FAFC"/>
-          </a:solidFill>
-          <a:ln w="15240">
+            <a:off x="868680" y="4672584"/>
+            <a:ext cx="10378440" cy="713232"/>
+          </a:xfrm>
+          <a:prstGeom prst="rect">
+            <a:avLst/>
+          </a:prstGeom>
+          <a:solidFill>
+            <a:srgbClr val="FFFFFF"/>
+          </a:solidFill>
+          <a:ln w="11430">
             <a:solidFill>
               <a:srgbClr val="CBD5E1"/>
             </a:solidFill>
@@ -8128,20 +8763,20 @@
       </p:sp>
       <p:sp>
         <p:nvSpPr>
-          <p:cNvPr id="22" name="Oval 21"/>
+          <p:cNvPr id="17" name="Rectangle 16"/>
           <p:cNvSpPr/>
           <p:nvPr/>
         </p:nvSpPr>
         <p:spPr>
           <a:xfrm>
-            <a:off x="1234440" y="5833872"/>
-            <a:ext cx="347472" cy="347472"/>
-          </a:xfrm>
-          <a:prstGeom prst="ellipse">
-            <a:avLst/>
-          </a:prstGeom>
-          <a:solidFill>
-            <a:srgbClr val="166534"/>
+            <a:off x="868680" y="4672584"/>
+            <a:ext cx="530352" cy="713232"/>
+          </a:xfrm>
+          <a:prstGeom prst="rect">
+            <a:avLst/>
+          </a:prstGeom>
+          <a:solidFill>
+            <a:srgbClr val="1B7F3A"/>
           </a:solidFill>
           <a:ln>
             <a:noFill/>
@@ -8162,23 +8797,32 @@
           </a:fontRef>
         </p:style>
         <p:txBody>
-          <a:bodyPr rtlCol="0" anchor="ctr"/>
+          <a:bodyPr rtlCol="0" anchor="ctr" wrap="square" lIns="101600" rIns="101600" tIns="38100" bIns="38100"/>
           <a:lstStyle/>
           <a:p>
             <a:pPr algn="ctr"/>
-          </a:p>
-        </p:txBody>
-      </p:sp>
-      <p:sp>
-        <p:nvSpPr>
-          <p:cNvPr id="23" name="TextBox 22"/>
+            <a:r>
+              <a:rPr sz="1500" b="1">
+                <a:solidFill>
+                  <a:srgbClr val="FFFFFF"/>
+                </a:solidFill>
+                <a:latin typeface="Arial"/>
+              </a:rPr>
+              <a:t>3</a:t>
+            </a:r>
+          </a:p>
+        </p:txBody>
+      </p:sp>
+      <p:sp>
+        <p:nvSpPr>
+          <p:cNvPr id="18" name="TextBox 17"/>
           <p:cNvSpPr txBox="1"/>
           <p:nvPr/>
         </p:nvSpPr>
         <p:spPr>
           <a:xfrm>
-            <a:off x="1234440" y="5879592"/>
-            <a:ext cx="347472" cy="182880"/>
+            <a:off x="1572768" y="4818888"/>
+            <a:ext cx="9372600" cy="384048"/>
           </a:xfrm>
           <a:prstGeom prst="rect">
             <a:avLst/>
@@ -8186,74 +8830,41 @@
           <a:noFill/>
         </p:spPr>
         <p:txBody>
-          <a:bodyPr wrap="square">
+          <a:bodyPr wrap="square" lIns="0" rIns="0" tIns="0" bIns="0">
             <a:spAutoFit/>
           </a:bodyPr>
           <a:lstStyle/>
           <a:p>
-            <a:pPr algn="ctr"/>
-            <a:r>
-              <a:rPr sz="1000" b="1">
-                <a:solidFill>
-                  <a:srgbClr val="FFFFFF"/>
-                </a:solidFill>
+            <a:r>
+              <a:rPr sz="1500" b="0">
+                <a:solidFill>
+                  <a:srgbClr val="111827"/>
+                </a:solidFill>
+                <a:latin typeface="Arial"/>
               </a:rPr>
-              <a:t>4</a:t>
-            </a:r>
-          </a:p>
-        </p:txBody>
-      </p:sp>
-      <p:sp>
-        <p:nvSpPr>
-          <p:cNvPr id="24" name="TextBox 23"/>
-          <p:cNvSpPr txBox="1"/>
-          <p:nvPr/>
-        </p:nvSpPr>
-        <p:spPr>
-          <a:xfrm>
-            <a:off x="1783080" y="5833872"/>
-            <a:ext cx="9006840" cy="347472"/>
-          </a:xfrm>
-          <a:prstGeom prst="rect">
-            <a:avLst/>
-          </a:prstGeom>
-          <a:noFill/>
-        </p:spPr>
-        <p:txBody>
-          <a:bodyPr wrap="square">
-            <a:spAutoFit/>
-          </a:bodyPr>
-          <a:lstStyle/>
-          <a:p>
-            <a:r>
-              <a:rPr sz="1700" b="0">
-                <a:solidFill>
-                  <a:srgbClr val="1A202C"/>
-                </a:solidFill>
-              </a:rPr>
-              <a:t>gave it.</a:t>
-            </a:r>
-          </a:p>
-        </p:txBody>
-      </p:sp>
-      <p:sp>
-        <p:nvSpPr>
-          <p:cNvPr id="25" name="Rounded Rectangle 24"/>
+              <a:t>Teacher demonstrates the Trinity using the three-stone stove anal...</a:t>
+            </a:r>
+          </a:p>
+        </p:txBody>
+      </p:sp>
+      <p:sp>
+        <p:nvSpPr>
+          <p:cNvPr id="19" name="Rectangle 18"/>
           <p:cNvSpPr/>
           <p:nvPr/>
         </p:nvSpPr>
         <p:spPr>
           <a:xfrm>
-            <a:off x="1005840" y="6537960"/>
-            <a:ext cx="10149840" cy="621792"/>
-          </a:xfrm>
-          <a:prstGeom prst="roundRect">
-            <a:avLst/>
-          </a:prstGeom>
-          <a:solidFill>
-            <a:srgbClr val="F8FAFC"/>
-          </a:solidFill>
-          <a:ln w="15240">
+            <a:off x="868680" y="5522976"/>
+            <a:ext cx="10378440" cy="713232"/>
+          </a:xfrm>
+          <a:prstGeom prst="rect">
+            <a:avLst/>
+          </a:prstGeom>
+          <a:solidFill>
+            <a:srgbClr val="FFFFFF"/>
+          </a:solidFill>
+          <a:ln w="11430">
             <a:solidFill>
               <a:srgbClr val="CBD5E1"/>
             </a:solidFill>
@@ -8283,20 +8894,20 @@
       </p:sp>
       <p:sp>
         <p:nvSpPr>
-          <p:cNvPr id="26" name="Oval 25"/>
+          <p:cNvPr id="20" name="Rectangle 19"/>
           <p:cNvSpPr/>
           <p:nvPr/>
         </p:nvSpPr>
         <p:spPr>
           <a:xfrm>
-            <a:off x="1234440" y="6656832"/>
-            <a:ext cx="347472" cy="347472"/>
-          </a:xfrm>
-          <a:prstGeom prst="ellipse">
-            <a:avLst/>
-          </a:prstGeom>
-          <a:solidFill>
-            <a:srgbClr val="166534"/>
+            <a:off x="868680" y="5522976"/>
+            <a:ext cx="530352" cy="713232"/>
+          </a:xfrm>
+          <a:prstGeom prst="rect">
+            <a:avLst/>
+          </a:prstGeom>
+          <a:solidFill>
+            <a:srgbClr val="1B7F3A"/>
           </a:solidFill>
           <a:ln>
             <a:noFill/>
@@ -8317,23 +8928,32 @@
           </a:fontRef>
         </p:style>
         <p:txBody>
-          <a:bodyPr rtlCol="0" anchor="ctr"/>
+          <a:bodyPr rtlCol="0" anchor="ctr" wrap="square" lIns="101600" rIns="101600" tIns="38100" bIns="38100"/>
           <a:lstStyle/>
           <a:p>
             <a:pPr algn="ctr"/>
-          </a:p>
-        </p:txBody>
-      </p:sp>
-      <p:sp>
-        <p:nvSpPr>
-          <p:cNvPr id="27" name="TextBox 26"/>
+            <a:r>
+              <a:rPr sz="1500" b="1">
+                <a:solidFill>
+                  <a:srgbClr val="FFFFFF"/>
+                </a:solidFill>
+                <a:latin typeface="Arial"/>
+              </a:rPr>
+              <a:t>4</a:t>
+            </a:r>
+          </a:p>
+        </p:txBody>
+      </p:sp>
+      <p:sp>
+        <p:nvSpPr>
+          <p:cNvPr id="21" name="TextBox 20"/>
           <p:cNvSpPr txBox="1"/>
           <p:nvPr/>
         </p:nvSpPr>
         <p:spPr>
           <a:xfrm>
-            <a:off x="1234440" y="6702552"/>
-            <a:ext cx="347472" cy="182880"/>
+            <a:off x="1572768" y="5669280"/>
+            <a:ext cx="9372600" cy="384048"/>
           </a:xfrm>
           <a:prstGeom prst="rect">
             <a:avLst/>
@@ -8341,33 +8961,33 @@
           <a:noFill/>
         </p:spPr>
         <p:txBody>
-          <a:bodyPr wrap="square">
+          <a:bodyPr wrap="square" lIns="0" rIns="0" tIns="0" bIns="0">
             <a:spAutoFit/>
           </a:bodyPr>
           <a:lstStyle/>
           <a:p>
-            <a:pPr algn="ctr"/>
-            <a:r>
-              <a:rPr sz="1000" b="1">
-                <a:solidFill>
-                  <a:srgbClr val="FFFFFF"/>
-                </a:solidFill>
+            <a:r>
+              <a:rPr sz="1500" b="0">
+                <a:solidFill>
+                  <a:srgbClr val="111827"/>
+                </a:solidFill>
+                <a:latin typeface="Arial"/>
               </a:rPr>
-              <a:t>5</a:t>
-            </a:r>
-          </a:p>
-        </p:txBody>
-      </p:sp>
-      <p:sp>
-        <p:nvSpPr>
-          <p:cNvPr id="28" name="TextBox 27"/>
+              <a:t>Write one clear response.</a:t>
+            </a:r>
+          </a:p>
+        </p:txBody>
+      </p:sp>
+      <p:sp>
+        <p:nvSpPr>
+          <p:cNvPr id="22" name="TextBox 21"/>
           <p:cNvSpPr txBox="1"/>
           <p:nvPr/>
         </p:nvSpPr>
         <p:spPr>
           <a:xfrm>
-            <a:off x="1783080" y="6656832"/>
-            <a:ext cx="9006840" cy="347472"/>
+            <a:off x="685800" y="6419088"/>
+            <a:ext cx="10835640" cy="228600"/>
           </a:xfrm>
           <a:prstGeom prst="rect">
             <a:avLst/>
@@ -8375,50 +8995,18 @@
           <a:noFill/>
         </p:spPr>
         <p:txBody>
-          <a:bodyPr wrap="square">
+          <a:bodyPr wrap="square" lIns="0" rIns="0" tIns="0" bIns="0">
             <a:spAutoFit/>
           </a:bodyPr>
           <a:lstStyle/>
           <a:p>
-            <a:r>
-              <a:rPr sz="1700" b="0">
-                <a:solidFill>
-                  <a:srgbClr val="1A202C"/>
-                </a:solidFill>
-              </a:rPr>
-              <a:t>Teacher demonstrates the Trinity using the three-stone stove analogy while learners</a:t>
-            </a:r>
-          </a:p>
-        </p:txBody>
-      </p:sp>
-      <p:sp>
-        <p:nvSpPr>
-          <p:cNvPr id="29" name="TextBox 28"/>
-          <p:cNvSpPr txBox="1"/>
-          <p:nvPr/>
-        </p:nvSpPr>
-        <p:spPr>
-          <a:xfrm>
-            <a:off x="777240" y="6419088"/>
-            <a:ext cx="10835640" cy="228600"/>
-          </a:xfrm>
-          <a:prstGeom prst="rect">
-            <a:avLst/>
-          </a:prstGeom>
-          <a:noFill/>
-        </p:spPr>
-        <p:txBody>
-          <a:bodyPr wrap="square">
-            <a:spAutoFit/>
-          </a:bodyPr>
-          <a:lstStyle/>
-          <a:p>
             <a:pPr algn="r"/>
             <a:r>
               <a:rPr sz="1000" b="0">
                 <a:solidFill>
-                  <a:srgbClr val="5B677D"/>
-                </a:solidFill>
+                  <a:srgbClr val="475569"/>
+                </a:solidFill>
+                <a:latin typeface="Arial"/>
               </a:rPr>
               <a:t>Listen • Talk • Try • Explain</a:t>
             </a:r>
@@ -8436,6 +9024,14 @@
 <file path=ppt/slides/slide8.xml><?xml version="1.0" encoding="utf-8"?>
 <p:sld xmlns:a="http://schemas.openxmlformats.org/drawingml/2006/main" xmlns:p="http://schemas.openxmlformats.org/presentationml/2006/main" xmlns:r="http://schemas.openxmlformats.org/officeDocument/2006/relationships">
   <p:cSld>
+    <p:bg>
+      <p:bgPr>
+        <a:solidFill>
+          <a:srgbClr val="F8FAFC"/>
+        </a:solidFill>
+        <a:effectLst/>
+      </p:bgPr>
+    </p:bg>
     <p:spTree>
       <p:nvGrpSpPr>
         <p:cNvPr id="1" name=""/>
@@ -8452,13 +9048,13 @@
         <p:spPr>
           <a:xfrm>
             <a:off x="0" y="0"/>
-            <a:ext cx="12191695" cy="914400"/>
-          </a:xfrm>
-          <a:prstGeom prst="rect">
-            <a:avLst/>
-          </a:prstGeom>
-          <a:solidFill>
-            <a:srgbClr val="4338CA"/>
+            <a:ext cx="12191695" cy="713232"/>
+          </a:xfrm>
+          <a:prstGeom prst="rect">
+            <a:avLst/>
+          </a:prstGeom>
+          <a:solidFill>
+            <a:srgbClr val="111827"/>
           </a:solidFill>
           <a:ln>
             <a:noFill/>
@@ -8494,14 +9090,14 @@
         </p:nvSpPr>
         <p:spPr>
           <a:xfrm>
-            <a:off x="0" y="914400"/>
-            <a:ext cx="164592" cy="5943600"/>
-          </a:xfrm>
-          <a:prstGeom prst="rect">
-            <a:avLst/>
-          </a:prstGeom>
-          <a:solidFill>
-            <a:srgbClr val="4338CA"/>
+            <a:off x="0" y="713232"/>
+            <a:ext cx="12191695" cy="82296"/>
+          </a:xfrm>
+          <a:prstGeom prst="rect">
+            <a:avLst/>
+          </a:prstGeom>
+          <a:solidFill>
+            <a:srgbClr val="FCD116"/>
           </a:solidFill>
           <a:ln>
             <a:noFill/>
@@ -8531,125 +9127,23 @@
       </p:sp>
       <p:sp>
         <p:nvSpPr>
-          <p:cNvPr id="4" name="TextBox 3"/>
-          <p:cNvSpPr txBox="1"/>
-          <p:nvPr/>
-        </p:nvSpPr>
-        <p:spPr>
-          <a:xfrm>
-            <a:off x="594360" y="246888"/>
-            <a:ext cx="2926080" cy="320040"/>
-          </a:xfrm>
-          <a:prstGeom prst="rect">
-            <a:avLst/>
-          </a:prstGeom>
-          <a:noFill/>
-        </p:spPr>
-        <p:txBody>
-          <a:bodyPr wrap="square">
-            <a:spAutoFit/>
-          </a:bodyPr>
-          <a:lstStyle/>
-          <a:p>
-            <a:r>
-              <a:rPr sz="1300" b="1">
-                <a:solidFill>
-                  <a:srgbClr val="FFFFFF"/>
-                </a:solidFill>
-              </a:rPr>
-              <a:t>8. EXIT</a:t>
-            </a:r>
-          </a:p>
-        </p:txBody>
-      </p:sp>
-      <p:sp>
-        <p:nvSpPr>
-          <p:cNvPr id="5" name="TextBox 4"/>
-          <p:cNvSpPr txBox="1"/>
-          <p:nvPr/>
-        </p:nvSpPr>
-        <p:spPr>
-          <a:xfrm>
-            <a:off x="7772400" y="246888"/>
-            <a:ext cx="3840480" cy="320040"/>
-          </a:xfrm>
-          <a:prstGeom prst="rect">
-            <a:avLst/>
-          </a:prstGeom>
-          <a:noFill/>
-        </p:spPr>
-        <p:txBody>
-          <a:bodyPr wrap="square">
-            <a:spAutoFit/>
-          </a:bodyPr>
-          <a:lstStyle/>
-          <a:p>
-            <a:pPr algn="r"/>
-            <a:r>
-              <a:rPr sz="1100" b="0">
-                <a:solidFill>
-                  <a:srgbClr val="FFFFFF"/>
-                </a:solidFill>
-              </a:rPr>
-              <a:t>p7_t1_christian_religious_education_0101</a:t>
-            </a:r>
-          </a:p>
-        </p:txBody>
-      </p:sp>
-      <p:sp>
-        <p:nvSpPr>
-          <p:cNvPr id="6" name="TextBox 5"/>
-          <p:cNvSpPr txBox="1"/>
-          <p:nvPr/>
-        </p:nvSpPr>
-        <p:spPr>
-          <a:xfrm>
-            <a:off x="640080" y="1143000"/>
-            <a:ext cx="10972800" cy="685800"/>
-          </a:xfrm>
-          <a:prstGeom prst="rect">
-            <a:avLst/>
-          </a:prstGeom>
-          <a:noFill/>
-        </p:spPr>
-        <p:txBody>
-          <a:bodyPr wrap="square">
-            <a:spAutoFit/>
-          </a:bodyPr>
-          <a:lstStyle/>
-          <a:p>
-            <a:r>
-              <a:rPr sz="2800" b="1">
-                <a:solidFill>
-                  <a:srgbClr val="1A202C"/>
-                </a:solidFill>
-              </a:rPr>
-              <a:t>Exit ticket</a:t>
-            </a:r>
-          </a:p>
-        </p:txBody>
-      </p:sp>
-      <p:sp>
-        <p:nvSpPr>
-          <p:cNvPr id="7" name="Rounded Rectangle 6"/>
+          <p:cNvPr id="4" name="Rectangle 3"/>
           <p:cNvSpPr/>
           <p:nvPr/>
         </p:nvSpPr>
         <p:spPr>
           <a:xfrm>
-            <a:off x="777240" y="1993392"/>
-            <a:ext cx="10835640" cy="1005840"/>
-          </a:xfrm>
-          <a:prstGeom prst="roundRect">
-            <a:avLst/>
-          </a:prstGeom>
-          <a:solidFill>
-            <a:srgbClr val="FFFBEB"/>
-          </a:solidFill>
-          <a:ln w="15240">
-            <a:solidFill>
-              <a:srgbClr val="4338CA"/>
-            </a:solidFill>
+            <a:off x="0" y="795528"/>
+            <a:ext cx="12191695" cy="64008"/>
+          </a:xfrm>
+          <a:prstGeom prst="rect">
+            <a:avLst/>
+          </a:prstGeom>
+          <a:solidFill>
+            <a:srgbClr val="D90000"/>
+          </a:solidFill>
+          <a:ln>
+            <a:noFill/>
           </a:ln>
         </p:spPr>
         <p:style>
@@ -8676,58 +9170,23 @@
       </p:sp>
       <p:sp>
         <p:nvSpPr>
-          <p:cNvPr id="8" name="TextBox 7"/>
-          <p:cNvSpPr txBox="1"/>
-          <p:nvPr/>
-        </p:nvSpPr>
-        <p:spPr>
-          <a:xfrm>
-            <a:off x="1051560" y="2212848"/>
-            <a:ext cx="10287000" cy="502920"/>
-          </a:xfrm>
-          <a:prstGeom prst="rect">
-            <a:avLst/>
-          </a:prstGeom>
-          <a:noFill/>
-        </p:spPr>
-        <p:txBody>
-          <a:bodyPr wrap="square">
-            <a:spAutoFit/>
-          </a:bodyPr>
-          <a:lstStyle/>
-          <a:p>
-            <a:r>
-              <a:rPr sz="2100" b="1">
-                <a:solidFill>
-                  <a:srgbClr val="1A202C"/>
-                </a:solidFill>
-              </a:rPr>
-              <a:t>Answer: Can you name the three persons?</a:t>
-            </a:r>
-          </a:p>
-        </p:txBody>
-      </p:sp>
-      <p:sp>
-        <p:nvSpPr>
-          <p:cNvPr id="9" name="Rounded Rectangle 8"/>
+          <p:cNvPr id="5" name="Rectangle 4"/>
           <p:cNvSpPr/>
           <p:nvPr/>
         </p:nvSpPr>
         <p:spPr>
           <a:xfrm>
-            <a:off x="1005840" y="3246120"/>
-            <a:ext cx="10149840" cy="731520"/>
-          </a:xfrm>
-          <a:prstGeom prst="roundRect">
-            <a:avLst/>
-          </a:prstGeom>
-          <a:solidFill>
-            <a:srgbClr val="F8FAFC"/>
-          </a:solidFill>
-          <a:ln w="15240">
-            <a:solidFill>
-              <a:srgbClr val="CBD5E1"/>
-            </a:solidFill>
+            <a:off x="0" y="859536"/>
+            <a:ext cx="164592" cy="5998464"/>
+          </a:xfrm>
+          <a:prstGeom prst="rect">
+            <a:avLst/>
+          </a:prstGeom>
+          <a:solidFill>
+            <a:srgbClr val="4338CA"/>
+          </a:solidFill>
+          <a:ln>
+            <a:noFill/>
           </a:ln>
         </p:spPr>
         <p:style>
@@ -8754,23 +9213,128 @@
       </p:sp>
       <p:sp>
         <p:nvSpPr>
-          <p:cNvPr id="10" name="Oval 9"/>
+          <p:cNvPr id="6" name="TextBox 5"/>
+          <p:cNvSpPr txBox="1"/>
+          <p:nvPr/>
+        </p:nvSpPr>
+        <p:spPr>
+          <a:xfrm>
+            <a:off x="502920" y="210312"/>
+            <a:ext cx="3200400" cy="256032"/>
+          </a:xfrm>
+          <a:prstGeom prst="rect">
+            <a:avLst/>
+          </a:prstGeom>
+          <a:noFill/>
+        </p:spPr>
+        <p:txBody>
+          <a:bodyPr wrap="square" lIns="0" rIns="0" tIns="0" bIns="0">
+            <a:spAutoFit/>
+          </a:bodyPr>
+          <a:lstStyle/>
+          <a:p>
+            <a:r>
+              <a:rPr sz="1200" b="1">
+                <a:solidFill>
+                  <a:srgbClr val="FFFFFF"/>
+                </a:solidFill>
+                <a:latin typeface="Arial"/>
+              </a:rPr>
+              <a:t>8. EXIT</a:t>
+            </a:r>
+          </a:p>
+        </p:txBody>
+      </p:sp>
+      <p:sp>
+        <p:nvSpPr>
+          <p:cNvPr id="7" name="TextBox 6"/>
+          <p:cNvSpPr txBox="1"/>
+          <p:nvPr/>
+        </p:nvSpPr>
+        <p:spPr>
+          <a:xfrm>
+            <a:off x="7589520" y="210312"/>
+            <a:ext cx="4069080" cy="256032"/>
+          </a:xfrm>
+          <a:prstGeom prst="rect">
+            <a:avLst/>
+          </a:prstGeom>
+          <a:noFill/>
+        </p:spPr>
+        <p:txBody>
+          <a:bodyPr wrap="square" lIns="0" rIns="0" tIns="0" bIns="0">
+            <a:spAutoFit/>
+          </a:bodyPr>
+          <a:lstStyle/>
+          <a:p>
+            <a:pPr algn="r"/>
+            <a:r>
+              <a:rPr sz="1000" b="0">
+                <a:solidFill>
+                  <a:srgbClr val="FFFFFF"/>
+                </a:solidFill>
+                <a:latin typeface="Arial"/>
+              </a:rPr>
+              <a:t>p7_t1_christian_religious_education_0101</a:t>
+            </a:r>
+          </a:p>
+        </p:txBody>
+      </p:sp>
+      <p:sp>
+        <p:nvSpPr>
+          <p:cNvPr id="8" name="TextBox 7"/>
+          <p:cNvSpPr txBox="1"/>
+          <p:nvPr/>
+        </p:nvSpPr>
+        <p:spPr>
+          <a:xfrm>
+            <a:off x="594360" y="1042415"/>
+            <a:ext cx="11109960" cy="566928"/>
+          </a:xfrm>
+          <a:prstGeom prst="rect">
+            <a:avLst/>
+          </a:prstGeom>
+          <a:noFill/>
+        </p:spPr>
+        <p:txBody>
+          <a:bodyPr wrap="square" lIns="0" rIns="0" tIns="0" bIns="0">
+            <a:spAutoFit/>
+          </a:bodyPr>
+          <a:lstStyle/>
+          <a:p>
+            <a:r>
+              <a:rPr sz="2600" b="1">
+                <a:solidFill>
+                  <a:srgbClr val="111827"/>
+                </a:solidFill>
+                <a:latin typeface="Arial"/>
+              </a:rPr>
+              <a:t>Exit ticket</a:t>
+            </a:r>
+          </a:p>
+        </p:txBody>
+      </p:sp>
+      <p:sp>
+        <p:nvSpPr>
+          <p:cNvPr id="9" name="Rectangle 8"/>
           <p:cNvSpPr/>
           <p:nvPr/>
         </p:nvSpPr>
         <p:spPr>
           <a:xfrm>
-            <a:off x="1234440" y="3364991"/>
-            <a:ext cx="347472" cy="347472"/>
-          </a:xfrm>
-          <a:prstGeom prst="ellipse">
-            <a:avLst/>
-          </a:prstGeom>
-          <a:solidFill>
-            <a:srgbClr val="4338CA"/>
-          </a:solidFill>
-          <a:ln>
-            <a:noFill/>
+            <a:off x="685800" y="1874519"/>
+            <a:ext cx="10835640" cy="804672"/>
+          </a:xfrm>
+          <a:prstGeom prst="rect">
+            <a:avLst/>
+          </a:prstGeom>
+          <a:solidFill>
+            <a:srgbClr val="FFF7E0"/>
+          </a:solidFill>
+          <a:ln w="17780">
+            <a:solidFill>
+              <a:srgbClr val="4338CA"/>
+            </a:solidFill>
           </a:ln>
         </p:spPr>
         <p:style>
@@ -8788,98 +9352,40 @@
           </a:fontRef>
         </p:style>
         <p:txBody>
-          <a:bodyPr rtlCol="0" anchor="ctr"/>
+          <a:bodyPr rtlCol="0" anchor="ctr" wrap="square" lIns="101600" rIns="101600" tIns="38100" bIns="38100"/>
           <a:lstStyle/>
           <a:p>
             <a:pPr algn="ctr"/>
-          </a:p>
-        </p:txBody>
-      </p:sp>
-      <p:sp>
-        <p:nvSpPr>
-          <p:cNvPr id="11" name="TextBox 10"/>
-          <p:cNvSpPr txBox="1"/>
-          <p:nvPr/>
-        </p:nvSpPr>
-        <p:spPr>
-          <a:xfrm>
-            <a:off x="1234440" y="3410712"/>
-            <a:ext cx="347472" cy="182880"/>
-          </a:xfrm>
-          <a:prstGeom prst="rect">
-            <a:avLst/>
-          </a:prstGeom>
-          <a:noFill/>
-        </p:spPr>
-        <p:txBody>
-          <a:bodyPr wrap="square">
-            <a:spAutoFit/>
-          </a:bodyPr>
-          <a:lstStyle/>
-          <a:p>
-            <a:pPr algn="ctr"/>
-            <a:r>
-              <a:rPr sz="1000" b="1">
-                <a:solidFill>
-                  <a:srgbClr val="FFFFFF"/>
-                </a:solidFill>
+            <a:r>
+              <a:rPr sz="1900" b="1">
+                <a:solidFill>
+                  <a:srgbClr val="111827"/>
+                </a:solidFill>
+                <a:latin typeface="Arial"/>
               </a:rPr>
-              <a:t>1</a:t>
-            </a:r>
-          </a:p>
-        </p:txBody>
-      </p:sp>
-      <p:sp>
-        <p:nvSpPr>
-          <p:cNvPr id="12" name="TextBox 11"/>
-          <p:cNvSpPr txBox="1"/>
-          <p:nvPr/>
-        </p:nvSpPr>
-        <p:spPr>
-          <a:xfrm>
-            <a:off x="1783080" y="3364991"/>
-            <a:ext cx="9006840" cy="347472"/>
-          </a:xfrm>
-          <a:prstGeom prst="rect">
-            <a:avLst/>
-          </a:prstGeom>
-          <a:noFill/>
-        </p:spPr>
-        <p:txBody>
-          <a:bodyPr wrap="square">
-            <a:spAutoFit/>
-          </a:bodyPr>
-          <a:lstStyle/>
-          <a:p>
-            <a:r>
-              <a:rPr sz="1700" b="0">
-                <a:solidFill>
-                  <a:srgbClr val="1A202C"/>
-                </a:solidFill>
-              </a:rPr>
-              <a:t>Use one complete sentence.</a:t>
-            </a:r>
-          </a:p>
-        </p:txBody>
-      </p:sp>
-      <p:sp>
-        <p:nvSpPr>
-          <p:cNvPr id="13" name="Rounded Rectangle 12"/>
+              <a:t>Answer: Can you name the three persons?</a:t>
+            </a:r>
+          </a:p>
+        </p:txBody>
+      </p:sp>
+      <p:sp>
+        <p:nvSpPr>
+          <p:cNvPr id="10" name="Rectangle 9"/>
           <p:cNvSpPr/>
           <p:nvPr/>
         </p:nvSpPr>
         <p:spPr>
           <a:xfrm>
-            <a:off x="1005840" y="4178808"/>
-            <a:ext cx="10149840" cy="731520"/>
-          </a:xfrm>
-          <a:prstGeom prst="roundRect">
-            <a:avLst/>
-          </a:prstGeom>
-          <a:solidFill>
-            <a:srgbClr val="F8FAFC"/>
-          </a:solidFill>
-          <a:ln w="15240">
+            <a:off x="868680" y="2971800"/>
+            <a:ext cx="10378440" cy="713232"/>
+          </a:xfrm>
+          <a:prstGeom prst="rect">
+            <a:avLst/>
+          </a:prstGeom>
+          <a:solidFill>
+            <a:srgbClr val="FFFFFF"/>
+          </a:solidFill>
+          <a:ln w="11430">
             <a:solidFill>
               <a:srgbClr val="CBD5E1"/>
             </a:solidFill>
@@ -8909,16 +9415,16 @@
       </p:sp>
       <p:sp>
         <p:nvSpPr>
-          <p:cNvPr id="14" name="Oval 13"/>
+          <p:cNvPr id="11" name="Rectangle 10"/>
           <p:cNvSpPr/>
           <p:nvPr/>
         </p:nvSpPr>
         <p:spPr>
           <a:xfrm>
-            <a:off x="1234440" y="4297680"/>
-            <a:ext cx="347472" cy="347472"/>
-          </a:xfrm>
-          <a:prstGeom prst="ellipse">
+            <a:off x="868680" y="2971800"/>
+            <a:ext cx="530352" cy="713232"/>
+          </a:xfrm>
+          <a:prstGeom prst="rect">
             <a:avLst/>
           </a:prstGeom>
           <a:solidFill>
@@ -8943,23 +9449,32 @@
           </a:fontRef>
         </p:style>
         <p:txBody>
-          <a:bodyPr rtlCol="0" anchor="ctr"/>
+          <a:bodyPr rtlCol="0" anchor="ctr" wrap="square" lIns="101600" rIns="101600" tIns="38100" bIns="38100"/>
           <a:lstStyle/>
           <a:p>
             <a:pPr algn="ctr"/>
-          </a:p>
-        </p:txBody>
-      </p:sp>
-      <p:sp>
-        <p:nvSpPr>
-          <p:cNvPr id="15" name="TextBox 14"/>
+            <a:r>
+              <a:rPr sz="1500" b="1">
+                <a:solidFill>
+                  <a:srgbClr val="FFFFFF"/>
+                </a:solidFill>
+                <a:latin typeface="Arial"/>
+              </a:rPr>
+              <a:t>1</a:t>
+            </a:r>
+          </a:p>
+        </p:txBody>
+      </p:sp>
+      <p:sp>
+        <p:nvSpPr>
+          <p:cNvPr id="12" name="TextBox 11"/>
           <p:cNvSpPr txBox="1"/>
           <p:nvPr/>
         </p:nvSpPr>
         <p:spPr>
           <a:xfrm>
-            <a:off x="1234440" y="4343400"/>
-            <a:ext cx="347472" cy="182880"/>
+            <a:off x="1572768" y="3118104"/>
+            <a:ext cx="9372600" cy="384048"/>
           </a:xfrm>
           <a:prstGeom prst="rect">
             <a:avLst/>
@@ -8967,74 +9482,41 @@
           <a:noFill/>
         </p:spPr>
         <p:txBody>
-          <a:bodyPr wrap="square">
+          <a:bodyPr wrap="square" lIns="0" rIns="0" tIns="0" bIns="0">
             <a:spAutoFit/>
           </a:bodyPr>
           <a:lstStyle/>
           <a:p>
-            <a:pPr algn="ctr"/>
-            <a:r>
-              <a:rPr sz="1000" b="1">
-                <a:solidFill>
-                  <a:srgbClr val="FFFFFF"/>
-                </a:solidFill>
+            <a:r>
+              <a:rPr sz="1500" b="0">
+                <a:solidFill>
+                  <a:srgbClr val="111827"/>
+                </a:solidFill>
+                <a:latin typeface="Arial"/>
               </a:rPr>
-              <a:t>2</a:t>
-            </a:r>
-          </a:p>
-        </p:txBody>
-      </p:sp>
-      <p:sp>
-        <p:nvSpPr>
-          <p:cNvPr id="16" name="TextBox 15"/>
-          <p:cNvSpPr txBox="1"/>
-          <p:nvPr/>
-        </p:nvSpPr>
-        <p:spPr>
-          <a:xfrm>
-            <a:off x="1783080" y="4297680"/>
-            <a:ext cx="9006840" cy="347472"/>
-          </a:xfrm>
-          <a:prstGeom prst="rect">
-            <a:avLst/>
-          </a:prstGeom>
-          <a:noFill/>
-        </p:spPr>
-        <p:txBody>
-          <a:bodyPr wrap="square">
-            <a:spAutoFit/>
-          </a:bodyPr>
-          <a:lstStyle/>
-          <a:p>
-            <a:r>
-              <a:rPr sz="1700" b="0">
-                <a:solidFill>
-                  <a:srgbClr val="1A202C"/>
-                </a:solidFill>
-              </a:rPr>
-              <a:t>Include one key word: Spirit, Invisible, Wind</a:t>
-            </a:r>
-          </a:p>
-        </p:txBody>
-      </p:sp>
-      <p:sp>
-        <p:nvSpPr>
-          <p:cNvPr id="17" name="Rounded Rectangle 16"/>
+              <a:t>Use one complete sentence.</a:t>
+            </a:r>
+          </a:p>
+        </p:txBody>
+      </p:sp>
+      <p:sp>
+        <p:nvSpPr>
+          <p:cNvPr id="13" name="Rectangle 12"/>
           <p:cNvSpPr/>
           <p:nvPr/>
         </p:nvSpPr>
         <p:spPr>
           <a:xfrm>
-            <a:off x="1005840" y="5111496"/>
-            <a:ext cx="10149840" cy="731520"/>
-          </a:xfrm>
-          <a:prstGeom prst="roundRect">
-            <a:avLst/>
-          </a:prstGeom>
-          <a:solidFill>
-            <a:srgbClr val="F8FAFC"/>
-          </a:solidFill>
-          <a:ln w="15240">
+            <a:off x="868680" y="3822191"/>
+            <a:ext cx="10378440" cy="713232"/>
+          </a:xfrm>
+          <a:prstGeom prst="rect">
+            <a:avLst/>
+          </a:prstGeom>
+          <a:solidFill>
+            <a:srgbClr val="FFFFFF"/>
+          </a:solidFill>
+          <a:ln w="11430">
             <a:solidFill>
               <a:srgbClr val="CBD5E1"/>
             </a:solidFill>
@@ -9064,16 +9546,16 @@
       </p:sp>
       <p:sp>
         <p:nvSpPr>
-          <p:cNvPr id="18" name="Oval 17"/>
+          <p:cNvPr id="14" name="Rectangle 13"/>
           <p:cNvSpPr/>
           <p:nvPr/>
         </p:nvSpPr>
         <p:spPr>
           <a:xfrm>
-            <a:off x="1234440" y="5230368"/>
-            <a:ext cx="347472" cy="347472"/>
-          </a:xfrm>
-          <a:prstGeom prst="ellipse">
+            <a:off x="868680" y="3822191"/>
+            <a:ext cx="530352" cy="713232"/>
+          </a:xfrm>
+          <a:prstGeom prst="rect">
             <a:avLst/>
           </a:prstGeom>
           <a:solidFill>
@@ -9098,23 +9580,32 @@
           </a:fontRef>
         </p:style>
         <p:txBody>
-          <a:bodyPr rtlCol="0" anchor="ctr"/>
+          <a:bodyPr rtlCol="0" anchor="ctr" wrap="square" lIns="101600" rIns="101600" tIns="38100" bIns="38100"/>
           <a:lstStyle/>
           <a:p>
             <a:pPr algn="ctr"/>
-          </a:p>
-        </p:txBody>
-      </p:sp>
-      <p:sp>
-        <p:nvSpPr>
-          <p:cNvPr id="19" name="TextBox 18"/>
+            <a:r>
+              <a:rPr sz="1500" b="1">
+                <a:solidFill>
+                  <a:srgbClr val="FFFFFF"/>
+                </a:solidFill>
+                <a:latin typeface="Arial"/>
+              </a:rPr>
+              <a:t>2</a:t>
+            </a:r>
+          </a:p>
+        </p:txBody>
+      </p:sp>
+      <p:sp>
+        <p:nvSpPr>
+          <p:cNvPr id="15" name="TextBox 14"/>
           <p:cNvSpPr txBox="1"/>
           <p:nvPr/>
         </p:nvSpPr>
         <p:spPr>
           <a:xfrm>
-            <a:off x="1234440" y="5276088"/>
-            <a:ext cx="347472" cy="182880"/>
+            <a:off x="1572768" y="3968496"/>
+            <a:ext cx="9372600" cy="384048"/>
           </a:xfrm>
           <a:prstGeom prst="rect">
             <a:avLst/>
@@ -9122,17 +9613,114 @@
           <a:noFill/>
         </p:spPr>
         <p:txBody>
-          <a:bodyPr wrap="square">
+          <a:bodyPr wrap="square" lIns="0" rIns="0" tIns="0" bIns="0">
             <a:spAutoFit/>
           </a:bodyPr>
           <a:lstStyle/>
           <a:p>
+            <a:r>
+              <a:rPr sz="1500" b="0">
+                <a:solidFill>
+                  <a:srgbClr val="111827"/>
+                </a:solidFill>
+                <a:latin typeface="Arial"/>
+              </a:rPr>
+              <a:t>Include one key word: Spirit, Invisible, Wind</a:t>
+            </a:r>
+          </a:p>
+        </p:txBody>
+      </p:sp>
+      <p:sp>
+        <p:nvSpPr>
+          <p:cNvPr id="16" name="Rectangle 15"/>
+          <p:cNvSpPr/>
+          <p:nvPr/>
+        </p:nvSpPr>
+        <p:spPr>
+          <a:xfrm>
+            <a:off x="868680" y="4672584"/>
+            <a:ext cx="10378440" cy="713232"/>
+          </a:xfrm>
+          <a:prstGeom prst="rect">
+            <a:avLst/>
+          </a:prstGeom>
+          <a:solidFill>
+            <a:srgbClr val="FFFFFF"/>
+          </a:solidFill>
+          <a:ln w="11430">
+            <a:solidFill>
+              <a:srgbClr val="CBD5E1"/>
+            </a:solidFill>
+          </a:ln>
+        </p:spPr>
+        <p:style>
+          <a:lnRef idx="1">
+            <a:schemeClr val="accent1"/>
+          </a:lnRef>
+          <a:fillRef idx="3">
+            <a:schemeClr val="accent1"/>
+          </a:fillRef>
+          <a:effectRef idx="2">
+            <a:schemeClr val="accent1"/>
+          </a:effectRef>
+          <a:fontRef idx="minor">
+            <a:schemeClr val="lt1"/>
+          </a:fontRef>
+        </p:style>
+        <p:txBody>
+          <a:bodyPr rtlCol="0" anchor="ctr"/>
+          <a:lstStyle/>
+          <a:p>
             <a:pPr algn="ctr"/>
-            <a:r>
-              <a:rPr sz="1000" b="1">
+          </a:p>
+        </p:txBody>
+      </p:sp>
+      <p:sp>
+        <p:nvSpPr>
+          <p:cNvPr id="17" name="Rectangle 16"/>
+          <p:cNvSpPr/>
+          <p:nvPr/>
+        </p:nvSpPr>
+        <p:spPr>
+          <a:xfrm>
+            <a:off x="868680" y="4672584"/>
+            <a:ext cx="530352" cy="713232"/>
+          </a:xfrm>
+          <a:prstGeom prst="rect">
+            <a:avLst/>
+          </a:prstGeom>
+          <a:solidFill>
+            <a:srgbClr val="4338CA"/>
+          </a:solidFill>
+          <a:ln>
+            <a:noFill/>
+          </a:ln>
+        </p:spPr>
+        <p:style>
+          <a:lnRef idx="1">
+            <a:schemeClr val="accent1"/>
+          </a:lnRef>
+          <a:fillRef idx="3">
+            <a:schemeClr val="accent1"/>
+          </a:fillRef>
+          <a:effectRef idx="2">
+            <a:schemeClr val="accent1"/>
+          </a:effectRef>
+          <a:fontRef idx="minor">
+            <a:schemeClr val="lt1"/>
+          </a:fontRef>
+        </p:style>
+        <p:txBody>
+          <a:bodyPr rtlCol="0" anchor="ctr" wrap="square" lIns="101600" rIns="101600" tIns="38100" bIns="38100"/>
+          <a:lstStyle/>
+          <a:p>
+            <a:pPr algn="ctr"/>
+            <a:r>
+              <a:rPr sz="1500" b="1">
                 <a:solidFill>
                   <a:srgbClr val="FFFFFF"/>
                 </a:solidFill>
+                <a:latin typeface="Arial"/>
               </a:rPr>
               <a:t>3</a:t>
             </a:r>
@@ -9141,14 +9729,14 @@
       </p:sp>
       <p:sp>
         <p:nvSpPr>
-          <p:cNvPr id="20" name="TextBox 19"/>
+          <p:cNvPr id="18" name="TextBox 17"/>
           <p:cNvSpPr txBox="1"/>
           <p:nvPr/>
         </p:nvSpPr>
         <p:spPr>
           <a:xfrm>
-            <a:off x="1783080" y="5230368"/>
-            <a:ext cx="9006840" cy="347472"/>
+            <a:off x="1572768" y="4818888"/>
+            <a:ext cx="9372600" cy="384048"/>
           </a:xfrm>
           <a:prstGeom prst="rect">
             <a:avLst/>
@@ -9156,16 +9744,17 @@
           <a:noFill/>
         </p:spPr>
         <p:txBody>
-          <a:bodyPr wrap="square">
+          <a:bodyPr wrap="square" lIns="0" rIns="0" tIns="0" bIns="0">
             <a:spAutoFit/>
           </a:bodyPr>
           <a:lstStyle/>
           <a:p>
             <a:r>
-              <a:rPr sz="1700" b="0">
-                <a:solidFill>
-                  <a:srgbClr val="1A202C"/>
-                </a:solidFill>
+              <a:rPr sz="1500" b="0">
+                <a:solidFill>
+                  <a:srgbClr val="111827"/>
+                </a:solidFill>
+                <a:latin typeface="Arial"/>
               </a:rPr>
               <a:t>Hand in or read your answer aloud.</a:t>
             </a:r>
@@ -9174,14 +9763,111 @@
       </p:sp>
       <p:sp>
         <p:nvSpPr>
+          <p:cNvPr id="19" name="Rectangle 18"/>
+          <p:cNvSpPr/>
+          <p:nvPr/>
+        </p:nvSpPr>
+        <p:spPr>
+          <a:xfrm>
+            <a:off x="868680" y="5522976"/>
+            <a:ext cx="10378440" cy="713232"/>
+          </a:xfrm>
+          <a:prstGeom prst="rect">
+            <a:avLst/>
+          </a:prstGeom>
+          <a:solidFill>
+            <a:srgbClr val="FFFFFF"/>
+          </a:solidFill>
+          <a:ln w="11430">
+            <a:solidFill>
+              <a:srgbClr val="CBD5E1"/>
+            </a:solidFill>
+          </a:ln>
+        </p:spPr>
+        <p:style>
+          <a:lnRef idx="1">
+            <a:schemeClr val="accent1"/>
+          </a:lnRef>
+          <a:fillRef idx="3">
+            <a:schemeClr val="accent1"/>
+          </a:fillRef>
+          <a:effectRef idx="2">
+            <a:schemeClr val="accent1"/>
+          </a:effectRef>
+          <a:fontRef idx="minor">
+            <a:schemeClr val="lt1"/>
+          </a:fontRef>
+        </p:style>
+        <p:txBody>
+          <a:bodyPr rtlCol="0" anchor="ctr"/>
+          <a:lstStyle/>
+          <a:p>
+            <a:pPr algn="ctr"/>
+          </a:p>
+        </p:txBody>
+      </p:sp>
+      <p:sp>
+        <p:nvSpPr>
+          <p:cNvPr id="20" name="Rectangle 19"/>
+          <p:cNvSpPr/>
+          <p:nvPr/>
+        </p:nvSpPr>
+        <p:spPr>
+          <a:xfrm>
+            <a:off x="868680" y="5522976"/>
+            <a:ext cx="530352" cy="713232"/>
+          </a:xfrm>
+          <a:prstGeom prst="rect">
+            <a:avLst/>
+          </a:prstGeom>
+          <a:solidFill>
+            <a:srgbClr val="4338CA"/>
+          </a:solidFill>
+          <a:ln>
+            <a:noFill/>
+          </a:ln>
+        </p:spPr>
+        <p:style>
+          <a:lnRef idx="1">
+            <a:schemeClr val="accent1"/>
+          </a:lnRef>
+          <a:fillRef idx="3">
+            <a:schemeClr val="accent1"/>
+          </a:fillRef>
+          <a:effectRef idx="2">
+            <a:schemeClr val="accent1"/>
+          </a:effectRef>
+          <a:fontRef idx="minor">
+            <a:schemeClr val="lt1"/>
+          </a:fontRef>
+        </p:style>
+        <p:txBody>
+          <a:bodyPr rtlCol="0" anchor="ctr" wrap="square" lIns="101600" rIns="101600" tIns="38100" bIns="38100"/>
+          <a:lstStyle/>
+          <a:p>
+            <a:pPr algn="ctr"/>
+            <a:r>
+              <a:rPr sz="1500" b="1">
+                <a:solidFill>
+                  <a:srgbClr val="FFFFFF"/>
+                </a:solidFill>
+                <a:latin typeface="Arial"/>
+              </a:rPr>
+              <a:t>4</a:t>
+            </a:r>
+          </a:p>
+        </p:txBody>
+      </p:sp>
+      <p:sp>
+        <p:nvSpPr>
           <p:cNvPr id="21" name="TextBox 20"/>
           <p:cNvSpPr txBox="1"/>
           <p:nvPr/>
         </p:nvSpPr>
         <p:spPr>
           <a:xfrm>
-            <a:off x="777240" y="6419088"/>
-            <a:ext cx="10835640" cy="228600"/>
+            <a:off x="1572768" y="5669280"/>
+            <a:ext cx="9372600" cy="384048"/>
           </a:xfrm>
           <a:prstGeom prst="rect">
             <a:avLst/>
@@ -9189,17 +9875,52 @@
           <a:noFill/>
         </p:spPr>
         <p:txBody>
-          <a:bodyPr wrap="square">
+          <a:bodyPr wrap="square" lIns="0" rIns="0" tIns="0" bIns="0">
             <a:spAutoFit/>
           </a:bodyPr>
           <a:lstStyle/>
           <a:p>
+            <a:r>
+              <a:rPr sz="1500" b="0">
+                <a:solidFill>
+                  <a:srgbClr val="111827"/>
+                </a:solidFill>
+                <a:latin typeface="Arial"/>
+              </a:rPr>
+              <a:t>Write one clear response.</a:t>
+            </a:r>
+          </a:p>
+        </p:txBody>
+      </p:sp>
+      <p:sp>
+        <p:nvSpPr>
+          <p:cNvPr id="22" name="TextBox 21"/>
+          <p:cNvSpPr txBox="1"/>
+          <p:nvPr/>
+        </p:nvSpPr>
+        <p:spPr>
+          <a:xfrm>
+            <a:off x="685800" y="6419088"/>
+            <a:ext cx="10835640" cy="228600"/>
+          </a:xfrm>
+          <a:prstGeom prst="rect">
+            <a:avLst/>
+          </a:prstGeom>
+          <a:noFill/>
+        </p:spPr>
+        <p:txBody>
+          <a:bodyPr wrap="square" lIns="0" rIns="0" tIns="0" bIns="0">
+            <a:spAutoFit/>
+          </a:bodyPr>
+          <a:lstStyle/>
+          <a:p>
             <a:pPr algn="r"/>
             <a:r>
               <a:rPr sz="1000" b="0">
                 <a:solidFill>
-                  <a:srgbClr val="5B677D"/>
-                </a:solidFill>
+                  <a:srgbClr val="475569"/>
+                </a:solidFill>
+                <a:latin typeface="Arial"/>
               </a:rPr>
               <a:t>Listen • Talk • Try • Explain</a:t>
             </a:r>

--- a/uganda-p7-mvp/p7_t1_christian_religious_education_0101/p7_t1_christian_religious_education_0101.pptx
+++ b/uganda-p7-mvp/p7_t1_christian_religious_education_0101/p7_t1_christian_religious_education_0101.pptx
@@ -3277,14 +3277,100 @@
       </p:sp>
       <p:sp>
         <p:nvSpPr>
-          <p:cNvPr id="6" name="TextBox 5"/>
+          <p:cNvPr id="6" name="Rectangle 5"/>
+          <p:cNvSpPr/>
+          <p:nvPr/>
+        </p:nvSpPr>
+        <p:spPr>
+          <a:xfrm>
+            <a:off x="164592" y="6565392"/>
+            <a:ext cx="12027103" cy="73152"/>
+          </a:xfrm>
+          <a:prstGeom prst="rect">
+            <a:avLst/>
+          </a:prstGeom>
+          <a:solidFill>
+            <a:srgbClr val="FCD116"/>
+          </a:solidFill>
+          <a:ln>
+            <a:noFill/>
+          </a:ln>
+        </p:spPr>
+        <p:style>
+          <a:lnRef idx="1">
+            <a:schemeClr val="accent1"/>
+          </a:lnRef>
+          <a:fillRef idx="3">
+            <a:schemeClr val="accent1"/>
+          </a:fillRef>
+          <a:effectRef idx="2">
+            <a:schemeClr val="accent1"/>
+          </a:effectRef>
+          <a:fontRef idx="minor">
+            <a:schemeClr val="lt1"/>
+          </a:fontRef>
+        </p:style>
+        <p:txBody>
+          <a:bodyPr rtlCol="0" anchor="ctr"/>
+          <a:lstStyle/>
+          <a:p>
+            <a:pPr algn="ctr"/>
+          </a:p>
+        </p:txBody>
+      </p:sp>
+      <p:sp>
+        <p:nvSpPr>
+          <p:cNvPr id="7" name="Rectangle 6"/>
+          <p:cNvSpPr/>
+          <p:nvPr/>
+        </p:nvSpPr>
+        <p:spPr>
+          <a:xfrm>
+            <a:off x="164592" y="6638544"/>
+            <a:ext cx="12027103" cy="45720"/>
+          </a:xfrm>
+          <a:prstGeom prst="rect">
+            <a:avLst/>
+          </a:prstGeom>
+          <a:solidFill>
+            <a:srgbClr val="D90000"/>
+          </a:solidFill>
+          <a:ln>
+            <a:noFill/>
+          </a:ln>
+        </p:spPr>
+        <p:style>
+          <a:lnRef idx="1">
+            <a:schemeClr val="accent1"/>
+          </a:lnRef>
+          <a:fillRef idx="3">
+            <a:schemeClr val="accent1"/>
+          </a:fillRef>
+          <a:effectRef idx="2">
+            <a:schemeClr val="accent1"/>
+          </a:effectRef>
+          <a:fontRef idx="minor">
+            <a:schemeClr val="lt1"/>
+          </a:fontRef>
+        </p:style>
+        <p:txBody>
+          <a:bodyPr rtlCol="0" anchor="ctr"/>
+          <a:lstStyle/>
+          <a:p>
+            <a:pPr algn="ctr"/>
+          </a:p>
+        </p:txBody>
+      </p:sp>
+      <p:sp>
+        <p:nvSpPr>
+          <p:cNvPr id="8" name="TextBox 7"/>
           <p:cNvSpPr txBox="1"/>
           <p:nvPr/>
         </p:nvSpPr>
         <p:spPr>
           <a:xfrm>
             <a:off x="502920" y="210312"/>
-            <a:ext cx="2926080" cy="256032"/>
+            <a:ext cx="3200400" cy="256032"/>
           </a:xfrm>
           <a:prstGeom prst="rect">
             <a:avLst/>
@@ -3304,14 +3390,14 @@
                 </a:solidFill>
                 <a:latin typeface="Arial"/>
               </a:rPr>
-              <a:t>UGANDA P7 LESSON</a:t>
-            </a:r>
-          </a:p>
-        </p:txBody>
-      </p:sp>
-      <p:sp>
-        <p:nvSpPr>
-          <p:cNvPr id="7" name="TextBox 6"/>
+              <a:t>1. HOOK</a:t>
+            </a:r>
+          </a:p>
+        </p:txBody>
+      </p:sp>
+      <p:sp>
+        <p:nvSpPr>
+          <p:cNvPr id="9" name="TextBox 8"/>
           <p:cNvSpPr txBox="1"/>
           <p:nvPr/>
         </p:nvSpPr>
@@ -3346,14 +3432,14 @@
       </p:sp>
       <p:sp>
         <p:nvSpPr>
-          <p:cNvPr id="8" name="TextBox 7"/>
+          <p:cNvPr id="10" name="TextBox 9"/>
           <p:cNvSpPr txBox="1"/>
           <p:nvPr/>
         </p:nvSpPr>
         <p:spPr>
           <a:xfrm>
-            <a:off x="731520" y="1207008"/>
-            <a:ext cx="10789920" cy="731520"/>
+            <a:off x="685800" y="1024128"/>
+            <a:ext cx="10835640" cy="502920"/>
           </a:xfrm>
           <a:prstGeom prst="rect">
             <a:avLst/>
@@ -3381,22 +3467,22 @@
       </p:sp>
       <p:sp>
         <p:nvSpPr>
-          <p:cNvPr id="9" name="Rectangle 8"/>
+          <p:cNvPr id="11" name="Rounded Rectangle 10"/>
           <p:cNvSpPr/>
           <p:nvPr/>
         </p:nvSpPr>
         <p:spPr>
           <a:xfrm>
-            <a:off x="1143000" y="2423160"/>
-            <a:ext cx="9921240" cy="2423160"/>
-          </a:xfrm>
-          <a:prstGeom prst="rect">
+            <a:off x="777240" y="1783080"/>
+            <a:ext cx="3794760" cy="4343400"/>
+          </a:xfrm>
+          <a:prstGeom prst="roundRect">
             <a:avLst/>
           </a:prstGeom>
           <a:solidFill>
             <a:srgbClr val="FFFFFF"/>
           </a:solidFill>
-          <a:ln w="19050">
+          <a:ln w="17780">
             <a:solidFill>
               <a:srgbClr val="1D4ED8"/>
             </a:solidFill>
@@ -3417,38 +3503,12 @@
           </a:fontRef>
         </p:style>
         <p:txBody>
-          <a:bodyPr rtlCol="0" anchor="ctr"/>
-          <a:lstStyle/>
-          <a:p>
-            <a:pPr algn="ctr"/>
-          </a:p>
-        </p:txBody>
-      </p:sp>
-      <p:sp>
-        <p:nvSpPr>
-          <p:cNvPr id="10" name="TextBox 9"/>
-          <p:cNvSpPr txBox="1"/>
-          <p:nvPr/>
-        </p:nvSpPr>
-        <p:spPr>
-          <a:xfrm>
-            <a:off x="1463040" y="2743200"/>
-            <a:ext cx="9281160" cy="347472"/>
-          </a:xfrm>
-          <a:prstGeom prst="rect">
-            <a:avLst/>
-          </a:prstGeom>
-          <a:noFill/>
-        </p:spPr>
-        <p:txBody>
-          <a:bodyPr wrap="square" lIns="0" rIns="0" tIns="0" bIns="0">
-            <a:spAutoFit/>
-          </a:bodyPr>
-          <a:lstStyle/>
-          <a:p>
-            <a:pPr algn="ctr"/>
-            <a:r>
-              <a:rPr sz="1700" b="1">
+          <a:bodyPr rtlCol="0" anchor="t" wrap="square" lIns="101600" rIns="101600" tIns="152400" bIns="38100"/>
+          <a:lstStyle/>
+          <a:p>
+            <a:pPr algn="ctr"/>
+            <a:r>
+              <a:rPr sz="1800" b="1">
                 <a:solidFill>
                   <a:srgbClr val="1D4ED8"/>
                 </a:solidFill>
@@ -3461,14 +3521,188 @@
       </p:sp>
       <p:sp>
         <p:nvSpPr>
-          <p:cNvPr id="11" name="TextBox 10"/>
+          <p:cNvPr id="12" name="Oval 11"/>
+          <p:cNvSpPr/>
+          <p:nvPr/>
+        </p:nvSpPr>
+        <p:spPr>
+          <a:xfrm>
+            <a:off x="2429560" y="2939796"/>
+            <a:ext cx="551383" cy="452628"/>
+          </a:xfrm>
+          <a:prstGeom prst="ellipse">
+            <a:avLst/>
+          </a:prstGeom>
+          <a:solidFill>
+            <a:srgbClr val="FCD116"/>
+          </a:solidFill>
+          <a:ln w="10160">
+            <a:solidFill>
+              <a:srgbClr val="D97706"/>
+            </a:solidFill>
+          </a:ln>
+        </p:spPr>
+        <p:style>
+          <a:lnRef idx="1">
+            <a:schemeClr val="accent1"/>
+          </a:lnRef>
+          <a:fillRef idx="3">
+            <a:schemeClr val="accent1"/>
+          </a:fillRef>
+          <a:effectRef idx="2">
+            <a:schemeClr val="accent1"/>
+          </a:effectRef>
+          <a:fontRef idx="minor">
+            <a:schemeClr val="lt1"/>
+          </a:fontRef>
+        </p:style>
+        <p:txBody>
+          <a:bodyPr rtlCol="0" anchor="ctr"/>
+          <a:lstStyle/>
+          <a:p>
+            <a:pPr algn="ctr"/>
+          </a:p>
+        </p:txBody>
+      </p:sp>
+      <p:sp>
+        <p:nvSpPr>
+          <p:cNvPr id="13" name="Rectangle 12"/>
+          <p:cNvSpPr/>
+          <p:nvPr/>
+        </p:nvSpPr>
+        <p:spPr>
+          <a:xfrm>
+            <a:off x="2613355" y="3392424"/>
+            <a:ext cx="183794" cy="1056132"/>
+          </a:xfrm>
+          <a:prstGeom prst="rect">
+            <a:avLst/>
+          </a:prstGeom>
+          <a:solidFill>
+            <a:srgbClr val="D97706"/>
+          </a:solidFill>
+          <a:ln>
+            <a:noFill/>
+          </a:ln>
+        </p:spPr>
+        <p:style>
+          <a:lnRef idx="1">
+            <a:schemeClr val="accent1"/>
+          </a:lnRef>
+          <a:fillRef idx="3">
+            <a:schemeClr val="accent1"/>
+          </a:fillRef>
+          <a:effectRef idx="2">
+            <a:schemeClr val="accent1"/>
+          </a:effectRef>
+          <a:fontRef idx="minor">
+            <a:schemeClr val="lt1"/>
+          </a:fontRef>
+        </p:style>
+        <p:txBody>
+          <a:bodyPr rtlCol="0" anchor="ctr"/>
+          <a:lstStyle/>
+          <a:p>
+            <a:pPr algn="ctr"/>
+          </a:p>
+        </p:txBody>
+      </p:sp>
+      <p:sp>
+        <p:nvSpPr>
+          <p:cNvPr id="14" name="Rectangle 13"/>
+          <p:cNvSpPr/>
+          <p:nvPr/>
+        </p:nvSpPr>
+        <p:spPr>
+          <a:xfrm>
+            <a:off x="2245766" y="3694176"/>
+            <a:ext cx="918971" cy="125730"/>
+          </a:xfrm>
+          <a:prstGeom prst="rect">
+            <a:avLst/>
+          </a:prstGeom>
+          <a:solidFill>
+            <a:srgbClr val="D97706"/>
+          </a:solidFill>
+          <a:ln>
+            <a:noFill/>
+          </a:ln>
+        </p:spPr>
+        <p:style>
+          <a:lnRef idx="1">
+            <a:schemeClr val="accent1"/>
+          </a:lnRef>
+          <a:fillRef idx="3">
+            <a:schemeClr val="accent1"/>
+          </a:fillRef>
+          <a:effectRef idx="2">
+            <a:schemeClr val="accent1"/>
+          </a:effectRef>
+          <a:fontRef idx="minor">
+            <a:schemeClr val="lt1"/>
+          </a:fontRef>
+        </p:style>
+        <p:txBody>
+          <a:bodyPr rtlCol="0" anchor="ctr"/>
+          <a:lstStyle/>
+          <a:p>
+            <a:pPr algn="ctr"/>
+          </a:p>
+        </p:txBody>
+      </p:sp>
+      <p:sp>
+        <p:nvSpPr>
+          <p:cNvPr id="15" name="Rounded Rectangle 14"/>
+          <p:cNvSpPr/>
+          <p:nvPr/>
+        </p:nvSpPr>
+        <p:spPr>
+          <a:xfrm>
+            <a:off x="1878177" y="4247388"/>
+            <a:ext cx="1684782" cy="201168"/>
+          </a:xfrm>
+          <a:prstGeom prst="roundRect">
+            <a:avLst/>
+          </a:prstGeom>
+          <a:solidFill>
+            <a:srgbClr val="D90000"/>
+          </a:solidFill>
+          <a:ln>
+            <a:noFill/>
+          </a:ln>
+        </p:spPr>
+        <p:style>
+          <a:lnRef idx="1">
+            <a:schemeClr val="accent1"/>
+          </a:lnRef>
+          <a:fillRef idx="3">
+            <a:schemeClr val="accent1"/>
+          </a:fillRef>
+          <a:effectRef idx="2">
+            <a:schemeClr val="accent1"/>
+          </a:effectRef>
+          <a:fontRef idx="minor">
+            <a:schemeClr val="lt1"/>
+          </a:fontRef>
+        </p:style>
+        <p:txBody>
+          <a:bodyPr rtlCol="0" anchor="ctr"/>
+          <a:lstStyle/>
+          <a:p>
+            <a:pPr algn="ctr"/>
+          </a:p>
+        </p:txBody>
+      </p:sp>
+      <p:sp>
+        <p:nvSpPr>
+          <p:cNvPr id="16" name="TextBox 15"/>
           <p:cNvSpPr txBox="1"/>
           <p:nvPr/>
         </p:nvSpPr>
         <p:spPr>
           <a:xfrm>
-            <a:off x="1645920" y="3355848"/>
-            <a:ext cx="8915400" cy="868680"/>
+            <a:off x="1143000" y="4745736"/>
+            <a:ext cx="3063240" cy="228600"/>
           </a:xfrm>
           <a:prstGeom prst="rect">
             <a:avLst/>
@@ -3483,7 +3717,157 @@
           <a:p>
             <a:pPr algn="ctr"/>
             <a:r>
-              <a:rPr sz="2400" b="1">
+              <a:rPr sz="1000" b="0">
+                <a:solidFill>
+                  <a:srgbClr val="475569"/>
+                </a:solidFill>
+                <a:latin typeface="Arial"/>
+              </a:rPr>
+              <a:t>Christian Religious Education</a:t>
+            </a:r>
+          </a:p>
+        </p:txBody>
+      </p:sp>
+      <p:sp>
+        <p:nvSpPr>
+          <p:cNvPr id="17" name="TextBox 16"/>
+          <p:cNvSpPr txBox="1"/>
+          <p:nvPr/>
+        </p:nvSpPr>
+        <p:spPr>
+          <a:xfrm>
+            <a:off x="960120" y="5504688"/>
+            <a:ext cx="3429000" cy="274320"/>
+          </a:xfrm>
+          <a:prstGeom prst="rect">
+            <a:avLst/>
+          </a:prstGeom>
+          <a:noFill/>
+        </p:spPr>
+        <p:txBody>
+          <a:bodyPr wrap="square" lIns="0" rIns="0" tIns="0" bIns="0">
+            <a:spAutoFit/>
+          </a:bodyPr>
+          <a:lstStyle/>
+          <a:p>
+            <a:pPr algn="ctr"/>
+            <a:r>
+              <a:rPr sz="1200" b="0">
+                <a:solidFill>
+                  <a:srgbClr val="475569"/>
+                </a:solidFill>
+                <a:latin typeface="Arial"/>
+              </a:rPr>
+              <a:t>Look • wonder • predict</a:t>
+            </a:r>
+          </a:p>
+        </p:txBody>
+      </p:sp>
+      <p:sp>
+        <p:nvSpPr>
+          <p:cNvPr id="18" name="Rounded Rectangle 17"/>
+          <p:cNvSpPr/>
+          <p:nvPr/>
+        </p:nvSpPr>
+        <p:spPr>
+          <a:xfrm>
+            <a:off x="4892040" y="1965960"/>
+            <a:ext cx="6355080" cy="3520440"/>
+          </a:xfrm>
+          <a:prstGeom prst="roundRect">
+            <a:avLst/>
+          </a:prstGeom>
+          <a:solidFill>
+            <a:srgbClr val="FFF7E0"/>
+          </a:solidFill>
+          <a:ln w="20320">
+            <a:solidFill>
+              <a:srgbClr val="1D4ED8"/>
+            </a:solidFill>
+          </a:ln>
+        </p:spPr>
+        <p:style>
+          <a:lnRef idx="1">
+            <a:schemeClr val="accent1"/>
+          </a:lnRef>
+          <a:fillRef idx="3">
+            <a:schemeClr val="accent1"/>
+          </a:fillRef>
+          <a:effectRef idx="2">
+            <a:schemeClr val="accent1"/>
+          </a:effectRef>
+          <a:fontRef idx="minor">
+            <a:schemeClr val="lt1"/>
+          </a:fontRef>
+        </p:style>
+        <p:txBody>
+          <a:bodyPr rtlCol="0" anchor="ctr"/>
+          <a:lstStyle/>
+          <a:p>
+            <a:pPr algn="ctr"/>
+          </a:p>
+        </p:txBody>
+      </p:sp>
+      <p:sp>
+        <p:nvSpPr>
+          <p:cNvPr id="19" name="TextBox 18"/>
+          <p:cNvSpPr txBox="1"/>
+          <p:nvPr/>
+        </p:nvSpPr>
+        <p:spPr>
+          <a:xfrm>
+            <a:off x="5257800" y="2267712"/>
+            <a:ext cx="5623560" cy="256032"/>
+          </a:xfrm>
+          <a:prstGeom prst="rect">
+            <a:avLst/>
+          </a:prstGeom>
+          <a:noFill/>
+        </p:spPr>
+        <p:txBody>
+          <a:bodyPr wrap="square" lIns="0" rIns="0" tIns="0" bIns="0">
+            <a:spAutoFit/>
+          </a:bodyPr>
+          <a:lstStyle/>
+          <a:p>
+            <a:pPr algn="ctr"/>
+            <a:r>
+              <a:rPr sz="1200" b="1">
+                <a:solidFill>
+                  <a:srgbClr val="1D4ED8"/>
+                </a:solidFill>
+                <a:latin typeface="Arial"/>
+              </a:rPr>
+              <a:t>OPENING QUESTION</a:t>
+            </a:r>
+          </a:p>
+        </p:txBody>
+      </p:sp>
+      <p:sp>
+        <p:nvSpPr>
+          <p:cNvPr id="20" name="TextBox 19"/>
+          <p:cNvSpPr txBox="1"/>
+          <p:nvPr/>
+        </p:nvSpPr>
+        <p:spPr>
+          <a:xfrm>
+            <a:off x="5285232" y="2788920"/>
+            <a:ext cx="5577840" cy="987552"/>
+          </a:xfrm>
+          <a:prstGeom prst="rect">
+            <a:avLst/>
+          </a:prstGeom>
+          <a:noFill/>
+        </p:spPr>
+        <p:txBody>
+          <a:bodyPr wrap="square" lIns="0" rIns="0" tIns="0" bIns="0">
+            <a:spAutoFit/>
+          </a:bodyPr>
+          <a:lstStyle/>
+          <a:p>
+            <a:pPr algn="ctr"/>
+            <a:r>
+              <a:rPr sz="2600" b="1">
                 <a:solidFill>
                   <a:srgbClr val="111827"/>
                 </a:solidFill>
@@ -3496,14 +3880,14 @@
       </p:sp>
       <p:sp>
         <p:nvSpPr>
-          <p:cNvPr id="12" name="TextBox 11"/>
+          <p:cNvPr id="21" name="TextBox 20"/>
           <p:cNvSpPr txBox="1"/>
           <p:nvPr/>
         </p:nvSpPr>
         <p:spPr>
           <a:xfrm>
-            <a:off x="1143000" y="5074920"/>
-            <a:ext cx="9921240" cy="320040"/>
+            <a:off x="5285232" y="4315968"/>
+            <a:ext cx="5577840" cy="411480"/>
           </a:xfrm>
           <a:prstGeom prst="rect">
             <a:avLst/>
@@ -3524,7 +3908,7 @@
                 </a:solidFill>
                 <a:latin typeface="Arial"/>
               </a:rPr>
-              <a:t>Think silently → pair talk → share one idea</a:t>
+              <a:t>First think alone. Then tell a partner one possible answer.</a:t>
             </a:r>
           </a:p>
         </p:txBody>
@@ -3729,7 +4113,93 @@
       </p:sp>
       <p:sp>
         <p:nvSpPr>
-          <p:cNvPr id="6" name="TextBox 5"/>
+          <p:cNvPr id="6" name="Rectangle 5"/>
+          <p:cNvSpPr/>
+          <p:nvPr/>
+        </p:nvSpPr>
+        <p:spPr>
+          <a:xfrm>
+            <a:off x="164592" y="6565392"/>
+            <a:ext cx="12027103" cy="73152"/>
+          </a:xfrm>
+          <a:prstGeom prst="rect">
+            <a:avLst/>
+          </a:prstGeom>
+          <a:solidFill>
+            <a:srgbClr val="FCD116"/>
+          </a:solidFill>
+          <a:ln>
+            <a:noFill/>
+          </a:ln>
+        </p:spPr>
+        <p:style>
+          <a:lnRef idx="1">
+            <a:schemeClr val="accent1"/>
+          </a:lnRef>
+          <a:fillRef idx="3">
+            <a:schemeClr val="accent1"/>
+          </a:fillRef>
+          <a:effectRef idx="2">
+            <a:schemeClr val="accent1"/>
+          </a:effectRef>
+          <a:fontRef idx="minor">
+            <a:schemeClr val="lt1"/>
+          </a:fontRef>
+        </p:style>
+        <p:txBody>
+          <a:bodyPr rtlCol="0" anchor="ctr"/>
+          <a:lstStyle/>
+          <a:p>
+            <a:pPr algn="ctr"/>
+          </a:p>
+        </p:txBody>
+      </p:sp>
+      <p:sp>
+        <p:nvSpPr>
+          <p:cNvPr id="7" name="Rectangle 6"/>
+          <p:cNvSpPr/>
+          <p:nvPr/>
+        </p:nvSpPr>
+        <p:spPr>
+          <a:xfrm>
+            <a:off x="164592" y="6638544"/>
+            <a:ext cx="12027103" cy="45720"/>
+          </a:xfrm>
+          <a:prstGeom prst="rect">
+            <a:avLst/>
+          </a:prstGeom>
+          <a:solidFill>
+            <a:srgbClr val="D90000"/>
+          </a:solidFill>
+          <a:ln>
+            <a:noFill/>
+          </a:ln>
+        </p:spPr>
+        <p:style>
+          <a:lnRef idx="1">
+            <a:schemeClr val="accent1"/>
+          </a:lnRef>
+          <a:fillRef idx="3">
+            <a:schemeClr val="accent1"/>
+          </a:fillRef>
+          <a:effectRef idx="2">
+            <a:schemeClr val="accent1"/>
+          </a:effectRef>
+          <a:fontRef idx="minor">
+            <a:schemeClr val="lt1"/>
+          </a:fontRef>
+        </p:style>
+        <p:txBody>
+          <a:bodyPr rtlCol="0" anchor="ctr"/>
+          <a:lstStyle/>
+          <a:p>
+            <a:pPr algn="ctr"/>
+          </a:p>
+        </p:txBody>
+      </p:sp>
+      <p:sp>
+        <p:nvSpPr>
+          <p:cNvPr id="8" name="TextBox 7"/>
           <p:cNvSpPr txBox="1"/>
           <p:nvPr/>
         </p:nvSpPr>
@@ -3763,7 +4233,7 @@
       </p:sp>
       <p:sp>
         <p:nvSpPr>
-          <p:cNvPr id="7" name="TextBox 6"/>
+          <p:cNvPr id="9" name="TextBox 8"/>
           <p:cNvSpPr txBox="1"/>
           <p:nvPr/>
         </p:nvSpPr>
@@ -3798,14 +4268,14 @@
       </p:sp>
       <p:sp>
         <p:nvSpPr>
-          <p:cNvPr id="8" name="TextBox 7"/>
+          <p:cNvPr id="10" name="TextBox 9"/>
           <p:cNvSpPr txBox="1"/>
           <p:nvPr/>
         </p:nvSpPr>
         <p:spPr>
           <a:xfrm>
-            <a:off x="594360" y="1042415"/>
-            <a:ext cx="11109960" cy="566928"/>
+            <a:off x="594360" y="1005840"/>
+            <a:ext cx="11064240" cy="512064"/>
           </a:xfrm>
           <a:prstGeom prst="rect">
             <a:avLst/>
@@ -3832,16 +4302,16 @@
       </p:sp>
       <p:sp>
         <p:nvSpPr>
-          <p:cNvPr id="9" name="Rectangle 8"/>
+          <p:cNvPr id="11" name="Rounded Rectangle 10"/>
           <p:cNvSpPr/>
           <p:nvPr/>
         </p:nvSpPr>
         <p:spPr>
           <a:xfrm>
-            <a:off x="685800" y="1874519"/>
-            <a:ext cx="10835640" cy="804672"/>
-          </a:xfrm>
-          <a:prstGeom prst="rect">
+            <a:off x="777240" y="1755648"/>
+            <a:ext cx="10652760" cy="822960"/>
+          </a:xfrm>
+          <a:prstGeom prst="roundRect">
             <a:avLst/>
           </a:prstGeom>
           <a:solidFill>
@@ -3879,23 +4349,23 @@
                 </a:solidFill>
                 <a:latin typeface="Arial"/>
               </a:rPr>
-              <a:t>Goal: I can define the Holy Spirit and recognize Him as the t...</a:t>
-            </a:r>
-          </a:p>
-        </p:txBody>
-      </p:sp>
-      <p:sp>
-        <p:nvSpPr>
-          <p:cNvPr id="10" name="Rectangle 9"/>
+              <a:t>Goal: I can define the Holy Spirit and recognize Him</a:t>
+            </a:r>
+          </a:p>
+        </p:txBody>
+      </p:sp>
+      <p:sp>
+        <p:nvSpPr>
+          <p:cNvPr id="12" name="Rounded Rectangle 11"/>
           <p:cNvSpPr/>
           <p:nvPr/>
         </p:nvSpPr>
         <p:spPr>
           <a:xfrm>
-            <a:off x="868680" y="2971800"/>
-            <a:ext cx="10378440" cy="713232"/>
-          </a:xfrm>
-          <a:prstGeom prst="rect">
+            <a:off x="777240" y="2971800"/>
+            <a:ext cx="2423160" cy="2103120"/>
+          </a:xfrm>
+          <a:prstGeom prst="roundRect">
             <a:avLst/>
           </a:prstGeom>
           <a:solidFill>
@@ -3931,14 +4401,14 @@
       </p:sp>
       <p:sp>
         <p:nvSpPr>
-          <p:cNvPr id="11" name="Rectangle 10"/>
+          <p:cNvPr id="13" name="Rectangle 12"/>
           <p:cNvSpPr/>
           <p:nvPr/>
         </p:nvSpPr>
         <p:spPr>
           <a:xfrm>
-            <a:off x="868680" y="2971800"/>
-            <a:ext cx="530352" cy="713232"/>
+            <a:off x="777240" y="2971800"/>
+            <a:ext cx="2423160" cy="164592"/>
           </a:xfrm>
           <a:prstGeom prst="rect">
             <a:avLst/>
@@ -3965,32 +4435,58 @@
           </a:fontRef>
         </p:style>
         <p:txBody>
-          <a:bodyPr rtlCol="0" anchor="ctr" wrap="square" lIns="101600" rIns="101600" tIns="38100" bIns="38100"/>
+          <a:bodyPr rtlCol="0" anchor="ctr"/>
+          <a:lstStyle/>
+          <a:p>
+            <a:pPr algn="ctr"/>
+          </a:p>
+        </p:txBody>
+      </p:sp>
+      <p:sp>
+        <p:nvSpPr>
+          <p:cNvPr id="14" name="TextBox 13"/>
+          <p:cNvSpPr txBox="1"/>
+          <p:nvPr/>
+        </p:nvSpPr>
+        <p:spPr>
+          <a:xfrm>
+            <a:off x="978408" y="3355848"/>
+            <a:ext cx="2020824" cy="320040"/>
+          </a:xfrm>
+          <a:prstGeom prst="rect">
+            <a:avLst/>
+          </a:prstGeom>
+          <a:noFill/>
+        </p:spPr>
+        <p:txBody>
+          <a:bodyPr wrap="square" lIns="0" rIns="0" tIns="0" bIns="0">
+            <a:spAutoFit/>
+          </a:bodyPr>
           <a:lstStyle/>
           <a:p>
             <a:pPr algn="ctr"/>
             <a:r>
               <a:rPr sz="1500" b="1">
                 <a:solidFill>
-                  <a:srgbClr val="FFFFFF"/>
+                  <a:srgbClr val="1B7F3A"/>
                 </a:solidFill>
                 <a:latin typeface="Arial"/>
               </a:rPr>
-              <a:t>1</a:t>
-            </a:r>
-          </a:p>
-        </p:txBody>
-      </p:sp>
-      <p:sp>
-        <p:nvSpPr>
-          <p:cNvPr id="12" name="TextBox 11"/>
+              <a:t>1  Learn</a:t>
+            </a:r>
+          </a:p>
+        </p:txBody>
+      </p:sp>
+      <p:sp>
+        <p:nvSpPr>
+          <p:cNvPr id="15" name="TextBox 14"/>
           <p:cNvSpPr txBox="1"/>
           <p:nvPr/>
         </p:nvSpPr>
         <p:spPr>
           <a:xfrm>
-            <a:off x="1572768" y="3118104"/>
-            <a:ext cx="9372600" cy="384048"/>
+            <a:off x="1005840" y="3922776"/>
+            <a:ext cx="1965960" cy="658368"/>
           </a:xfrm>
           <a:prstGeom prst="rect">
             <a:avLst/>
@@ -4003,30 +4499,31 @@
           </a:bodyPr>
           <a:lstStyle/>
           <a:p>
-            <a:r>
-              <a:rPr sz="1500" b="0">
+            <a:pPr algn="ctr"/>
+            <a:r>
+              <a:rPr sz="1400" b="1">
                 <a:solidFill>
                   <a:srgbClr val="111827"/>
                 </a:solidFill>
                 <a:latin typeface="Arial"/>
               </a:rPr>
-              <a:t>You will use: What is a Spirit?, Defining the Holy Spirit</a:t>
-            </a:r>
-          </a:p>
-        </p:txBody>
-      </p:sp>
-      <p:sp>
-        <p:nvSpPr>
-          <p:cNvPr id="13" name="Rectangle 12"/>
+              <a:t>Use: What is a Spirit?, Defining the Holy Spirit</a:t>
+            </a:r>
+          </a:p>
+        </p:txBody>
+      </p:sp>
+      <p:sp>
+        <p:nvSpPr>
+          <p:cNvPr id="16" name="Rounded Rectangle 15"/>
           <p:cNvSpPr/>
           <p:nvPr/>
         </p:nvSpPr>
         <p:spPr>
           <a:xfrm>
-            <a:off x="868680" y="3822191"/>
-            <a:ext cx="10378440" cy="713232"/>
-          </a:xfrm>
-          <a:prstGeom prst="rect">
+            <a:off x="3566160" y="2971800"/>
+            <a:ext cx="2423160" cy="2103120"/>
+          </a:xfrm>
+          <a:prstGeom prst="roundRect">
             <a:avLst/>
           </a:prstGeom>
           <a:solidFill>
@@ -4062,14 +4559,14 @@
       </p:sp>
       <p:sp>
         <p:nvSpPr>
-          <p:cNvPr id="14" name="Rectangle 13"/>
+          <p:cNvPr id="17" name="Rectangle 16"/>
           <p:cNvSpPr/>
           <p:nvPr/>
         </p:nvSpPr>
         <p:spPr>
           <a:xfrm>
-            <a:off x="868680" y="3822191"/>
-            <a:ext cx="530352" cy="713232"/>
+            <a:off x="3566160" y="2971800"/>
+            <a:ext cx="2423160" cy="164592"/>
           </a:xfrm>
           <a:prstGeom prst="rect">
             <a:avLst/>
@@ -4096,32 +4593,58 @@
           </a:fontRef>
         </p:style>
         <p:txBody>
-          <a:bodyPr rtlCol="0" anchor="ctr" wrap="square" lIns="101600" rIns="101600" tIns="38100" bIns="38100"/>
+          <a:bodyPr rtlCol="0" anchor="ctr"/>
+          <a:lstStyle/>
+          <a:p>
+            <a:pPr algn="ctr"/>
+          </a:p>
+        </p:txBody>
+      </p:sp>
+      <p:sp>
+        <p:nvSpPr>
+          <p:cNvPr id="18" name="TextBox 17"/>
+          <p:cNvSpPr txBox="1"/>
+          <p:nvPr/>
+        </p:nvSpPr>
+        <p:spPr>
+          <a:xfrm>
+            <a:off x="3767328" y="3355848"/>
+            <a:ext cx="2020824" cy="320040"/>
+          </a:xfrm>
+          <a:prstGeom prst="rect">
+            <a:avLst/>
+          </a:prstGeom>
+          <a:noFill/>
+        </p:spPr>
+        <p:txBody>
+          <a:bodyPr wrap="square" lIns="0" rIns="0" tIns="0" bIns="0">
+            <a:spAutoFit/>
+          </a:bodyPr>
           <a:lstStyle/>
           <a:p>
             <a:pPr algn="ctr"/>
             <a:r>
               <a:rPr sz="1500" b="1">
                 <a:solidFill>
-                  <a:srgbClr val="FFFFFF"/>
+                  <a:srgbClr val="1B7F3A"/>
                 </a:solidFill>
                 <a:latin typeface="Arial"/>
               </a:rPr>
-              <a:t>2</a:t>
-            </a:r>
-          </a:p>
-        </p:txBody>
-      </p:sp>
-      <p:sp>
-        <p:nvSpPr>
-          <p:cNvPr id="15" name="TextBox 14"/>
+              <a:t>2  Practise</a:t>
+            </a:r>
+          </a:p>
+        </p:txBody>
+      </p:sp>
+      <p:sp>
+        <p:nvSpPr>
+          <p:cNvPr id="19" name="TextBox 18"/>
           <p:cNvSpPr txBox="1"/>
           <p:nvPr/>
         </p:nvSpPr>
         <p:spPr>
           <a:xfrm>
-            <a:off x="1572768" y="3968496"/>
-            <a:ext cx="9372600" cy="384048"/>
+            <a:off x="3794760" y="3922776"/>
+            <a:ext cx="1965960" cy="658368"/>
           </a:xfrm>
           <a:prstGeom prst="rect">
             <a:avLst/>
@@ -4134,30 +4657,31 @@
           </a:bodyPr>
           <a:lstStyle/>
           <a:p>
-            <a:r>
-              <a:rPr sz="1500" b="0">
+            <a:pPr algn="ctr"/>
+            <a:r>
+              <a:rPr sz="1400" b="1">
                 <a:solidFill>
                   <a:srgbClr val="111827"/>
                 </a:solidFill>
                 <a:latin typeface="Arial"/>
               </a:rPr>
-              <a:t>Success: explain, try, and answer in your own words.</a:t>
-            </a:r>
-          </a:p>
-        </p:txBody>
-      </p:sp>
-      <p:sp>
-        <p:nvSpPr>
-          <p:cNvPr id="16" name="Rectangle 15"/>
+              <a:t>Show: answer with one reason or example.</a:t>
+            </a:r>
+          </a:p>
+        </p:txBody>
+      </p:sp>
+      <p:sp>
+        <p:nvSpPr>
+          <p:cNvPr id="20" name="Rounded Rectangle 19"/>
           <p:cNvSpPr/>
           <p:nvPr/>
         </p:nvSpPr>
         <p:spPr>
           <a:xfrm>
-            <a:off x="868680" y="4672584"/>
-            <a:ext cx="10378440" cy="713232"/>
-          </a:xfrm>
-          <a:prstGeom prst="rect">
+            <a:off x="6355079" y="2971800"/>
+            <a:ext cx="2423160" cy="2103120"/>
+          </a:xfrm>
+          <a:prstGeom prst="roundRect">
             <a:avLst/>
           </a:prstGeom>
           <a:solidFill>
@@ -4193,14 +4717,14 @@
       </p:sp>
       <p:sp>
         <p:nvSpPr>
-          <p:cNvPr id="17" name="Rectangle 16"/>
+          <p:cNvPr id="21" name="Rectangle 20"/>
           <p:cNvSpPr/>
           <p:nvPr/>
         </p:nvSpPr>
         <p:spPr>
           <a:xfrm>
-            <a:off x="868680" y="4672584"/>
-            <a:ext cx="530352" cy="713232"/>
+            <a:off x="6355079" y="2971800"/>
+            <a:ext cx="2423160" cy="164592"/>
           </a:xfrm>
           <a:prstGeom prst="rect">
             <a:avLst/>
@@ -4227,32 +4751,58 @@
           </a:fontRef>
         </p:style>
         <p:txBody>
-          <a:bodyPr rtlCol="0" anchor="ctr" wrap="square" lIns="101600" rIns="101600" tIns="38100" bIns="38100"/>
+          <a:bodyPr rtlCol="0" anchor="ctr"/>
+          <a:lstStyle/>
+          <a:p>
+            <a:pPr algn="ctr"/>
+          </a:p>
+        </p:txBody>
+      </p:sp>
+      <p:sp>
+        <p:nvSpPr>
+          <p:cNvPr id="22" name="TextBox 21"/>
+          <p:cNvSpPr txBox="1"/>
+          <p:nvPr/>
+        </p:nvSpPr>
+        <p:spPr>
+          <a:xfrm>
+            <a:off x="6556247" y="3355848"/>
+            <a:ext cx="2020824" cy="320040"/>
+          </a:xfrm>
+          <a:prstGeom prst="rect">
+            <a:avLst/>
+          </a:prstGeom>
+          <a:noFill/>
+        </p:spPr>
+        <p:txBody>
+          <a:bodyPr wrap="square" lIns="0" rIns="0" tIns="0" bIns="0">
+            <a:spAutoFit/>
+          </a:bodyPr>
           <a:lstStyle/>
           <a:p>
             <a:pPr algn="ctr"/>
             <a:r>
               <a:rPr sz="1500" b="1">
                 <a:solidFill>
-                  <a:srgbClr val="FFFFFF"/>
+                  <a:srgbClr val="1B7F3A"/>
                 </a:solidFill>
                 <a:latin typeface="Arial"/>
               </a:rPr>
-              <a:t>3</a:t>
-            </a:r>
-          </a:p>
-        </p:txBody>
-      </p:sp>
-      <p:sp>
-        <p:nvSpPr>
-          <p:cNvPr id="18" name="TextBox 17"/>
+              <a:t>3  Show</a:t>
+            </a:r>
+          </a:p>
+        </p:txBody>
+      </p:sp>
+      <p:sp>
+        <p:nvSpPr>
+          <p:cNvPr id="23" name="TextBox 22"/>
           <p:cNvSpPr txBox="1"/>
           <p:nvPr/>
         </p:nvSpPr>
         <p:spPr>
           <a:xfrm>
-            <a:off x="1572768" y="4818888"/>
-            <a:ext cx="9372600" cy="384048"/>
+            <a:off x="6583679" y="3922776"/>
+            <a:ext cx="1965960" cy="658368"/>
           </a:xfrm>
           <a:prstGeom prst="rect">
             <a:avLst/>
@@ -4265,30 +4815,31 @@
           </a:bodyPr>
           <a:lstStyle/>
           <a:p>
-            <a:r>
-              <a:rPr sz="1500" b="0">
+            <a:pPr algn="ctr"/>
+            <a:r>
+              <a:rPr sz="1400" b="1">
                 <a:solidFill>
                   <a:srgbClr val="111827"/>
                 </a:solidFill>
                 <a:latin typeface="Arial"/>
               </a:rPr>
-              <a:t>Write one clear response.</a:t>
-            </a:r>
-          </a:p>
-        </p:txBody>
-      </p:sp>
-      <p:sp>
-        <p:nvSpPr>
-          <p:cNvPr id="19" name="Rectangle 18"/>
+              <a:t>Routine: listen, talk, try, explain.</a:t>
+            </a:r>
+          </a:p>
+        </p:txBody>
+      </p:sp>
+      <p:sp>
+        <p:nvSpPr>
+          <p:cNvPr id="24" name="Rounded Rectangle 23"/>
           <p:cNvSpPr/>
           <p:nvPr/>
         </p:nvSpPr>
         <p:spPr>
           <a:xfrm>
-            <a:off x="868680" y="5522976"/>
-            <a:ext cx="10378440" cy="713232"/>
-          </a:xfrm>
-          <a:prstGeom prst="rect">
+            <a:off x="9143999" y="2971800"/>
+            <a:ext cx="2423160" cy="2103120"/>
+          </a:xfrm>
+          <a:prstGeom prst="roundRect">
             <a:avLst/>
           </a:prstGeom>
           <a:solidFill>
@@ -4324,14 +4875,14 @@
       </p:sp>
       <p:sp>
         <p:nvSpPr>
-          <p:cNvPr id="20" name="Rectangle 19"/>
+          <p:cNvPr id="25" name="Rectangle 24"/>
           <p:cNvSpPr/>
           <p:nvPr/>
         </p:nvSpPr>
         <p:spPr>
           <a:xfrm>
-            <a:off x="868680" y="5522976"/>
-            <a:ext cx="530352" cy="713232"/>
+            <a:off x="9143999" y="2971800"/>
+            <a:ext cx="2423160" cy="164592"/>
           </a:xfrm>
           <a:prstGeom prst="rect">
             <a:avLst/>
@@ -4358,32 +4909,58 @@
           </a:fontRef>
         </p:style>
         <p:txBody>
-          <a:bodyPr rtlCol="0" anchor="ctr" wrap="square" lIns="101600" rIns="101600" tIns="38100" bIns="38100"/>
+          <a:bodyPr rtlCol="0" anchor="ctr"/>
+          <a:lstStyle/>
+          <a:p>
+            <a:pPr algn="ctr"/>
+          </a:p>
+        </p:txBody>
+      </p:sp>
+      <p:sp>
+        <p:nvSpPr>
+          <p:cNvPr id="26" name="TextBox 25"/>
+          <p:cNvSpPr txBox="1"/>
+          <p:nvPr/>
+        </p:nvSpPr>
+        <p:spPr>
+          <a:xfrm>
+            <a:off x="9345167" y="3355848"/>
+            <a:ext cx="2020824" cy="320040"/>
+          </a:xfrm>
+          <a:prstGeom prst="rect">
+            <a:avLst/>
+          </a:prstGeom>
+          <a:noFill/>
+        </p:spPr>
+        <p:txBody>
+          <a:bodyPr wrap="square" lIns="0" rIns="0" tIns="0" bIns="0">
+            <a:spAutoFit/>
+          </a:bodyPr>
           <a:lstStyle/>
           <a:p>
             <a:pPr algn="ctr"/>
             <a:r>
               <a:rPr sz="1500" b="1">
                 <a:solidFill>
-                  <a:srgbClr val="FFFFFF"/>
+                  <a:srgbClr val="1B7F3A"/>
                 </a:solidFill>
                 <a:latin typeface="Arial"/>
               </a:rPr>
-              <a:t>4</a:t>
-            </a:r>
-          </a:p>
-        </p:txBody>
-      </p:sp>
-      <p:sp>
-        <p:nvSpPr>
-          <p:cNvPr id="21" name="TextBox 20"/>
+              <a:t>4  Reflect</a:t>
+            </a:r>
+          </a:p>
+        </p:txBody>
+      </p:sp>
+      <p:sp>
+        <p:nvSpPr>
+          <p:cNvPr id="27" name="TextBox 26"/>
           <p:cNvSpPr txBox="1"/>
           <p:nvPr/>
         </p:nvSpPr>
         <p:spPr>
           <a:xfrm>
-            <a:off x="1572768" y="5669280"/>
-            <a:ext cx="9372600" cy="384048"/>
+            <a:off x="9372599" y="3922776"/>
+            <a:ext cx="1965960" cy="658368"/>
           </a:xfrm>
           <a:prstGeom prst="rect">
             <a:avLst/>
@@ -4396,28 +4973,203 @@
           </a:bodyPr>
           <a:lstStyle/>
           <a:p>
-            <a:r>
-              <a:rPr sz="1500" b="0">
+            <a:pPr algn="ctr"/>
+            <a:r>
+              <a:rPr sz="1400" b="1">
                 <a:solidFill>
                   <a:srgbClr val="111827"/>
                 </a:solidFill>
                 <a:latin typeface="Arial"/>
               </a:rPr>
-              <a:t>Write one clear response.</a:t>
-            </a:r>
-          </a:p>
-        </p:txBody>
-      </p:sp>
-      <p:sp>
-        <p:nvSpPr>
-          <p:cNvPr id="22" name="TextBox 21"/>
+              <a:t>Explain in your own words.</a:t>
+            </a:r>
+          </a:p>
+        </p:txBody>
+      </p:sp>
+      <p:sp>
+        <p:nvSpPr>
+          <p:cNvPr id="28" name="Oval 27"/>
+          <p:cNvSpPr/>
+          <p:nvPr/>
+        </p:nvSpPr>
+        <p:spPr>
+          <a:xfrm>
+            <a:off x="5848502" y="5360212"/>
+            <a:ext cx="460857" cy="148132"/>
+          </a:xfrm>
+          <a:prstGeom prst="ellipse">
+            <a:avLst/>
+          </a:prstGeom>
+          <a:solidFill>
+            <a:srgbClr val="FCD116"/>
+          </a:solidFill>
+          <a:ln w="10160">
+            <a:solidFill>
+              <a:srgbClr val="D97706"/>
+            </a:solidFill>
+          </a:ln>
+        </p:spPr>
+        <p:style>
+          <a:lnRef idx="1">
+            <a:schemeClr val="accent1"/>
+          </a:lnRef>
+          <a:fillRef idx="3">
+            <a:schemeClr val="accent1"/>
+          </a:fillRef>
+          <a:effectRef idx="2">
+            <a:schemeClr val="accent1"/>
+          </a:effectRef>
+          <a:fontRef idx="minor">
+            <a:schemeClr val="lt1"/>
+          </a:fontRef>
+        </p:style>
+        <p:txBody>
+          <a:bodyPr rtlCol="0" anchor="ctr"/>
+          <a:lstStyle/>
+          <a:p>
+            <a:pPr algn="ctr"/>
+          </a:p>
+        </p:txBody>
+      </p:sp>
+      <p:sp>
+        <p:nvSpPr>
+          <p:cNvPr id="29" name="Rectangle 28"/>
+          <p:cNvSpPr/>
+          <p:nvPr/>
+        </p:nvSpPr>
+        <p:spPr>
+          <a:xfrm>
+            <a:off x="6002121" y="5508345"/>
+            <a:ext cx="153619" cy="345643"/>
+          </a:xfrm>
+          <a:prstGeom prst="rect">
+            <a:avLst/>
+          </a:prstGeom>
+          <a:solidFill>
+            <a:srgbClr val="D97706"/>
+          </a:solidFill>
+          <a:ln>
+            <a:noFill/>
+          </a:ln>
+        </p:spPr>
+        <p:style>
+          <a:lnRef idx="1">
+            <a:schemeClr val="accent1"/>
+          </a:lnRef>
+          <a:fillRef idx="3">
+            <a:schemeClr val="accent1"/>
+          </a:fillRef>
+          <a:effectRef idx="2">
+            <a:schemeClr val="accent1"/>
+          </a:effectRef>
+          <a:fontRef idx="minor">
+            <a:schemeClr val="lt1"/>
+          </a:fontRef>
+        </p:style>
+        <p:txBody>
+          <a:bodyPr rtlCol="0" anchor="ctr"/>
+          <a:lstStyle/>
+          <a:p>
+            <a:pPr algn="ctr"/>
+          </a:p>
+        </p:txBody>
+      </p:sp>
+      <p:sp>
+        <p:nvSpPr>
+          <p:cNvPr id="30" name="Rectangle 29"/>
+          <p:cNvSpPr/>
+          <p:nvPr/>
+        </p:nvSpPr>
+        <p:spPr>
+          <a:xfrm>
+            <a:off x="5694883" y="5607100"/>
+            <a:ext cx="768096" cy="41148"/>
+          </a:xfrm>
+          <a:prstGeom prst="rect">
+            <a:avLst/>
+          </a:prstGeom>
+          <a:solidFill>
+            <a:srgbClr val="D97706"/>
+          </a:solidFill>
+          <a:ln>
+            <a:noFill/>
+          </a:ln>
+        </p:spPr>
+        <p:style>
+          <a:lnRef idx="1">
+            <a:schemeClr val="accent1"/>
+          </a:lnRef>
+          <a:fillRef idx="3">
+            <a:schemeClr val="accent1"/>
+          </a:fillRef>
+          <a:effectRef idx="2">
+            <a:schemeClr val="accent1"/>
+          </a:effectRef>
+          <a:fontRef idx="minor">
+            <a:schemeClr val="lt1"/>
+          </a:fontRef>
+        </p:style>
+        <p:txBody>
+          <a:bodyPr rtlCol="0" anchor="ctr"/>
+          <a:lstStyle/>
+          <a:p>
+            <a:pPr algn="ctr"/>
+          </a:p>
+        </p:txBody>
+      </p:sp>
+      <p:sp>
+        <p:nvSpPr>
+          <p:cNvPr id="31" name="Rounded Rectangle 30"/>
+          <p:cNvSpPr/>
+          <p:nvPr/>
+        </p:nvSpPr>
+        <p:spPr>
+          <a:xfrm>
+            <a:off x="5387644" y="5788152"/>
+            <a:ext cx="1408176" cy="65836"/>
+          </a:xfrm>
+          <a:prstGeom prst="roundRect">
+            <a:avLst/>
+          </a:prstGeom>
+          <a:solidFill>
+            <a:srgbClr val="D90000"/>
+          </a:solidFill>
+          <a:ln>
+            <a:noFill/>
+          </a:ln>
+        </p:spPr>
+        <p:style>
+          <a:lnRef idx="1">
+            <a:schemeClr val="accent1"/>
+          </a:lnRef>
+          <a:fillRef idx="3">
+            <a:schemeClr val="accent1"/>
+          </a:fillRef>
+          <a:effectRef idx="2">
+            <a:schemeClr val="accent1"/>
+          </a:effectRef>
+          <a:fontRef idx="minor">
+            <a:schemeClr val="lt1"/>
+          </a:fontRef>
+        </p:style>
+        <p:txBody>
+          <a:bodyPr rtlCol="0" anchor="ctr"/>
+          <a:lstStyle/>
+          <a:p>
+            <a:pPr algn="ctr"/>
+          </a:p>
+        </p:txBody>
+      </p:sp>
+      <p:sp>
+        <p:nvSpPr>
+          <p:cNvPr id="32" name="TextBox 31"/>
           <p:cNvSpPr txBox="1"/>
           <p:nvPr/>
         </p:nvSpPr>
         <p:spPr>
           <a:xfrm>
-            <a:off x="685800" y="6419088"/>
-            <a:ext cx="10835640" cy="228600"/>
+            <a:off x="713232" y="6355080"/>
+            <a:ext cx="10835640" cy="219456"/>
           </a:xfrm>
           <a:prstGeom prst="rect">
             <a:avLst/>
@@ -4438,7 +5190,7 @@
                 </a:solidFill>
                 <a:latin typeface="Arial"/>
               </a:rPr>
-              <a:t>Listen • Talk • Try • Explain</a:t>
+              <a:t>P7 class flow: listen • talk • try • explain</a:t>
             </a:r>
           </a:p>
         </p:txBody>
@@ -4643,7 +5395,93 @@
       </p:sp>
       <p:sp>
         <p:nvSpPr>
-          <p:cNvPr id="6" name="TextBox 5"/>
+          <p:cNvPr id="6" name="Rectangle 5"/>
+          <p:cNvSpPr/>
+          <p:nvPr/>
+        </p:nvSpPr>
+        <p:spPr>
+          <a:xfrm>
+            <a:off x="164592" y="6565392"/>
+            <a:ext cx="12027103" cy="73152"/>
+          </a:xfrm>
+          <a:prstGeom prst="rect">
+            <a:avLst/>
+          </a:prstGeom>
+          <a:solidFill>
+            <a:srgbClr val="FCD116"/>
+          </a:solidFill>
+          <a:ln>
+            <a:noFill/>
+          </a:ln>
+        </p:spPr>
+        <p:style>
+          <a:lnRef idx="1">
+            <a:schemeClr val="accent1"/>
+          </a:lnRef>
+          <a:fillRef idx="3">
+            <a:schemeClr val="accent1"/>
+          </a:fillRef>
+          <a:effectRef idx="2">
+            <a:schemeClr val="accent1"/>
+          </a:effectRef>
+          <a:fontRef idx="minor">
+            <a:schemeClr val="lt1"/>
+          </a:fontRef>
+        </p:style>
+        <p:txBody>
+          <a:bodyPr rtlCol="0" anchor="ctr"/>
+          <a:lstStyle/>
+          <a:p>
+            <a:pPr algn="ctr"/>
+          </a:p>
+        </p:txBody>
+      </p:sp>
+      <p:sp>
+        <p:nvSpPr>
+          <p:cNvPr id="7" name="Rectangle 6"/>
+          <p:cNvSpPr/>
+          <p:nvPr/>
+        </p:nvSpPr>
+        <p:spPr>
+          <a:xfrm>
+            <a:off x="164592" y="6638544"/>
+            <a:ext cx="12027103" cy="45720"/>
+          </a:xfrm>
+          <a:prstGeom prst="rect">
+            <a:avLst/>
+          </a:prstGeom>
+          <a:solidFill>
+            <a:srgbClr val="D90000"/>
+          </a:solidFill>
+          <a:ln>
+            <a:noFill/>
+          </a:ln>
+        </p:spPr>
+        <p:style>
+          <a:lnRef idx="1">
+            <a:schemeClr val="accent1"/>
+          </a:lnRef>
+          <a:fillRef idx="3">
+            <a:schemeClr val="accent1"/>
+          </a:fillRef>
+          <a:effectRef idx="2">
+            <a:schemeClr val="accent1"/>
+          </a:effectRef>
+          <a:fontRef idx="minor">
+            <a:schemeClr val="lt1"/>
+          </a:fontRef>
+        </p:style>
+        <p:txBody>
+          <a:bodyPr rtlCol="0" anchor="ctr"/>
+          <a:lstStyle/>
+          <a:p>
+            <a:pPr algn="ctr"/>
+          </a:p>
+        </p:txBody>
+      </p:sp>
+      <p:sp>
+        <p:nvSpPr>
+          <p:cNvPr id="8" name="TextBox 7"/>
           <p:cNvSpPr txBox="1"/>
           <p:nvPr/>
         </p:nvSpPr>
@@ -4677,7 +5515,7 @@
       </p:sp>
       <p:sp>
         <p:nvSpPr>
-          <p:cNvPr id="7" name="TextBox 6"/>
+          <p:cNvPr id="9" name="TextBox 8"/>
           <p:cNvSpPr txBox="1"/>
           <p:nvPr/>
         </p:nvSpPr>
@@ -4712,14 +5550,14 @@
       </p:sp>
       <p:sp>
         <p:nvSpPr>
-          <p:cNvPr id="8" name="TextBox 7"/>
+          <p:cNvPr id="10" name="TextBox 9"/>
           <p:cNvSpPr txBox="1"/>
           <p:nvPr/>
         </p:nvSpPr>
         <p:spPr>
           <a:xfrm>
-            <a:off x="594360" y="1042415"/>
-            <a:ext cx="11109960" cy="566928"/>
+            <a:off x="594360" y="1005840"/>
+            <a:ext cx="11064240" cy="512064"/>
           </a:xfrm>
           <a:prstGeom prst="rect">
             <a:avLst/>
@@ -4746,22 +5584,22 @@
       </p:sp>
       <p:sp>
         <p:nvSpPr>
-          <p:cNvPr id="9" name="Rectangle 8"/>
+          <p:cNvPr id="11" name="Rounded Rectangle 10"/>
           <p:cNvSpPr/>
           <p:nvPr/>
         </p:nvSpPr>
         <p:spPr>
           <a:xfrm>
-            <a:off x="685800" y="1874519"/>
-            <a:ext cx="10835640" cy="804672"/>
-          </a:xfrm>
-          <a:prstGeom prst="rect">
-            <a:avLst/>
-          </a:prstGeom>
-          <a:solidFill>
-            <a:srgbClr val="FFF7E0"/>
-          </a:solidFill>
-          <a:ln w="17780">
+            <a:off x="822960" y="1874519"/>
+            <a:ext cx="3154680" cy="3977639"/>
+          </a:xfrm>
+          <a:prstGeom prst="roundRect">
+            <a:avLst/>
+          </a:prstGeom>
+          <a:solidFill>
+            <a:srgbClr val="FFFFFF"/>
+          </a:solidFill>
+          <a:ln w="16510">
             <a:solidFill>
               <a:srgbClr val="7C3AED"/>
             </a:solidFill>
@@ -4782,79 +5620,25 @@
           </a:fontRef>
         </p:style>
         <p:txBody>
-          <a:bodyPr rtlCol="0" anchor="ctr" wrap="square" lIns="101600" rIns="101600" tIns="38100" bIns="38100"/>
-          <a:lstStyle/>
-          <a:p>
-            <a:pPr algn="ctr"/>
-            <a:r>
-              <a:rPr sz="1900" b="1">
-                <a:solidFill>
-                  <a:srgbClr val="111827"/>
-                </a:solidFill>
-                <a:latin typeface="Arial"/>
-              </a:rPr>
-              <a:t>Think: Can you see the wind?</a:t>
-            </a:r>
-          </a:p>
-        </p:txBody>
-      </p:sp>
-      <p:sp>
-        <p:nvSpPr>
-          <p:cNvPr id="10" name="Rectangle 9"/>
+          <a:bodyPr rtlCol="0" anchor="ctr"/>
+          <a:lstStyle/>
+          <a:p>
+            <a:pPr algn="ctr"/>
+          </a:p>
+        </p:txBody>
+      </p:sp>
+      <p:sp>
+        <p:nvSpPr>
+          <p:cNvPr id="12" name="Oval 11"/>
           <p:cNvSpPr/>
           <p:nvPr/>
         </p:nvSpPr>
         <p:spPr>
           <a:xfrm>
-            <a:off x="868680" y="2971800"/>
-            <a:ext cx="10378440" cy="713232"/>
-          </a:xfrm>
-          <a:prstGeom prst="rect">
-            <a:avLst/>
-          </a:prstGeom>
-          <a:solidFill>
-            <a:srgbClr val="FFFFFF"/>
-          </a:solidFill>
-          <a:ln w="11430">
-            <a:solidFill>
-              <a:srgbClr val="CBD5E1"/>
-            </a:solidFill>
-          </a:ln>
-        </p:spPr>
-        <p:style>
-          <a:lnRef idx="1">
-            <a:schemeClr val="accent1"/>
-          </a:lnRef>
-          <a:fillRef idx="3">
-            <a:schemeClr val="accent1"/>
-          </a:fillRef>
-          <a:effectRef idx="2">
-            <a:schemeClr val="accent1"/>
-          </a:effectRef>
-          <a:fontRef idx="minor">
-            <a:schemeClr val="lt1"/>
-          </a:fontRef>
-        </p:style>
-        <p:txBody>
-          <a:bodyPr rtlCol="0" anchor="ctr"/>
-          <a:lstStyle/>
-          <a:p>
-            <a:pPr algn="ctr"/>
-          </a:p>
-        </p:txBody>
-      </p:sp>
-      <p:sp>
-        <p:nvSpPr>
-          <p:cNvPr id="11" name="Rectangle 10"/>
-          <p:cNvSpPr/>
-          <p:nvPr/>
-        </p:nvSpPr>
-        <p:spPr>
-          <a:xfrm>
-            <a:off x="868680" y="2971800"/>
-            <a:ext cx="530352" cy="713232"/>
-          </a:xfrm>
-          <a:prstGeom prst="rect">
+            <a:off x="2029968" y="2148840"/>
+            <a:ext cx="713232" cy="713232"/>
+          </a:xfrm>
+          <a:prstGeom prst="ellipse">
             <a:avLst/>
           </a:prstGeom>
           <a:solidFill>
@@ -4897,14 +5681,14 @@
       </p:sp>
       <p:sp>
         <p:nvSpPr>
-          <p:cNvPr id="12" name="TextBox 11"/>
+          <p:cNvPr id="13" name="TextBox 12"/>
           <p:cNvSpPr txBox="1"/>
           <p:nvPr/>
         </p:nvSpPr>
         <p:spPr>
           <a:xfrm>
-            <a:off x="1572768" y="3118104"/>
-            <a:ext cx="9372600" cy="384048"/>
+            <a:off x="1143000" y="2999232"/>
+            <a:ext cx="2514600" cy="310896"/>
           </a:xfrm>
           <a:prstGeom prst="rect">
             <a:avLst/>
@@ -4917,38 +5701,109 @@
           </a:bodyPr>
           <a:lstStyle/>
           <a:p>
-            <a:r>
-              <a:rPr sz="1500" b="0">
+            <a:pPr algn="ctr"/>
+            <a:r>
+              <a:rPr sz="1600" b="1">
+                <a:solidFill>
+                  <a:srgbClr val="7C3AED"/>
+                </a:solidFill>
+                <a:latin typeface="Arial"/>
+              </a:rPr>
+              <a:t>THINK</a:t>
+            </a:r>
+          </a:p>
+        </p:txBody>
+      </p:sp>
+      <p:sp>
+        <p:nvSpPr>
+          <p:cNvPr id="14" name="TextBox 13"/>
+          <p:cNvSpPr txBox="1"/>
+          <p:nvPr/>
+        </p:nvSpPr>
+        <p:spPr>
+          <a:xfrm>
+            <a:off x="1143000" y="3657600"/>
+            <a:ext cx="2514600" cy="960120"/>
+          </a:xfrm>
+          <a:prstGeom prst="rect">
+            <a:avLst/>
+          </a:prstGeom>
+          <a:noFill/>
+        </p:spPr>
+        <p:txBody>
+          <a:bodyPr wrap="square" lIns="0" rIns="0" tIns="0" bIns="0">
+            <a:spAutoFit/>
+          </a:bodyPr>
+          <a:lstStyle/>
+          <a:p>
+            <a:pPr algn="ctr"/>
+            <a:r>
+              <a:rPr sz="1800" b="1">
                 <a:solidFill>
                   <a:srgbClr val="111827"/>
                 </a:solidFill>
                 <a:latin typeface="Arial"/>
               </a:rPr>
-              <a:t>Pair: compare your first answer with a partner.</a:t>
-            </a:r>
-          </a:p>
-        </p:txBody>
-      </p:sp>
-      <p:sp>
-        <p:nvSpPr>
-          <p:cNvPr id="13" name="Rectangle 12"/>
+              <a:t>Can you see the wind?</a:t>
+            </a:r>
+          </a:p>
+        </p:txBody>
+      </p:sp>
+      <p:sp>
+        <p:nvSpPr>
+          <p:cNvPr id="15" name="TextBox 14"/>
+          <p:cNvSpPr txBox="1"/>
+          <p:nvPr/>
+        </p:nvSpPr>
+        <p:spPr>
+          <a:xfrm>
+            <a:off x="1143000" y="5166360"/>
+            <a:ext cx="2514600" cy="274320"/>
+          </a:xfrm>
+          <a:prstGeom prst="rect">
+            <a:avLst/>
+          </a:prstGeom>
+          <a:noFill/>
+        </p:spPr>
+        <p:txBody>
+          <a:bodyPr wrap="square" lIns="0" rIns="0" tIns="0" bIns="0">
+            <a:spAutoFit/>
+          </a:bodyPr>
+          <a:lstStyle/>
+          <a:p>
+            <a:pPr algn="ctr"/>
+            <a:r>
+              <a:rPr sz="1100" b="0">
+                <a:solidFill>
+                  <a:srgbClr val="475569"/>
+                </a:solidFill>
+                <a:latin typeface="Arial"/>
+              </a:rPr>
+              <a:t>30 seconds</a:t>
+            </a:r>
+          </a:p>
+        </p:txBody>
+      </p:sp>
+      <p:sp>
+        <p:nvSpPr>
+          <p:cNvPr id="16" name="Rounded Rectangle 15"/>
           <p:cNvSpPr/>
           <p:nvPr/>
         </p:nvSpPr>
         <p:spPr>
           <a:xfrm>
-            <a:off x="868680" y="3822191"/>
-            <a:ext cx="10378440" cy="713232"/>
-          </a:xfrm>
-          <a:prstGeom prst="rect">
+            <a:off x="4526280" y="1874519"/>
+            <a:ext cx="3154680" cy="3977639"/>
+          </a:xfrm>
+          <a:prstGeom prst="roundRect">
             <a:avLst/>
           </a:prstGeom>
           <a:solidFill>
             <a:srgbClr val="FFFFFF"/>
           </a:solidFill>
-          <a:ln w="11430">
+          <a:ln w="16510">
             <a:solidFill>
-              <a:srgbClr val="CBD5E1"/>
+              <a:srgbClr val="7C3AED"/>
             </a:solidFill>
           </a:ln>
         </p:spPr>
@@ -4976,16 +5831,16 @@
       </p:sp>
       <p:sp>
         <p:nvSpPr>
-          <p:cNvPr id="14" name="Rectangle 13"/>
+          <p:cNvPr id="17" name="Oval 16"/>
           <p:cNvSpPr/>
           <p:nvPr/>
         </p:nvSpPr>
         <p:spPr>
           <a:xfrm>
-            <a:off x="868680" y="3822191"/>
-            <a:ext cx="530352" cy="713232"/>
-          </a:xfrm>
-          <a:prstGeom prst="rect">
+            <a:off x="5733288" y="2148840"/>
+            <a:ext cx="713232" cy="713232"/>
+          </a:xfrm>
+          <a:prstGeom prst="ellipse">
             <a:avLst/>
           </a:prstGeom>
           <a:solidFill>
@@ -5028,14 +5883,14 @@
       </p:sp>
       <p:sp>
         <p:nvSpPr>
-          <p:cNvPr id="15" name="TextBox 14"/>
+          <p:cNvPr id="18" name="TextBox 17"/>
           <p:cNvSpPr txBox="1"/>
           <p:nvPr/>
         </p:nvSpPr>
         <p:spPr>
           <a:xfrm>
-            <a:off x="1572768" y="3968496"/>
-            <a:ext cx="9372600" cy="384048"/>
+            <a:off x="4846320" y="2999232"/>
+            <a:ext cx="2514600" cy="310896"/>
           </a:xfrm>
           <a:prstGeom prst="rect">
             <a:avLst/>
@@ -5048,38 +5903,109 @@
           </a:bodyPr>
           <a:lstStyle/>
           <a:p>
-            <a:r>
-              <a:rPr sz="1500" b="0">
+            <a:pPr algn="ctr"/>
+            <a:r>
+              <a:rPr sz="1600" b="1">
+                <a:solidFill>
+                  <a:srgbClr val="7C3AED"/>
+                </a:solidFill>
+                <a:latin typeface="Arial"/>
+              </a:rPr>
+              <a:t>PAIR</a:t>
+            </a:r>
+          </a:p>
+        </p:txBody>
+      </p:sp>
+      <p:sp>
+        <p:nvSpPr>
+          <p:cNvPr id="19" name="TextBox 18"/>
+          <p:cNvSpPr txBox="1"/>
+          <p:nvPr/>
+        </p:nvSpPr>
+        <p:spPr>
+          <a:xfrm>
+            <a:off x="4846320" y="3657600"/>
+            <a:ext cx="2514600" cy="960120"/>
+          </a:xfrm>
+          <a:prstGeom prst="rect">
+            <a:avLst/>
+          </a:prstGeom>
+          <a:noFill/>
+        </p:spPr>
+        <p:txBody>
+          <a:bodyPr wrap="square" lIns="0" rIns="0" tIns="0" bIns="0">
+            <a:spAutoFit/>
+          </a:bodyPr>
+          <a:lstStyle/>
+          <a:p>
+            <a:pPr algn="ctr"/>
+            <a:r>
+              <a:rPr sz="1800" b="1">
                 <a:solidFill>
                   <a:srgbClr val="111827"/>
                 </a:solidFill>
                 <a:latin typeface="Arial"/>
               </a:rPr>
-              <a:t>Share: connect your answer to What is a Spirit?.</a:t>
-            </a:r>
-          </a:p>
-        </p:txBody>
-      </p:sp>
-      <p:sp>
-        <p:nvSpPr>
-          <p:cNvPr id="16" name="Rectangle 15"/>
+              <a:t>compare your first answer with a partner.</a:t>
+            </a:r>
+          </a:p>
+        </p:txBody>
+      </p:sp>
+      <p:sp>
+        <p:nvSpPr>
+          <p:cNvPr id="20" name="TextBox 19"/>
+          <p:cNvSpPr txBox="1"/>
+          <p:nvPr/>
+        </p:nvSpPr>
+        <p:spPr>
+          <a:xfrm>
+            <a:off x="4846320" y="5166360"/>
+            <a:ext cx="2514600" cy="274320"/>
+          </a:xfrm>
+          <a:prstGeom prst="rect">
+            <a:avLst/>
+          </a:prstGeom>
+          <a:noFill/>
+        </p:spPr>
+        <p:txBody>
+          <a:bodyPr wrap="square" lIns="0" rIns="0" tIns="0" bIns="0">
+            <a:spAutoFit/>
+          </a:bodyPr>
+          <a:lstStyle/>
+          <a:p>
+            <a:pPr algn="ctr"/>
+            <a:r>
+              <a:rPr sz="1100" b="0">
+                <a:solidFill>
+                  <a:srgbClr val="475569"/>
+                </a:solidFill>
+                <a:latin typeface="Arial"/>
+              </a:rPr>
+              <a:t>with partner</a:t>
+            </a:r>
+          </a:p>
+        </p:txBody>
+      </p:sp>
+      <p:sp>
+        <p:nvSpPr>
+          <p:cNvPr id="21" name="Rounded Rectangle 20"/>
           <p:cNvSpPr/>
           <p:nvPr/>
         </p:nvSpPr>
         <p:spPr>
           <a:xfrm>
-            <a:off x="868680" y="4672584"/>
-            <a:ext cx="10378440" cy="713232"/>
-          </a:xfrm>
-          <a:prstGeom prst="rect">
+            <a:off x="8229600" y="1874519"/>
+            <a:ext cx="3154680" cy="3977639"/>
+          </a:xfrm>
+          <a:prstGeom prst="roundRect">
             <a:avLst/>
           </a:prstGeom>
           <a:solidFill>
             <a:srgbClr val="FFFFFF"/>
           </a:solidFill>
-          <a:ln w="11430">
+          <a:ln w="16510">
             <a:solidFill>
-              <a:srgbClr val="CBD5E1"/>
+              <a:srgbClr val="7C3AED"/>
             </a:solidFill>
           </a:ln>
         </p:spPr>
@@ -5107,16 +6033,16 @@
       </p:sp>
       <p:sp>
         <p:nvSpPr>
-          <p:cNvPr id="17" name="Rectangle 16"/>
+          <p:cNvPr id="22" name="Oval 21"/>
           <p:cNvSpPr/>
           <p:nvPr/>
         </p:nvSpPr>
         <p:spPr>
           <a:xfrm>
-            <a:off x="868680" y="4672584"/>
-            <a:ext cx="530352" cy="713232"/>
-          </a:xfrm>
-          <a:prstGeom prst="rect">
+            <a:off x="9436608" y="2148840"/>
+            <a:ext cx="713232" cy="713232"/>
+          </a:xfrm>
+          <a:prstGeom prst="ellipse">
             <a:avLst/>
           </a:prstGeom>
           <a:solidFill>
@@ -5159,14 +6085,14 @@
       </p:sp>
       <p:sp>
         <p:nvSpPr>
-          <p:cNvPr id="18" name="TextBox 17"/>
+          <p:cNvPr id="23" name="TextBox 22"/>
           <p:cNvSpPr txBox="1"/>
           <p:nvPr/>
         </p:nvSpPr>
         <p:spPr>
           <a:xfrm>
-            <a:off x="1572768" y="4818888"/>
-            <a:ext cx="9372600" cy="384048"/>
+            <a:off x="8549640" y="2999232"/>
+            <a:ext cx="2514600" cy="310896"/>
           </a:xfrm>
           <a:prstGeom prst="rect">
             <a:avLst/>
@@ -5179,159 +6105,99 @@
           </a:bodyPr>
           <a:lstStyle/>
           <a:p>
-            <a:r>
-              <a:rPr sz="1500" b="0">
+            <a:pPr algn="ctr"/>
+            <a:r>
+              <a:rPr sz="1600" b="1">
+                <a:solidFill>
+                  <a:srgbClr val="7C3AED"/>
+                </a:solidFill>
+                <a:latin typeface="Arial"/>
+              </a:rPr>
+              <a:t>SHARE</a:t>
+            </a:r>
+          </a:p>
+        </p:txBody>
+      </p:sp>
+      <p:sp>
+        <p:nvSpPr>
+          <p:cNvPr id="24" name="TextBox 23"/>
+          <p:cNvSpPr txBox="1"/>
+          <p:nvPr/>
+        </p:nvSpPr>
+        <p:spPr>
+          <a:xfrm>
+            <a:off x="8549640" y="3657600"/>
+            <a:ext cx="2514600" cy="960120"/>
+          </a:xfrm>
+          <a:prstGeom prst="rect">
+            <a:avLst/>
+          </a:prstGeom>
+          <a:noFill/>
+        </p:spPr>
+        <p:txBody>
+          <a:bodyPr wrap="square" lIns="0" rIns="0" tIns="0" bIns="0">
+            <a:spAutoFit/>
+          </a:bodyPr>
+          <a:lstStyle/>
+          <a:p>
+            <a:pPr algn="ctr"/>
+            <a:r>
+              <a:rPr sz="1800" b="1">
                 <a:solidFill>
                   <a:srgbClr val="111827"/>
                 </a:solidFill>
                 <a:latin typeface="Arial"/>
               </a:rPr>
-              <a:t>Write one clear response.</a:t>
-            </a:r>
-          </a:p>
-        </p:txBody>
-      </p:sp>
-      <p:sp>
-        <p:nvSpPr>
-          <p:cNvPr id="19" name="Rectangle 18"/>
-          <p:cNvSpPr/>
-          <p:nvPr/>
-        </p:nvSpPr>
-        <p:spPr>
-          <a:xfrm>
-            <a:off x="868680" y="5522976"/>
-            <a:ext cx="10378440" cy="713232"/>
-          </a:xfrm>
-          <a:prstGeom prst="rect">
-            <a:avLst/>
-          </a:prstGeom>
-          <a:solidFill>
-            <a:srgbClr val="FFFFFF"/>
-          </a:solidFill>
-          <a:ln w="11430">
-            <a:solidFill>
-              <a:srgbClr val="CBD5E1"/>
-            </a:solidFill>
-          </a:ln>
-        </p:spPr>
-        <p:style>
-          <a:lnRef idx="1">
-            <a:schemeClr val="accent1"/>
-          </a:lnRef>
-          <a:fillRef idx="3">
-            <a:schemeClr val="accent1"/>
-          </a:fillRef>
-          <a:effectRef idx="2">
-            <a:schemeClr val="accent1"/>
-          </a:effectRef>
-          <a:fontRef idx="minor">
-            <a:schemeClr val="lt1"/>
-          </a:fontRef>
-        </p:style>
-        <p:txBody>
-          <a:bodyPr rtlCol="0" anchor="ctr"/>
-          <a:lstStyle/>
-          <a:p>
-            <a:pPr algn="ctr"/>
-          </a:p>
-        </p:txBody>
-      </p:sp>
-      <p:sp>
-        <p:nvSpPr>
-          <p:cNvPr id="20" name="Rectangle 19"/>
-          <p:cNvSpPr/>
-          <p:nvPr/>
-        </p:nvSpPr>
-        <p:spPr>
-          <a:xfrm>
-            <a:off x="868680" y="5522976"/>
-            <a:ext cx="530352" cy="713232"/>
-          </a:xfrm>
-          <a:prstGeom prst="rect">
-            <a:avLst/>
-          </a:prstGeom>
-          <a:solidFill>
-            <a:srgbClr val="7C3AED"/>
-          </a:solidFill>
-          <a:ln>
-            <a:noFill/>
-          </a:ln>
-        </p:spPr>
-        <p:style>
-          <a:lnRef idx="1">
-            <a:schemeClr val="accent1"/>
-          </a:lnRef>
-          <a:fillRef idx="3">
-            <a:schemeClr val="accent1"/>
-          </a:fillRef>
-          <a:effectRef idx="2">
-            <a:schemeClr val="accent1"/>
-          </a:effectRef>
-          <a:fontRef idx="minor">
-            <a:schemeClr val="lt1"/>
-          </a:fontRef>
-        </p:style>
-        <p:txBody>
-          <a:bodyPr rtlCol="0" anchor="ctr" wrap="square" lIns="101600" rIns="101600" tIns="38100" bIns="38100"/>
-          <a:lstStyle/>
-          <a:p>
-            <a:pPr algn="ctr"/>
-            <a:r>
-              <a:rPr sz="1500" b="1">
+              <a:t>connect your answer to What is a Spirit?.</a:t>
+            </a:r>
+          </a:p>
+        </p:txBody>
+      </p:sp>
+      <p:sp>
+        <p:nvSpPr>
+          <p:cNvPr id="25" name="TextBox 24"/>
+          <p:cNvSpPr txBox="1"/>
+          <p:nvPr/>
+        </p:nvSpPr>
+        <p:spPr>
+          <a:xfrm>
+            <a:off x="8549640" y="5166360"/>
+            <a:ext cx="2514600" cy="274320"/>
+          </a:xfrm>
+          <a:prstGeom prst="rect">
+            <a:avLst/>
+          </a:prstGeom>
+          <a:noFill/>
+        </p:spPr>
+        <p:txBody>
+          <a:bodyPr wrap="square" lIns="0" rIns="0" tIns="0" bIns="0">
+            <a:spAutoFit/>
+          </a:bodyPr>
+          <a:lstStyle/>
+          <a:p>
+            <a:pPr algn="ctr"/>
+            <a:r>
+              <a:rPr sz="1100" b="0">
                 <a:solidFill>
-                  <a:srgbClr val="FFFFFF"/>
+                  <a:srgbClr val="475569"/>
                 </a:solidFill>
                 <a:latin typeface="Arial"/>
               </a:rPr>
-              <a:t>4</a:t>
-            </a:r>
-          </a:p>
-        </p:txBody>
-      </p:sp>
-      <p:sp>
-        <p:nvSpPr>
-          <p:cNvPr id="21" name="TextBox 20"/>
+              <a:t>whole class</a:t>
+            </a:r>
+          </a:p>
+        </p:txBody>
+      </p:sp>
+      <p:sp>
+        <p:nvSpPr>
+          <p:cNvPr id="26" name="TextBox 25"/>
           <p:cNvSpPr txBox="1"/>
           <p:nvPr/>
         </p:nvSpPr>
         <p:spPr>
           <a:xfrm>
-            <a:off x="1572768" y="5669280"/>
-            <a:ext cx="9372600" cy="384048"/>
-          </a:xfrm>
-          <a:prstGeom prst="rect">
-            <a:avLst/>
-          </a:prstGeom>
-          <a:noFill/>
-        </p:spPr>
-        <p:txBody>
-          <a:bodyPr wrap="square" lIns="0" rIns="0" tIns="0" bIns="0">
-            <a:spAutoFit/>
-          </a:bodyPr>
-          <a:lstStyle/>
-          <a:p>
-            <a:r>
-              <a:rPr sz="1500" b="0">
-                <a:solidFill>
-                  <a:srgbClr val="111827"/>
-                </a:solidFill>
-                <a:latin typeface="Arial"/>
-              </a:rPr>
-              <a:t>Write one clear response.</a:t>
-            </a:r>
-          </a:p>
-        </p:txBody>
-      </p:sp>
-      <p:sp>
-        <p:nvSpPr>
-          <p:cNvPr id="22" name="TextBox 21"/>
-          <p:cNvSpPr txBox="1"/>
-          <p:nvPr/>
-        </p:nvSpPr>
-        <p:spPr>
-          <a:xfrm>
-            <a:off x="685800" y="6419088"/>
-            <a:ext cx="10835640" cy="228600"/>
+            <a:off x="713232" y="6355080"/>
+            <a:ext cx="10835640" cy="219456"/>
           </a:xfrm>
           <a:prstGeom prst="rect">
             <a:avLst/>
@@ -5352,7 +6218,7 @@
                 </a:solidFill>
                 <a:latin typeface="Arial"/>
               </a:rPr>
-              <a:t>Listen • Talk • Try • Explain</a:t>
+              <a:t>P7 class flow: listen • talk • try • explain</a:t>
             </a:r>
           </a:p>
         </p:txBody>
@@ -5557,7 +6423,93 @@
       </p:sp>
       <p:sp>
         <p:nvSpPr>
-          <p:cNvPr id="6" name="TextBox 5"/>
+          <p:cNvPr id="6" name="Rectangle 5"/>
+          <p:cNvSpPr/>
+          <p:nvPr/>
+        </p:nvSpPr>
+        <p:spPr>
+          <a:xfrm>
+            <a:off x="164592" y="6565392"/>
+            <a:ext cx="12027103" cy="73152"/>
+          </a:xfrm>
+          <a:prstGeom prst="rect">
+            <a:avLst/>
+          </a:prstGeom>
+          <a:solidFill>
+            <a:srgbClr val="FCD116"/>
+          </a:solidFill>
+          <a:ln>
+            <a:noFill/>
+          </a:ln>
+        </p:spPr>
+        <p:style>
+          <a:lnRef idx="1">
+            <a:schemeClr val="accent1"/>
+          </a:lnRef>
+          <a:fillRef idx="3">
+            <a:schemeClr val="accent1"/>
+          </a:fillRef>
+          <a:effectRef idx="2">
+            <a:schemeClr val="accent1"/>
+          </a:effectRef>
+          <a:fontRef idx="minor">
+            <a:schemeClr val="lt1"/>
+          </a:fontRef>
+        </p:style>
+        <p:txBody>
+          <a:bodyPr rtlCol="0" anchor="ctr"/>
+          <a:lstStyle/>
+          <a:p>
+            <a:pPr algn="ctr"/>
+          </a:p>
+        </p:txBody>
+      </p:sp>
+      <p:sp>
+        <p:nvSpPr>
+          <p:cNvPr id="7" name="Rectangle 6"/>
+          <p:cNvSpPr/>
+          <p:nvPr/>
+        </p:nvSpPr>
+        <p:spPr>
+          <a:xfrm>
+            <a:off x="164592" y="6638544"/>
+            <a:ext cx="12027103" cy="45720"/>
+          </a:xfrm>
+          <a:prstGeom prst="rect">
+            <a:avLst/>
+          </a:prstGeom>
+          <a:solidFill>
+            <a:srgbClr val="D90000"/>
+          </a:solidFill>
+          <a:ln>
+            <a:noFill/>
+          </a:ln>
+        </p:spPr>
+        <p:style>
+          <a:lnRef idx="1">
+            <a:schemeClr val="accent1"/>
+          </a:lnRef>
+          <a:fillRef idx="3">
+            <a:schemeClr val="accent1"/>
+          </a:fillRef>
+          <a:effectRef idx="2">
+            <a:schemeClr val="accent1"/>
+          </a:effectRef>
+          <a:fontRef idx="minor">
+            <a:schemeClr val="lt1"/>
+          </a:fontRef>
+        </p:style>
+        <p:txBody>
+          <a:bodyPr rtlCol="0" anchor="ctr"/>
+          <a:lstStyle/>
+          <a:p>
+            <a:pPr algn="ctr"/>
+          </a:p>
+        </p:txBody>
+      </p:sp>
+      <p:sp>
+        <p:nvSpPr>
+          <p:cNvPr id="8" name="TextBox 7"/>
           <p:cNvSpPr txBox="1"/>
           <p:nvPr/>
         </p:nvSpPr>
@@ -5591,7 +6543,7 @@
       </p:sp>
       <p:sp>
         <p:nvSpPr>
-          <p:cNvPr id="7" name="TextBox 6"/>
+          <p:cNvPr id="9" name="TextBox 8"/>
           <p:cNvSpPr txBox="1"/>
           <p:nvPr/>
         </p:nvSpPr>
@@ -5626,14 +6578,14 @@
       </p:sp>
       <p:sp>
         <p:nvSpPr>
-          <p:cNvPr id="8" name="TextBox 7"/>
+          <p:cNvPr id="10" name="TextBox 9"/>
           <p:cNvSpPr txBox="1"/>
           <p:nvPr/>
         </p:nvSpPr>
         <p:spPr>
           <a:xfrm>
-            <a:off x="594360" y="1042415"/>
-            <a:ext cx="11109960" cy="566928"/>
+            <a:off x="594360" y="1005840"/>
+            <a:ext cx="11064240" cy="512064"/>
           </a:xfrm>
           <a:prstGeom prst="rect">
             <a:avLst/>
@@ -5660,22 +6612,22 @@
       </p:sp>
       <p:sp>
         <p:nvSpPr>
-          <p:cNvPr id="9" name="Rectangle 8"/>
+          <p:cNvPr id="11" name="Rounded Rectangle 10"/>
           <p:cNvSpPr/>
           <p:nvPr/>
         </p:nvSpPr>
         <p:spPr>
           <a:xfrm>
-            <a:off x="685800" y="1874519"/>
-            <a:ext cx="10835640" cy="804672"/>
-          </a:xfrm>
-          <a:prstGeom prst="rect">
+            <a:off x="777240" y="1828800"/>
+            <a:ext cx="3337560" cy="4160520"/>
+          </a:xfrm>
+          <a:prstGeom prst="roundRect">
             <a:avLst/>
           </a:prstGeom>
           <a:solidFill>
             <a:srgbClr val="FFF7E0"/>
           </a:solidFill>
-          <a:ln w="17780">
+          <a:ln w="19050">
             <a:solidFill>
               <a:srgbClr val="087490"/>
             </a:solidFill>
@@ -5696,34 +6648,304 @@
           </a:fontRef>
         </p:style>
         <p:txBody>
-          <a:bodyPr rtlCol="0" anchor="ctr" wrap="square" lIns="101600" rIns="101600" tIns="38100" bIns="38100"/>
-          <a:lstStyle/>
-          <a:p>
-            <a:pPr algn="ctr"/>
-            <a:r>
-              <a:rPr sz="1900" b="1">
+          <a:bodyPr rtlCol="0" anchor="ctr"/>
+          <a:lstStyle/>
+          <a:p>
+            <a:pPr algn="ctr"/>
+          </a:p>
+        </p:txBody>
+      </p:sp>
+      <p:sp>
+        <p:nvSpPr>
+          <p:cNvPr id="12" name="Oval 11"/>
+          <p:cNvSpPr/>
+          <p:nvPr/>
+        </p:nvSpPr>
+        <p:spPr>
+          <a:xfrm>
+            <a:off x="2230221" y="2610612"/>
+            <a:ext cx="485546" cy="370332"/>
+          </a:xfrm>
+          <a:prstGeom prst="ellipse">
+            <a:avLst/>
+          </a:prstGeom>
+          <a:solidFill>
+            <a:srgbClr val="FCD116"/>
+          </a:solidFill>
+          <a:ln w="10160">
+            <a:solidFill>
+              <a:srgbClr val="D97706"/>
+            </a:solidFill>
+          </a:ln>
+        </p:spPr>
+        <p:style>
+          <a:lnRef idx="1">
+            <a:schemeClr val="accent1"/>
+          </a:lnRef>
+          <a:fillRef idx="3">
+            <a:schemeClr val="accent1"/>
+          </a:fillRef>
+          <a:effectRef idx="2">
+            <a:schemeClr val="accent1"/>
+          </a:effectRef>
+          <a:fontRef idx="minor">
+            <a:schemeClr val="lt1"/>
+          </a:fontRef>
+        </p:style>
+        <p:txBody>
+          <a:bodyPr rtlCol="0" anchor="ctr"/>
+          <a:lstStyle/>
+          <a:p>
+            <a:pPr algn="ctr"/>
+          </a:p>
+        </p:txBody>
+      </p:sp>
+      <p:sp>
+        <p:nvSpPr>
+          <p:cNvPr id="13" name="Rectangle 12"/>
+          <p:cNvSpPr/>
+          <p:nvPr/>
+        </p:nvSpPr>
+        <p:spPr>
+          <a:xfrm>
+            <a:off x="2392070" y="2980944"/>
+            <a:ext cx="161848" cy="864108"/>
+          </a:xfrm>
+          <a:prstGeom prst="rect">
+            <a:avLst/>
+          </a:prstGeom>
+          <a:solidFill>
+            <a:srgbClr val="D97706"/>
+          </a:solidFill>
+          <a:ln>
+            <a:noFill/>
+          </a:ln>
+        </p:spPr>
+        <p:style>
+          <a:lnRef idx="1">
+            <a:schemeClr val="accent1"/>
+          </a:lnRef>
+          <a:fillRef idx="3">
+            <a:schemeClr val="accent1"/>
+          </a:fillRef>
+          <a:effectRef idx="2">
+            <a:schemeClr val="accent1"/>
+          </a:effectRef>
+          <a:fontRef idx="minor">
+            <a:schemeClr val="lt1"/>
+          </a:fontRef>
+        </p:style>
+        <p:txBody>
+          <a:bodyPr rtlCol="0" anchor="ctr"/>
+          <a:lstStyle/>
+          <a:p>
+            <a:pPr algn="ctr"/>
+          </a:p>
+        </p:txBody>
+      </p:sp>
+      <p:sp>
+        <p:nvSpPr>
+          <p:cNvPr id="14" name="Rectangle 13"/>
+          <p:cNvSpPr/>
+          <p:nvPr/>
+        </p:nvSpPr>
+        <p:spPr>
+          <a:xfrm>
+            <a:off x="2068372" y="3227832"/>
+            <a:ext cx="809244" cy="102870"/>
+          </a:xfrm>
+          <a:prstGeom prst="rect">
+            <a:avLst/>
+          </a:prstGeom>
+          <a:solidFill>
+            <a:srgbClr val="D97706"/>
+          </a:solidFill>
+          <a:ln>
+            <a:noFill/>
+          </a:ln>
+        </p:spPr>
+        <p:style>
+          <a:lnRef idx="1">
+            <a:schemeClr val="accent1"/>
+          </a:lnRef>
+          <a:fillRef idx="3">
+            <a:schemeClr val="accent1"/>
+          </a:fillRef>
+          <a:effectRef idx="2">
+            <a:schemeClr val="accent1"/>
+          </a:effectRef>
+          <a:fontRef idx="minor">
+            <a:schemeClr val="lt1"/>
+          </a:fontRef>
+        </p:style>
+        <p:txBody>
+          <a:bodyPr rtlCol="0" anchor="ctr"/>
+          <a:lstStyle/>
+          <a:p>
+            <a:pPr algn="ctr"/>
+          </a:p>
+        </p:txBody>
+      </p:sp>
+      <p:sp>
+        <p:nvSpPr>
+          <p:cNvPr id="15" name="Rounded Rectangle 14"/>
+          <p:cNvSpPr/>
+          <p:nvPr/>
+        </p:nvSpPr>
+        <p:spPr>
+          <a:xfrm>
+            <a:off x="1744675" y="3680460"/>
+            <a:ext cx="1483614" cy="164592"/>
+          </a:xfrm>
+          <a:prstGeom prst="roundRect">
+            <a:avLst/>
+          </a:prstGeom>
+          <a:solidFill>
+            <a:srgbClr val="D90000"/>
+          </a:solidFill>
+          <a:ln>
+            <a:noFill/>
+          </a:ln>
+        </p:spPr>
+        <p:style>
+          <a:lnRef idx="1">
+            <a:schemeClr val="accent1"/>
+          </a:lnRef>
+          <a:fillRef idx="3">
+            <a:schemeClr val="accent1"/>
+          </a:fillRef>
+          <a:effectRef idx="2">
+            <a:schemeClr val="accent1"/>
+          </a:effectRef>
+          <a:fontRef idx="minor">
+            <a:schemeClr val="lt1"/>
+          </a:fontRef>
+        </p:style>
+        <p:txBody>
+          <a:bodyPr rtlCol="0" anchor="ctr"/>
+          <a:lstStyle/>
+          <a:p>
+            <a:pPr algn="ctr"/>
+          </a:p>
+        </p:txBody>
+      </p:sp>
+      <p:sp>
+        <p:nvSpPr>
+          <p:cNvPr id="16" name="TextBox 15"/>
+          <p:cNvSpPr txBox="1"/>
+          <p:nvPr/>
+        </p:nvSpPr>
+        <p:spPr>
+          <a:xfrm>
+            <a:off x="1097280" y="4041648"/>
+            <a:ext cx="2697480" cy="228600"/>
+          </a:xfrm>
+          <a:prstGeom prst="rect">
+            <a:avLst/>
+          </a:prstGeom>
+          <a:noFill/>
+        </p:spPr>
+        <p:txBody>
+          <a:bodyPr wrap="square" lIns="0" rIns="0" tIns="0" bIns="0">
+            <a:spAutoFit/>
+          </a:bodyPr>
+          <a:lstStyle/>
+          <a:p>
+            <a:pPr algn="ctr"/>
+            <a:r>
+              <a:rPr sz="1000" b="0">
+                <a:solidFill>
+                  <a:srgbClr val="475569"/>
+                </a:solidFill>
+                <a:latin typeface="Arial"/>
+              </a:rPr>
+              <a:t>Christian Religious Education</a:t>
+            </a:r>
+          </a:p>
+        </p:txBody>
+      </p:sp>
+      <p:sp>
+        <p:nvSpPr>
+          <p:cNvPr id="17" name="TextBox 16"/>
+          <p:cNvSpPr txBox="1"/>
+          <p:nvPr/>
+        </p:nvSpPr>
+        <p:spPr>
+          <a:xfrm>
+            <a:off x="987552" y="4617720"/>
+            <a:ext cx="2907792" cy="256032"/>
+          </a:xfrm>
+          <a:prstGeom prst="rect">
+            <a:avLst/>
+          </a:prstGeom>
+          <a:noFill/>
+        </p:spPr>
+        <p:txBody>
+          <a:bodyPr wrap="square" lIns="0" rIns="0" tIns="0" bIns="0">
+            <a:spAutoFit/>
+          </a:bodyPr>
+          <a:lstStyle/>
+          <a:p>
+            <a:pPr algn="ctr"/>
+            <a:r>
+              <a:rPr sz="1200" b="1">
+                <a:solidFill>
+                  <a:srgbClr val="087490"/>
+                </a:solidFill>
+                <a:latin typeface="Arial"/>
+              </a:rPr>
+              <a:t>KEY IDEA</a:t>
+            </a:r>
+          </a:p>
+        </p:txBody>
+      </p:sp>
+      <p:sp>
+        <p:nvSpPr>
+          <p:cNvPr id="18" name="TextBox 17"/>
+          <p:cNvSpPr txBox="1"/>
+          <p:nvPr/>
+        </p:nvSpPr>
+        <p:spPr>
+          <a:xfrm>
+            <a:off x="960120" y="4919472"/>
+            <a:ext cx="2971800" cy="685800"/>
+          </a:xfrm>
+          <a:prstGeom prst="rect">
+            <a:avLst/>
+          </a:prstGeom>
+          <a:noFill/>
+        </p:spPr>
+        <p:txBody>
+          <a:bodyPr wrap="square" lIns="0" rIns="0" tIns="0" bIns="0">
+            <a:spAutoFit/>
+          </a:bodyPr>
+          <a:lstStyle/>
+          <a:p>
+            <a:pPr algn="ctr"/>
+            <a:r>
+              <a:rPr sz="1500" b="1">
                 <a:solidFill>
                   <a:srgbClr val="111827"/>
                 </a:solidFill>
                 <a:latin typeface="Arial"/>
               </a:rPr>
-              <a:t>Key idea: Introduction to the "Spirit" concept. Just as wind is i...</a:t>
-            </a:r>
-          </a:p>
-        </p:txBody>
-      </p:sp>
-      <p:sp>
-        <p:nvSpPr>
-          <p:cNvPr id="10" name="Rectangle 9"/>
+              <a:t>Key idea: Introduction to the "Spirit" concept. Just as wind is invisible but</a:t>
+            </a:r>
+          </a:p>
+        </p:txBody>
+      </p:sp>
+      <p:sp>
+        <p:nvSpPr>
+          <p:cNvPr id="19" name="Rounded Rectangle 18"/>
           <p:cNvSpPr/>
           <p:nvPr/>
         </p:nvSpPr>
         <p:spPr>
           <a:xfrm>
-            <a:off x="868680" y="2971800"/>
-            <a:ext cx="10378440" cy="713232"/>
-          </a:xfrm>
-          <a:prstGeom prst="rect">
+            <a:off x="4572000" y="1874519"/>
+            <a:ext cx="6812280" cy="932688"/>
+          </a:xfrm>
+          <a:prstGeom prst="roundRect">
             <a:avLst/>
           </a:prstGeom>
           <a:solidFill>
@@ -5759,14 +6981,14 @@
       </p:sp>
       <p:sp>
         <p:nvSpPr>
-          <p:cNvPr id="11" name="Rectangle 10"/>
+          <p:cNvPr id="20" name="Rectangle 19"/>
           <p:cNvSpPr/>
           <p:nvPr/>
         </p:nvSpPr>
         <p:spPr>
           <a:xfrm>
-            <a:off x="868680" y="2971800"/>
-            <a:ext cx="530352" cy="713232"/>
+            <a:off x="4572000" y="1874519"/>
+            <a:ext cx="566928" cy="932688"/>
           </a:xfrm>
           <a:prstGeom prst="rect">
             <a:avLst/>
@@ -5793,12 +7015,38 @@
           </a:fontRef>
         </p:style>
         <p:txBody>
-          <a:bodyPr rtlCol="0" anchor="ctr" wrap="square" lIns="101600" rIns="101600" tIns="38100" bIns="38100"/>
-          <a:lstStyle/>
-          <a:p>
-            <a:pPr algn="ctr"/>
-            <a:r>
-              <a:rPr sz="1500" b="1">
+          <a:bodyPr rtlCol="0" anchor="ctr"/>
+          <a:lstStyle/>
+          <a:p>
+            <a:pPr algn="ctr"/>
+          </a:p>
+        </p:txBody>
+      </p:sp>
+      <p:sp>
+        <p:nvSpPr>
+          <p:cNvPr id="21" name="TextBox 20"/>
+          <p:cNvSpPr txBox="1"/>
+          <p:nvPr/>
+        </p:nvSpPr>
+        <p:spPr>
+          <a:xfrm>
+            <a:off x="4572000" y="2221991"/>
+            <a:ext cx="566928" cy="237744"/>
+          </a:xfrm>
+          <a:prstGeom prst="rect">
+            <a:avLst/>
+          </a:prstGeom>
+          <a:noFill/>
+        </p:spPr>
+        <p:txBody>
+          <a:bodyPr wrap="square" lIns="0" rIns="0" tIns="0" bIns="0">
+            <a:spAutoFit/>
+          </a:bodyPr>
+          <a:lstStyle/>
+          <a:p>
+            <a:pPr algn="ctr"/>
+            <a:r>
+              <a:rPr sz="1400" b="1">
                 <a:solidFill>
                   <a:srgbClr val="FFFFFF"/>
                 </a:solidFill>
@@ -5811,14 +7059,14 @@
       </p:sp>
       <p:sp>
         <p:nvSpPr>
-          <p:cNvPr id="12" name="TextBox 11"/>
+          <p:cNvPr id="22" name="TextBox 21"/>
           <p:cNvSpPr txBox="1"/>
           <p:nvPr/>
         </p:nvSpPr>
         <p:spPr>
           <a:xfrm>
-            <a:off x="1572768" y="3118104"/>
-            <a:ext cx="9372600" cy="384048"/>
+            <a:off x="5358384" y="2039112"/>
+            <a:ext cx="5788152" cy="694944"/>
           </a:xfrm>
           <a:prstGeom prst="rect">
             <a:avLst/>
@@ -5832,7 +7080,7 @@
           <a:lstStyle/>
           <a:p>
             <a:r>
-              <a:rPr sz="1500" b="0">
+              <a:rPr sz="1600" b="1">
                 <a:solidFill>
                   <a:srgbClr val="111827"/>
                 </a:solidFill>
@@ -5845,16 +7093,16 @@
       </p:sp>
       <p:sp>
         <p:nvSpPr>
-          <p:cNvPr id="13" name="Rectangle 12"/>
+          <p:cNvPr id="23" name="Rounded Rectangle 22"/>
           <p:cNvSpPr/>
           <p:nvPr/>
         </p:nvSpPr>
         <p:spPr>
           <a:xfrm>
-            <a:off x="868680" y="3822191"/>
-            <a:ext cx="10378440" cy="713232"/>
-          </a:xfrm>
-          <a:prstGeom prst="rect">
+            <a:off x="4572000" y="3108960"/>
+            <a:ext cx="6812280" cy="932688"/>
+          </a:xfrm>
+          <a:prstGeom prst="roundRect">
             <a:avLst/>
           </a:prstGeom>
           <a:solidFill>
@@ -5890,14 +7138,14 @@
       </p:sp>
       <p:sp>
         <p:nvSpPr>
-          <p:cNvPr id="14" name="Rectangle 13"/>
+          <p:cNvPr id="24" name="Rectangle 23"/>
           <p:cNvSpPr/>
           <p:nvPr/>
         </p:nvSpPr>
         <p:spPr>
           <a:xfrm>
-            <a:off x="868680" y="3822191"/>
-            <a:ext cx="530352" cy="713232"/>
+            <a:off x="4572000" y="3108960"/>
+            <a:ext cx="566928" cy="932688"/>
           </a:xfrm>
           <a:prstGeom prst="rect">
             <a:avLst/>
@@ -5924,12 +7172,38 @@
           </a:fontRef>
         </p:style>
         <p:txBody>
-          <a:bodyPr rtlCol="0" anchor="ctr" wrap="square" lIns="101600" rIns="101600" tIns="38100" bIns="38100"/>
-          <a:lstStyle/>
-          <a:p>
-            <a:pPr algn="ctr"/>
-            <a:r>
-              <a:rPr sz="1500" b="1">
+          <a:bodyPr rtlCol="0" anchor="ctr"/>
+          <a:lstStyle/>
+          <a:p>
+            <a:pPr algn="ctr"/>
+          </a:p>
+        </p:txBody>
+      </p:sp>
+      <p:sp>
+        <p:nvSpPr>
+          <p:cNvPr id="25" name="TextBox 24"/>
+          <p:cNvSpPr txBox="1"/>
+          <p:nvPr/>
+        </p:nvSpPr>
+        <p:spPr>
+          <a:xfrm>
+            <a:off x="4572000" y="3456432"/>
+            <a:ext cx="566928" cy="237744"/>
+          </a:xfrm>
+          <a:prstGeom prst="rect">
+            <a:avLst/>
+          </a:prstGeom>
+          <a:noFill/>
+        </p:spPr>
+        <p:txBody>
+          <a:bodyPr wrap="square" lIns="0" rIns="0" tIns="0" bIns="0">
+            <a:spAutoFit/>
+          </a:bodyPr>
+          <a:lstStyle/>
+          <a:p>
+            <a:pPr algn="ctr"/>
+            <a:r>
+              <a:rPr sz="1400" b="1">
                 <a:solidFill>
                   <a:srgbClr val="FFFFFF"/>
                 </a:solidFill>
@@ -5942,14 +7216,14 @@
       </p:sp>
       <p:sp>
         <p:nvSpPr>
-          <p:cNvPr id="15" name="TextBox 14"/>
+          <p:cNvPr id="26" name="TextBox 25"/>
           <p:cNvSpPr txBox="1"/>
           <p:nvPr/>
         </p:nvSpPr>
         <p:spPr>
           <a:xfrm>
-            <a:off x="1572768" y="3968496"/>
-            <a:ext cx="9372600" cy="384048"/>
+            <a:off x="5358384" y="3273552"/>
+            <a:ext cx="5788152" cy="694944"/>
           </a:xfrm>
           <a:prstGeom prst="rect">
             <a:avLst/>
@@ -5963,7 +7237,7 @@
           <a:lstStyle/>
           <a:p>
             <a:r>
-              <a:rPr sz="1500" b="0">
+              <a:rPr sz="1400" b="1">
                 <a:solidFill>
                   <a:srgbClr val="111827"/>
                 </a:solidFill>
@@ -5976,16 +7250,16 @@
       </p:sp>
       <p:sp>
         <p:nvSpPr>
-          <p:cNvPr id="16" name="Rectangle 15"/>
+          <p:cNvPr id="27" name="Rounded Rectangle 26"/>
           <p:cNvSpPr/>
           <p:nvPr/>
         </p:nvSpPr>
         <p:spPr>
           <a:xfrm>
-            <a:off x="868680" y="4672584"/>
-            <a:ext cx="10378440" cy="713232"/>
-          </a:xfrm>
-          <a:prstGeom prst="rect">
+            <a:off x="4572000" y="4343400"/>
+            <a:ext cx="6812280" cy="932688"/>
+          </a:xfrm>
+          <a:prstGeom prst="roundRect">
             <a:avLst/>
           </a:prstGeom>
           <a:solidFill>
@@ -6021,14 +7295,14 @@
       </p:sp>
       <p:sp>
         <p:nvSpPr>
-          <p:cNvPr id="17" name="Rectangle 16"/>
+          <p:cNvPr id="28" name="Rectangle 27"/>
           <p:cNvSpPr/>
           <p:nvPr/>
         </p:nvSpPr>
         <p:spPr>
           <a:xfrm>
-            <a:off x="868680" y="4672584"/>
-            <a:ext cx="530352" cy="713232"/>
+            <a:off x="4572000" y="4343400"/>
+            <a:ext cx="566928" cy="932688"/>
           </a:xfrm>
           <a:prstGeom prst="rect">
             <a:avLst/>
@@ -6055,12 +7329,38 @@
           </a:fontRef>
         </p:style>
         <p:txBody>
-          <a:bodyPr rtlCol="0" anchor="ctr" wrap="square" lIns="101600" rIns="101600" tIns="38100" bIns="38100"/>
-          <a:lstStyle/>
-          <a:p>
-            <a:pPr algn="ctr"/>
-            <a:r>
-              <a:rPr sz="1500" b="1">
+          <a:bodyPr rtlCol="0" anchor="ctr"/>
+          <a:lstStyle/>
+          <a:p>
+            <a:pPr algn="ctr"/>
+          </a:p>
+        </p:txBody>
+      </p:sp>
+      <p:sp>
+        <p:nvSpPr>
+          <p:cNvPr id="29" name="TextBox 28"/>
+          <p:cNvSpPr txBox="1"/>
+          <p:nvPr/>
+        </p:nvSpPr>
+        <p:spPr>
+          <a:xfrm>
+            <a:off x="4572000" y="4690872"/>
+            <a:ext cx="566928" cy="237744"/>
+          </a:xfrm>
+          <a:prstGeom prst="rect">
+            <a:avLst/>
+          </a:prstGeom>
+          <a:noFill/>
+        </p:spPr>
+        <p:txBody>
+          <a:bodyPr wrap="square" lIns="0" rIns="0" tIns="0" bIns="0">
+            <a:spAutoFit/>
+          </a:bodyPr>
+          <a:lstStyle/>
+          <a:p>
+            <a:pPr algn="ctr"/>
+            <a:r>
+              <a:rPr sz="1400" b="1">
                 <a:solidFill>
                   <a:srgbClr val="FFFFFF"/>
                 </a:solidFill>
@@ -6073,14 +7373,14 @@
       </p:sp>
       <p:sp>
         <p:nvSpPr>
-          <p:cNvPr id="18" name="TextBox 17"/>
+          <p:cNvPr id="30" name="TextBox 29"/>
           <p:cNvSpPr txBox="1"/>
           <p:nvPr/>
         </p:nvSpPr>
         <p:spPr>
           <a:xfrm>
-            <a:off x="1572768" y="4818888"/>
-            <a:ext cx="9372600" cy="384048"/>
+            <a:off x="5358384" y="4507992"/>
+            <a:ext cx="5788152" cy="694944"/>
           </a:xfrm>
           <a:prstGeom prst="rect">
             <a:avLst/>
@@ -6094,7 +7394,7 @@
           <a:lstStyle/>
           <a:p>
             <a:r>
-              <a:rPr sz="1500" b="0">
+              <a:rPr sz="1600" b="1">
                 <a:solidFill>
                   <a:srgbClr val="111827"/>
                 </a:solidFill>
@@ -6107,145 +7407,14 @@
       </p:sp>
       <p:sp>
         <p:nvSpPr>
-          <p:cNvPr id="19" name="Rectangle 18"/>
-          <p:cNvSpPr/>
-          <p:nvPr/>
-        </p:nvSpPr>
-        <p:spPr>
-          <a:xfrm>
-            <a:off x="868680" y="5522976"/>
-            <a:ext cx="10378440" cy="713232"/>
-          </a:xfrm>
-          <a:prstGeom prst="rect">
-            <a:avLst/>
-          </a:prstGeom>
-          <a:solidFill>
-            <a:srgbClr val="FFFFFF"/>
-          </a:solidFill>
-          <a:ln w="11430">
-            <a:solidFill>
-              <a:srgbClr val="CBD5E1"/>
-            </a:solidFill>
-          </a:ln>
-        </p:spPr>
-        <p:style>
-          <a:lnRef idx="1">
-            <a:schemeClr val="accent1"/>
-          </a:lnRef>
-          <a:fillRef idx="3">
-            <a:schemeClr val="accent1"/>
-          </a:fillRef>
-          <a:effectRef idx="2">
-            <a:schemeClr val="accent1"/>
-          </a:effectRef>
-          <a:fontRef idx="minor">
-            <a:schemeClr val="lt1"/>
-          </a:fontRef>
-        </p:style>
-        <p:txBody>
-          <a:bodyPr rtlCol="0" anchor="ctr"/>
-          <a:lstStyle/>
-          <a:p>
-            <a:pPr algn="ctr"/>
-          </a:p>
-        </p:txBody>
-      </p:sp>
-      <p:sp>
-        <p:nvSpPr>
-          <p:cNvPr id="20" name="Rectangle 19"/>
-          <p:cNvSpPr/>
-          <p:nvPr/>
-        </p:nvSpPr>
-        <p:spPr>
-          <a:xfrm>
-            <a:off x="868680" y="5522976"/>
-            <a:ext cx="530352" cy="713232"/>
-          </a:xfrm>
-          <a:prstGeom prst="rect">
-            <a:avLst/>
-          </a:prstGeom>
-          <a:solidFill>
-            <a:srgbClr val="087490"/>
-          </a:solidFill>
-          <a:ln>
-            <a:noFill/>
-          </a:ln>
-        </p:spPr>
-        <p:style>
-          <a:lnRef idx="1">
-            <a:schemeClr val="accent1"/>
-          </a:lnRef>
-          <a:fillRef idx="3">
-            <a:schemeClr val="accent1"/>
-          </a:fillRef>
-          <a:effectRef idx="2">
-            <a:schemeClr val="accent1"/>
-          </a:effectRef>
-          <a:fontRef idx="minor">
-            <a:schemeClr val="lt1"/>
-          </a:fontRef>
-        </p:style>
-        <p:txBody>
-          <a:bodyPr rtlCol="0" anchor="ctr" wrap="square" lIns="101600" rIns="101600" tIns="38100" bIns="38100"/>
-          <a:lstStyle/>
-          <a:p>
-            <a:pPr algn="ctr"/>
-            <a:r>
-              <a:rPr sz="1500" b="1">
-                <a:solidFill>
-                  <a:srgbClr val="FFFFFF"/>
-                </a:solidFill>
-                <a:latin typeface="Arial"/>
-              </a:rPr>
-              <a:t>4</a:t>
-            </a:r>
-          </a:p>
-        </p:txBody>
-      </p:sp>
-      <p:sp>
-        <p:nvSpPr>
-          <p:cNvPr id="21" name="TextBox 20"/>
+          <p:cNvPr id="31" name="TextBox 30"/>
           <p:cNvSpPr txBox="1"/>
           <p:nvPr/>
         </p:nvSpPr>
         <p:spPr>
           <a:xfrm>
-            <a:off x="1572768" y="5669280"/>
-            <a:ext cx="9372600" cy="384048"/>
-          </a:xfrm>
-          <a:prstGeom prst="rect">
-            <a:avLst/>
-          </a:prstGeom>
-          <a:noFill/>
-        </p:spPr>
-        <p:txBody>
-          <a:bodyPr wrap="square" lIns="0" rIns="0" tIns="0" bIns="0">
-            <a:spAutoFit/>
-          </a:bodyPr>
-          <a:lstStyle/>
-          <a:p>
-            <a:r>
-              <a:rPr sz="1500" b="0">
-                <a:solidFill>
-                  <a:srgbClr val="111827"/>
-                </a:solidFill>
-                <a:latin typeface="Arial"/>
-              </a:rPr>
-              <a:t>Write one clear response.</a:t>
-            </a:r>
-          </a:p>
-        </p:txBody>
-      </p:sp>
-      <p:sp>
-        <p:nvSpPr>
-          <p:cNvPr id="22" name="TextBox 21"/>
-          <p:cNvSpPr txBox="1"/>
-          <p:nvPr/>
-        </p:nvSpPr>
-        <p:spPr>
-          <a:xfrm>
-            <a:off x="685800" y="6419088"/>
-            <a:ext cx="10835640" cy="228600"/>
+            <a:off x="713232" y="6355080"/>
+            <a:ext cx="10835640" cy="219456"/>
           </a:xfrm>
           <a:prstGeom prst="rect">
             <a:avLst/>
@@ -6266,7 +7435,7 @@
                 </a:solidFill>
                 <a:latin typeface="Arial"/>
               </a:rPr>
-              <a:t>Listen • Talk • Try • Explain</a:t>
+              <a:t>P7 class flow: listen • talk • try • explain</a:t>
             </a:r>
           </a:p>
         </p:txBody>
@@ -6471,7 +7640,93 @@
       </p:sp>
       <p:sp>
         <p:nvSpPr>
-          <p:cNvPr id="6" name="TextBox 5"/>
+          <p:cNvPr id="6" name="Rectangle 5"/>
+          <p:cNvSpPr/>
+          <p:nvPr/>
+        </p:nvSpPr>
+        <p:spPr>
+          <a:xfrm>
+            <a:off x="164592" y="6565392"/>
+            <a:ext cx="12027103" cy="73152"/>
+          </a:xfrm>
+          <a:prstGeom prst="rect">
+            <a:avLst/>
+          </a:prstGeom>
+          <a:solidFill>
+            <a:srgbClr val="FCD116"/>
+          </a:solidFill>
+          <a:ln>
+            <a:noFill/>
+          </a:ln>
+        </p:spPr>
+        <p:style>
+          <a:lnRef idx="1">
+            <a:schemeClr val="accent1"/>
+          </a:lnRef>
+          <a:fillRef idx="3">
+            <a:schemeClr val="accent1"/>
+          </a:fillRef>
+          <a:effectRef idx="2">
+            <a:schemeClr val="accent1"/>
+          </a:effectRef>
+          <a:fontRef idx="minor">
+            <a:schemeClr val="lt1"/>
+          </a:fontRef>
+        </p:style>
+        <p:txBody>
+          <a:bodyPr rtlCol="0" anchor="ctr"/>
+          <a:lstStyle/>
+          <a:p>
+            <a:pPr algn="ctr"/>
+          </a:p>
+        </p:txBody>
+      </p:sp>
+      <p:sp>
+        <p:nvSpPr>
+          <p:cNvPr id="7" name="Rectangle 6"/>
+          <p:cNvSpPr/>
+          <p:nvPr/>
+        </p:nvSpPr>
+        <p:spPr>
+          <a:xfrm>
+            <a:off x="164592" y="6638544"/>
+            <a:ext cx="12027103" cy="45720"/>
+          </a:xfrm>
+          <a:prstGeom prst="rect">
+            <a:avLst/>
+          </a:prstGeom>
+          <a:solidFill>
+            <a:srgbClr val="D90000"/>
+          </a:solidFill>
+          <a:ln>
+            <a:noFill/>
+          </a:ln>
+        </p:spPr>
+        <p:style>
+          <a:lnRef idx="1">
+            <a:schemeClr val="accent1"/>
+          </a:lnRef>
+          <a:fillRef idx="3">
+            <a:schemeClr val="accent1"/>
+          </a:fillRef>
+          <a:effectRef idx="2">
+            <a:schemeClr val="accent1"/>
+          </a:effectRef>
+          <a:fontRef idx="minor">
+            <a:schemeClr val="lt1"/>
+          </a:fontRef>
+        </p:style>
+        <p:txBody>
+          <a:bodyPr rtlCol="0" anchor="ctr"/>
+          <a:lstStyle/>
+          <a:p>
+            <a:pPr algn="ctr"/>
+          </a:p>
+        </p:txBody>
+      </p:sp>
+      <p:sp>
+        <p:nvSpPr>
+          <p:cNvPr id="8" name="TextBox 7"/>
           <p:cNvSpPr txBox="1"/>
           <p:nvPr/>
         </p:nvSpPr>
@@ -6505,7 +7760,7 @@
       </p:sp>
       <p:sp>
         <p:nvSpPr>
-          <p:cNvPr id="7" name="TextBox 6"/>
+          <p:cNvPr id="9" name="TextBox 8"/>
           <p:cNvSpPr txBox="1"/>
           <p:nvPr/>
         </p:nvSpPr>
@@ -6540,14 +7795,14 @@
       </p:sp>
       <p:sp>
         <p:nvSpPr>
-          <p:cNvPr id="8" name="TextBox 7"/>
+          <p:cNvPr id="10" name="TextBox 9"/>
           <p:cNvSpPr txBox="1"/>
           <p:nvPr/>
         </p:nvSpPr>
         <p:spPr>
           <a:xfrm>
-            <a:off x="594360" y="1042415"/>
-            <a:ext cx="11109960" cy="566928"/>
+            <a:off x="594360" y="1005840"/>
+            <a:ext cx="11064240" cy="512064"/>
           </a:xfrm>
           <a:prstGeom prst="rect">
             <a:avLst/>
@@ -6574,24 +7829,24 @@
       </p:sp>
       <p:sp>
         <p:nvSpPr>
-          <p:cNvPr id="9" name="Rectangle 8"/>
+          <p:cNvPr id="11" name="Rounded Rectangle 10"/>
           <p:cNvSpPr/>
           <p:nvPr/>
         </p:nvSpPr>
         <p:spPr>
           <a:xfrm>
-            <a:off x="685800" y="1874519"/>
-            <a:ext cx="10835640" cy="804672"/>
-          </a:xfrm>
-          <a:prstGeom prst="rect">
-            <a:avLst/>
-          </a:prstGeom>
-          <a:solidFill>
-            <a:srgbClr val="FFF7E0"/>
-          </a:solidFill>
-          <a:ln w="17780">
+            <a:off x="822960" y="1828800"/>
+            <a:ext cx="7360920" cy="4251960"/>
+          </a:xfrm>
+          <a:prstGeom prst="roundRect">
+            <a:avLst/>
+          </a:prstGeom>
+          <a:solidFill>
+            <a:srgbClr val="1F2937"/>
+          </a:solidFill>
+          <a:ln w="19050">
             <a:solidFill>
-              <a:srgbClr val="D97706"/>
+              <a:srgbClr val="FCD116"/>
             </a:solidFill>
           </a:ln>
         </p:spPr>
@@ -6610,42 +7865,169 @@
           </a:fontRef>
         </p:style>
         <p:txBody>
-          <a:bodyPr rtlCol="0" anchor="ctr" wrap="square" lIns="101600" rIns="101600" tIns="38100" bIns="38100"/>
-          <a:lstStyle/>
-          <a:p>
-            <a:pPr algn="ctr"/>
-            <a:r>
-              <a:rPr sz="1900" b="1">
+          <a:bodyPr rtlCol="0" anchor="ctr"/>
+          <a:lstStyle/>
+          <a:p>
+            <a:pPr algn="ctr"/>
+          </a:p>
+        </p:txBody>
+      </p:sp>
+      <p:sp>
+        <p:nvSpPr>
+          <p:cNvPr id="12" name="TextBox 11"/>
+          <p:cNvSpPr txBox="1"/>
+          <p:nvPr/>
+        </p:nvSpPr>
+        <p:spPr>
+          <a:xfrm>
+            <a:off x="1097280" y="2084831"/>
+            <a:ext cx="6812280" cy="256032"/>
+          </a:xfrm>
+          <a:prstGeom prst="rect">
+            <a:avLst/>
+          </a:prstGeom>
+          <a:noFill/>
+        </p:spPr>
+        <p:txBody>
+          <a:bodyPr wrap="square" lIns="0" rIns="0" tIns="0" bIns="0">
+            <a:spAutoFit/>
+          </a:bodyPr>
+          <a:lstStyle/>
+          <a:p>
+            <a:r>
+              <a:rPr sz="1200" b="1">
                 <a:solidFill>
-                  <a:srgbClr val="111827"/>
+                  <a:srgbClr val="FCD116"/>
                 </a:solidFill>
                 <a:latin typeface="Arial"/>
               </a:rPr>
-              <a:t>Model the example step by step.</a:t>
-            </a:r>
-          </a:p>
-        </p:txBody>
-      </p:sp>
-      <p:sp>
-        <p:nvSpPr>
-          <p:cNvPr id="10" name="Rectangle 9"/>
+              <a:t>BOARD MODEL</a:t>
+            </a:r>
+          </a:p>
+        </p:txBody>
+      </p:sp>
+      <p:sp>
+        <p:nvSpPr>
+          <p:cNvPr id="13" name="TextBox 12"/>
+          <p:cNvSpPr txBox="1"/>
+          <p:nvPr/>
+        </p:nvSpPr>
+        <p:spPr>
+          <a:xfrm>
+            <a:off x="1143000" y="2578608"/>
+            <a:ext cx="6583680" cy="347472"/>
+          </a:xfrm>
+          <a:prstGeom prst="rect">
+            <a:avLst/>
+          </a:prstGeom>
+          <a:noFill/>
+        </p:spPr>
+        <p:txBody>
+          <a:bodyPr wrap="square" lIns="0" rIns="0" tIns="0" bIns="0">
+            <a:spAutoFit/>
+          </a:bodyPr>
+          <a:lstStyle/>
+          <a:p>
+            <a:r>
+              <a:rPr sz="1600" b="0">
+                <a:solidFill>
+                  <a:srgbClr val="FFFFFF"/>
+                </a:solidFill>
+                <a:latin typeface="Arial"/>
+              </a:rPr>
+              <a:t>1. 2. The Holy Spirit</a:t>
+            </a:r>
+          </a:p>
+        </p:txBody>
+      </p:sp>
+      <p:sp>
+        <p:nvSpPr>
+          <p:cNvPr id="14" name="TextBox 13"/>
+          <p:cNvSpPr txBox="1"/>
+          <p:nvPr/>
+        </p:nvSpPr>
+        <p:spPr>
+          <a:xfrm>
+            <a:off x="1143000" y="3154679"/>
+            <a:ext cx="6583680" cy="347472"/>
+          </a:xfrm>
+          <a:prstGeom prst="rect">
+            <a:avLst/>
+          </a:prstGeom>
+          <a:noFill/>
+        </p:spPr>
+        <p:txBody>
+          <a:bodyPr wrap="square" lIns="0" rIns="0" tIns="0" bIns="0">
+            <a:spAutoFit/>
+          </a:bodyPr>
+          <a:lstStyle/>
+          <a:p>
+            <a:r>
+              <a:rPr sz="1600" b="0">
+                <a:solidFill>
+                  <a:srgbClr val="FFFFFF"/>
+                </a:solidFill>
+                <a:latin typeface="Arial"/>
+              </a:rPr>
+              <a:t>2. He is God's presence in us.</a:t>
+            </a:r>
+          </a:p>
+        </p:txBody>
+      </p:sp>
+      <p:sp>
+        <p:nvSpPr>
+          <p:cNvPr id="15" name="TextBox 14"/>
+          <p:cNvSpPr txBox="1"/>
+          <p:nvPr/>
+        </p:nvSpPr>
+        <p:spPr>
+          <a:xfrm>
+            <a:off x="1143000" y="3730752"/>
+            <a:ext cx="6583680" cy="347472"/>
+          </a:xfrm>
+          <a:prstGeom prst="rect">
+            <a:avLst/>
+          </a:prstGeom>
+          <a:noFill/>
+        </p:spPr>
+        <p:txBody>
+          <a:bodyPr wrap="square" lIns="0" rIns="0" tIns="0" bIns="0">
+            <a:spAutoFit/>
+          </a:bodyPr>
+          <a:lstStyle/>
+          <a:p>
+            <a:r>
+              <a:rPr sz="1600" b="0">
+                <a:solidFill>
+                  <a:srgbClr val="FFFFFF"/>
+                </a:solidFill>
+                <a:latin typeface="Arial"/>
+              </a:rPr>
+              <a:t>3. He is the "Gift and the Giver."</a:t>
+            </a:r>
+          </a:p>
+        </p:txBody>
+      </p:sp>
+      <p:sp>
+        <p:nvSpPr>
+          <p:cNvPr id="16" name="Rounded Rectangle 15"/>
           <p:cNvSpPr/>
           <p:nvPr/>
         </p:nvSpPr>
         <p:spPr>
           <a:xfrm>
-            <a:off x="868680" y="2971800"/>
-            <a:ext cx="10378440" cy="713232"/>
-          </a:xfrm>
-          <a:prstGeom prst="rect">
-            <a:avLst/>
-          </a:prstGeom>
-          <a:solidFill>
-            <a:srgbClr val="FFFFFF"/>
-          </a:solidFill>
-          <a:ln w="11430">
+            <a:off x="8549640" y="1828800"/>
+            <a:ext cx="2697480" cy="4251960"/>
+          </a:xfrm>
+          <a:prstGeom prst="roundRect">
+            <a:avLst/>
+          </a:prstGeom>
+          <a:solidFill>
+            <a:srgbClr val="FFF7E0"/>
+          </a:solidFill>
+          <a:ln w="16510">
             <a:solidFill>
-              <a:srgbClr val="CBD5E1"/>
+              <a:srgbClr val="D97706"/>
             </a:solidFill>
           </a:ln>
         </p:spPr>
@@ -6673,23 +8055,25 @@
       </p:sp>
       <p:sp>
         <p:nvSpPr>
-          <p:cNvPr id="11" name="Rectangle 10"/>
+          <p:cNvPr id="17" name="Oval 16"/>
           <p:cNvSpPr/>
           <p:nvPr/>
         </p:nvSpPr>
         <p:spPr>
           <a:xfrm>
-            <a:off x="868680" y="2971800"/>
-            <a:ext cx="530352" cy="713232"/>
-          </a:xfrm>
-          <a:prstGeom prst="rect">
-            <a:avLst/>
-          </a:prstGeom>
-          <a:solidFill>
-            <a:srgbClr val="D97706"/>
-          </a:solidFill>
-          <a:ln>
-            <a:noFill/>
+            <a:off x="9748418" y="2636215"/>
+            <a:ext cx="337413" cy="304495"/>
+          </a:xfrm>
+          <a:prstGeom prst="ellipse">
+            <a:avLst/>
+          </a:prstGeom>
+          <a:solidFill>
+            <a:srgbClr val="FCD116"/>
+          </a:solidFill>
+          <a:ln w="10160">
+            <a:solidFill>
+              <a:srgbClr val="D97706"/>
+            </a:solidFill>
           </a:ln>
         </p:spPr>
         <p:style>
@@ -6707,77 +8091,32 @@
           </a:fontRef>
         </p:style>
         <p:txBody>
-          <a:bodyPr rtlCol="0" anchor="ctr" wrap="square" lIns="101600" rIns="101600" tIns="38100" bIns="38100"/>
-          <a:lstStyle/>
-          <a:p>
-            <a:pPr algn="ctr"/>
-            <a:r>
-              <a:rPr sz="1500" b="1">
-                <a:solidFill>
-                  <a:srgbClr val="FFFFFF"/>
-                </a:solidFill>
-                <a:latin typeface="Arial"/>
-              </a:rPr>
-              <a:t>1</a:t>
-            </a:r>
-          </a:p>
-        </p:txBody>
-      </p:sp>
-      <p:sp>
-        <p:nvSpPr>
-          <p:cNvPr id="12" name="TextBox 11"/>
-          <p:cNvSpPr txBox="1"/>
-          <p:nvPr/>
-        </p:nvSpPr>
-        <p:spPr>
-          <a:xfrm>
-            <a:off x="1572768" y="3118104"/>
-            <a:ext cx="9372600" cy="384048"/>
-          </a:xfrm>
-          <a:prstGeom prst="rect">
-            <a:avLst/>
-          </a:prstGeom>
-          <a:noFill/>
-        </p:spPr>
-        <p:txBody>
-          <a:bodyPr wrap="square" lIns="0" rIns="0" tIns="0" bIns="0">
-            <a:spAutoFit/>
-          </a:bodyPr>
-          <a:lstStyle/>
-          <a:p>
-            <a:r>
-              <a:rPr sz="1500" b="0">
-                <a:solidFill>
-                  <a:srgbClr val="111827"/>
-                </a:solidFill>
-                <a:latin typeface="Arial"/>
-              </a:rPr>
-              <a:t>2. The Holy Spirit</a:t>
-            </a:r>
-          </a:p>
-        </p:txBody>
-      </p:sp>
-      <p:sp>
-        <p:nvSpPr>
-          <p:cNvPr id="13" name="Rectangle 12"/>
+          <a:bodyPr rtlCol="0" anchor="ctr"/>
+          <a:lstStyle/>
+          <a:p>
+            <a:pPr algn="ctr"/>
+          </a:p>
+        </p:txBody>
+      </p:sp>
+      <p:sp>
+        <p:nvSpPr>
+          <p:cNvPr id="18" name="Rectangle 17"/>
           <p:cNvSpPr/>
           <p:nvPr/>
         </p:nvSpPr>
         <p:spPr>
           <a:xfrm>
-            <a:off x="868680" y="3822191"/>
-            <a:ext cx="10378440" cy="713232"/>
-          </a:xfrm>
-          <a:prstGeom prst="rect">
-            <a:avLst/>
-          </a:prstGeom>
-          <a:solidFill>
-            <a:srgbClr val="FFFFFF"/>
-          </a:solidFill>
-          <a:ln w="11430">
-            <a:solidFill>
-              <a:srgbClr val="CBD5E1"/>
-            </a:solidFill>
+            <a:off x="9860889" y="2940710"/>
+            <a:ext cx="112471" cy="710488"/>
+          </a:xfrm>
+          <a:prstGeom prst="rect">
+            <a:avLst/>
+          </a:prstGeom>
+          <a:solidFill>
+            <a:srgbClr val="D97706"/>
+          </a:solidFill>
+          <a:ln>
+            <a:noFill/>
           </a:ln>
         </p:spPr>
         <p:style>
@@ -6804,14 +8143,14 @@
       </p:sp>
       <p:sp>
         <p:nvSpPr>
-          <p:cNvPr id="14" name="Rectangle 13"/>
+          <p:cNvPr id="19" name="Rectangle 18"/>
           <p:cNvSpPr/>
           <p:nvPr/>
         </p:nvSpPr>
         <p:spPr>
           <a:xfrm>
-            <a:off x="868680" y="3822191"/>
-            <a:ext cx="530352" cy="713232"/>
+            <a:off x="9635947" y="3143707"/>
+            <a:ext cx="562355" cy="84582"/>
           </a:xfrm>
           <a:prstGeom prst="rect">
             <a:avLst/>
@@ -6838,77 +8177,32 @@
           </a:fontRef>
         </p:style>
         <p:txBody>
-          <a:bodyPr rtlCol="0" anchor="ctr" wrap="square" lIns="101600" rIns="101600" tIns="38100" bIns="38100"/>
-          <a:lstStyle/>
-          <a:p>
-            <a:pPr algn="ctr"/>
-            <a:r>
-              <a:rPr sz="1500" b="1">
-                <a:solidFill>
-                  <a:srgbClr val="FFFFFF"/>
-                </a:solidFill>
-                <a:latin typeface="Arial"/>
-              </a:rPr>
-              <a:t>2</a:t>
-            </a:r>
-          </a:p>
-        </p:txBody>
-      </p:sp>
-      <p:sp>
-        <p:nvSpPr>
-          <p:cNvPr id="15" name="TextBox 14"/>
-          <p:cNvSpPr txBox="1"/>
-          <p:nvPr/>
-        </p:nvSpPr>
-        <p:spPr>
-          <a:xfrm>
-            <a:off x="1572768" y="3968496"/>
-            <a:ext cx="9372600" cy="384048"/>
-          </a:xfrm>
-          <a:prstGeom prst="rect">
-            <a:avLst/>
-          </a:prstGeom>
-          <a:noFill/>
-        </p:spPr>
-        <p:txBody>
-          <a:bodyPr wrap="square" lIns="0" rIns="0" tIns="0" bIns="0">
-            <a:spAutoFit/>
-          </a:bodyPr>
-          <a:lstStyle/>
-          <a:p>
-            <a:r>
-              <a:rPr sz="1500" b="0">
-                <a:solidFill>
-                  <a:srgbClr val="111827"/>
-                </a:solidFill>
-                <a:latin typeface="Arial"/>
-              </a:rPr>
-              <a:t>He is God's presence in us.</a:t>
-            </a:r>
-          </a:p>
-        </p:txBody>
-      </p:sp>
-      <p:sp>
-        <p:nvSpPr>
-          <p:cNvPr id="16" name="Rectangle 15"/>
+          <a:bodyPr rtlCol="0" anchor="ctr"/>
+          <a:lstStyle/>
+          <a:p>
+            <a:pPr algn="ctr"/>
+          </a:p>
+        </p:txBody>
+      </p:sp>
+      <p:sp>
+        <p:nvSpPr>
+          <p:cNvPr id="20" name="Rounded Rectangle 19"/>
           <p:cNvSpPr/>
           <p:nvPr/>
         </p:nvSpPr>
         <p:spPr>
           <a:xfrm>
-            <a:off x="868680" y="4672584"/>
-            <a:ext cx="10378440" cy="713232"/>
-          </a:xfrm>
-          <a:prstGeom prst="rect">
-            <a:avLst/>
-          </a:prstGeom>
-          <a:solidFill>
-            <a:srgbClr val="FFFFFF"/>
-          </a:solidFill>
-          <a:ln w="11430">
-            <a:solidFill>
-              <a:srgbClr val="CBD5E1"/>
-            </a:solidFill>
+            <a:off x="9411004" y="3515868"/>
+            <a:ext cx="1030986" cy="135331"/>
+          </a:xfrm>
+          <a:prstGeom prst="roundRect">
+            <a:avLst/>
+          </a:prstGeom>
+          <a:solidFill>
+            <a:srgbClr val="D90000"/>
+          </a:solidFill>
+          <a:ln>
+            <a:noFill/>
           </a:ln>
         </p:spPr>
         <p:style>
@@ -6935,66 +8229,14 @@
       </p:sp>
       <p:sp>
         <p:nvSpPr>
-          <p:cNvPr id="17" name="Rectangle 16"/>
-          <p:cNvSpPr/>
-          <p:nvPr/>
-        </p:nvSpPr>
-        <p:spPr>
-          <a:xfrm>
-            <a:off x="868680" y="4672584"/>
-            <a:ext cx="530352" cy="713232"/>
-          </a:xfrm>
-          <a:prstGeom prst="rect">
-            <a:avLst/>
-          </a:prstGeom>
-          <a:solidFill>
-            <a:srgbClr val="D97706"/>
-          </a:solidFill>
-          <a:ln>
-            <a:noFill/>
-          </a:ln>
-        </p:spPr>
-        <p:style>
-          <a:lnRef idx="1">
-            <a:schemeClr val="accent1"/>
-          </a:lnRef>
-          <a:fillRef idx="3">
-            <a:schemeClr val="accent1"/>
-          </a:fillRef>
-          <a:effectRef idx="2">
-            <a:schemeClr val="accent1"/>
-          </a:effectRef>
-          <a:fontRef idx="minor">
-            <a:schemeClr val="lt1"/>
-          </a:fontRef>
-        </p:style>
-        <p:txBody>
-          <a:bodyPr rtlCol="0" anchor="ctr" wrap="square" lIns="101600" rIns="101600" tIns="38100" bIns="38100"/>
-          <a:lstStyle/>
-          <a:p>
-            <a:pPr algn="ctr"/>
-            <a:r>
-              <a:rPr sz="1500" b="1">
-                <a:solidFill>
-                  <a:srgbClr val="FFFFFF"/>
-                </a:solidFill>
-                <a:latin typeface="Arial"/>
-              </a:rPr>
-              <a:t>3</a:t>
-            </a:r>
-          </a:p>
-        </p:txBody>
-      </p:sp>
-      <p:sp>
-        <p:nvSpPr>
-          <p:cNvPr id="18" name="TextBox 17"/>
+          <p:cNvPr id="21" name="TextBox 20"/>
           <p:cNvSpPr txBox="1"/>
           <p:nvPr/>
         </p:nvSpPr>
         <p:spPr>
           <a:xfrm>
-            <a:off x="1572768" y="4818888"/>
-            <a:ext cx="9372600" cy="384048"/>
+            <a:off x="8961120" y="3767328"/>
+            <a:ext cx="1874519" cy="228600"/>
           </a:xfrm>
           <a:prstGeom prst="rect">
             <a:avLst/>
@@ -7007,172 +8249,7 @@
           </a:bodyPr>
           <a:lstStyle/>
           <a:p>
-            <a:r>
-              <a:rPr sz="1500" b="0">
-                <a:solidFill>
-                  <a:srgbClr val="111827"/>
-                </a:solidFill>
-                <a:latin typeface="Arial"/>
-              </a:rPr>
-              <a:t>He is the "Gift and the Giver."</a:t>
-            </a:r>
-          </a:p>
-        </p:txBody>
-      </p:sp>
-      <p:sp>
-        <p:nvSpPr>
-          <p:cNvPr id="19" name="Rectangle 18"/>
-          <p:cNvSpPr/>
-          <p:nvPr/>
-        </p:nvSpPr>
-        <p:spPr>
-          <a:xfrm>
-            <a:off x="868680" y="5522976"/>
-            <a:ext cx="10378440" cy="713232"/>
-          </a:xfrm>
-          <a:prstGeom prst="rect">
-            <a:avLst/>
-          </a:prstGeom>
-          <a:solidFill>
-            <a:srgbClr val="FFFFFF"/>
-          </a:solidFill>
-          <a:ln w="11430">
-            <a:solidFill>
-              <a:srgbClr val="CBD5E1"/>
-            </a:solidFill>
-          </a:ln>
-        </p:spPr>
-        <p:style>
-          <a:lnRef idx="1">
-            <a:schemeClr val="accent1"/>
-          </a:lnRef>
-          <a:fillRef idx="3">
-            <a:schemeClr val="accent1"/>
-          </a:fillRef>
-          <a:effectRef idx="2">
-            <a:schemeClr val="accent1"/>
-          </a:effectRef>
-          <a:fontRef idx="minor">
-            <a:schemeClr val="lt1"/>
-          </a:fontRef>
-        </p:style>
-        <p:txBody>
-          <a:bodyPr rtlCol="0" anchor="ctr"/>
-          <a:lstStyle/>
-          <a:p>
-            <a:pPr algn="ctr"/>
-          </a:p>
-        </p:txBody>
-      </p:sp>
-      <p:sp>
-        <p:nvSpPr>
-          <p:cNvPr id="20" name="Rectangle 19"/>
-          <p:cNvSpPr/>
-          <p:nvPr/>
-        </p:nvSpPr>
-        <p:spPr>
-          <a:xfrm>
-            <a:off x="868680" y="5522976"/>
-            <a:ext cx="530352" cy="713232"/>
-          </a:xfrm>
-          <a:prstGeom prst="rect">
-            <a:avLst/>
-          </a:prstGeom>
-          <a:solidFill>
-            <a:srgbClr val="D97706"/>
-          </a:solidFill>
-          <a:ln>
-            <a:noFill/>
-          </a:ln>
-        </p:spPr>
-        <p:style>
-          <a:lnRef idx="1">
-            <a:schemeClr val="accent1"/>
-          </a:lnRef>
-          <a:fillRef idx="3">
-            <a:schemeClr val="accent1"/>
-          </a:fillRef>
-          <a:effectRef idx="2">
-            <a:schemeClr val="accent1"/>
-          </a:effectRef>
-          <a:fontRef idx="minor">
-            <a:schemeClr val="lt1"/>
-          </a:fontRef>
-        </p:style>
-        <p:txBody>
-          <a:bodyPr rtlCol="0" anchor="ctr" wrap="square" lIns="101600" rIns="101600" tIns="38100" bIns="38100"/>
-          <a:lstStyle/>
-          <a:p>
-            <a:pPr algn="ctr"/>
-            <a:r>
-              <a:rPr sz="1500" b="1">
-                <a:solidFill>
-                  <a:srgbClr val="FFFFFF"/>
-                </a:solidFill>
-                <a:latin typeface="Arial"/>
-              </a:rPr>
-              <a:t>4</a:t>
-            </a:r>
-          </a:p>
-        </p:txBody>
-      </p:sp>
-      <p:sp>
-        <p:nvSpPr>
-          <p:cNvPr id="21" name="TextBox 20"/>
-          <p:cNvSpPr txBox="1"/>
-          <p:nvPr/>
-        </p:nvSpPr>
-        <p:spPr>
-          <a:xfrm>
-            <a:off x="1572768" y="5669280"/>
-            <a:ext cx="9372600" cy="384048"/>
-          </a:xfrm>
-          <a:prstGeom prst="rect">
-            <a:avLst/>
-          </a:prstGeom>
-          <a:noFill/>
-        </p:spPr>
-        <p:txBody>
-          <a:bodyPr wrap="square" lIns="0" rIns="0" tIns="0" bIns="0">
-            <a:spAutoFit/>
-          </a:bodyPr>
-          <a:lstStyle/>
-          <a:p>
-            <a:r>
-              <a:rPr sz="1500" b="0">
-                <a:solidFill>
-                  <a:srgbClr val="111827"/>
-                </a:solidFill>
-                <a:latin typeface="Arial"/>
-              </a:rPr>
-              <a:t>Write one clear response.</a:t>
-            </a:r>
-          </a:p>
-        </p:txBody>
-      </p:sp>
-      <p:sp>
-        <p:nvSpPr>
-          <p:cNvPr id="22" name="TextBox 21"/>
-          <p:cNvSpPr txBox="1"/>
-          <p:nvPr/>
-        </p:nvSpPr>
-        <p:spPr>
-          <a:xfrm>
-            <a:off x="685800" y="6419088"/>
-            <a:ext cx="10835640" cy="228600"/>
-          </a:xfrm>
-          <a:prstGeom prst="rect">
-            <a:avLst/>
-          </a:prstGeom>
-          <a:noFill/>
-        </p:spPr>
-        <p:txBody>
-          <a:bodyPr wrap="square" lIns="0" rIns="0" tIns="0" bIns="0">
-            <a:spAutoFit/>
-          </a:bodyPr>
-          <a:lstStyle/>
-          <a:p>
-            <a:pPr algn="r"/>
+            <a:pPr algn="ctr"/>
             <a:r>
               <a:rPr sz="1000" b="0">
                 <a:solidFill>
@@ -7180,7 +8257,77 @@
                 </a:solidFill>
                 <a:latin typeface="Arial"/>
               </a:rPr>
-              <a:t>Listen • Talk • Try • Explain</a:t>
+              <a:t>Christian Religious Education</a:t>
+            </a:r>
+          </a:p>
+        </p:txBody>
+      </p:sp>
+      <p:sp>
+        <p:nvSpPr>
+          <p:cNvPr id="22" name="TextBox 21"/>
+          <p:cNvSpPr txBox="1"/>
+          <p:nvPr/>
+        </p:nvSpPr>
+        <p:spPr>
+          <a:xfrm>
+            <a:off x="8869680" y="4526280"/>
+            <a:ext cx="2057400" cy="804672"/>
+          </a:xfrm>
+          <a:prstGeom prst="rect">
+            <a:avLst/>
+          </a:prstGeom>
+          <a:noFill/>
+        </p:spPr>
+        <p:txBody>
+          <a:bodyPr wrap="square" lIns="0" rIns="0" tIns="0" bIns="0">
+            <a:spAutoFit/>
+          </a:bodyPr>
+          <a:lstStyle/>
+          <a:p>
+            <a:pPr algn="ctr"/>
+            <a:r>
+              <a:rPr sz="1400" b="1">
+                <a:solidFill>
+                  <a:srgbClr val="111827"/>
+                </a:solidFill>
+                <a:latin typeface="Arial"/>
+              </a:rPr>
+              <a:t>Teacher models first. Learners copy the pattern, then explain the step.</a:t>
+            </a:r>
+          </a:p>
+        </p:txBody>
+      </p:sp>
+      <p:sp>
+        <p:nvSpPr>
+          <p:cNvPr id="23" name="TextBox 22"/>
+          <p:cNvSpPr txBox="1"/>
+          <p:nvPr/>
+        </p:nvSpPr>
+        <p:spPr>
+          <a:xfrm>
+            <a:off x="713232" y="6355080"/>
+            <a:ext cx="10835640" cy="219456"/>
+          </a:xfrm>
+          <a:prstGeom prst="rect">
+            <a:avLst/>
+          </a:prstGeom>
+          <a:noFill/>
+        </p:spPr>
+        <p:txBody>
+          <a:bodyPr wrap="square" lIns="0" rIns="0" tIns="0" bIns="0">
+            <a:spAutoFit/>
+          </a:bodyPr>
+          <a:lstStyle/>
+          <a:p>
+            <a:pPr algn="r"/>
+            <a:r>
+              <a:rPr sz="1000" b="0">
+                <a:solidFill>
+                  <a:srgbClr val="475569"/>
+                </a:solidFill>
+                <a:latin typeface="Arial"/>
+              </a:rPr>
+              <a:t>P7 class flow: listen • talk • try • explain</a:t>
             </a:r>
           </a:p>
         </p:txBody>
@@ -7385,7 +8532,93 @@
       </p:sp>
       <p:sp>
         <p:nvSpPr>
-          <p:cNvPr id="6" name="TextBox 5"/>
+          <p:cNvPr id="6" name="Rectangle 5"/>
+          <p:cNvSpPr/>
+          <p:nvPr/>
+        </p:nvSpPr>
+        <p:spPr>
+          <a:xfrm>
+            <a:off x="164592" y="6565392"/>
+            <a:ext cx="12027103" cy="73152"/>
+          </a:xfrm>
+          <a:prstGeom prst="rect">
+            <a:avLst/>
+          </a:prstGeom>
+          <a:solidFill>
+            <a:srgbClr val="FCD116"/>
+          </a:solidFill>
+          <a:ln>
+            <a:noFill/>
+          </a:ln>
+        </p:spPr>
+        <p:style>
+          <a:lnRef idx="1">
+            <a:schemeClr val="accent1"/>
+          </a:lnRef>
+          <a:fillRef idx="3">
+            <a:schemeClr val="accent1"/>
+          </a:fillRef>
+          <a:effectRef idx="2">
+            <a:schemeClr val="accent1"/>
+          </a:effectRef>
+          <a:fontRef idx="minor">
+            <a:schemeClr val="lt1"/>
+          </a:fontRef>
+        </p:style>
+        <p:txBody>
+          <a:bodyPr rtlCol="0" anchor="ctr"/>
+          <a:lstStyle/>
+          <a:p>
+            <a:pPr algn="ctr"/>
+          </a:p>
+        </p:txBody>
+      </p:sp>
+      <p:sp>
+        <p:nvSpPr>
+          <p:cNvPr id="7" name="Rectangle 6"/>
+          <p:cNvSpPr/>
+          <p:nvPr/>
+        </p:nvSpPr>
+        <p:spPr>
+          <a:xfrm>
+            <a:off x="164592" y="6638544"/>
+            <a:ext cx="12027103" cy="45720"/>
+          </a:xfrm>
+          <a:prstGeom prst="rect">
+            <a:avLst/>
+          </a:prstGeom>
+          <a:solidFill>
+            <a:srgbClr val="D90000"/>
+          </a:solidFill>
+          <a:ln>
+            <a:noFill/>
+          </a:ln>
+        </p:spPr>
+        <p:style>
+          <a:lnRef idx="1">
+            <a:schemeClr val="accent1"/>
+          </a:lnRef>
+          <a:fillRef idx="3">
+            <a:schemeClr val="accent1"/>
+          </a:fillRef>
+          <a:effectRef idx="2">
+            <a:schemeClr val="accent1"/>
+          </a:effectRef>
+          <a:fontRef idx="minor">
+            <a:schemeClr val="lt1"/>
+          </a:fontRef>
+        </p:style>
+        <p:txBody>
+          <a:bodyPr rtlCol="0" anchor="ctr"/>
+          <a:lstStyle/>
+          <a:p>
+            <a:pPr algn="ctr"/>
+          </a:p>
+        </p:txBody>
+      </p:sp>
+      <p:sp>
+        <p:nvSpPr>
+          <p:cNvPr id="8" name="TextBox 7"/>
           <p:cNvSpPr txBox="1"/>
           <p:nvPr/>
         </p:nvSpPr>
@@ -7419,7 +8652,7 @@
       </p:sp>
       <p:sp>
         <p:nvSpPr>
-          <p:cNvPr id="7" name="TextBox 6"/>
+          <p:cNvPr id="9" name="TextBox 8"/>
           <p:cNvSpPr txBox="1"/>
           <p:nvPr/>
         </p:nvSpPr>
@@ -7454,14 +8687,14 @@
       </p:sp>
       <p:sp>
         <p:nvSpPr>
-          <p:cNvPr id="8" name="TextBox 7"/>
+          <p:cNvPr id="10" name="TextBox 9"/>
           <p:cNvSpPr txBox="1"/>
           <p:nvPr/>
         </p:nvSpPr>
         <p:spPr>
           <a:xfrm>
-            <a:off x="594360" y="1042415"/>
-            <a:ext cx="11109960" cy="566928"/>
+            <a:off x="594360" y="1005840"/>
+            <a:ext cx="11064240" cy="512064"/>
           </a:xfrm>
           <a:prstGeom prst="rect">
             <a:avLst/>
@@ -7488,16 +8721,16 @@
       </p:sp>
       <p:sp>
         <p:nvSpPr>
-          <p:cNvPr id="9" name="Rectangle 8"/>
+          <p:cNvPr id="11" name="Rounded Rectangle 10"/>
           <p:cNvSpPr/>
           <p:nvPr/>
         </p:nvSpPr>
         <p:spPr>
           <a:xfrm>
-            <a:off x="685800" y="1874519"/>
-            <a:ext cx="10835640" cy="804672"/>
-          </a:xfrm>
-          <a:prstGeom prst="rect">
+            <a:off x="777240" y="1719072"/>
+            <a:ext cx="10652760" cy="822960"/>
+          </a:xfrm>
+          <a:prstGeom prst="roundRect">
             <a:avLst/>
           </a:prstGeom>
           <a:solidFill>
@@ -7535,23 +8768,23 @@
                 </a:solidFill>
                 <a:latin typeface="Arial"/>
               </a:rPr>
-              <a:t>How do you know the wind is there?</a:t>
-            </a:r>
-          </a:p>
-        </p:txBody>
-      </p:sp>
-      <p:sp>
-        <p:nvSpPr>
-          <p:cNvPr id="10" name="Rectangle 9"/>
+              <a:t>Answer with evidence:</a:t>
+            </a:r>
+          </a:p>
+        </p:txBody>
+      </p:sp>
+      <p:sp>
+        <p:nvSpPr>
+          <p:cNvPr id="12" name="Rounded Rectangle 11"/>
           <p:cNvSpPr/>
           <p:nvPr/>
         </p:nvSpPr>
         <p:spPr>
           <a:xfrm>
-            <a:off x="868680" y="2971800"/>
-            <a:ext cx="10378440" cy="713232"/>
-          </a:xfrm>
-          <a:prstGeom prst="rect">
+            <a:off x="868680" y="2743200"/>
+            <a:ext cx="10378440" cy="804672"/>
+          </a:xfrm>
+          <a:prstGeom prst="roundRect">
             <a:avLst/>
           </a:prstGeom>
           <a:solidFill>
@@ -7587,16 +8820,16 @@
       </p:sp>
       <p:sp>
         <p:nvSpPr>
-          <p:cNvPr id="11" name="Rectangle 10"/>
+          <p:cNvPr id="13" name="Oval 12"/>
           <p:cNvSpPr/>
           <p:nvPr/>
         </p:nvSpPr>
         <p:spPr>
           <a:xfrm>
-            <a:off x="868680" y="2971800"/>
-            <a:ext cx="530352" cy="713232"/>
-          </a:xfrm>
-          <a:prstGeom prst="rect">
+            <a:off x="1078992" y="2898648"/>
+            <a:ext cx="475488" cy="475488"/>
+          </a:xfrm>
+          <a:prstGeom prst="ellipse">
             <a:avLst/>
           </a:prstGeom>
           <a:solidFill>
@@ -7632,21 +8865,21 @@
                 </a:solidFill>
                 <a:latin typeface="Arial"/>
               </a:rPr>
-              <a:t>1</a:t>
-            </a:r>
-          </a:p>
-        </p:txBody>
-      </p:sp>
-      <p:sp>
-        <p:nvSpPr>
-          <p:cNvPr id="12" name="TextBox 11"/>
+              <a:t>?</a:t>
+            </a:r>
+          </a:p>
+        </p:txBody>
+      </p:sp>
+      <p:sp>
+        <p:nvSpPr>
+          <p:cNvPr id="14" name="TextBox 13"/>
           <p:cNvSpPr txBox="1"/>
           <p:nvPr/>
         </p:nvSpPr>
         <p:spPr>
           <a:xfrm>
-            <a:off x="1572768" y="3118104"/>
-            <a:ext cx="9372600" cy="384048"/>
+            <a:off x="1719072" y="2889504"/>
+            <a:ext cx="5623560" cy="384048"/>
           </a:xfrm>
           <a:prstGeom prst="rect">
             <a:avLst/>
@@ -7660,7 +8893,181 @@
           <a:lstStyle/>
           <a:p>
             <a:r>
-              <a:rPr sz="1500" b="0">
+              <a:rPr sz="1600" b="1">
+                <a:solidFill>
+                  <a:srgbClr val="111827"/>
+                </a:solidFill>
+                <a:latin typeface="Arial"/>
+              </a:rPr>
+              <a:t>How do you know the wind is there?</a:t>
+            </a:r>
+          </a:p>
+        </p:txBody>
+      </p:sp>
+      <p:sp>
+        <p:nvSpPr>
+          <p:cNvPr id="15" name="Rectangle 14"/>
+          <p:cNvSpPr/>
+          <p:nvPr/>
+        </p:nvSpPr>
+        <p:spPr>
+          <a:xfrm>
+            <a:off x="7635240" y="3264408"/>
+            <a:ext cx="3246120" cy="36576"/>
+          </a:xfrm>
+          <a:prstGeom prst="rect">
+            <a:avLst/>
+          </a:prstGeom>
+          <a:solidFill>
+            <a:srgbClr val="CBD5E1"/>
+          </a:solidFill>
+          <a:ln>
+            <a:noFill/>
+          </a:ln>
+        </p:spPr>
+        <p:style>
+          <a:lnRef idx="1">
+            <a:schemeClr val="accent1"/>
+          </a:lnRef>
+          <a:fillRef idx="3">
+            <a:schemeClr val="accent1"/>
+          </a:fillRef>
+          <a:effectRef idx="2">
+            <a:schemeClr val="accent1"/>
+          </a:effectRef>
+          <a:fontRef idx="minor">
+            <a:schemeClr val="lt1"/>
+          </a:fontRef>
+        </p:style>
+        <p:txBody>
+          <a:bodyPr rtlCol="0" anchor="ctr"/>
+          <a:lstStyle/>
+          <a:p>
+            <a:pPr algn="ctr"/>
+          </a:p>
+        </p:txBody>
+      </p:sp>
+      <p:sp>
+        <p:nvSpPr>
+          <p:cNvPr id="16" name="Rounded Rectangle 15"/>
+          <p:cNvSpPr/>
+          <p:nvPr/>
+        </p:nvSpPr>
+        <p:spPr>
+          <a:xfrm>
+            <a:off x="868680" y="3822191"/>
+            <a:ext cx="10378440" cy="804672"/>
+          </a:xfrm>
+          <a:prstGeom prst="roundRect">
+            <a:avLst/>
+          </a:prstGeom>
+          <a:solidFill>
+            <a:srgbClr val="FFFFFF"/>
+          </a:solidFill>
+          <a:ln w="11430">
+            <a:solidFill>
+              <a:srgbClr val="CBD5E1"/>
+            </a:solidFill>
+          </a:ln>
+        </p:spPr>
+        <p:style>
+          <a:lnRef idx="1">
+            <a:schemeClr val="accent1"/>
+          </a:lnRef>
+          <a:fillRef idx="3">
+            <a:schemeClr val="accent1"/>
+          </a:fillRef>
+          <a:effectRef idx="2">
+            <a:schemeClr val="accent1"/>
+          </a:effectRef>
+          <a:fontRef idx="minor">
+            <a:schemeClr val="lt1"/>
+          </a:fontRef>
+        </p:style>
+        <p:txBody>
+          <a:bodyPr rtlCol="0" anchor="ctr"/>
+          <a:lstStyle/>
+          <a:p>
+            <a:pPr algn="ctr"/>
+          </a:p>
+        </p:txBody>
+      </p:sp>
+      <p:sp>
+        <p:nvSpPr>
+          <p:cNvPr id="17" name="Oval 16"/>
+          <p:cNvSpPr/>
+          <p:nvPr/>
+        </p:nvSpPr>
+        <p:spPr>
+          <a:xfrm>
+            <a:off x="1078992" y="3977639"/>
+            <a:ext cx="475488" cy="475488"/>
+          </a:xfrm>
+          <a:prstGeom prst="ellipse">
+            <a:avLst/>
+          </a:prstGeom>
+          <a:solidFill>
+            <a:srgbClr val="BE123C"/>
+          </a:solidFill>
+          <a:ln>
+            <a:noFill/>
+          </a:ln>
+        </p:spPr>
+        <p:style>
+          <a:lnRef idx="1">
+            <a:schemeClr val="accent1"/>
+          </a:lnRef>
+          <a:fillRef idx="3">
+            <a:schemeClr val="accent1"/>
+          </a:fillRef>
+          <a:effectRef idx="2">
+            <a:schemeClr val="accent1"/>
+          </a:effectRef>
+          <a:fontRef idx="minor">
+            <a:schemeClr val="lt1"/>
+          </a:fontRef>
+        </p:style>
+        <p:txBody>
+          <a:bodyPr rtlCol="0" anchor="ctr" wrap="square" lIns="101600" rIns="101600" tIns="38100" bIns="38100"/>
+          <a:lstStyle/>
+          <a:p>
+            <a:pPr algn="ctr"/>
+            <a:r>
+              <a:rPr sz="1500" b="1">
+                <a:solidFill>
+                  <a:srgbClr val="FFFFFF"/>
+                </a:solidFill>
+                <a:latin typeface="Arial"/>
+              </a:rPr>
+              <a:t>?</a:t>
+            </a:r>
+          </a:p>
+        </p:txBody>
+      </p:sp>
+      <p:sp>
+        <p:nvSpPr>
+          <p:cNvPr id="18" name="TextBox 17"/>
+          <p:cNvSpPr txBox="1"/>
+          <p:nvPr/>
+        </p:nvSpPr>
+        <p:spPr>
+          <a:xfrm>
+            <a:off x="1719072" y="3968496"/>
+            <a:ext cx="5623560" cy="384048"/>
+          </a:xfrm>
+          <a:prstGeom prst="rect">
+            <a:avLst/>
+          </a:prstGeom>
+          <a:noFill/>
+        </p:spPr>
+        <p:txBody>
+          <a:bodyPr wrap="square" lIns="0" rIns="0" tIns="0" bIns="0">
+            <a:spAutoFit/>
+          </a:bodyPr>
+          <a:lstStyle/>
+          <a:p>
+            <a:r>
+              <a:rPr sz="1600" b="1">
                 <a:solidFill>
                   <a:srgbClr val="111827"/>
                 </a:solidFill>
@@ -7673,16 +9080,59 @@
       </p:sp>
       <p:sp>
         <p:nvSpPr>
-          <p:cNvPr id="13" name="Rectangle 12"/>
+          <p:cNvPr id="19" name="Rectangle 18"/>
           <p:cNvSpPr/>
           <p:nvPr/>
         </p:nvSpPr>
         <p:spPr>
           <a:xfrm>
-            <a:off x="868680" y="3822191"/>
-            <a:ext cx="10378440" cy="713232"/>
-          </a:xfrm>
-          <a:prstGeom prst="rect">
+            <a:off x="7635240" y="4343400"/>
+            <a:ext cx="3246120" cy="36576"/>
+          </a:xfrm>
+          <a:prstGeom prst="rect">
+            <a:avLst/>
+          </a:prstGeom>
+          <a:solidFill>
+            <a:srgbClr val="CBD5E1"/>
+          </a:solidFill>
+          <a:ln>
+            <a:noFill/>
+          </a:ln>
+        </p:spPr>
+        <p:style>
+          <a:lnRef idx="1">
+            <a:schemeClr val="accent1"/>
+          </a:lnRef>
+          <a:fillRef idx="3">
+            <a:schemeClr val="accent1"/>
+          </a:fillRef>
+          <a:effectRef idx="2">
+            <a:schemeClr val="accent1"/>
+          </a:effectRef>
+          <a:fontRef idx="minor">
+            <a:schemeClr val="lt1"/>
+          </a:fontRef>
+        </p:style>
+        <p:txBody>
+          <a:bodyPr rtlCol="0" anchor="ctr"/>
+          <a:lstStyle/>
+          <a:p>
+            <a:pPr algn="ctr"/>
+          </a:p>
+        </p:txBody>
+      </p:sp>
+      <p:sp>
+        <p:nvSpPr>
+          <p:cNvPr id="20" name="Rounded Rectangle 19"/>
+          <p:cNvSpPr/>
+          <p:nvPr/>
+        </p:nvSpPr>
+        <p:spPr>
+          <a:xfrm>
+            <a:off x="868680" y="4901183"/>
+            <a:ext cx="10378440" cy="804672"/>
+          </a:xfrm>
+          <a:prstGeom prst="roundRect">
             <a:avLst/>
           </a:prstGeom>
           <a:solidFill>
@@ -7718,16 +9168,16 @@
       </p:sp>
       <p:sp>
         <p:nvSpPr>
-          <p:cNvPr id="14" name="Rectangle 13"/>
+          <p:cNvPr id="21" name="Oval 20"/>
           <p:cNvSpPr/>
           <p:nvPr/>
         </p:nvSpPr>
         <p:spPr>
           <a:xfrm>
-            <a:off x="868680" y="3822191"/>
-            <a:ext cx="530352" cy="713232"/>
-          </a:xfrm>
-          <a:prstGeom prst="rect">
+            <a:off x="1078992" y="5056631"/>
+            <a:ext cx="475488" cy="475488"/>
+          </a:xfrm>
+          <a:prstGeom prst="ellipse">
             <a:avLst/>
           </a:prstGeom>
           <a:solidFill>
@@ -7763,21 +9213,21 @@
                 </a:solidFill>
                 <a:latin typeface="Arial"/>
               </a:rPr>
-              <a:t>2</a:t>
-            </a:r>
-          </a:p>
-        </p:txBody>
-      </p:sp>
-      <p:sp>
-        <p:nvSpPr>
-          <p:cNvPr id="15" name="TextBox 14"/>
+              <a:t>?</a:t>
+            </a:r>
+          </a:p>
+        </p:txBody>
+      </p:sp>
+      <p:sp>
+        <p:nvSpPr>
+          <p:cNvPr id="22" name="TextBox 21"/>
           <p:cNvSpPr txBox="1"/>
           <p:nvPr/>
         </p:nvSpPr>
         <p:spPr>
           <a:xfrm>
-            <a:off x="1572768" y="3968496"/>
-            <a:ext cx="9372600" cy="384048"/>
+            <a:off x="1719072" y="5047488"/>
+            <a:ext cx="5623560" cy="384048"/>
           </a:xfrm>
           <a:prstGeom prst="rect">
             <a:avLst/>
@@ -7791,7 +9241,7 @@
           <a:lstStyle/>
           <a:p>
             <a:r>
-              <a:rPr sz="1500" b="0">
+              <a:rPr sz="1600" b="1">
                 <a:solidFill>
                   <a:srgbClr val="111827"/>
                 </a:solidFill>
@@ -7804,25 +9254,23 @@
       </p:sp>
       <p:sp>
         <p:nvSpPr>
-          <p:cNvPr id="16" name="Rectangle 15"/>
+          <p:cNvPr id="23" name="Rectangle 22"/>
           <p:cNvSpPr/>
           <p:nvPr/>
         </p:nvSpPr>
         <p:spPr>
           <a:xfrm>
-            <a:off x="868680" y="4672584"/>
-            <a:ext cx="10378440" cy="713232"/>
-          </a:xfrm>
-          <a:prstGeom prst="rect">
-            <a:avLst/>
-          </a:prstGeom>
-          <a:solidFill>
-            <a:srgbClr val="FFFFFF"/>
-          </a:solidFill>
-          <a:ln w="11430">
-            <a:solidFill>
-              <a:srgbClr val="CBD5E1"/>
-            </a:solidFill>
+            <a:off x="7635240" y="5422392"/>
+            <a:ext cx="3246120" cy="36576"/>
+          </a:xfrm>
+          <a:prstGeom prst="rect">
+            <a:avLst/>
+          </a:prstGeom>
+          <a:solidFill>
+            <a:srgbClr val="CBD5E1"/>
+          </a:solidFill>
+          <a:ln>
+            <a:noFill/>
           </a:ln>
         </p:spPr>
         <p:style>
@@ -7849,231 +9297,49 @@
       </p:sp>
       <p:sp>
         <p:nvSpPr>
-          <p:cNvPr id="17" name="Rectangle 16"/>
-          <p:cNvSpPr/>
-          <p:nvPr/>
-        </p:nvSpPr>
-        <p:spPr>
-          <a:xfrm>
-            <a:off x="868680" y="4672584"/>
-            <a:ext cx="530352" cy="713232"/>
-          </a:xfrm>
-          <a:prstGeom prst="rect">
-            <a:avLst/>
-          </a:prstGeom>
-          <a:solidFill>
-            <a:srgbClr val="BE123C"/>
-          </a:solidFill>
-          <a:ln>
-            <a:noFill/>
-          </a:ln>
-        </p:spPr>
-        <p:style>
-          <a:lnRef idx="1">
-            <a:schemeClr val="accent1"/>
-          </a:lnRef>
-          <a:fillRef idx="3">
-            <a:schemeClr val="accent1"/>
-          </a:fillRef>
-          <a:effectRef idx="2">
-            <a:schemeClr val="accent1"/>
-          </a:effectRef>
-          <a:fontRef idx="minor">
-            <a:schemeClr val="lt1"/>
-          </a:fontRef>
-        </p:style>
-        <p:txBody>
-          <a:bodyPr rtlCol="0" anchor="ctr" wrap="square" lIns="101600" rIns="101600" tIns="38100" bIns="38100"/>
-          <a:lstStyle/>
-          <a:p>
-            <a:pPr algn="ctr"/>
-            <a:r>
-              <a:rPr sz="1500" b="1">
+          <p:cNvPr id="24" name="TextBox 23"/>
+          <p:cNvSpPr txBox="1"/>
+          <p:nvPr/>
+        </p:nvSpPr>
+        <p:spPr>
+          <a:xfrm>
+            <a:off x="896112" y="5989320"/>
+            <a:ext cx="10287000" cy="274320"/>
+          </a:xfrm>
+          <a:prstGeom prst="rect">
+            <a:avLst/>
+          </a:prstGeom>
+          <a:noFill/>
+        </p:spPr>
+        <p:txBody>
+          <a:bodyPr wrap="square" lIns="0" rIns="0" tIns="0" bIns="0">
+            <a:spAutoFit/>
+          </a:bodyPr>
+          <a:lstStyle/>
+          <a:p>
+            <a:pPr algn="ctr"/>
+            <a:r>
+              <a:rPr sz="1200" b="0">
                 <a:solidFill>
-                  <a:srgbClr val="FFFFFF"/>
+                  <a:srgbClr val="475569"/>
                 </a:solidFill>
                 <a:latin typeface="Arial"/>
               </a:rPr>
-              <a:t>3</a:t>
-            </a:r>
-          </a:p>
-        </p:txBody>
-      </p:sp>
-      <p:sp>
-        <p:nvSpPr>
-          <p:cNvPr id="18" name="TextBox 17"/>
+              <a:t>Use the source idea, not guessing.</a:t>
+            </a:r>
+          </a:p>
+        </p:txBody>
+      </p:sp>
+      <p:sp>
+        <p:nvSpPr>
+          <p:cNvPr id="25" name="TextBox 24"/>
           <p:cNvSpPr txBox="1"/>
           <p:nvPr/>
         </p:nvSpPr>
         <p:spPr>
           <a:xfrm>
-            <a:off x="1572768" y="4818888"/>
-            <a:ext cx="9372600" cy="384048"/>
-          </a:xfrm>
-          <a:prstGeom prst="rect">
-            <a:avLst/>
-          </a:prstGeom>
-          <a:noFill/>
-        </p:spPr>
-        <p:txBody>
-          <a:bodyPr wrap="square" lIns="0" rIns="0" tIns="0" bIns="0">
-            <a:spAutoFit/>
-          </a:bodyPr>
-          <a:lstStyle/>
-          <a:p>
-            <a:r>
-              <a:rPr sz="1500" b="0">
-                <a:solidFill>
-                  <a:srgbClr val="111827"/>
-                </a:solidFill>
-                <a:latin typeface="Arial"/>
-              </a:rPr>
-              <a:t>Agree on one answer before writing.</a:t>
-            </a:r>
-          </a:p>
-        </p:txBody>
-      </p:sp>
-      <p:sp>
-        <p:nvSpPr>
-          <p:cNvPr id="19" name="Rectangle 18"/>
-          <p:cNvSpPr/>
-          <p:nvPr/>
-        </p:nvSpPr>
-        <p:spPr>
-          <a:xfrm>
-            <a:off x="868680" y="5522976"/>
-            <a:ext cx="10378440" cy="713232"/>
-          </a:xfrm>
-          <a:prstGeom prst="rect">
-            <a:avLst/>
-          </a:prstGeom>
-          <a:solidFill>
-            <a:srgbClr val="FFFFFF"/>
-          </a:solidFill>
-          <a:ln w="11430">
-            <a:solidFill>
-              <a:srgbClr val="CBD5E1"/>
-            </a:solidFill>
-          </a:ln>
-        </p:spPr>
-        <p:style>
-          <a:lnRef idx="1">
-            <a:schemeClr val="accent1"/>
-          </a:lnRef>
-          <a:fillRef idx="3">
-            <a:schemeClr val="accent1"/>
-          </a:fillRef>
-          <a:effectRef idx="2">
-            <a:schemeClr val="accent1"/>
-          </a:effectRef>
-          <a:fontRef idx="minor">
-            <a:schemeClr val="lt1"/>
-          </a:fontRef>
-        </p:style>
-        <p:txBody>
-          <a:bodyPr rtlCol="0" anchor="ctr"/>
-          <a:lstStyle/>
-          <a:p>
-            <a:pPr algn="ctr"/>
-          </a:p>
-        </p:txBody>
-      </p:sp>
-      <p:sp>
-        <p:nvSpPr>
-          <p:cNvPr id="20" name="Rectangle 19"/>
-          <p:cNvSpPr/>
-          <p:nvPr/>
-        </p:nvSpPr>
-        <p:spPr>
-          <a:xfrm>
-            <a:off x="868680" y="5522976"/>
-            <a:ext cx="530352" cy="713232"/>
-          </a:xfrm>
-          <a:prstGeom prst="rect">
-            <a:avLst/>
-          </a:prstGeom>
-          <a:solidFill>
-            <a:srgbClr val="BE123C"/>
-          </a:solidFill>
-          <a:ln>
-            <a:noFill/>
-          </a:ln>
-        </p:spPr>
-        <p:style>
-          <a:lnRef idx="1">
-            <a:schemeClr val="accent1"/>
-          </a:lnRef>
-          <a:fillRef idx="3">
-            <a:schemeClr val="accent1"/>
-          </a:fillRef>
-          <a:effectRef idx="2">
-            <a:schemeClr val="accent1"/>
-          </a:effectRef>
-          <a:fontRef idx="minor">
-            <a:schemeClr val="lt1"/>
-          </a:fontRef>
-        </p:style>
-        <p:txBody>
-          <a:bodyPr rtlCol="0" anchor="ctr" wrap="square" lIns="101600" rIns="101600" tIns="38100" bIns="38100"/>
-          <a:lstStyle/>
-          <a:p>
-            <a:pPr algn="ctr"/>
-            <a:r>
-              <a:rPr sz="1500" b="1">
-                <a:solidFill>
-                  <a:srgbClr val="FFFFFF"/>
-                </a:solidFill>
-                <a:latin typeface="Arial"/>
-              </a:rPr>
-              <a:t>4</a:t>
-            </a:r>
-          </a:p>
-        </p:txBody>
-      </p:sp>
-      <p:sp>
-        <p:nvSpPr>
-          <p:cNvPr id="21" name="TextBox 20"/>
-          <p:cNvSpPr txBox="1"/>
-          <p:nvPr/>
-        </p:nvSpPr>
-        <p:spPr>
-          <a:xfrm>
-            <a:off x="1572768" y="5669280"/>
-            <a:ext cx="9372600" cy="384048"/>
-          </a:xfrm>
-          <a:prstGeom prst="rect">
-            <a:avLst/>
-          </a:prstGeom>
-          <a:noFill/>
-        </p:spPr>
-        <p:txBody>
-          <a:bodyPr wrap="square" lIns="0" rIns="0" tIns="0" bIns="0">
-            <a:spAutoFit/>
-          </a:bodyPr>
-          <a:lstStyle/>
-          <a:p>
-            <a:r>
-              <a:rPr sz="1500" b="0">
-                <a:solidFill>
-                  <a:srgbClr val="111827"/>
-                </a:solidFill>
-                <a:latin typeface="Arial"/>
-              </a:rPr>
-              <a:t>Write one clear response.</a:t>
-            </a:r>
-          </a:p>
-        </p:txBody>
-      </p:sp>
-      <p:sp>
-        <p:nvSpPr>
-          <p:cNvPr id="22" name="TextBox 21"/>
-          <p:cNvSpPr txBox="1"/>
-          <p:nvPr/>
-        </p:nvSpPr>
-        <p:spPr>
-          <a:xfrm>
-            <a:off x="685800" y="6419088"/>
-            <a:ext cx="10835640" cy="228600"/>
+            <a:off x="713232" y="6355080"/>
+            <a:ext cx="10835640" cy="219456"/>
           </a:xfrm>
           <a:prstGeom prst="rect">
             <a:avLst/>
@@ -8094,7 +9360,7 @@
                 </a:solidFill>
                 <a:latin typeface="Arial"/>
               </a:rPr>
-              <a:t>Listen • Talk • Try • Explain</a:t>
+              <a:t>P7 class flow: listen • talk • try • explain</a:t>
             </a:r>
           </a:p>
         </p:txBody>
@@ -8299,7 +9565,93 @@
       </p:sp>
       <p:sp>
         <p:nvSpPr>
-          <p:cNvPr id="6" name="TextBox 5"/>
+          <p:cNvPr id="6" name="Rectangle 5"/>
+          <p:cNvSpPr/>
+          <p:nvPr/>
+        </p:nvSpPr>
+        <p:spPr>
+          <a:xfrm>
+            <a:off x="164592" y="6565392"/>
+            <a:ext cx="12027103" cy="73152"/>
+          </a:xfrm>
+          <a:prstGeom prst="rect">
+            <a:avLst/>
+          </a:prstGeom>
+          <a:solidFill>
+            <a:srgbClr val="FCD116"/>
+          </a:solidFill>
+          <a:ln>
+            <a:noFill/>
+          </a:ln>
+        </p:spPr>
+        <p:style>
+          <a:lnRef idx="1">
+            <a:schemeClr val="accent1"/>
+          </a:lnRef>
+          <a:fillRef idx="3">
+            <a:schemeClr val="accent1"/>
+          </a:fillRef>
+          <a:effectRef idx="2">
+            <a:schemeClr val="accent1"/>
+          </a:effectRef>
+          <a:fontRef idx="minor">
+            <a:schemeClr val="lt1"/>
+          </a:fontRef>
+        </p:style>
+        <p:txBody>
+          <a:bodyPr rtlCol="0" anchor="ctr"/>
+          <a:lstStyle/>
+          <a:p>
+            <a:pPr algn="ctr"/>
+          </a:p>
+        </p:txBody>
+      </p:sp>
+      <p:sp>
+        <p:nvSpPr>
+          <p:cNvPr id="7" name="Rectangle 6"/>
+          <p:cNvSpPr/>
+          <p:nvPr/>
+        </p:nvSpPr>
+        <p:spPr>
+          <a:xfrm>
+            <a:off x="164592" y="6638544"/>
+            <a:ext cx="12027103" cy="45720"/>
+          </a:xfrm>
+          <a:prstGeom prst="rect">
+            <a:avLst/>
+          </a:prstGeom>
+          <a:solidFill>
+            <a:srgbClr val="D90000"/>
+          </a:solidFill>
+          <a:ln>
+            <a:noFill/>
+          </a:ln>
+        </p:spPr>
+        <p:style>
+          <a:lnRef idx="1">
+            <a:schemeClr val="accent1"/>
+          </a:lnRef>
+          <a:fillRef idx="3">
+            <a:schemeClr val="accent1"/>
+          </a:fillRef>
+          <a:effectRef idx="2">
+            <a:schemeClr val="accent1"/>
+          </a:effectRef>
+          <a:fontRef idx="minor">
+            <a:schemeClr val="lt1"/>
+          </a:fontRef>
+        </p:style>
+        <p:txBody>
+          <a:bodyPr rtlCol="0" anchor="ctr"/>
+          <a:lstStyle/>
+          <a:p>
+            <a:pPr algn="ctr"/>
+          </a:p>
+        </p:txBody>
+      </p:sp>
+      <p:sp>
+        <p:nvSpPr>
+          <p:cNvPr id="8" name="TextBox 7"/>
           <p:cNvSpPr txBox="1"/>
           <p:nvPr/>
         </p:nvSpPr>
@@ -8333,7 +9685,7 @@
       </p:sp>
       <p:sp>
         <p:nvSpPr>
-          <p:cNvPr id="7" name="TextBox 6"/>
+          <p:cNvPr id="9" name="TextBox 8"/>
           <p:cNvSpPr txBox="1"/>
           <p:nvPr/>
         </p:nvSpPr>
@@ -8368,14 +9720,14 @@
       </p:sp>
       <p:sp>
         <p:nvSpPr>
-          <p:cNvPr id="8" name="TextBox 7"/>
+          <p:cNvPr id="10" name="TextBox 9"/>
           <p:cNvSpPr txBox="1"/>
           <p:nvPr/>
         </p:nvSpPr>
         <p:spPr>
           <a:xfrm>
-            <a:off x="594360" y="1042415"/>
-            <a:ext cx="11109960" cy="566928"/>
+            <a:off x="594360" y="1005840"/>
+            <a:ext cx="11064240" cy="512064"/>
           </a:xfrm>
           <a:prstGeom prst="rect">
             <a:avLst/>
@@ -8402,16 +9754,16 @@
       </p:sp>
       <p:sp>
         <p:nvSpPr>
-          <p:cNvPr id="9" name="Rectangle 8"/>
+          <p:cNvPr id="11" name="Rounded Rectangle 10"/>
           <p:cNvSpPr/>
           <p:nvPr/>
         </p:nvSpPr>
         <p:spPr>
           <a:xfrm>
-            <a:off x="685800" y="1874519"/>
-            <a:ext cx="10835640" cy="804672"/>
-          </a:xfrm>
-          <a:prstGeom prst="rect">
+            <a:off x="777240" y="1783080"/>
+            <a:ext cx="3063240" cy="4343400"/>
+          </a:xfrm>
+          <a:prstGeom prst="roundRect">
             <a:avLst/>
           </a:prstGeom>
           <a:solidFill>
@@ -8438,34 +9790,304 @@
           </a:fontRef>
         </p:style>
         <p:txBody>
-          <a:bodyPr rtlCol="0" anchor="ctr" wrap="square" lIns="101600" rIns="101600" tIns="38100" bIns="38100"/>
-          <a:lstStyle/>
-          <a:p>
-            <a:pPr algn="ctr"/>
-            <a:r>
-              <a:rPr sz="1900" b="1">
+          <a:bodyPr rtlCol="0" anchor="ctr"/>
+          <a:lstStyle/>
+          <a:p>
+            <a:pPr algn="ctr"/>
+          </a:p>
+        </p:txBody>
+      </p:sp>
+      <p:sp>
+        <p:nvSpPr>
+          <p:cNvPr id="12" name="Oval 11"/>
+          <p:cNvSpPr/>
+          <p:nvPr/>
+        </p:nvSpPr>
+        <p:spPr>
+          <a:xfrm>
+            <a:off x="2122322" y="2461564"/>
+            <a:ext cx="419709" cy="312724"/>
+          </a:xfrm>
+          <a:prstGeom prst="ellipse">
+            <a:avLst/>
+          </a:prstGeom>
+          <a:solidFill>
+            <a:srgbClr val="FCD116"/>
+          </a:solidFill>
+          <a:ln w="10160">
+            <a:solidFill>
+              <a:srgbClr val="D97706"/>
+            </a:solidFill>
+          </a:ln>
+        </p:spPr>
+        <p:style>
+          <a:lnRef idx="1">
+            <a:schemeClr val="accent1"/>
+          </a:lnRef>
+          <a:fillRef idx="3">
+            <a:schemeClr val="accent1"/>
+          </a:fillRef>
+          <a:effectRef idx="2">
+            <a:schemeClr val="accent1"/>
+          </a:effectRef>
+          <a:fontRef idx="minor">
+            <a:schemeClr val="lt1"/>
+          </a:fontRef>
+        </p:style>
+        <p:txBody>
+          <a:bodyPr rtlCol="0" anchor="ctr"/>
+          <a:lstStyle/>
+          <a:p>
+            <a:pPr algn="ctr"/>
+          </a:p>
+        </p:txBody>
+      </p:sp>
+      <p:sp>
+        <p:nvSpPr>
+          <p:cNvPr id="13" name="Rectangle 12"/>
+          <p:cNvSpPr/>
+          <p:nvPr/>
+        </p:nvSpPr>
+        <p:spPr>
+          <a:xfrm>
+            <a:off x="2262225" y="2774289"/>
+            <a:ext cx="139903" cy="729691"/>
+          </a:xfrm>
+          <a:prstGeom prst="rect">
+            <a:avLst/>
+          </a:prstGeom>
+          <a:solidFill>
+            <a:srgbClr val="D97706"/>
+          </a:solidFill>
+          <a:ln>
+            <a:noFill/>
+          </a:ln>
+        </p:spPr>
+        <p:style>
+          <a:lnRef idx="1">
+            <a:schemeClr val="accent1"/>
+          </a:lnRef>
+          <a:fillRef idx="3">
+            <a:schemeClr val="accent1"/>
+          </a:fillRef>
+          <a:effectRef idx="2">
+            <a:schemeClr val="accent1"/>
+          </a:effectRef>
+          <a:fontRef idx="minor">
+            <a:schemeClr val="lt1"/>
+          </a:fontRef>
+        </p:style>
+        <p:txBody>
+          <a:bodyPr rtlCol="0" anchor="ctr"/>
+          <a:lstStyle/>
+          <a:p>
+            <a:pPr algn="ctr"/>
+          </a:p>
+        </p:txBody>
+      </p:sp>
+      <p:sp>
+        <p:nvSpPr>
+          <p:cNvPr id="14" name="Rectangle 13"/>
+          <p:cNvSpPr/>
+          <p:nvPr/>
+        </p:nvSpPr>
+        <p:spPr>
+          <a:xfrm>
+            <a:off x="1982419" y="2982772"/>
+            <a:ext cx="699515" cy="86868"/>
+          </a:xfrm>
+          <a:prstGeom prst="rect">
+            <a:avLst/>
+          </a:prstGeom>
+          <a:solidFill>
+            <a:srgbClr val="D97706"/>
+          </a:solidFill>
+          <a:ln>
+            <a:noFill/>
+          </a:ln>
+        </p:spPr>
+        <p:style>
+          <a:lnRef idx="1">
+            <a:schemeClr val="accent1"/>
+          </a:lnRef>
+          <a:fillRef idx="3">
+            <a:schemeClr val="accent1"/>
+          </a:fillRef>
+          <a:effectRef idx="2">
+            <a:schemeClr val="accent1"/>
+          </a:effectRef>
+          <a:fontRef idx="minor">
+            <a:schemeClr val="lt1"/>
+          </a:fontRef>
+        </p:style>
+        <p:txBody>
+          <a:bodyPr rtlCol="0" anchor="ctr"/>
+          <a:lstStyle/>
+          <a:p>
+            <a:pPr algn="ctr"/>
+          </a:p>
+        </p:txBody>
+      </p:sp>
+      <p:sp>
+        <p:nvSpPr>
+          <p:cNvPr id="15" name="Rounded Rectangle 14"/>
+          <p:cNvSpPr/>
+          <p:nvPr/>
+        </p:nvSpPr>
+        <p:spPr>
+          <a:xfrm>
+            <a:off x="1702612" y="3364991"/>
+            <a:ext cx="1282446" cy="138988"/>
+          </a:xfrm>
+          <a:prstGeom prst="roundRect">
+            <a:avLst/>
+          </a:prstGeom>
+          <a:solidFill>
+            <a:srgbClr val="D90000"/>
+          </a:solidFill>
+          <a:ln>
+            <a:noFill/>
+          </a:ln>
+        </p:spPr>
+        <p:style>
+          <a:lnRef idx="1">
+            <a:schemeClr val="accent1"/>
+          </a:lnRef>
+          <a:fillRef idx="3">
+            <a:schemeClr val="accent1"/>
+          </a:fillRef>
+          <a:effectRef idx="2">
+            <a:schemeClr val="accent1"/>
+          </a:effectRef>
+          <a:fontRef idx="minor">
+            <a:schemeClr val="lt1"/>
+          </a:fontRef>
+        </p:style>
+        <p:txBody>
+          <a:bodyPr rtlCol="0" anchor="ctr"/>
+          <a:lstStyle/>
+          <a:p>
+            <a:pPr algn="ctr"/>
+          </a:p>
+        </p:txBody>
+      </p:sp>
+      <p:sp>
+        <p:nvSpPr>
+          <p:cNvPr id="16" name="TextBox 15"/>
+          <p:cNvSpPr txBox="1"/>
+          <p:nvPr/>
+        </p:nvSpPr>
+        <p:spPr>
+          <a:xfrm>
+            <a:off x="1143000" y="3630168"/>
+            <a:ext cx="2331720" cy="228600"/>
+          </a:xfrm>
+          <a:prstGeom prst="rect">
+            <a:avLst/>
+          </a:prstGeom>
+          <a:noFill/>
+        </p:spPr>
+        <p:txBody>
+          <a:bodyPr wrap="square" lIns="0" rIns="0" tIns="0" bIns="0">
+            <a:spAutoFit/>
+          </a:bodyPr>
+          <a:lstStyle/>
+          <a:p>
+            <a:pPr algn="ctr"/>
+            <a:r>
+              <a:rPr sz="1000" b="0">
+                <a:solidFill>
+                  <a:srgbClr val="475569"/>
+                </a:solidFill>
+                <a:latin typeface="Arial"/>
+              </a:rPr>
+              <a:t>Christian Religious Education</a:t>
+            </a:r>
+          </a:p>
+        </p:txBody>
+      </p:sp>
+      <p:sp>
+        <p:nvSpPr>
+          <p:cNvPr id="17" name="TextBox 16"/>
+          <p:cNvSpPr txBox="1"/>
+          <p:nvPr/>
+        </p:nvSpPr>
+        <p:spPr>
+          <a:xfrm>
+            <a:off x="960120" y="4315968"/>
+            <a:ext cx="2697480" cy="310896"/>
+          </a:xfrm>
+          <a:prstGeom prst="rect">
+            <a:avLst/>
+          </a:prstGeom>
+          <a:noFill/>
+        </p:spPr>
+        <p:txBody>
+          <a:bodyPr wrap="square" lIns="0" rIns="0" tIns="0" bIns="0">
+            <a:spAutoFit/>
+          </a:bodyPr>
+          <a:lstStyle/>
+          <a:p>
+            <a:pPr algn="ctr"/>
+            <a:r>
+              <a:rPr sz="1300" b="1">
+                <a:solidFill>
+                  <a:srgbClr val="1B7F3A"/>
+                </a:solidFill>
+                <a:latin typeface="Arial"/>
+              </a:rPr>
+              <a:t>GROUP CHALLENGE</a:t>
+            </a:r>
+          </a:p>
+        </p:txBody>
+      </p:sp>
+      <p:sp>
+        <p:nvSpPr>
+          <p:cNvPr id="18" name="TextBox 17"/>
+          <p:cNvSpPr txBox="1"/>
+          <p:nvPr/>
+        </p:nvSpPr>
+        <p:spPr>
+          <a:xfrm>
+            <a:off x="1005840" y="4754880"/>
+            <a:ext cx="2606040" cy="640080"/>
+          </a:xfrm>
+          <a:prstGeom prst="rect">
+            <a:avLst/>
+          </a:prstGeom>
+          <a:noFill/>
+        </p:spPr>
+        <p:txBody>
+          <a:bodyPr wrap="square" lIns="0" rIns="0" tIns="0" bIns="0">
+            <a:spAutoFit/>
+          </a:bodyPr>
+          <a:lstStyle/>
+          <a:p>
+            <a:pPr algn="ctr"/>
+            <a:r>
+              <a:rPr sz="1500" b="1">
                 <a:solidFill>
                   <a:srgbClr val="111827"/>
                 </a:solidFill>
                 <a:latin typeface="Arial"/>
               </a:rPr>
-              <a:t>Group task:</a:t>
-            </a:r>
-          </a:p>
-        </p:txBody>
-      </p:sp>
-      <p:sp>
-        <p:nvSpPr>
-          <p:cNvPr id="10" name="Rectangle 9"/>
+              <a:t>Produce one answer the class can check.</a:t>
+            </a:r>
+          </a:p>
+        </p:txBody>
+      </p:sp>
+      <p:sp>
+        <p:nvSpPr>
+          <p:cNvPr id="19" name="Rounded Rectangle 18"/>
           <p:cNvSpPr/>
           <p:nvPr/>
         </p:nvSpPr>
         <p:spPr>
           <a:xfrm>
-            <a:off x="868680" y="2971800"/>
-            <a:ext cx="10378440" cy="713232"/>
-          </a:xfrm>
-          <a:prstGeom prst="rect">
+            <a:off x="4343400" y="1828800"/>
+            <a:ext cx="6903720" cy="868680"/>
+          </a:xfrm>
+          <a:prstGeom prst="roundRect">
             <a:avLst/>
           </a:prstGeom>
           <a:solidFill>
@@ -8501,14 +10123,14 @@
       </p:sp>
       <p:sp>
         <p:nvSpPr>
-          <p:cNvPr id="11" name="Rectangle 10"/>
+          <p:cNvPr id="20" name="Rectangle 19"/>
           <p:cNvSpPr/>
           <p:nvPr/>
         </p:nvSpPr>
         <p:spPr>
           <a:xfrm>
-            <a:off x="868680" y="2971800"/>
-            <a:ext cx="530352" cy="713232"/>
+            <a:off x="4343400" y="1828800"/>
+            <a:ext cx="566928" cy="868680"/>
           </a:xfrm>
           <a:prstGeom prst="rect">
             <a:avLst/>
@@ -8535,12 +10157,38 @@
           </a:fontRef>
         </p:style>
         <p:txBody>
-          <a:bodyPr rtlCol="0" anchor="ctr" wrap="square" lIns="101600" rIns="101600" tIns="38100" bIns="38100"/>
-          <a:lstStyle/>
-          <a:p>
-            <a:pPr algn="ctr"/>
-            <a:r>
-              <a:rPr sz="1500" b="1">
+          <a:bodyPr rtlCol="0" anchor="ctr"/>
+          <a:lstStyle/>
+          <a:p>
+            <a:pPr algn="ctr"/>
+          </a:p>
+        </p:txBody>
+      </p:sp>
+      <p:sp>
+        <p:nvSpPr>
+          <p:cNvPr id="21" name="TextBox 20"/>
+          <p:cNvSpPr txBox="1"/>
+          <p:nvPr/>
+        </p:nvSpPr>
+        <p:spPr>
+          <a:xfrm>
+            <a:off x="4343400" y="2144268"/>
+            <a:ext cx="566928" cy="237744"/>
+          </a:xfrm>
+          <a:prstGeom prst="rect">
+            <a:avLst/>
+          </a:prstGeom>
+          <a:noFill/>
+        </p:spPr>
+        <p:txBody>
+          <a:bodyPr wrap="square" lIns="0" rIns="0" tIns="0" bIns="0">
+            <a:spAutoFit/>
+          </a:bodyPr>
+          <a:lstStyle/>
+          <a:p>
+            <a:pPr algn="ctr"/>
+            <a:r>
+              <a:rPr sz="1400" b="1">
                 <a:solidFill>
                   <a:srgbClr val="FFFFFF"/>
                 </a:solidFill>
@@ -8553,14 +10201,14 @@
       </p:sp>
       <p:sp>
         <p:nvSpPr>
-          <p:cNvPr id="12" name="TextBox 11"/>
+          <p:cNvPr id="22" name="TextBox 21"/>
           <p:cNvSpPr txBox="1"/>
           <p:nvPr/>
         </p:nvSpPr>
         <p:spPr>
           <a:xfrm>
-            <a:off x="1572768" y="3118104"/>
-            <a:ext cx="9372600" cy="384048"/>
+            <a:off x="5129784" y="1993392"/>
+            <a:ext cx="5879592" cy="630936"/>
           </a:xfrm>
           <a:prstGeom prst="rect">
             <a:avLst/>
@@ -8574,29 +10222,29 @@
           <a:lstStyle/>
           <a:p>
             <a:r>
-              <a:rPr sz="1500" b="0">
+              <a:rPr sz="1200" b="1">
                 <a:solidFill>
                   <a:srgbClr val="111827"/>
                 </a:solidFill>
                 <a:latin typeface="Arial"/>
               </a:rPr>
-              <a:t>Students blow on their hands and observe trees moving outside to...</a:t>
-            </a:r>
-          </a:p>
-        </p:txBody>
-      </p:sp>
-      <p:sp>
-        <p:nvSpPr>
-          <p:cNvPr id="13" name="Rectangle 12"/>
+              <a:t>Blow on their hands and observe trees moving outside to understand the concept</a:t>
+            </a:r>
+          </a:p>
+        </p:txBody>
+      </p:sp>
+      <p:sp>
+        <p:nvSpPr>
+          <p:cNvPr id="23" name="Rounded Rectangle 22"/>
           <p:cNvSpPr/>
           <p:nvPr/>
         </p:nvSpPr>
         <p:spPr>
           <a:xfrm>
-            <a:off x="868680" y="3822191"/>
-            <a:ext cx="10378440" cy="713232"/>
-          </a:xfrm>
-          <a:prstGeom prst="rect">
+            <a:off x="4343400" y="2999232"/>
+            <a:ext cx="6903720" cy="868680"/>
+          </a:xfrm>
+          <a:prstGeom prst="roundRect">
             <a:avLst/>
           </a:prstGeom>
           <a:solidFill>
@@ -8632,14 +10280,14 @@
       </p:sp>
       <p:sp>
         <p:nvSpPr>
-          <p:cNvPr id="14" name="Rectangle 13"/>
+          <p:cNvPr id="24" name="Rectangle 23"/>
           <p:cNvSpPr/>
           <p:nvPr/>
         </p:nvSpPr>
         <p:spPr>
           <a:xfrm>
-            <a:off x="868680" y="3822191"/>
-            <a:ext cx="530352" cy="713232"/>
+            <a:off x="4343400" y="2999232"/>
+            <a:ext cx="566928" cy="868680"/>
           </a:xfrm>
           <a:prstGeom prst="rect">
             <a:avLst/>
@@ -8666,12 +10314,38 @@
           </a:fontRef>
         </p:style>
         <p:txBody>
-          <a:bodyPr rtlCol="0" anchor="ctr" wrap="square" lIns="101600" rIns="101600" tIns="38100" bIns="38100"/>
-          <a:lstStyle/>
-          <a:p>
-            <a:pPr algn="ctr"/>
-            <a:r>
-              <a:rPr sz="1500" b="1">
+          <a:bodyPr rtlCol="0" anchor="ctr"/>
+          <a:lstStyle/>
+          <a:p>
+            <a:pPr algn="ctr"/>
+          </a:p>
+        </p:txBody>
+      </p:sp>
+      <p:sp>
+        <p:nvSpPr>
+          <p:cNvPr id="25" name="TextBox 24"/>
+          <p:cNvSpPr txBox="1"/>
+          <p:nvPr/>
+        </p:nvSpPr>
+        <p:spPr>
+          <a:xfrm>
+            <a:off x="4343400" y="3314700"/>
+            <a:ext cx="566928" cy="237744"/>
+          </a:xfrm>
+          <a:prstGeom prst="rect">
+            <a:avLst/>
+          </a:prstGeom>
+          <a:noFill/>
+        </p:spPr>
+        <p:txBody>
+          <a:bodyPr wrap="square" lIns="0" rIns="0" tIns="0" bIns="0">
+            <a:spAutoFit/>
+          </a:bodyPr>
+          <a:lstStyle/>
+          <a:p>
+            <a:pPr algn="ctr"/>
+            <a:r>
+              <a:rPr sz="1400" b="1">
                 <a:solidFill>
                   <a:srgbClr val="FFFFFF"/>
                 </a:solidFill>
@@ -8684,14 +10358,14 @@
       </p:sp>
       <p:sp>
         <p:nvSpPr>
-          <p:cNvPr id="15" name="TextBox 14"/>
+          <p:cNvPr id="26" name="TextBox 25"/>
           <p:cNvSpPr txBox="1"/>
           <p:nvPr/>
         </p:nvSpPr>
         <p:spPr>
           <a:xfrm>
-            <a:off x="1572768" y="3968496"/>
-            <a:ext cx="9372600" cy="384048"/>
+            <a:off x="5129784" y="3163824"/>
+            <a:ext cx="5879592" cy="630936"/>
           </a:xfrm>
           <a:prstGeom prst="rect">
             <a:avLst/>
@@ -8705,29 +10379,29 @@
           <a:lstStyle/>
           <a:p>
             <a:r>
-              <a:rPr sz="1500" b="0">
+              <a:rPr sz="1200" b="1">
                 <a:solidFill>
                   <a:srgbClr val="111827"/>
                 </a:solidFill>
                 <a:latin typeface="Arial"/>
               </a:rPr>
-              <a:t>Students discuss in pairs what it means to receive a gift that is...</a:t>
-            </a:r>
-          </a:p>
-        </p:txBody>
-      </p:sp>
-      <p:sp>
-        <p:nvSpPr>
-          <p:cNvPr id="16" name="Rectangle 15"/>
+              <a:t>Discuss in pairs what it means to receive a gift that is also the person who gave</a:t>
+            </a:r>
+          </a:p>
+        </p:txBody>
+      </p:sp>
+      <p:sp>
+        <p:nvSpPr>
+          <p:cNvPr id="27" name="Rounded Rectangle 26"/>
           <p:cNvSpPr/>
           <p:nvPr/>
         </p:nvSpPr>
         <p:spPr>
           <a:xfrm>
-            <a:off x="868680" y="4672584"/>
-            <a:ext cx="10378440" cy="713232"/>
-          </a:xfrm>
-          <a:prstGeom prst="rect">
+            <a:off x="4343400" y="4169664"/>
+            <a:ext cx="6903720" cy="868680"/>
+          </a:xfrm>
+          <a:prstGeom prst="roundRect">
             <a:avLst/>
           </a:prstGeom>
           <a:solidFill>
@@ -8763,14 +10437,14 @@
       </p:sp>
       <p:sp>
         <p:nvSpPr>
-          <p:cNvPr id="17" name="Rectangle 16"/>
+          <p:cNvPr id="28" name="Rectangle 27"/>
           <p:cNvSpPr/>
           <p:nvPr/>
         </p:nvSpPr>
         <p:spPr>
           <a:xfrm>
-            <a:off x="868680" y="4672584"/>
-            <a:ext cx="530352" cy="713232"/>
+            <a:off x="4343400" y="4169664"/>
+            <a:ext cx="566928" cy="868680"/>
           </a:xfrm>
           <a:prstGeom prst="rect">
             <a:avLst/>
@@ -8797,12 +10471,38 @@
           </a:fontRef>
         </p:style>
         <p:txBody>
-          <a:bodyPr rtlCol="0" anchor="ctr" wrap="square" lIns="101600" rIns="101600" tIns="38100" bIns="38100"/>
-          <a:lstStyle/>
-          <a:p>
-            <a:pPr algn="ctr"/>
-            <a:r>
-              <a:rPr sz="1500" b="1">
+          <a:bodyPr rtlCol="0" anchor="ctr"/>
+          <a:lstStyle/>
+          <a:p>
+            <a:pPr algn="ctr"/>
+          </a:p>
+        </p:txBody>
+      </p:sp>
+      <p:sp>
+        <p:nvSpPr>
+          <p:cNvPr id="29" name="TextBox 28"/>
+          <p:cNvSpPr txBox="1"/>
+          <p:nvPr/>
+        </p:nvSpPr>
+        <p:spPr>
+          <a:xfrm>
+            <a:off x="4343400" y="4485132"/>
+            <a:ext cx="566928" cy="237744"/>
+          </a:xfrm>
+          <a:prstGeom prst="rect">
+            <a:avLst/>
+          </a:prstGeom>
+          <a:noFill/>
+        </p:spPr>
+        <p:txBody>
+          <a:bodyPr wrap="square" lIns="0" rIns="0" tIns="0" bIns="0">
+            <a:spAutoFit/>
+          </a:bodyPr>
+          <a:lstStyle/>
+          <a:p>
+            <a:pPr algn="ctr"/>
+            <a:r>
+              <a:rPr sz="1400" b="1">
                 <a:solidFill>
                   <a:srgbClr val="FFFFFF"/>
                 </a:solidFill>
@@ -8815,14 +10515,14 @@
       </p:sp>
       <p:sp>
         <p:nvSpPr>
-          <p:cNvPr id="18" name="TextBox 17"/>
+          <p:cNvPr id="30" name="TextBox 29"/>
           <p:cNvSpPr txBox="1"/>
           <p:nvPr/>
         </p:nvSpPr>
         <p:spPr>
           <a:xfrm>
-            <a:off x="1572768" y="4818888"/>
-            <a:ext cx="9372600" cy="384048"/>
+            <a:off x="5129784" y="4334256"/>
+            <a:ext cx="5879592" cy="630936"/>
           </a:xfrm>
           <a:prstGeom prst="rect">
             <a:avLst/>
@@ -8836,37 +10536,37 @@
           <a:lstStyle/>
           <a:p>
             <a:r>
-              <a:rPr sz="1500" b="0">
+              <a:rPr sz="1200" b="1">
                 <a:solidFill>
                   <a:srgbClr val="111827"/>
                 </a:solidFill>
                 <a:latin typeface="Arial"/>
               </a:rPr>
-              <a:t>Teacher demonstrates the Trinity using the three-stone stove anal...</a:t>
-            </a:r>
-          </a:p>
-        </p:txBody>
-      </p:sp>
-      <p:sp>
-        <p:nvSpPr>
-          <p:cNvPr id="19" name="Rectangle 18"/>
+              <a:t>Teacher demonstrates the Trinity using the three-stone stove analogy while</a:t>
+            </a:r>
+          </a:p>
+        </p:txBody>
+      </p:sp>
+      <p:sp>
+        <p:nvSpPr>
+          <p:cNvPr id="31" name="Rounded Rectangle 30"/>
           <p:cNvSpPr/>
           <p:nvPr/>
         </p:nvSpPr>
         <p:spPr>
           <a:xfrm>
-            <a:off x="868680" y="5522976"/>
-            <a:ext cx="10378440" cy="713232"/>
-          </a:xfrm>
-          <a:prstGeom prst="rect">
+            <a:off x="4343400" y="5413248"/>
+            <a:ext cx="6903720" cy="658368"/>
+          </a:xfrm>
+          <a:prstGeom prst="roundRect">
             <a:avLst/>
           </a:prstGeom>
           <a:solidFill>
             <a:srgbClr val="FFFFFF"/>
           </a:solidFill>
-          <a:ln w="11430">
+          <a:ln w="13970">
             <a:solidFill>
-              <a:srgbClr val="CBD5E1"/>
+              <a:srgbClr val="D90000"/>
             </a:solidFill>
           </a:ln>
         </p:spPr>
@@ -8894,100 +10594,49 @@
       </p:sp>
       <p:sp>
         <p:nvSpPr>
-          <p:cNvPr id="20" name="Rectangle 19"/>
-          <p:cNvSpPr/>
-          <p:nvPr/>
-        </p:nvSpPr>
-        <p:spPr>
-          <a:xfrm>
-            <a:off x="868680" y="5522976"/>
-            <a:ext cx="530352" cy="713232"/>
-          </a:xfrm>
-          <a:prstGeom prst="rect">
-            <a:avLst/>
-          </a:prstGeom>
-          <a:solidFill>
-            <a:srgbClr val="1B7F3A"/>
-          </a:solidFill>
-          <a:ln>
-            <a:noFill/>
-          </a:ln>
-        </p:spPr>
-        <p:style>
-          <a:lnRef idx="1">
-            <a:schemeClr val="accent1"/>
-          </a:lnRef>
-          <a:fillRef idx="3">
-            <a:schemeClr val="accent1"/>
-          </a:fillRef>
-          <a:effectRef idx="2">
-            <a:schemeClr val="accent1"/>
-          </a:effectRef>
-          <a:fontRef idx="minor">
-            <a:schemeClr val="lt1"/>
-          </a:fontRef>
-        </p:style>
-        <p:txBody>
-          <a:bodyPr rtlCol="0" anchor="ctr" wrap="square" lIns="101600" rIns="101600" tIns="38100" bIns="38100"/>
-          <a:lstStyle/>
-          <a:p>
-            <a:pPr algn="ctr"/>
-            <a:r>
-              <a:rPr sz="1500" b="1">
+          <p:cNvPr id="32" name="TextBox 31"/>
+          <p:cNvSpPr txBox="1"/>
+          <p:nvPr/>
+        </p:nvSpPr>
+        <p:spPr>
+          <a:xfrm>
+            <a:off x="4572000" y="5577840"/>
+            <a:ext cx="6446520" cy="274320"/>
+          </a:xfrm>
+          <a:prstGeom prst="rect">
+            <a:avLst/>
+          </a:prstGeom>
+          <a:noFill/>
+        </p:spPr>
+        <p:txBody>
+          <a:bodyPr wrap="square" lIns="0" rIns="0" tIns="0" bIns="0">
+            <a:spAutoFit/>
+          </a:bodyPr>
+          <a:lstStyle/>
+          <a:p>
+            <a:pPr algn="ctr"/>
+            <a:r>
+              <a:rPr sz="1400" b="1">
                 <a:solidFill>
-                  <a:srgbClr val="FFFFFF"/>
+                  <a:srgbClr val="D90000"/>
                 </a:solidFill>
                 <a:latin typeface="Arial"/>
               </a:rPr>
-              <a:t>4</a:t>
-            </a:r>
-          </a:p>
-        </p:txBody>
-      </p:sp>
-      <p:sp>
-        <p:nvSpPr>
-          <p:cNvPr id="21" name="TextBox 20"/>
+              <a:t>Class share-out: one group explains, one group improves it.</a:t>
+            </a:r>
+          </a:p>
+        </p:txBody>
+      </p:sp>
+      <p:sp>
+        <p:nvSpPr>
+          <p:cNvPr id="33" name="TextBox 32"/>
           <p:cNvSpPr txBox="1"/>
           <p:nvPr/>
         </p:nvSpPr>
         <p:spPr>
           <a:xfrm>
-            <a:off x="1572768" y="5669280"/>
-            <a:ext cx="9372600" cy="384048"/>
-          </a:xfrm>
-          <a:prstGeom prst="rect">
-            <a:avLst/>
-          </a:prstGeom>
-          <a:noFill/>
-        </p:spPr>
-        <p:txBody>
-          <a:bodyPr wrap="square" lIns="0" rIns="0" tIns="0" bIns="0">
-            <a:spAutoFit/>
-          </a:bodyPr>
-          <a:lstStyle/>
-          <a:p>
-            <a:r>
-              <a:rPr sz="1500" b="0">
-                <a:solidFill>
-                  <a:srgbClr val="111827"/>
-                </a:solidFill>
-                <a:latin typeface="Arial"/>
-              </a:rPr>
-              <a:t>Write one clear response.</a:t>
-            </a:r>
-          </a:p>
-        </p:txBody>
-      </p:sp>
-      <p:sp>
-        <p:nvSpPr>
-          <p:cNvPr id="22" name="TextBox 21"/>
-          <p:cNvSpPr txBox="1"/>
-          <p:nvPr/>
-        </p:nvSpPr>
-        <p:spPr>
-          <a:xfrm>
-            <a:off x="685800" y="6419088"/>
-            <a:ext cx="10835640" cy="228600"/>
+            <a:off x="713232" y="6355080"/>
+            <a:ext cx="10835640" cy="219456"/>
           </a:xfrm>
           <a:prstGeom prst="rect">
             <a:avLst/>
@@ -9008,7 +10657,7 @@
                 </a:solidFill>
                 <a:latin typeface="Arial"/>
               </a:rPr>
-              <a:t>Listen • Talk • Try • Explain</a:t>
+              <a:t>P7 class flow: listen • talk • try • explain</a:t>
             </a:r>
           </a:p>
         </p:txBody>
@@ -9213,7 +10862,93 @@
       </p:sp>
       <p:sp>
         <p:nvSpPr>
-          <p:cNvPr id="6" name="TextBox 5"/>
+          <p:cNvPr id="6" name="Rectangle 5"/>
+          <p:cNvSpPr/>
+          <p:nvPr/>
+        </p:nvSpPr>
+        <p:spPr>
+          <a:xfrm>
+            <a:off x="164592" y="6565392"/>
+            <a:ext cx="12027103" cy="73152"/>
+          </a:xfrm>
+          <a:prstGeom prst="rect">
+            <a:avLst/>
+          </a:prstGeom>
+          <a:solidFill>
+            <a:srgbClr val="FCD116"/>
+          </a:solidFill>
+          <a:ln>
+            <a:noFill/>
+          </a:ln>
+        </p:spPr>
+        <p:style>
+          <a:lnRef idx="1">
+            <a:schemeClr val="accent1"/>
+          </a:lnRef>
+          <a:fillRef idx="3">
+            <a:schemeClr val="accent1"/>
+          </a:fillRef>
+          <a:effectRef idx="2">
+            <a:schemeClr val="accent1"/>
+          </a:effectRef>
+          <a:fontRef idx="minor">
+            <a:schemeClr val="lt1"/>
+          </a:fontRef>
+        </p:style>
+        <p:txBody>
+          <a:bodyPr rtlCol="0" anchor="ctr"/>
+          <a:lstStyle/>
+          <a:p>
+            <a:pPr algn="ctr"/>
+          </a:p>
+        </p:txBody>
+      </p:sp>
+      <p:sp>
+        <p:nvSpPr>
+          <p:cNvPr id="7" name="Rectangle 6"/>
+          <p:cNvSpPr/>
+          <p:nvPr/>
+        </p:nvSpPr>
+        <p:spPr>
+          <a:xfrm>
+            <a:off x="164592" y="6638544"/>
+            <a:ext cx="12027103" cy="45720"/>
+          </a:xfrm>
+          <a:prstGeom prst="rect">
+            <a:avLst/>
+          </a:prstGeom>
+          <a:solidFill>
+            <a:srgbClr val="D90000"/>
+          </a:solidFill>
+          <a:ln>
+            <a:noFill/>
+          </a:ln>
+        </p:spPr>
+        <p:style>
+          <a:lnRef idx="1">
+            <a:schemeClr val="accent1"/>
+          </a:lnRef>
+          <a:fillRef idx="3">
+            <a:schemeClr val="accent1"/>
+          </a:fillRef>
+          <a:effectRef idx="2">
+            <a:schemeClr val="accent1"/>
+          </a:effectRef>
+          <a:fontRef idx="minor">
+            <a:schemeClr val="lt1"/>
+          </a:fontRef>
+        </p:style>
+        <p:txBody>
+          <a:bodyPr rtlCol="0" anchor="ctr"/>
+          <a:lstStyle/>
+          <a:p>
+            <a:pPr algn="ctr"/>
+          </a:p>
+        </p:txBody>
+      </p:sp>
+      <p:sp>
+        <p:nvSpPr>
+          <p:cNvPr id="8" name="TextBox 7"/>
           <p:cNvSpPr txBox="1"/>
           <p:nvPr/>
         </p:nvSpPr>
@@ -9247,7 +10982,7 @@
       </p:sp>
       <p:sp>
         <p:nvSpPr>
-          <p:cNvPr id="7" name="TextBox 6"/>
+          <p:cNvPr id="9" name="TextBox 8"/>
           <p:cNvSpPr txBox="1"/>
           <p:nvPr/>
         </p:nvSpPr>
@@ -9282,14 +11017,14 @@
       </p:sp>
       <p:sp>
         <p:nvSpPr>
-          <p:cNvPr id="8" name="TextBox 7"/>
+          <p:cNvPr id="10" name="TextBox 9"/>
           <p:cNvSpPr txBox="1"/>
           <p:nvPr/>
         </p:nvSpPr>
         <p:spPr>
           <a:xfrm>
-            <a:off x="594360" y="1042415"/>
-            <a:ext cx="11109960" cy="566928"/>
+            <a:off x="594360" y="1005840"/>
+            <a:ext cx="11064240" cy="512064"/>
           </a:xfrm>
           <a:prstGeom prst="rect">
             <a:avLst/>
@@ -9316,22 +11051,22 @@
       </p:sp>
       <p:sp>
         <p:nvSpPr>
-          <p:cNvPr id="9" name="Rectangle 8"/>
+          <p:cNvPr id="11" name="Rounded Rectangle 10"/>
           <p:cNvSpPr/>
           <p:nvPr/>
         </p:nvSpPr>
         <p:spPr>
           <a:xfrm>
-            <a:off x="685800" y="1874519"/>
-            <a:ext cx="10835640" cy="804672"/>
-          </a:xfrm>
-          <a:prstGeom prst="rect">
-            <a:avLst/>
-          </a:prstGeom>
-          <a:solidFill>
-            <a:srgbClr val="FFF7E0"/>
-          </a:solidFill>
-          <a:ln w="17780">
+            <a:off x="1143000" y="1783080"/>
+            <a:ext cx="9921240" cy="4434840"/>
+          </a:xfrm>
+          <a:prstGeom prst="roundRect">
+            <a:avLst/>
+          </a:prstGeom>
+          <a:solidFill>
+            <a:srgbClr val="FFFFFF"/>
+          </a:solidFill>
+          <a:ln w="20320">
             <a:solidFill>
               <a:srgbClr val="4338CA"/>
             </a:solidFill>
@@ -9352,12 +11087,47 @@
           </a:fontRef>
         </p:style>
         <p:txBody>
-          <a:bodyPr rtlCol="0" anchor="ctr" wrap="square" lIns="101600" rIns="101600" tIns="38100" bIns="38100"/>
-          <a:lstStyle/>
-          <a:p>
-            <a:pPr algn="ctr"/>
-            <a:r>
-              <a:rPr sz="1900" b="1">
+          <a:bodyPr rtlCol="0" anchor="t" wrap="square" lIns="101600" rIns="101600" tIns="127000" bIns="38100"/>
+          <a:lstStyle/>
+          <a:p>
+            <a:pPr algn="ctr"/>
+            <a:r>
+              <a:rPr sz="1500" b="1">
+                <a:solidFill>
+                  <a:srgbClr val="4338CA"/>
+                </a:solidFill>
+                <a:latin typeface="Arial"/>
+              </a:rPr>
+              <a:t>EXIT TICKET</a:t>
+            </a:r>
+          </a:p>
+        </p:txBody>
+      </p:sp>
+      <p:sp>
+        <p:nvSpPr>
+          <p:cNvPr id="12" name="TextBox 11"/>
+          <p:cNvSpPr txBox="1"/>
+          <p:nvPr/>
+        </p:nvSpPr>
+        <p:spPr>
+          <a:xfrm>
+            <a:off x="1691640" y="2487168"/>
+            <a:ext cx="8823960" cy="658368"/>
+          </a:xfrm>
+          <a:prstGeom prst="rect">
+            <a:avLst/>
+          </a:prstGeom>
+          <a:noFill/>
+        </p:spPr>
+        <p:txBody>
+          <a:bodyPr wrap="square" lIns="0" rIns="0" tIns="0" bIns="0">
+            <a:spAutoFit/>
+          </a:bodyPr>
+          <a:lstStyle/>
+          <a:p>
+            <a:pPr algn="ctr"/>
+            <a:r>
+              <a:rPr sz="2100" b="1">
                 <a:solidFill>
                   <a:srgbClr val="111827"/>
                 </a:solidFill>
@@ -9370,25 +11140,23 @@
       </p:sp>
       <p:sp>
         <p:nvSpPr>
-          <p:cNvPr id="10" name="Rectangle 9"/>
+          <p:cNvPr id="13" name="Rectangle 12"/>
           <p:cNvSpPr/>
           <p:nvPr/>
         </p:nvSpPr>
         <p:spPr>
           <a:xfrm>
-            <a:off x="868680" y="2971800"/>
-            <a:ext cx="10378440" cy="713232"/>
-          </a:xfrm>
-          <a:prstGeom prst="rect">
-            <a:avLst/>
-          </a:prstGeom>
-          <a:solidFill>
-            <a:srgbClr val="FFFFFF"/>
-          </a:solidFill>
-          <a:ln w="11430">
-            <a:solidFill>
-              <a:srgbClr val="CBD5E1"/>
-            </a:solidFill>
+            <a:off x="1920240" y="3493008"/>
+            <a:ext cx="8321040" cy="32004"/>
+          </a:xfrm>
+          <a:prstGeom prst="rect">
+            <a:avLst/>
+          </a:prstGeom>
+          <a:solidFill>
+            <a:srgbClr val="CBD5E1"/>
+          </a:solidFill>
+          <a:ln>
+            <a:noFill/>
           </a:ln>
         </p:spPr>
         <p:style>
@@ -9415,20 +11183,20 @@
       </p:sp>
       <p:sp>
         <p:nvSpPr>
-          <p:cNvPr id="11" name="Rectangle 10"/>
+          <p:cNvPr id="14" name="Rectangle 13"/>
           <p:cNvSpPr/>
           <p:nvPr/>
         </p:nvSpPr>
         <p:spPr>
           <a:xfrm>
-            <a:off x="868680" y="2971800"/>
-            <a:ext cx="530352" cy="713232"/>
-          </a:xfrm>
-          <a:prstGeom prst="rect">
-            <a:avLst/>
-          </a:prstGeom>
-          <a:solidFill>
-            <a:srgbClr val="4338CA"/>
+            <a:off x="1920240" y="3977639"/>
+            <a:ext cx="8321040" cy="32004"/>
+          </a:xfrm>
+          <a:prstGeom prst="rect">
+            <a:avLst/>
+          </a:prstGeom>
+          <a:solidFill>
+            <a:srgbClr val="CBD5E1"/>
           </a:solidFill>
           <a:ln>
             <a:noFill/>
@@ -9449,77 +11217,32 @@
           </a:fontRef>
         </p:style>
         <p:txBody>
-          <a:bodyPr rtlCol="0" anchor="ctr" wrap="square" lIns="101600" rIns="101600" tIns="38100" bIns="38100"/>
-          <a:lstStyle/>
-          <a:p>
-            <a:pPr algn="ctr"/>
-            <a:r>
-              <a:rPr sz="1500" b="1">
-                <a:solidFill>
-                  <a:srgbClr val="FFFFFF"/>
-                </a:solidFill>
-                <a:latin typeface="Arial"/>
-              </a:rPr>
-              <a:t>1</a:t>
-            </a:r>
-          </a:p>
-        </p:txBody>
-      </p:sp>
-      <p:sp>
-        <p:nvSpPr>
-          <p:cNvPr id="12" name="TextBox 11"/>
-          <p:cNvSpPr txBox="1"/>
-          <p:nvPr/>
-        </p:nvSpPr>
-        <p:spPr>
-          <a:xfrm>
-            <a:off x="1572768" y="3118104"/>
-            <a:ext cx="9372600" cy="384048"/>
-          </a:xfrm>
-          <a:prstGeom prst="rect">
-            <a:avLst/>
-          </a:prstGeom>
-          <a:noFill/>
-        </p:spPr>
-        <p:txBody>
-          <a:bodyPr wrap="square" lIns="0" rIns="0" tIns="0" bIns="0">
-            <a:spAutoFit/>
-          </a:bodyPr>
-          <a:lstStyle/>
-          <a:p>
-            <a:r>
-              <a:rPr sz="1500" b="0">
-                <a:solidFill>
-                  <a:srgbClr val="111827"/>
-                </a:solidFill>
-                <a:latin typeface="Arial"/>
-              </a:rPr>
-              <a:t>Use one complete sentence.</a:t>
-            </a:r>
-          </a:p>
-        </p:txBody>
-      </p:sp>
-      <p:sp>
-        <p:nvSpPr>
-          <p:cNvPr id="13" name="Rectangle 12"/>
+          <a:bodyPr rtlCol="0" anchor="ctr"/>
+          <a:lstStyle/>
+          <a:p>
+            <a:pPr algn="ctr"/>
+          </a:p>
+        </p:txBody>
+      </p:sp>
+      <p:sp>
+        <p:nvSpPr>
+          <p:cNvPr id="15" name="Rectangle 14"/>
           <p:cNvSpPr/>
           <p:nvPr/>
         </p:nvSpPr>
         <p:spPr>
           <a:xfrm>
-            <a:off x="868680" y="3822191"/>
-            <a:ext cx="10378440" cy="713232"/>
-          </a:xfrm>
-          <a:prstGeom prst="rect">
-            <a:avLst/>
-          </a:prstGeom>
-          <a:solidFill>
-            <a:srgbClr val="FFFFFF"/>
-          </a:solidFill>
-          <a:ln w="11430">
-            <a:solidFill>
-              <a:srgbClr val="CBD5E1"/>
-            </a:solidFill>
+            <a:off x="1920240" y="4462272"/>
+            <a:ext cx="8321040" cy="32004"/>
+          </a:xfrm>
+          <a:prstGeom prst="rect">
+            <a:avLst/>
+          </a:prstGeom>
+          <a:solidFill>
+            <a:srgbClr val="CBD5E1"/>
+          </a:solidFill>
+          <a:ln>
+            <a:noFill/>
           </a:ln>
         </p:spPr>
         <p:style>
@@ -9546,66 +11269,49 @@
       </p:sp>
       <p:sp>
         <p:nvSpPr>
-          <p:cNvPr id="14" name="Rectangle 13"/>
-          <p:cNvSpPr/>
-          <p:nvPr/>
-        </p:nvSpPr>
-        <p:spPr>
-          <a:xfrm>
-            <a:off x="868680" y="3822191"/>
-            <a:ext cx="530352" cy="713232"/>
-          </a:xfrm>
-          <a:prstGeom prst="rect">
-            <a:avLst/>
-          </a:prstGeom>
-          <a:solidFill>
-            <a:srgbClr val="4338CA"/>
-          </a:solidFill>
-          <a:ln>
-            <a:noFill/>
-          </a:ln>
-        </p:spPr>
-        <p:style>
-          <a:lnRef idx="1">
-            <a:schemeClr val="accent1"/>
-          </a:lnRef>
-          <a:fillRef idx="3">
-            <a:schemeClr val="accent1"/>
-          </a:fillRef>
-          <a:effectRef idx="2">
-            <a:schemeClr val="accent1"/>
-          </a:effectRef>
-          <a:fontRef idx="minor">
-            <a:schemeClr val="lt1"/>
-          </a:fontRef>
-        </p:style>
-        <p:txBody>
-          <a:bodyPr rtlCol="0" anchor="ctr" wrap="square" lIns="101600" rIns="101600" tIns="38100" bIns="38100"/>
-          <a:lstStyle/>
-          <a:p>
-            <a:pPr algn="ctr"/>
-            <a:r>
-              <a:rPr sz="1500" b="1">
+          <p:cNvPr id="16" name="TextBox 15"/>
+          <p:cNvSpPr txBox="1"/>
+          <p:nvPr/>
+        </p:nvSpPr>
+        <p:spPr>
+          <a:xfrm>
+            <a:off x="1691640" y="4864608"/>
+            <a:ext cx="8823960" cy="237744"/>
+          </a:xfrm>
+          <a:prstGeom prst="rect">
+            <a:avLst/>
+          </a:prstGeom>
+          <a:noFill/>
+        </p:spPr>
+        <p:txBody>
+          <a:bodyPr wrap="square" lIns="0" rIns="0" tIns="0" bIns="0">
+            <a:spAutoFit/>
+          </a:bodyPr>
+          <a:lstStyle/>
+          <a:p>
+            <a:pPr algn="ctr"/>
+            <a:r>
+              <a:rPr sz="1200" b="0">
                 <a:solidFill>
-                  <a:srgbClr val="FFFFFF"/>
+                  <a:srgbClr val="475569"/>
                 </a:solidFill>
                 <a:latin typeface="Arial"/>
               </a:rPr>
-              <a:t>2</a:t>
-            </a:r>
-          </a:p>
-        </p:txBody>
-      </p:sp>
-      <p:sp>
-        <p:nvSpPr>
-          <p:cNvPr id="15" name="TextBox 14"/>
+              <a:t>Use one complete sentence.</a:t>
+            </a:r>
+          </a:p>
+        </p:txBody>
+      </p:sp>
+      <p:sp>
+        <p:nvSpPr>
+          <p:cNvPr id="17" name="TextBox 16"/>
           <p:cNvSpPr txBox="1"/>
           <p:nvPr/>
         </p:nvSpPr>
         <p:spPr>
           <a:xfrm>
-            <a:off x="1572768" y="3968496"/>
-            <a:ext cx="9372600" cy="384048"/>
+            <a:off x="1691640" y="5184648"/>
+            <a:ext cx="8823960" cy="237744"/>
           </a:xfrm>
           <a:prstGeom prst="rect">
             <a:avLst/>
@@ -9618,111 +11324,15 @@
           </a:bodyPr>
           <a:lstStyle/>
           <a:p>
-            <a:r>
-              <a:rPr sz="1500" b="0">
+            <a:pPr algn="ctr"/>
+            <a:r>
+              <a:rPr sz="1200" b="0">
                 <a:solidFill>
-                  <a:srgbClr val="111827"/>
+                  <a:srgbClr val="475569"/>
                 </a:solidFill>
                 <a:latin typeface="Arial"/>
               </a:rPr>
-              <a:t>Include one key word: Spirit, Invisible, Wind</a:t>
-            </a:r>
-          </a:p>
-        </p:txBody>
-      </p:sp>
-      <p:sp>
-        <p:nvSpPr>
-          <p:cNvPr id="16" name="Rectangle 15"/>
-          <p:cNvSpPr/>
-          <p:nvPr/>
-        </p:nvSpPr>
-        <p:spPr>
-          <a:xfrm>
-            <a:off x="868680" y="4672584"/>
-            <a:ext cx="10378440" cy="713232"/>
-          </a:xfrm>
-          <a:prstGeom prst="rect">
-            <a:avLst/>
-          </a:prstGeom>
-          <a:solidFill>
-            <a:srgbClr val="FFFFFF"/>
-          </a:solidFill>
-          <a:ln w="11430">
-            <a:solidFill>
-              <a:srgbClr val="CBD5E1"/>
-            </a:solidFill>
-          </a:ln>
-        </p:spPr>
-        <p:style>
-          <a:lnRef idx="1">
-            <a:schemeClr val="accent1"/>
-          </a:lnRef>
-          <a:fillRef idx="3">
-            <a:schemeClr val="accent1"/>
-          </a:fillRef>
-          <a:effectRef idx="2">
-            <a:schemeClr val="accent1"/>
-          </a:effectRef>
-          <a:fontRef idx="minor">
-            <a:schemeClr val="lt1"/>
-          </a:fontRef>
-        </p:style>
-        <p:txBody>
-          <a:bodyPr rtlCol="0" anchor="ctr"/>
-          <a:lstStyle/>
-          <a:p>
-            <a:pPr algn="ctr"/>
-          </a:p>
-        </p:txBody>
-      </p:sp>
-      <p:sp>
-        <p:nvSpPr>
-          <p:cNvPr id="17" name="Rectangle 16"/>
-          <p:cNvSpPr/>
-          <p:nvPr/>
-        </p:nvSpPr>
-        <p:spPr>
-          <a:xfrm>
-            <a:off x="868680" y="4672584"/>
-            <a:ext cx="530352" cy="713232"/>
-          </a:xfrm>
-          <a:prstGeom prst="rect">
-            <a:avLst/>
-          </a:prstGeom>
-          <a:solidFill>
-            <a:srgbClr val="4338CA"/>
-          </a:solidFill>
-          <a:ln>
-            <a:noFill/>
-          </a:ln>
-        </p:spPr>
-        <p:style>
-          <a:lnRef idx="1">
-            <a:schemeClr val="accent1"/>
-          </a:lnRef>
-          <a:fillRef idx="3">
-            <a:schemeClr val="accent1"/>
-          </a:fillRef>
-          <a:effectRef idx="2">
-            <a:schemeClr val="accent1"/>
-          </a:effectRef>
-          <a:fontRef idx="minor">
-            <a:schemeClr val="lt1"/>
-          </a:fontRef>
-        </p:style>
-        <p:txBody>
-          <a:bodyPr rtlCol="0" anchor="ctr" wrap="square" lIns="101600" rIns="101600" tIns="38100" bIns="38100"/>
-          <a:lstStyle/>
-          <a:p>
-            <a:pPr algn="ctr"/>
-            <a:r>
-              <a:rPr sz="1500" b="1">
-                <a:solidFill>
-                  <a:srgbClr val="FFFFFF"/>
-                </a:solidFill>
-                <a:latin typeface="Arial"/>
-              </a:rPr>
-              <a:t>3</a:t>
+              <a:t>Use one key word: Spirit</a:t>
             </a:r>
           </a:p>
         </p:txBody>
@@ -9735,8 +11345,8 @@
         </p:nvSpPr>
         <p:spPr>
           <a:xfrm>
-            <a:off x="1572768" y="4818888"/>
-            <a:ext cx="9372600" cy="384048"/>
+            <a:off x="1691640" y="5504688"/>
+            <a:ext cx="8823960" cy="237744"/>
           </a:xfrm>
           <a:prstGeom prst="rect">
             <a:avLst/>
@@ -9749,10 +11359,11 @@
           </a:bodyPr>
           <a:lstStyle/>
           <a:p>
-            <a:r>
-              <a:rPr sz="1500" b="0">
+            <a:pPr algn="ctr"/>
+            <a:r>
+              <a:rPr sz="1200" b="1">
                 <a:solidFill>
-                  <a:srgbClr val="111827"/>
+                  <a:srgbClr val="D90000"/>
                 </a:solidFill>
                 <a:latin typeface="Arial"/>
               </a:rPr>
@@ -9763,145 +11374,14 @@
       </p:sp>
       <p:sp>
         <p:nvSpPr>
-          <p:cNvPr id="19" name="Rectangle 18"/>
-          <p:cNvSpPr/>
-          <p:nvPr/>
-        </p:nvSpPr>
-        <p:spPr>
-          <a:xfrm>
-            <a:off x="868680" y="5522976"/>
-            <a:ext cx="10378440" cy="713232"/>
-          </a:xfrm>
-          <a:prstGeom prst="rect">
-            <a:avLst/>
-          </a:prstGeom>
-          <a:solidFill>
-            <a:srgbClr val="FFFFFF"/>
-          </a:solidFill>
-          <a:ln w="11430">
-            <a:solidFill>
-              <a:srgbClr val="CBD5E1"/>
-            </a:solidFill>
-          </a:ln>
-        </p:spPr>
-        <p:style>
-          <a:lnRef idx="1">
-            <a:schemeClr val="accent1"/>
-          </a:lnRef>
-          <a:fillRef idx="3">
-            <a:schemeClr val="accent1"/>
-          </a:fillRef>
-          <a:effectRef idx="2">
-            <a:schemeClr val="accent1"/>
-          </a:effectRef>
-          <a:fontRef idx="minor">
-            <a:schemeClr val="lt1"/>
-          </a:fontRef>
-        </p:style>
-        <p:txBody>
-          <a:bodyPr rtlCol="0" anchor="ctr"/>
-          <a:lstStyle/>
-          <a:p>
-            <a:pPr algn="ctr"/>
-          </a:p>
-        </p:txBody>
-      </p:sp>
-      <p:sp>
-        <p:nvSpPr>
-          <p:cNvPr id="20" name="Rectangle 19"/>
-          <p:cNvSpPr/>
-          <p:nvPr/>
-        </p:nvSpPr>
-        <p:spPr>
-          <a:xfrm>
-            <a:off x="868680" y="5522976"/>
-            <a:ext cx="530352" cy="713232"/>
-          </a:xfrm>
-          <a:prstGeom prst="rect">
-            <a:avLst/>
-          </a:prstGeom>
-          <a:solidFill>
-            <a:srgbClr val="4338CA"/>
-          </a:solidFill>
-          <a:ln>
-            <a:noFill/>
-          </a:ln>
-        </p:spPr>
-        <p:style>
-          <a:lnRef idx="1">
-            <a:schemeClr val="accent1"/>
-          </a:lnRef>
-          <a:fillRef idx="3">
-            <a:schemeClr val="accent1"/>
-          </a:fillRef>
-          <a:effectRef idx="2">
-            <a:schemeClr val="accent1"/>
-          </a:effectRef>
-          <a:fontRef idx="minor">
-            <a:schemeClr val="lt1"/>
-          </a:fontRef>
-        </p:style>
-        <p:txBody>
-          <a:bodyPr rtlCol="0" anchor="ctr" wrap="square" lIns="101600" rIns="101600" tIns="38100" bIns="38100"/>
-          <a:lstStyle/>
-          <a:p>
-            <a:pPr algn="ctr"/>
-            <a:r>
-              <a:rPr sz="1500" b="1">
-                <a:solidFill>
-                  <a:srgbClr val="FFFFFF"/>
-                </a:solidFill>
-                <a:latin typeface="Arial"/>
-              </a:rPr>
-              <a:t>4</a:t>
-            </a:r>
-          </a:p>
-        </p:txBody>
-      </p:sp>
-      <p:sp>
-        <p:nvSpPr>
-          <p:cNvPr id="21" name="TextBox 20"/>
+          <p:cNvPr id="19" name="TextBox 18"/>
           <p:cNvSpPr txBox="1"/>
           <p:nvPr/>
         </p:nvSpPr>
         <p:spPr>
           <a:xfrm>
-            <a:off x="1572768" y="5669280"/>
-            <a:ext cx="9372600" cy="384048"/>
-          </a:xfrm>
-          <a:prstGeom prst="rect">
-            <a:avLst/>
-          </a:prstGeom>
-          <a:noFill/>
-        </p:spPr>
-        <p:txBody>
-          <a:bodyPr wrap="square" lIns="0" rIns="0" tIns="0" bIns="0">
-            <a:spAutoFit/>
-          </a:bodyPr>
-          <a:lstStyle/>
-          <a:p>
-            <a:r>
-              <a:rPr sz="1500" b="0">
-                <a:solidFill>
-                  <a:srgbClr val="111827"/>
-                </a:solidFill>
-                <a:latin typeface="Arial"/>
-              </a:rPr>
-              <a:t>Write one clear response.</a:t>
-            </a:r>
-          </a:p>
-        </p:txBody>
-      </p:sp>
-      <p:sp>
-        <p:nvSpPr>
-          <p:cNvPr id="22" name="TextBox 21"/>
-          <p:cNvSpPr txBox="1"/>
-          <p:nvPr/>
-        </p:nvSpPr>
-        <p:spPr>
-          <a:xfrm>
-            <a:off x="685800" y="6419088"/>
-            <a:ext cx="10835640" cy="228600"/>
+            <a:off x="713232" y="6355080"/>
+            <a:ext cx="10835640" cy="219456"/>
           </a:xfrm>
           <a:prstGeom prst="rect">
             <a:avLst/>
@@ -9922,7 +11402,7 @@
                 </a:solidFill>
                 <a:latin typeface="Arial"/>
               </a:rPr>
-              <a:t>Listen • Talk • Try • Explain</a:t>
+              <a:t>P7 class flow: listen • talk • try • explain</a:t>
             </a:r>
           </a:p>
         </p:txBody>

--- a/uganda-p7-mvp/p7_t1_christian_religious_education_0101/p7_t1_christian_religious_education_0101.pptx
+++ b/uganda-p7-mvp/p7_t1_christian_religious_education_0101/p7_t1_christian_religious_education_0101.pptx
@@ -3438,7 +3438,7 @@
         </p:nvSpPr>
         <p:spPr>
           <a:xfrm>
-            <a:off x="685800" y="1024128"/>
+            <a:off x="685800" y="987552"/>
             <a:ext cx="10835640" cy="502920"/>
           </a:xfrm>
           <a:prstGeom prst="rect">
@@ -3473,8 +3473,8 @@
         </p:nvSpPr>
         <p:spPr>
           <a:xfrm>
-            <a:off x="777240" y="1783080"/>
-            <a:ext cx="3794760" cy="4343400"/>
+            <a:off x="777240" y="1755648"/>
+            <a:ext cx="10652760" cy="4480560"/>
           </a:xfrm>
           <a:prstGeom prst="roundRect">
             <a:avLst/>
@@ -3482,7 +3482,7 @@
           <a:solidFill>
             <a:srgbClr val="FFFFFF"/>
           </a:solidFill>
-          <a:ln w="17780">
+          <a:ln w="17145">
             <a:solidFill>
               <a:srgbClr val="1D4ED8"/>
             </a:solidFill>
@@ -3503,42 +3503,77 @@
           </a:fontRef>
         </p:style>
         <p:txBody>
-          <a:bodyPr rtlCol="0" anchor="t" wrap="square" lIns="101600" rIns="101600" tIns="152400" bIns="38100"/>
-          <a:lstStyle/>
-          <a:p>
-            <a:pPr algn="ctr"/>
-            <a:r>
-              <a:rPr sz="1800" b="1">
+          <a:bodyPr rtlCol="0" anchor="t" wrap="square" lIns="101600" rIns="101600" tIns="101600" bIns="38100"/>
+          <a:lstStyle/>
+          <a:p>
+            <a:pPr algn="l"/>
+            <a:r>
+              <a:rPr sz="1200" b="1">
                 <a:solidFill>
                   <a:srgbClr val="1D4ED8"/>
                 </a:solidFill>
                 <a:latin typeface="Arial"/>
               </a:rPr>
-              <a:t>Christian Religious Education</a:t>
-            </a:r>
-          </a:p>
-        </p:txBody>
-      </p:sp>
-      <p:sp>
-        <p:nvSpPr>
-          <p:cNvPr id="12" name="Oval 11"/>
+              <a:t>OPENING VISUAL</a:t>
+            </a:r>
+          </a:p>
+        </p:txBody>
+      </p:sp>
+      <p:sp>
+        <p:nvSpPr>
+          <p:cNvPr id="12" name="TextBox 11"/>
+          <p:cNvSpPr txBox="1"/>
+          <p:nvPr/>
+        </p:nvSpPr>
+        <p:spPr>
+          <a:xfrm>
+            <a:off x="1417319" y="2322576"/>
+            <a:ext cx="9372600" cy="411480"/>
+          </a:xfrm>
+          <a:prstGeom prst="rect">
+            <a:avLst/>
+          </a:prstGeom>
+          <a:noFill/>
+        </p:spPr>
+        <p:txBody>
+          <a:bodyPr wrap="square" lIns="0" rIns="0" tIns="0" bIns="0">
+            <a:spAutoFit/>
+          </a:bodyPr>
+          <a:lstStyle/>
+          <a:p>
+            <a:pPr algn="ctr"/>
+            <a:r>
+              <a:rPr sz="1800" b="1">
+                <a:solidFill>
+                  <a:srgbClr val="111827"/>
+                </a:solidFill>
+                <a:latin typeface="Arial"/>
+              </a:rPr>
+              <a:t>Can you see the wind?</a:t>
+            </a:r>
+          </a:p>
+        </p:txBody>
+      </p:sp>
+      <p:sp>
+        <p:nvSpPr>
+          <p:cNvPr id="13" name="Isosceles Triangle 12"/>
           <p:cNvSpPr/>
           <p:nvPr/>
         </p:nvSpPr>
         <p:spPr>
           <a:xfrm>
-            <a:off x="2429560" y="2939796"/>
-            <a:ext cx="551383" cy="452628"/>
-          </a:xfrm>
-          <a:prstGeom prst="ellipse">
-            <a:avLst/>
-          </a:prstGeom>
-          <a:solidFill>
-            <a:srgbClr val="FCD116"/>
-          </a:solidFill>
-          <a:ln w="10160">
+            <a:off x="4754879" y="2990088"/>
+            <a:ext cx="2651760" cy="2651760"/>
+          </a:xfrm>
+          <a:prstGeom prst="triangle">
+            <a:avLst/>
+          </a:prstGeom>
+          <a:solidFill>
+            <a:srgbClr val="FFF7E0"/>
+          </a:solidFill>
+          <a:ln w="22860">
             <a:solidFill>
-              <a:srgbClr val="D97706"/>
+              <a:srgbClr val="111827"/>
             </a:solidFill>
           </a:ln>
         </p:spPr>
@@ -3566,23 +3601,25 @@
       </p:sp>
       <p:sp>
         <p:nvSpPr>
-          <p:cNvPr id="13" name="Rectangle 12"/>
+          <p:cNvPr id="14" name="Oval 13"/>
           <p:cNvSpPr/>
           <p:nvPr/>
         </p:nvSpPr>
         <p:spPr>
           <a:xfrm>
-            <a:off x="2613355" y="3392424"/>
-            <a:ext cx="183794" cy="1056132"/>
-          </a:xfrm>
-          <a:prstGeom prst="rect">
-            <a:avLst/>
-          </a:prstGeom>
-          <a:solidFill>
-            <a:srgbClr val="D97706"/>
-          </a:solidFill>
-          <a:ln>
-            <a:noFill/>
+            <a:off x="5715000" y="2852928"/>
+            <a:ext cx="822960" cy="822960"/>
+          </a:xfrm>
+          <a:prstGeom prst="ellipse">
+            <a:avLst/>
+          </a:prstGeom>
+          <a:solidFill>
+            <a:srgbClr val="FCD116"/>
+          </a:solidFill>
+          <a:ln w="13970">
+            <a:solidFill>
+              <a:srgbClr val="111827"/>
+            </a:solidFill>
           </a:ln>
         </p:spPr>
         <p:style>
@@ -3600,32 +3637,78 @@
           </a:fontRef>
         </p:style>
         <p:txBody>
-          <a:bodyPr rtlCol="0" anchor="ctr"/>
-          <a:lstStyle/>
-          <a:p>
-            <a:pPr algn="ctr"/>
-          </a:p>
-        </p:txBody>
-      </p:sp>
-      <p:sp>
-        <p:nvSpPr>
-          <p:cNvPr id="14" name="Rectangle 13"/>
+          <a:bodyPr rtlCol="0" anchor="ctr" wrap="square" lIns="101600" rIns="101600" tIns="38100" bIns="38100"/>
+          <a:lstStyle/>
+          <a:p>
+            <a:pPr algn="ctr"/>
+            <a:r>
+              <a:rPr sz="1300" b="1">
+                <a:solidFill>
+                  <a:srgbClr val="111827"/>
+                </a:solidFill>
+                <a:latin typeface="Arial"/>
+              </a:rPr>
+              <a:t>1</a:t>
+            </a:r>
+          </a:p>
+        </p:txBody>
+      </p:sp>
+      <p:sp>
+        <p:nvSpPr>
+          <p:cNvPr id="15" name="TextBox 14"/>
+          <p:cNvSpPr txBox="1"/>
+          <p:nvPr/>
+        </p:nvSpPr>
+        <p:spPr>
+          <a:xfrm>
+            <a:off x="4782312" y="3785616"/>
+            <a:ext cx="2697480" cy="402336"/>
+          </a:xfrm>
+          <a:prstGeom prst="rect">
+            <a:avLst/>
+          </a:prstGeom>
+          <a:noFill/>
+        </p:spPr>
+        <p:txBody>
+          <a:bodyPr wrap="square" lIns="0" rIns="0" tIns="0" bIns="0">
+            <a:spAutoFit/>
+          </a:bodyPr>
+          <a:lstStyle/>
+          <a:p>
+            <a:pPr algn="ctr"/>
+            <a:r>
+              <a:rPr sz="1100" b="1">
+                <a:solidFill>
+                  <a:srgbClr val="111827"/>
+                </a:solidFill>
+                <a:latin typeface="Arial"/>
+              </a:rPr>
+              <a:t>Think alone</a:t>
+            </a:r>
+          </a:p>
+        </p:txBody>
+      </p:sp>
+      <p:sp>
+        <p:nvSpPr>
+          <p:cNvPr id="16" name="Oval 15"/>
           <p:cNvSpPr/>
           <p:nvPr/>
         </p:nvSpPr>
         <p:spPr>
           <a:xfrm>
-            <a:off x="2245766" y="3694176"/>
-            <a:ext cx="918971" cy="125730"/>
-          </a:xfrm>
-          <a:prstGeom prst="rect">
-            <a:avLst/>
-          </a:prstGeom>
-          <a:solidFill>
-            <a:srgbClr val="D97706"/>
-          </a:solidFill>
-          <a:ln>
-            <a:noFill/>
+            <a:off x="4251959" y="4910328"/>
+            <a:ext cx="822960" cy="822960"/>
+          </a:xfrm>
+          <a:prstGeom prst="ellipse">
+            <a:avLst/>
+          </a:prstGeom>
+          <a:solidFill>
+            <a:srgbClr val="D90000"/>
+          </a:solidFill>
+          <a:ln w="13970">
+            <a:solidFill>
+              <a:srgbClr val="111827"/>
+            </a:solidFill>
           </a:ln>
         </p:spPr>
         <p:style>
@@ -3643,32 +3726,78 @@
           </a:fontRef>
         </p:style>
         <p:txBody>
-          <a:bodyPr rtlCol="0" anchor="ctr"/>
-          <a:lstStyle/>
-          <a:p>
-            <a:pPr algn="ctr"/>
-          </a:p>
-        </p:txBody>
-      </p:sp>
-      <p:sp>
-        <p:nvSpPr>
-          <p:cNvPr id="15" name="Rounded Rectangle 14"/>
+          <a:bodyPr rtlCol="0" anchor="ctr" wrap="square" lIns="101600" rIns="101600" tIns="38100" bIns="38100"/>
+          <a:lstStyle/>
+          <a:p>
+            <a:pPr algn="ctr"/>
+            <a:r>
+              <a:rPr sz="1300" b="1">
+                <a:solidFill>
+                  <a:srgbClr val="FFFFFF"/>
+                </a:solidFill>
+                <a:latin typeface="Arial"/>
+              </a:rPr>
+              <a:t>2</a:t>
+            </a:r>
+          </a:p>
+        </p:txBody>
+      </p:sp>
+      <p:sp>
+        <p:nvSpPr>
+          <p:cNvPr id="17" name="TextBox 16"/>
+          <p:cNvSpPr txBox="1"/>
+          <p:nvPr/>
+        </p:nvSpPr>
+        <p:spPr>
+          <a:xfrm>
+            <a:off x="3319271" y="5843016"/>
+            <a:ext cx="2697480" cy="402336"/>
+          </a:xfrm>
+          <a:prstGeom prst="rect">
+            <a:avLst/>
+          </a:prstGeom>
+          <a:noFill/>
+        </p:spPr>
+        <p:txBody>
+          <a:bodyPr wrap="square" lIns="0" rIns="0" tIns="0" bIns="0">
+            <a:spAutoFit/>
+          </a:bodyPr>
+          <a:lstStyle/>
+          <a:p>
+            <a:pPr algn="ctr"/>
+            <a:r>
+              <a:rPr sz="1100" b="1">
+                <a:solidFill>
+                  <a:srgbClr val="111827"/>
+                </a:solidFill>
+                <a:latin typeface="Arial"/>
+              </a:rPr>
+              <a:t>Pair talk</a:t>
+            </a:r>
+          </a:p>
+        </p:txBody>
+      </p:sp>
+      <p:sp>
+        <p:nvSpPr>
+          <p:cNvPr id="18" name="Oval 17"/>
           <p:cNvSpPr/>
           <p:nvPr/>
         </p:nvSpPr>
         <p:spPr>
           <a:xfrm>
-            <a:off x="1878177" y="4247388"/>
-            <a:ext cx="1684782" cy="201168"/>
-          </a:xfrm>
-          <a:prstGeom prst="roundRect">
-            <a:avLst/>
-          </a:prstGeom>
-          <a:solidFill>
-            <a:srgbClr val="D90000"/>
-          </a:solidFill>
-          <a:ln>
-            <a:noFill/>
+            <a:off x="7178040" y="4910328"/>
+            <a:ext cx="822960" cy="822960"/>
+          </a:xfrm>
+          <a:prstGeom prst="ellipse">
+            <a:avLst/>
+          </a:prstGeom>
+          <a:solidFill>
+            <a:srgbClr val="1B7F3A"/>
+          </a:solidFill>
+          <a:ln w="13970">
+            <a:solidFill>
+              <a:srgbClr val="111827"/>
+            </a:solidFill>
           </a:ln>
         </p:spPr>
         <p:style>
@@ -3686,23 +3815,32 @@
           </a:fontRef>
         </p:style>
         <p:txBody>
-          <a:bodyPr rtlCol="0" anchor="ctr"/>
-          <a:lstStyle/>
-          <a:p>
-            <a:pPr algn="ctr"/>
-          </a:p>
-        </p:txBody>
-      </p:sp>
-      <p:sp>
-        <p:nvSpPr>
-          <p:cNvPr id="16" name="TextBox 15"/>
+          <a:bodyPr rtlCol="0" anchor="ctr" wrap="square" lIns="101600" rIns="101600" tIns="38100" bIns="38100"/>
+          <a:lstStyle/>
+          <a:p>
+            <a:pPr algn="ctr"/>
+            <a:r>
+              <a:rPr sz="1300" b="1">
+                <a:solidFill>
+                  <a:srgbClr val="FFFFFF"/>
+                </a:solidFill>
+                <a:latin typeface="Arial"/>
+              </a:rPr>
+              <a:t>3</a:t>
+            </a:r>
+          </a:p>
+        </p:txBody>
+      </p:sp>
+      <p:sp>
+        <p:nvSpPr>
+          <p:cNvPr id="19" name="TextBox 18"/>
           <p:cNvSpPr txBox="1"/>
           <p:nvPr/>
         </p:nvSpPr>
         <p:spPr>
           <a:xfrm>
-            <a:off x="1143000" y="4745736"/>
-            <a:ext cx="3063240" cy="228600"/>
+            <a:off x="6245352" y="5843016"/>
+            <a:ext cx="2697480" cy="402336"/>
           </a:xfrm>
           <a:prstGeom prst="rect">
             <a:avLst/>
@@ -3717,198 +3855,13 @@
           <a:p>
             <a:pPr algn="ctr"/>
             <a:r>
-              <a:rPr sz="1000" b="0">
-                <a:solidFill>
-                  <a:srgbClr val="475569"/>
+              <a:rPr sz="1100" b="1">
+                <a:solidFill>
+                  <a:srgbClr val="111827"/>
                 </a:solidFill>
                 <a:latin typeface="Arial"/>
               </a:rPr>
-              <a:t>Christian Religious Education</a:t>
-            </a:r>
-          </a:p>
-        </p:txBody>
-      </p:sp>
-      <p:sp>
-        <p:nvSpPr>
-          <p:cNvPr id="17" name="TextBox 16"/>
-          <p:cNvSpPr txBox="1"/>
-          <p:nvPr/>
-        </p:nvSpPr>
-        <p:spPr>
-          <a:xfrm>
-            <a:off x="960120" y="5504688"/>
-            <a:ext cx="3429000" cy="274320"/>
-          </a:xfrm>
-          <a:prstGeom prst="rect">
-            <a:avLst/>
-          </a:prstGeom>
-          <a:noFill/>
-        </p:spPr>
-        <p:txBody>
-          <a:bodyPr wrap="square" lIns="0" rIns="0" tIns="0" bIns="0">
-            <a:spAutoFit/>
-          </a:bodyPr>
-          <a:lstStyle/>
-          <a:p>
-            <a:pPr algn="ctr"/>
-            <a:r>
-              <a:rPr sz="1200" b="0">
-                <a:solidFill>
-                  <a:srgbClr val="475569"/>
-                </a:solidFill>
-                <a:latin typeface="Arial"/>
-              </a:rPr>
-              <a:t>Look • wonder • predict</a:t>
-            </a:r>
-          </a:p>
-        </p:txBody>
-      </p:sp>
-      <p:sp>
-        <p:nvSpPr>
-          <p:cNvPr id="18" name="Rounded Rectangle 17"/>
-          <p:cNvSpPr/>
-          <p:nvPr/>
-        </p:nvSpPr>
-        <p:spPr>
-          <a:xfrm>
-            <a:off x="4892040" y="1965960"/>
-            <a:ext cx="6355080" cy="3520440"/>
-          </a:xfrm>
-          <a:prstGeom prst="roundRect">
-            <a:avLst/>
-          </a:prstGeom>
-          <a:solidFill>
-            <a:srgbClr val="FFF7E0"/>
-          </a:solidFill>
-          <a:ln w="20320">
-            <a:solidFill>
-              <a:srgbClr val="1D4ED8"/>
-            </a:solidFill>
-          </a:ln>
-        </p:spPr>
-        <p:style>
-          <a:lnRef idx="1">
-            <a:schemeClr val="accent1"/>
-          </a:lnRef>
-          <a:fillRef idx="3">
-            <a:schemeClr val="accent1"/>
-          </a:fillRef>
-          <a:effectRef idx="2">
-            <a:schemeClr val="accent1"/>
-          </a:effectRef>
-          <a:fontRef idx="minor">
-            <a:schemeClr val="lt1"/>
-          </a:fontRef>
-        </p:style>
-        <p:txBody>
-          <a:bodyPr rtlCol="0" anchor="ctr"/>
-          <a:lstStyle/>
-          <a:p>
-            <a:pPr algn="ctr"/>
-          </a:p>
-        </p:txBody>
-      </p:sp>
-      <p:sp>
-        <p:nvSpPr>
-          <p:cNvPr id="19" name="TextBox 18"/>
-          <p:cNvSpPr txBox="1"/>
-          <p:nvPr/>
-        </p:nvSpPr>
-        <p:spPr>
-          <a:xfrm>
-            <a:off x="5257800" y="2267712"/>
-            <a:ext cx="5623560" cy="256032"/>
-          </a:xfrm>
-          <a:prstGeom prst="rect">
-            <a:avLst/>
-          </a:prstGeom>
-          <a:noFill/>
-        </p:spPr>
-        <p:txBody>
-          <a:bodyPr wrap="square" lIns="0" rIns="0" tIns="0" bIns="0">
-            <a:spAutoFit/>
-          </a:bodyPr>
-          <a:lstStyle/>
-          <a:p>
-            <a:pPr algn="ctr"/>
-            <a:r>
-              <a:rPr sz="1200" b="1">
-                <a:solidFill>
-                  <a:srgbClr val="1D4ED8"/>
-                </a:solidFill>
-                <a:latin typeface="Arial"/>
-              </a:rPr>
-              <a:t>OPENING QUESTION</a:t>
-            </a:r>
-          </a:p>
-        </p:txBody>
-      </p:sp>
-      <p:sp>
-        <p:nvSpPr>
-          <p:cNvPr id="20" name="TextBox 19"/>
-          <p:cNvSpPr txBox="1"/>
-          <p:nvPr/>
-        </p:nvSpPr>
-        <p:spPr>
-          <a:xfrm>
-            <a:off x="5285232" y="2788920"/>
-            <a:ext cx="5577840" cy="987552"/>
-          </a:xfrm>
-          <a:prstGeom prst="rect">
-            <a:avLst/>
-          </a:prstGeom>
-          <a:noFill/>
-        </p:spPr>
-        <p:txBody>
-          <a:bodyPr wrap="square" lIns="0" rIns="0" tIns="0" bIns="0">
-            <a:spAutoFit/>
-          </a:bodyPr>
-          <a:lstStyle/>
-          <a:p>
-            <a:pPr algn="ctr"/>
-            <a:r>
-              <a:rPr sz="2600" b="1">
-                <a:solidFill>
-                  <a:srgbClr val="111827"/>
-                </a:solidFill>
-                <a:latin typeface="Arial"/>
-              </a:rPr>
-              <a:t>Big question: Can you see the wind?</a:t>
-            </a:r>
-          </a:p>
-        </p:txBody>
-      </p:sp>
-      <p:sp>
-        <p:nvSpPr>
-          <p:cNvPr id="21" name="TextBox 20"/>
-          <p:cNvSpPr txBox="1"/>
-          <p:nvPr/>
-        </p:nvSpPr>
-        <p:spPr>
-          <a:xfrm>
-            <a:off x="5285232" y="4315968"/>
-            <a:ext cx="5577840" cy="411480"/>
-          </a:xfrm>
-          <a:prstGeom prst="rect">
-            <a:avLst/>
-          </a:prstGeom>
-          <a:noFill/>
-        </p:spPr>
-        <p:txBody>
-          <a:bodyPr wrap="square" lIns="0" rIns="0" tIns="0" bIns="0">
-            <a:spAutoFit/>
-          </a:bodyPr>
-          <a:lstStyle/>
-          <a:p>
-            <a:pPr algn="ctr"/>
-            <a:r>
-              <a:rPr sz="1400" b="0">
-                <a:solidFill>
-                  <a:srgbClr val="475569"/>
-                </a:solidFill>
-                <a:latin typeface="Arial"/>
-              </a:rPr>
-              <a:t>First think alone. Then tell a partner one possible answer.</a:t>
+              <a:t>Share one idea</a:t>
             </a:r>
           </a:p>
         </p:txBody>
@@ -6618,16 +6571,16 @@
         </p:nvSpPr>
         <p:spPr>
           <a:xfrm>
-            <a:off x="777240" y="1828800"/>
-            <a:ext cx="3337560" cy="4160520"/>
+            <a:off x="777240" y="1755648"/>
+            <a:ext cx="10652760" cy="4480560"/>
           </a:xfrm>
           <a:prstGeom prst="roundRect">
             <a:avLst/>
           </a:prstGeom>
           <a:solidFill>
-            <a:srgbClr val="FFF7E0"/>
-          </a:solidFill>
-          <a:ln w="19050">
+            <a:srgbClr val="FFFFFF"/>
+          </a:solidFill>
+          <a:ln w="17145">
             <a:solidFill>
               <a:srgbClr val="087490"/>
             </a:solidFill>
@@ -6648,33 +6601,77 @@
           </a:fontRef>
         </p:style>
         <p:txBody>
-          <a:bodyPr rtlCol="0" anchor="ctr"/>
-          <a:lstStyle/>
-          <a:p>
-            <a:pPr algn="ctr"/>
-          </a:p>
-        </p:txBody>
-      </p:sp>
-      <p:sp>
-        <p:nvSpPr>
-          <p:cNvPr id="12" name="Oval 11"/>
+          <a:bodyPr rtlCol="0" anchor="t" wrap="square" lIns="101600" rIns="101600" tIns="101600" bIns="38100"/>
+          <a:lstStyle/>
+          <a:p>
+            <a:pPr algn="l"/>
+            <a:r>
+              <a:rPr sz="1200" b="1">
+                <a:solidFill>
+                  <a:srgbClr val="087490"/>
+                </a:solidFill>
+                <a:latin typeface="Arial"/>
+              </a:rPr>
+              <a:t>CONTENT MAP</a:t>
+            </a:r>
+          </a:p>
+        </p:txBody>
+      </p:sp>
+      <p:sp>
+        <p:nvSpPr>
+          <p:cNvPr id="12" name="TextBox 11"/>
+          <p:cNvSpPr txBox="1"/>
+          <p:nvPr/>
+        </p:nvSpPr>
+        <p:spPr>
+          <a:xfrm>
+            <a:off x="1417319" y="2322576"/>
+            <a:ext cx="9372600" cy="411480"/>
+          </a:xfrm>
+          <a:prstGeom prst="rect">
+            <a:avLst/>
+          </a:prstGeom>
+          <a:noFill/>
+        </p:spPr>
+        <p:txBody>
+          <a:bodyPr wrap="square" lIns="0" rIns="0" tIns="0" bIns="0">
+            <a:spAutoFit/>
+          </a:bodyPr>
+          <a:lstStyle/>
+          <a:p>
+            <a:pPr algn="ctr"/>
+            <a:r>
+              <a:rPr sz="1800" b="1">
+                <a:solidFill>
+                  <a:srgbClr val="111827"/>
+                </a:solidFill>
+                <a:latin typeface="Arial"/>
+              </a:rPr>
+              <a:t>Introduction to the "Spirit" concept. Just as</a:t>
+            </a:r>
+          </a:p>
+        </p:txBody>
+      </p:sp>
+      <p:sp>
+        <p:nvSpPr>
+          <p:cNvPr id="13" name="Isosceles Triangle 12"/>
           <p:cNvSpPr/>
           <p:nvPr/>
         </p:nvSpPr>
         <p:spPr>
           <a:xfrm>
-            <a:off x="2230221" y="2610612"/>
-            <a:ext cx="485546" cy="370332"/>
-          </a:xfrm>
-          <a:prstGeom prst="ellipse">
-            <a:avLst/>
-          </a:prstGeom>
-          <a:solidFill>
-            <a:srgbClr val="FCD116"/>
-          </a:solidFill>
-          <a:ln w="10160">
+            <a:off x="4754879" y="2990088"/>
+            <a:ext cx="2651760" cy="2651760"/>
+          </a:xfrm>
+          <a:prstGeom prst="triangle">
+            <a:avLst/>
+          </a:prstGeom>
+          <a:solidFill>
+            <a:srgbClr val="FFF7E0"/>
+          </a:solidFill>
+          <a:ln w="22860">
             <a:solidFill>
-              <a:srgbClr val="D97706"/>
+              <a:srgbClr val="111827"/>
             </a:solidFill>
           </a:ln>
         </p:spPr>
@@ -6702,23 +6699,25 @@
       </p:sp>
       <p:sp>
         <p:nvSpPr>
-          <p:cNvPr id="13" name="Rectangle 12"/>
+          <p:cNvPr id="14" name="Oval 13"/>
           <p:cNvSpPr/>
           <p:nvPr/>
         </p:nvSpPr>
         <p:spPr>
           <a:xfrm>
-            <a:off x="2392070" y="2980944"/>
-            <a:ext cx="161848" cy="864108"/>
-          </a:xfrm>
-          <a:prstGeom prst="rect">
-            <a:avLst/>
-          </a:prstGeom>
-          <a:solidFill>
-            <a:srgbClr val="D97706"/>
-          </a:solidFill>
-          <a:ln>
-            <a:noFill/>
+            <a:off x="5715000" y="2852928"/>
+            <a:ext cx="822960" cy="822960"/>
+          </a:xfrm>
+          <a:prstGeom prst="ellipse">
+            <a:avLst/>
+          </a:prstGeom>
+          <a:solidFill>
+            <a:srgbClr val="FCD116"/>
+          </a:solidFill>
+          <a:ln w="13970">
+            <a:solidFill>
+              <a:srgbClr val="111827"/>
+            </a:solidFill>
           </a:ln>
         </p:spPr>
         <p:style>
@@ -6736,32 +6735,78 @@
           </a:fontRef>
         </p:style>
         <p:txBody>
-          <a:bodyPr rtlCol="0" anchor="ctr"/>
-          <a:lstStyle/>
-          <a:p>
-            <a:pPr algn="ctr"/>
-          </a:p>
-        </p:txBody>
-      </p:sp>
-      <p:sp>
-        <p:nvSpPr>
-          <p:cNvPr id="14" name="Rectangle 13"/>
+          <a:bodyPr rtlCol="0" anchor="ctr" wrap="square" lIns="101600" rIns="101600" tIns="38100" bIns="38100"/>
+          <a:lstStyle/>
+          <a:p>
+            <a:pPr algn="ctr"/>
+            <a:r>
+              <a:rPr sz="1300" b="1">
+                <a:solidFill>
+                  <a:srgbClr val="111827"/>
+                </a:solidFill>
+                <a:latin typeface="Arial"/>
+              </a:rPr>
+              <a:t>1</a:t>
+            </a:r>
+          </a:p>
+        </p:txBody>
+      </p:sp>
+      <p:sp>
+        <p:nvSpPr>
+          <p:cNvPr id="15" name="TextBox 14"/>
+          <p:cNvSpPr txBox="1"/>
+          <p:nvPr/>
+        </p:nvSpPr>
+        <p:spPr>
+          <a:xfrm>
+            <a:off x="4782312" y="3785616"/>
+            <a:ext cx="2697480" cy="402336"/>
+          </a:xfrm>
+          <a:prstGeom prst="rect">
+            <a:avLst/>
+          </a:prstGeom>
+          <a:noFill/>
+        </p:spPr>
+        <p:txBody>
+          <a:bodyPr wrap="square" lIns="0" rIns="0" tIns="0" bIns="0">
+            <a:spAutoFit/>
+          </a:bodyPr>
+          <a:lstStyle/>
+          <a:p>
+            <a:pPr algn="ctr"/>
+            <a:r>
+              <a:rPr sz="1100" b="1">
+                <a:solidFill>
+                  <a:srgbClr val="111827"/>
+                </a:solidFill>
+                <a:latin typeface="Arial"/>
+              </a:rPr>
+              <a:t>A spirit is invisible</a:t>
+            </a:r>
+          </a:p>
+        </p:txBody>
+      </p:sp>
+      <p:sp>
+        <p:nvSpPr>
+          <p:cNvPr id="16" name="Oval 15"/>
           <p:cNvSpPr/>
           <p:nvPr/>
         </p:nvSpPr>
         <p:spPr>
           <a:xfrm>
-            <a:off x="2068372" y="3227832"/>
-            <a:ext cx="809244" cy="102870"/>
-          </a:xfrm>
-          <a:prstGeom prst="rect">
-            <a:avLst/>
-          </a:prstGeom>
-          <a:solidFill>
-            <a:srgbClr val="D97706"/>
-          </a:solidFill>
-          <a:ln>
-            <a:noFill/>
+            <a:off x="4251959" y="4910328"/>
+            <a:ext cx="822960" cy="822960"/>
+          </a:xfrm>
+          <a:prstGeom prst="ellipse">
+            <a:avLst/>
+          </a:prstGeom>
+          <a:solidFill>
+            <a:srgbClr val="D90000"/>
+          </a:solidFill>
+          <a:ln w="13970">
+            <a:solidFill>
+              <a:srgbClr val="111827"/>
+            </a:solidFill>
           </a:ln>
         </p:spPr>
         <p:style>
@@ -6779,32 +6824,78 @@
           </a:fontRef>
         </p:style>
         <p:txBody>
-          <a:bodyPr rtlCol="0" anchor="ctr"/>
-          <a:lstStyle/>
-          <a:p>
-            <a:pPr algn="ctr"/>
-          </a:p>
-        </p:txBody>
-      </p:sp>
-      <p:sp>
-        <p:nvSpPr>
-          <p:cNvPr id="15" name="Rounded Rectangle 14"/>
+          <a:bodyPr rtlCol="0" anchor="ctr" wrap="square" lIns="101600" rIns="101600" tIns="38100" bIns="38100"/>
+          <a:lstStyle/>
+          <a:p>
+            <a:pPr algn="ctr"/>
+            <a:r>
+              <a:rPr sz="1300" b="1">
+                <a:solidFill>
+                  <a:srgbClr val="FFFFFF"/>
+                </a:solidFill>
+                <a:latin typeface="Arial"/>
+              </a:rPr>
+              <a:t>2</a:t>
+            </a:r>
+          </a:p>
+        </p:txBody>
+      </p:sp>
+      <p:sp>
+        <p:nvSpPr>
+          <p:cNvPr id="17" name="TextBox 16"/>
+          <p:cNvSpPr txBox="1"/>
+          <p:nvPr/>
+        </p:nvSpPr>
+        <p:spPr>
+          <a:xfrm>
+            <a:off x="3319271" y="5843016"/>
+            <a:ext cx="2697480" cy="402336"/>
+          </a:xfrm>
+          <a:prstGeom prst="rect">
+            <a:avLst/>
+          </a:prstGeom>
+          <a:noFill/>
+        </p:spPr>
+        <p:txBody>
+          <a:bodyPr wrap="square" lIns="0" rIns="0" tIns="0" bIns="0">
+            <a:spAutoFit/>
+          </a:bodyPr>
+          <a:lstStyle/>
+          <a:p>
+            <a:pPr algn="ctr"/>
+            <a:r>
+              <a:rPr sz="1100" b="1">
+                <a:solidFill>
+                  <a:srgbClr val="111827"/>
+                </a:solidFill>
+                <a:latin typeface="Arial"/>
+              </a:rPr>
+              <a:t>We see the effects of a spirit, like we see</a:t>
+            </a:r>
+          </a:p>
+        </p:txBody>
+      </p:sp>
+      <p:sp>
+        <p:nvSpPr>
+          <p:cNvPr id="18" name="Oval 17"/>
           <p:cNvSpPr/>
           <p:nvPr/>
         </p:nvSpPr>
         <p:spPr>
           <a:xfrm>
-            <a:off x="1744675" y="3680460"/>
-            <a:ext cx="1483614" cy="164592"/>
-          </a:xfrm>
-          <a:prstGeom prst="roundRect">
-            <a:avLst/>
-          </a:prstGeom>
-          <a:solidFill>
-            <a:srgbClr val="D90000"/>
-          </a:solidFill>
-          <a:ln>
-            <a:noFill/>
+            <a:off x="7178040" y="4910328"/>
+            <a:ext cx="822960" cy="822960"/>
+          </a:xfrm>
+          <a:prstGeom prst="ellipse">
+            <a:avLst/>
+          </a:prstGeom>
+          <a:solidFill>
+            <a:srgbClr val="1B7F3A"/>
+          </a:solidFill>
+          <a:ln w="13970">
+            <a:solidFill>
+              <a:srgbClr val="111827"/>
+            </a:solidFill>
           </a:ln>
         </p:spPr>
         <p:style>
@@ -6822,23 +6913,32 @@
           </a:fontRef>
         </p:style>
         <p:txBody>
-          <a:bodyPr rtlCol="0" anchor="ctr"/>
-          <a:lstStyle/>
-          <a:p>
-            <a:pPr algn="ctr"/>
-          </a:p>
-        </p:txBody>
-      </p:sp>
-      <p:sp>
-        <p:nvSpPr>
-          <p:cNvPr id="16" name="TextBox 15"/>
+          <a:bodyPr rtlCol="0" anchor="ctr" wrap="square" lIns="101600" rIns="101600" tIns="38100" bIns="38100"/>
+          <a:lstStyle/>
+          <a:p>
+            <a:pPr algn="ctr"/>
+            <a:r>
+              <a:rPr sz="1300" b="1">
+                <a:solidFill>
+                  <a:srgbClr val="FFFFFF"/>
+                </a:solidFill>
+                <a:latin typeface="Arial"/>
+              </a:rPr>
+              <a:t>3</a:t>
+            </a:r>
+          </a:p>
+        </p:txBody>
+      </p:sp>
+      <p:sp>
+        <p:nvSpPr>
+          <p:cNvPr id="19" name="TextBox 18"/>
           <p:cNvSpPr txBox="1"/>
           <p:nvPr/>
         </p:nvSpPr>
         <p:spPr>
           <a:xfrm>
-            <a:off x="1097280" y="4041648"/>
-            <a:ext cx="2697480" cy="228600"/>
+            <a:off x="6245352" y="5843016"/>
+            <a:ext cx="2697480" cy="402336"/>
           </a:xfrm>
           <a:prstGeom prst="rect">
             <a:avLst/>
@@ -6853,561 +6953,20 @@
           <a:p>
             <a:pPr algn="ctr"/>
             <a:r>
-              <a:rPr sz="1000" b="0">
-                <a:solidFill>
-                  <a:srgbClr val="475569"/>
+              <a:rPr sz="1100" b="1">
+                <a:solidFill>
+                  <a:srgbClr val="111827"/>
                 </a:solidFill>
                 <a:latin typeface="Arial"/>
               </a:rPr>
-              <a:t>Christian Religious Education</a:t>
-            </a:r>
-          </a:p>
-        </p:txBody>
-      </p:sp>
-      <p:sp>
-        <p:nvSpPr>
-          <p:cNvPr id="17" name="TextBox 16"/>
-          <p:cNvSpPr txBox="1"/>
-          <p:nvPr/>
-        </p:nvSpPr>
-        <p:spPr>
-          <a:xfrm>
-            <a:off x="987552" y="4617720"/>
-            <a:ext cx="2907792" cy="256032"/>
-          </a:xfrm>
-          <a:prstGeom prst="rect">
-            <a:avLst/>
-          </a:prstGeom>
-          <a:noFill/>
-        </p:spPr>
-        <p:txBody>
-          <a:bodyPr wrap="square" lIns="0" rIns="0" tIns="0" bIns="0">
-            <a:spAutoFit/>
-          </a:bodyPr>
-          <a:lstStyle/>
-          <a:p>
-            <a:pPr algn="ctr"/>
-            <a:r>
-              <a:rPr sz="1200" b="1">
-                <a:solidFill>
-                  <a:srgbClr val="087490"/>
-                </a:solidFill>
-                <a:latin typeface="Arial"/>
-              </a:rPr>
-              <a:t>KEY IDEA</a:t>
-            </a:r>
-          </a:p>
-        </p:txBody>
-      </p:sp>
-      <p:sp>
-        <p:nvSpPr>
-          <p:cNvPr id="18" name="TextBox 17"/>
-          <p:cNvSpPr txBox="1"/>
-          <p:nvPr/>
-        </p:nvSpPr>
-        <p:spPr>
-          <a:xfrm>
-            <a:off x="960120" y="4919472"/>
-            <a:ext cx="2971800" cy="685800"/>
-          </a:xfrm>
-          <a:prstGeom prst="rect">
-            <a:avLst/>
-          </a:prstGeom>
-          <a:noFill/>
-        </p:spPr>
-        <p:txBody>
-          <a:bodyPr wrap="square" lIns="0" rIns="0" tIns="0" bIns="0">
-            <a:spAutoFit/>
-          </a:bodyPr>
-          <a:lstStyle/>
-          <a:p>
-            <a:pPr algn="ctr"/>
-            <a:r>
-              <a:rPr sz="1500" b="1">
-                <a:solidFill>
-                  <a:srgbClr val="111827"/>
-                </a:solidFill>
-                <a:latin typeface="Arial"/>
-              </a:rPr>
-              <a:t>Key idea: Introduction to the "Spirit" concept. Just as wind is invisible but</a:t>
-            </a:r>
-          </a:p>
-        </p:txBody>
-      </p:sp>
-      <p:sp>
-        <p:nvSpPr>
-          <p:cNvPr id="19" name="Rounded Rectangle 18"/>
-          <p:cNvSpPr/>
-          <p:nvPr/>
-        </p:nvSpPr>
-        <p:spPr>
-          <a:xfrm>
-            <a:off x="4572000" y="1874519"/>
-            <a:ext cx="6812280" cy="932688"/>
-          </a:xfrm>
-          <a:prstGeom prst="roundRect">
-            <a:avLst/>
-          </a:prstGeom>
-          <a:solidFill>
-            <a:srgbClr val="FFFFFF"/>
-          </a:solidFill>
-          <a:ln w="11430">
-            <a:solidFill>
-              <a:srgbClr val="CBD5E1"/>
-            </a:solidFill>
-          </a:ln>
-        </p:spPr>
-        <p:style>
-          <a:lnRef idx="1">
-            <a:schemeClr val="accent1"/>
-          </a:lnRef>
-          <a:fillRef idx="3">
-            <a:schemeClr val="accent1"/>
-          </a:fillRef>
-          <a:effectRef idx="2">
-            <a:schemeClr val="accent1"/>
-          </a:effectRef>
-          <a:fontRef idx="minor">
-            <a:schemeClr val="lt1"/>
-          </a:fontRef>
-        </p:style>
-        <p:txBody>
-          <a:bodyPr rtlCol="0" anchor="ctr"/>
-          <a:lstStyle/>
-          <a:p>
-            <a:pPr algn="ctr"/>
-          </a:p>
-        </p:txBody>
-      </p:sp>
-      <p:sp>
-        <p:nvSpPr>
-          <p:cNvPr id="20" name="Rectangle 19"/>
-          <p:cNvSpPr/>
-          <p:nvPr/>
-        </p:nvSpPr>
-        <p:spPr>
-          <a:xfrm>
-            <a:off x="4572000" y="1874519"/>
-            <a:ext cx="566928" cy="932688"/>
-          </a:xfrm>
-          <a:prstGeom prst="rect">
-            <a:avLst/>
-          </a:prstGeom>
-          <a:solidFill>
-            <a:srgbClr val="087490"/>
-          </a:solidFill>
-          <a:ln>
-            <a:noFill/>
-          </a:ln>
-        </p:spPr>
-        <p:style>
-          <a:lnRef idx="1">
-            <a:schemeClr val="accent1"/>
-          </a:lnRef>
-          <a:fillRef idx="3">
-            <a:schemeClr val="accent1"/>
-          </a:fillRef>
-          <a:effectRef idx="2">
-            <a:schemeClr val="accent1"/>
-          </a:effectRef>
-          <a:fontRef idx="minor">
-            <a:schemeClr val="lt1"/>
-          </a:fontRef>
-        </p:style>
-        <p:txBody>
-          <a:bodyPr rtlCol="0" anchor="ctr"/>
-          <a:lstStyle/>
-          <a:p>
-            <a:pPr algn="ctr"/>
-          </a:p>
-        </p:txBody>
-      </p:sp>
-      <p:sp>
-        <p:nvSpPr>
-          <p:cNvPr id="21" name="TextBox 20"/>
-          <p:cNvSpPr txBox="1"/>
-          <p:nvPr/>
-        </p:nvSpPr>
-        <p:spPr>
-          <a:xfrm>
-            <a:off x="4572000" y="2221991"/>
-            <a:ext cx="566928" cy="237744"/>
-          </a:xfrm>
-          <a:prstGeom prst="rect">
-            <a:avLst/>
-          </a:prstGeom>
-          <a:noFill/>
-        </p:spPr>
-        <p:txBody>
-          <a:bodyPr wrap="square" lIns="0" rIns="0" tIns="0" bIns="0">
-            <a:spAutoFit/>
-          </a:bodyPr>
-          <a:lstStyle/>
-          <a:p>
-            <a:pPr algn="ctr"/>
-            <a:r>
-              <a:rPr sz="1400" b="1">
-                <a:solidFill>
-                  <a:srgbClr val="FFFFFF"/>
-                </a:solidFill>
-                <a:latin typeface="Arial"/>
-              </a:rPr>
-              <a:t>1</a:t>
-            </a:r>
-          </a:p>
-        </p:txBody>
-      </p:sp>
-      <p:sp>
-        <p:nvSpPr>
-          <p:cNvPr id="22" name="TextBox 21"/>
-          <p:cNvSpPr txBox="1"/>
-          <p:nvPr/>
-        </p:nvSpPr>
-        <p:spPr>
-          <a:xfrm>
-            <a:off x="5358384" y="2039112"/>
-            <a:ext cx="5788152" cy="694944"/>
-          </a:xfrm>
-          <a:prstGeom prst="rect">
-            <a:avLst/>
-          </a:prstGeom>
-          <a:noFill/>
-        </p:spPr>
-        <p:txBody>
-          <a:bodyPr wrap="square" lIns="0" rIns="0" tIns="0" bIns="0">
-            <a:spAutoFit/>
-          </a:bodyPr>
-          <a:lstStyle/>
-          <a:p>
-            <a:r>
-              <a:rPr sz="1600" b="1">
-                <a:solidFill>
-                  <a:srgbClr val="111827"/>
-                </a:solidFill>
-                <a:latin typeface="Arial"/>
-              </a:rPr>
-              <a:t>A spirit is invisible.</a:t>
-            </a:r>
-          </a:p>
-        </p:txBody>
-      </p:sp>
-      <p:sp>
-        <p:nvSpPr>
-          <p:cNvPr id="23" name="Rounded Rectangle 22"/>
-          <p:cNvSpPr/>
-          <p:nvPr/>
-        </p:nvSpPr>
-        <p:spPr>
-          <a:xfrm>
-            <a:off x="4572000" y="3108960"/>
-            <a:ext cx="6812280" cy="932688"/>
-          </a:xfrm>
-          <a:prstGeom prst="roundRect">
-            <a:avLst/>
-          </a:prstGeom>
-          <a:solidFill>
-            <a:srgbClr val="FFFFFF"/>
-          </a:solidFill>
-          <a:ln w="11430">
-            <a:solidFill>
-              <a:srgbClr val="CBD5E1"/>
-            </a:solidFill>
-          </a:ln>
-        </p:spPr>
-        <p:style>
-          <a:lnRef idx="1">
-            <a:schemeClr val="accent1"/>
-          </a:lnRef>
-          <a:fillRef idx="3">
-            <a:schemeClr val="accent1"/>
-          </a:fillRef>
-          <a:effectRef idx="2">
-            <a:schemeClr val="accent1"/>
-          </a:effectRef>
-          <a:fontRef idx="minor">
-            <a:schemeClr val="lt1"/>
-          </a:fontRef>
-        </p:style>
-        <p:txBody>
-          <a:bodyPr rtlCol="0" anchor="ctr"/>
-          <a:lstStyle/>
-          <a:p>
-            <a:pPr algn="ctr"/>
-          </a:p>
-        </p:txBody>
-      </p:sp>
-      <p:sp>
-        <p:nvSpPr>
-          <p:cNvPr id="24" name="Rectangle 23"/>
-          <p:cNvSpPr/>
-          <p:nvPr/>
-        </p:nvSpPr>
-        <p:spPr>
-          <a:xfrm>
-            <a:off x="4572000" y="3108960"/>
-            <a:ext cx="566928" cy="932688"/>
-          </a:xfrm>
-          <a:prstGeom prst="rect">
-            <a:avLst/>
-          </a:prstGeom>
-          <a:solidFill>
-            <a:srgbClr val="087490"/>
-          </a:solidFill>
-          <a:ln>
-            <a:noFill/>
-          </a:ln>
-        </p:spPr>
-        <p:style>
-          <a:lnRef idx="1">
-            <a:schemeClr val="accent1"/>
-          </a:lnRef>
-          <a:fillRef idx="3">
-            <a:schemeClr val="accent1"/>
-          </a:fillRef>
-          <a:effectRef idx="2">
-            <a:schemeClr val="accent1"/>
-          </a:effectRef>
-          <a:fontRef idx="minor">
-            <a:schemeClr val="lt1"/>
-          </a:fontRef>
-        </p:style>
-        <p:txBody>
-          <a:bodyPr rtlCol="0" anchor="ctr"/>
-          <a:lstStyle/>
-          <a:p>
-            <a:pPr algn="ctr"/>
-          </a:p>
-        </p:txBody>
-      </p:sp>
-      <p:sp>
-        <p:nvSpPr>
-          <p:cNvPr id="25" name="TextBox 24"/>
-          <p:cNvSpPr txBox="1"/>
-          <p:nvPr/>
-        </p:nvSpPr>
-        <p:spPr>
-          <a:xfrm>
-            <a:off x="4572000" y="3456432"/>
-            <a:ext cx="566928" cy="237744"/>
-          </a:xfrm>
-          <a:prstGeom prst="rect">
-            <a:avLst/>
-          </a:prstGeom>
-          <a:noFill/>
-        </p:spPr>
-        <p:txBody>
-          <a:bodyPr wrap="square" lIns="0" rIns="0" tIns="0" bIns="0">
-            <a:spAutoFit/>
-          </a:bodyPr>
-          <a:lstStyle/>
-          <a:p>
-            <a:pPr algn="ctr"/>
-            <a:r>
-              <a:rPr sz="1400" b="1">
-                <a:solidFill>
-                  <a:srgbClr val="FFFFFF"/>
-                </a:solidFill>
-                <a:latin typeface="Arial"/>
-              </a:rPr>
-              <a:t>2</a:t>
-            </a:r>
-          </a:p>
-        </p:txBody>
-      </p:sp>
-      <p:sp>
-        <p:nvSpPr>
-          <p:cNvPr id="26" name="TextBox 25"/>
-          <p:cNvSpPr txBox="1"/>
-          <p:nvPr/>
-        </p:nvSpPr>
-        <p:spPr>
-          <a:xfrm>
-            <a:off x="5358384" y="3273552"/>
-            <a:ext cx="5788152" cy="694944"/>
-          </a:xfrm>
-          <a:prstGeom prst="rect">
-            <a:avLst/>
-          </a:prstGeom>
-          <a:noFill/>
-        </p:spPr>
-        <p:txBody>
-          <a:bodyPr wrap="square" lIns="0" rIns="0" tIns="0" bIns="0">
-            <a:spAutoFit/>
-          </a:bodyPr>
-          <a:lstStyle/>
-          <a:p>
-            <a:r>
-              <a:rPr sz="1400" b="1">
-                <a:solidFill>
-                  <a:srgbClr val="111827"/>
-                </a:solidFill>
-                <a:latin typeface="Arial"/>
-              </a:rPr>
-              <a:t>We see the effects of a spirit, like we see wind moving trees.</a:t>
-            </a:r>
-          </a:p>
-        </p:txBody>
-      </p:sp>
-      <p:sp>
-        <p:nvSpPr>
-          <p:cNvPr id="27" name="Rounded Rectangle 26"/>
-          <p:cNvSpPr/>
-          <p:nvPr/>
-        </p:nvSpPr>
-        <p:spPr>
-          <a:xfrm>
-            <a:off x="4572000" y="4343400"/>
-            <a:ext cx="6812280" cy="932688"/>
-          </a:xfrm>
-          <a:prstGeom prst="roundRect">
-            <a:avLst/>
-          </a:prstGeom>
-          <a:solidFill>
-            <a:srgbClr val="FFFFFF"/>
-          </a:solidFill>
-          <a:ln w="11430">
-            <a:solidFill>
-              <a:srgbClr val="CBD5E1"/>
-            </a:solidFill>
-          </a:ln>
-        </p:spPr>
-        <p:style>
-          <a:lnRef idx="1">
-            <a:schemeClr val="accent1"/>
-          </a:lnRef>
-          <a:fillRef idx="3">
-            <a:schemeClr val="accent1"/>
-          </a:fillRef>
-          <a:effectRef idx="2">
-            <a:schemeClr val="accent1"/>
-          </a:effectRef>
-          <a:fontRef idx="minor">
-            <a:schemeClr val="lt1"/>
-          </a:fontRef>
-        </p:style>
-        <p:txBody>
-          <a:bodyPr rtlCol="0" anchor="ctr"/>
-          <a:lstStyle/>
-          <a:p>
-            <a:pPr algn="ctr"/>
-          </a:p>
-        </p:txBody>
-      </p:sp>
-      <p:sp>
-        <p:nvSpPr>
-          <p:cNvPr id="28" name="Rectangle 27"/>
-          <p:cNvSpPr/>
-          <p:nvPr/>
-        </p:nvSpPr>
-        <p:spPr>
-          <a:xfrm>
-            <a:off x="4572000" y="4343400"/>
-            <a:ext cx="566928" cy="932688"/>
-          </a:xfrm>
-          <a:prstGeom prst="rect">
-            <a:avLst/>
-          </a:prstGeom>
-          <a:solidFill>
-            <a:srgbClr val="087490"/>
-          </a:solidFill>
-          <a:ln>
-            <a:noFill/>
-          </a:ln>
-        </p:spPr>
-        <p:style>
-          <a:lnRef idx="1">
-            <a:schemeClr val="accent1"/>
-          </a:lnRef>
-          <a:fillRef idx="3">
-            <a:schemeClr val="accent1"/>
-          </a:fillRef>
-          <a:effectRef idx="2">
-            <a:schemeClr val="accent1"/>
-          </a:effectRef>
-          <a:fontRef idx="minor">
-            <a:schemeClr val="lt1"/>
-          </a:fontRef>
-        </p:style>
-        <p:txBody>
-          <a:bodyPr rtlCol="0" anchor="ctr"/>
-          <a:lstStyle/>
-          <a:p>
-            <a:pPr algn="ctr"/>
-          </a:p>
-        </p:txBody>
-      </p:sp>
-      <p:sp>
-        <p:nvSpPr>
-          <p:cNvPr id="29" name="TextBox 28"/>
-          <p:cNvSpPr txBox="1"/>
-          <p:nvPr/>
-        </p:nvSpPr>
-        <p:spPr>
-          <a:xfrm>
-            <a:off x="4572000" y="4690872"/>
-            <a:ext cx="566928" cy="237744"/>
-          </a:xfrm>
-          <a:prstGeom prst="rect">
-            <a:avLst/>
-          </a:prstGeom>
-          <a:noFill/>
-        </p:spPr>
-        <p:txBody>
-          <a:bodyPr wrap="square" lIns="0" rIns="0" tIns="0" bIns="0">
-            <a:spAutoFit/>
-          </a:bodyPr>
-          <a:lstStyle/>
-          <a:p>
-            <a:pPr algn="ctr"/>
-            <a:r>
-              <a:rPr sz="1400" b="1">
-                <a:solidFill>
-                  <a:srgbClr val="FFFFFF"/>
-                </a:solidFill>
-                <a:latin typeface="Arial"/>
-              </a:rPr>
-              <a:t>3</a:t>
-            </a:r>
-          </a:p>
-        </p:txBody>
-      </p:sp>
-      <p:sp>
-        <p:nvSpPr>
-          <p:cNvPr id="30" name="TextBox 29"/>
-          <p:cNvSpPr txBox="1"/>
-          <p:nvPr/>
-        </p:nvSpPr>
-        <p:spPr>
-          <a:xfrm>
-            <a:off x="5358384" y="4507992"/>
-            <a:ext cx="5788152" cy="694944"/>
-          </a:xfrm>
-          <a:prstGeom prst="rect">
-            <a:avLst/>
-          </a:prstGeom>
-          <a:noFill/>
-        </p:spPr>
-        <p:txBody>
-          <a:bodyPr wrap="square" lIns="0" rIns="0" tIns="0" bIns="0">
-            <a:spAutoFit/>
-          </a:bodyPr>
-          <a:lstStyle/>
-          <a:p>
-            <a:r>
-              <a:rPr sz="1600" b="1">
-                <a:solidFill>
-                  <a:srgbClr val="111827"/>
-                </a:solidFill>
-                <a:latin typeface="Arial"/>
-              </a:rPr>
-              <a:t>The Spirit is the "breath" of God.</a:t>
-            </a:r>
-          </a:p>
-        </p:txBody>
-      </p:sp>
-      <p:sp>
-        <p:nvSpPr>
-          <p:cNvPr id="31" name="TextBox 30"/>
+              <a:t>The Spirit is the "breath" of God</a:t>
+            </a:r>
+          </a:p>
+        </p:txBody>
+      </p:sp>
+      <p:sp>
+        <p:nvSpPr>
+          <p:cNvPr id="20" name="TextBox 19"/>
           <p:cNvSpPr txBox="1"/>
           <p:nvPr/>
         </p:nvSpPr>
@@ -7835,18 +7394,18 @@
         </p:nvSpPr>
         <p:spPr>
           <a:xfrm>
-            <a:off x="822960" y="1828800"/>
-            <a:ext cx="7360920" cy="4251960"/>
+            <a:off x="777240" y="1755648"/>
+            <a:ext cx="10652760" cy="4480560"/>
           </a:xfrm>
           <a:prstGeom prst="roundRect">
             <a:avLst/>
           </a:prstGeom>
           <a:solidFill>
-            <a:srgbClr val="1F2937"/>
-          </a:solidFill>
-          <a:ln w="19050">
+            <a:srgbClr val="FFFFFF"/>
+          </a:solidFill>
+          <a:ln w="17145">
             <a:solidFill>
-              <a:srgbClr val="FCD116"/>
+              <a:srgbClr val="D97706"/>
             </a:solidFill>
           </a:ln>
         </p:spPr>
@@ -7865,10 +7424,19 @@
           </a:fontRef>
         </p:style>
         <p:txBody>
-          <a:bodyPr rtlCol="0" anchor="ctr"/>
-          <a:lstStyle/>
-          <a:p>
-            <a:pPr algn="ctr"/>
+          <a:bodyPr rtlCol="0" anchor="t" wrap="square" lIns="101600" rIns="101600" tIns="101600" bIns="38100"/>
+          <a:lstStyle/>
+          <a:p>
+            <a:pPr algn="l"/>
+            <a:r>
+              <a:rPr sz="1200" b="1">
+                <a:solidFill>
+                  <a:srgbClr val="D97706"/>
+                </a:solidFill>
+                <a:latin typeface="Arial"/>
+              </a:rPr>
+              <a:t>MODEL MAP</a:t>
+            </a:r>
           </a:p>
         </p:txBody>
       </p:sp>
@@ -7880,8 +7448,8 @@
         </p:nvSpPr>
         <p:spPr>
           <a:xfrm>
-            <a:off x="1097280" y="2084831"/>
-            <a:ext cx="6812280" cy="256032"/>
+            <a:off x="1417319" y="2322576"/>
+            <a:ext cx="9372600" cy="411480"/>
           </a:xfrm>
           <a:prstGeom prst="rect">
             <a:avLst/>
@@ -7894,140 +7462,39 @@
           </a:bodyPr>
           <a:lstStyle/>
           <a:p>
-            <a:r>
-              <a:rPr sz="1200" b="1">
-                <a:solidFill>
-                  <a:srgbClr val="FCD116"/>
+            <a:pPr algn="ctr"/>
+            <a:r>
+              <a:rPr sz="1800" b="1">
+                <a:solidFill>
+                  <a:srgbClr val="111827"/>
                 </a:solidFill>
                 <a:latin typeface="Arial"/>
               </a:rPr>
-              <a:t>BOARD MODEL</a:t>
-            </a:r>
-          </a:p>
-        </p:txBody>
-      </p:sp>
-      <p:sp>
-        <p:nvSpPr>
-          <p:cNvPr id="13" name="TextBox 12"/>
-          <p:cNvSpPr txBox="1"/>
-          <p:nvPr/>
-        </p:nvSpPr>
-        <p:spPr>
-          <a:xfrm>
-            <a:off x="1143000" y="2578608"/>
-            <a:ext cx="6583680" cy="347472"/>
-          </a:xfrm>
-          <a:prstGeom prst="rect">
-            <a:avLst/>
-          </a:prstGeom>
-          <a:noFill/>
-        </p:spPr>
-        <p:txBody>
-          <a:bodyPr wrap="square" lIns="0" rIns="0" tIns="0" bIns="0">
-            <a:spAutoFit/>
-          </a:bodyPr>
-          <a:lstStyle/>
-          <a:p>
-            <a:r>
-              <a:rPr sz="1600" b="0">
-                <a:solidFill>
-                  <a:srgbClr val="FFFFFF"/>
-                </a:solidFill>
-                <a:latin typeface="Arial"/>
-              </a:rPr>
-              <a:t>1. 2. The Holy Spirit</a:t>
-            </a:r>
-          </a:p>
-        </p:txBody>
-      </p:sp>
-      <p:sp>
-        <p:nvSpPr>
-          <p:cNvPr id="14" name="TextBox 13"/>
-          <p:cNvSpPr txBox="1"/>
-          <p:nvPr/>
-        </p:nvSpPr>
-        <p:spPr>
-          <a:xfrm>
-            <a:off x="1143000" y="3154679"/>
-            <a:ext cx="6583680" cy="347472"/>
-          </a:xfrm>
-          <a:prstGeom prst="rect">
-            <a:avLst/>
-          </a:prstGeom>
-          <a:noFill/>
-        </p:spPr>
-        <p:txBody>
-          <a:bodyPr wrap="square" lIns="0" rIns="0" tIns="0" bIns="0">
-            <a:spAutoFit/>
-          </a:bodyPr>
-          <a:lstStyle/>
-          <a:p>
-            <a:r>
-              <a:rPr sz="1600" b="0">
-                <a:solidFill>
-                  <a:srgbClr val="FFFFFF"/>
-                </a:solidFill>
-                <a:latin typeface="Arial"/>
-              </a:rPr>
-              <a:t>2. He is God's presence in us.</a:t>
-            </a:r>
-          </a:p>
-        </p:txBody>
-      </p:sp>
-      <p:sp>
-        <p:nvSpPr>
-          <p:cNvPr id="15" name="TextBox 14"/>
-          <p:cNvSpPr txBox="1"/>
-          <p:nvPr/>
-        </p:nvSpPr>
-        <p:spPr>
-          <a:xfrm>
-            <a:off x="1143000" y="3730752"/>
-            <a:ext cx="6583680" cy="347472"/>
-          </a:xfrm>
-          <a:prstGeom prst="rect">
-            <a:avLst/>
-          </a:prstGeom>
-          <a:noFill/>
-        </p:spPr>
-        <p:txBody>
-          <a:bodyPr wrap="square" lIns="0" rIns="0" tIns="0" bIns="0">
-            <a:spAutoFit/>
-          </a:bodyPr>
-          <a:lstStyle/>
-          <a:p>
-            <a:r>
-              <a:rPr sz="1600" b="0">
-                <a:solidFill>
-                  <a:srgbClr val="FFFFFF"/>
-                </a:solidFill>
-                <a:latin typeface="Arial"/>
-              </a:rPr>
-              <a:t>3. He is the "Gift and the Giver."</a:t>
-            </a:r>
-          </a:p>
-        </p:txBody>
-      </p:sp>
-      <p:sp>
-        <p:nvSpPr>
-          <p:cNvPr id="16" name="Rounded Rectangle 15"/>
+              <a:t>Worked example</a:t>
+            </a:r>
+          </a:p>
+        </p:txBody>
+      </p:sp>
+      <p:sp>
+        <p:nvSpPr>
+          <p:cNvPr id="13" name="Isosceles Triangle 12"/>
           <p:cNvSpPr/>
           <p:nvPr/>
         </p:nvSpPr>
         <p:spPr>
           <a:xfrm>
-            <a:off x="8549640" y="1828800"/>
-            <a:ext cx="2697480" cy="4251960"/>
-          </a:xfrm>
-          <a:prstGeom prst="roundRect">
+            <a:off x="4754879" y="2990088"/>
+            <a:ext cx="2651760" cy="2651760"/>
+          </a:xfrm>
+          <a:prstGeom prst="triangle">
             <a:avLst/>
           </a:prstGeom>
           <a:solidFill>
             <a:srgbClr val="FFF7E0"/>
           </a:solidFill>
-          <a:ln w="16510">
+          <a:ln w="22860">
             <a:solidFill>
-              <a:srgbClr val="D97706"/>
+              <a:srgbClr val="111827"/>
             </a:solidFill>
           </a:ln>
         </p:spPr>
@@ -8055,14 +7522,14 @@
       </p:sp>
       <p:sp>
         <p:nvSpPr>
-          <p:cNvPr id="17" name="Oval 16"/>
+          <p:cNvPr id="14" name="Oval 13"/>
           <p:cNvSpPr/>
           <p:nvPr/>
         </p:nvSpPr>
         <p:spPr>
           <a:xfrm>
-            <a:off x="9748418" y="2636215"/>
-            <a:ext cx="337413" cy="304495"/>
+            <a:off x="5715000" y="2852928"/>
+            <a:ext cx="822960" cy="822960"/>
           </a:xfrm>
           <a:prstGeom prst="ellipse">
             <a:avLst/>
@@ -8070,9 +7537,9 @@
           <a:solidFill>
             <a:srgbClr val="FCD116"/>
           </a:solidFill>
-          <a:ln w="10160">
+          <a:ln w="13970">
             <a:solidFill>
-              <a:srgbClr val="D97706"/>
+              <a:srgbClr val="111827"/>
             </a:solidFill>
           </a:ln>
         </p:spPr>
@@ -8091,32 +7558,78 @@
           </a:fontRef>
         </p:style>
         <p:txBody>
-          <a:bodyPr rtlCol="0" anchor="ctr"/>
-          <a:lstStyle/>
-          <a:p>
-            <a:pPr algn="ctr"/>
-          </a:p>
-        </p:txBody>
-      </p:sp>
-      <p:sp>
-        <p:nvSpPr>
-          <p:cNvPr id="18" name="Rectangle 17"/>
+          <a:bodyPr rtlCol="0" anchor="ctr" wrap="square" lIns="101600" rIns="101600" tIns="38100" bIns="38100"/>
+          <a:lstStyle/>
+          <a:p>
+            <a:pPr algn="ctr"/>
+            <a:r>
+              <a:rPr sz="1300" b="1">
+                <a:solidFill>
+                  <a:srgbClr val="111827"/>
+                </a:solidFill>
+                <a:latin typeface="Arial"/>
+              </a:rPr>
+              <a:t>1</a:t>
+            </a:r>
+          </a:p>
+        </p:txBody>
+      </p:sp>
+      <p:sp>
+        <p:nvSpPr>
+          <p:cNvPr id="15" name="TextBox 14"/>
+          <p:cNvSpPr txBox="1"/>
+          <p:nvPr/>
+        </p:nvSpPr>
+        <p:spPr>
+          <a:xfrm>
+            <a:off x="4782312" y="3785616"/>
+            <a:ext cx="2697480" cy="402336"/>
+          </a:xfrm>
+          <a:prstGeom prst="rect">
+            <a:avLst/>
+          </a:prstGeom>
+          <a:noFill/>
+        </p:spPr>
+        <p:txBody>
+          <a:bodyPr wrap="square" lIns="0" rIns="0" tIns="0" bIns="0">
+            <a:spAutoFit/>
+          </a:bodyPr>
+          <a:lstStyle/>
+          <a:p>
+            <a:pPr algn="ctr"/>
+            <a:r>
+              <a:rPr sz="1100" b="1">
+                <a:solidFill>
+                  <a:srgbClr val="111827"/>
+                </a:solidFill>
+                <a:latin typeface="Arial"/>
+              </a:rPr>
+              <a:t>2. The Holy Spirit</a:t>
+            </a:r>
+          </a:p>
+        </p:txBody>
+      </p:sp>
+      <p:sp>
+        <p:nvSpPr>
+          <p:cNvPr id="16" name="Oval 15"/>
           <p:cNvSpPr/>
           <p:nvPr/>
         </p:nvSpPr>
         <p:spPr>
           <a:xfrm>
-            <a:off x="9860889" y="2940710"/>
-            <a:ext cx="112471" cy="710488"/>
-          </a:xfrm>
-          <a:prstGeom prst="rect">
-            <a:avLst/>
-          </a:prstGeom>
-          <a:solidFill>
-            <a:srgbClr val="D97706"/>
-          </a:solidFill>
-          <a:ln>
-            <a:noFill/>
+            <a:off x="4251959" y="4910328"/>
+            <a:ext cx="822960" cy="822960"/>
+          </a:xfrm>
+          <a:prstGeom prst="ellipse">
+            <a:avLst/>
+          </a:prstGeom>
+          <a:solidFill>
+            <a:srgbClr val="D90000"/>
+          </a:solidFill>
+          <a:ln w="13970">
+            <a:solidFill>
+              <a:srgbClr val="111827"/>
+            </a:solidFill>
           </a:ln>
         </p:spPr>
         <p:style>
@@ -8134,32 +7647,78 @@
           </a:fontRef>
         </p:style>
         <p:txBody>
-          <a:bodyPr rtlCol="0" anchor="ctr"/>
-          <a:lstStyle/>
-          <a:p>
-            <a:pPr algn="ctr"/>
-          </a:p>
-        </p:txBody>
-      </p:sp>
-      <p:sp>
-        <p:nvSpPr>
-          <p:cNvPr id="19" name="Rectangle 18"/>
+          <a:bodyPr rtlCol="0" anchor="ctr" wrap="square" lIns="101600" rIns="101600" tIns="38100" bIns="38100"/>
+          <a:lstStyle/>
+          <a:p>
+            <a:pPr algn="ctr"/>
+            <a:r>
+              <a:rPr sz="1300" b="1">
+                <a:solidFill>
+                  <a:srgbClr val="FFFFFF"/>
+                </a:solidFill>
+                <a:latin typeface="Arial"/>
+              </a:rPr>
+              <a:t>2</a:t>
+            </a:r>
+          </a:p>
+        </p:txBody>
+      </p:sp>
+      <p:sp>
+        <p:nvSpPr>
+          <p:cNvPr id="17" name="TextBox 16"/>
+          <p:cNvSpPr txBox="1"/>
+          <p:nvPr/>
+        </p:nvSpPr>
+        <p:spPr>
+          <a:xfrm>
+            <a:off x="3319271" y="5843016"/>
+            <a:ext cx="2697480" cy="402336"/>
+          </a:xfrm>
+          <a:prstGeom prst="rect">
+            <a:avLst/>
+          </a:prstGeom>
+          <a:noFill/>
+        </p:spPr>
+        <p:txBody>
+          <a:bodyPr wrap="square" lIns="0" rIns="0" tIns="0" bIns="0">
+            <a:spAutoFit/>
+          </a:bodyPr>
+          <a:lstStyle/>
+          <a:p>
+            <a:pPr algn="ctr"/>
+            <a:r>
+              <a:rPr sz="1100" b="1">
+                <a:solidFill>
+                  <a:srgbClr val="111827"/>
+                </a:solidFill>
+                <a:latin typeface="Arial"/>
+              </a:rPr>
+              <a:t>He is God's presence in us</a:t>
+            </a:r>
+          </a:p>
+        </p:txBody>
+      </p:sp>
+      <p:sp>
+        <p:nvSpPr>
+          <p:cNvPr id="18" name="Oval 17"/>
           <p:cNvSpPr/>
           <p:nvPr/>
         </p:nvSpPr>
         <p:spPr>
           <a:xfrm>
-            <a:off x="9635947" y="3143707"/>
-            <a:ext cx="562355" cy="84582"/>
-          </a:xfrm>
-          <a:prstGeom prst="rect">
-            <a:avLst/>
-          </a:prstGeom>
-          <a:solidFill>
-            <a:srgbClr val="D97706"/>
-          </a:solidFill>
-          <a:ln>
-            <a:noFill/>
+            <a:off x="7178040" y="4910328"/>
+            <a:ext cx="822960" cy="822960"/>
+          </a:xfrm>
+          <a:prstGeom prst="ellipse">
+            <a:avLst/>
+          </a:prstGeom>
+          <a:solidFill>
+            <a:srgbClr val="1B7F3A"/>
+          </a:solidFill>
+          <a:ln w="13970">
+            <a:solidFill>
+              <a:srgbClr val="111827"/>
+            </a:solidFill>
           </a:ln>
         </p:spPr>
         <p:style>
@@ -8177,66 +7736,32 @@
           </a:fontRef>
         </p:style>
         <p:txBody>
-          <a:bodyPr rtlCol="0" anchor="ctr"/>
-          <a:lstStyle/>
-          <a:p>
-            <a:pPr algn="ctr"/>
-          </a:p>
-        </p:txBody>
-      </p:sp>
-      <p:sp>
-        <p:nvSpPr>
-          <p:cNvPr id="20" name="Rounded Rectangle 19"/>
-          <p:cNvSpPr/>
-          <p:nvPr/>
-        </p:nvSpPr>
-        <p:spPr>
-          <a:xfrm>
-            <a:off x="9411004" y="3515868"/>
-            <a:ext cx="1030986" cy="135331"/>
-          </a:xfrm>
-          <a:prstGeom prst="roundRect">
-            <a:avLst/>
-          </a:prstGeom>
-          <a:solidFill>
-            <a:srgbClr val="D90000"/>
-          </a:solidFill>
-          <a:ln>
-            <a:noFill/>
-          </a:ln>
-        </p:spPr>
-        <p:style>
-          <a:lnRef idx="1">
-            <a:schemeClr val="accent1"/>
-          </a:lnRef>
-          <a:fillRef idx="3">
-            <a:schemeClr val="accent1"/>
-          </a:fillRef>
-          <a:effectRef idx="2">
-            <a:schemeClr val="accent1"/>
-          </a:effectRef>
-          <a:fontRef idx="minor">
-            <a:schemeClr val="lt1"/>
-          </a:fontRef>
-        </p:style>
-        <p:txBody>
-          <a:bodyPr rtlCol="0" anchor="ctr"/>
-          <a:lstStyle/>
-          <a:p>
-            <a:pPr algn="ctr"/>
-          </a:p>
-        </p:txBody>
-      </p:sp>
-      <p:sp>
-        <p:nvSpPr>
-          <p:cNvPr id="21" name="TextBox 20"/>
+          <a:bodyPr rtlCol="0" anchor="ctr" wrap="square" lIns="101600" rIns="101600" tIns="38100" bIns="38100"/>
+          <a:lstStyle/>
+          <a:p>
+            <a:pPr algn="ctr"/>
+            <a:r>
+              <a:rPr sz="1300" b="1">
+                <a:solidFill>
+                  <a:srgbClr val="FFFFFF"/>
+                </a:solidFill>
+                <a:latin typeface="Arial"/>
+              </a:rPr>
+              <a:t>3</a:t>
+            </a:r>
+          </a:p>
+        </p:txBody>
+      </p:sp>
+      <p:sp>
+        <p:nvSpPr>
+          <p:cNvPr id="19" name="TextBox 18"/>
           <p:cNvSpPr txBox="1"/>
           <p:nvPr/>
         </p:nvSpPr>
         <p:spPr>
           <a:xfrm>
-            <a:off x="8961120" y="3767328"/>
-            <a:ext cx="1874519" cy="228600"/>
+            <a:off x="6245352" y="5843016"/>
+            <a:ext cx="2697480" cy="402336"/>
           </a:xfrm>
           <a:prstGeom prst="rect">
             <a:avLst/>
@@ -8251,55 +7776,20 @@
           <a:p>
             <a:pPr algn="ctr"/>
             <a:r>
-              <a:rPr sz="1000" b="0">
-                <a:solidFill>
-                  <a:srgbClr val="475569"/>
+              <a:rPr sz="1100" b="1">
+                <a:solidFill>
+                  <a:srgbClr val="111827"/>
                 </a:solidFill>
                 <a:latin typeface="Arial"/>
               </a:rPr>
-              <a:t>Christian Religious Education</a:t>
-            </a:r>
-          </a:p>
-        </p:txBody>
-      </p:sp>
-      <p:sp>
-        <p:nvSpPr>
-          <p:cNvPr id="22" name="TextBox 21"/>
-          <p:cNvSpPr txBox="1"/>
-          <p:nvPr/>
-        </p:nvSpPr>
-        <p:spPr>
-          <a:xfrm>
-            <a:off x="8869680" y="4526280"/>
-            <a:ext cx="2057400" cy="804672"/>
-          </a:xfrm>
-          <a:prstGeom prst="rect">
-            <a:avLst/>
-          </a:prstGeom>
-          <a:noFill/>
-        </p:spPr>
-        <p:txBody>
-          <a:bodyPr wrap="square" lIns="0" rIns="0" tIns="0" bIns="0">
-            <a:spAutoFit/>
-          </a:bodyPr>
-          <a:lstStyle/>
-          <a:p>
-            <a:pPr algn="ctr"/>
-            <a:r>
-              <a:rPr sz="1400" b="1">
-                <a:solidFill>
-                  <a:srgbClr val="111827"/>
-                </a:solidFill>
-                <a:latin typeface="Arial"/>
-              </a:rPr>
-              <a:t>Teacher models first. Learners copy the pattern, then explain the step.</a:t>
-            </a:r>
-          </a:p>
-        </p:txBody>
-      </p:sp>
-      <p:sp>
-        <p:nvSpPr>
-          <p:cNvPr id="23" name="TextBox 22"/>
+              <a:t>He is the "Gift and the Giver."</a:t>
+            </a:r>
+          </a:p>
+        </p:txBody>
+      </p:sp>
+      <p:sp>
+        <p:nvSpPr>
+          <p:cNvPr id="20" name="TextBox 19"/>
           <p:cNvSpPr txBox="1"/>
           <p:nvPr/>
         </p:nvSpPr>
@@ -8727,14 +8217,14 @@
         </p:nvSpPr>
         <p:spPr>
           <a:xfrm>
-            <a:off x="777240" y="1719072"/>
-            <a:ext cx="10652760" cy="822960"/>
+            <a:off x="777240" y="1755648"/>
+            <a:ext cx="10652760" cy="4480560"/>
           </a:xfrm>
           <a:prstGeom prst="roundRect">
             <a:avLst/>
           </a:prstGeom>
           <a:solidFill>
-            <a:srgbClr val="FFF7E0"/>
+            <a:srgbClr val="FFFFFF"/>
           </a:solidFill>
           <a:ln w="17780">
             <a:solidFill>
@@ -8757,42 +8247,67 @@
           </a:fontRef>
         </p:style>
         <p:txBody>
-          <a:bodyPr rtlCol="0" anchor="ctr" wrap="square" lIns="101600" rIns="101600" tIns="38100" bIns="38100"/>
-          <a:lstStyle/>
-          <a:p>
-            <a:pPr algn="ctr"/>
-            <a:r>
-              <a:rPr sz="1900" b="1">
-                <a:solidFill>
-                  <a:srgbClr val="111827"/>
+          <a:bodyPr rtlCol="0" anchor="ctr"/>
+          <a:lstStyle/>
+          <a:p>
+            <a:pPr algn="ctr"/>
+          </a:p>
+        </p:txBody>
+      </p:sp>
+      <p:sp>
+        <p:nvSpPr>
+          <p:cNvPr id="12" name="TextBox 11"/>
+          <p:cNvSpPr txBox="1"/>
+          <p:nvPr/>
+        </p:nvSpPr>
+        <p:spPr>
+          <a:xfrm>
+            <a:off x="1051560" y="1975104"/>
+            <a:ext cx="1920240" cy="237744"/>
+          </a:xfrm>
+          <a:prstGeom prst="rect">
+            <a:avLst/>
+          </a:prstGeom>
+          <a:noFill/>
+        </p:spPr>
+        <p:txBody>
+          <a:bodyPr wrap="square" lIns="0" rIns="0" tIns="0" bIns="0">
+            <a:spAutoFit/>
+          </a:bodyPr>
+          <a:lstStyle/>
+          <a:p>
+            <a:r>
+              <a:rPr sz="1200" b="1">
+                <a:solidFill>
+                  <a:srgbClr val="BE123C"/>
                 </a:solidFill>
                 <a:latin typeface="Arial"/>
               </a:rPr>
-              <a:t>Answer with evidence:</a:t>
-            </a:r>
-          </a:p>
-        </p:txBody>
-      </p:sp>
-      <p:sp>
-        <p:nvSpPr>
-          <p:cNvPr id="12" name="Rounded Rectangle 11"/>
+              <a:t>PRACTICE FLOW</a:t>
+            </a:r>
+          </a:p>
+        </p:txBody>
+      </p:sp>
+      <p:sp>
+        <p:nvSpPr>
+          <p:cNvPr id="13" name="Rounded Rectangle 12"/>
           <p:cNvSpPr/>
           <p:nvPr/>
         </p:nvSpPr>
         <p:spPr>
           <a:xfrm>
-            <a:off x="868680" y="2743200"/>
-            <a:ext cx="10378440" cy="804672"/>
+            <a:off x="777240" y="2304288"/>
+            <a:ext cx="10652760" cy="822960"/>
           </a:xfrm>
           <a:prstGeom prst="roundRect">
             <a:avLst/>
           </a:prstGeom>
           <a:solidFill>
-            <a:srgbClr val="FFFFFF"/>
-          </a:solidFill>
-          <a:ln w="11430">
+            <a:srgbClr val="FFF7E0"/>
+          </a:solidFill>
+          <a:ln w="17780">
             <a:solidFill>
-              <a:srgbClr val="CBD5E1"/>
+              <a:srgbClr val="BE123C"/>
             </a:solidFill>
           </a:ln>
         </p:spPr>
@@ -8811,32 +8326,43 @@
           </a:fontRef>
         </p:style>
         <p:txBody>
-          <a:bodyPr rtlCol="0" anchor="ctr"/>
-          <a:lstStyle/>
-          <a:p>
-            <a:pPr algn="ctr"/>
-          </a:p>
-        </p:txBody>
-      </p:sp>
-      <p:sp>
-        <p:nvSpPr>
-          <p:cNvPr id="13" name="Oval 12"/>
+          <a:bodyPr rtlCol="0" anchor="ctr" wrap="square" lIns="101600" rIns="101600" tIns="38100" bIns="38100"/>
+          <a:lstStyle/>
+          <a:p>
+            <a:pPr algn="ctr"/>
+            <a:r>
+              <a:rPr sz="1900" b="1">
+                <a:solidFill>
+                  <a:srgbClr val="111827"/>
+                </a:solidFill>
+                <a:latin typeface="Arial"/>
+              </a:rPr>
+              <a:t>Answer with evidence</a:t>
+            </a:r>
+          </a:p>
+        </p:txBody>
+      </p:sp>
+      <p:sp>
+        <p:nvSpPr>
+          <p:cNvPr id="14" name="Rounded Rectangle 13"/>
           <p:cNvSpPr/>
           <p:nvPr/>
         </p:nvSpPr>
         <p:spPr>
           <a:xfrm>
-            <a:off x="1078992" y="2898648"/>
-            <a:ext cx="475488" cy="475488"/>
-          </a:xfrm>
-          <a:prstGeom prst="ellipse">
-            <a:avLst/>
-          </a:prstGeom>
-          <a:solidFill>
-            <a:srgbClr val="BE123C"/>
-          </a:solidFill>
-          <a:ln>
-            <a:noFill/>
+            <a:off x="960120" y="3401568"/>
+            <a:ext cx="3063240" cy="1691640"/>
+          </a:xfrm>
+          <a:prstGeom prst="roundRect">
+            <a:avLst/>
+          </a:prstGeom>
+          <a:solidFill>
+            <a:srgbClr val="FFFFFF"/>
+          </a:solidFill>
+          <a:ln w="12700">
+            <a:solidFill>
+              <a:srgbClr val="BE123C"/>
+            </a:solidFill>
           </a:ln>
         </p:spPr>
         <p:style>
@@ -8854,72 +8380,29 @@
           </a:fontRef>
         </p:style>
         <p:txBody>
-          <a:bodyPr rtlCol="0" anchor="ctr" wrap="square" lIns="101600" rIns="101600" tIns="38100" bIns="38100"/>
-          <a:lstStyle/>
-          <a:p>
-            <a:pPr algn="ctr"/>
-            <a:r>
-              <a:rPr sz="1500" b="1">
-                <a:solidFill>
-                  <a:srgbClr val="FFFFFF"/>
-                </a:solidFill>
-                <a:latin typeface="Arial"/>
-              </a:rPr>
-              <a:t>?</a:t>
-            </a:r>
-          </a:p>
-        </p:txBody>
-      </p:sp>
-      <p:sp>
-        <p:nvSpPr>
-          <p:cNvPr id="14" name="TextBox 13"/>
-          <p:cNvSpPr txBox="1"/>
-          <p:nvPr/>
-        </p:nvSpPr>
-        <p:spPr>
-          <a:xfrm>
-            <a:off x="1719072" y="2889504"/>
-            <a:ext cx="5623560" cy="384048"/>
-          </a:xfrm>
-          <a:prstGeom prst="rect">
-            <a:avLst/>
-          </a:prstGeom>
-          <a:noFill/>
-        </p:spPr>
-        <p:txBody>
-          <a:bodyPr wrap="square" lIns="0" rIns="0" tIns="0" bIns="0">
-            <a:spAutoFit/>
-          </a:bodyPr>
-          <a:lstStyle/>
-          <a:p>
-            <a:r>
-              <a:rPr sz="1600" b="1">
-                <a:solidFill>
-                  <a:srgbClr val="111827"/>
-                </a:solidFill>
-                <a:latin typeface="Arial"/>
-              </a:rPr>
-              <a:t>How do you know the wind is there?</a:t>
-            </a:r>
-          </a:p>
-        </p:txBody>
-      </p:sp>
-      <p:sp>
-        <p:nvSpPr>
-          <p:cNvPr id="15" name="Rectangle 14"/>
+          <a:bodyPr rtlCol="0" anchor="ctr"/>
+          <a:lstStyle/>
+          <a:p>
+            <a:pPr algn="ctr"/>
+          </a:p>
+        </p:txBody>
+      </p:sp>
+      <p:sp>
+        <p:nvSpPr>
+          <p:cNvPr id="15" name="Oval 14"/>
           <p:cNvSpPr/>
           <p:nvPr/>
         </p:nvSpPr>
         <p:spPr>
           <a:xfrm>
-            <a:off x="7635240" y="3264408"/>
-            <a:ext cx="3246120" cy="36576"/>
-          </a:xfrm>
-          <a:prstGeom prst="rect">
-            <a:avLst/>
-          </a:prstGeom>
-          <a:solidFill>
-            <a:srgbClr val="CBD5E1"/>
+            <a:off x="1106424" y="3584448"/>
+            <a:ext cx="420624" cy="420624"/>
+          </a:xfrm>
+          <a:prstGeom prst="ellipse">
+            <a:avLst/>
+          </a:prstGeom>
+          <a:solidFill>
+            <a:srgbClr val="BE123C"/>
           </a:solidFill>
           <a:ln>
             <a:noFill/>
@@ -8940,34 +8423,76 @@
           </a:fontRef>
         </p:style>
         <p:txBody>
-          <a:bodyPr rtlCol="0" anchor="ctr"/>
-          <a:lstStyle/>
-          <a:p>
-            <a:pPr algn="ctr"/>
-          </a:p>
-        </p:txBody>
-      </p:sp>
-      <p:sp>
-        <p:nvSpPr>
-          <p:cNvPr id="16" name="Rounded Rectangle 15"/>
+          <a:bodyPr rtlCol="0" anchor="ctr" wrap="square" lIns="101600" rIns="101600" tIns="38100" bIns="38100"/>
+          <a:lstStyle/>
+          <a:p>
+            <a:pPr algn="ctr"/>
+            <a:r>
+              <a:rPr sz="1500" b="1">
+                <a:solidFill>
+                  <a:srgbClr val="FFFFFF"/>
+                </a:solidFill>
+                <a:latin typeface="Arial"/>
+              </a:rPr>
+              <a:t>?</a:t>
+            </a:r>
+          </a:p>
+        </p:txBody>
+      </p:sp>
+      <p:sp>
+        <p:nvSpPr>
+          <p:cNvPr id="16" name="TextBox 15"/>
+          <p:cNvSpPr txBox="1"/>
+          <p:nvPr/>
+        </p:nvSpPr>
+        <p:spPr>
+          <a:xfrm>
+            <a:off x="1655064" y="3529584"/>
+            <a:ext cx="2148840" cy="502920"/>
+          </a:xfrm>
+          <a:prstGeom prst="rect">
+            <a:avLst/>
+          </a:prstGeom>
+          <a:noFill/>
+        </p:spPr>
+        <p:txBody>
+          <a:bodyPr wrap="square" lIns="0" rIns="0" tIns="0" bIns="0">
+            <a:spAutoFit/>
+          </a:bodyPr>
+          <a:lstStyle/>
+          <a:p>
+            <a:pPr algn="ctr"/>
+            <a:r>
+              <a:rPr sz="1400" b="1">
+                <a:solidFill>
+                  <a:srgbClr val="111827"/>
+                </a:solidFill>
+                <a:latin typeface="Arial"/>
+              </a:rPr>
+              <a:t>How do you know the wind is there?</a:t>
+            </a:r>
+          </a:p>
+        </p:txBody>
+      </p:sp>
+      <p:sp>
+        <p:nvSpPr>
+          <p:cNvPr id="17" name="Rectangle 16"/>
           <p:cNvSpPr/>
           <p:nvPr/>
         </p:nvSpPr>
         <p:spPr>
           <a:xfrm>
-            <a:off x="868680" y="3822191"/>
-            <a:ext cx="10378440" cy="804672"/>
-          </a:xfrm>
-          <a:prstGeom prst="roundRect">
-            <a:avLst/>
-          </a:prstGeom>
-          <a:solidFill>
-            <a:srgbClr val="FFFFFF"/>
-          </a:solidFill>
-          <a:ln w="11430">
-            <a:solidFill>
-              <a:srgbClr val="CBD5E1"/>
-            </a:solidFill>
+            <a:off x="1463040" y="4553712"/>
+            <a:ext cx="2057400" cy="32004"/>
+          </a:xfrm>
+          <a:prstGeom prst="rect">
+            <a:avLst/>
+          </a:prstGeom>
+          <a:solidFill>
+            <a:srgbClr val="CBD5E1"/>
+          </a:solidFill>
+          <a:ln>
+            <a:noFill/>
           </a:ln>
         </p:spPr>
         <p:style>
@@ -8994,23 +8519,95 @@
       </p:sp>
       <p:sp>
         <p:nvSpPr>
-          <p:cNvPr id="17" name="Oval 16"/>
+          <p:cNvPr id="18" name="TextBox 17"/>
+          <p:cNvSpPr txBox="1"/>
+          <p:nvPr/>
+        </p:nvSpPr>
+        <p:spPr>
+          <a:xfrm>
+            <a:off x="1463040" y="4709160"/>
+            <a:ext cx="2057400" cy="201168"/>
+          </a:xfrm>
+          <a:prstGeom prst="rect">
+            <a:avLst/>
+          </a:prstGeom>
+          <a:noFill/>
+        </p:spPr>
+        <p:txBody>
+          <a:bodyPr wrap="square" lIns="0" rIns="0" tIns="0" bIns="0">
+            <a:spAutoFit/>
+          </a:bodyPr>
+          <a:lstStyle/>
+          <a:p>
+            <a:pPr algn="ctr"/>
+            <a:r>
+              <a:rPr sz="1000" b="0">
+                <a:solidFill>
+                  <a:srgbClr val="475569"/>
+                </a:solidFill>
+                <a:latin typeface="Arial"/>
+              </a:rPr>
+              <a:t>answer + reason</a:t>
+            </a:r>
+          </a:p>
+        </p:txBody>
+      </p:sp>
+      <p:cxnSp>
+        <p:nvCxnSpPr>
+          <p:cNvPr id="19" name="Connector 18"/>
+          <p:cNvCxnSpPr/>
+          <p:nvPr/>
+        </p:nvCxnSpPr>
+        <p:spPr>
+          <a:xfrm>
+            <a:off x="4014215" y="4251960"/>
+            <a:ext cx="402337" cy="0"/>
+          </a:xfrm>
+          <a:prstGeom prst="line">
+            <a:avLst/>
+          </a:prstGeom>
+          <a:ln w="25400">
+            <a:solidFill>
+              <a:srgbClr val="BE123C"/>
+            </a:solidFill>
+          </a:ln>
+        </p:spPr>
+        <p:style>
+          <a:lnRef idx="2">
+            <a:schemeClr val="accent1"/>
+          </a:lnRef>
+          <a:fillRef idx="0">
+            <a:schemeClr val="accent1"/>
+          </a:fillRef>
+          <a:effectRef idx="1">
+            <a:schemeClr val="accent1"/>
+          </a:effectRef>
+          <a:fontRef idx="minor">
+            <a:schemeClr val="tx1"/>
+          </a:fontRef>
+        </p:style>
+      </p:cxnSp>
+      <p:sp>
+        <p:nvSpPr>
+          <p:cNvPr id="20" name="Rounded Rectangle 19"/>
           <p:cNvSpPr/>
           <p:nvPr/>
         </p:nvSpPr>
         <p:spPr>
           <a:xfrm>
-            <a:off x="1078992" y="3977639"/>
-            <a:ext cx="475488" cy="475488"/>
-          </a:xfrm>
-          <a:prstGeom prst="ellipse">
-            <a:avLst/>
-          </a:prstGeom>
-          <a:solidFill>
-            <a:srgbClr val="BE123C"/>
-          </a:solidFill>
-          <a:ln>
-            <a:noFill/>
+            <a:off x="4416552" y="3401568"/>
+            <a:ext cx="3063240" cy="1691640"/>
+          </a:xfrm>
+          <a:prstGeom prst="roundRect">
+            <a:avLst/>
+          </a:prstGeom>
+          <a:solidFill>
+            <a:srgbClr val="FFF7E0"/>
+          </a:solidFill>
+          <a:ln w="12700">
+            <a:solidFill>
+              <a:srgbClr val="BE123C"/>
+            </a:solidFill>
           </a:ln>
         </p:spPr>
         <p:style>
@@ -9028,72 +8625,29 @@
           </a:fontRef>
         </p:style>
         <p:txBody>
-          <a:bodyPr rtlCol="0" anchor="ctr" wrap="square" lIns="101600" rIns="101600" tIns="38100" bIns="38100"/>
-          <a:lstStyle/>
-          <a:p>
-            <a:pPr algn="ctr"/>
-            <a:r>
-              <a:rPr sz="1500" b="1">
-                <a:solidFill>
-                  <a:srgbClr val="FFFFFF"/>
-                </a:solidFill>
-                <a:latin typeface="Arial"/>
-              </a:rPr>
-              <a:t>?</a:t>
-            </a:r>
-          </a:p>
-        </p:txBody>
-      </p:sp>
-      <p:sp>
-        <p:nvSpPr>
-          <p:cNvPr id="18" name="TextBox 17"/>
-          <p:cNvSpPr txBox="1"/>
-          <p:nvPr/>
-        </p:nvSpPr>
-        <p:spPr>
-          <a:xfrm>
-            <a:off x="1719072" y="3968496"/>
-            <a:ext cx="5623560" cy="384048"/>
-          </a:xfrm>
-          <a:prstGeom prst="rect">
-            <a:avLst/>
-          </a:prstGeom>
-          <a:noFill/>
-        </p:spPr>
-        <p:txBody>
-          <a:bodyPr wrap="square" lIns="0" rIns="0" tIns="0" bIns="0">
-            <a:spAutoFit/>
-          </a:bodyPr>
-          <a:lstStyle/>
-          <a:p>
-            <a:r>
-              <a:rPr sz="1600" b="1">
-                <a:solidFill>
-                  <a:srgbClr val="111827"/>
-                </a:solidFill>
-                <a:latin typeface="Arial"/>
-              </a:rPr>
-              <a:t>Is God visible to our physical eyes?</a:t>
-            </a:r>
-          </a:p>
-        </p:txBody>
-      </p:sp>
-      <p:sp>
-        <p:nvSpPr>
-          <p:cNvPr id="19" name="Rectangle 18"/>
+          <a:bodyPr rtlCol="0" anchor="ctr"/>
+          <a:lstStyle/>
+          <a:p>
+            <a:pPr algn="ctr"/>
+          </a:p>
+        </p:txBody>
+      </p:sp>
+      <p:sp>
+        <p:nvSpPr>
+          <p:cNvPr id="21" name="Oval 20"/>
           <p:cNvSpPr/>
           <p:nvPr/>
         </p:nvSpPr>
         <p:spPr>
           <a:xfrm>
-            <a:off x="7635240" y="4343400"/>
-            <a:ext cx="3246120" cy="36576"/>
-          </a:xfrm>
-          <a:prstGeom prst="rect">
-            <a:avLst/>
-          </a:prstGeom>
-          <a:solidFill>
-            <a:srgbClr val="CBD5E1"/>
+            <a:off x="4562856" y="3584448"/>
+            <a:ext cx="420624" cy="420624"/>
+          </a:xfrm>
+          <a:prstGeom prst="ellipse">
+            <a:avLst/>
+          </a:prstGeom>
+          <a:solidFill>
+            <a:srgbClr val="BE123C"/>
           </a:solidFill>
           <a:ln>
             <a:noFill/>
@@ -9114,34 +8668,76 @@
           </a:fontRef>
         </p:style>
         <p:txBody>
-          <a:bodyPr rtlCol="0" anchor="ctr"/>
-          <a:lstStyle/>
-          <a:p>
-            <a:pPr algn="ctr"/>
-          </a:p>
-        </p:txBody>
-      </p:sp>
-      <p:sp>
-        <p:nvSpPr>
-          <p:cNvPr id="20" name="Rounded Rectangle 19"/>
+          <a:bodyPr rtlCol="0" anchor="ctr" wrap="square" lIns="101600" rIns="101600" tIns="38100" bIns="38100"/>
+          <a:lstStyle/>
+          <a:p>
+            <a:pPr algn="ctr"/>
+            <a:r>
+              <a:rPr sz="1500" b="1">
+                <a:solidFill>
+                  <a:srgbClr val="FFFFFF"/>
+                </a:solidFill>
+                <a:latin typeface="Arial"/>
+              </a:rPr>
+              <a:t>?</a:t>
+            </a:r>
+          </a:p>
+        </p:txBody>
+      </p:sp>
+      <p:sp>
+        <p:nvSpPr>
+          <p:cNvPr id="22" name="TextBox 21"/>
+          <p:cNvSpPr txBox="1"/>
+          <p:nvPr/>
+        </p:nvSpPr>
+        <p:spPr>
+          <a:xfrm>
+            <a:off x="5111496" y="3529584"/>
+            <a:ext cx="2148840" cy="502920"/>
+          </a:xfrm>
+          <a:prstGeom prst="rect">
+            <a:avLst/>
+          </a:prstGeom>
+          <a:noFill/>
+        </p:spPr>
+        <p:txBody>
+          <a:bodyPr wrap="square" lIns="0" rIns="0" tIns="0" bIns="0">
+            <a:spAutoFit/>
+          </a:bodyPr>
+          <a:lstStyle/>
+          <a:p>
+            <a:pPr algn="ctr"/>
+            <a:r>
+              <a:rPr sz="1400" b="1">
+                <a:solidFill>
+                  <a:srgbClr val="111827"/>
+                </a:solidFill>
+                <a:latin typeface="Arial"/>
+              </a:rPr>
+              <a:t>Is God visible to our physical eyes?</a:t>
+            </a:r>
+          </a:p>
+        </p:txBody>
+      </p:sp>
+      <p:sp>
+        <p:nvSpPr>
+          <p:cNvPr id="23" name="Rectangle 22"/>
           <p:cNvSpPr/>
           <p:nvPr/>
         </p:nvSpPr>
         <p:spPr>
           <a:xfrm>
-            <a:off x="868680" y="4901183"/>
-            <a:ext cx="10378440" cy="804672"/>
-          </a:xfrm>
-          <a:prstGeom prst="roundRect">
-            <a:avLst/>
-          </a:prstGeom>
-          <a:solidFill>
-            <a:srgbClr val="FFFFFF"/>
-          </a:solidFill>
-          <a:ln w="11430">
-            <a:solidFill>
-              <a:srgbClr val="CBD5E1"/>
-            </a:solidFill>
+            <a:off x="4919472" y="4553712"/>
+            <a:ext cx="2057400" cy="32004"/>
+          </a:xfrm>
+          <a:prstGeom prst="rect">
+            <a:avLst/>
+          </a:prstGeom>
+          <a:solidFill>
+            <a:srgbClr val="CBD5E1"/>
+          </a:solidFill>
+          <a:ln>
+            <a:noFill/>
           </a:ln>
         </p:spPr>
         <p:style>
@@ -9168,23 +8764,95 @@
       </p:sp>
       <p:sp>
         <p:nvSpPr>
-          <p:cNvPr id="21" name="Oval 20"/>
+          <p:cNvPr id="24" name="TextBox 23"/>
+          <p:cNvSpPr txBox="1"/>
+          <p:nvPr/>
+        </p:nvSpPr>
+        <p:spPr>
+          <a:xfrm>
+            <a:off x="4919472" y="4709160"/>
+            <a:ext cx="2057400" cy="201168"/>
+          </a:xfrm>
+          <a:prstGeom prst="rect">
+            <a:avLst/>
+          </a:prstGeom>
+          <a:noFill/>
+        </p:spPr>
+        <p:txBody>
+          <a:bodyPr wrap="square" lIns="0" rIns="0" tIns="0" bIns="0">
+            <a:spAutoFit/>
+          </a:bodyPr>
+          <a:lstStyle/>
+          <a:p>
+            <a:pPr algn="ctr"/>
+            <a:r>
+              <a:rPr sz="1000" b="0">
+                <a:solidFill>
+                  <a:srgbClr val="475569"/>
+                </a:solidFill>
+                <a:latin typeface="Arial"/>
+              </a:rPr>
+              <a:t>answer + reason</a:t>
+            </a:r>
+          </a:p>
+        </p:txBody>
+      </p:sp>
+      <p:cxnSp>
+        <p:nvCxnSpPr>
+          <p:cNvPr id="25" name="Connector 24"/>
+          <p:cNvCxnSpPr/>
+          <p:nvPr/>
+        </p:nvCxnSpPr>
+        <p:spPr>
+          <a:xfrm>
+            <a:off x="7470648" y="4251960"/>
+            <a:ext cx="402335" cy="0"/>
+          </a:xfrm>
+          <a:prstGeom prst="line">
+            <a:avLst/>
+          </a:prstGeom>
+          <a:ln w="25400">
+            <a:solidFill>
+              <a:srgbClr val="BE123C"/>
+            </a:solidFill>
+          </a:ln>
+        </p:spPr>
+        <p:style>
+          <a:lnRef idx="2">
+            <a:schemeClr val="accent1"/>
+          </a:lnRef>
+          <a:fillRef idx="0">
+            <a:schemeClr val="accent1"/>
+          </a:fillRef>
+          <a:effectRef idx="1">
+            <a:schemeClr val="accent1"/>
+          </a:effectRef>
+          <a:fontRef idx="minor">
+            <a:schemeClr val="tx1"/>
+          </a:fontRef>
+        </p:style>
+      </p:cxnSp>
+      <p:sp>
+        <p:nvSpPr>
+          <p:cNvPr id="26" name="Rounded Rectangle 25"/>
           <p:cNvSpPr/>
           <p:nvPr/>
         </p:nvSpPr>
         <p:spPr>
           <a:xfrm>
-            <a:off x="1078992" y="5056631"/>
-            <a:ext cx="475488" cy="475488"/>
-          </a:xfrm>
-          <a:prstGeom prst="ellipse">
-            <a:avLst/>
-          </a:prstGeom>
-          <a:solidFill>
-            <a:srgbClr val="BE123C"/>
-          </a:solidFill>
-          <a:ln>
-            <a:noFill/>
+            <a:off x="7872983" y="3401568"/>
+            <a:ext cx="3063240" cy="1691640"/>
+          </a:xfrm>
+          <a:prstGeom prst="roundRect">
+            <a:avLst/>
+          </a:prstGeom>
+          <a:solidFill>
+            <a:srgbClr val="FFFFFF"/>
+          </a:solidFill>
+          <a:ln w="12700">
+            <a:solidFill>
+              <a:srgbClr val="BE123C"/>
+            </a:solidFill>
           </a:ln>
         </p:spPr>
         <p:style>
@@ -9202,72 +8870,29 @@
           </a:fontRef>
         </p:style>
         <p:txBody>
-          <a:bodyPr rtlCol="0" anchor="ctr" wrap="square" lIns="101600" rIns="101600" tIns="38100" bIns="38100"/>
-          <a:lstStyle/>
-          <a:p>
-            <a:pPr algn="ctr"/>
-            <a:r>
-              <a:rPr sz="1500" b="1">
-                <a:solidFill>
-                  <a:srgbClr val="FFFFFF"/>
-                </a:solidFill>
-                <a:latin typeface="Arial"/>
-              </a:rPr>
-              <a:t>?</a:t>
-            </a:r>
-          </a:p>
-        </p:txBody>
-      </p:sp>
-      <p:sp>
-        <p:nvSpPr>
-          <p:cNvPr id="22" name="TextBox 21"/>
-          <p:cNvSpPr txBox="1"/>
-          <p:nvPr/>
-        </p:nvSpPr>
-        <p:spPr>
-          <a:xfrm>
-            <a:off x="1719072" y="5047488"/>
-            <a:ext cx="5623560" cy="384048"/>
-          </a:xfrm>
-          <a:prstGeom prst="rect">
-            <a:avLst/>
-          </a:prstGeom>
-          <a:noFill/>
-        </p:spPr>
-        <p:txBody>
-          <a:bodyPr wrap="square" lIns="0" rIns="0" tIns="0" bIns="0">
-            <a:spAutoFit/>
-          </a:bodyPr>
-          <a:lstStyle/>
-          <a:p>
-            <a:r>
-              <a:rPr sz="1600" b="1">
-                <a:solidFill>
-                  <a:srgbClr val="111827"/>
-                </a:solidFill>
-                <a:latin typeface="Arial"/>
-              </a:rPr>
-              <a:t>Who is the Holy Spirit?</a:t>
-            </a:r>
-          </a:p>
-        </p:txBody>
-      </p:sp>
-      <p:sp>
-        <p:nvSpPr>
-          <p:cNvPr id="23" name="Rectangle 22"/>
+          <a:bodyPr rtlCol="0" anchor="ctr"/>
+          <a:lstStyle/>
+          <a:p>
+            <a:pPr algn="ctr"/>
+          </a:p>
+        </p:txBody>
+      </p:sp>
+      <p:sp>
+        <p:nvSpPr>
+          <p:cNvPr id="27" name="Oval 26"/>
           <p:cNvSpPr/>
           <p:nvPr/>
         </p:nvSpPr>
         <p:spPr>
           <a:xfrm>
-            <a:off x="7635240" y="5422392"/>
-            <a:ext cx="3246120" cy="36576"/>
-          </a:xfrm>
-          <a:prstGeom prst="rect">
-            <a:avLst/>
-          </a:prstGeom>
-          <a:solidFill>
-            <a:srgbClr val="CBD5E1"/>
+            <a:off x="8019288" y="3584448"/>
+            <a:ext cx="420624" cy="420624"/>
+          </a:xfrm>
+          <a:prstGeom prst="ellipse">
+            <a:avLst/>
+          </a:prstGeom>
+          <a:solidFill>
+            <a:srgbClr val="BE123C"/>
           </a:solidFill>
           <a:ln>
             <a:noFill/>
@@ -9288,23 +8913,32 @@
           </a:fontRef>
         </p:style>
         <p:txBody>
-          <a:bodyPr rtlCol="0" anchor="ctr"/>
-          <a:lstStyle/>
-          <a:p>
-            <a:pPr algn="ctr"/>
-          </a:p>
-        </p:txBody>
-      </p:sp>
-      <p:sp>
-        <p:nvSpPr>
-          <p:cNvPr id="24" name="TextBox 23"/>
+          <a:bodyPr rtlCol="0" anchor="ctr" wrap="square" lIns="101600" rIns="101600" tIns="38100" bIns="38100"/>
+          <a:lstStyle/>
+          <a:p>
+            <a:pPr algn="ctr"/>
+            <a:r>
+              <a:rPr sz="1500" b="1">
+                <a:solidFill>
+                  <a:srgbClr val="FFFFFF"/>
+                </a:solidFill>
+                <a:latin typeface="Arial"/>
+              </a:rPr>
+              <a:t>?</a:t>
+            </a:r>
+          </a:p>
+        </p:txBody>
+      </p:sp>
+      <p:sp>
+        <p:nvSpPr>
+          <p:cNvPr id="28" name="TextBox 27"/>
           <p:cNvSpPr txBox="1"/>
           <p:nvPr/>
         </p:nvSpPr>
         <p:spPr>
           <a:xfrm>
-            <a:off x="896112" y="5989320"/>
-            <a:ext cx="10287000" cy="274320"/>
+            <a:off x="8567928" y="3529584"/>
+            <a:ext cx="2148840" cy="502920"/>
           </a:xfrm>
           <a:prstGeom prst="rect">
             <a:avLst/>
@@ -9319,20 +8953,133 @@
           <a:p>
             <a:pPr algn="ctr"/>
             <a:r>
-              <a:rPr sz="1200" b="0">
-                <a:solidFill>
-                  <a:srgbClr val="475569"/>
+              <a:rPr sz="1400" b="1">
+                <a:solidFill>
+                  <a:srgbClr val="111827"/>
                 </a:solidFill>
                 <a:latin typeface="Arial"/>
               </a:rPr>
-              <a:t>Use the source idea, not guessing.</a:t>
-            </a:r>
-          </a:p>
-        </p:txBody>
-      </p:sp>
-      <p:sp>
-        <p:nvSpPr>
-          <p:cNvPr id="25" name="TextBox 24"/>
+              <a:t>Who is the Holy Spirit?</a:t>
+            </a:r>
+          </a:p>
+        </p:txBody>
+      </p:sp>
+      <p:sp>
+        <p:nvSpPr>
+          <p:cNvPr id="29" name="Rectangle 28"/>
+          <p:cNvSpPr/>
+          <p:nvPr/>
+        </p:nvSpPr>
+        <p:spPr>
+          <a:xfrm>
+            <a:off x="8375904" y="4553712"/>
+            <a:ext cx="2057400" cy="32004"/>
+          </a:xfrm>
+          <a:prstGeom prst="rect">
+            <a:avLst/>
+          </a:prstGeom>
+          <a:solidFill>
+            <a:srgbClr val="CBD5E1"/>
+          </a:solidFill>
+          <a:ln>
+            <a:noFill/>
+          </a:ln>
+        </p:spPr>
+        <p:style>
+          <a:lnRef idx="1">
+            <a:schemeClr val="accent1"/>
+          </a:lnRef>
+          <a:fillRef idx="3">
+            <a:schemeClr val="accent1"/>
+          </a:fillRef>
+          <a:effectRef idx="2">
+            <a:schemeClr val="accent1"/>
+          </a:effectRef>
+          <a:fontRef idx="minor">
+            <a:schemeClr val="lt1"/>
+          </a:fontRef>
+        </p:style>
+        <p:txBody>
+          <a:bodyPr rtlCol="0" anchor="ctr"/>
+          <a:lstStyle/>
+          <a:p>
+            <a:pPr algn="ctr"/>
+          </a:p>
+        </p:txBody>
+      </p:sp>
+      <p:sp>
+        <p:nvSpPr>
+          <p:cNvPr id="30" name="TextBox 29"/>
+          <p:cNvSpPr txBox="1"/>
+          <p:nvPr/>
+        </p:nvSpPr>
+        <p:spPr>
+          <a:xfrm>
+            <a:off x="8375904" y="4709160"/>
+            <a:ext cx="2057400" cy="201168"/>
+          </a:xfrm>
+          <a:prstGeom prst="rect">
+            <a:avLst/>
+          </a:prstGeom>
+          <a:noFill/>
+        </p:spPr>
+        <p:txBody>
+          <a:bodyPr wrap="square" lIns="0" rIns="0" tIns="0" bIns="0">
+            <a:spAutoFit/>
+          </a:bodyPr>
+          <a:lstStyle/>
+          <a:p>
+            <a:pPr algn="ctr"/>
+            <a:r>
+              <a:rPr sz="1000" b="0">
+                <a:solidFill>
+                  <a:srgbClr val="475569"/>
+                </a:solidFill>
+                <a:latin typeface="Arial"/>
+              </a:rPr>
+              <a:t>answer + reason</a:t>
+            </a:r>
+          </a:p>
+        </p:txBody>
+      </p:sp>
+      <p:sp>
+        <p:nvSpPr>
+          <p:cNvPr id="31" name="TextBox 30"/>
+          <p:cNvSpPr txBox="1"/>
+          <p:nvPr/>
+        </p:nvSpPr>
+        <p:spPr>
+          <a:xfrm>
+            <a:off x="914400" y="5907024"/>
+            <a:ext cx="10287000" cy="274320"/>
+          </a:xfrm>
+          <a:prstGeom prst="rect">
+            <a:avLst/>
+          </a:prstGeom>
+          <a:noFill/>
+        </p:spPr>
+        <p:txBody>
+          <a:bodyPr wrap="square" lIns="0" rIns="0" tIns="0" bIns="0">
+            <a:spAutoFit/>
+          </a:bodyPr>
+          <a:lstStyle/>
+          <a:p>
+            <a:pPr algn="ctr"/>
+            <a:r>
+              <a:rPr sz="1200" b="0">
+                <a:solidFill>
+                  <a:srgbClr val="475569"/>
+                </a:solidFill>
+                <a:latin typeface="Arial"/>
+              </a:rPr>
+              <a:t>Use evidence from the lesson, not guessing.</a:t>
+            </a:r>
+          </a:p>
+        </p:txBody>
+      </p:sp>
+      <p:sp>
+        <p:nvSpPr>
+          <p:cNvPr id="32" name="TextBox 31"/>
           <p:cNvSpPr txBox="1"/>
           <p:nvPr/>
         </p:nvSpPr>
@@ -9760,16 +9507,16 @@
         </p:nvSpPr>
         <p:spPr>
           <a:xfrm>
-            <a:off x="777240" y="1783080"/>
-            <a:ext cx="3063240" cy="4343400"/>
+            <a:off x="777240" y="1755648"/>
+            <a:ext cx="10652760" cy="4480560"/>
           </a:xfrm>
           <a:prstGeom prst="roundRect">
             <a:avLst/>
           </a:prstGeom>
           <a:solidFill>
-            <a:srgbClr val="FFF7E0"/>
-          </a:solidFill>
-          <a:ln w="17780">
+            <a:srgbClr val="FFFFFF"/>
+          </a:solidFill>
+          <a:ln w="17145">
             <a:solidFill>
               <a:srgbClr val="1B7F3A"/>
             </a:solidFill>
@@ -9790,33 +9537,77 @@
           </a:fontRef>
         </p:style>
         <p:txBody>
-          <a:bodyPr rtlCol="0" anchor="ctr"/>
-          <a:lstStyle/>
-          <a:p>
-            <a:pPr algn="ctr"/>
-          </a:p>
-        </p:txBody>
-      </p:sp>
-      <p:sp>
-        <p:nvSpPr>
-          <p:cNvPr id="12" name="Oval 11"/>
+          <a:bodyPr rtlCol="0" anchor="t" wrap="square" lIns="101600" rIns="101600" tIns="101600" bIns="38100"/>
+          <a:lstStyle/>
+          <a:p>
+            <a:pPr algn="l"/>
+            <a:r>
+              <a:rPr sz="1200" b="1">
+                <a:solidFill>
+                  <a:srgbClr val="1B7F3A"/>
+                </a:solidFill>
+                <a:latin typeface="Arial"/>
+              </a:rPr>
+              <a:t>GROUP INFOGRAPHIC</a:t>
+            </a:r>
+          </a:p>
+        </p:txBody>
+      </p:sp>
+      <p:sp>
+        <p:nvSpPr>
+          <p:cNvPr id="12" name="TextBox 11"/>
+          <p:cNvSpPr txBox="1"/>
+          <p:nvPr/>
+        </p:nvSpPr>
+        <p:spPr>
+          <a:xfrm>
+            <a:off x="1417319" y="2322576"/>
+            <a:ext cx="9372600" cy="411480"/>
+          </a:xfrm>
+          <a:prstGeom prst="rect">
+            <a:avLst/>
+          </a:prstGeom>
+          <a:noFill/>
+        </p:spPr>
+        <p:txBody>
+          <a:bodyPr wrap="square" lIns="0" rIns="0" tIns="0" bIns="0">
+            <a:spAutoFit/>
+          </a:bodyPr>
+          <a:lstStyle/>
+          <a:p>
+            <a:pPr algn="ctr"/>
+            <a:r>
+              <a:rPr sz="1800" b="1">
+                <a:solidFill>
+                  <a:srgbClr val="111827"/>
+                </a:solidFill>
+                <a:latin typeface="Arial"/>
+              </a:rPr>
+              <a:t>Challenge</a:t>
+            </a:r>
+          </a:p>
+        </p:txBody>
+      </p:sp>
+      <p:sp>
+        <p:nvSpPr>
+          <p:cNvPr id="13" name="Isosceles Triangle 12"/>
           <p:cNvSpPr/>
           <p:nvPr/>
         </p:nvSpPr>
         <p:spPr>
           <a:xfrm>
-            <a:off x="2122322" y="2461564"/>
-            <a:ext cx="419709" cy="312724"/>
-          </a:xfrm>
-          <a:prstGeom prst="ellipse">
-            <a:avLst/>
-          </a:prstGeom>
-          <a:solidFill>
-            <a:srgbClr val="FCD116"/>
-          </a:solidFill>
-          <a:ln w="10160">
+            <a:off x="4754879" y="2990088"/>
+            <a:ext cx="2651760" cy="2651760"/>
+          </a:xfrm>
+          <a:prstGeom prst="triangle">
+            <a:avLst/>
+          </a:prstGeom>
+          <a:solidFill>
+            <a:srgbClr val="FFF7E0"/>
+          </a:solidFill>
+          <a:ln w="22860">
             <a:solidFill>
-              <a:srgbClr val="D97706"/>
+              <a:srgbClr val="111827"/>
             </a:solidFill>
           </a:ln>
         </p:spPr>
@@ -9844,23 +9635,25 @@
       </p:sp>
       <p:sp>
         <p:nvSpPr>
-          <p:cNvPr id="13" name="Rectangle 12"/>
+          <p:cNvPr id="14" name="Oval 13"/>
           <p:cNvSpPr/>
           <p:nvPr/>
         </p:nvSpPr>
         <p:spPr>
           <a:xfrm>
-            <a:off x="2262225" y="2774289"/>
-            <a:ext cx="139903" cy="729691"/>
-          </a:xfrm>
-          <a:prstGeom prst="rect">
-            <a:avLst/>
-          </a:prstGeom>
-          <a:solidFill>
-            <a:srgbClr val="D97706"/>
-          </a:solidFill>
-          <a:ln>
-            <a:noFill/>
+            <a:off x="5715000" y="2852928"/>
+            <a:ext cx="822960" cy="822960"/>
+          </a:xfrm>
+          <a:prstGeom prst="ellipse">
+            <a:avLst/>
+          </a:prstGeom>
+          <a:solidFill>
+            <a:srgbClr val="FCD116"/>
+          </a:solidFill>
+          <a:ln w="13970">
+            <a:solidFill>
+              <a:srgbClr val="111827"/>
+            </a:solidFill>
           </a:ln>
         </p:spPr>
         <p:style>
@@ -9878,32 +9671,78 @@
           </a:fontRef>
         </p:style>
         <p:txBody>
-          <a:bodyPr rtlCol="0" anchor="ctr"/>
-          <a:lstStyle/>
-          <a:p>
-            <a:pPr algn="ctr"/>
-          </a:p>
-        </p:txBody>
-      </p:sp>
-      <p:sp>
-        <p:nvSpPr>
-          <p:cNvPr id="14" name="Rectangle 13"/>
+          <a:bodyPr rtlCol="0" anchor="ctr" wrap="square" lIns="101600" rIns="101600" tIns="38100" bIns="38100"/>
+          <a:lstStyle/>
+          <a:p>
+            <a:pPr algn="ctr"/>
+            <a:r>
+              <a:rPr sz="1300" b="1">
+                <a:solidFill>
+                  <a:srgbClr val="111827"/>
+                </a:solidFill>
+                <a:latin typeface="Arial"/>
+              </a:rPr>
+              <a:t>1</a:t>
+            </a:r>
+          </a:p>
+        </p:txBody>
+      </p:sp>
+      <p:sp>
+        <p:nvSpPr>
+          <p:cNvPr id="15" name="TextBox 14"/>
+          <p:cNvSpPr txBox="1"/>
+          <p:nvPr/>
+        </p:nvSpPr>
+        <p:spPr>
+          <a:xfrm>
+            <a:off x="4782312" y="3785616"/>
+            <a:ext cx="2697480" cy="402336"/>
+          </a:xfrm>
+          <a:prstGeom prst="rect">
+            <a:avLst/>
+          </a:prstGeom>
+          <a:noFill/>
+        </p:spPr>
+        <p:txBody>
+          <a:bodyPr wrap="square" lIns="0" rIns="0" tIns="0" bIns="0">
+            <a:spAutoFit/>
+          </a:bodyPr>
+          <a:lstStyle/>
+          <a:p>
+            <a:pPr algn="ctr"/>
+            <a:r>
+              <a:rPr sz="1100" b="1">
+                <a:solidFill>
+                  <a:srgbClr val="111827"/>
+                </a:solidFill>
+                <a:latin typeface="Arial"/>
+              </a:rPr>
+              <a:t>Blow on their hands and observe trees moving</a:t>
+            </a:r>
+          </a:p>
+        </p:txBody>
+      </p:sp>
+      <p:sp>
+        <p:nvSpPr>
+          <p:cNvPr id="16" name="Oval 15"/>
           <p:cNvSpPr/>
           <p:nvPr/>
         </p:nvSpPr>
         <p:spPr>
           <a:xfrm>
-            <a:off x="1982419" y="2982772"/>
-            <a:ext cx="699515" cy="86868"/>
-          </a:xfrm>
-          <a:prstGeom prst="rect">
-            <a:avLst/>
-          </a:prstGeom>
-          <a:solidFill>
-            <a:srgbClr val="D97706"/>
-          </a:solidFill>
-          <a:ln>
-            <a:noFill/>
+            <a:off x="4251959" y="4910328"/>
+            <a:ext cx="822960" cy="822960"/>
+          </a:xfrm>
+          <a:prstGeom prst="ellipse">
+            <a:avLst/>
+          </a:prstGeom>
+          <a:solidFill>
+            <a:srgbClr val="D90000"/>
+          </a:solidFill>
+          <a:ln w="13970">
+            <a:solidFill>
+              <a:srgbClr val="111827"/>
+            </a:solidFill>
           </a:ln>
         </p:spPr>
         <p:style>
@@ -9921,32 +9760,78 @@
           </a:fontRef>
         </p:style>
         <p:txBody>
-          <a:bodyPr rtlCol="0" anchor="ctr"/>
-          <a:lstStyle/>
-          <a:p>
-            <a:pPr algn="ctr"/>
-          </a:p>
-        </p:txBody>
-      </p:sp>
-      <p:sp>
-        <p:nvSpPr>
-          <p:cNvPr id="15" name="Rounded Rectangle 14"/>
+          <a:bodyPr rtlCol="0" anchor="ctr" wrap="square" lIns="101600" rIns="101600" tIns="38100" bIns="38100"/>
+          <a:lstStyle/>
+          <a:p>
+            <a:pPr algn="ctr"/>
+            <a:r>
+              <a:rPr sz="1300" b="1">
+                <a:solidFill>
+                  <a:srgbClr val="FFFFFF"/>
+                </a:solidFill>
+                <a:latin typeface="Arial"/>
+              </a:rPr>
+              <a:t>2</a:t>
+            </a:r>
+          </a:p>
+        </p:txBody>
+      </p:sp>
+      <p:sp>
+        <p:nvSpPr>
+          <p:cNvPr id="17" name="TextBox 16"/>
+          <p:cNvSpPr txBox="1"/>
+          <p:nvPr/>
+        </p:nvSpPr>
+        <p:spPr>
+          <a:xfrm>
+            <a:off x="3319271" y="5843016"/>
+            <a:ext cx="2697480" cy="402336"/>
+          </a:xfrm>
+          <a:prstGeom prst="rect">
+            <a:avLst/>
+          </a:prstGeom>
+          <a:noFill/>
+        </p:spPr>
+        <p:txBody>
+          <a:bodyPr wrap="square" lIns="0" rIns="0" tIns="0" bIns="0">
+            <a:spAutoFit/>
+          </a:bodyPr>
+          <a:lstStyle/>
+          <a:p>
+            <a:pPr algn="ctr"/>
+            <a:r>
+              <a:rPr sz="1100" b="1">
+                <a:solidFill>
+                  <a:srgbClr val="111827"/>
+                </a:solidFill>
+                <a:latin typeface="Arial"/>
+              </a:rPr>
+              <a:t>Discuss in pairs what it means to receive a</a:t>
+            </a:r>
+          </a:p>
+        </p:txBody>
+      </p:sp>
+      <p:sp>
+        <p:nvSpPr>
+          <p:cNvPr id="18" name="Oval 17"/>
           <p:cNvSpPr/>
           <p:nvPr/>
         </p:nvSpPr>
         <p:spPr>
           <a:xfrm>
-            <a:off x="1702612" y="3364991"/>
-            <a:ext cx="1282446" cy="138988"/>
-          </a:xfrm>
-          <a:prstGeom prst="roundRect">
-            <a:avLst/>
-          </a:prstGeom>
-          <a:solidFill>
-            <a:srgbClr val="D90000"/>
-          </a:solidFill>
-          <a:ln>
-            <a:noFill/>
+            <a:off x="7178040" y="4910328"/>
+            <a:ext cx="822960" cy="822960"/>
+          </a:xfrm>
+          <a:prstGeom prst="ellipse">
+            <a:avLst/>
+          </a:prstGeom>
+          <a:solidFill>
+            <a:srgbClr val="1B7F3A"/>
+          </a:solidFill>
+          <a:ln w="13970">
+            <a:solidFill>
+              <a:srgbClr val="111827"/>
+            </a:solidFill>
           </a:ln>
         </p:spPr>
         <p:style>
@@ -9964,23 +9849,32 @@
           </a:fontRef>
         </p:style>
         <p:txBody>
-          <a:bodyPr rtlCol="0" anchor="ctr"/>
-          <a:lstStyle/>
-          <a:p>
-            <a:pPr algn="ctr"/>
-          </a:p>
-        </p:txBody>
-      </p:sp>
-      <p:sp>
-        <p:nvSpPr>
-          <p:cNvPr id="16" name="TextBox 15"/>
+          <a:bodyPr rtlCol="0" anchor="ctr" wrap="square" lIns="101600" rIns="101600" tIns="38100" bIns="38100"/>
+          <a:lstStyle/>
+          <a:p>
+            <a:pPr algn="ctr"/>
+            <a:r>
+              <a:rPr sz="1300" b="1">
+                <a:solidFill>
+                  <a:srgbClr val="FFFFFF"/>
+                </a:solidFill>
+                <a:latin typeface="Arial"/>
+              </a:rPr>
+              <a:t>3</a:t>
+            </a:r>
+          </a:p>
+        </p:txBody>
+      </p:sp>
+      <p:sp>
+        <p:nvSpPr>
+          <p:cNvPr id="19" name="TextBox 18"/>
           <p:cNvSpPr txBox="1"/>
           <p:nvPr/>
         </p:nvSpPr>
         <p:spPr>
           <a:xfrm>
-            <a:off x="1143000" y="3630168"/>
-            <a:ext cx="2331720" cy="228600"/>
+            <a:off x="6245352" y="5843016"/>
+            <a:ext cx="2697480" cy="402336"/>
           </a:xfrm>
           <a:prstGeom prst="rect">
             <a:avLst/>
@@ -9995,97 +9889,27 @@
           <a:p>
             <a:pPr algn="ctr"/>
             <a:r>
-              <a:rPr sz="1000" b="0">
-                <a:solidFill>
-                  <a:srgbClr val="475569"/>
+              <a:rPr sz="1100" b="1">
+                <a:solidFill>
+                  <a:srgbClr val="111827"/>
                 </a:solidFill>
                 <a:latin typeface="Arial"/>
               </a:rPr>
-              <a:t>Christian Religious Education</a:t>
-            </a:r>
-          </a:p>
-        </p:txBody>
-      </p:sp>
-      <p:sp>
-        <p:nvSpPr>
-          <p:cNvPr id="17" name="TextBox 16"/>
-          <p:cNvSpPr txBox="1"/>
-          <p:nvPr/>
-        </p:nvSpPr>
-        <p:spPr>
-          <a:xfrm>
-            <a:off x="960120" y="4315968"/>
-            <a:ext cx="2697480" cy="310896"/>
-          </a:xfrm>
-          <a:prstGeom prst="rect">
-            <a:avLst/>
-          </a:prstGeom>
-          <a:noFill/>
-        </p:spPr>
-        <p:txBody>
-          <a:bodyPr wrap="square" lIns="0" rIns="0" tIns="0" bIns="0">
-            <a:spAutoFit/>
-          </a:bodyPr>
-          <a:lstStyle/>
-          <a:p>
-            <a:pPr algn="ctr"/>
-            <a:r>
-              <a:rPr sz="1300" b="1">
-                <a:solidFill>
-                  <a:srgbClr val="1B7F3A"/>
-                </a:solidFill>
-                <a:latin typeface="Arial"/>
-              </a:rPr>
-              <a:t>GROUP CHALLENGE</a:t>
-            </a:r>
-          </a:p>
-        </p:txBody>
-      </p:sp>
-      <p:sp>
-        <p:nvSpPr>
-          <p:cNvPr id="18" name="TextBox 17"/>
-          <p:cNvSpPr txBox="1"/>
-          <p:nvPr/>
-        </p:nvSpPr>
-        <p:spPr>
-          <a:xfrm>
-            <a:off x="1005840" y="4754880"/>
-            <a:ext cx="2606040" cy="640080"/>
-          </a:xfrm>
-          <a:prstGeom prst="rect">
-            <a:avLst/>
-          </a:prstGeom>
-          <a:noFill/>
-        </p:spPr>
-        <p:txBody>
-          <a:bodyPr wrap="square" lIns="0" rIns="0" tIns="0" bIns="0">
-            <a:spAutoFit/>
-          </a:bodyPr>
-          <a:lstStyle/>
-          <a:p>
-            <a:pPr algn="ctr"/>
-            <a:r>
-              <a:rPr sz="1500" b="1">
-                <a:solidFill>
-                  <a:srgbClr val="111827"/>
-                </a:solidFill>
-                <a:latin typeface="Arial"/>
-              </a:rPr>
-              <a:t>Produce one answer the class can check.</a:t>
-            </a:r>
-          </a:p>
-        </p:txBody>
-      </p:sp>
-      <p:sp>
-        <p:nvSpPr>
-          <p:cNvPr id="19" name="Rounded Rectangle 18"/>
+              <a:t>Teacher demonstrates the Trinity using the</a:t>
+            </a:r>
+          </a:p>
+        </p:txBody>
+      </p:sp>
+      <p:sp>
+        <p:nvSpPr>
+          <p:cNvPr id="20" name="Rounded Rectangle 19"/>
           <p:cNvSpPr/>
           <p:nvPr/>
         </p:nvSpPr>
         <p:spPr>
           <a:xfrm>
-            <a:off x="4343400" y="1828800"/>
-            <a:ext cx="6903720" cy="868680"/>
+            <a:off x="3703320" y="5650992"/>
+            <a:ext cx="5440680" cy="457200"/>
           </a:xfrm>
           <a:prstGeom prst="roundRect">
             <a:avLst/>
@@ -10093,9 +9917,9 @@
           <a:solidFill>
             <a:srgbClr val="FFFFFF"/>
           </a:solidFill>
-          <a:ln w="11430">
+          <a:ln w="12700">
             <a:solidFill>
-              <a:srgbClr val="CBD5E1"/>
+              <a:srgbClr val="D90000"/>
             </a:solidFill>
           </a:ln>
         </p:spPr>
@@ -10123,57 +9947,14 @@
       </p:sp>
       <p:sp>
         <p:nvSpPr>
-          <p:cNvPr id="20" name="Rectangle 19"/>
-          <p:cNvSpPr/>
-          <p:nvPr/>
-        </p:nvSpPr>
-        <p:spPr>
-          <a:xfrm>
-            <a:off x="4343400" y="1828800"/>
-            <a:ext cx="566928" cy="868680"/>
-          </a:xfrm>
-          <a:prstGeom prst="rect">
-            <a:avLst/>
-          </a:prstGeom>
-          <a:solidFill>
-            <a:srgbClr val="1B7F3A"/>
-          </a:solidFill>
-          <a:ln>
-            <a:noFill/>
-          </a:ln>
-        </p:spPr>
-        <p:style>
-          <a:lnRef idx="1">
-            <a:schemeClr val="accent1"/>
-          </a:lnRef>
-          <a:fillRef idx="3">
-            <a:schemeClr val="accent1"/>
-          </a:fillRef>
-          <a:effectRef idx="2">
-            <a:schemeClr val="accent1"/>
-          </a:effectRef>
-          <a:fontRef idx="minor">
-            <a:schemeClr val="lt1"/>
-          </a:fontRef>
-        </p:style>
-        <p:txBody>
-          <a:bodyPr rtlCol="0" anchor="ctr"/>
-          <a:lstStyle/>
-          <a:p>
-            <a:pPr algn="ctr"/>
-          </a:p>
-        </p:txBody>
-      </p:sp>
-      <p:sp>
-        <p:nvSpPr>
           <p:cNvPr id="21" name="TextBox 20"/>
           <p:cNvSpPr txBox="1"/>
           <p:nvPr/>
         </p:nvSpPr>
         <p:spPr>
           <a:xfrm>
-            <a:off x="4343400" y="2144268"/>
-            <a:ext cx="566928" cy="237744"/>
+            <a:off x="3886200" y="5769864"/>
+            <a:ext cx="5074920" cy="164592"/>
           </a:xfrm>
           <a:prstGeom prst="rect">
             <a:avLst/>
@@ -10188,13 +9969,13 @@
           <a:p>
             <a:pPr algn="ctr"/>
             <a:r>
-              <a:rPr sz="1400" b="1">
-                <a:solidFill>
-                  <a:srgbClr val="FFFFFF"/>
+              <a:rPr sz="1100" b="1">
+                <a:solidFill>
+                  <a:srgbClr val="D90000"/>
                 </a:solidFill>
                 <a:latin typeface="Arial"/>
               </a:rPr>
-              <a:t>1</a:t>
+              <a:t>Share-out: explain one result, then improve it.</a:t>
             </a:r>
           </a:p>
         </p:txBody>
@@ -10202,434 +9983,6 @@
       <p:sp>
         <p:nvSpPr>
           <p:cNvPr id="22" name="TextBox 21"/>
-          <p:cNvSpPr txBox="1"/>
-          <p:nvPr/>
-        </p:nvSpPr>
-        <p:spPr>
-          <a:xfrm>
-            <a:off x="5129784" y="1993392"/>
-            <a:ext cx="5879592" cy="630936"/>
-          </a:xfrm>
-          <a:prstGeom prst="rect">
-            <a:avLst/>
-          </a:prstGeom>
-          <a:noFill/>
-        </p:spPr>
-        <p:txBody>
-          <a:bodyPr wrap="square" lIns="0" rIns="0" tIns="0" bIns="0">
-            <a:spAutoFit/>
-          </a:bodyPr>
-          <a:lstStyle/>
-          <a:p>
-            <a:r>
-              <a:rPr sz="1200" b="1">
-                <a:solidFill>
-                  <a:srgbClr val="111827"/>
-                </a:solidFill>
-                <a:latin typeface="Arial"/>
-              </a:rPr>
-              <a:t>Blow on their hands and observe trees moving outside to understand the concept</a:t>
-            </a:r>
-          </a:p>
-        </p:txBody>
-      </p:sp>
-      <p:sp>
-        <p:nvSpPr>
-          <p:cNvPr id="23" name="Rounded Rectangle 22"/>
-          <p:cNvSpPr/>
-          <p:nvPr/>
-        </p:nvSpPr>
-        <p:spPr>
-          <a:xfrm>
-            <a:off x="4343400" y="2999232"/>
-            <a:ext cx="6903720" cy="868680"/>
-          </a:xfrm>
-          <a:prstGeom prst="roundRect">
-            <a:avLst/>
-          </a:prstGeom>
-          <a:solidFill>
-            <a:srgbClr val="FFFFFF"/>
-          </a:solidFill>
-          <a:ln w="11430">
-            <a:solidFill>
-              <a:srgbClr val="CBD5E1"/>
-            </a:solidFill>
-          </a:ln>
-        </p:spPr>
-        <p:style>
-          <a:lnRef idx="1">
-            <a:schemeClr val="accent1"/>
-          </a:lnRef>
-          <a:fillRef idx="3">
-            <a:schemeClr val="accent1"/>
-          </a:fillRef>
-          <a:effectRef idx="2">
-            <a:schemeClr val="accent1"/>
-          </a:effectRef>
-          <a:fontRef idx="minor">
-            <a:schemeClr val="lt1"/>
-          </a:fontRef>
-        </p:style>
-        <p:txBody>
-          <a:bodyPr rtlCol="0" anchor="ctr"/>
-          <a:lstStyle/>
-          <a:p>
-            <a:pPr algn="ctr"/>
-          </a:p>
-        </p:txBody>
-      </p:sp>
-      <p:sp>
-        <p:nvSpPr>
-          <p:cNvPr id="24" name="Rectangle 23"/>
-          <p:cNvSpPr/>
-          <p:nvPr/>
-        </p:nvSpPr>
-        <p:spPr>
-          <a:xfrm>
-            <a:off x="4343400" y="2999232"/>
-            <a:ext cx="566928" cy="868680"/>
-          </a:xfrm>
-          <a:prstGeom prst="rect">
-            <a:avLst/>
-          </a:prstGeom>
-          <a:solidFill>
-            <a:srgbClr val="1B7F3A"/>
-          </a:solidFill>
-          <a:ln>
-            <a:noFill/>
-          </a:ln>
-        </p:spPr>
-        <p:style>
-          <a:lnRef idx="1">
-            <a:schemeClr val="accent1"/>
-          </a:lnRef>
-          <a:fillRef idx="3">
-            <a:schemeClr val="accent1"/>
-          </a:fillRef>
-          <a:effectRef idx="2">
-            <a:schemeClr val="accent1"/>
-          </a:effectRef>
-          <a:fontRef idx="minor">
-            <a:schemeClr val="lt1"/>
-          </a:fontRef>
-        </p:style>
-        <p:txBody>
-          <a:bodyPr rtlCol="0" anchor="ctr"/>
-          <a:lstStyle/>
-          <a:p>
-            <a:pPr algn="ctr"/>
-          </a:p>
-        </p:txBody>
-      </p:sp>
-      <p:sp>
-        <p:nvSpPr>
-          <p:cNvPr id="25" name="TextBox 24"/>
-          <p:cNvSpPr txBox="1"/>
-          <p:nvPr/>
-        </p:nvSpPr>
-        <p:spPr>
-          <a:xfrm>
-            <a:off x="4343400" y="3314700"/>
-            <a:ext cx="566928" cy="237744"/>
-          </a:xfrm>
-          <a:prstGeom prst="rect">
-            <a:avLst/>
-          </a:prstGeom>
-          <a:noFill/>
-        </p:spPr>
-        <p:txBody>
-          <a:bodyPr wrap="square" lIns="0" rIns="0" tIns="0" bIns="0">
-            <a:spAutoFit/>
-          </a:bodyPr>
-          <a:lstStyle/>
-          <a:p>
-            <a:pPr algn="ctr"/>
-            <a:r>
-              <a:rPr sz="1400" b="1">
-                <a:solidFill>
-                  <a:srgbClr val="FFFFFF"/>
-                </a:solidFill>
-                <a:latin typeface="Arial"/>
-              </a:rPr>
-              <a:t>2</a:t>
-            </a:r>
-          </a:p>
-        </p:txBody>
-      </p:sp>
-      <p:sp>
-        <p:nvSpPr>
-          <p:cNvPr id="26" name="TextBox 25"/>
-          <p:cNvSpPr txBox="1"/>
-          <p:nvPr/>
-        </p:nvSpPr>
-        <p:spPr>
-          <a:xfrm>
-            <a:off x="5129784" y="3163824"/>
-            <a:ext cx="5879592" cy="630936"/>
-          </a:xfrm>
-          <a:prstGeom prst="rect">
-            <a:avLst/>
-          </a:prstGeom>
-          <a:noFill/>
-        </p:spPr>
-        <p:txBody>
-          <a:bodyPr wrap="square" lIns="0" rIns="0" tIns="0" bIns="0">
-            <a:spAutoFit/>
-          </a:bodyPr>
-          <a:lstStyle/>
-          <a:p>
-            <a:r>
-              <a:rPr sz="1200" b="1">
-                <a:solidFill>
-                  <a:srgbClr val="111827"/>
-                </a:solidFill>
-                <a:latin typeface="Arial"/>
-              </a:rPr>
-              <a:t>Discuss in pairs what it means to receive a gift that is also the person who gave</a:t>
-            </a:r>
-          </a:p>
-        </p:txBody>
-      </p:sp>
-      <p:sp>
-        <p:nvSpPr>
-          <p:cNvPr id="27" name="Rounded Rectangle 26"/>
-          <p:cNvSpPr/>
-          <p:nvPr/>
-        </p:nvSpPr>
-        <p:spPr>
-          <a:xfrm>
-            <a:off x="4343400" y="4169664"/>
-            <a:ext cx="6903720" cy="868680"/>
-          </a:xfrm>
-          <a:prstGeom prst="roundRect">
-            <a:avLst/>
-          </a:prstGeom>
-          <a:solidFill>
-            <a:srgbClr val="FFFFFF"/>
-          </a:solidFill>
-          <a:ln w="11430">
-            <a:solidFill>
-              <a:srgbClr val="CBD5E1"/>
-            </a:solidFill>
-          </a:ln>
-        </p:spPr>
-        <p:style>
-          <a:lnRef idx="1">
-            <a:schemeClr val="accent1"/>
-          </a:lnRef>
-          <a:fillRef idx="3">
-            <a:schemeClr val="accent1"/>
-          </a:fillRef>
-          <a:effectRef idx="2">
-            <a:schemeClr val="accent1"/>
-          </a:effectRef>
-          <a:fontRef idx="minor">
-            <a:schemeClr val="lt1"/>
-          </a:fontRef>
-        </p:style>
-        <p:txBody>
-          <a:bodyPr rtlCol="0" anchor="ctr"/>
-          <a:lstStyle/>
-          <a:p>
-            <a:pPr algn="ctr"/>
-          </a:p>
-        </p:txBody>
-      </p:sp>
-      <p:sp>
-        <p:nvSpPr>
-          <p:cNvPr id="28" name="Rectangle 27"/>
-          <p:cNvSpPr/>
-          <p:nvPr/>
-        </p:nvSpPr>
-        <p:spPr>
-          <a:xfrm>
-            <a:off x="4343400" y="4169664"/>
-            <a:ext cx="566928" cy="868680"/>
-          </a:xfrm>
-          <a:prstGeom prst="rect">
-            <a:avLst/>
-          </a:prstGeom>
-          <a:solidFill>
-            <a:srgbClr val="1B7F3A"/>
-          </a:solidFill>
-          <a:ln>
-            <a:noFill/>
-          </a:ln>
-        </p:spPr>
-        <p:style>
-          <a:lnRef idx="1">
-            <a:schemeClr val="accent1"/>
-          </a:lnRef>
-          <a:fillRef idx="3">
-            <a:schemeClr val="accent1"/>
-          </a:fillRef>
-          <a:effectRef idx="2">
-            <a:schemeClr val="accent1"/>
-          </a:effectRef>
-          <a:fontRef idx="minor">
-            <a:schemeClr val="lt1"/>
-          </a:fontRef>
-        </p:style>
-        <p:txBody>
-          <a:bodyPr rtlCol="0" anchor="ctr"/>
-          <a:lstStyle/>
-          <a:p>
-            <a:pPr algn="ctr"/>
-          </a:p>
-        </p:txBody>
-      </p:sp>
-      <p:sp>
-        <p:nvSpPr>
-          <p:cNvPr id="29" name="TextBox 28"/>
-          <p:cNvSpPr txBox="1"/>
-          <p:nvPr/>
-        </p:nvSpPr>
-        <p:spPr>
-          <a:xfrm>
-            <a:off x="4343400" y="4485132"/>
-            <a:ext cx="566928" cy="237744"/>
-          </a:xfrm>
-          <a:prstGeom prst="rect">
-            <a:avLst/>
-          </a:prstGeom>
-          <a:noFill/>
-        </p:spPr>
-        <p:txBody>
-          <a:bodyPr wrap="square" lIns="0" rIns="0" tIns="0" bIns="0">
-            <a:spAutoFit/>
-          </a:bodyPr>
-          <a:lstStyle/>
-          <a:p>
-            <a:pPr algn="ctr"/>
-            <a:r>
-              <a:rPr sz="1400" b="1">
-                <a:solidFill>
-                  <a:srgbClr val="FFFFFF"/>
-                </a:solidFill>
-                <a:latin typeface="Arial"/>
-              </a:rPr>
-              <a:t>3</a:t>
-            </a:r>
-          </a:p>
-        </p:txBody>
-      </p:sp>
-      <p:sp>
-        <p:nvSpPr>
-          <p:cNvPr id="30" name="TextBox 29"/>
-          <p:cNvSpPr txBox="1"/>
-          <p:nvPr/>
-        </p:nvSpPr>
-        <p:spPr>
-          <a:xfrm>
-            <a:off x="5129784" y="4334256"/>
-            <a:ext cx="5879592" cy="630936"/>
-          </a:xfrm>
-          <a:prstGeom prst="rect">
-            <a:avLst/>
-          </a:prstGeom>
-          <a:noFill/>
-        </p:spPr>
-        <p:txBody>
-          <a:bodyPr wrap="square" lIns="0" rIns="0" tIns="0" bIns="0">
-            <a:spAutoFit/>
-          </a:bodyPr>
-          <a:lstStyle/>
-          <a:p>
-            <a:r>
-              <a:rPr sz="1200" b="1">
-                <a:solidFill>
-                  <a:srgbClr val="111827"/>
-                </a:solidFill>
-                <a:latin typeface="Arial"/>
-              </a:rPr>
-              <a:t>Teacher demonstrates the Trinity using the three-stone stove analogy while</a:t>
-            </a:r>
-          </a:p>
-        </p:txBody>
-      </p:sp>
-      <p:sp>
-        <p:nvSpPr>
-          <p:cNvPr id="31" name="Rounded Rectangle 30"/>
-          <p:cNvSpPr/>
-          <p:nvPr/>
-        </p:nvSpPr>
-        <p:spPr>
-          <a:xfrm>
-            <a:off x="4343400" y="5413248"/>
-            <a:ext cx="6903720" cy="658368"/>
-          </a:xfrm>
-          <a:prstGeom prst="roundRect">
-            <a:avLst/>
-          </a:prstGeom>
-          <a:solidFill>
-            <a:srgbClr val="FFFFFF"/>
-          </a:solidFill>
-          <a:ln w="13970">
-            <a:solidFill>
-              <a:srgbClr val="D90000"/>
-            </a:solidFill>
-          </a:ln>
-        </p:spPr>
-        <p:style>
-          <a:lnRef idx="1">
-            <a:schemeClr val="accent1"/>
-          </a:lnRef>
-          <a:fillRef idx="3">
-            <a:schemeClr val="accent1"/>
-          </a:fillRef>
-          <a:effectRef idx="2">
-            <a:schemeClr val="accent1"/>
-          </a:effectRef>
-          <a:fontRef idx="minor">
-            <a:schemeClr val="lt1"/>
-          </a:fontRef>
-        </p:style>
-        <p:txBody>
-          <a:bodyPr rtlCol="0" anchor="ctr"/>
-          <a:lstStyle/>
-          <a:p>
-            <a:pPr algn="ctr"/>
-          </a:p>
-        </p:txBody>
-      </p:sp>
-      <p:sp>
-        <p:nvSpPr>
-          <p:cNvPr id="32" name="TextBox 31"/>
-          <p:cNvSpPr txBox="1"/>
-          <p:nvPr/>
-        </p:nvSpPr>
-        <p:spPr>
-          <a:xfrm>
-            <a:off x="4572000" y="5577840"/>
-            <a:ext cx="6446520" cy="274320"/>
-          </a:xfrm>
-          <a:prstGeom prst="rect">
-            <a:avLst/>
-          </a:prstGeom>
-          <a:noFill/>
-        </p:spPr>
-        <p:txBody>
-          <a:bodyPr wrap="square" lIns="0" rIns="0" tIns="0" bIns="0">
-            <a:spAutoFit/>
-          </a:bodyPr>
-          <a:lstStyle/>
-          <a:p>
-            <a:pPr algn="ctr"/>
-            <a:r>
-              <a:rPr sz="1400" b="1">
-                <a:solidFill>
-                  <a:srgbClr val="D90000"/>
-                </a:solidFill>
-                <a:latin typeface="Arial"/>
-              </a:rPr>
-              <a:t>Class share-out: one group explains, one group improves it.</a:t>
-            </a:r>
-          </a:p>
-        </p:txBody>
-      </p:sp>
-      <p:sp>
-        <p:nvSpPr>
-          <p:cNvPr id="33" name="TextBox 32"/>
           <p:cNvSpPr txBox="1"/>
           <p:nvPr/>
         </p:nvSpPr>

--- a/uganda-p7-mvp/p7_t1_christian_religious_education_0101/p7_t1_christian_religious_education_0101.pptx
+++ b/uganda-p7-mvp/p7_t1_christian_religious_education_0101/p7_t1_christian_religious_education_0101.pptx
@@ -3527,8 +3527,8 @@
         </p:nvSpPr>
         <p:spPr>
           <a:xfrm>
-            <a:off x="1417319" y="2322576"/>
-            <a:ext cx="9372600" cy="411480"/>
+            <a:off x="1417319" y="2286000"/>
+            <a:ext cx="9372600" cy="310896"/>
           </a:xfrm>
           <a:prstGeom prst="rect">
             <a:avLst/>
@@ -3543,7 +3543,7 @@
           <a:p>
             <a:pPr algn="ctr"/>
             <a:r>
-              <a:rPr sz="1800" b="1">
+              <a:rPr sz="1700" b="1">
                 <a:solidFill>
                   <a:srgbClr val="111827"/>
                 </a:solidFill>
@@ -3556,22 +3556,65 @@
       </p:sp>
       <p:sp>
         <p:nvSpPr>
-          <p:cNvPr id="13" name="Isosceles Triangle 12"/>
-          <p:cNvSpPr/>
-          <p:nvPr/>
-        </p:nvSpPr>
-        <p:spPr>
-          <a:xfrm>
-            <a:off x="4754879" y="2990088"/>
-            <a:ext cx="2651760" cy="2651760"/>
-          </a:xfrm>
-          <a:prstGeom prst="triangle">
-            <a:avLst/>
-          </a:prstGeom>
-          <a:solidFill>
-            <a:srgbClr val="FFF7E0"/>
-          </a:solidFill>
-          <a:ln w="22860">
+          <p:cNvPr id="13" name="Rectangle 12"/>
+          <p:cNvSpPr/>
+          <p:nvPr/>
+        </p:nvSpPr>
+        <p:spPr>
+          <a:xfrm>
+            <a:off x="2194560" y="4178808"/>
+            <a:ext cx="146304" cy="658368"/>
+          </a:xfrm>
+          <a:prstGeom prst="rect">
+            <a:avLst/>
+          </a:prstGeom>
+          <a:solidFill>
+            <a:srgbClr val="78350F"/>
+          </a:solidFill>
+          <a:ln>
+            <a:noFill/>
+          </a:ln>
+        </p:spPr>
+        <p:style>
+          <a:lnRef idx="1">
+            <a:schemeClr val="accent1"/>
+          </a:lnRef>
+          <a:fillRef idx="3">
+            <a:schemeClr val="accent1"/>
+          </a:fillRef>
+          <a:effectRef idx="2">
+            <a:schemeClr val="accent1"/>
+          </a:effectRef>
+          <a:fontRef idx="minor">
+            <a:schemeClr val="lt1"/>
+          </a:fontRef>
+        </p:style>
+        <p:txBody>
+          <a:bodyPr rtlCol="0" anchor="ctr"/>
+          <a:lstStyle/>
+          <a:p>
+            <a:pPr algn="ctr"/>
+          </a:p>
+        </p:txBody>
+      </p:sp>
+      <p:sp>
+        <p:nvSpPr>
+          <p:cNvPr id="14" name="Oval 13"/>
+          <p:cNvSpPr/>
+          <p:nvPr/>
+        </p:nvSpPr>
+        <p:spPr>
+          <a:xfrm>
+            <a:off x="1874519" y="3584448"/>
+            <a:ext cx="786384" cy="786384"/>
+          </a:xfrm>
+          <a:prstGeom prst="ellipse">
+            <a:avLst/>
+          </a:prstGeom>
+          <a:solidFill>
+            <a:srgbClr val="1B7F3A"/>
+          </a:solidFill>
+          <a:ln w="7620">
             <a:solidFill>
               <a:srgbClr val="111827"/>
             </a:solidFill>
@@ -3601,22 +3644,65 @@
       </p:sp>
       <p:sp>
         <p:nvSpPr>
-          <p:cNvPr id="14" name="Oval 13"/>
-          <p:cNvSpPr/>
-          <p:nvPr/>
-        </p:nvSpPr>
-        <p:spPr>
-          <a:xfrm>
-            <a:off x="5715000" y="2852928"/>
-            <a:ext cx="822960" cy="822960"/>
+          <p:cNvPr id="15" name="Rectangle 14"/>
+          <p:cNvSpPr/>
+          <p:nvPr/>
+        </p:nvSpPr>
+        <p:spPr>
+          <a:xfrm>
+            <a:off x="3259836" y="4347972"/>
+            <a:ext cx="131673" cy="592531"/>
+          </a:xfrm>
+          <a:prstGeom prst="rect">
+            <a:avLst/>
+          </a:prstGeom>
+          <a:solidFill>
+            <a:srgbClr val="78350F"/>
+          </a:solidFill>
+          <a:ln>
+            <a:noFill/>
+          </a:ln>
+        </p:spPr>
+        <p:style>
+          <a:lnRef idx="1">
+            <a:schemeClr val="accent1"/>
+          </a:lnRef>
+          <a:fillRef idx="3">
+            <a:schemeClr val="accent1"/>
+          </a:fillRef>
+          <a:effectRef idx="2">
+            <a:schemeClr val="accent1"/>
+          </a:effectRef>
+          <a:fontRef idx="minor">
+            <a:schemeClr val="lt1"/>
+          </a:fontRef>
+        </p:style>
+        <p:txBody>
+          <a:bodyPr rtlCol="0" anchor="ctr"/>
+          <a:lstStyle/>
+          <a:p>
+            <a:pPr algn="ctr"/>
+          </a:p>
+        </p:txBody>
+      </p:sp>
+      <p:sp>
+        <p:nvSpPr>
+          <p:cNvPr id="16" name="Oval 15"/>
+          <p:cNvSpPr/>
+          <p:nvPr/>
+        </p:nvSpPr>
+        <p:spPr>
+          <a:xfrm>
+            <a:off x="2971800" y="3813048"/>
+            <a:ext cx="707745" cy="707745"/>
           </a:xfrm>
           <a:prstGeom prst="ellipse">
             <a:avLst/>
           </a:prstGeom>
           <a:solidFill>
-            <a:srgbClr val="FCD116"/>
-          </a:solidFill>
-          <a:ln w="13970">
+            <a:srgbClr val="1B7F3A"/>
+          </a:solidFill>
+          <a:ln w="7620">
             <a:solidFill>
               <a:srgbClr val="111827"/>
             </a:solidFill>
@@ -3637,32 +3723,513 @@
           </a:fontRef>
         </p:style>
         <p:txBody>
-          <a:bodyPr rtlCol="0" anchor="ctr" wrap="square" lIns="101600" rIns="101600" tIns="38100" bIns="38100"/>
-          <a:lstStyle/>
-          <a:p>
-            <a:pPr algn="ctr"/>
-            <a:r>
-              <a:rPr sz="1300" b="1">
-                <a:solidFill>
-                  <a:srgbClr val="111827"/>
-                </a:solidFill>
-                <a:latin typeface="Arial"/>
-              </a:rPr>
-              <a:t>1</a:t>
-            </a:r>
-          </a:p>
-        </p:txBody>
-      </p:sp>
-      <p:sp>
-        <p:nvSpPr>
-          <p:cNvPr id="15" name="TextBox 14"/>
+          <a:bodyPr rtlCol="0" anchor="ctr"/>
+          <a:lstStyle/>
+          <a:p>
+            <a:pPr algn="ctr"/>
+          </a:p>
+        </p:txBody>
+      </p:sp>
+      <p:cxnSp>
+        <p:nvCxnSpPr>
+          <p:cNvPr id="17" name="Connector 16"/>
+          <p:cNvCxnSpPr/>
+          <p:nvPr/>
+        </p:nvCxnSpPr>
+        <p:spPr>
+          <a:xfrm flipV="1">
+            <a:off x="4434840" y="3401568"/>
+            <a:ext cx="1920239" cy="320040"/>
+          </a:xfrm>
+          <a:prstGeom prst="line">
+            <a:avLst/>
+          </a:prstGeom>
+          <a:ln w="22860">
+            <a:solidFill>
+              <a:srgbClr val="1D4ED8"/>
+            </a:solidFill>
+          </a:ln>
+        </p:spPr>
+        <p:style>
+          <a:lnRef idx="2">
+            <a:schemeClr val="accent1"/>
+          </a:lnRef>
+          <a:fillRef idx="0">
+            <a:schemeClr val="accent1"/>
+          </a:fillRef>
+          <a:effectRef idx="1">
+            <a:schemeClr val="accent1"/>
+          </a:effectRef>
+          <a:fontRef idx="minor">
+            <a:schemeClr val="tx1"/>
+          </a:fontRef>
+        </p:style>
+      </p:cxnSp>
+      <p:cxnSp>
+        <p:nvCxnSpPr>
+          <p:cNvPr id="18" name="Connector 17"/>
+          <p:cNvCxnSpPr/>
+          <p:nvPr/>
+        </p:nvCxnSpPr>
+        <p:spPr>
+          <a:xfrm flipV="1">
+            <a:off x="4434840" y="3813048"/>
+            <a:ext cx="1920239" cy="320040"/>
+          </a:xfrm>
+          <a:prstGeom prst="line">
+            <a:avLst/>
+          </a:prstGeom>
+          <a:ln w="22860">
+            <a:solidFill>
+              <a:srgbClr val="1D4ED8"/>
+            </a:solidFill>
+          </a:ln>
+        </p:spPr>
+        <p:style>
+          <a:lnRef idx="2">
+            <a:schemeClr val="accent1"/>
+          </a:lnRef>
+          <a:fillRef idx="0">
+            <a:schemeClr val="accent1"/>
+          </a:fillRef>
+          <a:effectRef idx="1">
+            <a:schemeClr val="accent1"/>
+          </a:effectRef>
+          <a:fontRef idx="minor">
+            <a:schemeClr val="tx1"/>
+          </a:fontRef>
+        </p:style>
+      </p:cxnSp>
+      <p:cxnSp>
+        <p:nvCxnSpPr>
+          <p:cNvPr id="19" name="Connector 18"/>
+          <p:cNvCxnSpPr/>
+          <p:nvPr/>
+        </p:nvCxnSpPr>
+        <p:spPr>
+          <a:xfrm flipV="1">
+            <a:off x="4434840" y="4224528"/>
+            <a:ext cx="1920239" cy="320040"/>
+          </a:xfrm>
+          <a:prstGeom prst="line">
+            <a:avLst/>
+          </a:prstGeom>
+          <a:ln w="22860">
+            <a:solidFill>
+              <a:srgbClr val="1D4ED8"/>
+            </a:solidFill>
+          </a:ln>
+        </p:spPr>
+        <p:style>
+          <a:lnRef idx="2">
+            <a:schemeClr val="accent1"/>
+          </a:lnRef>
+          <a:fillRef idx="0">
+            <a:schemeClr val="accent1"/>
+          </a:fillRef>
+          <a:effectRef idx="1">
+            <a:schemeClr val="accent1"/>
+          </a:effectRef>
+          <a:fontRef idx="minor">
+            <a:schemeClr val="tx1"/>
+          </a:fontRef>
+        </p:style>
+      </p:cxnSp>
+      <p:sp>
+        <p:nvSpPr>
+          <p:cNvPr id="20" name="Oval 19"/>
+          <p:cNvSpPr/>
+          <p:nvPr/>
+        </p:nvSpPr>
+        <p:spPr>
+          <a:xfrm>
+            <a:off x="7156094" y="3767328"/>
+            <a:ext cx="181051" cy="197510"/>
+          </a:xfrm>
+          <a:prstGeom prst="ellipse">
+            <a:avLst/>
+          </a:prstGeom>
+          <a:solidFill>
+            <a:srgbClr val="FCD116"/>
+          </a:solidFill>
+          <a:ln w="7620">
+            <a:solidFill>
+              <a:srgbClr val="111827"/>
+            </a:solidFill>
+          </a:ln>
+        </p:spPr>
+        <p:style>
+          <a:lnRef idx="1">
+            <a:schemeClr val="accent1"/>
+          </a:lnRef>
+          <a:fillRef idx="3">
+            <a:schemeClr val="accent1"/>
+          </a:fillRef>
+          <a:effectRef idx="2">
+            <a:schemeClr val="accent1"/>
+          </a:effectRef>
+          <a:fontRef idx="minor">
+            <a:schemeClr val="lt1"/>
+          </a:fontRef>
+        </p:style>
+        <p:txBody>
+          <a:bodyPr rtlCol="0" anchor="ctr"/>
+          <a:lstStyle/>
+          <a:p>
+            <a:pPr algn="ctr"/>
+          </a:p>
+        </p:txBody>
+      </p:sp>
+      <p:sp>
+        <p:nvSpPr>
+          <p:cNvPr id="21" name="Rounded Rectangle 20"/>
+          <p:cNvSpPr/>
+          <p:nvPr/>
+        </p:nvSpPr>
+        <p:spPr>
+          <a:xfrm>
+            <a:off x="7120890" y="4004340"/>
+            <a:ext cx="251460" cy="395020"/>
+          </a:xfrm>
+          <a:prstGeom prst="roundRect">
+            <a:avLst/>
+          </a:prstGeom>
+          <a:solidFill>
+            <a:srgbClr val="D90000"/>
+          </a:solidFill>
+          <a:ln w="7620">
+            <a:solidFill>
+              <a:srgbClr val="111827"/>
+            </a:solidFill>
+          </a:ln>
+        </p:spPr>
+        <p:style>
+          <a:lnRef idx="1">
+            <a:schemeClr val="accent1"/>
+          </a:lnRef>
+          <a:fillRef idx="3">
+            <a:schemeClr val="accent1"/>
+          </a:fillRef>
+          <a:effectRef idx="2">
+            <a:schemeClr val="accent1"/>
+          </a:effectRef>
+          <a:fontRef idx="minor">
+            <a:schemeClr val="lt1"/>
+          </a:fontRef>
+        </p:style>
+        <p:txBody>
+          <a:bodyPr rtlCol="0" anchor="ctr"/>
+          <a:lstStyle/>
+          <a:p>
+            <a:pPr algn="ctr"/>
+          </a:p>
+        </p:txBody>
+      </p:sp>
+      <p:cxnSp>
+        <p:nvCxnSpPr>
+          <p:cNvPr id="22" name="Connector 21"/>
+          <p:cNvCxnSpPr/>
+          <p:nvPr/>
+        </p:nvCxnSpPr>
+        <p:spPr>
+          <a:xfrm flipH="1">
+            <a:off x="7135977" y="4379610"/>
+            <a:ext cx="110643" cy="375270"/>
+          </a:xfrm>
+          <a:prstGeom prst="line">
+            <a:avLst/>
+          </a:prstGeom>
+          <a:ln w="12700">
+            <a:solidFill>
+              <a:srgbClr val="111827"/>
+            </a:solidFill>
+          </a:ln>
+        </p:spPr>
+        <p:style>
+          <a:lnRef idx="2">
+            <a:schemeClr val="accent1"/>
+          </a:lnRef>
+          <a:fillRef idx="0">
+            <a:schemeClr val="accent1"/>
+          </a:fillRef>
+          <a:effectRef idx="1">
+            <a:schemeClr val="accent1"/>
+          </a:effectRef>
+          <a:fontRef idx="minor">
+            <a:schemeClr val="tx1"/>
+          </a:fontRef>
+        </p:style>
+      </p:cxnSp>
+      <p:cxnSp>
+        <p:nvCxnSpPr>
+          <p:cNvPr id="23" name="Connector 22"/>
+          <p:cNvCxnSpPr/>
+          <p:nvPr/>
+        </p:nvCxnSpPr>
+        <p:spPr>
+          <a:xfrm>
+            <a:off x="7246620" y="4379610"/>
+            <a:ext cx="110642" cy="375270"/>
+          </a:xfrm>
+          <a:prstGeom prst="line">
+            <a:avLst/>
+          </a:prstGeom>
+          <a:ln w="12700">
+            <a:solidFill>
+              <a:srgbClr val="111827"/>
+            </a:solidFill>
+          </a:ln>
+        </p:spPr>
+        <p:style>
+          <a:lnRef idx="2">
+            <a:schemeClr val="accent1"/>
+          </a:lnRef>
+          <a:fillRef idx="0">
+            <a:schemeClr val="accent1"/>
+          </a:fillRef>
+          <a:effectRef idx="1">
+            <a:schemeClr val="accent1"/>
+          </a:effectRef>
+          <a:fontRef idx="minor">
+            <a:schemeClr val="tx1"/>
+          </a:fontRef>
+        </p:style>
+      </p:cxnSp>
+      <p:sp>
+        <p:nvSpPr>
+          <p:cNvPr id="24" name="Oval 23"/>
+          <p:cNvSpPr/>
+          <p:nvPr/>
+        </p:nvSpPr>
+        <p:spPr>
+          <a:xfrm>
+            <a:off x="8458200" y="4548225"/>
+            <a:ext cx="652881" cy="528523"/>
+          </a:xfrm>
+          <a:prstGeom prst="ellipse">
+            <a:avLst/>
+          </a:prstGeom>
+          <a:solidFill>
+            <a:srgbClr val="475569"/>
+          </a:solidFill>
+          <a:ln w="7620">
+            <a:solidFill>
+              <a:srgbClr val="111827"/>
+            </a:solidFill>
+          </a:ln>
+        </p:spPr>
+        <p:style>
+          <a:lnRef idx="1">
+            <a:schemeClr val="accent1"/>
+          </a:lnRef>
+          <a:fillRef idx="3">
+            <a:schemeClr val="accent1"/>
+          </a:fillRef>
+          <a:effectRef idx="2">
+            <a:schemeClr val="accent1"/>
+          </a:effectRef>
+          <a:fontRef idx="minor">
+            <a:schemeClr val="lt1"/>
+          </a:fontRef>
+        </p:style>
+        <p:txBody>
+          <a:bodyPr rtlCol="0" anchor="ctr"/>
+          <a:lstStyle/>
+          <a:p>
+            <a:pPr algn="ctr"/>
+          </a:p>
+        </p:txBody>
+      </p:sp>
+      <p:sp>
+        <p:nvSpPr>
+          <p:cNvPr id="25" name="Oval 24"/>
+          <p:cNvSpPr/>
+          <p:nvPr/>
+        </p:nvSpPr>
+        <p:spPr>
+          <a:xfrm>
+            <a:off x="9359798" y="3584448"/>
+            <a:ext cx="652881" cy="528523"/>
+          </a:xfrm>
+          <a:prstGeom prst="ellipse">
+            <a:avLst/>
+          </a:prstGeom>
+          <a:solidFill>
+            <a:srgbClr val="475569"/>
+          </a:solidFill>
+          <a:ln w="7620">
+            <a:solidFill>
+              <a:srgbClr val="111827"/>
+            </a:solidFill>
+          </a:ln>
+        </p:spPr>
+        <p:style>
+          <a:lnRef idx="1">
+            <a:schemeClr val="accent1"/>
+          </a:lnRef>
+          <a:fillRef idx="3">
+            <a:schemeClr val="accent1"/>
+          </a:fillRef>
+          <a:effectRef idx="2">
+            <a:schemeClr val="accent1"/>
+          </a:effectRef>
+          <a:fontRef idx="minor">
+            <a:schemeClr val="lt1"/>
+          </a:fontRef>
+        </p:style>
+        <p:txBody>
+          <a:bodyPr rtlCol="0" anchor="ctr"/>
+          <a:lstStyle/>
+          <a:p>
+            <a:pPr algn="ctr"/>
+          </a:p>
+        </p:txBody>
+      </p:sp>
+      <p:sp>
+        <p:nvSpPr>
+          <p:cNvPr id="26" name="Oval 25"/>
+          <p:cNvSpPr/>
+          <p:nvPr/>
+        </p:nvSpPr>
+        <p:spPr>
+          <a:xfrm>
+            <a:off x="10261396" y="4548225"/>
+            <a:ext cx="652881" cy="528523"/>
+          </a:xfrm>
+          <a:prstGeom prst="ellipse">
+            <a:avLst/>
+          </a:prstGeom>
+          <a:solidFill>
+            <a:srgbClr val="475569"/>
+          </a:solidFill>
+          <a:ln w="7620">
+            <a:solidFill>
+              <a:srgbClr val="111827"/>
+            </a:solidFill>
+          </a:ln>
+        </p:spPr>
+        <p:style>
+          <a:lnRef idx="1">
+            <a:schemeClr val="accent1"/>
+          </a:lnRef>
+          <a:fillRef idx="3">
+            <a:schemeClr val="accent1"/>
+          </a:fillRef>
+          <a:effectRef idx="2">
+            <a:schemeClr val="accent1"/>
+          </a:effectRef>
+          <a:fontRef idx="minor">
+            <a:schemeClr val="lt1"/>
+          </a:fontRef>
+        </p:style>
+        <p:txBody>
+          <a:bodyPr rtlCol="0" anchor="ctr"/>
+          <a:lstStyle/>
+          <a:p>
+            <a:pPr algn="ctr"/>
+          </a:p>
+        </p:txBody>
+      </p:sp>
+      <p:sp>
+        <p:nvSpPr>
+          <p:cNvPr id="27" name="Oval 26"/>
+          <p:cNvSpPr/>
+          <p:nvPr/>
+        </p:nvSpPr>
+        <p:spPr>
+          <a:xfrm>
+            <a:off x="9235440" y="4392777"/>
+            <a:ext cx="854964" cy="590702"/>
+          </a:xfrm>
+          <a:prstGeom prst="ellipse">
+            <a:avLst/>
+          </a:prstGeom>
+          <a:solidFill>
+            <a:srgbClr val="FCD116"/>
+          </a:solidFill>
+          <a:ln w="10160">
+            <a:solidFill>
+              <a:srgbClr val="D90000"/>
+            </a:solidFill>
+          </a:ln>
+        </p:spPr>
+        <p:style>
+          <a:lnRef idx="1">
+            <a:schemeClr val="accent1"/>
+          </a:lnRef>
+          <a:fillRef idx="3">
+            <a:schemeClr val="accent1"/>
+          </a:fillRef>
+          <a:effectRef idx="2">
+            <a:schemeClr val="accent1"/>
+          </a:effectRef>
+          <a:fontRef idx="minor">
+            <a:schemeClr val="lt1"/>
+          </a:fontRef>
+        </p:style>
+        <p:txBody>
+          <a:bodyPr rtlCol="0" anchor="ctr"/>
+          <a:lstStyle/>
+          <a:p>
+            <a:pPr algn="ctr"/>
+          </a:p>
+        </p:txBody>
+      </p:sp>
+      <p:sp>
+        <p:nvSpPr>
+          <p:cNvPr id="28" name="Rounded Rectangle 27"/>
+          <p:cNvSpPr/>
+          <p:nvPr/>
+        </p:nvSpPr>
+        <p:spPr>
+          <a:xfrm>
+            <a:off x="1645919" y="5705856"/>
+            <a:ext cx="2758440" cy="713232"/>
+          </a:xfrm>
+          <a:prstGeom prst="roundRect">
+            <a:avLst/>
+          </a:prstGeom>
+          <a:solidFill>
+            <a:srgbClr val="FFFFFF"/>
+          </a:solidFill>
+          <a:ln w="11430">
+            <a:solidFill>
+              <a:srgbClr val="1D4ED8"/>
+            </a:solidFill>
+          </a:ln>
+        </p:spPr>
+        <p:style>
+          <a:lnRef idx="1">
+            <a:schemeClr val="accent1"/>
+          </a:lnRef>
+          <a:fillRef idx="3">
+            <a:schemeClr val="accent1"/>
+          </a:fillRef>
+          <a:effectRef idx="2">
+            <a:schemeClr val="accent1"/>
+          </a:effectRef>
+          <a:fontRef idx="minor">
+            <a:schemeClr val="lt1"/>
+          </a:fontRef>
+        </p:style>
+        <p:txBody>
+          <a:bodyPr rtlCol="0" anchor="ctr"/>
+          <a:lstStyle/>
+          <a:p>
+            <a:pPr algn="ctr"/>
+          </a:p>
+        </p:txBody>
+      </p:sp>
+      <p:sp>
+        <p:nvSpPr>
+          <p:cNvPr id="29" name="TextBox 28"/>
           <p:cNvSpPr txBox="1"/>
           <p:nvPr/>
         </p:nvSpPr>
         <p:spPr>
           <a:xfrm>
-            <a:off x="4782312" y="3785616"/>
-            <a:ext cx="2697480" cy="402336"/>
+            <a:off x="1755648" y="5843016"/>
+            <a:ext cx="2538984" cy="329184"/>
           </a:xfrm>
           <a:prstGeom prst="rect">
             <a:avLst/>
@@ -3690,24 +4257,24 @@
       </p:sp>
       <p:sp>
         <p:nvSpPr>
-          <p:cNvPr id="16" name="Oval 15"/>
-          <p:cNvSpPr/>
-          <p:nvPr/>
-        </p:nvSpPr>
-        <p:spPr>
-          <a:xfrm>
-            <a:off x="4251959" y="4910328"/>
-            <a:ext cx="822960" cy="822960"/>
-          </a:xfrm>
-          <a:prstGeom prst="ellipse">
-            <a:avLst/>
-          </a:prstGeom>
-          <a:solidFill>
-            <a:srgbClr val="D90000"/>
-          </a:solidFill>
-          <a:ln w="13970">
+          <p:cNvPr id="30" name="Rounded Rectangle 29"/>
+          <p:cNvSpPr/>
+          <p:nvPr/>
+        </p:nvSpPr>
+        <p:spPr>
+          <a:xfrm>
+            <a:off x="4724400" y="5705856"/>
+            <a:ext cx="2758440" cy="713232"/>
+          </a:xfrm>
+          <a:prstGeom prst="roundRect">
+            <a:avLst/>
+          </a:prstGeom>
+          <a:solidFill>
+            <a:srgbClr val="FFFFFF"/>
+          </a:solidFill>
+          <a:ln w="11430">
             <a:solidFill>
-              <a:srgbClr val="111827"/>
+              <a:srgbClr val="1D4ED8"/>
             </a:solidFill>
           </a:ln>
         </p:spPr>
@@ -3726,32 +4293,23 @@
           </a:fontRef>
         </p:style>
         <p:txBody>
-          <a:bodyPr rtlCol="0" anchor="ctr" wrap="square" lIns="101600" rIns="101600" tIns="38100" bIns="38100"/>
-          <a:lstStyle/>
-          <a:p>
-            <a:pPr algn="ctr"/>
-            <a:r>
-              <a:rPr sz="1300" b="1">
-                <a:solidFill>
-                  <a:srgbClr val="FFFFFF"/>
-                </a:solidFill>
-                <a:latin typeface="Arial"/>
-              </a:rPr>
-              <a:t>2</a:t>
-            </a:r>
-          </a:p>
-        </p:txBody>
-      </p:sp>
-      <p:sp>
-        <p:nvSpPr>
-          <p:cNvPr id="17" name="TextBox 16"/>
+          <a:bodyPr rtlCol="0" anchor="ctr"/>
+          <a:lstStyle/>
+          <a:p>
+            <a:pPr algn="ctr"/>
+          </a:p>
+        </p:txBody>
+      </p:sp>
+      <p:sp>
+        <p:nvSpPr>
+          <p:cNvPr id="31" name="TextBox 30"/>
           <p:cNvSpPr txBox="1"/>
           <p:nvPr/>
         </p:nvSpPr>
         <p:spPr>
           <a:xfrm>
-            <a:off x="3319271" y="5843016"/>
-            <a:ext cx="2697480" cy="402336"/>
+            <a:off x="4834128" y="5843016"/>
+            <a:ext cx="2538984" cy="329184"/>
           </a:xfrm>
           <a:prstGeom prst="rect">
             <a:avLst/>
@@ -3779,24 +4337,24 @@
       </p:sp>
       <p:sp>
         <p:nvSpPr>
-          <p:cNvPr id="18" name="Oval 17"/>
-          <p:cNvSpPr/>
-          <p:nvPr/>
-        </p:nvSpPr>
-        <p:spPr>
-          <a:xfrm>
-            <a:off x="7178040" y="4910328"/>
-            <a:ext cx="822960" cy="822960"/>
-          </a:xfrm>
-          <a:prstGeom prst="ellipse">
-            <a:avLst/>
-          </a:prstGeom>
-          <a:solidFill>
-            <a:srgbClr val="1B7F3A"/>
-          </a:solidFill>
-          <a:ln w="13970">
+          <p:cNvPr id="32" name="Rounded Rectangle 31"/>
+          <p:cNvSpPr/>
+          <p:nvPr/>
+        </p:nvSpPr>
+        <p:spPr>
+          <a:xfrm>
+            <a:off x="7802880" y="5705856"/>
+            <a:ext cx="2758440" cy="713232"/>
+          </a:xfrm>
+          <a:prstGeom prst="roundRect">
+            <a:avLst/>
+          </a:prstGeom>
+          <a:solidFill>
+            <a:srgbClr val="FFFFFF"/>
+          </a:solidFill>
+          <a:ln w="11430">
             <a:solidFill>
-              <a:srgbClr val="111827"/>
+              <a:srgbClr val="1D4ED8"/>
             </a:solidFill>
           </a:ln>
         </p:spPr>
@@ -3815,32 +4373,23 @@
           </a:fontRef>
         </p:style>
         <p:txBody>
-          <a:bodyPr rtlCol="0" anchor="ctr" wrap="square" lIns="101600" rIns="101600" tIns="38100" bIns="38100"/>
-          <a:lstStyle/>
-          <a:p>
-            <a:pPr algn="ctr"/>
-            <a:r>
-              <a:rPr sz="1300" b="1">
-                <a:solidFill>
-                  <a:srgbClr val="FFFFFF"/>
-                </a:solidFill>
-                <a:latin typeface="Arial"/>
-              </a:rPr>
-              <a:t>3</a:t>
-            </a:r>
-          </a:p>
-        </p:txBody>
-      </p:sp>
-      <p:sp>
-        <p:nvSpPr>
-          <p:cNvPr id="19" name="TextBox 18"/>
+          <a:bodyPr rtlCol="0" anchor="ctr"/>
+          <a:lstStyle/>
+          <a:p>
+            <a:pPr algn="ctr"/>
+          </a:p>
+        </p:txBody>
+      </p:sp>
+      <p:sp>
+        <p:nvSpPr>
+          <p:cNvPr id="33" name="TextBox 32"/>
           <p:cNvSpPr txBox="1"/>
           <p:nvPr/>
         </p:nvSpPr>
         <p:spPr>
           <a:xfrm>
-            <a:off x="6245352" y="5843016"/>
-            <a:ext cx="2697480" cy="402336"/>
+            <a:off x="7912608" y="5843016"/>
+            <a:ext cx="2538984" cy="329184"/>
           </a:xfrm>
           <a:prstGeom prst="rect">
             <a:avLst/>
@@ -6625,8 +7174,8 @@
         </p:nvSpPr>
         <p:spPr>
           <a:xfrm>
-            <a:off x="1417319" y="2322576"/>
-            <a:ext cx="9372600" cy="411480"/>
+            <a:off x="1417319" y="2286000"/>
+            <a:ext cx="9372600" cy="310896"/>
           </a:xfrm>
           <a:prstGeom prst="rect">
             <a:avLst/>
@@ -6641,7 +7190,7 @@
           <a:p>
             <a:pPr algn="ctr"/>
             <a:r>
-              <a:rPr sz="1800" b="1">
+              <a:rPr sz="1700" b="1">
                 <a:solidFill>
                   <a:srgbClr val="111827"/>
                 </a:solidFill>
@@ -6654,22 +7203,65 @@
       </p:sp>
       <p:sp>
         <p:nvSpPr>
-          <p:cNvPr id="13" name="Isosceles Triangle 12"/>
-          <p:cNvSpPr/>
-          <p:nvPr/>
-        </p:nvSpPr>
-        <p:spPr>
-          <a:xfrm>
-            <a:off x="4754879" y="2990088"/>
-            <a:ext cx="2651760" cy="2651760"/>
-          </a:xfrm>
-          <a:prstGeom prst="triangle">
-            <a:avLst/>
-          </a:prstGeom>
-          <a:solidFill>
-            <a:srgbClr val="FFF7E0"/>
-          </a:solidFill>
-          <a:ln w="22860">
+          <p:cNvPr id="13" name="Rectangle 12"/>
+          <p:cNvSpPr/>
+          <p:nvPr/>
+        </p:nvSpPr>
+        <p:spPr>
+          <a:xfrm>
+            <a:off x="2194560" y="4178808"/>
+            <a:ext cx="146304" cy="658368"/>
+          </a:xfrm>
+          <a:prstGeom prst="rect">
+            <a:avLst/>
+          </a:prstGeom>
+          <a:solidFill>
+            <a:srgbClr val="78350F"/>
+          </a:solidFill>
+          <a:ln>
+            <a:noFill/>
+          </a:ln>
+        </p:spPr>
+        <p:style>
+          <a:lnRef idx="1">
+            <a:schemeClr val="accent1"/>
+          </a:lnRef>
+          <a:fillRef idx="3">
+            <a:schemeClr val="accent1"/>
+          </a:fillRef>
+          <a:effectRef idx="2">
+            <a:schemeClr val="accent1"/>
+          </a:effectRef>
+          <a:fontRef idx="minor">
+            <a:schemeClr val="lt1"/>
+          </a:fontRef>
+        </p:style>
+        <p:txBody>
+          <a:bodyPr rtlCol="0" anchor="ctr"/>
+          <a:lstStyle/>
+          <a:p>
+            <a:pPr algn="ctr"/>
+          </a:p>
+        </p:txBody>
+      </p:sp>
+      <p:sp>
+        <p:nvSpPr>
+          <p:cNvPr id="14" name="Oval 13"/>
+          <p:cNvSpPr/>
+          <p:nvPr/>
+        </p:nvSpPr>
+        <p:spPr>
+          <a:xfrm>
+            <a:off x="1874519" y="3584448"/>
+            <a:ext cx="786384" cy="786384"/>
+          </a:xfrm>
+          <a:prstGeom prst="ellipse">
+            <a:avLst/>
+          </a:prstGeom>
+          <a:solidFill>
+            <a:srgbClr val="1B7F3A"/>
+          </a:solidFill>
+          <a:ln w="7620">
             <a:solidFill>
               <a:srgbClr val="111827"/>
             </a:solidFill>
@@ -6699,22 +7291,65 @@
       </p:sp>
       <p:sp>
         <p:nvSpPr>
-          <p:cNvPr id="14" name="Oval 13"/>
-          <p:cNvSpPr/>
-          <p:nvPr/>
-        </p:nvSpPr>
-        <p:spPr>
-          <a:xfrm>
-            <a:off x="5715000" y="2852928"/>
-            <a:ext cx="822960" cy="822960"/>
+          <p:cNvPr id="15" name="Rectangle 14"/>
+          <p:cNvSpPr/>
+          <p:nvPr/>
+        </p:nvSpPr>
+        <p:spPr>
+          <a:xfrm>
+            <a:off x="3259836" y="4347972"/>
+            <a:ext cx="131673" cy="592531"/>
+          </a:xfrm>
+          <a:prstGeom prst="rect">
+            <a:avLst/>
+          </a:prstGeom>
+          <a:solidFill>
+            <a:srgbClr val="78350F"/>
+          </a:solidFill>
+          <a:ln>
+            <a:noFill/>
+          </a:ln>
+        </p:spPr>
+        <p:style>
+          <a:lnRef idx="1">
+            <a:schemeClr val="accent1"/>
+          </a:lnRef>
+          <a:fillRef idx="3">
+            <a:schemeClr val="accent1"/>
+          </a:fillRef>
+          <a:effectRef idx="2">
+            <a:schemeClr val="accent1"/>
+          </a:effectRef>
+          <a:fontRef idx="minor">
+            <a:schemeClr val="lt1"/>
+          </a:fontRef>
+        </p:style>
+        <p:txBody>
+          <a:bodyPr rtlCol="0" anchor="ctr"/>
+          <a:lstStyle/>
+          <a:p>
+            <a:pPr algn="ctr"/>
+          </a:p>
+        </p:txBody>
+      </p:sp>
+      <p:sp>
+        <p:nvSpPr>
+          <p:cNvPr id="16" name="Oval 15"/>
+          <p:cNvSpPr/>
+          <p:nvPr/>
+        </p:nvSpPr>
+        <p:spPr>
+          <a:xfrm>
+            <a:off x="2971800" y="3813048"/>
+            <a:ext cx="707745" cy="707745"/>
           </a:xfrm>
           <a:prstGeom prst="ellipse">
             <a:avLst/>
           </a:prstGeom>
           <a:solidFill>
-            <a:srgbClr val="FCD116"/>
-          </a:solidFill>
-          <a:ln w="13970">
+            <a:srgbClr val="1B7F3A"/>
+          </a:solidFill>
+          <a:ln w="7620">
             <a:solidFill>
               <a:srgbClr val="111827"/>
             </a:solidFill>
@@ -6735,32 +7370,513 @@
           </a:fontRef>
         </p:style>
         <p:txBody>
-          <a:bodyPr rtlCol="0" anchor="ctr" wrap="square" lIns="101600" rIns="101600" tIns="38100" bIns="38100"/>
-          <a:lstStyle/>
-          <a:p>
-            <a:pPr algn="ctr"/>
-            <a:r>
-              <a:rPr sz="1300" b="1">
-                <a:solidFill>
-                  <a:srgbClr val="111827"/>
-                </a:solidFill>
-                <a:latin typeface="Arial"/>
-              </a:rPr>
-              <a:t>1</a:t>
-            </a:r>
-          </a:p>
-        </p:txBody>
-      </p:sp>
-      <p:sp>
-        <p:nvSpPr>
-          <p:cNvPr id="15" name="TextBox 14"/>
+          <a:bodyPr rtlCol="0" anchor="ctr"/>
+          <a:lstStyle/>
+          <a:p>
+            <a:pPr algn="ctr"/>
+          </a:p>
+        </p:txBody>
+      </p:sp>
+      <p:cxnSp>
+        <p:nvCxnSpPr>
+          <p:cNvPr id="17" name="Connector 16"/>
+          <p:cNvCxnSpPr/>
+          <p:nvPr/>
+        </p:nvCxnSpPr>
+        <p:spPr>
+          <a:xfrm flipV="1">
+            <a:off x="4434840" y="3401568"/>
+            <a:ext cx="1920239" cy="320040"/>
+          </a:xfrm>
+          <a:prstGeom prst="line">
+            <a:avLst/>
+          </a:prstGeom>
+          <a:ln w="22860">
+            <a:solidFill>
+              <a:srgbClr val="1D4ED8"/>
+            </a:solidFill>
+          </a:ln>
+        </p:spPr>
+        <p:style>
+          <a:lnRef idx="2">
+            <a:schemeClr val="accent1"/>
+          </a:lnRef>
+          <a:fillRef idx="0">
+            <a:schemeClr val="accent1"/>
+          </a:fillRef>
+          <a:effectRef idx="1">
+            <a:schemeClr val="accent1"/>
+          </a:effectRef>
+          <a:fontRef idx="minor">
+            <a:schemeClr val="tx1"/>
+          </a:fontRef>
+        </p:style>
+      </p:cxnSp>
+      <p:cxnSp>
+        <p:nvCxnSpPr>
+          <p:cNvPr id="18" name="Connector 17"/>
+          <p:cNvCxnSpPr/>
+          <p:nvPr/>
+        </p:nvCxnSpPr>
+        <p:spPr>
+          <a:xfrm flipV="1">
+            <a:off x="4434840" y="3813048"/>
+            <a:ext cx="1920239" cy="320040"/>
+          </a:xfrm>
+          <a:prstGeom prst="line">
+            <a:avLst/>
+          </a:prstGeom>
+          <a:ln w="22860">
+            <a:solidFill>
+              <a:srgbClr val="1D4ED8"/>
+            </a:solidFill>
+          </a:ln>
+        </p:spPr>
+        <p:style>
+          <a:lnRef idx="2">
+            <a:schemeClr val="accent1"/>
+          </a:lnRef>
+          <a:fillRef idx="0">
+            <a:schemeClr val="accent1"/>
+          </a:fillRef>
+          <a:effectRef idx="1">
+            <a:schemeClr val="accent1"/>
+          </a:effectRef>
+          <a:fontRef idx="minor">
+            <a:schemeClr val="tx1"/>
+          </a:fontRef>
+        </p:style>
+      </p:cxnSp>
+      <p:cxnSp>
+        <p:nvCxnSpPr>
+          <p:cNvPr id="19" name="Connector 18"/>
+          <p:cNvCxnSpPr/>
+          <p:nvPr/>
+        </p:nvCxnSpPr>
+        <p:spPr>
+          <a:xfrm flipV="1">
+            <a:off x="4434840" y="4224528"/>
+            <a:ext cx="1920239" cy="320040"/>
+          </a:xfrm>
+          <a:prstGeom prst="line">
+            <a:avLst/>
+          </a:prstGeom>
+          <a:ln w="22860">
+            <a:solidFill>
+              <a:srgbClr val="1D4ED8"/>
+            </a:solidFill>
+          </a:ln>
+        </p:spPr>
+        <p:style>
+          <a:lnRef idx="2">
+            <a:schemeClr val="accent1"/>
+          </a:lnRef>
+          <a:fillRef idx="0">
+            <a:schemeClr val="accent1"/>
+          </a:fillRef>
+          <a:effectRef idx="1">
+            <a:schemeClr val="accent1"/>
+          </a:effectRef>
+          <a:fontRef idx="minor">
+            <a:schemeClr val="tx1"/>
+          </a:fontRef>
+        </p:style>
+      </p:cxnSp>
+      <p:sp>
+        <p:nvSpPr>
+          <p:cNvPr id="20" name="Oval 19"/>
+          <p:cNvSpPr/>
+          <p:nvPr/>
+        </p:nvSpPr>
+        <p:spPr>
+          <a:xfrm>
+            <a:off x="7156094" y="3767328"/>
+            <a:ext cx="181051" cy="197510"/>
+          </a:xfrm>
+          <a:prstGeom prst="ellipse">
+            <a:avLst/>
+          </a:prstGeom>
+          <a:solidFill>
+            <a:srgbClr val="FCD116"/>
+          </a:solidFill>
+          <a:ln w="7620">
+            <a:solidFill>
+              <a:srgbClr val="111827"/>
+            </a:solidFill>
+          </a:ln>
+        </p:spPr>
+        <p:style>
+          <a:lnRef idx="1">
+            <a:schemeClr val="accent1"/>
+          </a:lnRef>
+          <a:fillRef idx="3">
+            <a:schemeClr val="accent1"/>
+          </a:fillRef>
+          <a:effectRef idx="2">
+            <a:schemeClr val="accent1"/>
+          </a:effectRef>
+          <a:fontRef idx="minor">
+            <a:schemeClr val="lt1"/>
+          </a:fontRef>
+        </p:style>
+        <p:txBody>
+          <a:bodyPr rtlCol="0" anchor="ctr"/>
+          <a:lstStyle/>
+          <a:p>
+            <a:pPr algn="ctr"/>
+          </a:p>
+        </p:txBody>
+      </p:sp>
+      <p:sp>
+        <p:nvSpPr>
+          <p:cNvPr id="21" name="Rounded Rectangle 20"/>
+          <p:cNvSpPr/>
+          <p:nvPr/>
+        </p:nvSpPr>
+        <p:spPr>
+          <a:xfrm>
+            <a:off x="7120890" y="4004340"/>
+            <a:ext cx="251460" cy="395020"/>
+          </a:xfrm>
+          <a:prstGeom prst="roundRect">
+            <a:avLst/>
+          </a:prstGeom>
+          <a:solidFill>
+            <a:srgbClr val="D90000"/>
+          </a:solidFill>
+          <a:ln w="7620">
+            <a:solidFill>
+              <a:srgbClr val="111827"/>
+            </a:solidFill>
+          </a:ln>
+        </p:spPr>
+        <p:style>
+          <a:lnRef idx="1">
+            <a:schemeClr val="accent1"/>
+          </a:lnRef>
+          <a:fillRef idx="3">
+            <a:schemeClr val="accent1"/>
+          </a:fillRef>
+          <a:effectRef idx="2">
+            <a:schemeClr val="accent1"/>
+          </a:effectRef>
+          <a:fontRef idx="minor">
+            <a:schemeClr val="lt1"/>
+          </a:fontRef>
+        </p:style>
+        <p:txBody>
+          <a:bodyPr rtlCol="0" anchor="ctr"/>
+          <a:lstStyle/>
+          <a:p>
+            <a:pPr algn="ctr"/>
+          </a:p>
+        </p:txBody>
+      </p:sp>
+      <p:cxnSp>
+        <p:nvCxnSpPr>
+          <p:cNvPr id="22" name="Connector 21"/>
+          <p:cNvCxnSpPr/>
+          <p:nvPr/>
+        </p:nvCxnSpPr>
+        <p:spPr>
+          <a:xfrm flipH="1">
+            <a:off x="7135977" y="4379610"/>
+            <a:ext cx="110643" cy="375270"/>
+          </a:xfrm>
+          <a:prstGeom prst="line">
+            <a:avLst/>
+          </a:prstGeom>
+          <a:ln w="12700">
+            <a:solidFill>
+              <a:srgbClr val="111827"/>
+            </a:solidFill>
+          </a:ln>
+        </p:spPr>
+        <p:style>
+          <a:lnRef idx="2">
+            <a:schemeClr val="accent1"/>
+          </a:lnRef>
+          <a:fillRef idx="0">
+            <a:schemeClr val="accent1"/>
+          </a:fillRef>
+          <a:effectRef idx="1">
+            <a:schemeClr val="accent1"/>
+          </a:effectRef>
+          <a:fontRef idx="minor">
+            <a:schemeClr val="tx1"/>
+          </a:fontRef>
+        </p:style>
+      </p:cxnSp>
+      <p:cxnSp>
+        <p:nvCxnSpPr>
+          <p:cNvPr id="23" name="Connector 22"/>
+          <p:cNvCxnSpPr/>
+          <p:nvPr/>
+        </p:nvCxnSpPr>
+        <p:spPr>
+          <a:xfrm>
+            <a:off x="7246620" y="4379610"/>
+            <a:ext cx="110642" cy="375270"/>
+          </a:xfrm>
+          <a:prstGeom prst="line">
+            <a:avLst/>
+          </a:prstGeom>
+          <a:ln w="12700">
+            <a:solidFill>
+              <a:srgbClr val="111827"/>
+            </a:solidFill>
+          </a:ln>
+        </p:spPr>
+        <p:style>
+          <a:lnRef idx="2">
+            <a:schemeClr val="accent1"/>
+          </a:lnRef>
+          <a:fillRef idx="0">
+            <a:schemeClr val="accent1"/>
+          </a:fillRef>
+          <a:effectRef idx="1">
+            <a:schemeClr val="accent1"/>
+          </a:effectRef>
+          <a:fontRef idx="minor">
+            <a:schemeClr val="tx1"/>
+          </a:fontRef>
+        </p:style>
+      </p:cxnSp>
+      <p:sp>
+        <p:nvSpPr>
+          <p:cNvPr id="24" name="Oval 23"/>
+          <p:cNvSpPr/>
+          <p:nvPr/>
+        </p:nvSpPr>
+        <p:spPr>
+          <a:xfrm>
+            <a:off x="8458200" y="4548225"/>
+            <a:ext cx="652881" cy="528523"/>
+          </a:xfrm>
+          <a:prstGeom prst="ellipse">
+            <a:avLst/>
+          </a:prstGeom>
+          <a:solidFill>
+            <a:srgbClr val="475569"/>
+          </a:solidFill>
+          <a:ln w="7620">
+            <a:solidFill>
+              <a:srgbClr val="111827"/>
+            </a:solidFill>
+          </a:ln>
+        </p:spPr>
+        <p:style>
+          <a:lnRef idx="1">
+            <a:schemeClr val="accent1"/>
+          </a:lnRef>
+          <a:fillRef idx="3">
+            <a:schemeClr val="accent1"/>
+          </a:fillRef>
+          <a:effectRef idx="2">
+            <a:schemeClr val="accent1"/>
+          </a:effectRef>
+          <a:fontRef idx="minor">
+            <a:schemeClr val="lt1"/>
+          </a:fontRef>
+        </p:style>
+        <p:txBody>
+          <a:bodyPr rtlCol="0" anchor="ctr"/>
+          <a:lstStyle/>
+          <a:p>
+            <a:pPr algn="ctr"/>
+          </a:p>
+        </p:txBody>
+      </p:sp>
+      <p:sp>
+        <p:nvSpPr>
+          <p:cNvPr id="25" name="Oval 24"/>
+          <p:cNvSpPr/>
+          <p:nvPr/>
+        </p:nvSpPr>
+        <p:spPr>
+          <a:xfrm>
+            <a:off x="9359798" y="3584448"/>
+            <a:ext cx="652881" cy="528523"/>
+          </a:xfrm>
+          <a:prstGeom prst="ellipse">
+            <a:avLst/>
+          </a:prstGeom>
+          <a:solidFill>
+            <a:srgbClr val="475569"/>
+          </a:solidFill>
+          <a:ln w="7620">
+            <a:solidFill>
+              <a:srgbClr val="111827"/>
+            </a:solidFill>
+          </a:ln>
+        </p:spPr>
+        <p:style>
+          <a:lnRef idx="1">
+            <a:schemeClr val="accent1"/>
+          </a:lnRef>
+          <a:fillRef idx="3">
+            <a:schemeClr val="accent1"/>
+          </a:fillRef>
+          <a:effectRef idx="2">
+            <a:schemeClr val="accent1"/>
+          </a:effectRef>
+          <a:fontRef idx="minor">
+            <a:schemeClr val="lt1"/>
+          </a:fontRef>
+        </p:style>
+        <p:txBody>
+          <a:bodyPr rtlCol="0" anchor="ctr"/>
+          <a:lstStyle/>
+          <a:p>
+            <a:pPr algn="ctr"/>
+          </a:p>
+        </p:txBody>
+      </p:sp>
+      <p:sp>
+        <p:nvSpPr>
+          <p:cNvPr id="26" name="Oval 25"/>
+          <p:cNvSpPr/>
+          <p:nvPr/>
+        </p:nvSpPr>
+        <p:spPr>
+          <a:xfrm>
+            <a:off x="10261396" y="4548225"/>
+            <a:ext cx="652881" cy="528523"/>
+          </a:xfrm>
+          <a:prstGeom prst="ellipse">
+            <a:avLst/>
+          </a:prstGeom>
+          <a:solidFill>
+            <a:srgbClr val="475569"/>
+          </a:solidFill>
+          <a:ln w="7620">
+            <a:solidFill>
+              <a:srgbClr val="111827"/>
+            </a:solidFill>
+          </a:ln>
+        </p:spPr>
+        <p:style>
+          <a:lnRef idx="1">
+            <a:schemeClr val="accent1"/>
+          </a:lnRef>
+          <a:fillRef idx="3">
+            <a:schemeClr val="accent1"/>
+          </a:fillRef>
+          <a:effectRef idx="2">
+            <a:schemeClr val="accent1"/>
+          </a:effectRef>
+          <a:fontRef idx="minor">
+            <a:schemeClr val="lt1"/>
+          </a:fontRef>
+        </p:style>
+        <p:txBody>
+          <a:bodyPr rtlCol="0" anchor="ctr"/>
+          <a:lstStyle/>
+          <a:p>
+            <a:pPr algn="ctr"/>
+          </a:p>
+        </p:txBody>
+      </p:sp>
+      <p:sp>
+        <p:nvSpPr>
+          <p:cNvPr id="27" name="Oval 26"/>
+          <p:cNvSpPr/>
+          <p:nvPr/>
+        </p:nvSpPr>
+        <p:spPr>
+          <a:xfrm>
+            <a:off x="9235440" y="4392777"/>
+            <a:ext cx="854964" cy="590702"/>
+          </a:xfrm>
+          <a:prstGeom prst="ellipse">
+            <a:avLst/>
+          </a:prstGeom>
+          <a:solidFill>
+            <a:srgbClr val="FCD116"/>
+          </a:solidFill>
+          <a:ln w="10160">
+            <a:solidFill>
+              <a:srgbClr val="D90000"/>
+            </a:solidFill>
+          </a:ln>
+        </p:spPr>
+        <p:style>
+          <a:lnRef idx="1">
+            <a:schemeClr val="accent1"/>
+          </a:lnRef>
+          <a:fillRef idx="3">
+            <a:schemeClr val="accent1"/>
+          </a:fillRef>
+          <a:effectRef idx="2">
+            <a:schemeClr val="accent1"/>
+          </a:effectRef>
+          <a:fontRef idx="minor">
+            <a:schemeClr val="lt1"/>
+          </a:fontRef>
+        </p:style>
+        <p:txBody>
+          <a:bodyPr rtlCol="0" anchor="ctr"/>
+          <a:lstStyle/>
+          <a:p>
+            <a:pPr algn="ctr"/>
+          </a:p>
+        </p:txBody>
+      </p:sp>
+      <p:sp>
+        <p:nvSpPr>
+          <p:cNvPr id="28" name="Rounded Rectangle 27"/>
+          <p:cNvSpPr/>
+          <p:nvPr/>
+        </p:nvSpPr>
+        <p:spPr>
+          <a:xfrm>
+            <a:off x="1645919" y="5705856"/>
+            <a:ext cx="2758440" cy="713232"/>
+          </a:xfrm>
+          <a:prstGeom prst="roundRect">
+            <a:avLst/>
+          </a:prstGeom>
+          <a:solidFill>
+            <a:srgbClr val="FFFFFF"/>
+          </a:solidFill>
+          <a:ln w="11430">
+            <a:solidFill>
+              <a:srgbClr val="087490"/>
+            </a:solidFill>
+          </a:ln>
+        </p:spPr>
+        <p:style>
+          <a:lnRef idx="1">
+            <a:schemeClr val="accent1"/>
+          </a:lnRef>
+          <a:fillRef idx="3">
+            <a:schemeClr val="accent1"/>
+          </a:fillRef>
+          <a:effectRef idx="2">
+            <a:schemeClr val="accent1"/>
+          </a:effectRef>
+          <a:fontRef idx="minor">
+            <a:schemeClr val="lt1"/>
+          </a:fontRef>
+        </p:style>
+        <p:txBody>
+          <a:bodyPr rtlCol="0" anchor="ctr"/>
+          <a:lstStyle/>
+          <a:p>
+            <a:pPr algn="ctr"/>
+          </a:p>
+        </p:txBody>
+      </p:sp>
+      <p:sp>
+        <p:nvSpPr>
+          <p:cNvPr id="29" name="TextBox 28"/>
           <p:cNvSpPr txBox="1"/>
           <p:nvPr/>
         </p:nvSpPr>
         <p:spPr>
           <a:xfrm>
-            <a:off x="4782312" y="3785616"/>
-            <a:ext cx="2697480" cy="402336"/>
+            <a:off x="1755648" y="5843016"/>
+            <a:ext cx="2538984" cy="329184"/>
           </a:xfrm>
           <a:prstGeom prst="rect">
             <a:avLst/>
@@ -6788,24 +7904,24 @@
       </p:sp>
       <p:sp>
         <p:nvSpPr>
-          <p:cNvPr id="16" name="Oval 15"/>
-          <p:cNvSpPr/>
-          <p:nvPr/>
-        </p:nvSpPr>
-        <p:spPr>
-          <a:xfrm>
-            <a:off x="4251959" y="4910328"/>
-            <a:ext cx="822960" cy="822960"/>
-          </a:xfrm>
-          <a:prstGeom prst="ellipse">
-            <a:avLst/>
-          </a:prstGeom>
-          <a:solidFill>
-            <a:srgbClr val="D90000"/>
-          </a:solidFill>
-          <a:ln w="13970">
+          <p:cNvPr id="30" name="Rounded Rectangle 29"/>
+          <p:cNvSpPr/>
+          <p:nvPr/>
+        </p:nvSpPr>
+        <p:spPr>
+          <a:xfrm>
+            <a:off x="4724400" y="5705856"/>
+            <a:ext cx="2758440" cy="713232"/>
+          </a:xfrm>
+          <a:prstGeom prst="roundRect">
+            <a:avLst/>
+          </a:prstGeom>
+          <a:solidFill>
+            <a:srgbClr val="FFFFFF"/>
+          </a:solidFill>
+          <a:ln w="11430">
             <a:solidFill>
-              <a:srgbClr val="111827"/>
+              <a:srgbClr val="087490"/>
             </a:solidFill>
           </a:ln>
         </p:spPr>
@@ -6824,32 +7940,23 @@
           </a:fontRef>
         </p:style>
         <p:txBody>
-          <a:bodyPr rtlCol="0" anchor="ctr" wrap="square" lIns="101600" rIns="101600" tIns="38100" bIns="38100"/>
-          <a:lstStyle/>
-          <a:p>
-            <a:pPr algn="ctr"/>
-            <a:r>
-              <a:rPr sz="1300" b="1">
-                <a:solidFill>
-                  <a:srgbClr val="FFFFFF"/>
-                </a:solidFill>
-                <a:latin typeface="Arial"/>
-              </a:rPr>
-              <a:t>2</a:t>
-            </a:r>
-          </a:p>
-        </p:txBody>
-      </p:sp>
-      <p:sp>
-        <p:nvSpPr>
-          <p:cNvPr id="17" name="TextBox 16"/>
+          <a:bodyPr rtlCol="0" anchor="ctr"/>
+          <a:lstStyle/>
+          <a:p>
+            <a:pPr algn="ctr"/>
+          </a:p>
+        </p:txBody>
+      </p:sp>
+      <p:sp>
+        <p:nvSpPr>
+          <p:cNvPr id="31" name="TextBox 30"/>
           <p:cNvSpPr txBox="1"/>
           <p:nvPr/>
         </p:nvSpPr>
         <p:spPr>
           <a:xfrm>
-            <a:off x="3319271" y="5843016"/>
-            <a:ext cx="2697480" cy="402336"/>
+            <a:off x="4834128" y="5843016"/>
+            <a:ext cx="2538984" cy="329184"/>
           </a:xfrm>
           <a:prstGeom prst="rect">
             <a:avLst/>
@@ -6877,24 +7984,24 @@
       </p:sp>
       <p:sp>
         <p:nvSpPr>
-          <p:cNvPr id="18" name="Oval 17"/>
-          <p:cNvSpPr/>
-          <p:nvPr/>
-        </p:nvSpPr>
-        <p:spPr>
-          <a:xfrm>
-            <a:off x="7178040" y="4910328"/>
-            <a:ext cx="822960" cy="822960"/>
-          </a:xfrm>
-          <a:prstGeom prst="ellipse">
-            <a:avLst/>
-          </a:prstGeom>
-          <a:solidFill>
-            <a:srgbClr val="1B7F3A"/>
-          </a:solidFill>
-          <a:ln w="13970">
+          <p:cNvPr id="32" name="Rounded Rectangle 31"/>
+          <p:cNvSpPr/>
+          <p:nvPr/>
+        </p:nvSpPr>
+        <p:spPr>
+          <a:xfrm>
+            <a:off x="7802880" y="5705856"/>
+            <a:ext cx="2758440" cy="713232"/>
+          </a:xfrm>
+          <a:prstGeom prst="roundRect">
+            <a:avLst/>
+          </a:prstGeom>
+          <a:solidFill>
+            <a:srgbClr val="FFFFFF"/>
+          </a:solidFill>
+          <a:ln w="11430">
             <a:solidFill>
-              <a:srgbClr val="111827"/>
+              <a:srgbClr val="087490"/>
             </a:solidFill>
           </a:ln>
         </p:spPr>
@@ -6913,32 +8020,23 @@
           </a:fontRef>
         </p:style>
         <p:txBody>
-          <a:bodyPr rtlCol="0" anchor="ctr" wrap="square" lIns="101600" rIns="101600" tIns="38100" bIns="38100"/>
-          <a:lstStyle/>
-          <a:p>
-            <a:pPr algn="ctr"/>
-            <a:r>
-              <a:rPr sz="1300" b="1">
-                <a:solidFill>
-                  <a:srgbClr val="FFFFFF"/>
-                </a:solidFill>
-                <a:latin typeface="Arial"/>
-              </a:rPr>
-              <a:t>3</a:t>
-            </a:r>
-          </a:p>
-        </p:txBody>
-      </p:sp>
-      <p:sp>
-        <p:nvSpPr>
-          <p:cNvPr id="19" name="TextBox 18"/>
+          <a:bodyPr rtlCol="0" anchor="ctr"/>
+          <a:lstStyle/>
+          <a:p>
+            <a:pPr algn="ctr"/>
+          </a:p>
+        </p:txBody>
+      </p:sp>
+      <p:sp>
+        <p:nvSpPr>
+          <p:cNvPr id="33" name="TextBox 32"/>
           <p:cNvSpPr txBox="1"/>
           <p:nvPr/>
         </p:nvSpPr>
         <p:spPr>
           <a:xfrm>
-            <a:off x="6245352" y="5843016"/>
-            <a:ext cx="2697480" cy="402336"/>
+            <a:off x="7912608" y="5843016"/>
+            <a:ext cx="2538984" cy="329184"/>
           </a:xfrm>
           <a:prstGeom prst="rect">
             <a:avLst/>
@@ -6966,7 +8064,7 @@
       </p:sp>
       <p:sp>
         <p:nvSpPr>
-          <p:cNvPr id="20" name="TextBox 19"/>
+          <p:cNvPr id="34" name="TextBox 33"/>
           <p:cNvSpPr txBox="1"/>
           <p:nvPr/>
         </p:nvSpPr>
@@ -7448,8 +8546,8 @@
         </p:nvSpPr>
         <p:spPr>
           <a:xfrm>
-            <a:off x="1417319" y="2322576"/>
-            <a:ext cx="9372600" cy="411480"/>
+            <a:off x="1417319" y="2286000"/>
+            <a:ext cx="9372600" cy="310896"/>
           </a:xfrm>
           <a:prstGeom prst="rect">
             <a:avLst/>
@@ -7464,7 +8562,7 @@
           <a:p>
             <a:pPr algn="ctr"/>
             <a:r>
-              <a:rPr sz="1800" b="1">
+              <a:rPr sz="1700" b="1">
                 <a:solidFill>
                   <a:srgbClr val="111827"/>
                 </a:solidFill>
@@ -7477,22 +8575,65 @@
       </p:sp>
       <p:sp>
         <p:nvSpPr>
-          <p:cNvPr id="13" name="Isosceles Triangle 12"/>
-          <p:cNvSpPr/>
-          <p:nvPr/>
-        </p:nvSpPr>
-        <p:spPr>
-          <a:xfrm>
-            <a:off x="4754879" y="2990088"/>
-            <a:ext cx="2651760" cy="2651760"/>
-          </a:xfrm>
-          <a:prstGeom prst="triangle">
-            <a:avLst/>
-          </a:prstGeom>
-          <a:solidFill>
-            <a:srgbClr val="FFF7E0"/>
-          </a:solidFill>
-          <a:ln w="22860">
+          <p:cNvPr id="13" name="Rectangle 12"/>
+          <p:cNvSpPr/>
+          <p:nvPr/>
+        </p:nvSpPr>
+        <p:spPr>
+          <a:xfrm>
+            <a:off x="2194560" y="4178808"/>
+            <a:ext cx="146304" cy="658368"/>
+          </a:xfrm>
+          <a:prstGeom prst="rect">
+            <a:avLst/>
+          </a:prstGeom>
+          <a:solidFill>
+            <a:srgbClr val="78350F"/>
+          </a:solidFill>
+          <a:ln>
+            <a:noFill/>
+          </a:ln>
+        </p:spPr>
+        <p:style>
+          <a:lnRef idx="1">
+            <a:schemeClr val="accent1"/>
+          </a:lnRef>
+          <a:fillRef idx="3">
+            <a:schemeClr val="accent1"/>
+          </a:fillRef>
+          <a:effectRef idx="2">
+            <a:schemeClr val="accent1"/>
+          </a:effectRef>
+          <a:fontRef idx="minor">
+            <a:schemeClr val="lt1"/>
+          </a:fontRef>
+        </p:style>
+        <p:txBody>
+          <a:bodyPr rtlCol="0" anchor="ctr"/>
+          <a:lstStyle/>
+          <a:p>
+            <a:pPr algn="ctr"/>
+          </a:p>
+        </p:txBody>
+      </p:sp>
+      <p:sp>
+        <p:nvSpPr>
+          <p:cNvPr id="14" name="Oval 13"/>
+          <p:cNvSpPr/>
+          <p:nvPr/>
+        </p:nvSpPr>
+        <p:spPr>
+          <a:xfrm>
+            <a:off x="1874519" y="3584448"/>
+            <a:ext cx="786384" cy="786384"/>
+          </a:xfrm>
+          <a:prstGeom prst="ellipse">
+            <a:avLst/>
+          </a:prstGeom>
+          <a:solidFill>
+            <a:srgbClr val="1B7F3A"/>
+          </a:solidFill>
+          <a:ln w="7620">
             <a:solidFill>
               <a:srgbClr val="111827"/>
             </a:solidFill>
@@ -7522,22 +8663,65 @@
       </p:sp>
       <p:sp>
         <p:nvSpPr>
-          <p:cNvPr id="14" name="Oval 13"/>
-          <p:cNvSpPr/>
-          <p:nvPr/>
-        </p:nvSpPr>
-        <p:spPr>
-          <a:xfrm>
-            <a:off x="5715000" y="2852928"/>
-            <a:ext cx="822960" cy="822960"/>
+          <p:cNvPr id="15" name="Rectangle 14"/>
+          <p:cNvSpPr/>
+          <p:nvPr/>
+        </p:nvSpPr>
+        <p:spPr>
+          <a:xfrm>
+            <a:off x="3259836" y="4347972"/>
+            <a:ext cx="131673" cy="592531"/>
+          </a:xfrm>
+          <a:prstGeom prst="rect">
+            <a:avLst/>
+          </a:prstGeom>
+          <a:solidFill>
+            <a:srgbClr val="78350F"/>
+          </a:solidFill>
+          <a:ln>
+            <a:noFill/>
+          </a:ln>
+        </p:spPr>
+        <p:style>
+          <a:lnRef idx="1">
+            <a:schemeClr val="accent1"/>
+          </a:lnRef>
+          <a:fillRef idx="3">
+            <a:schemeClr val="accent1"/>
+          </a:fillRef>
+          <a:effectRef idx="2">
+            <a:schemeClr val="accent1"/>
+          </a:effectRef>
+          <a:fontRef idx="minor">
+            <a:schemeClr val="lt1"/>
+          </a:fontRef>
+        </p:style>
+        <p:txBody>
+          <a:bodyPr rtlCol="0" anchor="ctr"/>
+          <a:lstStyle/>
+          <a:p>
+            <a:pPr algn="ctr"/>
+          </a:p>
+        </p:txBody>
+      </p:sp>
+      <p:sp>
+        <p:nvSpPr>
+          <p:cNvPr id="16" name="Oval 15"/>
+          <p:cNvSpPr/>
+          <p:nvPr/>
+        </p:nvSpPr>
+        <p:spPr>
+          <a:xfrm>
+            <a:off x="2971800" y="3813048"/>
+            <a:ext cx="707745" cy="707745"/>
           </a:xfrm>
           <a:prstGeom prst="ellipse">
             <a:avLst/>
           </a:prstGeom>
           <a:solidFill>
-            <a:srgbClr val="FCD116"/>
-          </a:solidFill>
-          <a:ln w="13970">
+            <a:srgbClr val="1B7F3A"/>
+          </a:solidFill>
+          <a:ln w="7620">
             <a:solidFill>
               <a:srgbClr val="111827"/>
             </a:solidFill>
@@ -7558,32 +8742,513 @@
           </a:fontRef>
         </p:style>
         <p:txBody>
-          <a:bodyPr rtlCol="0" anchor="ctr" wrap="square" lIns="101600" rIns="101600" tIns="38100" bIns="38100"/>
-          <a:lstStyle/>
-          <a:p>
-            <a:pPr algn="ctr"/>
-            <a:r>
-              <a:rPr sz="1300" b="1">
-                <a:solidFill>
-                  <a:srgbClr val="111827"/>
-                </a:solidFill>
-                <a:latin typeface="Arial"/>
-              </a:rPr>
-              <a:t>1</a:t>
-            </a:r>
-          </a:p>
-        </p:txBody>
-      </p:sp>
-      <p:sp>
-        <p:nvSpPr>
-          <p:cNvPr id="15" name="TextBox 14"/>
+          <a:bodyPr rtlCol="0" anchor="ctr"/>
+          <a:lstStyle/>
+          <a:p>
+            <a:pPr algn="ctr"/>
+          </a:p>
+        </p:txBody>
+      </p:sp>
+      <p:cxnSp>
+        <p:nvCxnSpPr>
+          <p:cNvPr id="17" name="Connector 16"/>
+          <p:cNvCxnSpPr/>
+          <p:nvPr/>
+        </p:nvCxnSpPr>
+        <p:spPr>
+          <a:xfrm flipV="1">
+            <a:off x="4434840" y="3401568"/>
+            <a:ext cx="1920239" cy="320040"/>
+          </a:xfrm>
+          <a:prstGeom prst="line">
+            <a:avLst/>
+          </a:prstGeom>
+          <a:ln w="22860">
+            <a:solidFill>
+              <a:srgbClr val="1D4ED8"/>
+            </a:solidFill>
+          </a:ln>
+        </p:spPr>
+        <p:style>
+          <a:lnRef idx="2">
+            <a:schemeClr val="accent1"/>
+          </a:lnRef>
+          <a:fillRef idx="0">
+            <a:schemeClr val="accent1"/>
+          </a:fillRef>
+          <a:effectRef idx="1">
+            <a:schemeClr val="accent1"/>
+          </a:effectRef>
+          <a:fontRef idx="minor">
+            <a:schemeClr val="tx1"/>
+          </a:fontRef>
+        </p:style>
+      </p:cxnSp>
+      <p:cxnSp>
+        <p:nvCxnSpPr>
+          <p:cNvPr id="18" name="Connector 17"/>
+          <p:cNvCxnSpPr/>
+          <p:nvPr/>
+        </p:nvCxnSpPr>
+        <p:spPr>
+          <a:xfrm flipV="1">
+            <a:off x="4434840" y="3813048"/>
+            <a:ext cx="1920239" cy="320040"/>
+          </a:xfrm>
+          <a:prstGeom prst="line">
+            <a:avLst/>
+          </a:prstGeom>
+          <a:ln w="22860">
+            <a:solidFill>
+              <a:srgbClr val="1D4ED8"/>
+            </a:solidFill>
+          </a:ln>
+        </p:spPr>
+        <p:style>
+          <a:lnRef idx="2">
+            <a:schemeClr val="accent1"/>
+          </a:lnRef>
+          <a:fillRef idx="0">
+            <a:schemeClr val="accent1"/>
+          </a:fillRef>
+          <a:effectRef idx="1">
+            <a:schemeClr val="accent1"/>
+          </a:effectRef>
+          <a:fontRef idx="minor">
+            <a:schemeClr val="tx1"/>
+          </a:fontRef>
+        </p:style>
+      </p:cxnSp>
+      <p:cxnSp>
+        <p:nvCxnSpPr>
+          <p:cNvPr id="19" name="Connector 18"/>
+          <p:cNvCxnSpPr/>
+          <p:nvPr/>
+        </p:nvCxnSpPr>
+        <p:spPr>
+          <a:xfrm flipV="1">
+            <a:off x="4434840" y="4224528"/>
+            <a:ext cx="1920239" cy="320040"/>
+          </a:xfrm>
+          <a:prstGeom prst="line">
+            <a:avLst/>
+          </a:prstGeom>
+          <a:ln w="22860">
+            <a:solidFill>
+              <a:srgbClr val="1D4ED8"/>
+            </a:solidFill>
+          </a:ln>
+        </p:spPr>
+        <p:style>
+          <a:lnRef idx="2">
+            <a:schemeClr val="accent1"/>
+          </a:lnRef>
+          <a:fillRef idx="0">
+            <a:schemeClr val="accent1"/>
+          </a:fillRef>
+          <a:effectRef idx="1">
+            <a:schemeClr val="accent1"/>
+          </a:effectRef>
+          <a:fontRef idx="minor">
+            <a:schemeClr val="tx1"/>
+          </a:fontRef>
+        </p:style>
+      </p:cxnSp>
+      <p:sp>
+        <p:nvSpPr>
+          <p:cNvPr id="20" name="Oval 19"/>
+          <p:cNvSpPr/>
+          <p:nvPr/>
+        </p:nvSpPr>
+        <p:spPr>
+          <a:xfrm>
+            <a:off x="7156094" y="3767328"/>
+            <a:ext cx="181051" cy="197510"/>
+          </a:xfrm>
+          <a:prstGeom prst="ellipse">
+            <a:avLst/>
+          </a:prstGeom>
+          <a:solidFill>
+            <a:srgbClr val="FCD116"/>
+          </a:solidFill>
+          <a:ln w="7620">
+            <a:solidFill>
+              <a:srgbClr val="111827"/>
+            </a:solidFill>
+          </a:ln>
+        </p:spPr>
+        <p:style>
+          <a:lnRef idx="1">
+            <a:schemeClr val="accent1"/>
+          </a:lnRef>
+          <a:fillRef idx="3">
+            <a:schemeClr val="accent1"/>
+          </a:fillRef>
+          <a:effectRef idx="2">
+            <a:schemeClr val="accent1"/>
+          </a:effectRef>
+          <a:fontRef idx="minor">
+            <a:schemeClr val="lt1"/>
+          </a:fontRef>
+        </p:style>
+        <p:txBody>
+          <a:bodyPr rtlCol="0" anchor="ctr"/>
+          <a:lstStyle/>
+          <a:p>
+            <a:pPr algn="ctr"/>
+          </a:p>
+        </p:txBody>
+      </p:sp>
+      <p:sp>
+        <p:nvSpPr>
+          <p:cNvPr id="21" name="Rounded Rectangle 20"/>
+          <p:cNvSpPr/>
+          <p:nvPr/>
+        </p:nvSpPr>
+        <p:spPr>
+          <a:xfrm>
+            <a:off x="7120890" y="4004340"/>
+            <a:ext cx="251460" cy="395020"/>
+          </a:xfrm>
+          <a:prstGeom prst="roundRect">
+            <a:avLst/>
+          </a:prstGeom>
+          <a:solidFill>
+            <a:srgbClr val="D90000"/>
+          </a:solidFill>
+          <a:ln w="7620">
+            <a:solidFill>
+              <a:srgbClr val="111827"/>
+            </a:solidFill>
+          </a:ln>
+        </p:spPr>
+        <p:style>
+          <a:lnRef idx="1">
+            <a:schemeClr val="accent1"/>
+          </a:lnRef>
+          <a:fillRef idx="3">
+            <a:schemeClr val="accent1"/>
+          </a:fillRef>
+          <a:effectRef idx="2">
+            <a:schemeClr val="accent1"/>
+          </a:effectRef>
+          <a:fontRef idx="minor">
+            <a:schemeClr val="lt1"/>
+          </a:fontRef>
+        </p:style>
+        <p:txBody>
+          <a:bodyPr rtlCol="0" anchor="ctr"/>
+          <a:lstStyle/>
+          <a:p>
+            <a:pPr algn="ctr"/>
+          </a:p>
+        </p:txBody>
+      </p:sp>
+      <p:cxnSp>
+        <p:nvCxnSpPr>
+          <p:cNvPr id="22" name="Connector 21"/>
+          <p:cNvCxnSpPr/>
+          <p:nvPr/>
+        </p:nvCxnSpPr>
+        <p:spPr>
+          <a:xfrm flipH="1">
+            <a:off x="7135977" y="4379610"/>
+            <a:ext cx="110643" cy="375270"/>
+          </a:xfrm>
+          <a:prstGeom prst="line">
+            <a:avLst/>
+          </a:prstGeom>
+          <a:ln w="12700">
+            <a:solidFill>
+              <a:srgbClr val="111827"/>
+            </a:solidFill>
+          </a:ln>
+        </p:spPr>
+        <p:style>
+          <a:lnRef idx="2">
+            <a:schemeClr val="accent1"/>
+          </a:lnRef>
+          <a:fillRef idx="0">
+            <a:schemeClr val="accent1"/>
+          </a:fillRef>
+          <a:effectRef idx="1">
+            <a:schemeClr val="accent1"/>
+          </a:effectRef>
+          <a:fontRef idx="minor">
+            <a:schemeClr val="tx1"/>
+          </a:fontRef>
+        </p:style>
+      </p:cxnSp>
+      <p:cxnSp>
+        <p:nvCxnSpPr>
+          <p:cNvPr id="23" name="Connector 22"/>
+          <p:cNvCxnSpPr/>
+          <p:nvPr/>
+        </p:nvCxnSpPr>
+        <p:spPr>
+          <a:xfrm>
+            <a:off x="7246620" y="4379610"/>
+            <a:ext cx="110642" cy="375270"/>
+          </a:xfrm>
+          <a:prstGeom prst="line">
+            <a:avLst/>
+          </a:prstGeom>
+          <a:ln w="12700">
+            <a:solidFill>
+              <a:srgbClr val="111827"/>
+            </a:solidFill>
+          </a:ln>
+        </p:spPr>
+        <p:style>
+          <a:lnRef idx="2">
+            <a:schemeClr val="accent1"/>
+          </a:lnRef>
+          <a:fillRef idx="0">
+            <a:schemeClr val="accent1"/>
+          </a:fillRef>
+          <a:effectRef idx="1">
+            <a:schemeClr val="accent1"/>
+          </a:effectRef>
+          <a:fontRef idx="minor">
+            <a:schemeClr val="tx1"/>
+          </a:fontRef>
+        </p:style>
+      </p:cxnSp>
+      <p:sp>
+        <p:nvSpPr>
+          <p:cNvPr id="24" name="Oval 23"/>
+          <p:cNvSpPr/>
+          <p:nvPr/>
+        </p:nvSpPr>
+        <p:spPr>
+          <a:xfrm>
+            <a:off x="8458200" y="4548225"/>
+            <a:ext cx="652881" cy="528523"/>
+          </a:xfrm>
+          <a:prstGeom prst="ellipse">
+            <a:avLst/>
+          </a:prstGeom>
+          <a:solidFill>
+            <a:srgbClr val="475569"/>
+          </a:solidFill>
+          <a:ln w="7620">
+            <a:solidFill>
+              <a:srgbClr val="111827"/>
+            </a:solidFill>
+          </a:ln>
+        </p:spPr>
+        <p:style>
+          <a:lnRef idx="1">
+            <a:schemeClr val="accent1"/>
+          </a:lnRef>
+          <a:fillRef idx="3">
+            <a:schemeClr val="accent1"/>
+          </a:fillRef>
+          <a:effectRef idx="2">
+            <a:schemeClr val="accent1"/>
+          </a:effectRef>
+          <a:fontRef idx="minor">
+            <a:schemeClr val="lt1"/>
+          </a:fontRef>
+        </p:style>
+        <p:txBody>
+          <a:bodyPr rtlCol="0" anchor="ctr"/>
+          <a:lstStyle/>
+          <a:p>
+            <a:pPr algn="ctr"/>
+          </a:p>
+        </p:txBody>
+      </p:sp>
+      <p:sp>
+        <p:nvSpPr>
+          <p:cNvPr id="25" name="Oval 24"/>
+          <p:cNvSpPr/>
+          <p:nvPr/>
+        </p:nvSpPr>
+        <p:spPr>
+          <a:xfrm>
+            <a:off x="9359798" y="3584448"/>
+            <a:ext cx="652881" cy="528523"/>
+          </a:xfrm>
+          <a:prstGeom prst="ellipse">
+            <a:avLst/>
+          </a:prstGeom>
+          <a:solidFill>
+            <a:srgbClr val="475569"/>
+          </a:solidFill>
+          <a:ln w="7620">
+            <a:solidFill>
+              <a:srgbClr val="111827"/>
+            </a:solidFill>
+          </a:ln>
+        </p:spPr>
+        <p:style>
+          <a:lnRef idx="1">
+            <a:schemeClr val="accent1"/>
+          </a:lnRef>
+          <a:fillRef idx="3">
+            <a:schemeClr val="accent1"/>
+          </a:fillRef>
+          <a:effectRef idx="2">
+            <a:schemeClr val="accent1"/>
+          </a:effectRef>
+          <a:fontRef idx="minor">
+            <a:schemeClr val="lt1"/>
+          </a:fontRef>
+        </p:style>
+        <p:txBody>
+          <a:bodyPr rtlCol="0" anchor="ctr"/>
+          <a:lstStyle/>
+          <a:p>
+            <a:pPr algn="ctr"/>
+          </a:p>
+        </p:txBody>
+      </p:sp>
+      <p:sp>
+        <p:nvSpPr>
+          <p:cNvPr id="26" name="Oval 25"/>
+          <p:cNvSpPr/>
+          <p:nvPr/>
+        </p:nvSpPr>
+        <p:spPr>
+          <a:xfrm>
+            <a:off x="10261396" y="4548225"/>
+            <a:ext cx="652881" cy="528523"/>
+          </a:xfrm>
+          <a:prstGeom prst="ellipse">
+            <a:avLst/>
+          </a:prstGeom>
+          <a:solidFill>
+            <a:srgbClr val="475569"/>
+          </a:solidFill>
+          <a:ln w="7620">
+            <a:solidFill>
+              <a:srgbClr val="111827"/>
+            </a:solidFill>
+          </a:ln>
+        </p:spPr>
+        <p:style>
+          <a:lnRef idx="1">
+            <a:schemeClr val="accent1"/>
+          </a:lnRef>
+          <a:fillRef idx="3">
+            <a:schemeClr val="accent1"/>
+          </a:fillRef>
+          <a:effectRef idx="2">
+            <a:schemeClr val="accent1"/>
+          </a:effectRef>
+          <a:fontRef idx="minor">
+            <a:schemeClr val="lt1"/>
+          </a:fontRef>
+        </p:style>
+        <p:txBody>
+          <a:bodyPr rtlCol="0" anchor="ctr"/>
+          <a:lstStyle/>
+          <a:p>
+            <a:pPr algn="ctr"/>
+          </a:p>
+        </p:txBody>
+      </p:sp>
+      <p:sp>
+        <p:nvSpPr>
+          <p:cNvPr id="27" name="Oval 26"/>
+          <p:cNvSpPr/>
+          <p:nvPr/>
+        </p:nvSpPr>
+        <p:spPr>
+          <a:xfrm>
+            <a:off x="9235440" y="4392777"/>
+            <a:ext cx="854964" cy="590702"/>
+          </a:xfrm>
+          <a:prstGeom prst="ellipse">
+            <a:avLst/>
+          </a:prstGeom>
+          <a:solidFill>
+            <a:srgbClr val="FCD116"/>
+          </a:solidFill>
+          <a:ln w="10160">
+            <a:solidFill>
+              <a:srgbClr val="D90000"/>
+            </a:solidFill>
+          </a:ln>
+        </p:spPr>
+        <p:style>
+          <a:lnRef idx="1">
+            <a:schemeClr val="accent1"/>
+          </a:lnRef>
+          <a:fillRef idx="3">
+            <a:schemeClr val="accent1"/>
+          </a:fillRef>
+          <a:effectRef idx="2">
+            <a:schemeClr val="accent1"/>
+          </a:effectRef>
+          <a:fontRef idx="minor">
+            <a:schemeClr val="lt1"/>
+          </a:fontRef>
+        </p:style>
+        <p:txBody>
+          <a:bodyPr rtlCol="0" anchor="ctr"/>
+          <a:lstStyle/>
+          <a:p>
+            <a:pPr algn="ctr"/>
+          </a:p>
+        </p:txBody>
+      </p:sp>
+      <p:sp>
+        <p:nvSpPr>
+          <p:cNvPr id="28" name="Rounded Rectangle 27"/>
+          <p:cNvSpPr/>
+          <p:nvPr/>
+        </p:nvSpPr>
+        <p:spPr>
+          <a:xfrm>
+            <a:off x="1645919" y="5705856"/>
+            <a:ext cx="2758440" cy="713232"/>
+          </a:xfrm>
+          <a:prstGeom prst="roundRect">
+            <a:avLst/>
+          </a:prstGeom>
+          <a:solidFill>
+            <a:srgbClr val="FFFFFF"/>
+          </a:solidFill>
+          <a:ln w="11430">
+            <a:solidFill>
+              <a:srgbClr val="D97706"/>
+            </a:solidFill>
+          </a:ln>
+        </p:spPr>
+        <p:style>
+          <a:lnRef idx="1">
+            <a:schemeClr val="accent1"/>
+          </a:lnRef>
+          <a:fillRef idx="3">
+            <a:schemeClr val="accent1"/>
+          </a:fillRef>
+          <a:effectRef idx="2">
+            <a:schemeClr val="accent1"/>
+          </a:effectRef>
+          <a:fontRef idx="minor">
+            <a:schemeClr val="lt1"/>
+          </a:fontRef>
+        </p:style>
+        <p:txBody>
+          <a:bodyPr rtlCol="0" anchor="ctr"/>
+          <a:lstStyle/>
+          <a:p>
+            <a:pPr algn="ctr"/>
+          </a:p>
+        </p:txBody>
+      </p:sp>
+      <p:sp>
+        <p:nvSpPr>
+          <p:cNvPr id="29" name="TextBox 28"/>
           <p:cNvSpPr txBox="1"/>
           <p:nvPr/>
         </p:nvSpPr>
         <p:spPr>
           <a:xfrm>
-            <a:off x="4782312" y="3785616"/>
-            <a:ext cx="2697480" cy="402336"/>
+            <a:off x="1755648" y="5843016"/>
+            <a:ext cx="2538984" cy="329184"/>
           </a:xfrm>
           <a:prstGeom prst="rect">
             <a:avLst/>
@@ -7611,24 +9276,24 @@
       </p:sp>
       <p:sp>
         <p:nvSpPr>
-          <p:cNvPr id="16" name="Oval 15"/>
-          <p:cNvSpPr/>
-          <p:nvPr/>
-        </p:nvSpPr>
-        <p:spPr>
-          <a:xfrm>
-            <a:off x="4251959" y="4910328"/>
-            <a:ext cx="822960" cy="822960"/>
-          </a:xfrm>
-          <a:prstGeom prst="ellipse">
-            <a:avLst/>
-          </a:prstGeom>
-          <a:solidFill>
-            <a:srgbClr val="D90000"/>
-          </a:solidFill>
-          <a:ln w="13970">
+          <p:cNvPr id="30" name="Rounded Rectangle 29"/>
+          <p:cNvSpPr/>
+          <p:nvPr/>
+        </p:nvSpPr>
+        <p:spPr>
+          <a:xfrm>
+            <a:off x="4724400" y="5705856"/>
+            <a:ext cx="2758440" cy="713232"/>
+          </a:xfrm>
+          <a:prstGeom prst="roundRect">
+            <a:avLst/>
+          </a:prstGeom>
+          <a:solidFill>
+            <a:srgbClr val="FFFFFF"/>
+          </a:solidFill>
+          <a:ln w="11430">
             <a:solidFill>
-              <a:srgbClr val="111827"/>
+              <a:srgbClr val="D97706"/>
             </a:solidFill>
           </a:ln>
         </p:spPr>
@@ -7647,32 +9312,23 @@
           </a:fontRef>
         </p:style>
         <p:txBody>
-          <a:bodyPr rtlCol="0" anchor="ctr" wrap="square" lIns="101600" rIns="101600" tIns="38100" bIns="38100"/>
-          <a:lstStyle/>
-          <a:p>
-            <a:pPr algn="ctr"/>
-            <a:r>
-              <a:rPr sz="1300" b="1">
-                <a:solidFill>
-                  <a:srgbClr val="FFFFFF"/>
-                </a:solidFill>
-                <a:latin typeface="Arial"/>
-              </a:rPr>
-              <a:t>2</a:t>
-            </a:r>
-          </a:p>
-        </p:txBody>
-      </p:sp>
-      <p:sp>
-        <p:nvSpPr>
-          <p:cNvPr id="17" name="TextBox 16"/>
+          <a:bodyPr rtlCol="0" anchor="ctr"/>
+          <a:lstStyle/>
+          <a:p>
+            <a:pPr algn="ctr"/>
+          </a:p>
+        </p:txBody>
+      </p:sp>
+      <p:sp>
+        <p:nvSpPr>
+          <p:cNvPr id="31" name="TextBox 30"/>
           <p:cNvSpPr txBox="1"/>
           <p:nvPr/>
         </p:nvSpPr>
         <p:spPr>
           <a:xfrm>
-            <a:off x="3319271" y="5843016"/>
-            <a:ext cx="2697480" cy="402336"/>
+            <a:off x="4834128" y="5843016"/>
+            <a:ext cx="2538984" cy="329184"/>
           </a:xfrm>
           <a:prstGeom prst="rect">
             <a:avLst/>
@@ -7700,24 +9356,24 @@
       </p:sp>
       <p:sp>
         <p:nvSpPr>
-          <p:cNvPr id="18" name="Oval 17"/>
-          <p:cNvSpPr/>
-          <p:nvPr/>
-        </p:nvSpPr>
-        <p:spPr>
-          <a:xfrm>
-            <a:off x="7178040" y="4910328"/>
-            <a:ext cx="822960" cy="822960"/>
-          </a:xfrm>
-          <a:prstGeom prst="ellipse">
-            <a:avLst/>
-          </a:prstGeom>
-          <a:solidFill>
-            <a:srgbClr val="1B7F3A"/>
-          </a:solidFill>
-          <a:ln w="13970">
+          <p:cNvPr id="32" name="Rounded Rectangle 31"/>
+          <p:cNvSpPr/>
+          <p:nvPr/>
+        </p:nvSpPr>
+        <p:spPr>
+          <a:xfrm>
+            <a:off x="7802880" y="5705856"/>
+            <a:ext cx="2758440" cy="713232"/>
+          </a:xfrm>
+          <a:prstGeom prst="roundRect">
+            <a:avLst/>
+          </a:prstGeom>
+          <a:solidFill>
+            <a:srgbClr val="FFFFFF"/>
+          </a:solidFill>
+          <a:ln w="11430">
             <a:solidFill>
-              <a:srgbClr val="111827"/>
+              <a:srgbClr val="D97706"/>
             </a:solidFill>
           </a:ln>
         </p:spPr>
@@ -7736,32 +9392,23 @@
           </a:fontRef>
         </p:style>
         <p:txBody>
-          <a:bodyPr rtlCol="0" anchor="ctr" wrap="square" lIns="101600" rIns="101600" tIns="38100" bIns="38100"/>
-          <a:lstStyle/>
-          <a:p>
-            <a:pPr algn="ctr"/>
-            <a:r>
-              <a:rPr sz="1300" b="1">
-                <a:solidFill>
-                  <a:srgbClr val="FFFFFF"/>
-                </a:solidFill>
-                <a:latin typeface="Arial"/>
-              </a:rPr>
-              <a:t>3</a:t>
-            </a:r>
-          </a:p>
-        </p:txBody>
-      </p:sp>
-      <p:sp>
-        <p:nvSpPr>
-          <p:cNvPr id="19" name="TextBox 18"/>
+          <a:bodyPr rtlCol="0" anchor="ctr"/>
+          <a:lstStyle/>
+          <a:p>
+            <a:pPr algn="ctr"/>
+          </a:p>
+        </p:txBody>
+      </p:sp>
+      <p:sp>
+        <p:nvSpPr>
+          <p:cNvPr id="33" name="TextBox 32"/>
           <p:cNvSpPr txBox="1"/>
           <p:nvPr/>
         </p:nvSpPr>
         <p:spPr>
           <a:xfrm>
-            <a:off x="6245352" y="5843016"/>
-            <a:ext cx="2697480" cy="402336"/>
+            <a:off x="7912608" y="5843016"/>
+            <a:ext cx="2538984" cy="329184"/>
           </a:xfrm>
           <a:prstGeom prst="rect">
             <a:avLst/>
@@ -7789,7 +9436,7 @@
       </p:sp>
       <p:sp>
         <p:nvSpPr>
-          <p:cNvPr id="20" name="TextBox 19"/>
+          <p:cNvPr id="34" name="TextBox 33"/>
           <p:cNvSpPr txBox="1"/>
           <p:nvPr/>
         </p:nvSpPr>
@@ -9561,8 +11208,8 @@
         </p:nvSpPr>
         <p:spPr>
           <a:xfrm>
-            <a:off x="1417319" y="2322576"/>
-            <a:ext cx="9372600" cy="411480"/>
+            <a:off x="1417319" y="2286000"/>
+            <a:ext cx="9372600" cy="310896"/>
           </a:xfrm>
           <a:prstGeom prst="rect">
             <a:avLst/>
@@ -9577,7 +11224,7 @@
           <a:p>
             <a:pPr algn="ctr"/>
             <a:r>
-              <a:rPr sz="1800" b="1">
+              <a:rPr sz="1700" b="1">
                 <a:solidFill>
                   <a:srgbClr val="111827"/>
                 </a:solidFill>
@@ -9590,22 +11237,65 @@
       </p:sp>
       <p:sp>
         <p:nvSpPr>
-          <p:cNvPr id="13" name="Isosceles Triangle 12"/>
-          <p:cNvSpPr/>
-          <p:nvPr/>
-        </p:nvSpPr>
-        <p:spPr>
-          <a:xfrm>
-            <a:off x="4754879" y="2990088"/>
-            <a:ext cx="2651760" cy="2651760"/>
-          </a:xfrm>
-          <a:prstGeom prst="triangle">
-            <a:avLst/>
-          </a:prstGeom>
-          <a:solidFill>
-            <a:srgbClr val="FFF7E0"/>
-          </a:solidFill>
-          <a:ln w="22860">
+          <p:cNvPr id="13" name="Rectangle 12"/>
+          <p:cNvSpPr/>
+          <p:nvPr/>
+        </p:nvSpPr>
+        <p:spPr>
+          <a:xfrm>
+            <a:off x="2194560" y="4178808"/>
+            <a:ext cx="146304" cy="658368"/>
+          </a:xfrm>
+          <a:prstGeom prst="rect">
+            <a:avLst/>
+          </a:prstGeom>
+          <a:solidFill>
+            <a:srgbClr val="78350F"/>
+          </a:solidFill>
+          <a:ln>
+            <a:noFill/>
+          </a:ln>
+        </p:spPr>
+        <p:style>
+          <a:lnRef idx="1">
+            <a:schemeClr val="accent1"/>
+          </a:lnRef>
+          <a:fillRef idx="3">
+            <a:schemeClr val="accent1"/>
+          </a:fillRef>
+          <a:effectRef idx="2">
+            <a:schemeClr val="accent1"/>
+          </a:effectRef>
+          <a:fontRef idx="minor">
+            <a:schemeClr val="lt1"/>
+          </a:fontRef>
+        </p:style>
+        <p:txBody>
+          <a:bodyPr rtlCol="0" anchor="ctr"/>
+          <a:lstStyle/>
+          <a:p>
+            <a:pPr algn="ctr"/>
+          </a:p>
+        </p:txBody>
+      </p:sp>
+      <p:sp>
+        <p:nvSpPr>
+          <p:cNvPr id="14" name="Oval 13"/>
+          <p:cNvSpPr/>
+          <p:nvPr/>
+        </p:nvSpPr>
+        <p:spPr>
+          <a:xfrm>
+            <a:off x="1874519" y="3584448"/>
+            <a:ext cx="786384" cy="786384"/>
+          </a:xfrm>
+          <a:prstGeom prst="ellipse">
+            <a:avLst/>
+          </a:prstGeom>
+          <a:solidFill>
+            <a:srgbClr val="1B7F3A"/>
+          </a:solidFill>
+          <a:ln w="7620">
             <a:solidFill>
               <a:srgbClr val="111827"/>
             </a:solidFill>
@@ -9635,22 +11325,65 @@
       </p:sp>
       <p:sp>
         <p:nvSpPr>
-          <p:cNvPr id="14" name="Oval 13"/>
-          <p:cNvSpPr/>
-          <p:nvPr/>
-        </p:nvSpPr>
-        <p:spPr>
-          <a:xfrm>
-            <a:off x="5715000" y="2852928"/>
-            <a:ext cx="822960" cy="822960"/>
+          <p:cNvPr id="15" name="Rectangle 14"/>
+          <p:cNvSpPr/>
+          <p:nvPr/>
+        </p:nvSpPr>
+        <p:spPr>
+          <a:xfrm>
+            <a:off x="3259836" y="4347972"/>
+            <a:ext cx="131673" cy="592531"/>
+          </a:xfrm>
+          <a:prstGeom prst="rect">
+            <a:avLst/>
+          </a:prstGeom>
+          <a:solidFill>
+            <a:srgbClr val="78350F"/>
+          </a:solidFill>
+          <a:ln>
+            <a:noFill/>
+          </a:ln>
+        </p:spPr>
+        <p:style>
+          <a:lnRef idx="1">
+            <a:schemeClr val="accent1"/>
+          </a:lnRef>
+          <a:fillRef idx="3">
+            <a:schemeClr val="accent1"/>
+          </a:fillRef>
+          <a:effectRef idx="2">
+            <a:schemeClr val="accent1"/>
+          </a:effectRef>
+          <a:fontRef idx="minor">
+            <a:schemeClr val="lt1"/>
+          </a:fontRef>
+        </p:style>
+        <p:txBody>
+          <a:bodyPr rtlCol="0" anchor="ctr"/>
+          <a:lstStyle/>
+          <a:p>
+            <a:pPr algn="ctr"/>
+          </a:p>
+        </p:txBody>
+      </p:sp>
+      <p:sp>
+        <p:nvSpPr>
+          <p:cNvPr id="16" name="Oval 15"/>
+          <p:cNvSpPr/>
+          <p:nvPr/>
+        </p:nvSpPr>
+        <p:spPr>
+          <a:xfrm>
+            <a:off x="2971800" y="3813048"/>
+            <a:ext cx="707745" cy="707745"/>
           </a:xfrm>
           <a:prstGeom prst="ellipse">
             <a:avLst/>
           </a:prstGeom>
           <a:solidFill>
-            <a:srgbClr val="FCD116"/>
-          </a:solidFill>
-          <a:ln w="13970">
+            <a:srgbClr val="1B7F3A"/>
+          </a:solidFill>
+          <a:ln w="7620">
             <a:solidFill>
               <a:srgbClr val="111827"/>
             </a:solidFill>
@@ -9671,32 +11404,513 @@
           </a:fontRef>
         </p:style>
         <p:txBody>
-          <a:bodyPr rtlCol="0" anchor="ctr" wrap="square" lIns="101600" rIns="101600" tIns="38100" bIns="38100"/>
-          <a:lstStyle/>
-          <a:p>
-            <a:pPr algn="ctr"/>
-            <a:r>
-              <a:rPr sz="1300" b="1">
-                <a:solidFill>
-                  <a:srgbClr val="111827"/>
-                </a:solidFill>
-                <a:latin typeface="Arial"/>
-              </a:rPr>
-              <a:t>1</a:t>
-            </a:r>
-          </a:p>
-        </p:txBody>
-      </p:sp>
-      <p:sp>
-        <p:nvSpPr>
-          <p:cNvPr id="15" name="TextBox 14"/>
+          <a:bodyPr rtlCol="0" anchor="ctr"/>
+          <a:lstStyle/>
+          <a:p>
+            <a:pPr algn="ctr"/>
+          </a:p>
+        </p:txBody>
+      </p:sp>
+      <p:cxnSp>
+        <p:nvCxnSpPr>
+          <p:cNvPr id="17" name="Connector 16"/>
+          <p:cNvCxnSpPr/>
+          <p:nvPr/>
+        </p:nvCxnSpPr>
+        <p:spPr>
+          <a:xfrm flipV="1">
+            <a:off x="4434840" y="3401568"/>
+            <a:ext cx="1920239" cy="320040"/>
+          </a:xfrm>
+          <a:prstGeom prst="line">
+            <a:avLst/>
+          </a:prstGeom>
+          <a:ln w="22860">
+            <a:solidFill>
+              <a:srgbClr val="1D4ED8"/>
+            </a:solidFill>
+          </a:ln>
+        </p:spPr>
+        <p:style>
+          <a:lnRef idx="2">
+            <a:schemeClr val="accent1"/>
+          </a:lnRef>
+          <a:fillRef idx="0">
+            <a:schemeClr val="accent1"/>
+          </a:fillRef>
+          <a:effectRef idx="1">
+            <a:schemeClr val="accent1"/>
+          </a:effectRef>
+          <a:fontRef idx="minor">
+            <a:schemeClr val="tx1"/>
+          </a:fontRef>
+        </p:style>
+      </p:cxnSp>
+      <p:cxnSp>
+        <p:nvCxnSpPr>
+          <p:cNvPr id="18" name="Connector 17"/>
+          <p:cNvCxnSpPr/>
+          <p:nvPr/>
+        </p:nvCxnSpPr>
+        <p:spPr>
+          <a:xfrm flipV="1">
+            <a:off x="4434840" y="3813048"/>
+            <a:ext cx="1920239" cy="320040"/>
+          </a:xfrm>
+          <a:prstGeom prst="line">
+            <a:avLst/>
+          </a:prstGeom>
+          <a:ln w="22860">
+            <a:solidFill>
+              <a:srgbClr val="1D4ED8"/>
+            </a:solidFill>
+          </a:ln>
+        </p:spPr>
+        <p:style>
+          <a:lnRef idx="2">
+            <a:schemeClr val="accent1"/>
+          </a:lnRef>
+          <a:fillRef idx="0">
+            <a:schemeClr val="accent1"/>
+          </a:fillRef>
+          <a:effectRef idx="1">
+            <a:schemeClr val="accent1"/>
+          </a:effectRef>
+          <a:fontRef idx="minor">
+            <a:schemeClr val="tx1"/>
+          </a:fontRef>
+        </p:style>
+      </p:cxnSp>
+      <p:cxnSp>
+        <p:nvCxnSpPr>
+          <p:cNvPr id="19" name="Connector 18"/>
+          <p:cNvCxnSpPr/>
+          <p:nvPr/>
+        </p:nvCxnSpPr>
+        <p:spPr>
+          <a:xfrm flipV="1">
+            <a:off x="4434840" y="4224528"/>
+            <a:ext cx="1920239" cy="320040"/>
+          </a:xfrm>
+          <a:prstGeom prst="line">
+            <a:avLst/>
+          </a:prstGeom>
+          <a:ln w="22860">
+            <a:solidFill>
+              <a:srgbClr val="1D4ED8"/>
+            </a:solidFill>
+          </a:ln>
+        </p:spPr>
+        <p:style>
+          <a:lnRef idx="2">
+            <a:schemeClr val="accent1"/>
+          </a:lnRef>
+          <a:fillRef idx="0">
+            <a:schemeClr val="accent1"/>
+          </a:fillRef>
+          <a:effectRef idx="1">
+            <a:schemeClr val="accent1"/>
+          </a:effectRef>
+          <a:fontRef idx="minor">
+            <a:schemeClr val="tx1"/>
+          </a:fontRef>
+        </p:style>
+      </p:cxnSp>
+      <p:sp>
+        <p:nvSpPr>
+          <p:cNvPr id="20" name="Oval 19"/>
+          <p:cNvSpPr/>
+          <p:nvPr/>
+        </p:nvSpPr>
+        <p:spPr>
+          <a:xfrm>
+            <a:off x="7156094" y="3767328"/>
+            <a:ext cx="181051" cy="197510"/>
+          </a:xfrm>
+          <a:prstGeom prst="ellipse">
+            <a:avLst/>
+          </a:prstGeom>
+          <a:solidFill>
+            <a:srgbClr val="FCD116"/>
+          </a:solidFill>
+          <a:ln w="7620">
+            <a:solidFill>
+              <a:srgbClr val="111827"/>
+            </a:solidFill>
+          </a:ln>
+        </p:spPr>
+        <p:style>
+          <a:lnRef idx="1">
+            <a:schemeClr val="accent1"/>
+          </a:lnRef>
+          <a:fillRef idx="3">
+            <a:schemeClr val="accent1"/>
+          </a:fillRef>
+          <a:effectRef idx="2">
+            <a:schemeClr val="accent1"/>
+          </a:effectRef>
+          <a:fontRef idx="minor">
+            <a:schemeClr val="lt1"/>
+          </a:fontRef>
+        </p:style>
+        <p:txBody>
+          <a:bodyPr rtlCol="0" anchor="ctr"/>
+          <a:lstStyle/>
+          <a:p>
+            <a:pPr algn="ctr"/>
+          </a:p>
+        </p:txBody>
+      </p:sp>
+      <p:sp>
+        <p:nvSpPr>
+          <p:cNvPr id="21" name="Rounded Rectangle 20"/>
+          <p:cNvSpPr/>
+          <p:nvPr/>
+        </p:nvSpPr>
+        <p:spPr>
+          <a:xfrm>
+            <a:off x="7120890" y="4004340"/>
+            <a:ext cx="251460" cy="395020"/>
+          </a:xfrm>
+          <a:prstGeom prst="roundRect">
+            <a:avLst/>
+          </a:prstGeom>
+          <a:solidFill>
+            <a:srgbClr val="D90000"/>
+          </a:solidFill>
+          <a:ln w="7620">
+            <a:solidFill>
+              <a:srgbClr val="111827"/>
+            </a:solidFill>
+          </a:ln>
+        </p:spPr>
+        <p:style>
+          <a:lnRef idx="1">
+            <a:schemeClr val="accent1"/>
+          </a:lnRef>
+          <a:fillRef idx="3">
+            <a:schemeClr val="accent1"/>
+          </a:fillRef>
+          <a:effectRef idx="2">
+            <a:schemeClr val="accent1"/>
+          </a:effectRef>
+          <a:fontRef idx="minor">
+            <a:schemeClr val="lt1"/>
+          </a:fontRef>
+        </p:style>
+        <p:txBody>
+          <a:bodyPr rtlCol="0" anchor="ctr"/>
+          <a:lstStyle/>
+          <a:p>
+            <a:pPr algn="ctr"/>
+          </a:p>
+        </p:txBody>
+      </p:sp>
+      <p:cxnSp>
+        <p:nvCxnSpPr>
+          <p:cNvPr id="22" name="Connector 21"/>
+          <p:cNvCxnSpPr/>
+          <p:nvPr/>
+        </p:nvCxnSpPr>
+        <p:spPr>
+          <a:xfrm flipH="1">
+            <a:off x="7135977" y="4379610"/>
+            <a:ext cx="110643" cy="375270"/>
+          </a:xfrm>
+          <a:prstGeom prst="line">
+            <a:avLst/>
+          </a:prstGeom>
+          <a:ln w="12700">
+            <a:solidFill>
+              <a:srgbClr val="111827"/>
+            </a:solidFill>
+          </a:ln>
+        </p:spPr>
+        <p:style>
+          <a:lnRef idx="2">
+            <a:schemeClr val="accent1"/>
+          </a:lnRef>
+          <a:fillRef idx="0">
+            <a:schemeClr val="accent1"/>
+          </a:fillRef>
+          <a:effectRef idx="1">
+            <a:schemeClr val="accent1"/>
+          </a:effectRef>
+          <a:fontRef idx="minor">
+            <a:schemeClr val="tx1"/>
+          </a:fontRef>
+        </p:style>
+      </p:cxnSp>
+      <p:cxnSp>
+        <p:nvCxnSpPr>
+          <p:cNvPr id="23" name="Connector 22"/>
+          <p:cNvCxnSpPr/>
+          <p:nvPr/>
+        </p:nvCxnSpPr>
+        <p:spPr>
+          <a:xfrm>
+            <a:off x="7246620" y="4379610"/>
+            <a:ext cx="110642" cy="375270"/>
+          </a:xfrm>
+          <a:prstGeom prst="line">
+            <a:avLst/>
+          </a:prstGeom>
+          <a:ln w="12700">
+            <a:solidFill>
+              <a:srgbClr val="111827"/>
+            </a:solidFill>
+          </a:ln>
+        </p:spPr>
+        <p:style>
+          <a:lnRef idx="2">
+            <a:schemeClr val="accent1"/>
+          </a:lnRef>
+          <a:fillRef idx="0">
+            <a:schemeClr val="accent1"/>
+          </a:fillRef>
+          <a:effectRef idx="1">
+            <a:schemeClr val="accent1"/>
+          </a:effectRef>
+          <a:fontRef idx="minor">
+            <a:schemeClr val="tx1"/>
+          </a:fontRef>
+        </p:style>
+      </p:cxnSp>
+      <p:sp>
+        <p:nvSpPr>
+          <p:cNvPr id="24" name="Oval 23"/>
+          <p:cNvSpPr/>
+          <p:nvPr/>
+        </p:nvSpPr>
+        <p:spPr>
+          <a:xfrm>
+            <a:off x="8458200" y="4548225"/>
+            <a:ext cx="652881" cy="528523"/>
+          </a:xfrm>
+          <a:prstGeom prst="ellipse">
+            <a:avLst/>
+          </a:prstGeom>
+          <a:solidFill>
+            <a:srgbClr val="475569"/>
+          </a:solidFill>
+          <a:ln w="7620">
+            <a:solidFill>
+              <a:srgbClr val="111827"/>
+            </a:solidFill>
+          </a:ln>
+        </p:spPr>
+        <p:style>
+          <a:lnRef idx="1">
+            <a:schemeClr val="accent1"/>
+          </a:lnRef>
+          <a:fillRef idx="3">
+            <a:schemeClr val="accent1"/>
+          </a:fillRef>
+          <a:effectRef idx="2">
+            <a:schemeClr val="accent1"/>
+          </a:effectRef>
+          <a:fontRef idx="minor">
+            <a:schemeClr val="lt1"/>
+          </a:fontRef>
+        </p:style>
+        <p:txBody>
+          <a:bodyPr rtlCol="0" anchor="ctr"/>
+          <a:lstStyle/>
+          <a:p>
+            <a:pPr algn="ctr"/>
+          </a:p>
+        </p:txBody>
+      </p:sp>
+      <p:sp>
+        <p:nvSpPr>
+          <p:cNvPr id="25" name="Oval 24"/>
+          <p:cNvSpPr/>
+          <p:nvPr/>
+        </p:nvSpPr>
+        <p:spPr>
+          <a:xfrm>
+            <a:off x="9359798" y="3584448"/>
+            <a:ext cx="652881" cy="528523"/>
+          </a:xfrm>
+          <a:prstGeom prst="ellipse">
+            <a:avLst/>
+          </a:prstGeom>
+          <a:solidFill>
+            <a:srgbClr val="475569"/>
+          </a:solidFill>
+          <a:ln w="7620">
+            <a:solidFill>
+              <a:srgbClr val="111827"/>
+            </a:solidFill>
+          </a:ln>
+        </p:spPr>
+        <p:style>
+          <a:lnRef idx="1">
+            <a:schemeClr val="accent1"/>
+          </a:lnRef>
+          <a:fillRef idx="3">
+            <a:schemeClr val="accent1"/>
+          </a:fillRef>
+          <a:effectRef idx="2">
+            <a:schemeClr val="accent1"/>
+          </a:effectRef>
+          <a:fontRef idx="minor">
+            <a:schemeClr val="lt1"/>
+          </a:fontRef>
+        </p:style>
+        <p:txBody>
+          <a:bodyPr rtlCol="0" anchor="ctr"/>
+          <a:lstStyle/>
+          <a:p>
+            <a:pPr algn="ctr"/>
+          </a:p>
+        </p:txBody>
+      </p:sp>
+      <p:sp>
+        <p:nvSpPr>
+          <p:cNvPr id="26" name="Oval 25"/>
+          <p:cNvSpPr/>
+          <p:nvPr/>
+        </p:nvSpPr>
+        <p:spPr>
+          <a:xfrm>
+            <a:off x="10261396" y="4548225"/>
+            <a:ext cx="652881" cy="528523"/>
+          </a:xfrm>
+          <a:prstGeom prst="ellipse">
+            <a:avLst/>
+          </a:prstGeom>
+          <a:solidFill>
+            <a:srgbClr val="475569"/>
+          </a:solidFill>
+          <a:ln w="7620">
+            <a:solidFill>
+              <a:srgbClr val="111827"/>
+            </a:solidFill>
+          </a:ln>
+        </p:spPr>
+        <p:style>
+          <a:lnRef idx="1">
+            <a:schemeClr val="accent1"/>
+          </a:lnRef>
+          <a:fillRef idx="3">
+            <a:schemeClr val="accent1"/>
+          </a:fillRef>
+          <a:effectRef idx="2">
+            <a:schemeClr val="accent1"/>
+          </a:effectRef>
+          <a:fontRef idx="minor">
+            <a:schemeClr val="lt1"/>
+          </a:fontRef>
+        </p:style>
+        <p:txBody>
+          <a:bodyPr rtlCol="0" anchor="ctr"/>
+          <a:lstStyle/>
+          <a:p>
+            <a:pPr algn="ctr"/>
+          </a:p>
+        </p:txBody>
+      </p:sp>
+      <p:sp>
+        <p:nvSpPr>
+          <p:cNvPr id="27" name="Oval 26"/>
+          <p:cNvSpPr/>
+          <p:nvPr/>
+        </p:nvSpPr>
+        <p:spPr>
+          <a:xfrm>
+            <a:off x="9235440" y="4392777"/>
+            <a:ext cx="854964" cy="590702"/>
+          </a:xfrm>
+          <a:prstGeom prst="ellipse">
+            <a:avLst/>
+          </a:prstGeom>
+          <a:solidFill>
+            <a:srgbClr val="FCD116"/>
+          </a:solidFill>
+          <a:ln w="10160">
+            <a:solidFill>
+              <a:srgbClr val="D90000"/>
+            </a:solidFill>
+          </a:ln>
+        </p:spPr>
+        <p:style>
+          <a:lnRef idx="1">
+            <a:schemeClr val="accent1"/>
+          </a:lnRef>
+          <a:fillRef idx="3">
+            <a:schemeClr val="accent1"/>
+          </a:fillRef>
+          <a:effectRef idx="2">
+            <a:schemeClr val="accent1"/>
+          </a:effectRef>
+          <a:fontRef idx="minor">
+            <a:schemeClr val="lt1"/>
+          </a:fontRef>
+        </p:style>
+        <p:txBody>
+          <a:bodyPr rtlCol="0" anchor="ctr"/>
+          <a:lstStyle/>
+          <a:p>
+            <a:pPr algn="ctr"/>
+          </a:p>
+        </p:txBody>
+      </p:sp>
+      <p:sp>
+        <p:nvSpPr>
+          <p:cNvPr id="28" name="Rounded Rectangle 27"/>
+          <p:cNvSpPr/>
+          <p:nvPr/>
+        </p:nvSpPr>
+        <p:spPr>
+          <a:xfrm>
+            <a:off x="1645919" y="5705856"/>
+            <a:ext cx="2758440" cy="713232"/>
+          </a:xfrm>
+          <a:prstGeom prst="roundRect">
+            <a:avLst/>
+          </a:prstGeom>
+          <a:solidFill>
+            <a:srgbClr val="FFFFFF"/>
+          </a:solidFill>
+          <a:ln w="11430">
+            <a:solidFill>
+              <a:srgbClr val="1B7F3A"/>
+            </a:solidFill>
+          </a:ln>
+        </p:spPr>
+        <p:style>
+          <a:lnRef idx="1">
+            <a:schemeClr val="accent1"/>
+          </a:lnRef>
+          <a:fillRef idx="3">
+            <a:schemeClr val="accent1"/>
+          </a:fillRef>
+          <a:effectRef idx="2">
+            <a:schemeClr val="accent1"/>
+          </a:effectRef>
+          <a:fontRef idx="minor">
+            <a:schemeClr val="lt1"/>
+          </a:fontRef>
+        </p:style>
+        <p:txBody>
+          <a:bodyPr rtlCol="0" anchor="ctr"/>
+          <a:lstStyle/>
+          <a:p>
+            <a:pPr algn="ctr"/>
+          </a:p>
+        </p:txBody>
+      </p:sp>
+      <p:sp>
+        <p:nvSpPr>
+          <p:cNvPr id="29" name="TextBox 28"/>
           <p:cNvSpPr txBox="1"/>
           <p:nvPr/>
         </p:nvSpPr>
         <p:spPr>
           <a:xfrm>
-            <a:off x="4782312" y="3785616"/>
-            <a:ext cx="2697480" cy="402336"/>
+            <a:off x="1755648" y="5843016"/>
+            <a:ext cx="2538984" cy="329184"/>
           </a:xfrm>
           <a:prstGeom prst="rect">
             <a:avLst/>
@@ -9724,24 +11938,24 @@
       </p:sp>
       <p:sp>
         <p:nvSpPr>
-          <p:cNvPr id="16" name="Oval 15"/>
-          <p:cNvSpPr/>
-          <p:nvPr/>
-        </p:nvSpPr>
-        <p:spPr>
-          <a:xfrm>
-            <a:off x="4251959" y="4910328"/>
-            <a:ext cx="822960" cy="822960"/>
-          </a:xfrm>
-          <a:prstGeom prst="ellipse">
-            <a:avLst/>
-          </a:prstGeom>
-          <a:solidFill>
-            <a:srgbClr val="D90000"/>
-          </a:solidFill>
-          <a:ln w="13970">
+          <p:cNvPr id="30" name="Rounded Rectangle 29"/>
+          <p:cNvSpPr/>
+          <p:nvPr/>
+        </p:nvSpPr>
+        <p:spPr>
+          <a:xfrm>
+            <a:off x="4724400" y="5705856"/>
+            <a:ext cx="2758440" cy="713232"/>
+          </a:xfrm>
+          <a:prstGeom prst="roundRect">
+            <a:avLst/>
+          </a:prstGeom>
+          <a:solidFill>
+            <a:srgbClr val="FFFFFF"/>
+          </a:solidFill>
+          <a:ln w="11430">
             <a:solidFill>
-              <a:srgbClr val="111827"/>
+              <a:srgbClr val="1B7F3A"/>
             </a:solidFill>
           </a:ln>
         </p:spPr>
@@ -9760,32 +11974,23 @@
           </a:fontRef>
         </p:style>
         <p:txBody>
-          <a:bodyPr rtlCol="0" anchor="ctr" wrap="square" lIns="101600" rIns="101600" tIns="38100" bIns="38100"/>
-          <a:lstStyle/>
-          <a:p>
-            <a:pPr algn="ctr"/>
-            <a:r>
-              <a:rPr sz="1300" b="1">
-                <a:solidFill>
-                  <a:srgbClr val="FFFFFF"/>
-                </a:solidFill>
-                <a:latin typeface="Arial"/>
-              </a:rPr>
-              <a:t>2</a:t>
-            </a:r>
-          </a:p>
-        </p:txBody>
-      </p:sp>
-      <p:sp>
-        <p:nvSpPr>
-          <p:cNvPr id="17" name="TextBox 16"/>
+          <a:bodyPr rtlCol="0" anchor="ctr"/>
+          <a:lstStyle/>
+          <a:p>
+            <a:pPr algn="ctr"/>
+          </a:p>
+        </p:txBody>
+      </p:sp>
+      <p:sp>
+        <p:nvSpPr>
+          <p:cNvPr id="31" name="TextBox 30"/>
           <p:cNvSpPr txBox="1"/>
           <p:nvPr/>
         </p:nvSpPr>
         <p:spPr>
           <a:xfrm>
-            <a:off x="3319271" y="5843016"/>
-            <a:ext cx="2697480" cy="402336"/>
+            <a:off x="4834128" y="5843016"/>
+            <a:ext cx="2538984" cy="329184"/>
           </a:xfrm>
           <a:prstGeom prst="rect">
             <a:avLst/>
@@ -9813,24 +12018,24 @@
       </p:sp>
       <p:sp>
         <p:nvSpPr>
-          <p:cNvPr id="18" name="Oval 17"/>
-          <p:cNvSpPr/>
-          <p:nvPr/>
-        </p:nvSpPr>
-        <p:spPr>
-          <a:xfrm>
-            <a:off x="7178040" y="4910328"/>
-            <a:ext cx="822960" cy="822960"/>
-          </a:xfrm>
-          <a:prstGeom prst="ellipse">
-            <a:avLst/>
-          </a:prstGeom>
-          <a:solidFill>
-            <a:srgbClr val="1B7F3A"/>
-          </a:solidFill>
-          <a:ln w="13970">
+          <p:cNvPr id="32" name="Rounded Rectangle 31"/>
+          <p:cNvSpPr/>
+          <p:nvPr/>
+        </p:nvSpPr>
+        <p:spPr>
+          <a:xfrm>
+            <a:off x="7802880" y="5705856"/>
+            <a:ext cx="2758440" cy="713232"/>
+          </a:xfrm>
+          <a:prstGeom prst="roundRect">
+            <a:avLst/>
+          </a:prstGeom>
+          <a:solidFill>
+            <a:srgbClr val="FFFFFF"/>
+          </a:solidFill>
+          <a:ln w="11430">
             <a:solidFill>
-              <a:srgbClr val="111827"/>
+              <a:srgbClr val="1B7F3A"/>
             </a:solidFill>
           </a:ln>
         </p:spPr>
@@ -9849,32 +12054,23 @@
           </a:fontRef>
         </p:style>
         <p:txBody>
-          <a:bodyPr rtlCol="0" anchor="ctr" wrap="square" lIns="101600" rIns="101600" tIns="38100" bIns="38100"/>
-          <a:lstStyle/>
-          <a:p>
-            <a:pPr algn="ctr"/>
-            <a:r>
-              <a:rPr sz="1300" b="1">
-                <a:solidFill>
-                  <a:srgbClr val="FFFFFF"/>
-                </a:solidFill>
-                <a:latin typeface="Arial"/>
-              </a:rPr>
-              <a:t>3</a:t>
-            </a:r>
-          </a:p>
-        </p:txBody>
-      </p:sp>
-      <p:sp>
-        <p:nvSpPr>
-          <p:cNvPr id="19" name="TextBox 18"/>
+          <a:bodyPr rtlCol="0" anchor="ctr"/>
+          <a:lstStyle/>
+          <a:p>
+            <a:pPr algn="ctr"/>
+          </a:p>
+        </p:txBody>
+      </p:sp>
+      <p:sp>
+        <p:nvSpPr>
+          <p:cNvPr id="33" name="TextBox 32"/>
           <p:cNvSpPr txBox="1"/>
           <p:nvPr/>
         </p:nvSpPr>
         <p:spPr>
           <a:xfrm>
-            <a:off x="6245352" y="5843016"/>
-            <a:ext cx="2697480" cy="402336"/>
+            <a:off x="7912608" y="5843016"/>
+            <a:ext cx="2538984" cy="329184"/>
           </a:xfrm>
           <a:prstGeom prst="rect">
             <a:avLst/>
@@ -9902,7 +12098,7 @@
       </p:sp>
       <p:sp>
         <p:nvSpPr>
-          <p:cNvPr id="20" name="Rounded Rectangle 19"/>
+          <p:cNvPr id="34" name="Rounded Rectangle 33"/>
           <p:cNvSpPr/>
           <p:nvPr/>
         </p:nvSpPr>
@@ -9947,7 +12143,7 @@
       </p:sp>
       <p:sp>
         <p:nvSpPr>
-          <p:cNvPr id="21" name="TextBox 20"/>
+          <p:cNvPr id="35" name="TextBox 34"/>
           <p:cNvSpPr txBox="1"/>
           <p:nvPr/>
         </p:nvSpPr>
@@ -9982,7 +12178,7 @@
       </p:sp>
       <p:sp>
         <p:nvSpPr>
-          <p:cNvPr id="22" name="TextBox 21"/>
+          <p:cNvPr id="36" name="TextBox 35"/>
           <p:cNvSpPr txBox="1"/>
           <p:nvPr/>
         </p:nvSpPr>
